--- a/毕设/毕设答辩.pptx
+++ b/毕设/毕设答辩.pptx
@@ -5,26 +5,25 @@
     <p:sldMasterId id="2147483648" r:id="rId1"/>
   </p:sldMasterIdLst>
   <p:notesMasterIdLst>
-    <p:notesMasterId r:id="rId14"/>
+    <p:notesMasterId r:id="rId13"/>
   </p:notesMasterIdLst>
   <p:sldIdLst>
     <p:sldId id="340" r:id="rId2"/>
     <p:sldId id="549" r:id="rId3"/>
     <p:sldId id="548" r:id="rId4"/>
     <p:sldId id="552" r:id="rId5"/>
-    <p:sldId id="551" r:id="rId6"/>
-    <p:sldId id="554" r:id="rId7"/>
+    <p:sldId id="554" r:id="rId6"/>
+    <p:sldId id="551" r:id="rId7"/>
     <p:sldId id="544" r:id="rId8"/>
-    <p:sldId id="553" r:id="rId9"/>
-    <p:sldId id="545" r:id="rId10"/>
-    <p:sldId id="261" r:id="rId11"/>
-    <p:sldId id="532" r:id="rId12"/>
-    <p:sldId id="547" r:id="rId13"/>
+    <p:sldId id="545" r:id="rId9"/>
+    <p:sldId id="261" r:id="rId10"/>
+    <p:sldId id="532" r:id="rId11"/>
+    <p:sldId id="547" r:id="rId12"/>
   </p:sldIdLst>
   <p:sldSz cx="12192000" cy="6858000"/>
   <p:notesSz cx="6858000" cy="9144000"/>
   <p:custDataLst>
-    <p:tags r:id="rId15"/>
+    <p:tags r:id="rId14"/>
   </p:custDataLst>
   <p:defaultTextStyle>
     <a:defPPr>
@@ -130,10 +129,9 @@
             <p14:sldId id="549"/>
             <p14:sldId id="548"/>
             <p14:sldId id="552"/>
+            <p14:sldId id="554"/>
             <p14:sldId id="551"/>
-            <p14:sldId id="554"/>
             <p14:sldId id="544"/>
-            <p14:sldId id="553"/>
             <p14:sldId id="545"/>
             <p14:sldId id="261"/>
             <p14:sldId id="532"/>
@@ -688,33 +686,22 @@
           <a:bodyPr/>
           <a:lstStyle/>
           <a:p>
-            <a:r>
-              <a:rPr kumimoji="1" lang="en-US" altLang="zh-CN" dirty="0"/>
-              <a:t>Thanks</a:t>
-            </a:r>
-            <a:r>
-              <a:rPr kumimoji="1" lang="zh-CN" altLang="en-US" dirty="0"/>
-              <a:t> </a:t>
-            </a:r>
-            <a:r>
-              <a:rPr kumimoji="1" lang="en-US" altLang="zh-CN" dirty="0"/>
-              <a:t>for</a:t>
-            </a:r>
-            <a:r>
-              <a:rPr kumimoji="1" lang="zh-CN" altLang="en-US" dirty="0"/>
-              <a:t> </a:t>
-            </a:r>
-            <a:r>
-              <a:rPr kumimoji="1" lang="en-US" altLang="zh-CN" dirty="0"/>
-              <a:t>listening!</a:t>
-            </a:r>
-            <a:endParaRPr kumimoji="1" lang="zh-CN" altLang="en-US" dirty="0"/>
-          </a:p>
-        </p:txBody>
-      </p:sp>
-      <p:sp>
-        <p:nvSpPr>
-          <p:cNvPr id="4" name="幻灯片编号占位符 3"/>
+            <a:pPr indent="0" algn="just">
+              <a:spcAft>
+                <a:spcPts val="1200"/>
+              </a:spcAft>
+              <a:buFont typeface="Arial" panose="020B0604020202020204" pitchFamily="34" charset="0"/>
+              <a:buNone/>
+            </a:pPr>
+            <a:endParaRPr lang="zh-CN" altLang="en-US" sz="1200" dirty="0">
+              <a:latin typeface="Constantia" panose="02030602050306030303" pitchFamily="18" charset="0"/>
+            </a:endParaRPr>
+          </a:p>
+        </p:txBody>
+      </p:sp>
+      <p:sp>
+        <p:nvSpPr>
+          <p:cNvPr id="4" name="灯片编号占位符 3"/>
           <p:cNvSpPr>
             <a:spLocks noGrp="1"/>
           </p:cNvSpPr>
@@ -727,11 +714,11 @@
           <a:bodyPr/>
           <a:lstStyle/>
           <a:p>
-            <a:fld id="{94B1677A-EDDD-4DA4-9464-453B9AC95701}" type="slidenum">
-              <a:rPr lang="zh-CN" altLang="en-US" smtClean="0"/>
+            <a:fld id="{E4FF5570-FE69-4FDF-99DA-8CDE436443CD}" type="slidenum">
+              <a:rPr lang="en-US" smtClean="0"/>
               <a:t>10</a:t>
             </a:fld>
-            <a:endParaRPr lang="zh-CN" altLang="en-US"/>
+            <a:endParaRPr lang="en-US" dirty="0"/>
           </a:p>
         </p:txBody>
       </p:sp>
@@ -818,94 +805,6 @@
             <a:fld id="{E4FF5570-FE69-4FDF-99DA-8CDE436443CD}" type="slidenum">
               <a:rPr lang="en-US" smtClean="0"/>
               <a:t>11</a:t>
-            </a:fld>
-            <a:endParaRPr lang="en-US" dirty="0"/>
-          </a:p>
-        </p:txBody>
-      </p:sp>
-    </p:spTree>
-  </p:cSld>
-  <p:clrMapOvr>
-    <a:masterClrMapping/>
-  </p:clrMapOvr>
-</p:notes>
-</file>
-
-<file path=ppt/notesSlides/notesSlide12.xml><?xml version="1.0" encoding="utf-8"?>
-<p:notes xmlns:a="http://schemas.openxmlformats.org/drawingml/2006/main" xmlns:r="http://schemas.openxmlformats.org/officeDocument/2006/relationships" xmlns:p="http://schemas.openxmlformats.org/presentationml/2006/main">
-  <p:cSld>
-    <p:spTree>
-      <p:nvGrpSpPr>
-        <p:cNvPr id="1" name=""/>
-        <p:cNvGrpSpPr/>
-        <p:nvPr/>
-      </p:nvGrpSpPr>
-      <p:grpSpPr>
-        <a:xfrm>
-          <a:off x="0" y="0"/>
-          <a:ext cx="0" cy="0"/>
-          <a:chOff x="0" y="0"/>
-          <a:chExt cx="0" cy="0"/>
-        </a:xfrm>
-      </p:grpSpPr>
-      <p:sp>
-        <p:nvSpPr>
-          <p:cNvPr id="2" name="幻灯片图像占位符 1"/>
-          <p:cNvSpPr>
-            <a:spLocks noGrp="1" noRot="1" noChangeAspect="1"/>
-          </p:cNvSpPr>
-          <p:nvPr>
-            <p:ph type="sldImg"/>
-          </p:nvPr>
-        </p:nvSpPr>
-        <p:spPr/>
-      </p:sp>
-      <p:sp>
-        <p:nvSpPr>
-          <p:cNvPr id="3" name="备注占位符 2"/>
-          <p:cNvSpPr>
-            <a:spLocks noGrp="1"/>
-          </p:cNvSpPr>
-          <p:nvPr>
-            <p:ph type="body" idx="1"/>
-          </p:nvPr>
-        </p:nvSpPr>
-        <p:spPr/>
-        <p:txBody>
-          <a:bodyPr/>
-          <a:lstStyle/>
-          <a:p>
-            <a:pPr indent="0" algn="just">
-              <a:spcAft>
-                <a:spcPts val="1200"/>
-              </a:spcAft>
-              <a:buFont typeface="Arial" panose="020B0604020202020204" pitchFamily="34" charset="0"/>
-              <a:buNone/>
-            </a:pPr>
-            <a:endParaRPr lang="zh-CN" altLang="en-US" sz="1200" dirty="0">
-              <a:latin typeface="Constantia" panose="02030602050306030303" pitchFamily="18" charset="0"/>
-            </a:endParaRPr>
-          </a:p>
-        </p:txBody>
-      </p:sp>
-      <p:sp>
-        <p:nvSpPr>
-          <p:cNvPr id="4" name="灯片编号占位符 3"/>
-          <p:cNvSpPr>
-            <a:spLocks noGrp="1"/>
-          </p:cNvSpPr>
-          <p:nvPr>
-            <p:ph type="sldNum" sz="quarter" idx="10"/>
-          </p:nvPr>
-        </p:nvSpPr>
-        <p:spPr/>
-        <p:txBody>
-          <a:bodyPr/>
-          <a:lstStyle/>
-          <a:p>
-            <a:fld id="{E4FF5570-FE69-4FDF-99DA-8CDE436443CD}" type="slidenum">
-              <a:rPr lang="en-US" smtClean="0"/>
-              <a:t>12</a:t>
             </a:fld>
             <a:endParaRPr lang="en-US" dirty="0"/>
           </a:p>
@@ -2081,7 +1980,7 @@
     </p:spTree>
     <p:extLst>
       <p:ext uri="{BB962C8B-B14F-4D97-AF65-F5344CB8AC3E}">
-        <p14:creationId xmlns:p14="http://schemas.microsoft.com/office/powerpoint/2010/main" val="1853051541"/>
+        <p14:creationId xmlns:p14="http://schemas.microsoft.com/office/powerpoint/2010/main" val="4210625985"/>
       </p:ext>
     </p:extLst>
   </p:cSld>
@@ -2099,7 +1998,7 @@
         <p:cNvPr id="1" name="">
           <a:extLst>
             <a:ext uri="{FF2B5EF4-FFF2-40B4-BE49-F238E27FC236}">
-              <a16:creationId xmlns:a16="http://schemas.microsoft.com/office/drawing/2014/main" id="{CD0C5EF3-11C9-D6B3-0F52-B4277C6EFA0E}"/>
+              <a16:creationId xmlns:a16="http://schemas.microsoft.com/office/drawing/2014/main" id="{3419B895-C9E7-A88C-3BF8-81F9E268535F}"/>
             </a:ext>
           </a:extLst>
         </p:cNvPr>
@@ -2119,7 +2018,7 @@
           <p:cNvPr id="2" name="幻灯片图像占位符 1">
             <a:extLst>
               <a:ext uri="{FF2B5EF4-FFF2-40B4-BE49-F238E27FC236}">
-                <a16:creationId xmlns:a16="http://schemas.microsoft.com/office/drawing/2014/main" id="{7A590BC3-B260-8515-1FE4-28298930897F}"/>
+                <a16:creationId xmlns:a16="http://schemas.microsoft.com/office/drawing/2014/main" id="{CA0035CC-CA4E-6838-3CC4-0DF0ED8FF82C}"/>
               </a:ext>
             </a:extLst>
           </p:cNvPr>
@@ -2137,7 +2036,7 @@
           <p:cNvPr id="3" name="备注占位符 2">
             <a:extLst>
               <a:ext uri="{FF2B5EF4-FFF2-40B4-BE49-F238E27FC236}">
-                <a16:creationId xmlns:a16="http://schemas.microsoft.com/office/drawing/2014/main" id="{EDE6EB02-350D-0333-40E4-A9DA232A84D1}"/>
+                <a16:creationId xmlns:a16="http://schemas.microsoft.com/office/drawing/2014/main" id="{A6C1E2C6-ECF4-23C5-A84F-5FE0BE0EC213}"/>
               </a:ext>
             </a:extLst>
           </p:cNvPr>
@@ -2324,7 +2223,7 @@
           <p:cNvPr id="4" name="灯片编号占位符 3">
             <a:extLst>
               <a:ext uri="{FF2B5EF4-FFF2-40B4-BE49-F238E27FC236}">
-                <a16:creationId xmlns:a16="http://schemas.microsoft.com/office/drawing/2014/main" id="{752EB2F3-C9F4-40C9-D4C6-45CF66EC62A8}"/>
+                <a16:creationId xmlns:a16="http://schemas.microsoft.com/office/drawing/2014/main" id="{8278F522-309B-8225-6AAD-65AFDC5846A1}"/>
               </a:ext>
             </a:extLst>
           </p:cNvPr>
@@ -2351,7 +2250,7 @@
     </p:spTree>
     <p:extLst>
       <p:ext uri="{BB962C8B-B14F-4D97-AF65-F5344CB8AC3E}">
-        <p14:creationId xmlns:p14="http://schemas.microsoft.com/office/powerpoint/2010/main" val="2946095586"/>
+        <p14:creationId xmlns:p14="http://schemas.microsoft.com/office/powerpoint/2010/main" val="1853051541"/>
       </p:ext>
     </p:extLst>
   </p:cSld>
@@ -2551,13 +2450,7 @@
   <p:cSld>
     <p:spTree>
       <p:nvGrpSpPr>
-        <p:cNvPr id="1" name="">
-          <a:extLst>
-            <a:ext uri="{FF2B5EF4-FFF2-40B4-BE49-F238E27FC236}">
-              <a16:creationId xmlns:a16="http://schemas.microsoft.com/office/drawing/2014/main" id="{0BCA3B81-9CF4-6BFD-9CC0-DF88017BFD74}"/>
-            </a:ext>
-          </a:extLst>
-        </p:cNvPr>
+        <p:cNvPr id="1" name=""/>
         <p:cNvGrpSpPr/>
         <p:nvPr/>
       </p:nvGrpSpPr>
@@ -2571,13 +2464,7 @@
       </p:grpSpPr>
       <p:sp>
         <p:nvSpPr>
-          <p:cNvPr id="2" name="幻灯片图像占位符 1">
-            <a:extLst>
-              <a:ext uri="{FF2B5EF4-FFF2-40B4-BE49-F238E27FC236}">
-                <a16:creationId xmlns:a16="http://schemas.microsoft.com/office/drawing/2014/main" id="{88E87DA7-FA76-5271-BE95-15A8F1F5239F}"/>
-              </a:ext>
-            </a:extLst>
-          </p:cNvPr>
+          <p:cNvPr id="2" name="幻灯片图像占位符 1"/>
           <p:cNvSpPr>
             <a:spLocks noGrp="1" noRot="1" noChangeAspect="1"/>
           </p:cNvSpPr>
@@ -2589,13 +2476,7 @@
       </p:sp>
       <p:sp>
         <p:nvSpPr>
-          <p:cNvPr id="3" name="备注占位符 2">
-            <a:extLst>
-              <a:ext uri="{FF2B5EF4-FFF2-40B4-BE49-F238E27FC236}">
-                <a16:creationId xmlns:a16="http://schemas.microsoft.com/office/drawing/2014/main" id="{69DF0B2C-E52D-596D-6C67-2E27279B6177}"/>
-              </a:ext>
-            </a:extLst>
-          </p:cNvPr>
+          <p:cNvPr id="3" name="备注占位符 2"/>
           <p:cNvSpPr>
             <a:spLocks noGrp="1"/>
           </p:cNvSpPr>
@@ -2623,13 +2504,7 @@
       </p:sp>
       <p:sp>
         <p:nvSpPr>
-          <p:cNvPr id="4" name="灯片编号占位符 3">
-            <a:extLst>
-              <a:ext uri="{FF2B5EF4-FFF2-40B4-BE49-F238E27FC236}">
-                <a16:creationId xmlns:a16="http://schemas.microsoft.com/office/drawing/2014/main" id="{481D76E1-8033-610B-DF27-66AF877871DB}"/>
-              </a:ext>
-            </a:extLst>
-          </p:cNvPr>
+          <p:cNvPr id="4" name="灯片编号占位符 3"/>
           <p:cNvSpPr>
             <a:spLocks noGrp="1"/>
           </p:cNvSpPr>
@@ -2653,7 +2528,7 @@
     </p:spTree>
     <p:extLst>
       <p:ext uri="{BB962C8B-B14F-4D97-AF65-F5344CB8AC3E}">
-        <p14:creationId xmlns:p14="http://schemas.microsoft.com/office/powerpoint/2010/main" val="949241269"/>
+        <p14:creationId xmlns:p14="http://schemas.microsoft.com/office/powerpoint/2010/main" val="1442627471"/>
       </p:ext>
     </p:extLst>
   </p:cSld>
@@ -2707,22 +2582,33 @@
           <a:bodyPr/>
           <a:lstStyle/>
           <a:p>
-            <a:pPr indent="0" algn="just">
-              <a:spcAft>
-                <a:spcPts val="1200"/>
-              </a:spcAft>
-              <a:buFont typeface="Arial" panose="020B0604020202020204" pitchFamily="34" charset="0"/>
-              <a:buNone/>
-            </a:pPr>
-            <a:endParaRPr lang="zh-CN" altLang="en-US" sz="1200" dirty="0">
-              <a:latin typeface="Constantia" panose="02030602050306030303" pitchFamily="18" charset="0"/>
-            </a:endParaRPr>
-          </a:p>
-        </p:txBody>
-      </p:sp>
-      <p:sp>
-        <p:nvSpPr>
-          <p:cNvPr id="4" name="灯片编号占位符 3"/>
+            <a:r>
+              <a:rPr kumimoji="1" lang="en-US" altLang="zh-CN" dirty="0"/>
+              <a:t>Thanks</a:t>
+            </a:r>
+            <a:r>
+              <a:rPr kumimoji="1" lang="zh-CN" altLang="en-US" dirty="0"/>
+              <a:t> </a:t>
+            </a:r>
+            <a:r>
+              <a:rPr kumimoji="1" lang="en-US" altLang="zh-CN" dirty="0"/>
+              <a:t>for</a:t>
+            </a:r>
+            <a:r>
+              <a:rPr kumimoji="1" lang="zh-CN" altLang="en-US" dirty="0"/>
+              <a:t> </a:t>
+            </a:r>
+            <a:r>
+              <a:rPr kumimoji="1" lang="en-US" altLang="zh-CN" dirty="0"/>
+              <a:t>listening!</a:t>
+            </a:r>
+            <a:endParaRPr kumimoji="1" lang="zh-CN" altLang="en-US" dirty="0"/>
+          </a:p>
+        </p:txBody>
+      </p:sp>
+      <p:sp>
+        <p:nvSpPr>
+          <p:cNvPr id="4" name="幻灯片编号占位符 3"/>
           <p:cNvSpPr>
             <a:spLocks noGrp="1"/>
           </p:cNvSpPr>
@@ -2735,20 +2621,15 @@
           <a:bodyPr/>
           <a:lstStyle/>
           <a:p>
-            <a:fld id="{E4FF5570-FE69-4FDF-99DA-8CDE436443CD}" type="slidenum">
-              <a:rPr lang="en-US" smtClean="0"/>
+            <a:fld id="{94B1677A-EDDD-4DA4-9464-453B9AC95701}" type="slidenum">
+              <a:rPr lang="zh-CN" altLang="en-US" smtClean="0"/>
               <a:t>9</a:t>
             </a:fld>
-            <a:endParaRPr lang="en-US" dirty="0"/>
+            <a:endParaRPr lang="zh-CN" altLang="en-US"/>
           </a:p>
         </p:txBody>
       </p:sp>
     </p:spTree>
-    <p:extLst>
-      <p:ext uri="{BB962C8B-B14F-4D97-AF65-F5344CB8AC3E}">
-        <p14:creationId xmlns:p14="http://schemas.microsoft.com/office/powerpoint/2010/main" val="1442627471"/>
-      </p:ext>
-    </p:extLst>
   </p:cSld>
   <p:clrMapOvr>
     <a:masterClrMapping/>
@@ -6209,605 +6090,6 @@
       </p:grpSpPr>
       <p:sp>
         <p:nvSpPr>
-          <p:cNvPr id="21" name="文本框 20"/>
-          <p:cNvSpPr txBox="1"/>
-          <p:nvPr/>
-        </p:nvSpPr>
-        <p:spPr>
-          <a:xfrm>
-            <a:off x="8244849" y="4730406"/>
-            <a:ext cx="2099301" cy="1328569"/>
-          </a:xfrm>
-          <a:prstGeom prst="rect">
-            <a:avLst/>
-          </a:prstGeom>
-          <a:noFill/>
-        </p:spPr>
-        <p:txBody>
-          <a:bodyPr wrap="square" rtlCol="0">
-            <a:spAutoFit/>
-          </a:bodyPr>
-          <a:lstStyle/>
-          <a:p>
-            <a:pPr algn="ctr">
-              <a:lnSpc>
-                <a:spcPct val="90000"/>
-              </a:lnSpc>
-              <a:spcBef>
-                <a:spcPts val="1000"/>
-              </a:spcBef>
-              <a:defRPr/>
-            </a:pPr>
-            <a:r>
-              <a:rPr lang="en-US" altLang="zh-CN" sz="4000" b="1" dirty="0">
-                <a:solidFill>
-                  <a:srgbClr val="4747BA"/>
-                </a:solidFill>
-                <a:latin typeface="Constantia" panose="02030602050306030303" pitchFamily="18" charset="0"/>
-                <a:ea typeface="腾讯体 W3" panose="020C04030202040F0204" pitchFamily="34" charset="-122"/>
-                <a:cs typeface="Times" panose="02020603050405020304" pitchFamily="18" charset="0"/>
-              </a:rPr>
-              <a:t>Q&amp;A</a:t>
-            </a:r>
-          </a:p>
-          <a:p>
-            <a:pPr lvl="0" algn="ctr">
-              <a:lnSpc>
-                <a:spcPct val="90000"/>
-              </a:lnSpc>
-              <a:spcBef>
-                <a:spcPts val="1000"/>
-              </a:spcBef>
-              <a:defRPr/>
-            </a:pPr>
-            <a:r>
-              <a:rPr lang="en-US" altLang="zh-CN" sz="4000" b="1" dirty="0">
-                <a:solidFill>
-                  <a:srgbClr val="4747BA"/>
-                </a:solidFill>
-                <a:latin typeface="Constantia" panose="02030602050306030303" pitchFamily="18" charset="0"/>
-                <a:ea typeface="腾讯体 W3" panose="020C04030202040F0204" pitchFamily="34" charset="-122"/>
-                <a:cs typeface="Times" panose="02020603050405020304" pitchFamily="18" charset="0"/>
-              </a:rPr>
-              <a:t>Thanks</a:t>
-            </a:r>
-            <a:r>
-              <a:rPr lang="zh-CN" altLang="en-US" sz="4000" b="1" dirty="0">
-                <a:solidFill>
-                  <a:srgbClr val="4747BA"/>
-                </a:solidFill>
-                <a:latin typeface="Constantia" panose="02030602050306030303" pitchFamily="18" charset="0"/>
-                <a:ea typeface="腾讯体 W3" panose="020C04030202040F0204" pitchFamily="34" charset="-122"/>
-                <a:cs typeface="Times" panose="02020603050405020304" pitchFamily="18" charset="0"/>
-              </a:rPr>
-              <a:t>！</a:t>
-            </a:r>
-          </a:p>
-        </p:txBody>
-      </p:sp>
-      <p:sp>
-        <p:nvSpPr>
-          <p:cNvPr id="8" name="矩形: 圆角 7"/>
-          <p:cNvSpPr/>
-          <p:nvPr/>
-        </p:nvSpPr>
-        <p:spPr>
-          <a:xfrm rot="2755966">
-            <a:off x="4146517" y="3347706"/>
-            <a:ext cx="1613489" cy="1613489"/>
-          </a:xfrm>
-          <a:prstGeom prst="roundRect">
-            <a:avLst/>
-          </a:prstGeom>
-          <a:solidFill>
-            <a:srgbClr val="8484D1"/>
-          </a:solidFill>
-          <a:ln>
-            <a:noFill/>
-          </a:ln>
-          <a:effectLst>
-            <a:outerShdw blurRad="88900" dist="50800" dir="8100000" sx="101000" sy="101000" algn="tr" rotWithShape="0">
-              <a:prstClr val="black">
-                <a:alpha val="40000"/>
-              </a:prstClr>
-            </a:outerShdw>
-          </a:effectLst>
-        </p:spPr>
-        <p:style>
-          <a:lnRef idx="2">
-            <a:schemeClr val="accent1">
-              <a:shade val="50000"/>
-            </a:schemeClr>
-          </a:lnRef>
-          <a:fillRef idx="1">
-            <a:schemeClr val="accent1"/>
-          </a:fillRef>
-          <a:effectRef idx="0">
-            <a:schemeClr val="accent1"/>
-          </a:effectRef>
-          <a:fontRef idx="minor">
-            <a:schemeClr val="lt1"/>
-          </a:fontRef>
-        </p:style>
-        <p:txBody>
-          <a:bodyPr rtlCol="0" anchor="ctr"/>
-          <a:lstStyle/>
-          <a:p>
-            <a:pPr algn="ctr"/>
-            <a:endParaRPr lang="zh-CN" altLang="en-US"/>
-          </a:p>
-        </p:txBody>
-      </p:sp>
-      <p:sp>
-        <p:nvSpPr>
-          <p:cNvPr id="9" name="矩形: 圆角 8"/>
-          <p:cNvSpPr/>
-          <p:nvPr/>
-        </p:nvSpPr>
-        <p:spPr>
-          <a:xfrm rot="2755966">
-            <a:off x="2770276" y="966707"/>
-            <a:ext cx="1613489" cy="1613489"/>
-          </a:xfrm>
-          <a:prstGeom prst="roundRect">
-            <a:avLst/>
-          </a:prstGeom>
-          <a:solidFill>
-            <a:srgbClr val="8484D1"/>
-          </a:solidFill>
-          <a:ln>
-            <a:noFill/>
-          </a:ln>
-          <a:effectLst>
-            <a:outerShdw blurRad="88900" dist="50800" dir="8100000" sx="101000" sy="101000" algn="tr" rotWithShape="0">
-              <a:prstClr val="black">
-                <a:alpha val="40000"/>
-              </a:prstClr>
-            </a:outerShdw>
-          </a:effectLst>
-        </p:spPr>
-        <p:style>
-          <a:lnRef idx="2">
-            <a:schemeClr val="accent1">
-              <a:shade val="50000"/>
-            </a:schemeClr>
-          </a:lnRef>
-          <a:fillRef idx="1">
-            <a:schemeClr val="accent1"/>
-          </a:fillRef>
-          <a:effectRef idx="0">
-            <a:schemeClr val="accent1"/>
-          </a:effectRef>
-          <a:fontRef idx="minor">
-            <a:schemeClr val="lt1"/>
-          </a:fontRef>
-        </p:style>
-        <p:txBody>
-          <a:bodyPr rtlCol="0" anchor="ctr"/>
-          <a:lstStyle/>
-          <a:p>
-            <a:pPr algn="ctr"/>
-            <a:endParaRPr lang="zh-CN" altLang="en-US"/>
-          </a:p>
-        </p:txBody>
-      </p:sp>
-      <p:sp>
-        <p:nvSpPr>
-          <p:cNvPr id="10" name="矩形: 圆角 9"/>
-          <p:cNvSpPr/>
-          <p:nvPr/>
-        </p:nvSpPr>
-        <p:spPr>
-          <a:xfrm rot="2755966">
-            <a:off x="4586763" y="2029472"/>
-            <a:ext cx="732996" cy="732996"/>
-          </a:xfrm>
-          <a:prstGeom prst="roundRect">
-            <a:avLst/>
-          </a:prstGeom>
-          <a:solidFill>
-            <a:srgbClr val="ADADE0"/>
-          </a:solidFill>
-          <a:ln>
-            <a:noFill/>
-          </a:ln>
-          <a:effectLst>
-            <a:outerShdw blurRad="88900" dist="50800" dir="8100000" sx="101000" sy="101000" algn="tr" rotWithShape="0">
-              <a:prstClr val="black">
-                <a:alpha val="40000"/>
-              </a:prstClr>
-            </a:outerShdw>
-          </a:effectLst>
-        </p:spPr>
-        <p:style>
-          <a:lnRef idx="2">
-            <a:schemeClr val="accent1">
-              <a:shade val="50000"/>
-            </a:schemeClr>
-          </a:lnRef>
-          <a:fillRef idx="1">
-            <a:schemeClr val="accent1"/>
-          </a:fillRef>
-          <a:effectRef idx="0">
-            <a:schemeClr val="accent1"/>
-          </a:effectRef>
-          <a:fontRef idx="minor">
-            <a:schemeClr val="lt1"/>
-          </a:fontRef>
-        </p:style>
-        <p:txBody>
-          <a:bodyPr rtlCol="0" anchor="ctr"/>
-          <a:lstStyle/>
-          <a:p>
-            <a:pPr algn="ctr"/>
-            <a:endParaRPr lang="zh-CN" altLang="en-US"/>
-          </a:p>
-        </p:txBody>
-      </p:sp>
-      <p:sp>
-        <p:nvSpPr>
-          <p:cNvPr id="11" name="矩形: 圆角 10"/>
-          <p:cNvSpPr/>
-          <p:nvPr/>
-        </p:nvSpPr>
-        <p:spPr>
-          <a:xfrm rot="2755966">
-            <a:off x="1415554" y="2470682"/>
-            <a:ext cx="3134556" cy="3134556"/>
-          </a:xfrm>
-          <a:prstGeom prst="roundRect">
-            <a:avLst/>
-          </a:prstGeom>
-          <a:blipFill dpi="0" rotWithShape="0">
-            <a:blip r:embed="rId3"/>
-            <a:srcRect/>
-            <a:stretch>
-              <a:fillRect/>
-            </a:stretch>
-          </a:blipFill>
-          <a:ln>
-            <a:noFill/>
-          </a:ln>
-          <a:effectLst>
-            <a:outerShdw blurRad="114300" dist="50800" dir="7800000" sx="101000" sy="101000" algn="tr" rotWithShape="0">
-              <a:prstClr val="black">
-                <a:alpha val="64000"/>
-              </a:prstClr>
-            </a:outerShdw>
-          </a:effectLst>
-        </p:spPr>
-        <p:style>
-          <a:lnRef idx="2">
-            <a:schemeClr val="accent1">
-              <a:shade val="50000"/>
-            </a:schemeClr>
-          </a:lnRef>
-          <a:fillRef idx="1">
-            <a:schemeClr val="accent1"/>
-          </a:fillRef>
-          <a:effectRef idx="0">
-            <a:schemeClr val="accent1"/>
-          </a:effectRef>
-          <a:fontRef idx="minor">
-            <a:schemeClr val="lt1"/>
-          </a:fontRef>
-        </p:style>
-        <p:txBody>
-          <a:bodyPr rtlCol="0" anchor="ctr"/>
-          <a:lstStyle/>
-          <a:p>
-            <a:pPr algn="ctr"/>
-            <a:endParaRPr lang="zh-CN" altLang="en-US" dirty="0"/>
-          </a:p>
-        </p:txBody>
-      </p:sp>
-      <p:sp>
-        <p:nvSpPr>
-          <p:cNvPr id="12" name="矩形: 圆角 11"/>
-          <p:cNvSpPr/>
-          <p:nvPr/>
-        </p:nvSpPr>
-        <p:spPr>
-          <a:xfrm rot="2755966">
-            <a:off x="5633126" y="2433704"/>
-            <a:ext cx="1685894" cy="1685894"/>
-          </a:xfrm>
-          <a:prstGeom prst="roundRect">
-            <a:avLst/>
-          </a:prstGeom>
-          <a:solidFill>
-            <a:srgbClr val="4747BA"/>
-          </a:solidFill>
-          <a:ln>
-            <a:noFill/>
-          </a:ln>
-          <a:effectLst>
-            <a:outerShdw blurRad="88900" dist="50800" dir="8100000" sx="101000" sy="101000" algn="tr" rotWithShape="0">
-              <a:prstClr val="black">
-                <a:alpha val="40000"/>
-              </a:prstClr>
-            </a:outerShdw>
-          </a:effectLst>
-        </p:spPr>
-        <p:style>
-          <a:lnRef idx="2">
-            <a:schemeClr val="accent1">
-              <a:shade val="50000"/>
-            </a:schemeClr>
-          </a:lnRef>
-          <a:fillRef idx="1">
-            <a:schemeClr val="accent1"/>
-          </a:fillRef>
-          <a:effectRef idx="0">
-            <a:schemeClr val="accent1"/>
-          </a:effectRef>
-          <a:fontRef idx="minor">
-            <a:schemeClr val="lt1"/>
-          </a:fontRef>
-        </p:style>
-        <p:txBody>
-          <a:bodyPr rtlCol="0" anchor="ctr"/>
-          <a:lstStyle/>
-          <a:p>
-            <a:pPr algn="ctr"/>
-            <a:endParaRPr lang="zh-CN" altLang="en-US" dirty="0"/>
-          </a:p>
-        </p:txBody>
-      </p:sp>
-      <p:sp>
-        <p:nvSpPr>
-          <p:cNvPr id="15" name="矩形: 圆角 14"/>
-          <p:cNvSpPr/>
-          <p:nvPr/>
-        </p:nvSpPr>
-        <p:spPr>
-          <a:xfrm rot="2755966">
-            <a:off x="3965400" y="5546431"/>
-            <a:ext cx="732996" cy="732996"/>
-          </a:xfrm>
-          <a:prstGeom prst="roundRect">
-            <a:avLst/>
-          </a:prstGeom>
-          <a:solidFill>
-            <a:srgbClr val="ADADE0"/>
-          </a:solidFill>
-          <a:ln>
-            <a:noFill/>
-          </a:ln>
-          <a:effectLst>
-            <a:outerShdw blurRad="88900" dist="50800" dir="8100000" sx="101000" sy="101000" algn="tr" rotWithShape="0">
-              <a:prstClr val="black">
-                <a:alpha val="40000"/>
-              </a:prstClr>
-            </a:outerShdw>
-          </a:effectLst>
-        </p:spPr>
-        <p:style>
-          <a:lnRef idx="2">
-            <a:schemeClr val="accent1">
-              <a:shade val="50000"/>
-            </a:schemeClr>
-          </a:lnRef>
-          <a:fillRef idx="1">
-            <a:schemeClr val="accent1"/>
-          </a:fillRef>
-          <a:effectRef idx="0">
-            <a:schemeClr val="accent1"/>
-          </a:effectRef>
-          <a:fontRef idx="minor">
-            <a:schemeClr val="lt1"/>
-          </a:fontRef>
-        </p:style>
-        <p:txBody>
-          <a:bodyPr rtlCol="0" anchor="ctr"/>
-          <a:lstStyle/>
-          <a:p>
-            <a:pPr algn="ctr"/>
-            <a:endParaRPr lang="zh-CN" altLang="en-US"/>
-          </a:p>
-        </p:txBody>
-      </p:sp>
-      <p:sp>
-        <p:nvSpPr>
-          <p:cNvPr id="16" name="矩形: 圆角 15"/>
-          <p:cNvSpPr/>
-          <p:nvPr/>
-        </p:nvSpPr>
-        <p:spPr>
-          <a:xfrm rot="2755966">
-            <a:off x="5089423" y="716157"/>
-            <a:ext cx="1134056" cy="1134056"/>
-          </a:xfrm>
-          <a:prstGeom prst="roundRect">
-            <a:avLst/>
-          </a:prstGeom>
-          <a:solidFill>
-            <a:srgbClr val="4747BA"/>
-          </a:solidFill>
-          <a:ln>
-            <a:noFill/>
-          </a:ln>
-          <a:effectLst>
-            <a:outerShdw blurRad="88900" dist="50800" dir="8100000" sx="101000" sy="101000" algn="tr" rotWithShape="0">
-              <a:prstClr val="black">
-                <a:alpha val="40000"/>
-              </a:prstClr>
-            </a:outerShdw>
-          </a:effectLst>
-        </p:spPr>
-        <p:style>
-          <a:lnRef idx="2">
-            <a:schemeClr val="accent1">
-              <a:shade val="50000"/>
-            </a:schemeClr>
-          </a:lnRef>
-          <a:fillRef idx="1">
-            <a:schemeClr val="accent1"/>
-          </a:fillRef>
-          <a:effectRef idx="0">
-            <a:schemeClr val="accent1"/>
-          </a:effectRef>
-          <a:fontRef idx="minor">
-            <a:schemeClr val="lt1"/>
-          </a:fontRef>
-        </p:style>
-        <p:txBody>
-          <a:bodyPr rtlCol="0" anchor="ctr"/>
-          <a:lstStyle/>
-          <a:p>
-            <a:pPr algn="ctr"/>
-            <a:endParaRPr lang="zh-CN" altLang="en-US"/>
-          </a:p>
-        </p:txBody>
-      </p:sp>
-      <p:sp>
-        <p:nvSpPr>
-          <p:cNvPr id="19" name="矩形: 圆角 18"/>
-          <p:cNvSpPr/>
-          <p:nvPr/>
-        </p:nvSpPr>
-        <p:spPr>
-          <a:xfrm rot="2755966">
-            <a:off x="7189439" y="1365266"/>
-            <a:ext cx="396502" cy="396502"/>
-          </a:xfrm>
-          <a:prstGeom prst="roundRect">
-            <a:avLst/>
-          </a:prstGeom>
-          <a:solidFill>
-            <a:srgbClr val="ADADE0"/>
-          </a:solidFill>
-          <a:ln>
-            <a:noFill/>
-          </a:ln>
-          <a:effectLst>
-            <a:outerShdw blurRad="88900" dist="50800" dir="8100000" sx="101000" sy="101000" algn="tr" rotWithShape="0">
-              <a:prstClr val="black">
-                <a:alpha val="40000"/>
-              </a:prstClr>
-            </a:outerShdw>
-          </a:effectLst>
-        </p:spPr>
-        <p:style>
-          <a:lnRef idx="2">
-            <a:schemeClr val="accent1">
-              <a:shade val="50000"/>
-            </a:schemeClr>
-          </a:lnRef>
-          <a:fillRef idx="1">
-            <a:schemeClr val="accent1"/>
-          </a:fillRef>
-          <a:effectRef idx="0">
-            <a:schemeClr val="accent1"/>
-          </a:effectRef>
-          <a:fontRef idx="minor">
-            <a:schemeClr val="lt1"/>
-          </a:fontRef>
-        </p:style>
-        <p:txBody>
-          <a:bodyPr rtlCol="0" anchor="ctr"/>
-          <a:lstStyle/>
-          <a:p>
-            <a:pPr algn="ctr"/>
-            <a:endParaRPr lang="zh-CN" altLang="en-US"/>
-          </a:p>
-        </p:txBody>
-      </p:sp>
-      <p:pic>
-        <p:nvPicPr>
-          <p:cNvPr id="17" name="图片 16"/>
-          <p:cNvPicPr>
-            <a:picLocks noChangeAspect="1"/>
-          </p:cNvPicPr>
-          <p:nvPr/>
-        </p:nvPicPr>
-        <p:blipFill>
-          <a:blip r:embed="rId4" cstate="print">
-            <a:extLst>
-              <a:ext uri="{28A0092B-C50C-407E-A947-70E740481C1C}">
-                <a14:useLocalDpi xmlns:a14="http://schemas.microsoft.com/office/drawing/2010/main" val="0"/>
-              </a:ext>
-            </a:extLst>
-          </a:blip>
-          <a:stretch>
-            <a:fillRect/>
-          </a:stretch>
-        </p:blipFill>
-        <p:spPr>
-          <a:xfrm>
-            <a:off x="7804063" y="218980"/>
-            <a:ext cx="730337" cy="556270"/>
-          </a:xfrm>
-          <a:prstGeom prst="rect">
-            <a:avLst/>
-          </a:prstGeom>
-        </p:spPr>
-      </p:pic>
-      <p:pic>
-        <p:nvPicPr>
-          <p:cNvPr id="18" name="图片 17"/>
-          <p:cNvPicPr>
-            <a:picLocks noChangeAspect="1"/>
-          </p:cNvPicPr>
-          <p:nvPr/>
-        </p:nvPicPr>
-        <p:blipFill>
-          <a:blip r:embed="rId5" cstate="print">
-            <a:extLst>
-              <a:ext uri="{28A0092B-C50C-407E-A947-70E740481C1C}">
-                <a14:useLocalDpi xmlns:a14="http://schemas.microsoft.com/office/drawing/2010/main" val="0"/>
-              </a:ext>
-            </a:extLst>
-          </a:blip>
-          <a:stretch>
-            <a:fillRect/>
-          </a:stretch>
-        </p:blipFill>
-        <p:spPr>
-          <a:xfrm>
-            <a:off x="8590829" y="204228"/>
-            <a:ext cx="3323471" cy="570629"/>
-          </a:xfrm>
-          <a:prstGeom prst="rect">
-            <a:avLst/>
-          </a:prstGeom>
-        </p:spPr>
-      </p:pic>
-    </p:spTree>
-  </p:cSld>
-  <p:clrMapOvr>
-    <a:masterClrMapping/>
-  </p:clrMapOvr>
-  <mc:AlternateContent xmlns:mc="http://schemas.openxmlformats.org/markup-compatibility/2006" xmlns:p14="http://schemas.microsoft.com/office/powerpoint/2010/main">
-    <mc:Choice Requires="p14">
-      <p:transition p14:dur="0" advClick="0"/>
-    </mc:Choice>
-    <mc:Fallback xmlns="">
-      <p:transition advClick="0"/>
-    </mc:Fallback>
-  </mc:AlternateContent>
-</p:sld>
-</file>
-
-<file path=ppt/slides/slide11.xml><?xml version="1.0" encoding="utf-8"?>
-<p:sld xmlns:a="http://schemas.openxmlformats.org/drawingml/2006/main" xmlns:r="http://schemas.openxmlformats.org/officeDocument/2006/relationships" xmlns:p="http://schemas.openxmlformats.org/presentationml/2006/main">
-  <p:cSld>
-    <p:spTree>
-      <p:nvGrpSpPr>
-        <p:cNvPr id="1" name=""/>
-        <p:cNvGrpSpPr/>
-        <p:nvPr/>
-      </p:nvGrpSpPr>
-      <p:grpSpPr>
-        <a:xfrm>
-          <a:off x="0" y="0"/>
-          <a:ext cx="0" cy="0"/>
-          <a:chOff x="0" y="0"/>
-          <a:chExt cx="0" cy="0"/>
-        </a:xfrm>
-      </p:grpSpPr>
-      <p:sp>
-        <p:nvSpPr>
           <p:cNvPr id="17" name="矩形 16"/>
           <p:cNvSpPr/>
           <p:nvPr/>
@@ -7179,7 +6461,7 @@
                 <a:latin typeface="Constantia" panose="02030602050306030303" pitchFamily="18" charset="0"/>
                 <a:cs typeface="Times" panose="02020603050405020304" pitchFamily="18" charset="0"/>
               </a:rPr>
-              <a:t>11</a:t>
+              <a:t>10</a:t>
             </a:fld>
             <a:endParaRPr lang="zh-CN" altLang="en-US" sz="1400" b="1" dirty="0">
               <a:solidFill>
@@ -7702,7 +6984,7 @@
 </p:sld>
 </file>
 
-<file path=ppt/slides/slide12.xml><?xml version="1.0" encoding="utf-8"?>
+<file path=ppt/slides/slide11.xml><?xml version="1.0" encoding="utf-8"?>
 <p:sld xmlns:a="http://schemas.openxmlformats.org/drawingml/2006/main" xmlns:r="http://schemas.openxmlformats.org/officeDocument/2006/relationships" xmlns:p="http://schemas.openxmlformats.org/presentationml/2006/main">
   <p:cSld>
     <p:spTree>
@@ -8092,7 +7374,7 @@
                 <a:latin typeface="Constantia" panose="02030602050306030303" pitchFamily="18" charset="0"/>
                 <a:cs typeface="Times" panose="02020603050405020304" pitchFamily="18" charset="0"/>
               </a:rPr>
-              <a:t>12</a:t>
+              <a:t>11</a:t>
             </a:fld>
             <a:endParaRPr lang="zh-CN" altLang="en-US" sz="1400" b="1" dirty="0">
               <a:solidFill>
@@ -10572,7 +9854,7 @@
         </p:nvSpPr>
         <p:spPr>
           <a:xfrm>
-            <a:off x="0" y="5660155"/>
+            <a:off x="385590" y="5768168"/>
             <a:ext cx="10382942" cy="558102"/>
           </a:xfrm>
           <a:prstGeom prst="rect">
@@ -11292,7 +10574,7 @@
         </p:nvSpPr>
         <p:spPr bwMode="auto">
           <a:xfrm>
-            <a:off x="382293" y="2173855"/>
+            <a:off x="382293" y="2170780"/>
             <a:ext cx="11320635" cy="423899"/>
           </a:xfrm>
           <a:prstGeom prst="rect">
@@ -11333,7 +10615,7 @@
           </a:extLst>
         </p:spPr>
         <p:txBody>
-          <a:bodyPr vert="horz" wrap="square" lIns="91440" tIns="45720" rIns="91440" bIns="45720" numCol="1" anchor="ctr" anchorCtr="0" compatLnSpc="1">
+          <a:bodyPr vert="horz" wrap="square" lIns="91440" tIns="45720" rIns="91440" bIns="45720" numCol="1" anchor="t" anchorCtr="0" compatLnSpc="1">
             <a:prstTxWarp prst="textNoShape">
               <a:avLst/>
             </a:prstTxWarp>
@@ -11471,7 +10753,7 @@
         </p:nvSpPr>
         <p:spPr>
           <a:xfrm>
-            <a:off x="382293" y="2597754"/>
+            <a:off x="396807" y="2859011"/>
             <a:ext cx="11553118" cy="1296445"/>
           </a:xfrm>
           <a:prstGeom prst="rect">
@@ -11480,7 +10762,7 @@
           <a:noFill/>
         </p:spPr>
         <p:txBody>
-          <a:bodyPr wrap="square">
+          <a:bodyPr wrap="square" anchor="t">
             <a:spAutoFit/>
           </a:bodyPr>
           <a:lstStyle/>
@@ -11717,8 +10999,8 @@
         </p:nvSpPr>
         <p:spPr>
           <a:xfrm>
-            <a:off x="92148" y="4571978"/>
-            <a:ext cx="11553118" cy="1907638"/>
+            <a:off x="358848" y="4651285"/>
+            <a:ext cx="9352009" cy="1753750"/>
           </a:xfrm>
           <a:prstGeom prst="rect">
             <a:avLst/>
@@ -11833,37 +11115,6 @@
             </a:pPr>
             <a:r>
               <a:rPr lang="en-US" altLang="zh-CN" sz="1600" dirty="0"/>
-              <a:t>WALTZ</a:t>
-            </a:r>
-            <a:r>
-              <a:rPr lang="zh-CN" altLang="en-US" sz="1600" dirty="0"/>
-              <a:t>：</a:t>
-            </a:r>
-            <a:r>
-              <a:rPr lang="en-US" altLang="zh-CN" sz="1600" dirty="0"/>
-              <a:t>Leveraging Zone Append to Tighten the Tail Latency of LSM Tree on ZNS SSD</a:t>
-            </a:r>
-            <a:r>
-              <a:rPr lang="zh-CN" altLang="en-US" sz="1600" dirty="0"/>
-              <a:t>，</a:t>
-            </a:r>
-            <a:r>
-              <a:rPr lang="en-US" altLang="zh-CN" sz="1600" dirty="0"/>
-              <a:t>VLDB</a:t>
-            </a:r>
-          </a:p>
-          <a:p>
-            <a:pPr>
-              <a:lnSpc>
-                <a:spcPct val="70000"/>
-              </a:lnSpc>
-              <a:spcAft>
-                <a:spcPts val="1200"/>
-              </a:spcAft>
-              <a:defRPr/>
-            </a:pPr>
-            <a:r>
-              <a:rPr lang="en-US" altLang="zh-CN" sz="1600" dirty="0"/>
               <a:t>ZNSKV: Reducing Data Migration in LSMT-Based KV Stores on ZNS SSDs</a:t>
             </a:r>
             <a:r>
@@ -11900,7 +11151,7 @@
           <a:noFill/>
         </p:spPr>
         <p:txBody>
-          <a:bodyPr wrap="square">
+          <a:bodyPr wrap="square" anchor="t">
             <a:spAutoFit/>
           </a:bodyPr>
           <a:lstStyle/>
@@ -13244,7 +12495,7 @@
               <a:defRPr/>
             </a:pPr>
             <a:r>
-              <a:rPr lang="zh-CN" altLang="en-US" sz="3200" b="1" dirty="0">
+              <a:rPr lang="en-US" altLang="zh-CN" sz="3200" b="1" dirty="0">
                 <a:solidFill>
                   <a:srgbClr val="4747BA"/>
                 </a:solidFill>
@@ -13252,15 +12503,23 @@
                 <a:ea typeface="腾讯体 W3" panose="020C04030202040F0204" pitchFamily="34" charset="-122"/>
                 <a:cs typeface="Times" panose="02020603050405020304" pitchFamily="18" charset="0"/>
               </a:rPr>
-              <a:t>技术方案</a:t>
-            </a:r>
+              <a:t>A2-WAL</a:t>
+            </a:r>
+            <a:endParaRPr lang="zh-CN" altLang="en-US" sz="3200" b="1" dirty="0">
+              <a:solidFill>
+                <a:srgbClr val="4747BA"/>
+              </a:solidFill>
+              <a:latin typeface="Constantia" panose="02030602050306030303" pitchFamily="18" charset="0"/>
+              <a:ea typeface="腾讯体 W3" panose="020C04030202040F0204" pitchFamily="34" charset="-122"/>
+              <a:cs typeface="Times" panose="02020603050405020304" pitchFamily="18" charset="0"/>
+            </a:endParaRPr>
           </a:p>
         </p:txBody>
       </p:sp>
     </p:spTree>
     <p:extLst>
       <p:ext uri="{BB962C8B-B14F-4D97-AF65-F5344CB8AC3E}">
-        <p14:creationId xmlns:p14="http://schemas.microsoft.com/office/powerpoint/2010/main" val="2512736533"/>
+        <p14:creationId xmlns:p14="http://schemas.microsoft.com/office/powerpoint/2010/main" val="3749543054"/>
       </p:ext>
     </p:extLst>
   </p:cSld>
@@ -13286,7 +12545,7 @@
         <p:cNvPr id="1" name="">
           <a:extLst>
             <a:ext uri="{FF2B5EF4-FFF2-40B4-BE49-F238E27FC236}">
-              <a16:creationId xmlns:a16="http://schemas.microsoft.com/office/drawing/2014/main" id="{D527391F-AC39-9E5E-F0FC-F9D270F86353}"/>
+              <a16:creationId xmlns:a16="http://schemas.microsoft.com/office/drawing/2014/main" id="{A2832C4D-6359-6E65-A695-78F744131D98}"/>
             </a:ext>
           </a:extLst>
         </p:cNvPr>
@@ -13306,7 +12565,7 @@
           <p:cNvPr id="17" name="矩形 16">
             <a:extLst>
               <a:ext uri="{FF2B5EF4-FFF2-40B4-BE49-F238E27FC236}">
-                <a16:creationId xmlns:a16="http://schemas.microsoft.com/office/drawing/2014/main" id="{402C4039-76AE-8EDA-EA48-C04A020B82F9}"/>
+                <a16:creationId xmlns:a16="http://schemas.microsoft.com/office/drawing/2014/main" id="{3A842122-F6A3-DB31-2373-046B3B397E0D}"/>
               </a:ext>
             </a:extLst>
           </p:cNvPr>
@@ -13358,7 +12617,7 @@
           <p:cNvPr id="18" name="矩形 17">
             <a:extLst>
               <a:ext uri="{FF2B5EF4-FFF2-40B4-BE49-F238E27FC236}">
-                <a16:creationId xmlns:a16="http://schemas.microsoft.com/office/drawing/2014/main" id="{0219BAAD-9360-2457-2569-8DFCF0185E51}"/>
+                <a16:creationId xmlns:a16="http://schemas.microsoft.com/office/drawing/2014/main" id="{EC4ABAE0-A8B9-5F68-CB5D-11CBB12AE5F5}"/>
               </a:ext>
             </a:extLst>
           </p:cNvPr>
@@ -13410,7 +12669,7 @@
           <p:cNvPr id="20" name="矩形 19">
             <a:extLst>
               <a:ext uri="{FF2B5EF4-FFF2-40B4-BE49-F238E27FC236}">
-                <a16:creationId xmlns:a16="http://schemas.microsoft.com/office/drawing/2014/main" id="{6AFB8D92-4F2C-CFB4-3840-BF8B42C0A898}"/>
+                <a16:creationId xmlns:a16="http://schemas.microsoft.com/office/drawing/2014/main" id="{1E3982EE-00FE-98F6-3D0D-1AF5AD2AC13C}"/>
               </a:ext>
             </a:extLst>
           </p:cNvPr>
@@ -13563,7 +12822,7 @@
           <p:cNvPr id="24" name="日期占位符 7">
             <a:extLst>
               <a:ext uri="{FF2B5EF4-FFF2-40B4-BE49-F238E27FC236}">
-                <a16:creationId xmlns:a16="http://schemas.microsoft.com/office/drawing/2014/main" id="{4563E3D6-9E92-01D7-3463-B66078B04F37}"/>
+                <a16:creationId xmlns:a16="http://schemas.microsoft.com/office/drawing/2014/main" id="{64E4B705-DDF8-BAEB-2D16-4D5E405B4097}"/>
               </a:ext>
             </a:extLst>
           </p:cNvPr>
@@ -13609,7 +12868,7 @@
           <p:cNvPr id="26" name="直接连接符 25">
             <a:extLst>
               <a:ext uri="{FF2B5EF4-FFF2-40B4-BE49-F238E27FC236}">
-                <a16:creationId xmlns:a16="http://schemas.microsoft.com/office/drawing/2014/main" id="{75C1444D-9598-6827-89FD-5A219F5C36A3}"/>
+                <a16:creationId xmlns:a16="http://schemas.microsoft.com/office/drawing/2014/main" id="{576CD009-9E06-71D5-796C-E7F2677BB612}"/>
               </a:ext>
             </a:extLst>
           </p:cNvPr>
@@ -13650,7 +12909,7 @@
           <p:cNvPr id="23" name="图片 22">
             <a:extLst>
               <a:ext uri="{FF2B5EF4-FFF2-40B4-BE49-F238E27FC236}">
-                <a16:creationId xmlns:a16="http://schemas.microsoft.com/office/drawing/2014/main" id="{FE71565E-76F1-B7A6-61A1-44E4DC9DEAE8}"/>
+                <a16:creationId xmlns:a16="http://schemas.microsoft.com/office/drawing/2014/main" id="{D39DBC95-90B7-CC4A-0674-5E4BE18FAFEC}"/>
               </a:ext>
             </a:extLst>
           </p:cNvPr>
@@ -13686,7 +12945,7 @@
           <p:cNvPr id="14" name="灯片编号占位符 8">
             <a:extLst>
               <a:ext uri="{FF2B5EF4-FFF2-40B4-BE49-F238E27FC236}">
-                <a16:creationId xmlns:a16="http://schemas.microsoft.com/office/drawing/2014/main" id="{193D6FC4-86AB-C582-8F49-0CEF24541030}"/>
+                <a16:creationId xmlns:a16="http://schemas.microsoft.com/office/drawing/2014/main" id="{A825C38F-4064-D66C-7E83-641C6E6CDDDF}"/>
               </a:ext>
             </a:extLst>
           </p:cNvPr>
@@ -13733,7 +12992,7 @@
           <p:cNvPr id="44" name="图片 43">
             <a:extLst>
               <a:ext uri="{FF2B5EF4-FFF2-40B4-BE49-F238E27FC236}">
-                <a16:creationId xmlns:a16="http://schemas.microsoft.com/office/drawing/2014/main" id="{4BF04413-D815-B732-46A7-744AD6590CB2}"/>
+                <a16:creationId xmlns:a16="http://schemas.microsoft.com/office/drawing/2014/main" id="{B92E1150-CC3D-3FD6-BE1F-548EE10BA2E5}"/>
               </a:ext>
             </a:extLst>
           </p:cNvPr>
@@ -13769,7 +13028,7 @@
           <p:cNvPr id="10" name="Fußzeilenplatzhalter 4">
             <a:extLst>
               <a:ext uri="{FF2B5EF4-FFF2-40B4-BE49-F238E27FC236}">
-                <a16:creationId xmlns:a16="http://schemas.microsoft.com/office/drawing/2014/main" id="{02FACA27-EEEB-EFCC-8E26-04E49EF584D7}"/>
+                <a16:creationId xmlns:a16="http://schemas.microsoft.com/office/drawing/2014/main" id="{41A6F760-2380-4D3B-4121-FC89E5F5F0A2}"/>
               </a:ext>
             </a:extLst>
           </p:cNvPr>
@@ -13822,7 +13081,7 @@
           <p:cNvPr id="4" name="文本框 3">
             <a:extLst>
               <a:ext uri="{FF2B5EF4-FFF2-40B4-BE49-F238E27FC236}">
-                <a16:creationId xmlns:a16="http://schemas.microsoft.com/office/drawing/2014/main" id="{F4FA06A1-9955-9FA1-8138-2E26E0CC3AED}"/>
+                <a16:creationId xmlns:a16="http://schemas.microsoft.com/office/drawing/2014/main" id="{3EA2BDBB-DB9F-4471-06D2-4AE13860A54A}"/>
               </a:ext>
             </a:extLst>
           </p:cNvPr>
@@ -13867,10 +13126,10 @@
       </p:sp>
       <p:sp>
         <p:nvSpPr>
-          <p:cNvPr id="3" name="文本框 2">
+          <p:cNvPr id="7" name="文本框 6">
             <a:extLst>
               <a:ext uri="{FF2B5EF4-FFF2-40B4-BE49-F238E27FC236}">
-                <a16:creationId xmlns:a16="http://schemas.microsoft.com/office/drawing/2014/main" id="{70C6BDAB-7624-388F-B27E-26A86A6995AE}"/>
+                <a16:creationId xmlns:a16="http://schemas.microsoft.com/office/drawing/2014/main" id="{DB862D24-4C70-B858-E53B-DC9360DFCBF6}"/>
               </a:ext>
             </a:extLst>
           </p:cNvPr>
@@ -13879,8 +13138,8 @@
         </p:nvSpPr>
         <p:spPr>
           <a:xfrm>
-            <a:off x="440055" y="1176360"/>
-            <a:ext cx="10768965" cy="1311834"/>
+            <a:off x="440055" y="4344766"/>
+            <a:ext cx="10852786" cy="1711366"/>
           </a:xfrm>
           <a:prstGeom prst="rect">
             <a:avLst/>
@@ -13893,138 +13152,19 @@
           </a:bodyPr>
           <a:lstStyle/>
           <a:p>
-            <a:pPr indent="0" algn="just">
-              <a:spcAft>
-                <a:spcPts val="1200"/>
-              </a:spcAft>
-              <a:buFont typeface="Arial" panose="020B0604020202020204" pitchFamily="34" charset="0"/>
-              <a:buNone/>
-            </a:pPr>
-            <a:r>
-              <a:rPr lang="zh-CN" altLang="en-US" b="1" dirty="0">
-                <a:solidFill>
-                  <a:srgbClr val="4747BA"/>
-                </a:solidFill>
-                <a:ea typeface="+mn-lt"/>
-                <a:cs typeface="Times New Roman" panose="02020603050405020304" charset="0"/>
-              </a:rPr>
-              <a:t>与现有的工作相比：</a:t>
-            </a:r>
-            <a:endParaRPr lang="en-US" altLang="zh-CN" b="1" dirty="0">
-              <a:solidFill>
-                <a:srgbClr val="4747BA"/>
-              </a:solidFill>
-              <a:ea typeface="+mn-lt"/>
-              <a:cs typeface="Times New Roman" panose="02020603050405020304" charset="0"/>
-            </a:endParaRPr>
-          </a:p>
-          <a:p>
-            <a:pPr>
+            <a:pPr algn="l">
               <a:lnSpc>
                 <a:spcPct val="150000"/>
               </a:lnSpc>
-              <a:spcAft>
-                <a:spcPts val="1200"/>
-              </a:spcAft>
             </a:pPr>
             <a:r>
-              <a:rPr lang="zh-CN" altLang="zh-CN" dirty="0">
-                <a:solidFill>
-                  <a:srgbClr val="374151"/>
-                </a:solidFill>
-                <a:latin typeface="_5b8b_4f53"/>
-              </a:rPr>
-              <a:t>相较于在</a:t>
-            </a:r>
-            <a:r>
-              <a:rPr lang="en-US" altLang="zh-CN" dirty="0">
-                <a:solidFill>
-                  <a:srgbClr val="374151"/>
-                </a:solidFill>
-                <a:latin typeface="_5b8b_4f53"/>
-              </a:rPr>
-              <a:t>QEMU</a:t>
-            </a:r>
-            <a:r>
-              <a:rPr lang="zh-CN" altLang="zh-CN" dirty="0">
-                <a:solidFill>
-                  <a:srgbClr val="374151"/>
-                </a:solidFill>
-                <a:latin typeface="_5b8b_4f53"/>
-              </a:rPr>
-              <a:t>、</a:t>
-            </a:r>
-            <a:r>
-              <a:rPr lang="en-US" altLang="zh-CN" dirty="0">
-                <a:solidFill>
-                  <a:srgbClr val="374151"/>
-                </a:solidFill>
-                <a:latin typeface="_5b8b_4f53"/>
-              </a:rPr>
-              <a:t>FEMU</a:t>
-            </a:r>
-            <a:r>
-              <a:rPr lang="zh-CN" altLang="zh-CN" dirty="0">
-                <a:solidFill>
-                  <a:srgbClr val="374151"/>
-                </a:solidFill>
-                <a:latin typeface="_5b8b_4f53"/>
-              </a:rPr>
-              <a:t>等模拟器上</a:t>
-            </a:r>
-            <a:r>
               <a:rPr lang="zh-CN" altLang="en-US" dirty="0">
                 <a:solidFill>
                   <a:srgbClr val="374151"/>
                 </a:solidFill>
                 <a:latin typeface="_5b8b_4f53"/>
               </a:rPr>
-              <a:t>的研究</a:t>
-            </a:r>
-            <a:r>
-              <a:rPr lang="zh-CN" altLang="zh-CN" dirty="0">
-                <a:solidFill>
-                  <a:srgbClr val="374151"/>
-                </a:solidFill>
-                <a:latin typeface="_5b8b_4f53"/>
-              </a:rPr>
-              <a:t>，</a:t>
-            </a:r>
-            <a:r>
-              <a:rPr lang="zh-CN" altLang="en-US" dirty="0">
-                <a:solidFill>
-                  <a:srgbClr val="374151"/>
-                </a:solidFill>
-                <a:latin typeface="_5b8b_4f53"/>
-              </a:rPr>
-              <a:t>一方面，我们使用的模拟器是最新的，基于内核实现的；另一方面，能展示</a:t>
-            </a:r>
-            <a:r>
-              <a:rPr lang="en-US" altLang="zh-CN" dirty="0">
-                <a:solidFill>
-                  <a:srgbClr val="374151"/>
-                </a:solidFill>
-                <a:latin typeface="_5b8b_4f53"/>
-              </a:rPr>
-              <a:t>ZNS SSD</a:t>
-            </a:r>
-            <a:r>
-              <a:rPr lang="zh-CN" altLang="zh-CN" dirty="0">
-                <a:solidFill>
-                  <a:srgbClr val="374151"/>
-                </a:solidFill>
-                <a:latin typeface="_5b8b_4f53"/>
-              </a:rPr>
-              <a:t>在不同的真实场景下的性能表现</a:t>
-            </a:r>
-            <a:r>
-              <a:rPr lang="zh-CN" altLang="en-US" dirty="0">
-                <a:solidFill>
-                  <a:srgbClr val="374151"/>
-                </a:solidFill>
-                <a:latin typeface="_5b8b_4f53"/>
-              </a:rPr>
-              <a:t>，尤其是延迟等参数上区别会较明显。</a:t>
+              <a:t>三、性能优化和数据放置策略：</a:t>
             </a:r>
             <a:endParaRPr lang="en-US" altLang="zh-CN" dirty="0">
               <a:solidFill>
@@ -14033,14 +13173,88 @@
               <a:latin typeface="_5b8b_4f53"/>
             </a:endParaRPr>
           </a:p>
-        </p:txBody>
-      </p:sp>
-      <p:sp>
-        <p:nvSpPr>
-          <p:cNvPr id="12" name="文本框 11">
+          <a:p>
+            <a:pPr>
+              <a:lnSpc>
+                <a:spcPct val="150000"/>
+              </a:lnSpc>
+            </a:pPr>
+            <a:r>
+              <a:rPr lang="zh-CN" altLang="en-US" dirty="0">
+                <a:solidFill>
+                  <a:srgbClr val="374151"/>
+                </a:solidFill>
+                <a:latin typeface="_5b8b_4f53"/>
+              </a:rPr>
+              <a:t>进一步地，根据所得实验数据，</a:t>
+            </a:r>
+            <a:r>
+              <a:rPr lang="zh-CN" altLang="zh-CN" dirty="0">
+                <a:solidFill>
+                  <a:srgbClr val="374151"/>
+                </a:solidFill>
+                <a:latin typeface="_5b8b_4f53"/>
+              </a:rPr>
+              <a:t>探索适用于</a:t>
+            </a:r>
+            <a:r>
+              <a:rPr lang="en-US" altLang="zh-CN" dirty="0">
+                <a:solidFill>
+                  <a:srgbClr val="374151"/>
+                </a:solidFill>
+                <a:latin typeface="_5b8b_4f53"/>
+              </a:rPr>
+              <a:t>ZNS SSD</a:t>
+            </a:r>
+            <a:r>
+              <a:rPr lang="zh-CN" altLang="zh-CN" dirty="0">
+                <a:solidFill>
+                  <a:srgbClr val="374151"/>
+                </a:solidFill>
+                <a:latin typeface="_5b8b_4f53"/>
+              </a:rPr>
+              <a:t>的数据管理机制，利用</a:t>
+            </a:r>
+            <a:r>
+              <a:rPr lang="en-US" altLang="zh-CN" dirty="0">
+                <a:solidFill>
+                  <a:srgbClr val="374151"/>
+                </a:solidFill>
+                <a:latin typeface="_5b8b_4f53"/>
+              </a:rPr>
+              <a:t>ZNS</a:t>
+            </a:r>
+            <a:r>
+              <a:rPr lang="zh-CN" altLang="zh-CN" dirty="0">
+                <a:solidFill>
+                  <a:srgbClr val="374151"/>
+                </a:solidFill>
+                <a:latin typeface="_5b8b_4f53"/>
+              </a:rPr>
+              <a:t>的区块信息可见性的优势，可能有效的优化例如：利用硬件的区域状态信息优化数据放置策略，优化缓存策略或垃圾回收算法等。</a:t>
+            </a:r>
+          </a:p>
+          <a:p>
+            <a:pPr algn="l">
+              <a:lnSpc>
+                <a:spcPct val="150000"/>
+              </a:lnSpc>
+            </a:pPr>
+            <a:endParaRPr lang="zh-CN" altLang="en-US" dirty="0">
+              <a:solidFill>
+                <a:srgbClr val="374151"/>
+              </a:solidFill>
+              <a:latin typeface="_5b8b_4f53"/>
+            </a:endParaRPr>
+          </a:p>
+        </p:txBody>
+      </p:sp>
+      <p:sp>
+        <p:nvSpPr>
+          <p:cNvPr id="9" name="文本框 8">
             <a:extLst>
               <a:ext uri="{FF2B5EF4-FFF2-40B4-BE49-F238E27FC236}">
-                <a16:creationId xmlns:a16="http://schemas.microsoft.com/office/drawing/2014/main" id="{28E81CFD-99D8-77F4-C67C-379EE5AB5A55}"/>
+                <a16:creationId xmlns:a16="http://schemas.microsoft.com/office/drawing/2014/main" id="{D4E6F7F0-A216-1C37-8655-1CFCD95488F1}"/>
               </a:ext>
             </a:extLst>
           </p:cNvPr>
@@ -14049,8 +13263,8 @@
         </p:nvSpPr>
         <p:spPr>
           <a:xfrm>
-            <a:off x="440055" y="2757274"/>
-            <a:ext cx="10090785" cy="1711944"/>
+            <a:off x="440055" y="1349747"/>
+            <a:ext cx="6274781" cy="369332"/>
           </a:xfrm>
           <a:prstGeom prst="rect">
             <a:avLst/>
@@ -14063,14 +13277,6 @@
           </a:bodyPr>
           <a:lstStyle/>
           <a:p>
-            <a:pPr>
-              <a:lnSpc>
-                <a:spcPct val="150000"/>
-              </a:lnSpc>
-              <a:spcAft>
-                <a:spcPts val="1200"/>
-              </a:spcAft>
-            </a:pPr>
             <a:r>
               <a:rPr lang="zh-CN" altLang="en-US" dirty="0">
                 <a:solidFill>
@@ -14078,7 +13284,7 @@
                 </a:solidFill>
                 <a:latin typeface="_5b8b_4f53"/>
               </a:rPr>
-              <a:t>相较于西数已有的基于真实设备（</a:t>
+              <a:t>一、实验环境搭建</a:t>
             </a:r>
             <a:r>
               <a:rPr lang="en-US" altLang="zh-CN" dirty="0">
@@ -14087,7 +13293,7 @@
                 </a:solidFill>
                 <a:latin typeface="_5b8b_4f53"/>
               </a:rPr>
-              <a:t>ZN540</a:t>
+              <a:t>: </a:t>
             </a:r>
             <a:r>
               <a:rPr lang="zh-CN" altLang="en-US" dirty="0">
@@ -14096,143 +13302,17 @@
                 </a:solidFill>
                 <a:latin typeface="_5b8b_4f53"/>
               </a:rPr>
-              <a:t>）的工作，首先西数更关注于硬盘内部的硬件级设计规划。另外我们使用浪潮提供的最新</a:t>
-            </a:r>
-            <a:r>
-              <a:rPr lang="en-US" altLang="zh-CN" dirty="0">
-                <a:solidFill>
-                  <a:srgbClr val="374151"/>
-                </a:solidFill>
-                <a:latin typeface="_5b8b_4f53"/>
-              </a:rPr>
-              <a:t>ZNS</a:t>
-            </a:r>
-            <a:r>
-              <a:rPr lang="zh-CN" altLang="en-US" dirty="0">
-                <a:solidFill>
-                  <a:srgbClr val="374151"/>
-                </a:solidFill>
-                <a:latin typeface="_5b8b_4f53"/>
-              </a:rPr>
-              <a:t>盘，一方面，其介质选用更好的</a:t>
-            </a:r>
-            <a:r>
-              <a:rPr lang="en-US" altLang="zh-CN" dirty="0">
-                <a:solidFill>
-                  <a:srgbClr val="374151"/>
-                </a:solidFill>
-                <a:latin typeface="_5b8b_4f53"/>
-              </a:rPr>
-              <a:t>TLC</a:t>
-            </a:r>
-            <a:r>
-              <a:rPr lang="zh-CN" altLang="en-US" dirty="0">
-                <a:solidFill>
-                  <a:srgbClr val="374151"/>
-                </a:solidFill>
-                <a:latin typeface="_5b8b_4f53"/>
-              </a:rPr>
-              <a:t>颗粒</a:t>
-            </a:r>
-            <a:r>
-              <a:rPr lang="en-US" altLang="zh-CN" dirty="0">
-                <a:solidFill>
-                  <a:srgbClr val="374151"/>
-                </a:solidFill>
-                <a:latin typeface="_5b8b_4f53"/>
-              </a:rPr>
-              <a:t>(</a:t>
-            </a:r>
-            <a:r>
-              <a:rPr lang="zh-CN" altLang="en-US" dirty="0">
-                <a:solidFill>
-                  <a:srgbClr val="374151"/>
-                </a:solidFill>
-                <a:latin typeface="_5b8b_4f53"/>
-              </a:rPr>
-              <a:t>西数是</a:t>
-            </a:r>
-            <a:r>
-              <a:rPr lang="en-US" altLang="zh-CN" dirty="0">
-                <a:solidFill>
-                  <a:srgbClr val="374151"/>
-                </a:solidFill>
-                <a:latin typeface="_5b8b_4f53"/>
-              </a:rPr>
-              <a:t>QLC</a:t>
-            </a:r>
-            <a:r>
-              <a:rPr lang="zh-CN" altLang="en-US" dirty="0">
-                <a:solidFill>
-                  <a:srgbClr val="374151"/>
-                </a:solidFill>
-                <a:latin typeface="_5b8b_4f53"/>
-              </a:rPr>
-              <a:t>颗粒，延迟高寿命短），另一方面二者关键参数上也有区别，如</a:t>
-            </a:r>
-            <a:r>
-              <a:rPr lang="en-US" altLang="zh-CN" dirty="0">
-                <a:solidFill>
-                  <a:srgbClr val="374151"/>
-                </a:solidFill>
-                <a:latin typeface="_5b8b_4f53"/>
-              </a:rPr>
-              <a:t>Zone</a:t>
-            </a:r>
-            <a:r>
-              <a:rPr lang="zh-CN" altLang="en-US" dirty="0">
-                <a:solidFill>
-                  <a:srgbClr val="374151"/>
-                </a:solidFill>
-                <a:latin typeface="_5b8b_4f53"/>
-              </a:rPr>
-              <a:t> </a:t>
-            </a:r>
-            <a:r>
-              <a:rPr lang="en-US" altLang="zh-CN" dirty="0">
-                <a:solidFill>
-                  <a:srgbClr val="374151"/>
-                </a:solidFill>
-                <a:latin typeface="_5b8b_4f53"/>
-              </a:rPr>
-              <a:t>size</a:t>
-            </a:r>
-            <a:r>
-              <a:rPr lang="zh-CN" altLang="en-US" dirty="0">
-                <a:solidFill>
-                  <a:srgbClr val="374151"/>
-                </a:solidFill>
-                <a:latin typeface="_5b8b_4f53"/>
-              </a:rPr>
-              <a:t>等（之前基于实际设备的工作中只出现过一款</a:t>
-            </a:r>
-            <a:r>
-              <a:rPr lang="en-US" altLang="zh-CN" dirty="0">
-                <a:solidFill>
-                  <a:srgbClr val="374151"/>
-                </a:solidFill>
-                <a:latin typeface="_5b8b_4f53"/>
-              </a:rPr>
-              <a:t>Zone size = 2GB</a:t>
-            </a:r>
-            <a:r>
-              <a:rPr lang="zh-CN" altLang="en-US" dirty="0">
-                <a:solidFill>
-                  <a:srgbClr val="374151"/>
-                </a:solidFill>
-                <a:latin typeface="_5b8b_4f53"/>
-              </a:rPr>
-              <a:t>的硬盘）。</a:t>
-            </a:r>
-          </a:p>
-        </p:txBody>
-      </p:sp>
-      <p:sp>
-        <p:nvSpPr>
-          <p:cNvPr id="13" name="文本框 12">
+              <a:t>搭建模拟环境，配置真实测试环境。</a:t>
+            </a:r>
+          </a:p>
+        </p:txBody>
+      </p:sp>
+      <p:sp>
+        <p:nvSpPr>
+          <p:cNvPr id="8" name="文本框 7">
             <a:extLst>
               <a:ext uri="{FF2B5EF4-FFF2-40B4-BE49-F238E27FC236}">
-                <a16:creationId xmlns:a16="http://schemas.microsoft.com/office/drawing/2014/main" id="{BFAB871E-3872-C3F2-1CF4-B9CDD6168859}"/>
+                <a16:creationId xmlns:a16="http://schemas.microsoft.com/office/drawing/2014/main" id="{48A56D66-FF56-FAF9-9FAB-82C42BB4E738}"/>
               </a:ext>
             </a:extLst>
           </p:cNvPr>
@@ -14241,8 +13321,8 @@
         </p:nvSpPr>
         <p:spPr>
           <a:xfrm>
-            <a:off x="122628" y="5450801"/>
-            <a:ext cx="11553118" cy="1255152"/>
+            <a:off x="440055" y="2005188"/>
+            <a:ext cx="9850120" cy="2122376"/>
           </a:xfrm>
           <a:prstGeom prst="rect">
             <a:avLst/>
@@ -14255,136 +13335,293 @@
           </a:bodyPr>
           <a:lstStyle/>
           <a:p>
-            <a:pPr marR="0" lvl="0" indent="0" fontAlgn="auto">
-              <a:lnSpc>
-                <a:spcPct val="70000"/>
-              </a:lnSpc>
-              <a:spcBef>
-                <a:spcPts val="0"/>
-              </a:spcBef>
-              <a:spcAft>
-                <a:spcPts val="1200"/>
-              </a:spcAft>
-              <a:buClrTx/>
-              <a:buSzTx/>
-              <a:buFont typeface="Arial" panose="020B0604020202020204" pitchFamily="34" charset="0"/>
-              <a:buNone/>
-              <a:tabLst/>
-              <a:defRPr/>
-            </a:pPr>
-            <a:r>
-              <a:rPr lang="en-US" altLang="zh-CN" sz="1600" dirty="0"/>
-              <a:t>QEMU</a:t>
-            </a:r>
-            <a:r>
-              <a:rPr lang="zh-CN" altLang="en-US" sz="1600" dirty="0"/>
-              <a:t>：</a:t>
-            </a:r>
-            <a:r>
-              <a:rPr lang="en-US" altLang="zh-CN" sz="1600" dirty="0">
-                <a:hlinkClick r:id="rId5"/>
-              </a:rPr>
-              <a:t>https://www.qemu.org/</a:t>
-            </a:r>
-            <a:endParaRPr lang="en-US" altLang="zh-CN" sz="1600" dirty="0"/>
-          </a:p>
-          <a:p>
-            <a:pPr marR="0" lvl="0" indent="0" fontAlgn="auto">
-              <a:lnSpc>
-                <a:spcPct val="70000"/>
-              </a:lnSpc>
-              <a:spcBef>
-                <a:spcPts val="0"/>
-              </a:spcBef>
-              <a:spcAft>
-                <a:spcPts val="1200"/>
-              </a:spcAft>
-              <a:buClrTx/>
-              <a:buSzTx/>
-              <a:buFont typeface="Arial" panose="020B0604020202020204" pitchFamily="34" charset="0"/>
-              <a:buNone/>
-              <a:tabLst/>
-              <a:defRPr/>
-            </a:pPr>
-            <a:r>
-              <a:rPr lang="en-US" altLang="zh-CN" sz="1600" dirty="0"/>
-              <a:t>FEMU</a:t>
-            </a:r>
-            <a:r>
-              <a:rPr lang="zh-CN" altLang="en-US" sz="1600" dirty="0"/>
-              <a:t>：</a:t>
-            </a:r>
-            <a:r>
-              <a:rPr lang="en-US" altLang="zh-CN" sz="1600" dirty="0">
-                <a:hlinkClick r:id="rId6"/>
-              </a:rPr>
-              <a:t>https://github.com/vtess/FEMU</a:t>
-            </a:r>
-            <a:endParaRPr lang="en-US" altLang="zh-CN" sz="1600" dirty="0"/>
-          </a:p>
-          <a:p>
             <a:pPr>
               <a:lnSpc>
-                <a:spcPct val="70000"/>
+                <a:spcPct val="150000"/>
               </a:lnSpc>
-              <a:spcAft>
-                <a:spcPts val="1200"/>
-              </a:spcAft>
-              <a:defRPr/>
             </a:pPr>
             <a:r>
-              <a:rPr lang="en-US" altLang="zh-CN" sz="1600" dirty="0" err="1"/>
-              <a:t>NVMeVirt</a:t>
-            </a:r>
-            <a:r>
-              <a:rPr lang="en-US" altLang="zh-CN" sz="1600" dirty="0"/>
-              <a:t>: A Versatile Software-defined Virtual </a:t>
-            </a:r>
-            <a:r>
-              <a:rPr lang="en-US" altLang="zh-CN" sz="1600" dirty="0" err="1"/>
-              <a:t>NVMe</a:t>
-            </a:r>
-            <a:r>
-              <a:rPr lang="en-US" altLang="zh-CN" sz="1600" dirty="0"/>
-              <a:t> Device</a:t>
-            </a:r>
-            <a:r>
-              <a:rPr lang="zh-CN" altLang="en-US" sz="1600" dirty="0"/>
+              <a:rPr lang="zh-CN" altLang="en-US" dirty="0">
+                <a:solidFill>
+                  <a:srgbClr val="374151"/>
+                </a:solidFill>
+                <a:latin typeface="_5b8b_4f53"/>
+              </a:rPr>
+              <a:t>二、</a:t>
+            </a:r>
+            <a:r>
+              <a:rPr lang="zh-CN" altLang="zh-CN" dirty="0">
+                <a:solidFill>
+                  <a:srgbClr val="374151"/>
+                </a:solidFill>
+                <a:latin typeface="_5b8b_4f53"/>
+              </a:rPr>
+              <a:t>分别基于模拟平台和真实设备进行评估测试</a:t>
+            </a:r>
+            <a:r>
+              <a:rPr lang="zh-CN" altLang="en-US" dirty="0">
+                <a:solidFill>
+                  <a:srgbClr val="374151"/>
+                </a:solidFill>
+                <a:latin typeface="_5b8b_4f53"/>
+              </a:rPr>
+              <a:t>：</a:t>
+            </a:r>
+            <a:endParaRPr lang="en-US" altLang="zh-CN" dirty="0">
+              <a:solidFill>
+                <a:srgbClr val="374151"/>
+              </a:solidFill>
+              <a:latin typeface="_5b8b_4f53"/>
+            </a:endParaRPr>
+          </a:p>
+          <a:p>
+            <a:pPr algn="l">
+              <a:lnSpc>
+                <a:spcPct val="150000"/>
+              </a:lnSpc>
+              <a:buFont typeface="Arial" panose="020B0604020202020204" pitchFamily="34" charset="0"/>
+              <a:buChar char="•"/>
+            </a:pPr>
+            <a:r>
+              <a:rPr lang="zh-CN" altLang="en-US" dirty="0">
+                <a:solidFill>
+                  <a:srgbClr val="374151"/>
+                </a:solidFill>
+                <a:latin typeface="_5b8b_4f53"/>
+              </a:rPr>
+              <a:t>  系统级测试</a:t>
+            </a:r>
+            <a:r>
+              <a:rPr lang="en-US" altLang="zh-CN" dirty="0">
+                <a:solidFill>
+                  <a:srgbClr val="374151"/>
+                </a:solidFill>
+                <a:latin typeface="_5b8b_4f53"/>
+              </a:rPr>
+              <a:t>: </a:t>
+            </a:r>
+            <a:r>
+              <a:rPr lang="zh-CN" altLang="en-US" dirty="0">
+                <a:solidFill>
+                  <a:srgbClr val="374151"/>
+                </a:solidFill>
+                <a:latin typeface="_5b8b_4f53"/>
+              </a:rPr>
+              <a:t>利用</a:t>
+            </a:r>
+            <a:r>
+              <a:rPr lang="en-US" altLang="zh-CN" dirty="0">
+                <a:solidFill>
+                  <a:srgbClr val="374151"/>
+                </a:solidFill>
+                <a:latin typeface="_5b8b_4f53"/>
+              </a:rPr>
+              <a:t>Linux</a:t>
+            </a:r>
+            <a:r>
+              <a:rPr lang="zh-CN" altLang="en-US" dirty="0">
+                <a:solidFill>
+                  <a:srgbClr val="374151"/>
+                </a:solidFill>
+                <a:latin typeface="_5b8b_4f53"/>
+              </a:rPr>
+              <a:t>下系统工具如</a:t>
+            </a:r>
+            <a:r>
+              <a:rPr lang="en-US" altLang="zh-CN" dirty="0" err="1">
+                <a:solidFill>
+                  <a:srgbClr val="374151"/>
+                </a:solidFill>
+                <a:latin typeface="_5b8b_4f53"/>
+              </a:rPr>
+              <a:t>fio</a:t>
+            </a:r>
+            <a:r>
+              <a:rPr lang="zh-CN" altLang="en-US" dirty="0">
+                <a:solidFill>
+                  <a:srgbClr val="374151"/>
+                </a:solidFill>
+                <a:latin typeface="_5b8b_4f53"/>
+              </a:rPr>
+              <a:t>、</a:t>
+            </a:r>
+            <a:r>
+              <a:rPr lang="en-US" altLang="zh-CN" dirty="0" err="1">
+                <a:solidFill>
+                  <a:srgbClr val="374151"/>
+                </a:solidFill>
+                <a:latin typeface="_5b8b_4f53"/>
+              </a:rPr>
+              <a:t>nvme</a:t>
+            </a:r>
+            <a:r>
+              <a:rPr lang="en-US" altLang="zh-CN" dirty="0">
+                <a:solidFill>
+                  <a:srgbClr val="374151"/>
+                </a:solidFill>
+                <a:latin typeface="_5b8b_4f53"/>
+              </a:rPr>
+              <a:t>-cli</a:t>
+            </a:r>
+            <a:r>
+              <a:rPr lang="zh-CN" altLang="en-US" dirty="0">
+                <a:solidFill>
+                  <a:srgbClr val="374151"/>
+                </a:solidFill>
+                <a:latin typeface="_5b8b_4f53"/>
+              </a:rPr>
+              <a:t>测试，主要关注设备本身硬件性能。</a:t>
+            </a:r>
+          </a:p>
+          <a:p>
+            <a:pPr algn="l">
+              <a:lnSpc>
+                <a:spcPct val="150000"/>
+              </a:lnSpc>
+              <a:buFont typeface="Arial" panose="020B0604020202020204" pitchFamily="34" charset="0"/>
+              <a:buChar char="•"/>
+            </a:pPr>
+            <a:r>
+              <a:rPr lang="zh-CN" altLang="en-US" dirty="0">
+                <a:solidFill>
+                  <a:srgbClr val="374151"/>
+                </a:solidFill>
+                <a:latin typeface="_5b8b_4f53"/>
+              </a:rPr>
+              <a:t>  端到端应用测试</a:t>
+            </a:r>
+            <a:r>
+              <a:rPr lang="en-US" altLang="zh-CN" dirty="0">
+                <a:solidFill>
+                  <a:srgbClr val="374151"/>
+                </a:solidFill>
+                <a:latin typeface="_5b8b_4f53"/>
+              </a:rPr>
+              <a:t>: </a:t>
+            </a:r>
+            <a:r>
+              <a:rPr lang="zh-CN" altLang="en-US" dirty="0">
+                <a:solidFill>
+                  <a:srgbClr val="374151"/>
+                </a:solidFill>
+                <a:latin typeface="_5b8b_4f53"/>
+              </a:rPr>
+              <a:t>部署应用（如</a:t>
+            </a:r>
+            <a:r>
+              <a:rPr lang="en-US" altLang="zh-CN" dirty="0" err="1">
+                <a:solidFill>
+                  <a:srgbClr val="374151"/>
+                </a:solidFill>
+                <a:latin typeface="_5b8b_4f53"/>
+              </a:rPr>
+              <a:t>RocksDB</a:t>
+            </a:r>
+            <a:r>
+              <a:rPr lang="en-US" altLang="zh-CN" dirty="0">
+                <a:solidFill>
+                  <a:srgbClr val="374151"/>
+                </a:solidFill>
+                <a:latin typeface="_5b8b_4f53"/>
+              </a:rPr>
+              <a:t> with </a:t>
+            </a:r>
+            <a:r>
+              <a:rPr lang="en-US" altLang="zh-CN" dirty="0" err="1">
+                <a:solidFill>
+                  <a:srgbClr val="374151"/>
+                </a:solidFill>
+                <a:latin typeface="_5b8b_4f53"/>
+              </a:rPr>
+              <a:t>ZenFS</a:t>
+            </a:r>
+            <a:r>
+              <a:rPr lang="en-US" altLang="zh-CN" dirty="0">
+                <a:solidFill>
+                  <a:srgbClr val="374151"/>
+                </a:solidFill>
+                <a:latin typeface="_5b8b_4f53"/>
+              </a:rPr>
+              <a:t> </a:t>
+            </a:r>
+            <a:r>
+              <a:rPr lang="zh-CN" altLang="en-US" dirty="0">
+                <a:solidFill>
+                  <a:srgbClr val="374151"/>
+                </a:solidFill>
+                <a:latin typeface="_5b8b_4f53"/>
+              </a:rPr>
+              <a:t>）设计实验，分析性能表现。具体包括但不限于：</a:t>
+            </a:r>
+            <a:r>
+              <a:rPr lang="zh-CN" altLang="zh-CN" dirty="0">
+                <a:solidFill>
+                  <a:srgbClr val="374151"/>
+                </a:solidFill>
+                <a:latin typeface="_5b8b_4f53"/>
+              </a:rPr>
+              <a:t>写入、更新性能</a:t>
+            </a:r>
+            <a:r>
+              <a:rPr lang="zh-CN" altLang="en-US" dirty="0">
+                <a:solidFill>
+                  <a:srgbClr val="374151"/>
+                </a:solidFill>
+                <a:latin typeface="_5b8b_4f53"/>
+              </a:rPr>
               <a:t>，</a:t>
             </a:r>
             <a:r>
-              <a:rPr lang="en-US" altLang="zh-CN" sz="1600" dirty="0"/>
-              <a:t>FAST 23</a:t>
-            </a:r>
-            <a:endParaRPr lang="en-US" altLang="zh-CN" sz="1600" dirty="0">
-              <a:hlinkClick r:id="rId7">
-                <a:extLst>
-                  <a:ext uri="{A12FA001-AC4F-418D-AE19-62706E023703}">
-                    <ahyp:hlinkClr xmlns:ahyp="http://schemas.microsoft.com/office/drawing/2018/hyperlinkcolor" val="tx"/>
-                  </a:ext>
-                </a:extLst>
-              </a:hlinkClick>
+              <a:rPr lang="zh-CN" altLang="zh-CN" dirty="0">
+                <a:solidFill>
+                  <a:srgbClr val="374151"/>
+                </a:solidFill>
+                <a:latin typeface="_5b8b_4f53"/>
+              </a:rPr>
+              <a:t>读性能</a:t>
+            </a:r>
+            <a:r>
+              <a:rPr lang="zh-CN" altLang="en-US" dirty="0">
+                <a:solidFill>
+                  <a:srgbClr val="374151"/>
+                </a:solidFill>
+                <a:latin typeface="_5b8b_4f53"/>
+              </a:rPr>
+              <a:t>，</a:t>
+            </a:r>
+            <a:r>
+              <a:rPr lang="zh-CN" altLang="zh-CN" dirty="0">
+                <a:solidFill>
+                  <a:srgbClr val="374151"/>
+                </a:solidFill>
+                <a:latin typeface="_5b8b_4f53"/>
+              </a:rPr>
+              <a:t>简单的并发测试多线程读、多线程写性能</a:t>
+            </a:r>
+            <a:r>
+              <a:rPr lang="zh-CN" altLang="en-US" dirty="0">
+                <a:solidFill>
+                  <a:srgbClr val="374151"/>
+                </a:solidFill>
+                <a:latin typeface="_5b8b_4f53"/>
+              </a:rPr>
+              <a:t>，</a:t>
+            </a:r>
+            <a:r>
+              <a:rPr lang="zh-CN" altLang="zh-CN" dirty="0">
+                <a:solidFill>
+                  <a:srgbClr val="374151"/>
+                </a:solidFill>
+                <a:latin typeface="_5b8b_4f53"/>
+              </a:rPr>
+              <a:t>不同比例的读写混合负载下的表现。</a:t>
+            </a:r>
+            <a:endParaRPr lang="zh-CN" altLang="en-US" dirty="0">
+              <a:solidFill>
+                <a:srgbClr val="374151"/>
+              </a:solidFill>
+              <a:latin typeface="_5b8b_4f53"/>
             </a:endParaRPr>
-          </a:p>
-          <a:p>
-            <a:pPr marR="0" lvl="0" indent="0" fontAlgn="auto">
-              <a:lnSpc>
-                <a:spcPct val="70000"/>
-              </a:lnSpc>
-              <a:spcBef>
-                <a:spcPts val="0"/>
-              </a:spcBef>
-              <a:spcAft>
-                <a:spcPts val="1200"/>
-              </a:spcAft>
-              <a:buClrTx/>
-              <a:buSzTx/>
-              <a:buFont typeface="Arial" panose="020B0604020202020204" pitchFamily="34" charset="0"/>
-              <a:buNone/>
-              <a:tabLst/>
-              <a:defRPr/>
-            </a:pPr>
-            <a:endParaRPr lang="en-US" altLang="zh-CN" sz="1600" dirty="0"/>
           </a:p>
         </p:txBody>
       </p:sp>
@@ -14393,7 +13630,7 @@
           <p:cNvPr id="15" name="文本框 14">
             <a:extLst>
               <a:ext uri="{FF2B5EF4-FFF2-40B4-BE49-F238E27FC236}">
-                <a16:creationId xmlns:a16="http://schemas.microsoft.com/office/drawing/2014/main" id="{E58D8FE6-DB4E-87CD-1452-BB0F8905330C}"/>
+                <a16:creationId xmlns:a16="http://schemas.microsoft.com/office/drawing/2014/main" id="{B790E075-4835-B9E7-5A45-417B95DE7D3F}"/>
               </a:ext>
             </a:extLst>
           </p:cNvPr>
@@ -14426,7 +13663,7 @@
               <a:defRPr/>
             </a:pPr>
             <a:r>
-              <a:rPr lang="zh-CN" altLang="en-US" sz="3200" b="1" dirty="0">
+              <a:rPr lang="en-US" altLang="zh-CN" sz="3200" b="1" dirty="0">
                 <a:solidFill>
                   <a:srgbClr val="4747BA"/>
                 </a:solidFill>
@@ -14434,7 +13671,18 @@
                 <a:ea typeface="腾讯体 W3" panose="020C04030202040F0204" pitchFamily="34" charset="-122"/>
                 <a:cs typeface="Times" panose="02020603050405020304" pitchFamily="18" charset="0"/>
               </a:rPr>
-              <a:t>技术方案</a:t>
+              <a:t>ZAFS</a:t>
+            </a:r>
+            <a:r>
+              <a:rPr lang="zh-CN" altLang="en-US" sz="3200" b="1" dirty="0">
+                <a:solidFill>
+                  <a:srgbClr val="4747BA"/>
+                </a:solidFill>
+                <a:latin typeface="Constantia" panose="02030602050306030303" pitchFamily="18" charset="0"/>
+                <a:ea typeface="腾讯体 W3" panose="020C04030202040F0204" pitchFamily="34" charset="-122"/>
+                <a:cs typeface="Times" panose="02020603050405020304" pitchFamily="18" charset="0"/>
+              </a:rPr>
+              <a:t>架构</a:t>
             </a:r>
           </a:p>
         </p:txBody>
@@ -14442,7 +13690,7 @@
     </p:spTree>
     <p:extLst>
       <p:ext uri="{BB962C8B-B14F-4D97-AF65-F5344CB8AC3E}">
-        <p14:creationId xmlns:p14="http://schemas.microsoft.com/office/powerpoint/2010/main" val="1935030298"/>
+        <p14:creationId xmlns:p14="http://schemas.microsoft.com/office/powerpoint/2010/main" val="2512736533"/>
       </p:ext>
     </p:extLst>
   </p:cSld>
@@ -15614,7 +14862,7 @@
                 <a:ea typeface="腾讯体 W3" panose="020C04030202040F0204" pitchFamily="34" charset="-122"/>
                 <a:cs typeface="Times" panose="02020603050405020304" pitchFamily="18" charset="0"/>
               </a:rPr>
-              <a:t>实验工具</a:t>
+              <a:t>实验</a:t>
             </a:r>
           </a:p>
         </p:txBody>
@@ -15645,13 +14893,7 @@
   <p:cSld>
     <p:spTree>
       <p:nvGrpSpPr>
-        <p:cNvPr id="1" name="">
-          <a:extLst>
-            <a:ext uri="{FF2B5EF4-FFF2-40B4-BE49-F238E27FC236}">
-              <a16:creationId xmlns:a16="http://schemas.microsoft.com/office/drawing/2014/main" id="{B77207C0-0163-0822-7597-8C5510488C30}"/>
-            </a:ext>
-          </a:extLst>
-        </p:cNvPr>
+        <p:cNvPr id="1" name=""/>
         <p:cNvGrpSpPr/>
         <p:nvPr/>
       </p:nvGrpSpPr>
@@ -15665,13 +14907,7 @@
       </p:grpSpPr>
       <p:sp>
         <p:nvSpPr>
-          <p:cNvPr id="17" name="矩形 16">
-            <a:extLst>
-              <a:ext uri="{FF2B5EF4-FFF2-40B4-BE49-F238E27FC236}">
-                <a16:creationId xmlns:a16="http://schemas.microsoft.com/office/drawing/2014/main" id="{9BCF79AF-AB62-522E-23CD-8967E7E29D91}"/>
-              </a:ext>
-            </a:extLst>
-          </p:cNvPr>
+          <p:cNvPr id="17" name="矩形 16"/>
           <p:cNvSpPr/>
           <p:nvPr/>
         </p:nvSpPr>
@@ -15717,13 +14953,7 @@
       </p:sp>
       <p:sp>
         <p:nvSpPr>
-          <p:cNvPr id="18" name="矩形 17">
-            <a:extLst>
-              <a:ext uri="{FF2B5EF4-FFF2-40B4-BE49-F238E27FC236}">
-                <a16:creationId xmlns:a16="http://schemas.microsoft.com/office/drawing/2014/main" id="{6A0B70DD-CF3B-89F1-B0D3-4073479F593C}"/>
-              </a:ext>
-            </a:extLst>
-          </p:cNvPr>
+          <p:cNvPr id="18" name="矩形 17"/>
           <p:cNvSpPr/>
           <p:nvPr/>
         </p:nvSpPr>
@@ -15769,13 +14999,7 @@
       </p:sp>
       <p:sp>
         <p:nvSpPr>
-          <p:cNvPr id="20" name="矩形 19">
-            <a:extLst>
-              <a:ext uri="{FF2B5EF4-FFF2-40B4-BE49-F238E27FC236}">
-                <a16:creationId xmlns:a16="http://schemas.microsoft.com/office/drawing/2014/main" id="{183472AA-9C9F-0AA9-A8CB-999E847C20CD}"/>
-              </a:ext>
-            </a:extLst>
-          </p:cNvPr>
+          <p:cNvPr id="20" name="矩形 19"/>
           <p:cNvSpPr/>
           <p:nvPr/>
         </p:nvSpPr>
@@ -15922,13 +15146,7 @@
       </p:sp>
       <p:sp>
         <p:nvSpPr>
-          <p:cNvPr id="24" name="日期占位符 7">
-            <a:extLst>
-              <a:ext uri="{FF2B5EF4-FFF2-40B4-BE49-F238E27FC236}">
-                <a16:creationId xmlns:a16="http://schemas.microsoft.com/office/drawing/2014/main" id="{D7B54F2B-53DF-DCF4-3B84-672EB1D28483}"/>
-              </a:ext>
-            </a:extLst>
-          </p:cNvPr>
+          <p:cNvPr id="24" name="日期占位符 7"/>
           <p:cNvSpPr>
             <a:spLocks noGrp="1"/>
           </p:cNvSpPr>
@@ -15968,13 +15186,7 @@
       </p:sp>
       <p:cxnSp>
         <p:nvCxnSpPr>
-          <p:cNvPr id="26" name="直接连接符 25">
-            <a:extLst>
-              <a:ext uri="{FF2B5EF4-FFF2-40B4-BE49-F238E27FC236}">
-                <a16:creationId xmlns:a16="http://schemas.microsoft.com/office/drawing/2014/main" id="{77EF56C9-4B88-FB53-AC70-87290DDF0433}"/>
-              </a:ext>
-            </a:extLst>
-          </p:cNvPr>
+          <p:cNvPr id="26" name="直接连接符 25"/>
           <p:cNvCxnSpPr/>
           <p:nvPr/>
         </p:nvCxnSpPr>
@@ -16007,15 +15219,54 @@
           </a:fontRef>
         </p:style>
       </p:cxnSp>
+      <p:sp>
+        <p:nvSpPr>
+          <p:cNvPr id="19" name="文本框 18"/>
+          <p:cNvSpPr txBox="1"/>
+          <p:nvPr/>
+        </p:nvSpPr>
+        <p:spPr>
+          <a:xfrm>
+            <a:off x="415183" y="166469"/>
+            <a:ext cx="6798981" cy="645160"/>
+          </a:xfrm>
+          <a:prstGeom prst="rect">
+            <a:avLst/>
+          </a:prstGeom>
+          <a:noFill/>
+        </p:spPr>
+        <p:txBody>
+          <a:bodyPr wrap="square" rtlCol="0">
+            <a:spAutoFit/>
+          </a:bodyPr>
+          <a:lstStyle/>
+          <a:p>
+            <a:pPr>
+              <a:lnSpc>
+                <a:spcPct val="90000"/>
+              </a:lnSpc>
+              <a:spcBef>
+                <a:spcPts val="1000"/>
+              </a:spcBef>
+              <a:defRPr/>
+            </a:pPr>
+            <a:r>
+              <a:rPr lang="zh-CN" altLang="en-US" sz="4000" b="1" dirty="0">
+                <a:solidFill>
+                  <a:srgbClr val="4747BA"/>
+                </a:solidFill>
+                <a:latin typeface="Constantia" panose="02030602050306030303" pitchFamily="18" charset="0"/>
+                <a:ea typeface="腾讯体 W3" panose="020C04030202040F0204" pitchFamily="34" charset="-122"/>
+                <a:cs typeface="Times" panose="02020603050405020304" pitchFamily="18" charset="0"/>
+              </a:rPr>
+              <a:t>实验平台</a:t>
+            </a:r>
+          </a:p>
+        </p:txBody>
+      </p:sp>
       <p:pic>
         <p:nvPicPr>
-          <p:cNvPr id="23" name="图片 22">
-            <a:extLst>
-              <a:ext uri="{FF2B5EF4-FFF2-40B4-BE49-F238E27FC236}">
-                <a16:creationId xmlns:a16="http://schemas.microsoft.com/office/drawing/2014/main" id="{A6304232-66F9-4270-3D53-376003003680}"/>
-              </a:ext>
-            </a:extLst>
-          </p:cNvPr>
+          <p:cNvPr id="23" name="图片 22"/>
           <p:cNvPicPr>
             <a:picLocks noChangeAspect="1"/>
           </p:cNvPicPr>
@@ -16045,13 +15296,7 @@
       </p:pic>
       <p:sp>
         <p:nvSpPr>
-          <p:cNvPr id="14" name="灯片编号占位符 8">
-            <a:extLst>
-              <a:ext uri="{FF2B5EF4-FFF2-40B4-BE49-F238E27FC236}">
-                <a16:creationId xmlns:a16="http://schemas.microsoft.com/office/drawing/2014/main" id="{76305C1D-2303-B699-BA96-36E6E33C3CFB}"/>
-              </a:ext>
-            </a:extLst>
-          </p:cNvPr>
+          <p:cNvPr id="14" name="灯片编号占位符 8"/>
           <p:cNvSpPr>
             <a:spLocks noGrp="1"/>
           </p:cNvSpPr>
@@ -16092,13 +15337,7 @@
       </p:sp>
       <p:pic>
         <p:nvPicPr>
-          <p:cNvPr id="44" name="图片 43">
-            <a:extLst>
-              <a:ext uri="{FF2B5EF4-FFF2-40B4-BE49-F238E27FC236}">
-                <a16:creationId xmlns:a16="http://schemas.microsoft.com/office/drawing/2014/main" id="{E22E6F47-3373-9451-A9BA-54F342BBE8C8}"/>
-              </a:ext>
-            </a:extLst>
-          </p:cNvPr>
+          <p:cNvPr id="44" name="图片 43"/>
           <p:cNvPicPr>
             <a:picLocks noChangeAspect="1"/>
           </p:cNvPicPr>
@@ -16128,19 +15367,13 @@
       </p:pic>
       <p:sp>
         <p:nvSpPr>
-          <p:cNvPr id="2" name="文本框 1">
-            <a:extLst>
-              <a:ext uri="{FF2B5EF4-FFF2-40B4-BE49-F238E27FC236}">
-                <a16:creationId xmlns:a16="http://schemas.microsoft.com/office/drawing/2014/main" id="{CD6A8635-9568-F2EA-5C9A-135ED944F8D7}"/>
-              </a:ext>
-            </a:extLst>
-          </p:cNvPr>
+          <p:cNvPr id="2" name="文本框 1"/>
           <p:cNvSpPr txBox="1"/>
           <p:nvPr/>
         </p:nvSpPr>
         <p:spPr>
           <a:xfrm>
-            <a:off x="385590" y="1095737"/>
+            <a:off x="440055" y="1088390"/>
             <a:ext cx="6951980" cy="460375"/>
           </a:xfrm>
           <a:prstGeom prst="rect">
@@ -16155,14 +15388,14 @@
           <a:lstStyle/>
           <a:p>
             <a:r>
-              <a:rPr lang="en-US" altLang="zh-CN" sz="2400" dirty="0" err="1">
+              <a:rPr lang="en-US" altLang="zh-CN" sz="2400" dirty="0">
                 <a:solidFill>
                   <a:srgbClr val="4747BA"/>
                 </a:solidFill>
                 <a:ea typeface="+mn-lt"/>
                 <a:cs typeface="Times New Roman" panose="02020603050405020304" charset="0"/>
               </a:rPr>
-              <a:t>NVMevirt</a:t>
+              <a:t>ZNS</a:t>
             </a:r>
             <a:r>
               <a:rPr lang="zh-CN" altLang="en-US" sz="2400" dirty="0">
@@ -16172,7 +15405,7 @@
                 <a:ea typeface="+mn-lt"/>
                 <a:cs typeface="Times New Roman" panose="02020603050405020304" charset="0"/>
               </a:rPr>
-              <a:t>模拟器</a:t>
+              <a:t>设备</a:t>
             </a:r>
             <a:endParaRPr lang="en-US" altLang="zh-CN" sz="2400" dirty="0">
               <a:solidFill>
@@ -16186,10 +15419,156 @@
       </p:sp>
       <p:sp>
         <p:nvSpPr>
+          <p:cNvPr id="5" name="文本框 4"/>
+          <p:cNvSpPr txBox="1"/>
+          <p:nvPr/>
+        </p:nvSpPr>
+        <p:spPr>
+          <a:xfrm>
+            <a:off x="385590" y="1576511"/>
+            <a:ext cx="6696883" cy="2461508"/>
+          </a:xfrm>
+          <a:prstGeom prst="rect">
+            <a:avLst/>
+          </a:prstGeom>
+          <a:noFill/>
+        </p:spPr>
+        <p:txBody>
+          <a:bodyPr wrap="square" rtlCol="0" anchor="t">
+            <a:spAutoFit/>
+          </a:bodyPr>
+          <a:lstStyle/>
+          <a:p>
+            <a:pPr marL="342900" indent="-342900">
+              <a:lnSpc>
+                <a:spcPct val="130000"/>
+              </a:lnSpc>
+              <a:buFont typeface="Wingdings" panose="05000000000000000000" charset="0"/>
+              <a:buChar char="q"/>
+            </a:pPr>
+            <a:r>
+              <a:rPr lang="en-US" altLang="zh-CN" sz="2000" dirty="0">
+                <a:sym typeface="+mn-ea"/>
+              </a:rPr>
+              <a:t>ZNS</a:t>
+            </a:r>
+            <a:r>
+              <a:rPr lang="zh-CN" altLang="en-US" sz="2000" dirty="0">
+                <a:sym typeface="+mn-ea"/>
+              </a:rPr>
+              <a:t>采用</a:t>
+            </a:r>
+            <a:r>
+              <a:rPr lang="en-US" altLang="zh-CN" sz="2000" dirty="0">
+                <a:sym typeface="+mn-ea"/>
+              </a:rPr>
+              <a:t>U.2</a:t>
+            </a:r>
+            <a:r>
+              <a:rPr lang="zh-CN" altLang="en-US" sz="2000" dirty="0">
+                <a:sym typeface="+mn-ea"/>
+              </a:rPr>
+              <a:t>接口，如右图</a:t>
+            </a:r>
+            <a:r>
+              <a:rPr lang="en-US" altLang="zh-CN" sz="2000" dirty="0">
+                <a:sym typeface="+mn-ea"/>
+              </a:rPr>
+              <a:t> </a:t>
+            </a:r>
+          </a:p>
+          <a:p>
+            <a:pPr marL="342900" indent="-342900">
+              <a:lnSpc>
+                <a:spcPct val="130000"/>
+              </a:lnSpc>
+              <a:buFont typeface="Wingdings" panose="05000000000000000000" charset="0"/>
+              <a:buChar char="q"/>
+            </a:pPr>
+            <a:r>
+              <a:rPr lang="zh-CN" altLang="en-US" sz="2000" dirty="0">
+                <a:sym typeface="+mn-ea"/>
+              </a:rPr>
+              <a:t>另外，初步测试了</a:t>
+            </a:r>
+            <a:r>
+              <a:rPr lang="en-US" altLang="zh-CN" sz="2000" dirty="0" err="1">
+                <a:sym typeface="+mn-ea"/>
+              </a:rPr>
+              <a:t>RocksDB</a:t>
+            </a:r>
+            <a:r>
+              <a:rPr lang="en-US" altLang="zh-CN" sz="2000" dirty="0">
+                <a:sym typeface="+mn-ea"/>
+              </a:rPr>
+              <a:t> + </a:t>
+            </a:r>
+            <a:r>
+              <a:rPr lang="en-US" altLang="zh-CN" sz="2000" dirty="0" err="1">
+                <a:sym typeface="+mn-ea"/>
+              </a:rPr>
+              <a:t>ZenFS</a:t>
+            </a:r>
+            <a:r>
+              <a:rPr lang="zh-CN" altLang="en-US" sz="2000" dirty="0">
+                <a:sym typeface="+mn-ea"/>
+              </a:rPr>
+              <a:t>的表现，与之前</a:t>
+            </a:r>
+            <a:r>
+              <a:rPr lang="en-US" altLang="zh-CN" sz="2000" dirty="0" err="1">
+                <a:sym typeface="+mn-ea"/>
+              </a:rPr>
+              <a:t>NVMevirt</a:t>
+            </a:r>
+            <a:r>
+              <a:rPr lang="zh-CN" altLang="en-US" sz="2000" dirty="0">
+                <a:sym typeface="+mn-ea"/>
+              </a:rPr>
+              <a:t>模拟结果相比，模拟器的延迟过低。我认为原因在于它是内核模块实现，可能只体现了主机</a:t>
+            </a:r>
+            <a:r>
+              <a:rPr lang="en-US" altLang="zh-CN" sz="2000" dirty="0">
+                <a:sym typeface="+mn-ea"/>
+              </a:rPr>
+              <a:t>l/O</a:t>
+            </a:r>
+            <a:r>
+              <a:rPr lang="zh-CN" altLang="en-US" sz="2000" dirty="0">
+                <a:sym typeface="+mn-ea"/>
+              </a:rPr>
+              <a:t>栈的延迟。</a:t>
+            </a:r>
+            <a:endParaRPr lang="en-US" altLang="zh-CN" sz="2000" dirty="0">
+              <a:sym typeface="+mn-ea"/>
+            </a:endParaRPr>
+          </a:p>
+          <a:p>
+            <a:pPr marL="342900" indent="-342900">
+              <a:lnSpc>
+                <a:spcPct val="130000"/>
+              </a:lnSpc>
+              <a:buFont typeface="Wingdings" panose="05000000000000000000" charset="0"/>
+              <a:buChar char="q"/>
+            </a:pPr>
+            <a:r>
+              <a:rPr lang="zh-CN" altLang="en-US" sz="2000" dirty="0">
+                <a:sym typeface="+mn-ea"/>
+              </a:rPr>
+              <a:t>连接到服务器后，查看块设备，如右下图所示</a:t>
+            </a:r>
+            <a:endParaRPr lang="en-US" altLang="zh-CN" sz="2000" dirty="0">
+              <a:sym typeface="+mn-ea"/>
+            </a:endParaRPr>
+          </a:p>
+        </p:txBody>
+      </p:sp>
+      <p:sp>
+        <p:nvSpPr>
           <p:cNvPr id="7" name="Fußzeilenplatzhalter 4">
             <a:extLst>
               <a:ext uri="{FF2B5EF4-FFF2-40B4-BE49-F238E27FC236}">
-                <a16:creationId xmlns:a16="http://schemas.microsoft.com/office/drawing/2014/main" id="{230A5A59-8CFE-F460-EF76-35BA8DBA5CB4}"/>
+                <a16:creationId xmlns:a16="http://schemas.microsoft.com/office/drawing/2014/main" id="{293457A3-1637-3737-9B53-1CF17294975F}"/>
               </a:ext>
             </a:extLst>
           </p:cNvPr>
@@ -16239,10 +15618,10 @@
       </p:sp>
       <p:pic>
         <p:nvPicPr>
-          <p:cNvPr id="9" name="图片 8">
+          <p:cNvPr id="8" name="图片 7">
             <a:extLst>
               <a:ext uri="{FF2B5EF4-FFF2-40B4-BE49-F238E27FC236}">
-                <a16:creationId xmlns:a16="http://schemas.microsoft.com/office/drawing/2014/main" id="{E4C26BFD-07D2-1402-6762-AA6C1819FF9E}"/>
+                <a16:creationId xmlns:a16="http://schemas.microsoft.com/office/drawing/2014/main" id="{E6F57F7C-C43A-4F29-54A3-9E2A41811FC0}"/>
               </a:ext>
             </a:extLst>
           </p:cNvPr>
@@ -16252,7 +15631,7 @@
           <p:nvPr/>
         </p:nvPicPr>
         <p:blipFill>
-          <a:blip r:embed="rId5">
+          <a:blip r:embed="rId5" cstate="print">
             <a:extLst>
               <a:ext uri="{28A0092B-C50C-407E-A947-70E740481C1C}">
                 <a14:useLocalDpi xmlns:a14="http://schemas.microsoft.com/office/drawing/2010/main" val="0"/>
@@ -16265,210 +15644,90 @@
         </p:blipFill>
         <p:spPr>
           <a:xfrm>
-            <a:off x="502920" y="2129895"/>
-            <a:ext cx="10789920" cy="3632368"/>
+            <a:off x="9985299" y="1248081"/>
+            <a:ext cx="1598233" cy="2243013"/>
           </a:xfrm>
           <a:prstGeom prst="rect">
             <a:avLst/>
           </a:prstGeom>
         </p:spPr>
       </p:pic>
-      <p:sp>
-        <p:nvSpPr>
-          <p:cNvPr id="10" name="文本框 9">
+      <p:pic>
+        <p:nvPicPr>
+          <p:cNvPr id="11" name="图片 10">
             <a:extLst>
               <a:ext uri="{FF2B5EF4-FFF2-40B4-BE49-F238E27FC236}">
-                <a16:creationId xmlns:a16="http://schemas.microsoft.com/office/drawing/2014/main" id="{4C987B7A-4374-B1F9-370C-0F02F92AD88B}"/>
+                <a16:creationId xmlns:a16="http://schemas.microsoft.com/office/drawing/2014/main" id="{B6DE7B69-1B2D-65EE-4842-C041A2060456}"/>
               </a:ext>
             </a:extLst>
           </p:cNvPr>
-          <p:cNvSpPr txBox="1"/>
+          <p:cNvPicPr>
+            <a:picLocks noChangeAspect="1"/>
+          </p:cNvPicPr>
           <p:nvPr/>
-        </p:nvSpPr>
+        </p:nvPicPr>
+        <p:blipFill>
+          <a:blip r:embed="rId6" cstate="print">
+            <a:extLst>
+              <a:ext uri="{28A0092B-C50C-407E-A947-70E740481C1C}">
+                <a14:useLocalDpi xmlns:a14="http://schemas.microsoft.com/office/drawing/2010/main" val="0"/>
+              </a:ext>
+            </a:extLst>
+          </a:blip>
+          <a:stretch>
+            <a:fillRect/>
+          </a:stretch>
+        </p:blipFill>
         <p:spPr>
           <a:xfrm>
-            <a:off x="385590" y="1513449"/>
-            <a:ext cx="10483318" cy="506934"/>
+            <a:off x="7743977" y="1248799"/>
+            <a:ext cx="1693704" cy="2258272"/>
           </a:xfrm>
           <a:prstGeom prst="rect">
             <a:avLst/>
           </a:prstGeom>
-          <a:noFill/>
-        </p:spPr>
-        <p:txBody>
-          <a:bodyPr wrap="square">
-            <a:spAutoFit/>
-          </a:bodyPr>
-          <a:lstStyle/>
-          <a:p>
-            <a:pPr>
-              <a:lnSpc>
-                <a:spcPct val="150000"/>
-              </a:lnSpc>
-            </a:pPr>
-            <a:r>
-              <a:rPr lang="zh-CN" altLang="en-US" sz="2000" dirty="0">
-                <a:solidFill>
-                  <a:srgbClr val="0D0D0D"/>
-                </a:solidFill>
-                <a:latin typeface="Söhne"/>
-              </a:rPr>
-              <a:t>如图，构建了一个</a:t>
-            </a:r>
-            <a:r>
-              <a:rPr lang="en-US" altLang="zh-CN" sz="2000" dirty="0">
-                <a:solidFill>
-                  <a:srgbClr val="0D0D0D"/>
-                </a:solidFill>
-                <a:latin typeface="Söhne"/>
-              </a:rPr>
-              <a:t>Zone</a:t>
-            </a:r>
-            <a:r>
-              <a:rPr lang="zh-CN" altLang="en-US" sz="2000" dirty="0">
-                <a:solidFill>
-                  <a:srgbClr val="0D0D0D"/>
-                </a:solidFill>
-                <a:latin typeface="Söhne"/>
-              </a:rPr>
-              <a:t>大小为</a:t>
-            </a:r>
-            <a:r>
-              <a:rPr lang="en-US" altLang="zh-CN" sz="2000" dirty="0">
-                <a:solidFill>
-                  <a:srgbClr val="0D0D0D"/>
-                </a:solidFill>
-                <a:latin typeface="Söhne"/>
-              </a:rPr>
-              <a:t>10MB</a:t>
-            </a:r>
-            <a:r>
-              <a:rPr lang="zh-CN" altLang="en-US" sz="2000" dirty="0">
-                <a:solidFill>
-                  <a:srgbClr val="0D0D0D"/>
-                </a:solidFill>
-                <a:latin typeface="Söhne"/>
-              </a:rPr>
-              <a:t>的</a:t>
-            </a:r>
-            <a:r>
-              <a:rPr lang="en-US" altLang="zh-CN" sz="2000" dirty="0">
-                <a:solidFill>
-                  <a:srgbClr val="0D0D0D"/>
-                </a:solidFill>
-                <a:latin typeface="Söhne"/>
-              </a:rPr>
-              <a:t>ZNS</a:t>
-            </a:r>
-            <a:r>
-              <a:rPr lang="zh-CN" altLang="en-US" sz="2000" dirty="0">
-                <a:solidFill>
-                  <a:srgbClr val="0D0D0D"/>
-                </a:solidFill>
-                <a:latin typeface="Söhne"/>
-              </a:rPr>
-              <a:t>盘，使用</a:t>
-            </a:r>
-            <a:r>
-              <a:rPr lang="en-US" altLang="zh-CN" sz="2000" dirty="0" err="1">
-                <a:solidFill>
-                  <a:srgbClr val="0D0D0D"/>
-                </a:solidFill>
-                <a:latin typeface="Söhne"/>
-              </a:rPr>
-              <a:t>nvme</a:t>
-            </a:r>
-            <a:r>
-              <a:rPr lang="en-US" altLang="zh-CN" sz="2000" dirty="0">
-                <a:solidFill>
-                  <a:srgbClr val="0D0D0D"/>
-                </a:solidFill>
-                <a:latin typeface="Söhne"/>
-              </a:rPr>
-              <a:t>-cli</a:t>
-            </a:r>
-            <a:r>
-              <a:rPr lang="zh-CN" altLang="en-US" sz="2000" dirty="0">
-                <a:solidFill>
-                  <a:srgbClr val="0D0D0D"/>
-                </a:solidFill>
-                <a:latin typeface="Söhne"/>
-              </a:rPr>
-              <a:t>报告状态如下</a:t>
-            </a:r>
-            <a:r>
-              <a:rPr lang="en-US" altLang="zh-CN" sz="2000" dirty="0">
-                <a:solidFill>
-                  <a:srgbClr val="0D0D0D"/>
-                </a:solidFill>
-                <a:latin typeface="Söhne"/>
-              </a:rPr>
-              <a:t>:</a:t>
-            </a:r>
-            <a:endParaRPr lang="zh-CN" altLang="en-US" sz="2000" dirty="0">
-              <a:solidFill>
-                <a:srgbClr val="0D0D0D"/>
-              </a:solidFill>
-              <a:latin typeface="Söhne"/>
-            </a:endParaRPr>
-          </a:p>
-        </p:txBody>
-      </p:sp>
-      <p:sp>
-        <p:nvSpPr>
-          <p:cNvPr id="12" name="文本框 11">
+        </p:spPr>
+      </p:pic>
+      <p:pic>
+        <p:nvPicPr>
+          <p:cNvPr id="27" name="图片 26">
             <a:extLst>
               <a:ext uri="{FF2B5EF4-FFF2-40B4-BE49-F238E27FC236}">
-                <a16:creationId xmlns:a16="http://schemas.microsoft.com/office/drawing/2014/main" id="{D8F40BCB-A496-472A-3164-1BE66625EF2E}"/>
+                <a16:creationId xmlns:a16="http://schemas.microsoft.com/office/drawing/2014/main" id="{777837E1-82E7-66D5-866F-6FEAA4F28829}"/>
               </a:ext>
             </a:extLst>
           </p:cNvPr>
-          <p:cNvSpPr txBox="1"/>
+          <p:cNvPicPr>
+            <a:picLocks noChangeAspect="1"/>
+          </p:cNvPicPr>
           <p:nvPr/>
-        </p:nvSpPr>
+        </p:nvPicPr>
+        <p:blipFill>
+          <a:blip r:embed="rId7">
+            <a:extLst>
+              <a:ext uri="{28A0092B-C50C-407E-A947-70E740481C1C}">
+                <a14:useLocalDpi xmlns:a14="http://schemas.microsoft.com/office/drawing/2010/main" val="0"/>
+              </a:ext>
+            </a:extLst>
+          </a:blip>
+          <a:stretch>
+            <a:fillRect/>
+          </a:stretch>
+        </p:blipFill>
         <p:spPr>
           <a:xfrm>
-            <a:off x="385590" y="310242"/>
-            <a:ext cx="6798981" cy="535531"/>
+            <a:off x="6066174" y="4065765"/>
+            <a:ext cx="5517358" cy="2270957"/>
           </a:xfrm>
           <a:prstGeom prst="rect">
             <a:avLst/>
           </a:prstGeom>
-          <a:noFill/>
-        </p:spPr>
-        <p:txBody>
-          <a:bodyPr wrap="square" rtlCol="0">
-            <a:spAutoFit/>
-          </a:bodyPr>
-          <a:lstStyle/>
-          <a:p>
-            <a:pPr>
-              <a:lnSpc>
-                <a:spcPct val="90000"/>
-              </a:lnSpc>
-              <a:spcBef>
-                <a:spcPts val="1000"/>
-              </a:spcBef>
-              <a:defRPr/>
-            </a:pPr>
-            <a:r>
-              <a:rPr lang="zh-CN" altLang="en-US" sz="3200" b="1" dirty="0">
-                <a:solidFill>
-                  <a:srgbClr val="4747BA"/>
-                </a:solidFill>
-                <a:latin typeface="Constantia" panose="02030602050306030303" pitchFamily="18" charset="0"/>
-                <a:ea typeface="腾讯体 W3" panose="020C04030202040F0204" pitchFamily="34" charset="-122"/>
-                <a:cs typeface="Times" panose="02020603050405020304" pitchFamily="18" charset="0"/>
-              </a:rPr>
-              <a:t>实验平台</a:t>
-            </a:r>
-          </a:p>
-        </p:txBody>
-      </p:sp>
+        </p:spPr>
+      </p:pic>
     </p:spTree>
     <p:extLst>
       <p:ext uri="{BB962C8B-B14F-4D97-AF65-F5344CB8AC3E}">
-        <p14:creationId xmlns:p14="http://schemas.microsoft.com/office/powerpoint/2010/main" val="1317306700"/>
+        <p14:creationId xmlns:p14="http://schemas.microsoft.com/office/powerpoint/2010/main" val="3562333484"/>
       </p:ext>
     </p:extLst>
   </p:cSld>
@@ -16505,24 +15764,109 @@
       </p:grpSpPr>
       <p:sp>
         <p:nvSpPr>
-          <p:cNvPr id="17" name="矩形 16"/>
-          <p:cNvSpPr/>
+          <p:cNvPr id="21" name="文本框 20"/>
+          <p:cNvSpPr txBox="1"/>
           <p:nvPr/>
         </p:nvSpPr>
         <p:spPr>
           <a:xfrm>
-            <a:off x="0" y="6522720"/>
-            <a:ext cx="4267200" cy="335280"/>
+            <a:off x="8244849" y="4730406"/>
+            <a:ext cx="2099301" cy="1328569"/>
           </a:xfrm>
           <a:prstGeom prst="rect">
             <a:avLst/>
           </a:prstGeom>
+          <a:noFill/>
+        </p:spPr>
+        <p:txBody>
+          <a:bodyPr wrap="square" rtlCol="0">
+            <a:spAutoFit/>
+          </a:bodyPr>
+          <a:lstStyle/>
+          <a:p>
+            <a:pPr algn="ctr">
+              <a:lnSpc>
+                <a:spcPct val="90000"/>
+              </a:lnSpc>
+              <a:spcBef>
+                <a:spcPts val="1000"/>
+              </a:spcBef>
+              <a:defRPr/>
+            </a:pPr>
+            <a:r>
+              <a:rPr lang="en-US" altLang="zh-CN" sz="4000" b="1" dirty="0">
+                <a:solidFill>
+                  <a:srgbClr val="4747BA"/>
+                </a:solidFill>
+                <a:latin typeface="Constantia" panose="02030602050306030303" pitchFamily="18" charset="0"/>
+                <a:ea typeface="腾讯体 W3" panose="020C04030202040F0204" pitchFamily="34" charset="-122"/>
+                <a:cs typeface="Times" panose="02020603050405020304" pitchFamily="18" charset="0"/>
+              </a:rPr>
+              <a:t>Q&amp;A</a:t>
+            </a:r>
+          </a:p>
+          <a:p>
+            <a:pPr lvl="0" algn="ctr">
+              <a:lnSpc>
+                <a:spcPct val="90000"/>
+              </a:lnSpc>
+              <a:spcBef>
+                <a:spcPts val="1000"/>
+              </a:spcBef>
+              <a:defRPr/>
+            </a:pPr>
+            <a:r>
+              <a:rPr lang="en-US" altLang="zh-CN" sz="4000" b="1" dirty="0">
+                <a:solidFill>
+                  <a:srgbClr val="4747BA"/>
+                </a:solidFill>
+                <a:latin typeface="Constantia" panose="02030602050306030303" pitchFamily="18" charset="0"/>
+                <a:ea typeface="腾讯体 W3" panose="020C04030202040F0204" pitchFamily="34" charset="-122"/>
+                <a:cs typeface="Times" panose="02020603050405020304" pitchFamily="18" charset="0"/>
+              </a:rPr>
+              <a:t>Thanks</a:t>
+            </a:r>
+            <a:r>
+              <a:rPr lang="zh-CN" altLang="en-US" sz="4000" b="1" dirty="0">
+                <a:solidFill>
+                  <a:srgbClr val="4747BA"/>
+                </a:solidFill>
+                <a:latin typeface="Constantia" panose="02030602050306030303" pitchFamily="18" charset="0"/>
+                <a:ea typeface="腾讯体 W3" panose="020C04030202040F0204" pitchFamily="34" charset="-122"/>
+                <a:cs typeface="Times" panose="02020603050405020304" pitchFamily="18" charset="0"/>
+              </a:rPr>
+              <a:t>！</a:t>
+            </a:r>
+          </a:p>
+        </p:txBody>
+      </p:sp>
+      <p:sp>
+        <p:nvSpPr>
+          <p:cNvPr id="8" name="矩形: 圆角 7"/>
+          <p:cNvSpPr/>
+          <p:nvPr/>
+        </p:nvSpPr>
+        <p:spPr>
+          <a:xfrm rot="2755966">
+            <a:off x="4146517" y="3347706"/>
+            <a:ext cx="1613489" cy="1613489"/>
+          </a:xfrm>
+          <a:prstGeom prst="roundRect">
+            <a:avLst/>
+          </a:prstGeom>
           <a:solidFill>
-            <a:srgbClr val="4747BA"/>
+            <a:srgbClr val="8484D1"/>
           </a:solidFill>
           <a:ln>
             <a:noFill/>
           </a:ln>
+          <a:effectLst>
+            <a:outerShdw blurRad="88900" dist="50800" dir="8100000" sx="101000" sy="101000" algn="tr" rotWithShape="0">
+              <a:prstClr val="black">
+                <a:alpha val="40000"/>
+              </a:prstClr>
+            </a:outerShdw>
+          </a:effectLst>
         </p:spPr>
         <p:style>
           <a:lnRef idx="2">
@@ -16551,16 +15895,16 @@
       </p:sp>
       <p:sp>
         <p:nvSpPr>
-          <p:cNvPr id="18" name="矩形 17"/>
+          <p:cNvPr id="9" name="矩形: 圆角 8"/>
           <p:cNvSpPr/>
           <p:nvPr/>
         </p:nvSpPr>
         <p:spPr>
-          <a:xfrm>
-            <a:off x="4267200" y="6522720"/>
-            <a:ext cx="4267200" cy="335280"/>
-          </a:xfrm>
-          <a:prstGeom prst="rect">
+          <a:xfrm rot="2755966">
+            <a:off x="2770276" y="966707"/>
+            <a:ext cx="1613489" cy="1613489"/>
+          </a:xfrm>
+          <a:prstGeom prst="roundRect">
             <a:avLst/>
           </a:prstGeom>
           <a:solidFill>
@@ -16569,6 +15913,13 @@
           <a:ln>
             <a:noFill/>
           </a:ln>
+          <a:effectLst>
+            <a:outerShdw blurRad="88900" dist="50800" dir="8100000" sx="101000" sy="101000" algn="tr" rotWithShape="0">
+              <a:prstClr val="black">
+                <a:alpha val="40000"/>
+              </a:prstClr>
+            </a:outerShdw>
+          </a:effectLst>
         </p:spPr>
         <p:style>
           <a:lnRef idx="2">
@@ -16597,16 +15948,16 @@
       </p:sp>
       <p:sp>
         <p:nvSpPr>
-          <p:cNvPr id="20" name="矩形 19"/>
+          <p:cNvPr id="10" name="矩形: 圆角 9"/>
           <p:cNvSpPr/>
           <p:nvPr/>
         </p:nvSpPr>
         <p:spPr>
-          <a:xfrm>
-            <a:off x="8534400" y="6522720"/>
-            <a:ext cx="3657600" cy="335280"/>
-          </a:xfrm>
-          <a:prstGeom prst="rect">
+          <a:xfrm rot="2755966">
+            <a:off x="4586763" y="2029472"/>
+            <a:ext cx="732996" cy="732996"/>
+          </a:xfrm>
+          <a:prstGeom prst="roundRect">
             <a:avLst/>
           </a:prstGeom>
           <a:solidFill>
@@ -16615,6 +15966,13 @@
           <a:ln>
             <a:noFill/>
           </a:ln>
+          <a:effectLst>
+            <a:outerShdw blurRad="88900" dist="50800" dir="8100000" sx="101000" sy="101000" algn="tr" rotWithShape="0">
+              <a:prstClr val="black">
+                <a:alpha val="40000"/>
+              </a:prstClr>
+            </a:outerShdw>
+          </a:effectLst>
         </p:spPr>
         <p:style>
           <a:lnRef idx="2">
@@ -16633,309 +15991,286 @@
           </a:fontRef>
         </p:style>
         <p:txBody>
-          <a:bodyPr rot="0" spcFirstLastPara="0" vert="horz" wrap="square" lIns="91440" tIns="45720" rIns="91440" bIns="45720" numCol="1" spcCol="0" rtlCol="0" fromWordArt="0" anchor="ctr" anchorCtr="0" forceAA="0" compatLnSpc="1">
-            <a:noAutofit/>
-          </a:bodyPr>
-          <a:lstStyle>
-            <a:defPPr>
-              <a:defRPr lang="zh-CN"/>
-            </a:defPPr>
-            <a:lvl1pPr marL="0" algn="l" defTabSz="914400" rtl="0" eaLnBrk="1" latinLnBrk="0" hangingPunct="1">
-              <a:defRPr sz="1800" kern="1200">
-                <a:solidFill>
-                  <a:schemeClr val="lt1"/>
-                </a:solidFill>
-                <a:latin typeface="+mn-lt"/>
-                <a:ea typeface="+mn-ea"/>
-                <a:cs typeface="+mn-cs"/>
-              </a:defRPr>
-            </a:lvl1pPr>
-            <a:lvl2pPr marL="457200" algn="l" defTabSz="914400" rtl="0" eaLnBrk="1" latinLnBrk="0" hangingPunct="1">
-              <a:defRPr sz="1800" kern="1200">
-                <a:solidFill>
-                  <a:schemeClr val="lt1"/>
-                </a:solidFill>
-                <a:latin typeface="+mn-lt"/>
-                <a:ea typeface="+mn-ea"/>
-                <a:cs typeface="+mn-cs"/>
-              </a:defRPr>
-            </a:lvl2pPr>
-            <a:lvl3pPr marL="914400" algn="l" defTabSz="914400" rtl="0" eaLnBrk="1" latinLnBrk="0" hangingPunct="1">
-              <a:defRPr sz="1800" kern="1200">
-                <a:solidFill>
-                  <a:schemeClr val="lt1"/>
-                </a:solidFill>
-                <a:latin typeface="+mn-lt"/>
-                <a:ea typeface="+mn-ea"/>
-                <a:cs typeface="+mn-cs"/>
-              </a:defRPr>
-            </a:lvl3pPr>
-            <a:lvl4pPr marL="1371600" algn="l" defTabSz="914400" rtl="0" eaLnBrk="1" latinLnBrk="0" hangingPunct="1">
-              <a:defRPr sz="1800" kern="1200">
-                <a:solidFill>
-                  <a:schemeClr val="lt1"/>
-                </a:solidFill>
-                <a:latin typeface="+mn-lt"/>
-                <a:ea typeface="+mn-ea"/>
-                <a:cs typeface="+mn-cs"/>
-              </a:defRPr>
-            </a:lvl4pPr>
-            <a:lvl5pPr marL="1828800" algn="l" defTabSz="914400" rtl="0" eaLnBrk="1" latinLnBrk="0" hangingPunct="1">
-              <a:defRPr sz="1800" kern="1200">
-                <a:solidFill>
-                  <a:schemeClr val="lt1"/>
-                </a:solidFill>
-                <a:latin typeface="+mn-lt"/>
-                <a:ea typeface="+mn-ea"/>
-                <a:cs typeface="+mn-cs"/>
-              </a:defRPr>
-            </a:lvl5pPr>
-            <a:lvl6pPr marL="2286000" algn="l" defTabSz="914400" rtl="0" eaLnBrk="1" latinLnBrk="0" hangingPunct="1">
-              <a:defRPr sz="1800" kern="1200">
-                <a:solidFill>
-                  <a:schemeClr val="lt1"/>
-                </a:solidFill>
-                <a:latin typeface="+mn-lt"/>
-                <a:ea typeface="+mn-ea"/>
-                <a:cs typeface="+mn-cs"/>
-              </a:defRPr>
-            </a:lvl6pPr>
-            <a:lvl7pPr marL="2743200" algn="l" defTabSz="914400" rtl="0" eaLnBrk="1" latinLnBrk="0" hangingPunct="1">
-              <a:defRPr sz="1800" kern="1200">
-                <a:solidFill>
-                  <a:schemeClr val="lt1"/>
-                </a:solidFill>
-                <a:latin typeface="+mn-lt"/>
-                <a:ea typeface="+mn-ea"/>
-                <a:cs typeface="+mn-cs"/>
-              </a:defRPr>
-            </a:lvl7pPr>
-            <a:lvl8pPr marL="3200400" algn="l" defTabSz="914400" rtl="0" eaLnBrk="1" latinLnBrk="0" hangingPunct="1">
-              <a:defRPr sz="1800" kern="1200">
-                <a:solidFill>
-                  <a:schemeClr val="lt1"/>
-                </a:solidFill>
-                <a:latin typeface="+mn-lt"/>
-                <a:ea typeface="+mn-ea"/>
-                <a:cs typeface="+mn-cs"/>
-              </a:defRPr>
-            </a:lvl8pPr>
-            <a:lvl9pPr marL="3657600" algn="l" defTabSz="914400" rtl="0" eaLnBrk="1" latinLnBrk="0" hangingPunct="1">
-              <a:defRPr sz="1800" kern="1200">
-                <a:solidFill>
-                  <a:schemeClr val="lt1"/>
-                </a:solidFill>
-                <a:latin typeface="+mn-lt"/>
-                <a:ea typeface="+mn-ea"/>
-                <a:cs typeface="+mn-cs"/>
-              </a:defRPr>
-            </a:lvl9pPr>
-          </a:lstStyle>
+          <a:bodyPr rtlCol="0" anchor="ctr"/>
+          <a:lstStyle/>
           <a:p>
             <a:pPr algn="ctr"/>
-            <a:endParaRPr lang="zh-CN" altLang="en-US" sz="1600" dirty="0">
-              <a:solidFill>
-                <a:schemeClr val="bg1"/>
-              </a:solidFill>
-              <a:latin typeface="Constantia" panose="02030602050306030303" pitchFamily="18" charset="0"/>
-            </a:endParaRPr>
-          </a:p>
-        </p:txBody>
-      </p:sp>
-      <p:sp>
-        <p:nvSpPr>
-          <p:cNvPr id="24" name="日期占位符 7"/>
-          <p:cNvSpPr>
-            <a:spLocks noGrp="1"/>
-          </p:cNvSpPr>
-          <p:nvPr>
-            <p:ph type="dt" sz="half" idx="10"/>
-          </p:nvPr>
-        </p:nvSpPr>
-        <p:spPr>
-          <a:xfrm>
-            <a:off x="1209907" y="6494974"/>
-            <a:ext cx="1847385" cy="365125"/>
-          </a:xfrm>
-        </p:spPr>
-        <p:txBody>
-          <a:bodyPr/>
-          <a:lstStyle/>
-          <a:p>
-            <a:fld id="{31CCC338-FFC3-4940-99DD-6195BEF39901}" type="datetime4">
-              <a:rPr lang="en-US" altLang="zh-CN" sz="1400" b="1">
-                <a:solidFill>
-                  <a:schemeClr val="bg1"/>
-                </a:solidFill>
-                <a:latin typeface="Constantia" panose="02030602050306030303" pitchFamily="18" charset="0"/>
-                <a:cs typeface="Times" panose="02020603050405020304" pitchFamily="18" charset="0"/>
-              </a:rPr>
-              <a:t>May 27, 2024</a:t>
-            </a:fld>
-            <a:endParaRPr lang="zh-CN" altLang="en-US" sz="1400" b="1" dirty="0">
-              <a:solidFill>
-                <a:schemeClr val="bg1"/>
-              </a:solidFill>
-              <a:latin typeface="Constantia" panose="02030602050306030303" pitchFamily="18" charset="0"/>
-              <a:cs typeface="Times" panose="02020603050405020304" pitchFamily="18" charset="0"/>
-            </a:endParaRPr>
-          </a:p>
-        </p:txBody>
-      </p:sp>
-      <p:cxnSp>
-        <p:nvCxnSpPr>
-          <p:cNvPr id="26" name="直接连接符 25"/>
-          <p:cNvCxnSpPr/>
+            <a:endParaRPr lang="zh-CN" altLang="en-US"/>
+          </a:p>
+        </p:txBody>
+      </p:sp>
+      <p:sp>
+        <p:nvSpPr>
+          <p:cNvPr id="11" name="矩形: 圆角 10"/>
+          <p:cNvSpPr/>
           <p:nvPr/>
-        </p:nvCxnSpPr>
-        <p:spPr>
-          <a:xfrm>
-            <a:off x="385590" y="859531"/>
-            <a:ext cx="11479576" cy="0"/>
-          </a:xfrm>
-          <a:prstGeom prst="line">
+        </p:nvSpPr>
+        <p:spPr>
+          <a:xfrm rot="2755966">
+            <a:off x="1415554" y="2470682"/>
+            <a:ext cx="3134556" cy="3134556"/>
+          </a:xfrm>
+          <a:prstGeom prst="roundRect">
             <a:avLst/>
           </a:prstGeom>
-          <a:ln w="38100">
-            <a:solidFill>
-              <a:srgbClr val="4747BA"/>
-            </a:solidFill>
+          <a:blipFill dpi="0" rotWithShape="0">
+            <a:blip r:embed="rId3"/>
+            <a:srcRect/>
+            <a:stretch>
+              <a:fillRect/>
+            </a:stretch>
+          </a:blipFill>
+          <a:ln>
+            <a:noFill/>
           </a:ln>
+          <a:effectLst>
+            <a:outerShdw blurRad="114300" dist="50800" dir="7800000" sx="101000" sy="101000" algn="tr" rotWithShape="0">
+              <a:prstClr val="black">
+                <a:alpha val="64000"/>
+              </a:prstClr>
+            </a:outerShdw>
+          </a:effectLst>
         </p:spPr>
         <p:style>
-          <a:lnRef idx="1">
-            <a:schemeClr val="accent1"/>
+          <a:lnRef idx="2">
+            <a:schemeClr val="accent1">
+              <a:shade val="50000"/>
+            </a:schemeClr>
           </a:lnRef>
-          <a:fillRef idx="0">
+          <a:fillRef idx="1">
             <a:schemeClr val="accent1"/>
           </a:fillRef>
           <a:effectRef idx="0">
             <a:schemeClr val="accent1"/>
           </a:effectRef>
           <a:fontRef idx="minor">
-            <a:schemeClr val="tx1"/>
+            <a:schemeClr val="lt1"/>
           </a:fontRef>
         </p:style>
-      </p:cxnSp>
-      <p:sp>
-        <p:nvSpPr>
-          <p:cNvPr id="19" name="文本框 18"/>
-          <p:cNvSpPr txBox="1"/>
+        <p:txBody>
+          <a:bodyPr rtlCol="0" anchor="ctr"/>
+          <a:lstStyle/>
+          <a:p>
+            <a:pPr algn="ctr"/>
+            <a:endParaRPr lang="zh-CN" altLang="en-US" dirty="0"/>
+          </a:p>
+        </p:txBody>
+      </p:sp>
+      <p:sp>
+        <p:nvSpPr>
+          <p:cNvPr id="12" name="矩形: 圆角 11"/>
+          <p:cNvSpPr/>
           <p:nvPr/>
         </p:nvSpPr>
         <p:spPr>
-          <a:xfrm>
-            <a:off x="415183" y="166469"/>
-            <a:ext cx="6798981" cy="645160"/>
-          </a:xfrm>
-          <a:prstGeom prst="rect">
+          <a:xfrm rot="2755966">
+            <a:off x="5633126" y="2433704"/>
+            <a:ext cx="1685894" cy="1685894"/>
+          </a:xfrm>
+          <a:prstGeom prst="roundRect">
             <a:avLst/>
           </a:prstGeom>
-          <a:noFill/>
-        </p:spPr>
-        <p:txBody>
-          <a:bodyPr wrap="square" rtlCol="0">
-            <a:spAutoFit/>
-          </a:bodyPr>
-          <a:lstStyle/>
-          <a:p>
-            <a:pPr>
-              <a:lnSpc>
-                <a:spcPct val="90000"/>
-              </a:lnSpc>
-              <a:spcBef>
-                <a:spcPts val="1000"/>
-              </a:spcBef>
-              <a:defRPr/>
-            </a:pPr>
-            <a:r>
-              <a:rPr lang="zh-CN" altLang="en-US" sz="4000" b="1" dirty="0">
-                <a:solidFill>
-                  <a:srgbClr val="4747BA"/>
-                </a:solidFill>
-                <a:latin typeface="Constantia" panose="02030602050306030303" pitchFamily="18" charset="0"/>
-                <a:ea typeface="腾讯体 W3" panose="020C04030202040F0204" pitchFamily="34" charset="-122"/>
-                <a:cs typeface="Times" panose="02020603050405020304" pitchFamily="18" charset="0"/>
-              </a:rPr>
-              <a:t>实验平台</a:t>
-            </a:r>
+          <a:solidFill>
+            <a:srgbClr val="4747BA"/>
+          </a:solidFill>
+          <a:ln>
+            <a:noFill/>
+          </a:ln>
+          <a:effectLst>
+            <a:outerShdw blurRad="88900" dist="50800" dir="8100000" sx="101000" sy="101000" algn="tr" rotWithShape="0">
+              <a:prstClr val="black">
+                <a:alpha val="40000"/>
+              </a:prstClr>
+            </a:outerShdw>
+          </a:effectLst>
+        </p:spPr>
+        <p:style>
+          <a:lnRef idx="2">
+            <a:schemeClr val="accent1">
+              <a:shade val="50000"/>
+            </a:schemeClr>
+          </a:lnRef>
+          <a:fillRef idx="1">
+            <a:schemeClr val="accent1"/>
+          </a:fillRef>
+          <a:effectRef idx="0">
+            <a:schemeClr val="accent1"/>
+          </a:effectRef>
+          <a:fontRef idx="minor">
+            <a:schemeClr val="lt1"/>
+          </a:fontRef>
+        </p:style>
+        <p:txBody>
+          <a:bodyPr rtlCol="0" anchor="ctr"/>
+          <a:lstStyle/>
+          <a:p>
+            <a:pPr algn="ctr"/>
+            <a:endParaRPr lang="zh-CN" altLang="en-US" dirty="0"/>
+          </a:p>
+        </p:txBody>
+      </p:sp>
+      <p:sp>
+        <p:nvSpPr>
+          <p:cNvPr id="15" name="矩形: 圆角 14"/>
+          <p:cNvSpPr/>
+          <p:nvPr/>
+        </p:nvSpPr>
+        <p:spPr>
+          <a:xfrm rot="2755966">
+            <a:off x="3965400" y="5546431"/>
+            <a:ext cx="732996" cy="732996"/>
+          </a:xfrm>
+          <a:prstGeom prst="roundRect">
+            <a:avLst/>
+          </a:prstGeom>
+          <a:solidFill>
+            <a:srgbClr val="ADADE0"/>
+          </a:solidFill>
+          <a:ln>
+            <a:noFill/>
+          </a:ln>
+          <a:effectLst>
+            <a:outerShdw blurRad="88900" dist="50800" dir="8100000" sx="101000" sy="101000" algn="tr" rotWithShape="0">
+              <a:prstClr val="black">
+                <a:alpha val="40000"/>
+              </a:prstClr>
+            </a:outerShdw>
+          </a:effectLst>
+        </p:spPr>
+        <p:style>
+          <a:lnRef idx="2">
+            <a:schemeClr val="accent1">
+              <a:shade val="50000"/>
+            </a:schemeClr>
+          </a:lnRef>
+          <a:fillRef idx="1">
+            <a:schemeClr val="accent1"/>
+          </a:fillRef>
+          <a:effectRef idx="0">
+            <a:schemeClr val="accent1"/>
+          </a:effectRef>
+          <a:fontRef idx="minor">
+            <a:schemeClr val="lt1"/>
+          </a:fontRef>
+        </p:style>
+        <p:txBody>
+          <a:bodyPr rtlCol="0" anchor="ctr"/>
+          <a:lstStyle/>
+          <a:p>
+            <a:pPr algn="ctr"/>
+            <a:endParaRPr lang="zh-CN" altLang="en-US"/>
+          </a:p>
+        </p:txBody>
+      </p:sp>
+      <p:sp>
+        <p:nvSpPr>
+          <p:cNvPr id="16" name="矩形: 圆角 15"/>
+          <p:cNvSpPr/>
+          <p:nvPr/>
+        </p:nvSpPr>
+        <p:spPr>
+          <a:xfrm rot="2755966">
+            <a:off x="5089423" y="716157"/>
+            <a:ext cx="1134056" cy="1134056"/>
+          </a:xfrm>
+          <a:prstGeom prst="roundRect">
+            <a:avLst/>
+          </a:prstGeom>
+          <a:solidFill>
+            <a:srgbClr val="4747BA"/>
+          </a:solidFill>
+          <a:ln>
+            <a:noFill/>
+          </a:ln>
+          <a:effectLst>
+            <a:outerShdw blurRad="88900" dist="50800" dir="8100000" sx="101000" sy="101000" algn="tr" rotWithShape="0">
+              <a:prstClr val="black">
+                <a:alpha val="40000"/>
+              </a:prstClr>
+            </a:outerShdw>
+          </a:effectLst>
+        </p:spPr>
+        <p:style>
+          <a:lnRef idx="2">
+            <a:schemeClr val="accent1">
+              <a:shade val="50000"/>
+            </a:schemeClr>
+          </a:lnRef>
+          <a:fillRef idx="1">
+            <a:schemeClr val="accent1"/>
+          </a:fillRef>
+          <a:effectRef idx="0">
+            <a:schemeClr val="accent1"/>
+          </a:effectRef>
+          <a:fontRef idx="minor">
+            <a:schemeClr val="lt1"/>
+          </a:fontRef>
+        </p:style>
+        <p:txBody>
+          <a:bodyPr rtlCol="0" anchor="ctr"/>
+          <a:lstStyle/>
+          <a:p>
+            <a:pPr algn="ctr"/>
+            <a:endParaRPr lang="zh-CN" altLang="en-US"/>
+          </a:p>
+        </p:txBody>
+      </p:sp>
+      <p:sp>
+        <p:nvSpPr>
+          <p:cNvPr id="19" name="矩形: 圆角 18"/>
+          <p:cNvSpPr/>
+          <p:nvPr/>
+        </p:nvSpPr>
+        <p:spPr>
+          <a:xfrm rot="2755966">
+            <a:off x="7189439" y="1365266"/>
+            <a:ext cx="396502" cy="396502"/>
+          </a:xfrm>
+          <a:prstGeom prst="roundRect">
+            <a:avLst/>
+          </a:prstGeom>
+          <a:solidFill>
+            <a:srgbClr val="ADADE0"/>
+          </a:solidFill>
+          <a:ln>
+            <a:noFill/>
+          </a:ln>
+          <a:effectLst>
+            <a:outerShdw blurRad="88900" dist="50800" dir="8100000" sx="101000" sy="101000" algn="tr" rotWithShape="0">
+              <a:prstClr val="black">
+                <a:alpha val="40000"/>
+              </a:prstClr>
+            </a:outerShdw>
+          </a:effectLst>
+        </p:spPr>
+        <p:style>
+          <a:lnRef idx="2">
+            <a:schemeClr val="accent1">
+              <a:shade val="50000"/>
+            </a:schemeClr>
+          </a:lnRef>
+          <a:fillRef idx="1">
+            <a:schemeClr val="accent1"/>
+          </a:fillRef>
+          <a:effectRef idx="0">
+            <a:schemeClr val="accent1"/>
+          </a:effectRef>
+          <a:fontRef idx="minor">
+            <a:schemeClr val="lt1"/>
+          </a:fontRef>
+        </p:style>
+        <p:txBody>
+          <a:bodyPr rtlCol="0" anchor="ctr"/>
+          <a:lstStyle/>
+          <a:p>
+            <a:pPr algn="ctr"/>
+            <a:endParaRPr lang="zh-CN" altLang="en-US"/>
           </a:p>
         </p:txBody>
       </p:sp>
       <p:pic>
         <p:nvPicPr>
-          <p:cNvPr id="23" name="图片 22"/>
-          <p:cNvPicPr>
-            <a:picLocks noChangeAspect="1"/>
-          </p:cNvPicPr>
-          <p:nvPr/>
-        </p:nvPicPr>
-        <p:blipFill>
-          <a:blip r:embed="rId3" cstate="print">
-            <a:extLst>
-              <a:ext uri="{28A0092B-C50C-407E-A947-70E740481C1C}">
-                <a14:useLocalDpi xmlns:a14="http://schemas.microsoft.com/office/drawing/2010/main" val="0"/>
-              </a:ext>
-            </a:extLst>
-          </a:blip>
-          <a:stretch>
-            <a:fillRect/>
-          </a:stretch>
-        </p:blipFill>
-        <p:spPr>
-          <a:xfrm>
-            <a:off x="7804063" y="218980"/>
-            <a:ext cx="730337" cy="556270"/>
-          </a:xfrm>
-          <a:prstGeom prst="rect">
-            <a:avLst/>
-          </a:prstGeom>
-        </p:spPr>
-      </p:pic>
-      <p:sp>
-        <p:nvSpPr>
-          <p:cNvPr id="14" name="灯片编号占位符 8"/>
-          <p:cNvSpPr>
-            <a:spLocks noGrp="1"/>
-          </p:cNvSpPr>
-          <p:nvPr>
-            <p:ph type="sldNum" sz="quarter" idx="12"/>
-          </p:nvPr>
-        </p:nvSpPr>
-        <p:spPr>
-          <a:xfrm>
-            <a:off x="9847869" y="6405035"/>
-            <a:ext cx="809393" cy="545001"/>
-          </a:xfrm>
-        </p:spPr>
-        <p:txBody>
-          <a:bodyPr/>
-          <a:lstStyle/>
-          <a:p>
-            <a:pPr algn="ctr"/>
-            <a:fld id="{152851E7-9224-42D2-A4FF-119762E40804}" type="slidenum">
-              <a:rPr lang="zh-CN" altLang="en-US" sz="1400" b="1" smtClean="0">
-                <a:solidFill>
-                  <a:schemeClr val="bg1"/>
-                </a:solidFill>
-                <a:latin typeface="Constantia" panose="02030602050306030303" pitchFamily="18" charset="0"/>
-                <a:cs typeface="Times" panose="02020603050405020304" pitchFamily="18" charset="0"/>
-              </a:rPr>
-              <a:t>9</a:t>
-            </a:fld>
-            <a:endParaRPr lang="zh-CN" altLang="en-US" sz="1400" b="1" dirty="0">
-              <a:solidFill>
-                <a:schemeClr val="bg1"/>
-              </a:solidFill>
-              <a:latin typeface="Constantia" panose="02030602050306030303" pitchFamily="18" charset="0"/>
-              <a:cs typeface="Times" panose="02020603050405020304" pitchFamily="18" charset="0"/>
-            </a:endParaRPr>
-          </a:p>
-        </p:txBody>
-      </p:sp>
-      <p:pic>
-        <p:nvPicPr>
-          <p:cNvPr id="44" name="图片 43"/>
+          <p:cNvPr id="17" name="图片 16"/>
           <p:cNvPicPr>
             <a:picLocks noChangeAspect="1"/>
           </p:cNvPicPr>
@@ -16955,274 +16290,17 @@
         </p:blipFill>
         <p:spPr>
           <a:xfrm>
-            <a:off x="8590829" y="204228"/>
-            <a:ext cx="3323471" cy="570629"/>
+            <a:off x="7804063" y="218980"/>
+            <a:ext cx="730337" cy="556270"/>
           </a:xfrm>
           <a:prstGeom prst="rect">
             <a:avLst/>
           </a:prstGeom>
         </p:spPr>
       </p:pic>
-      <p:sp>
-        <p:nvSpPr>
-          <p:cNvPr id="2" name="文本框 1"/>
-          <p:cNvSpPr txBox="1"/>
-          <p:nvPr/>
-        </p:nvSpPr>
-        <p:spPr>
-          <a:xfrm>
-            <a:off x="440055" y="1088390"/>
-            <a:ext cx="6951980" cy="460375"/>
-          </a:xfrm>
-          <a:prstGeom prst="rect">
-            <a:avLst/>
-          </a:prstGeom>
-          <a:noFill/>
-        </p:spPr>
-        <p:txBody>
-          <a:bodyPr wrap="square" rtlCol="0">
-            <a:spAutoFit/>
-          </a:bodyPr>
-          <a:lstStyle/>
-          <a:p>
-            <a:r>
-              <a:rPr lang="en-US" altLang="zh-CN" sz="2400" dirty="0">
-                <a:solidFill>
-                  <a:srgbClr val="4747BA"/>
-                </a:solidFill>
-                <a:ea typeface="+mn-lt"/>
-                <a:cs typeface="Times New Roman" panose="02020603050405020304" charset="0"/>
-              </a:rPr>
-              <a:t>ZNS</a:t>
-            </a:r>
-            <a:r>
-              <a:rPr lang="zh-CN" altLang="en-US" sz="2400" dirty="0">
-                <a:solidFill>
-                  <a:srgbClr val="4747BA"/>
-                </a:solidFill>
-                <a:ea typeface="+mn-lt"/>
-                <a:cs typeface="Times New Roman" panose="02020603050405020304" charset="0"/>
-              </a:rPr>
-              <a:t>设备</a:t>
-            </a:r>
-            <a:endParaRPr lang="en-US" altLang="zh-CN" sz="2400" dirty="0">
-              <a:solidFill>
-                <a:srgbClr val="4747BA"/>
-              </a:solidFill>
-              <a:ea typeface="+mn-lt"/>
-              <a:cs typeface="Times New Roman" panose="02020603050405020304" charset="0"/>
-            </a:endParaRPr>
-          </a:p>
-        </p:txBody>
-      </p:sp>
-      <p:sp>
-        <p:nvSpPr>
-          <p:cNvPr id="5" name="文本框 4"/>
-          <p:cNvSpPr txBox="1"/>
-          <p:nvPr/>
-        </p:nvSpPr>
-        <p:spPr>
-          <a:xfrm>
-            <a:off x="385590" y="1576511"/>
-            <a:ext cx="6696883" cy="2461508"/>
-          </a:xfrm>
-          <a:prstGeom prst="rect">
-            <a:avLst/>
-          </a:prstGeom>
-          <a:noFill/>
-        </p:spPr>
-        <p:txBody>
-          <a:bodyPr wrap="square" rtlCol="0" anchor="t">
-            <a:spAutoFit/>
-          </a:bodyPr>
-          <a:lstStyle/>
-          <a:p>
-            <a:pPr marL="342900" indent="-342900">
-              <a:lnSpc>
-                <a:spcPct val="130000"/>
-              </a:lnSpc>
-              <a:buFont typeface="Wingdings" panose="05000000000000000000" charset="0"/>
-              <a:buChar char="q"/>
-            </a:pPr>
-            <a:r>
-              <a:rPr lang="en-US" altLang="zh-CN" sz="2000" dirty="0">
-                <a:sym typeface="+mn-ea"/>
-              </a:rPr>
-              <a:t>ZNS</a:t>
-            </a:r>
-            <a:r>
-              <a:rPr lang="zh-CN" altLang="en-US" sz="2000" dirty="0">
-                <a:sym typeface="+mn-ea"/>
-              </a:rPr>
-              <a:t>采用</a:t>
-            </a:r>
-            <a:r>
-              <a:rPr lang="en-US" altLang="zh-CN" sz="2000" dirty="0">
-                <a:sym typeface="+mn-ea"/>
-              </a:rPr>
-              <a:t>U.2</a:t>
-            </a:r>
-            <a:r>
-              <a:rPr lang="zh-CN" altLang="en-US" sz="2000" dirty="0">
-                <a:sym typeface="+mn-ea"/>
-              </a:rPr>
-              <a:t>接口，如右图</a:t>
-            </a:r>
-            <a:r>
-              <a:rPr lang="en-US" altLang="zh-CN" sz="2000" dirty="0">
-                <a:sym typeface="+mn-ea"/>
-              </a:rPr>
-              <a:t> </a:t>
-            </a:r>
-          </a:p>
-          <a:p>
-            <a:pPr marL="342900" indent="-342900">
-              <a:lnSpc>
-                <a:spcPct val="130000"/>
-              </a:lnSpc>
-              <a:buFont typeface="Wingdings" panose="05000000000000000000" charset="0"/>
-              <a:buChar char="q"/>
-            </a:pPr>
-            <a:r>
-              <a:rPr lang="zh-CN" altLang="en-US" sz="2000" dirty="0">
-                <a:sym typeface="+mn-ea"/>
-              </a:rPr>
-              <a:t>另外，初步测试了</a:t>
-            </a:r>
-            <a:r>
-              <a:rPr lang="en-US" altLang="zh-CN" sz="2000" dirty="0" err="1">
-                <a:sym typeface="+mn-ea"/>
-              </a:rPr>
-              <a:t>RocksDB</a:t>
-            </a:r>
-            <a:r>
-              <a:rPr lang="en-US" altLang="zh-CN" sz="2000" dirty="0">
-                <a:sym typeface="+mn-ea"/>
-              </a:rPr>
-              <a:t> + </a:t>
-            </a:r>
-            <a:r>
-              <a:rPr lang="en-US" altLang="zh-CN" sz="2000" dirty="0" err="1">
-                <a:sym typeface="+mn-ea"/>
-              </a:rPr>
-              <a:t>ZenFS</a:t>
-            </a:r>
-            <a:r>
-              <a:rPr lang="zh-CN" altLang="en-US" sz="2000" dirty="0">
-                <a:sym typeface="+mn-ea"/>
-              </a:rPr>
-              <a:t>的表现，与之前</a:t>
-            </a:r>
-            <a:r>
-              <a:rPr lang="en-US" altLang="zh-CN" sz="2000" dirty="0" err="1">
-                <a:sym typeface="+mn-ea"/>
-              </a:rPr>
-              <a:t>NVMevirt</a:t>
-            </a:r>
-            <a:r>
-              <a:rPr lang="zh-CN" altLang="en-US" sz="2000" dirty="0">
-                <a:sym typeface="+mn-ea"/>
-              </a:rPr>
-              <a:t>模拟结果相比，模拟器的延迟过低。我认为原因在于它是内核模块实现，可能只体现了主机</a:t>
-            </a:r>
-            <a:r>
-              <a:rPr lang="en-US" altLang="zh-CN" sz="2000" dirty="0">
-                <a:sym typeface="+mn-ea"/>
-              </a:rPr>
-              <a:t>l/O</a:t>
-            </a:r>
-            <a:r>
-              <a:rPr lang="zh-CN" altLang="en-US" sz="2000" dirty="0">
-                <a:sym typeface="+mn-ea"/>
-              </a:rPr>
-              <a:t>栈的延迟。</a:t>
-            </a:r>
-            <a:endParaRPr lang="en-US" altLang="zh-CN" sz="2000" dirty="0">
-              <a:sym typeface="+mn-ea"/>
-            </a:endParaRPr>
-          </a:p>
-          <a:p>
-            <a:pPr marL="342900" indent="-342900">
-              <a:lnSpc>
-                <a:spcPct val="130000"/>
-              </a:lnSpc>
-              <a:buFont typeface="Wingdings" panose="05000000000000000000" charset="0"/>
-              <a:buChar char="q"/>
-            </a:pPr>
-            <a:r>
-              <a:rPr lang="zh-CN" altLang="en-US" sz="2000" dirty="0">
-                <a:sym typeface="+mn-ea"/>
-              </a:rPr>
-              <a:t>连接到服务器后，查看块设备，如右下图所示</a:t>
-            </a:r>
-            <a:endParaRPr lang="en-US" altLang="zh-CN" sz="2000" dirty="0">
-              <a:sym typeface="+mn-ea"/>
-            </a:endParaRPr>
-          </a:p>
-        </p:txBody>
-      </p:sp>
-      <p:sp>
-        <p:nvSpPr>
-          <p:cNvPr id="7" name="Fußzeilenplatzhalter 4">
-            <a:extLst>
-              <a:ext uri="{FF2B5EF4-FFF2-40B4-BE49-F238E27FC236}">
-                <a16:creationId xmlns:a16="http://schemas.microsoft.com/office/drawing/2014/main" id="{293457A3-1637-3737-9B53-1CF17294975F}"/>
-              </a:ext>
-            </a:extLst>
-          </p:cNvPr>
-          <p:cNvSpPr>
-            <a:spLocks noGrp="1"/>
-          </p:cNvSpPr>
-          <p:nvPr>
-            <p:ph type="ftr" sz="quarter" idx="11"/>
-          </p:nvPr>
-        </p:nvSpPr>
-        <p:spPr>
-          <a:xfrm>
-            <a:off x="4095916" y="6553437"/>
-            <a:ext cx="4520431" cy="273844"/>
-          </a:xfrm>
-        </p:spPr>
-        <p:txBody>
-          <a:bodyPr/>
-          <a:lstStyle/>
-          <a:p>
-            <a:r>
-              <a:rPr lang="en-US" altLang="zh-CN" sz="1400" b="1" dirty="0" err="1">
-                <a:solidFill>
-                  <a:schemeClr val="bg1"/>
-                </a:solidFill>
-                <a:latin typeface="Constantia" panose="02030602050306030303" pitchFamily="18" charset="0"/>
-              </a:rPr>
-              <a:t>Ziqi</a:t>
-            </a:r>
-            <a:r>
-              <a:rPr lang="en-US" altLang="zh-CN" sz="1400" b="1" dirty="0">
-                <a:solidFill>
-                  <a:schemeClr val="bg1"/>
-                </a:solidFill>
-                <a:latin typeface="Constantia" panose="02030602050306030303" pitchFamily="18" charset="0"/>
-              </a:rPr>
-              <a:t> Liu | HUST</a:t>
-            </a:r>
-            <a:endParaRPr lang="zh-CN" altLang="en-US" sz="1400" b="1" dirty="0">
-              <a:solidFill>
-                <a:schemeClr val="bg1"/>
-              </a:solidFill>
-              <a:latin typeface="Constantia" panose="02030602050306030303" pitchFamily="18" charset="0"/>
-            </a:endParaRPr>
-          </a:p>
-        </p:txBody>
-      </p:sp>
       <p:pic>
         <p:nvPicPr>
-          <p:cNvPr id="8" name="图片 7">
-            <a:extLst>
-              <a:ext uri="{FF2B5EF4-FFF2-40B4-BE49-F238E27FC236}">
-                <a16:creationId xmlns:a16="http://schemas.microsoft.com/office/drawing/2014/main" id="{E6F57F7C-C43A-4F29-54A3-9E2A41811FC0}"/>
-              </a:ext>
-            </a:extLst>
-          </p:cNvPr>
+          <p:cNvPr id="18" name="图片 17"/>
           <p:cNvPicPr>
             <a:picLocks noChangeAspect="1"/>
           </p:cNvPicPr>
@@ -17242,99 +16320,22 @@
         </p:blipFill>
         <p:spPr>
           <a:xfrm>
-            <a:off x="9985299" y="1248081"/>
-            <a:ext cx="1598233" cy="2243013"/>
+            <a:off x="8590829" y="204228"/>
+            <a:ext cx="3323471" cy="570629"/>
           </a:xfrm>
           <a:prstGeom prst="rect">
             <a:avLst/>
           </a:prstGeom>
         </p:spPr>
       </p:pic>
-      <p:pic>
-        <p:nvPicPr>
-          <p:cNvPr id="11" name="图片 10">
-            <a:extLst>
-              <a:ext uri="{FF2B5EF4-FFF2-40B4-BE49-F238E27FC236}">
-                <a16:creationId xmlns:a16="http://schemas.microsoft.com/office/drawing/2014/main" id="{B6DE7B69-1B2D-65EE-4842-C041A2060456}"/>
-              </a:ext>
-            </a:extLst>
-          </p:cNvPr>
-          <p:cNvPicPr>
-            <a:picLocks noChangeAspect="1"/>
-          </p:cNvPicPr>
-          <p:nvPr/>
-        </p:nvPicPr>
-        <p:blipFill>
-          <a:blip r:embed="rId6" cstate="print">
-            <a:extLst>
-              <a:ext uri="{28A0092B-C50C-407E-A947-70E740481C1C}">
-                <a14:useLocalDpi xmlns:a14="http://schemas.microsoft.com/office/drawing/2010/main" val="0"/>
-              </a:ext>
-            </a:extLst>
-          </a:blip>
-          <a:stretch>
-            <a:fillRect/>
-          </a:stretch>
-        </p:blipFill>
-        <p:spPr>
-          <a:xfrm>
-            <a:off x="7743977" y="1248799"/>
-            <a:ext cx="1693704" cy="2258272"/>
-          </a:xfrm>
-          <a:prstGeom prst="rect">
-            <a:avLst/>
-          </a:prstGeom>
-        </p:spPr>
-      </p:pic>
-      <p:pic>
-        <p:nvPicPr>
-          <p:cNvPr id="27" name="图片 26">
-            <a:extLst>
-              <a:ext uri="{FF2B5EF4-FFF2-40B4-BE49-F238E27FC236}">
-                <a16:creationId xmlns:a16="http://schemas.microsoft.com/office/drawing/2014/main" id="{777837E1-82E7-66D5-866F-6FEAA4F28829}"/>
-              </a:ext>
-            </a:extLst>
-          </p:cNvPr>
-          <p:cNvPicPr>
-            <a:picLocks noChangeAspect="1"/>
-          </p:cNvPicPr>
-          <p:nvPr/>
-        </p:nvPicPr>
-        <p:blipFill>
-          <a:blip r:embed="rId7">
-            <a:extLst>
-              <a:ext uri="{28A0092B-C50C-407E-A947-70E740481C1C}">
-                <a14:useLocalDpi xmlns:a14="http://schemas.microsoft.com/office/drawing/2010/main" val="0"/>
-              </a:ext>
-            </a:extLst>
-          </a:blip>
-          <a:stretch>
-            <a:fillRect/>
-          </a:stretch>
-        </p:blipFill>
-        <p:spPr>
-          <a:xfrm>
-            <a:off x="6066174" y="4065765"/>
-            <a:ext cx="5517358" cy="2270957"/>
-          </a:xfrm>
-          <a:prstGeom prst="rect">
-            <a:avLst/>
-          </a:prstGeom>
-        </p:spPr>
-      </p:pic>
     </p:spTree>
-    <p:extLst>
-      <p:ext uri="{BB962C8B-B14F-4D97-AF65-F5344CB8AC3E}">
-        <p14:creationId xmlns:p14="http://schemas.microsoft.com/office/powerpoint/2010/main" val="3562333484"/>
-      </p:ext>
-    </p:extLst>
   </p:cSld>
   <p:clrMapOvr>
     <a:masterClrMapping/>
   </p:clrMapOvr>
   <mc:AlternateContent xmlns:mc="http://schemas.openxmlformats.org/markup-compatibility/2006" xmlns:p14="http://schemas.microsoft.com/office/powerpoint/2010/main">
     <mc:Choice Requires="p14">
-      <p:transition p14:dur="10" advClick="0"/>
+      <p:transition p14:dur="0" advClick="0"/>
     </mc:Choice>
     <mc:Fallback xmlns="">
       <p:transition advClick="0"/>

--- a/毕设/毕设答辩.pptx
+++ b/毕设/毕设答辩.pptx
@@ -5,7 +5,7 @@
     <p:sldMasterId id="2147483648" r:id="rId1"/>
   </p:sldMasterIdLst>
   <p:notesMasterIdLst>
-    <p:notesMasterId r:id="rId12"/>
+    <p:notesMasterId r:id="rId15"/>
   </p:notesMasterIdLst>
   <p:sldIdLst>
     <p:sldId id="340" r:id="rId2"/>
@@ -13,16 +13,19 @@
     <p:sldId id="548" r:id="rId4"/>
     <p:sldId id="551" r:id="rId5"/>
     <p:sldId id="554" r:id="rId6"/>
-    <p:sldId id="544" r:id="rId7"/>
-    <p:sldId id="545" r:id="rId8"/>
-    <p:sldId id="261" r:id="rId9"/>
-    <p:sldId id="552" r:id="rId10"/>
-    <p:sldId id="547" r:id="rId11"/>
+    <p:sldId id="545" r:id="rId7"/>
+    <p:sldId id="558" r:id="rId8"/>
+    <p:sldId id="555" r:id="rId9"/>
+    <p:sldId id="557" r:id="rId10"/>
+    <p:sldId id="556" r:id="rId11"/>
+    <p:sldId id="261" r:id="rId12"/>
+    <p:sldId id="552" r:id="rId13"/>
+    <p:sldId id="547" r:id="rId14"/>
   </p:sldIdLst>
   <p:sldSz cx="12192000" cy="6858000"/>
   <p:notesSz cx="6858000" cy="9144000"/>
   <p:custDataLst>
-    <p:tags r:id="rId13"/>
+    <p:tags r:id="rId16"/>
   </p:custDataLst>
   <p:defaultTextStyle>
     <a:defPPr>
@@ -129,8 +132,11 @@
             <p14:sldId id="548"/>
             <p14:sldId id="551"/>
             <p14:sldId id="554"/>
-            <p14:sldId id="544"/>
             <p14:sldId id="545"/>
+            <p14:sldId id="558"/>
+            <p14:sldId id="555"/>
+            <p14:sldId id="557"/>
+            <p14:sldId id="556"/>
             <p14:sldId id="261"/>
             <p14:sldId id="552"/>
             <p14:sldId id="547"/>
@@ -723,6 +729,517 @@
     </p:spTree>
     <p:extLst>
       <p:ext uri="{BB962C8B-B14F-4D97-AF65-F5344CB8AC3E}">
+        <p14:creationId xmlns:p14="http://schemas.microsoft.com/office/powerpoint/2010/main" val="483495712"/>
+      </p:ext>
+    </p:extLst>
+  </p:cSld>
+  <p:clrMapOvr>
+    <a:masterClrMapping/>
+  </p:clrMapOvr>
+</p:notes>
+</file>
+
+<file path=ppt/notesSlides/notesSlide11.xml><?xml version="1.0" encoding="utf-8"?>
+<p:notes xmlns:a="http://schemas.openxmlformats.org/drawingml/2006/main" xmlns:r="http://schemas.openxmlformats.org/officeDocument/2006/relationships" xmlns:p="http://schemas.openxmlformats.org/presentationml/2006/main">
+  <p:cSld>
+    <p:spTree>
+      <p:nvGrpSpPr>
+        <p:cNvPr id="1" name=""/>
+        <p:cNvGrpSpPr/>
+        <p:nvPr/>
+      </p:nvGrpSpPr>
+      <p:grpSpPr>
+        <a:xfrm>
+          <a:off x="0" y="0"/>
+          <a:ext cx="0" cy="0"/>
+          <a:chOff x="0" y="0"/>
+          <a:chExt cx="0" cy="0"/>
+        </a:xfrm>
+      </p:grpSpPr>
+      <p:sp>
+        <p:nvSpPr>
+          <p:cNvPr id="2" name="幻灯片图像占位符 1"/>
+          <p:cNvSpPr>
+            <a:spLocks noGrp="1" noRot="1" noChangeAspect="1"/>
+          </p:cNvSpPr>
+          <p:nvPr>
+            <p:ph type="sldImg"/>
+          </p:nvPr>
+        </p:nvSpPr>
+        <p:spPr/>
+      </p:sp>
+      <p:sp>
+        <p:nvSpPr>
+          <p:cNvPr id="3" name="备注占位符 2"/>
+          <p:cNvSpPr>
+            <a:spLocks noGrp="1"/>
+          </p:cNvSpPr>
+          <p:nvPr>
+            <p:ph type="body" idx="1"/>
+          </p:nvPr>
+        </p:nvSpPr>
+        <p:spPr/>
+        <p:txBody>
+          <a:bodyPr/>
+          <a:lstStyle/>
+          <a:p>
+            <a:r>
+              <a:rPr kumimoji="1" lang="en-US" altLang="zh-CN" dirty="0"/>
+              <a:t>Thanks</a:t>
+            </a:r>
+            <a:r>
+              <a:rPr kumimoji="1" lang="zh-CN" altLang="en-US" dirty="0"/>
+              <a:t> </a:t>
+            </a:r>
+            <a:r>
+              <a:rPr kumimoji="1" lang="en-US" altLang="zh-CN" dirty="0"/>
+              <a:t>for</a:t>
+            </a:r>
+            <a:r>
+              <a:rPr kumimoji="1" lang="zh-CN" altLang="en-US" dirty="0"/>
+              <a:t> </a:t>
+            </a:r>
+            <a:r>
+              <a:rPr kumimoji="1" lang="en-US" altLang="zh-CN" dirty="0"/>
+              <a:t>listening!</a:t>
+            </a:r>
+            <a:endParaRPr kumimoji="1" lang="zh-CN" altLang="en-US" dirty="0"/>
+          </a:p>
+        </p:txBody>
+      </p:sp>
+      <p:sp>
+        <p:nvSpPr>
+          <p:cNvPr id="4" name="幻灯片编号占位符 3"/>
+          <p:cNvSpPr>
+            <a:spLocks noGrp="1"/>
+          </p:cNvSpPr>
+          <p:nvPr>
+            <p:ph type="sldNum" sz="quarter" idx="10"/>
+          </p:nvPr>
+        </p:nvSpPr>
+        <p:spPr/>
+        <p:txBody>
+          <a:bodyPr/>
+          <a:lstStyle/>
+          <a:p>
+            <a:fld id="{94B1677A-EDDD-4DA4-9464-453B9AC95701}" type="slidenum">
+              <a:rPr lang="zh-CN" altLang="en-US" smtClean="0"/>
+              <a:t>11</a:t>
+            </a:fld>
+            <a:endParaRPr lang="zh-CN" altLang="en-US"/>
+          </a:p>
+        </p:txBody>
+      </p:sp>
+    </p:spTree>
+  </p:cSld>
+  <p:clrMapOvr>
+    <a:masterClrMapping/>
+  </p:clrMapOvr>
+</p:notes>
+</file>
+
+<file path=ppt/notesSlides/notesSlide12.xml><?xml version="1.0" encoding="utf-8"?>
+<p:notes xmlns:a="http://schemas.openxmlformats.org/drawingml/2006/main" xmlns:r="http://schemas.openxmlformats.org/officeDocument/2006/relationships" xmlns:p="http://schemas.openxmlformats.org/presentationml/2006/main">
+  <p:cSld>
+    <p:spTree>
+      <p:nvGrpSpPr>
+        <p:cNvPr id="1" name="">
+          <a:extLst>
+            <a:ext uri="{FF2B5EF4-FFF2-40B4-BE49-F238E27FC236}">
+              <a16:creationId xmlns:a16="http://schemas.microsoft.com/office/drawing/2014/main" id="{F4044C06-F784-6DAC-1915-581C78B29FA4}"/>
+            </a:ext>
+          </a:extLst>
+        </p:cNvPr>
+        <p:cNvGrpSpPr/>
+        <p:nvPr/>
+      </p:nvGrpSpPr>
+      <p:grpSpPr>
+        <a:xfrm>
+          <a:off x="0" y="0"/>
+          <a:ext cx="0" cy="0"/>
+          <a:chOff x="0" y="0"/>
+          <a:chExt cx="0" cy="0"/>
+        </a:xfrm>
+      </p:grpSpPr>
+      <p:sp>
+        <p:nvSpPr>
+          <p:cNvPr id="2" name="幻灯片图像占位符 1">
+            <a:extLst>
+              <a:ext uri="{FF2B5EF4-FFF2-40B4-BE49-F238E27FC236}">
+                <a16:creationId xmlns:a16="http://schemas.microsoft.com/office/drawing/2014/main" id="{353368A4-1A7A-C906-7C38-A1F35E2C25C6}"/>
+              </a:ext>
+            </a:extLst>
+          </p:cNvPr>
+          <p:cNvSpPr>
+            <a:spLocks noGrp="1" noRot="1" noChangeAspect="1"/>
+          </p:cNvSpPr>
+          <p:nvPr>
+            <p:ph type="sldImg"/>
+          </p:nvPr>
+        </p:nvSpPr>
+        <p:spPr/>
+      </p:sp>
+      <p:sp>
+        <p:nvSpPr>
+          <p:cNvPr id="3" name="备注占位符 2">
+            <a:extLst>
+              <a:ext uri="{FF2B5EF4-FFF2-40B4-BE49-F238E27FC236}">
+                <a16:creationId xmlns:a16="http://schemas.microsoft.com/office/drawing/2014/main" id="{006F6428-B0C6-CE8A-CAFE-80B3EE0C2A1F}"/>
+              </a:ext>
+            </a:extLst>
+          </p:cNvPr>
+          <p:cNvSpPr>
+            <a:spLocks noGrp="1"/>
+          </p:cNvSpPr>
+          <p:nvPr>
+            <p:ph type="body" idx="1"/>
+          </p:nvPr>
+        </p:nvSpPr>
+        <p:spPr/>
+        <p:txBody>
+          <a:bodyPr/>
+          <a:lstStyle/>
+          <a:p>
+            <a:pPr indent="0" algn="just">
+              <a:spcAft>
+                <a:spcPts val="1200"/>
+              </a:spcAft>
+              <a:buFont typeface="Arial" panose="020B0604020202020204" pitchFamily="34" charset="0"/>
+              <a:buNone/>
+            </a:pPr>
+            <a:r>
+              <a:rPr lang="zh-CN" altLang="zh-CN" sz="1800" kern="100" dirty="0">
+                <a:effectLst/>
+                <a:latin typeface="Times New Roman" panose="02020603050405020304" pitchFamily="18" charset="0"/>
+                <a:ea typeface="宋体" panose="02010600030101010101" pitchFamily="2" charset="-122"/>
+                <a:cs typeface="Times New Roman" panose="02020603050405020304" pitchFamily="18" charset="0"/>
+              </a:rPr>
+              <a:t>相较于现有在</a:t>
+            </a:r>
+            <a:r>
+              <a:rPr lang="en-US" altLang="zh-CN" sz="1800" kern="100" dirty="0">
+                <a:effectLst/>
+                <a:latin typeface="Times New Roman" panose="02020603050405020304" pitchFamily="18" charset="0"/>
+                <a:ea typeface="宋体" panose="02010600030101010101" pitchFamily="2" charset="-122"/>
+              </a:rPr>
+              <a:t>QEMU</a:t>
+            </a:r>
+            <a:r>
+              <a:rPr lang="en-US" altLang="zh-CN" sz="1800" kern="100" baseline="30000" dirty="0">
+                <a:effectLst/>
+                <a:latin typeface="Times New Roman" panose="02020603050405020304" pitchFamily="18" charset="0"/>
+                <a:ea typeface="宋体" panose="02010600030101010101" pitchFamily="2" charset="-122"/>
+              </a:rPr>
+              <a:t>[1]</a:t>
+            </a:r>
+            <a:r>
+              <a:rPr lang="zh-CN" altLang="zh-CN" sz="1800" kern="100" dirty="0">
+                <a:effectLst/>
+                <a:latin typeface="Times New Roman" panose="02020603050405020304" pitchFamily="18" charset="0"/>
+                <a:ea typeface="宋体" panose="02010600030101010101" pitchFamily="2" charset="-122"/>
+                <a:cs typeface="Times New Roman" panose="02020603050405020304" pitchFamily="18" charset="0"/>
+              </a:rPr>
+              <a:t>、</a:t>
+            </a:r>
+            <a:r>
+              <a:rPr lang="en-US" altLang="zh-CN" sz="1800" kern="100" dirty="0">
+                <a:effectLst/>
+                <a:latin typeface="Times New Roman" panose="02020603050405020304" pitchFamily="18" charset="0"/>
+                <a:ea typeface="宋体" panose="02010600030101010101" pitchFamily="2" charset="-122"/>
+              </a:rPr>
+              <a:t>FEMU</a:t>
+            </a:r>
+            <a:r>
+              <a:rPr lang="en-US" altLang="zh-CN" sz="1800" kern="100" baseline="30000" dirty="0">
+                <a:effectLst/>
+                <a:latin typeface="Times New Roman" panose="02020603050405020304" pitchFamily="18" charset="0"/>
+                <a:ea typeface="宋体" panose="02010600030101010101" pitchFamily="2" charset="-122"/>
+              </a:rPr>
+              <a:t>[2]</a:t>
+            </a:r>
+            <a:r>
+              <a:rPr lang="zh-CN" altLang="zh-CN" sz="1800" kern="100" dirty="0">
+                <a:effectLst/>
+                <a:latin typeface="Times New Roman" panose="02020603050405020304" pitchFamily="18" charset="0"/>
+                <a:ea typeface="宋体" panose="02010600030101010101" pitchFamily="2" charset="-122"/>
+                <a:cs typeface="Times New Roman" panose="02020603050405020304" pitchFamily="18" charset="0"/>
+              </a:rPr>
+              <a:t>等模拟器上的工作，</a:t>
+            </a:r>
+            <a:r>
+              <a:rPr lang="zh-CN" altLang="en-US" sz="1800" kern="100" dirty="0">
+                <a:effectLst/>
+                <a:latin typeface="Times New Roman" panose="02020603050405020304" pitchFamily="18" charset="0"/>
+                <a:ea typeface="宋体" panose="02010600030101010101" pitchFamily="2" charset="-122"/>
+                <a:cs typeface="Times New Roman" panose="02020603050405020304" pitchFamily="18" charset="0"/>
+              </a:rPr>
+              <a:t>此工作能展示</a:t>
+            </a:r>
+            <a:r>
+              <a:rPr lang="en-US" altLang="zh-CN" sz="1800" kern="100" dirty="0">
+                <a:effectLst/>
+                <a:latin typeface="Times New Roman" panose="02020603050405020304" pitchFamily="18" charset="0"/>
+                <a:ea typeface="宋体" panose="02010600030101010101" pitchFamily="2" charset="-122"/>
+              </a:rPr>
+              <a:t>ZNS SSD</a:t>
+            </a:r>
+            <a:r>
+              <a:rPr lang="zh-CN" altLang="zh-CN" sz="1800" kern="100" dirty="0">
+                <a:effectLst/>
+                <a:latin typeface="Times New Roman" panose="02020603050405020304" pitchFamily="18" charset="0"/>
+                <a:ea typeface="宋体" panose="02010600030101010101" pitchFamily="2" charset="-122"/>
+                <a:cs typeface="Times New Roman" panose="02020603050405020304" pitchFamily="18" charset="0"/>
+              </a:rPr>
+              <a:t>在不同的真实场景下的性能表现</a:t>
+            </a:r>
+            <a:r>
+              <a:rPr lang="en-US" altLang="zh-CN" sz="1800" kern="100" dirty="0">
+                <a:effectLst/>
+                <a:latin typeface="Times New Roman" panose="02020603050405020304" pitchFamily="18" charset="0"/>
+                <a:ea typeface="宋体" panose="02010600030101010101" pitchFamily="2" charset="-122"/>
+                <a:cs typeface="Times New Roman" panose="02020603050405020304" pitchFamily="18" charset="0"/>
+              </a:rPr>
+              <a:t>;</a:t>
+            </a:r>
+          </a:p>
+          <a:p>
+            <a:pPr indent="0" algn="just">
+              <a:spcAft>
+                <a:spcPts val="1200"/>
+              </a:spcAft>
+              <a:buFont typeface="Arial" panose="020B0604020202020204" pitchFamily="34" charset="0"/>
+              <a:buNone/>
+            </a:pPr>
+            <a:endParaRPr lang="en-US" altLang="zh-CN" sz="1200" dirty="0">
+              <a:latin typeface="Constantia" panose="02030602050306030303" pitchFamily="18" charset="0"/>
+            </a:endParaRPr>
+          </a:p>
+          <a:p>
+            <a:pPr indent="0" algn="just">
+              <a:spcAft>
+                <a:spcPts val="1200"/>
+              </a:spcAft>
+              <a:buFont typeface="Arial" panose="020B0604020202020204" pitchFamily="34" charset="0"/>
+              <a:buNone/>
+            </a:pPr>
+            <a:r>
+              <a:rPr lang="zh-CN" altLang="en-US" sz="1200" dirty="0">
+                <a:latin typeface="Constantia" panose="02030602050306030303" pitchFamily="18" charset="0"/>
+              </a:rPr>
+              <a:t>相较于西数已有的基于真实设备（</a:t>
+            </a:r>
+            <a:r>
+              <a:rPr lang="en-US" altLang="zh-CN" sz="1200" dirty="0">
+                <a:latin typeface="Constantia" panose="02030602050306030303" pitchFamily="18" charset="0"/>
+              </a:rPr>
+              <a:t>ZN540</a:t>
+            </a:r>
+            <a:r>
+              <a:rPr lang="zh-CN" altLang="en-US" sz="1200" dirty="0">
+                <a:latin typeface="Constantia" panose="02030602050306030303" pitchFamily="18" charset="0"/>
+              </a:rPr>
+              <a:t>）的工作，我们使用浪潮提供的最新</a:t>
+            </a:r>
+            <a:r>
+              <a:rPr lang="en-US" altLang="zh-CN" sz="1200" dirty="0">
+                <a:latin typeface="Constantia" panose="02030602050306030303" pitchFamily="18" charset="0"/>
+              </a:rPr>
+              <a:t>ZNS</a:t>
+            </a:r>
+            <a:r>
+              <a:rPr lang="zh-CN" altLang="en-US" sz="1200" dirty="0">
+                <a:latin typeface="Constantia" panose="02030602050306030303" pitchFamily="18" charset="0"/>
+              </a:rPr>
+              <a:t>盘，一方面，其介质选用更好的</a:t>
+            </a:r>
+            <a:r>
+              <a:rPr lang="en-US" altLang="zh-CN" sz="1200" dirty="0">
+                <a:latin typeface="Constantia" panose="02030602050306030303" pitchFamily="18" charset="0"/>
+              </a:rPr>
+              <a:t>TLC</a:t>
+            </a:r>
+            <a:r>
+              <a:rPr lang="zh-CN" altLang="en-US" sz="1200" dirty="0">
+                <a:latin typeface="Constantia" panose="02030602050306030303" pitchFamily="18" charset="0"/>
+              </a:rPr>
+              <a:t>颗粒</a:t>
+            </a:r>
+            <a:r>
+              <a:rPr lang="en-US" altLang="zh-CN" sz="1200" dirty="0">
+                <a:latin typeface="Constantia" panose="02030602050306030303" pitchFamily="18" charset="0"/>
+              </a:rPr>
+              <a:t>(</a:t>
+            </a:r>
+            <a:r>
+              <a:rPr lang="zh-CN" altLang="en-US" sz="1200" dirty="0">
+                <a:latin typeface="Constantia" panose="02030602050306030303" pitchFamily="18" charset="0"/>
+              </a:rPr>
+              <a:t>西数是</a:t>
+            </a:r>
+            <a:r>
+              <a:rPr lang="en-US" altLang="zh-CN" sz="1200" dirty="0">
+                <a:latin typeface="Constantia" panose="02030602050306030303" pitchFamily="18" charset="0"/>
+              </a:rPr>
+              <a:t>QLC</a:t>
+            </a:r>
+            <a:r>
+              <a:rPr lang="zh-CN" altLang="en-US" sz="1200" dirty="0">
+                <a:latin typeface="Constantia" panose="02030602050306030303" pitchFamily="18" charset="0"/>
+              </a:rPr>
+              <a:t>颗粒）；另一方面，关键参数上有区别，例如已知的，</a:t>
+            </a:r>
+            <a:r>
+              <a:rPr lang="en-US" altLang="zh-CN" sz="1200" dirty="0">
+                <a:latin typeface="Constantia" panose="02030602050306030303" pitchFamily="18" charset="0"/>
+              </a:rPr>
+              <a:t>zone size 2GB-&gt;1.4GB</a:t>
+            </a:r>
+            <a:r>
+              <a:rPr lang="zh-CN" altLang="en-US" sz="1200" dirty="0">
+                <a:latin typeface="Constantia" panose="02030602050306030303" pitchFamily="18" charset="0"/>
+              </a:rPr>
+              <a:t>，最大带宽也更大。</a:t>
+            </a:r>
+          </a:p>
+          <a:p>
+            <a:pPr indent="0" algn="just">
+              <a:spcAft>
+                <a:spcPts val="1200"/>
+              </a:spcAft>
+              <a:buFont typeface="Arial" panose="020B0604020202020204" pitchFamily="34" charset="0"/>
+              <a:buNone/>
+            </a:pPr>
+            <a:endParaRPr lang="zh-CN" altLang="en-US" sz="1200" dirty="0">
+              <a:latin typeface="Constantia" panose="02030602050306030303" pitchFamily="18" charset="0"/>
+            </a:endParaRPr>
+          </a:p>
+        </p:txBody>
+      </p:sp>
+      <p:sp>
+        <p:nvSpPr>
+          <p:cNvPr id="4" name="灯片编号占位符 3">
+            <a:extLst>
+              <a:ext uri="{FF2B5EF4-FFF2-40B4-BE49-F238E27FC236}">
+                <a16:creationId xmlns:a16="http://schemas.microsoft.com/office/drawing/2014/main" id="{DB1DAFFE-4908-88CA-8C3E-9E3DEFD08EB3}"/>
+              </a:ext>
+            </a:extLst>
+          </p:cNvPr>
+          <p:cNvSpPr>
+            <a:spLocks noGrp="1"/>
+          </p:cNvSpPr>
+          <p:nvPr>
+            <p:ph type="sldNum" sz="quarter" idx="10"/>
+          </p:nvPr>
+        </p:nvSpPr>
+        <p:spPr/>
+        <p:txBody>
+          <a:bodyPr/>
+          <a:lstStyle/>
+          <a:p>
+            <a:fld id="{E4FF5570-FE69-4FDF-99DA-8CDE436443CD}" type="slidenum">
+              <a:rPr lang="en-US" smtClean="0"/>
+              <a:t>12</a:t>
+            </a:fld>
+            <a:endParaRPr lang="en-US" dirty="0"/>
+          </a:p>
+        </p:txBody>
+      </p:sp>
+    </p:spTree>
+    <p:extLst>
+      <p:ext uri="{BB962C8B-B14F-4D97-AF65-F5344CB8AC3E}">
+        <p14:creationId xmlns:p14="http://schemas.microsoft.com/office/powerpoint/2010/main" val="2960569650"/>
+      </p:ext>
+    </p:extLst>
+  </p:cSld>
+  <p:clrMapOvr>
+    <a:masterClrMapping/>
+  </p:clrMapOvr>
+</p:notes>
+</file>
+
+<file path=ppt/notesSlides/notesSlide13.xml><?xml version="1.0" encoding="utf-8"?>
+<p:notes xmlns:a="http://schemas.openxmlformats.org/drawingml/2006/main" xmlns:r="http://schemas.openxmlformats.org/officeDocument/2006/relationships" xmlns:p="http://schemas.openxmlformats.org/presentationml/2006/main">
+  <p:cSld>
+    <p:spTree>
+      <p:nvGrpSpPr>
+        <p:cNvPr id="1" name=""/>
+        <p:cNvGrpSpPr/>
+        <p:nvPr/>
+      </p:nvGrpSpPr>
+      <p:grpSpPr>
+        <a:xfrm>
+          <a:off x="0" y="0"/>
+          <a:ext cx="0" cy="0"/>
+          <a:chOff x="0" y="0"/>
+          <a:chExt cx="0" cy="0"/>
+        </a:xfrm>
+      </p:grpSpPr>
+      <p:sp>
+        <p:nvSpPr>
+          <p:cNvPr id="2" name="幻灯片图像占位符 1"/>
+          <p:cNvSpPr>
+            <a:spLocks noGrp="1" noRot="1" noChangeAspect="1"/>
+          </p:cNvSpPr>
+          <p:nvPr>
+            <p:ph type="sldImg"/>
+          </p:nvPr>
+        </p:nvSpPr>
+        <p:spPr/>
+      </p:sp>
+      <p:sp>
+        <p:nvSpPr>
+          <p:cNvPr id="3" name="备注占位符 2"/>
+          <p:cNvSpPr>
+            <a:spLocks noGrp="1"/>
+          </p:cNvSpPr>
+          <p:nvPr>
+            <p:ph type="body" idx="1"/>
+          </p:nvPr>
+        </p:nvSpPr>
+        <p:spPr/>
+        <p:txBody>
+          <a:bodyPr/>
+          <a:lstStyle/>
+          <a:p>
+            <a:pPr indent="0" algn="just">
+              <a:spcAft>
+                <a:spcPts val="1200"/>
+              </a:spcAft>
+              <a:buFont typeface="Arial" panose="020B0604020202020204" pitchFamily="34" charset="0"/>
+              <a:buNone/>
+            </a:pPr>
+            <a:endParaRPr lang="zh-CN" altLang="en-US" sz="1200" dirty="0">
+              <a:latin typeface="Constantia" panose="02030602050306030303" pitchFamily="18" charset="0"/>
+            </a:endParaRPr>
+          </a:p>
+        </p:txBody>
+      </p:sp>
+      <p:sp>
+        <p:nvSpPr>
+          <p:cNvPr id="4" name="灯片编号占位符 3"/>
+          <p:cNvSpPr>
+            <a:spLocks noGrp="1"/>
+          </p:cNvSpPr>
+          <p:nvPr>
+            <p:ph type="sldNum" sz="quarter" idx="10"/>
+          </p:nvPr>
+        </p:nvSpPr>
+        <p:spPr/>
+        <p:txBody>
+          <a:bodyPr/>
+          <a:lstStyle/>
+          <a:p>
+            <a:fld id="{E4FF5570-FE69-4FDF-99DA-8CDE436443CD}" type="slidenum">
+              <a:rPr lang="en-US" smtClean="0"/>
+              <a:t>13</a:t>
+            </a:fld>
+            <a:endParaRPr lang="en-US" dirty="0"/>
+          </a:p>
+        </p:txBody>
+      </p:sp>
+    </p:spTree>
+    <p:extLst>
+      <p:ext uri="{BB962C8B-B14F-4D97-AF65-F5344CB8AC3E}">
         <p14:creationId xmlns:p14="http://schemas.microsoft.com/office/powerpoint/2010/main" val="3729349770"/>
       </p:ext>
     </p:extLst>
@@ -2966,98 +3483,6 @@
           <a:bodyPr/>
           <a:lstStyle/>
           <a:p>
-            <a:pPr marL="0" marR="0" lvl="0" indent="0" algn="just" defTabSz="914400" rtl="0" eaLnBrk="1" fontAlgn="auto" latinLnBrk="0" hangingPunct="1">
-              <a:lnSpc>
-                <a:spcPct val="100000"/>
-              </a:lnSpc>
-              <a:spcBef>
-                <a:spcPts val="0"/>
-              </a:spcBef>
-              <a:spcAft>
-                <a:spcPts val="1200"/>
-              </a:spcAft>
-              <a:buClrTx/>
-              <a:buSzTx/>
-              <a:buFont typeface="Arial" panose="020B0604020202020204" pitchFamily="34" charset="0"/>
-              <a:buNone/>
-              <a:tabLst/>
-              <a:defRPr/>
-            </a:pPr>
-            <a:r>
-              <a:rPr lang="en-US" altLang="zh-CN" sz="1800" u="sng" kern="100" dirty="0">
-                <a:solidFill>
-                  <a:srgbClr val="0000FF"/>
-                </a:solidFill>
-                <a:effectLst/>
-                <a:latin typeface="Times New Roman" panose="02020603050405020304" pitchFamily="18" charset="0"/>
-                <a:ea typeface="宋体" panose="02010600030101010101" pitchFamily="2" charset="-122"/>
-                <a:hlinkClick r:id="rId3"/>
-              </a:rPr>
-              <a:t>https://github.com/linux-nvme/nvme-cli</a:t>
-            </a:r>
-            <a:endParaRPr lang="zh-CN" altLang="zh-CN" sz="1800" kern="100" dirty="0">
-              <a:effectLst/>
-              <a:latin typeface="Times New Roman" panose="02020603050405020304" pitchFamily="18" charset="0"/>
-              <a:ea typeface="宋体" panose="02010600030101010101" pitchFamily="2" charset="-122"/>
-            </a:endParaRPr>
-          </a:p>
-          <a:p>
-            <a:pPr marL="0" marR="0" lvl="0" indent="0" algn="just" defTabSz="914400" rtl="0" eaLnBrk="1" fontAlgn="auto" latinLnBrk="0" hangingPunct="1">
-              <a:lnSpc>
-                <a:spcPct val="100000"/>
-              </a:lnSpc>
-              <a:spcBef>
-                <a:spcPts val="0"/>
-              </a:spcBef>
-              <a:spcAft>
-                <a:spcPts val="1200"/>
-              </a:spcAft>
-              <a:buClrTx/>
-              <a:buSzTx/>
-              <a:buFont typeface="Arial" panose="020B0604020202020204" pitchFamily="34" charset="0"/>
-              <a:buNone/>
-              <a:tabLst/>
-              <a:defRPr/>
-            </a:pPr>
-            <a:endParaRPr lang="en-US" altLang="zh-CN" sz="1800" kern="100" dirty="0">
-              <a:effectLst/>
-              <a:latin typeface="Times New Roman" panose="02020603050405020304" pitchFamily="18" charset="0"/>
-              <a:ea typeface="宋体" panose="02010600030101010101" pitchFamily="2" charset="-122"/>
-            </a:endParaRPr>
-          </a:p>
-          <a:p>
-            <a:pPr marL="0" marR="0" lvl="0" indent="0" algn="just" defTabSz="914400" rtl="0" eaLnBrk="1" fontAlgn="auto" latinLnBrk="0" hangingPunct="1">
-              <a:lnSpc>
-                <a:spcPct val="100000"/>
-              </a:lnSpc>
-              <a:spcBef>
-                <a:spcPts val="0"/>
-              </a:spcBef>
-              <a:spcAft>
-                <a:spcPts val="1200"/>
-              </a:spcAft>
-              <a:buClrTx/>
-              <a:buSzTx/>
-              <a:buFont typeface="Arial" panose="020B0604020202020204" pitchFamily="34" charset="0"/>
-              <a:buNone/>
-              <a:tabLst/>
-              <a:defRPr/>
-            </a:pPr>
-            <a:r>
-              <a:rPr lang="en-US" altLang="zh-CN" sz="1800" kern="100" dirty="0">
-                <a:effectLst/>
-                <a:latin typeface="Times New Roman" panose="02020603050405020304" pitchFamily="18" charset="0"/>
-                <a:ea typeface="宋体" panose="02010600030101010101" pitchFamily="2" charset="-122"/>
-              </a:rPr>
-              <a:t>https://zonedstorage.io/docs/tools/libzbd</a:t>
-            </a:r>
-            <a:endParaRPr lang="zh-CN" altLang="zh-CN" sz="1800" kern="100" dirty="0">
-              <a:effectLst/>
-              <a:latin typeface="Times New Roman" panose="02020603050405020304" pitchFamily="18" charset="0"/>
-              <a:ea typeface="宋体" panose="02010600030101010101" pitchFamily="2" charset="-122"/>
-            </a:endParaRPr>
-          </a:p>
-          <a:p>
             <a:pPr indent="0" algn="just">
               <a:spcAft>
                 <a:spcPts val="1200"/>
@@ -3097,7 +3522,7 @@
     </p:spTree>
     <p:extLst>
       <p:ext uri="{BB962C8B-B14F-4D97-AF65-F5344CB8AC3E}">
-        <p14:creationId xmlns:p14="http://schemas.microsoft.com/office/powerpoint/2010/main" val="948309536"/>
+        <p14:creationId xmlns:p14="http://schemas.microsoft.com/office/powerpoint/2010/main" val="1442627471"/>
       </p:ext>
     </p:extLst>
   </p:cSld>
@@ -3158,9 +3583,150 @@
               <a:buFont typeface="Arial" panose="020B0604020202020204" pitchFamily="34" charset="0"/>
               <a:buNone/>
             </a:pPr>
-            <a:endParaRPr lang="zh-CN" altLang="en-US" sz="1200" dirty="0">
+            <a:r>
+              <a:rPr lang="zh-CN" altLang="en-US" sz="1200" dirty="0">
+                <a:latin typeface="Constantia" panose="02030602050306030303" pitchFamily="18" charset="0"/>
+              </a:rPr>
+              <a:t>仅列举</a:t>
+            </a:r>
+            <a:r>
+              <a:rPr lang="en-US" altLang="zh-CN" sz="1200" dirty="0">
+                <a:latin typeface="Constantia" panose="02030602050306030303" pitchFamily="18" charset="0"/>
+              </a:rPr>
+              <a:t>3</a:t>
+            </a:r>
+            <a:r>
+              <a:rPr lang="zh-CN" altLang="en-US" sz="1200" dirty="0">
+                <a:latin typeface="Constantia" panose="02030602050306030303" pitchFamily="18" charset="0"/>
+              </a:rPr>
+              <a:t>种比较典型的测试结果。</a:t>
+            </a:r>
+            <a:endParaRPr lang="en-US" altLang="zh-CN" sz="1200" dirty="0">
               <a:latin typeface="Constantia" panose="02030602050306030303" pitchFamily="18" charset="0"/>
             </a:endParaRPr>
+          </a:p>
+          <a:p>
+            <a:pPr indent="0" algn="just">
+              <a:spcAft>
+                <a:spcPts val="1200"/>
+              </a:spcAft>
+              <a:buFont typeface="Arial" panose="020B0604020202020204" pitchFamily="34" charset="0"/>
+              <a:buNone/>
+            </a:pPr>
+            <a:r>
+              <a:rPr lang="zh-CN" altLang="en-US" sz="1200" dirty="0">
+                <a:latin typeface="Constantia" panose="02030602050306030303" pitchFamily="18" charset="0"/>
+              </a:rPr>
+              <a:t>分别是：</a:t>
+            </a:r>
+            <a:endParaRPr lang="en-US" altLang="zh-CN" sz="1200" dirty="0">
+              <a:latin typeface="Constantia" panose="02030602050306030303" pitchFamily="18" charset="0"/>
+            </a:endParaRPr>
+          </a:p>
+          <a:p>
+            <a:pPr indent="0" algn="just">
+              <a:spcAft>
+                <a:spcPts val="1200"/>
+              </a:spcAft>
+              <a:buFont typeface="Arial" panose="020B0604020202020204" pitchFamily="34" charset="0"/>
+              <a:buNone/>
+            </a:pPr>
+            <a:r>
+              <a:rPr lang="en-US" altLang="zh-CN" sz="1200" dirty="0">
+                <a:latin typeface="Constantia" panose="02030602050306030303" pitchFamily="18" charset="0"/>
+              </a:rPr>
+              <a:t>1</a:t>
+            </a:r>
+            <a:r>
+              <a:rPr lang="zh-CN" altLang="en-US" sz="1200" dirty="0">
+                <a:latin typeface="Constantia" panose="02030602050306030303" pitchFamily="18" charset="0"/>
+              </a:rPr>
+              <a:t>：</a:t>
+            </a:r>
+            <a:r>
+              <a:rPr lang="en-US" altLang="zh-CN" sz="1200" dirty="0">
+                <a:latin typeface="Constantia" panose="02030602050306030303" pitchFamily="18" charset="0"/>
+              </a:rPr>
+              <a:t> </a:t>
+            </a:r>
+            <a:r>
+              <a:rPr lang="zh-CN" altLang="en-US" sz="1200" dirty="0">
+                <a:latin typeface="Constantia" panose="02030602050306030303" pitchFamily="18" charset="0"/>
+              </a:rPr>
+              <a:t>模拟</a:t>
+            </a:r>
+            <a:r>
+              <a:rPr lang="en-US" altLang="zh-CN" sz="1200" dirty="0">
+                <a:latin typeface="Constantia" panose="02030602050306030303" pitchFamily="18" charset="0"/>
+              </a:rPr>
+              <a:t>vs</a:t>
+            </a:r>
+            <a:r>
+              <a:rPr lang="zh-CN" altLang="en-US" sz="1200" dirty="0">
+                <a:latin typeface="Constantia" panose="02030602050306030303" pitchFamily="18" charset="0"/>
+              </a:rPr>
+              <a:t>真实</a:t>
+            </a:r>
+            <a:endParaRPr lang="en-US" altLang="zh-CN" sz="1200" dirty="0">
+              <a:latin typeface="Constantia" panose="02030602050306030303" pitchFamily="18" charset="0"/>
+            </a:endParaRPr>
+          </a:p>
+          <a:p>
+            <a:pPr indent="0" algn="just">
+              <a:spcAft>
+                <a:spcPts val="1200"/>
+              </a:spcAft>
+              <a:buFont typeface="Arial" panose="020B0604020202020204" pitchFamily="34" charset="0"/>
+              <a:buNone/>
+            </a:pPr>
+            <a:r>
+              <a:rPr lang="en-US" altLang="zh-CN" sz="1200" dirty="0">
+                <a:latin typeface="Constantia" panose="02030602050306030303" pitchFamily="18" charset="0"/>
+              </a:rPr>
+              <a:t>2</a:t>
+            </a:r>
+            <a:r>
+              <a:rPr lang="zh-CN" altLang="en-US" sz="1200" dirty="0">
+                <a:latin typeface="Constantia" panose="02030602050306030303" pitchFamily="18" charset="0"/>
+              </a:rPr>
+              <a:t>： 单</a:t>
+            </a:r>
+            <a:r>
+              <a:rPr lang="en-US" altLang="zh-CN" sz="1200" dirty="0">
+                <a:latin typeface="Constantia" panose="02030602050306030303" pitchFamily="18" charset="0"/>
+              </a:rPr>
+              <a:t>Zone</a:t>
+            </a:r>
+            <a:r>
+              <a:rPr lang="zh-CN" altLang="en-US" sz="1200" dirty="0">
+                <a:latin typeface="Constantia" panose="02030602050306030303" pitchFamily="18" charset="0"/>
+              </a:rPr>
+              <a:t>性能</a:t>
+            </a:r>
+            <a:endParaRPr lang="en-US" altLang="zh-CN" sz="1200" dirty="0">
+              <a:latin typeface="Constantia" panose="02030602050306030303" pitchFamily="18" charset="0"/>
+            </a:endParaRPr>
+          </a:p>
+          <a:p>
+            <a:pPr indent="0" algn="just">
+              <a:spcAft>
+                <a:spcPts val="1200"/>
+              </a:spcAft>
+              <a:buFont typeface="Arial" panose="020B0604020202020204" pitchFamily="34" charset="0"/>
+              <a:buNone/>
+            </a:pPr>
+            <a:r>
+              <a:rPr lang="en-US" altLang="zh-CN" sz="1200" dirty="0">
+                <a:latin typeface="Constantia" panose="02030602050306030303" pitchFamily="18" charset="0"/>
+              </a:rPr>
+              <a:t>3</a:t>
+            </a:r>
+            <a:r>
+              <a:rPr lang="zh-CN" altLang="en-US" sz="1200" dirty="0">
+                <a:latin typeface="Constantia" panose="02030602050306030303" pitchFamily="18" charset="0"/>
+              </a:rPr>
+              <a:t>：</a:t>
+            </a:r>
           </a:p>
         </p:txBody>
       </p:sp>
@@ -3190,7 +3756,7 @@
     </p:spTree>
     <p:extLst>
       <p:ext uri="{BB962C8B-B14F-4D97-AF65-F5344CB8AC3E}">
-        <p14:creationId xmlns:p14="http://schemas.microsoft.com/office/powerpoint/2010/main" val="1442627471"/>
+        <p14:creationId xmlns:p14="http://schemas.microsoft.com/office/powerpoint/2010/main" val="251907946"/>
       </p:ext>
     </p:extLst>
   </p:cSld>
@@ -3244,33 +3810,163 @@
           <a:bodyPr/>
           <a:lstStyle/>
           <a:p>
-            <a:r>
-              <a:rPr kumimoji="1" lang="en-US" altLang="zh-CN" dirty="0"/>
-              <a:t>Thanks</a:t>
-            </a:r>
-            <a:r>
-              <a:rPr kumimoji="1" lang="zh-CN" altLang="en-US" dirty="0"/>
+            <a:pPr indent="0" algn="just">
+              <a:spcAft>
+                <a:spcPts val="1200"/>
+              </a:spcAft>
+              <a:buFont typeface="Arial" panose="020B0604020202020204" pitchFamily="34" charset="0"/>
+              <a:buNone/>
+            </a:pPr>
+            <a:r>
+              <a:rPr lang="zh-CN" altLang="en-US" sz="1200" dirty="0">
+                <a:latin typeface="Constantia" panose="02030602050306030303" pitchFamily="18" charset="0"/>
+              </a:rPr>
+              <a:t>仅列举</a:t>
+            </a:r>
+            <a:r>
+              <a:rPr lang="en-US" altLang="zh-CN" sz="1200" dirty="0">
+                <a:latin typeface="Constantia" panose="02030602050306030303" pitchFamily="18" charset="0"/>
+              </a:rPr>
+              <a:t>3</a:t>
+            </a:r>
+            <a:r>
+              <a:rPr lang="zh-CN" altLang="en-US" sz="1200" dirty="0">
+                <a:latin typeface="Constantia" panose="02030602050306030303" pitchFamily="18" charset="0"/>
+              </a:rPr>
+              <a:t>种比较典型的测试结果。</a:t>
+            </a:r>
+            <a:endParaRPr lang="en-US" altLang="zh-CN" sz="1200" dirty="0">
+              <a:latin typeface="Constantia" panose="02030602050306030303" pitchFamily="18" charset="0"/>
+            </a:endParaRPr>
+          </a:p>
+          <a:p>
+            <a:pPr indent="0" algn="just">
+              <a:spcAft>
+                <a:spcPts val="1200"/>
+              </a:spcAft>
+              <a:buFont typeface="Arial" panose="020B0604020202020204" pitchFamily="34" charset="0"/>
+              <a:buNone/>
+            </a:pPr>
+            <a:r>
+              <a:rPr lang="zh-CN" altLang="en-US" sz="1200" dirty="0">
+                <a:latin typeface="Constantia" panose="02030602050306030303" pitchFamily="18" charset="0"/>
+              </a:rPr>
+              <a:t>分别是：</a:t>
+            </a:r>
+            <a:endParaRPr lang="en-US" altLang="zh-CN" sz="1200" dirty="0">
+              <a:latin typeface="Constantia" panose="02030602050306030303" pitchFamily="18" charset="0"/>
+            </a:endParaRPr>
+          </a:p>
+          <a:p>
+            <a:pPr indent="0" algn="just">
+              <a:spcAft>
+                <a:spcPts val="1200"/>
+              </a:spcAft>
+              <a:buFont typeface="Arial" panose="020B0604020202020204" pitchFamily="34" charset="0"/>
+              <a:buNone/>
+            </a:pPr>
+            <a:r>
+              <a:rPr lang="en-US" altLang="zh-CN" sz="1200" dirty="0">
+                <a:latin typeface="Constantia" panose="02030602050306030303" pitchFamily="18" charset="0"/>
+              </a:rPr>
+              <a:t>1</a:t>
+            </a:r>
+            <a:r>
+              <a:rPr lang="zh-CN" altLang="en-US" sz="1200" dirty="0">
+                <a:latin typeface="Constantia" panose="02030602050306030303" pitchFamily="18" charset="0"/>
+              </a:rPr>
+              <a:t>：</a:t>
+            </a:r>
+            <a:r>
+              <a:rPr lang="en-US" altLang="zh-CN" sz="1200" dirty="0">
+                <a:latin typeface="Constantia" panose="02030602050306030303" pitchFamily="18" charset="0"/>
+              </a:rPr>
               <a:t> </a:t>
             </a:r>
             <a:r>
-              <a:rPr kumimoji="1" lang="en-US" altLang="zh-CN" dirty="0"/>
-              <a:t>for</a:t>
-            </a:r>
-            <a:r>
-              <a:rPr kumimoji="1" lang="zh-CN" altLang="en-US" dirty="0"/>
-              <a:t> </a:t>
-            </a:r>
-            <a:r>
-              <a:rPr kumimoji="1" lang="en-US" altLang="zh-CN" dirty="0"/>
-              <a:t>listening!</a:t>
-            </a:r>
-            <a:endParaRPr kumimoji="1" lang="zh-CN" altLang="en-US" dirty="0"/>
-          </a:p>
-        </p:txBody>
-      </p:sp>
-      <p:sp>
-        <p:nvSpPr>
-          <p:cNvPr id="4" name="幻灯片编号占位符 3"/>
+              <a:rPr lang="zh-CN" altLang="en-US" sz="1200" dirty="0">
+                <a:latin typeface="Constantia" panose="02030602050306030303" pitchFamily="18" charset="0"/>
+              </a:rPr>
+              <a:t>模拟</a:t>
+            </a:r>
+            <a:r>
+              <a:rPr lang="en-US" altLang="zh-CN" sz="1200" dirty="0">
+                <a:latin typeface="Constantia" panose="02030602050306030303" pitchFamily="18" charset="0"/>
+              </a:rPr>
+              <a:t>vs</a:t>
+            </a:r>
+            <a:r>
+              <a:rPr lang="zh-CN" altLang="en-US" sz="1200" dirty="0">
+                <a:latin typeface="Constantia" panose="02030602050306030303" pitchFamily="18" charset="0"/>
+              </a:rPr>
+              <a:t>真实</a:t>
+            </a:r>
+            <a:endParaRPr lang="en-US" altLang="zh-CN" sz="1200" dirty="0">
+              <a:latin typeface="Constantia" panose="02030602050306030303" pitchFamily="18" charset="0"/>
+            </a:endParaRPr>
+          </a:p>
+          <a:p>
+            <a:pPr indent="0" algn="just">
+              <a:spcAft>
+                <a:spcPts val="1200"/>
+              </a:spcAft>
+              <a:buFont typeface="Arial" panose="020B0604020202020204" pitchFamily="34" charset="0"/>
+              <a:buNone/>
+            </a:pPr>
+            <a:r>
+              <a:rPr lang="en-US" altLang="zh-CN" sz="1200" dirty="0">
+                <a:latin typeface="Constantia" panose="02030602050306030303" pitchFamily="18" charset="0"/>
+              </a:rPr>
+              <a:t>2</a:t>
+            </a:r>
+            <a:r>
+              <a:rPr lang="zh-CN" altLang="en-US" sz="1200" dirty="0">
+                <a:latin typeface="Constantia" panose="02030602050306030303" pitchFamily="18" charset="0"/>
+              </a:rPr>
+              <a:t>： 单</a:t>
+            </a:r>
+            <a:r>
+              <a:rPr lang="en-US" altLang="zh-CN" sz="1200" dirty="0">
+                <a:latin typeface="Constantia" panose="02030602050306030303" pitchFamily="18" charset="0"/>
+              </a:rPr>
+              <a:t>Zone</a:t>
+            </a:r>
+            <a:r>
+              <a:rPr lang="zh-CN" altLang="en-US" sz="1200" dirty="0">
+                <a:latin typeface="Constantia" panose="02030602050306030303" pitchFamily="18" charset="0"/>
+              </a:rPr>
+              <a:t>性能</a:t>
+            </a:r>
+            <a:endParaRPr lang="en-US" altLang="zh-CN" sz="1200" dirty="0">
+              <a:latin typeface="Constantia" panose="02030602050306030303" pitchFamily="18" charset="0"/>
+            </a:endParaRPr>
+          </a:p>
+          <a:p>
+            <a:pPr indent="0" algn="just">
+              <a:spcAft>
+                <a:spcPts val="1200"/>
+              </a:spcAft>
+              <a:buFont typeface="Arial" panose="020B0604020202020204" pitchFamily="34" charset="0"/>
+              <a:buNone/>
+            </a:pPr>
+            <a:r>
+              <a:rPr lang="en-US" altLang="zh-CN" sz="1200" dirty="0">
+                <a:latin typeface="Constantia" panose="02030602050306030303" pitchFamily="18" charset="0"/>
+              </a:rPr>
+              <a:t>3</a:t>
+            </a:r>
+            <a:r>
+              <a:rPr lang="zh-CN" altLang="en-US" sz="1200" dirty="0">
+                <a:latin typeface="Constantia" panose="02030602050306030303" pitchFamily="18" charset="0"/>
+              </a:rPr>
+              <a:t>：</a:t>
+            </a:r>
+          </a:p>
+        </p:txBody>
+      </p:sp>
+      <p:sp>
+        <p:nvSpPr>
+          <p:cNvPr id="4" name="灯片编号占位符 3"/>
           <p:cNvSpPr>
             <a:spLocks noGrp="1"/>
           </p:cNvSpPr>
@@ -3283,15 +3979,20 @@
           <a:bodyPr/>
           <a:lstStyle/>
           <a:p>
-            <a:fld id="{94B1677A-EDDD-4DA4-9464-453B9AC95701}" type="slidenum">
-              <a:rPr lang="zh-CN" altLang="en-US" smtClean="0"/>
+            <a:fld id="{E4FF5570-FE69-4FDF-99DA-8CDE436443CD}" type="slidenum">
+              <a:rPr lang="en-US" smtClean="0"/>
               <a:t>8</a:t>
             </a:fld>
-            <a:endParaRPr lang="zh-CN" altLang="en-US"/>
+            <a:endParaRPr lang="en-US" dirty="0"/>
           </a:p>
         </p:txBody>
       </p:sp>
     </p:spTree>
+    <p:extLst>
+      <p:ext uri="{BB962C8B-B14F-4D97-AF65-F5344CB8AC3E}">
+        <p14:creationId xmlns:p14="http://schemas.microsoft.com/office/powerpoint/2010/main" val="1905338372"/>
+      </p:ext>
+    </p:extLst>
   </p:cSld>
   <p:clrMapOvr>
     <a:masterClrMapping/>
@@ -3304,13 +4005,7 @@
   <p:cSld>
     <p:spTree>
       <p:nvGrpSpPr>
-        <p:cNvPr id="1" name="">
-          <a:extLst>
-            <a:ext uri="{FF2B5EF4-FFF2-40B4-BE49-F238E27FC236}">
-              <a16:creationId xmlns:a16="http://schemas.microsoft.com/office/drawing/2014/main" id="{F4044C06-F784-6DAC-1915-581C78B29FA4}"/>
-            </a:ext>
-          </a:extLst>
-        </p:cNvPr>
+        <p:cNvPr id="1" name=""/>
         <p:cNvGrpSpPr/>
         <p:nvPr/>
       </p:nvGrpSpPr>
@@ -3324,13 +4019,7 @@
       </p:grpSpPr>
       <p:sp>
         <p:nvSpPr>
-          <p:cNvPr id="2" name="幻灯片图像占位符 1">
-            <a:extLst>
-              <a:ext uri="{FF2B5EF4-FFF2-40B4-BE49-F238E27FC236}">
-                <a16:creationId xmlns:a16="http://schemas.microsoft.com/office/drawing/2014/main" id="{353368A4-1A7A-C906-7C38-A1F35E2C25C6}"/>
-              </a:ext>
-            </a:extLst>
-          </p:cNvPr>
+          <p:cNvPr id="2" name="幻灯片图像占位符 1"/>
           <p:cNvSpPr>
             <a:spLocks noGrp="1" noRot="1" noChangeAspect="1"/>
           </p:cNvSpPr>
@@ -3342,13 +4031,7 @@
       </p:sp>
       <p:sp>
         <p:nvSpPr>
-          <p:cNvPr id="3" name="备注占位符 2">
-            <a:extLst>
-              <a:ext uri="{FF2B5EF4-FFF2-40B4-BE49-F238E27FC236}">
-                <a16:creationId xmlns:a16="http://schemas.microsoft.com/office/drawing/2014/main" id="{006F6428-B0C6-CE8A-CAFE-80B3EE0C2A1F}"/>
-              </a:ext>
-            </a:extLst>
-          </p:cNvPr>
+          <p:cNvPr id="3" name="备注占位符 2"/>
           <p:cNvSpPr>
             <a:spLocks noGrp="1"/>
           </p:cNvSpPr>
@@ -3369,99 +4052,26 @@
               <a:buNone/>
             </a:pPr>
             <a:r>
-              <a:rPr lang="zh-CN" altLang="zh-CN" sz="1800" kern="100" dirty="0">
-                <a:effectLst/>
-                <a:latin typeface="Times New Roman" panose="02020603050405020304" pitchFamily="18" charset="0"/>
-                <a:ea typeface="宋体" panose="02010600030101010101" pitchFamily="2" charset="-122"/>
-                <a:cs typeface="Times New Roman" panose="02020603050405020304" pitchFamily="18" charset="0"/>
-              </a:rPr>
-              <a:t>相较于现有在</a:t>
-            </a:r>
-            <a:r>
-              <a:rPr lang="en-US" altLang="zh-CN" sz="1800" kern="100" dirty="0">
-                <a:effectLst/>
-                <a:latin typeface="Times New Roman" panose="02020603050405020304" pitchFamily="18" charset="0"/>
-                <a:ea typeface="宋体" panose="02010600030101010101" pitchFamily="2" charset="-122"/>
-              </a:rPr>
-              <a:t>QEMU</a:t>
-            </a:r>
-            <a:r>
-              <a:rPr lang="en-US" altLang="zh-CN" sz="1800" kern="100" baseline="30000" dirty="0">
-                <a:effectLst/>
-                <a:latin typeface="Times New Roman" panose="02020603050405020304" pitchFamily="18" charset="0"/>
-                <a:ea typeface="宋体" panose="02010600030101010101" pitchFamily="2" charset="-122"/>
-              </a:rPr>
-              <a:t>[1]</a:t>
-            </a:r>
-            <a:r>
-              <a:rPr lang="zh-CN" altLang="zh-CN" sz="1800" kern="100" dirty="0">
-                <a:effectLst/>
-                <a:latin typeface="Times New Roman" panose="02020603050405020304" pitchFamily="18" charset="0"/>
-                <a:ea typeface="宋体" panose="02010600030101010101" pitchFamily="2" charset="-122"/>
-                <a:cs typeface="Times New Roman" panose="02020603050405020304" pitchFamily="18" charset="0"/>
-              </a:rPr>
-              <a:t>、</a:t>
-            </a:r>
-            <a:r>
-              <a:rPr lang="en-US" altLang="zh-CN" sz="1800" kern="100" dirty="0">
-                <a:effectLst/>
-                <a:latin typeface="Times New Roman" panose="02020603050405020304" pitchFamily="18" charset="0"/>
-                <a:ea typeface="宋体" panose="02010600030101010101" pitchFamily="2" charset="-122"/>
-              </a:rPr>
-              <a:t>FEMU</a:t>
-            </a:r>
-            <a:r>
-              <a:rPr lang="en-US" altLang="zh-CN" sz="1800" kern="100" baseline="30000" dirty="0">
-                <a:effectLst/>
-                <a:latin typeface="Times New Roman" panose="02020603050405020304" pitchFamily="18" charset="0"/>
-                <a:ea typeface="宋体" panose="02010600030101010101" pitchFamily="2" charset="-122"/>
-              </a:rPr>
-              <a:t>[2]</a:t>
-            </a:r>
-            <a:r>
-              <a:rPr lang="zh-CN" altLang="zh-CN" sz="1800" kern="100" dirty="0">
-                <a:effectLst/>
-                <a:latin typeface="Times New Roman" panose="02020603050405020304" pitchFamily="18" charset="0"/>
-                <a:ea typeface="宋体" panose="02010600030101010101" pitchFamily="2" charset="-122"/>
-                <a:cs typeface="Times New Roman" panose="02020603050405020304" pitchFamily="18" charset="0"/>
-              </a:rPr>
-              <a:t>等模拟器上的工作，</a:t>
-            </a:r>
-            <a:r>
-              <a:rPr lang="zh-CN" altLang="en-US" sz="1800" kern="100" dirty="0">
-                <a:effectLst/>
-                <a:latin typeface="Times New Roman" panose="02020603050405020304" pitchFamily="18" charset="0"/>
-                <a:ea typeface="宋体" panose="02010600030101010101" pitchFamily="2" charset="-122"/>
-                <a:cs typeface="Times New Roman" panose="02020603050405020304" pitchFamily="18" charset="0"/>
-              </a:rPr>
-              <a:t>此工作能展示</a:t>
-            </a:r>
-            <a:r>
-              <a:rPr lang="en-US" altLang="zh-CN" sz="1800" kern="100" dirty="0">
-                <a:effectLst/>
-                <a:latin typeface="Times New Roman" panose="02020603050405020304" pitchFamily="18" charset="0"/>
-                <a:ea typeface="宋体" panose="02010600030101010101" pitchFamily="2" charset="-122"/>
-              </a:rPr>
-              <a:t>ZNS SSD</a:t>
-            </a:r>
-            <a:r>
-              <a:rPr lang="zh-CN" altLang="zh-CN" sz="1800" kern="100" dirty="0">
-                <a:effectLst/>
-                <a:latin typeface="Times New Roman" panose="02020603050405020304" pitchFamily="18" charset="0"/>
-                <a:ea typeface="宋体" panose="02010600030101010101" pitchFamily="2" charset="-122"/>
-                <a:cs typeface="Times New Roman" panose="02020603050405020304" pitchFamily="18" charset="0"/>
-              </a:rPr>
-              <a:t>在不同的真实场景下的性能表现</a:t>
-            </a:r>
-            <a:r>
-              <a:rPr lang="en-US" altLang="zh-CN" sz="1800" kern="100" dirty="0">
-                <a:effectLst/>
-                <a:latin typeface="Times New Roman" panose="02020603050405020304" pitchFamily="18" charset="0"/>
-                <a:ea typeface="宋体" panose="02010600030101010101" pitchFamily="2" charset="-122"/>
-                <a:cs typeface="Times New Roman" panose="02020603050405020304" pitchFamily="18" charset="0"/>
-              </a:rPr>
-              <a:t>;</a:t>
-            </a:r>
+              <a:rPr lang="zh-CN" altLang="en-US" sz="1200" dirty="0">
+                <a:latin typeface="Constantia" panose="02030602050306030303" pitchFamily="18" charset="0"/>
+              </a:rPr>
+              <a:t>仅列举</a:t>
+            </a:r>
+            <a:r>
+              <a:rPr lang="en-US" altLang="zh-CN" sz="1200" dirty="0">
+                <a:latin typeface="Constantia" panose="02030602050306030303" pitchFamily="18" charset="0"/>
+              </a:rPr>
+              <a:t>3</a:t>
+            </a:r>
+            <a:r>
+              <a:rPr lang="zh-CN" altLang="en-US" sz="1200" dirty="0">
+                <a:latin typeface="Constantia" panose="02030602050306030303" pitchFamily="18" charset="0"/>
+              </a:rPr>
+              <a:t>种比较典型的测试结果。</a:t>
+            </a:r>
+            <a:endParaRPr lang="en-US" altLang="zh-CN" sz="1200" dirty="0">
+              <a:latin typeface="Constantia" panose="02030602050306030303" pitchFamily="18" charset="0"/>
+            </a:endParaRPr>
           </a:p>
           <a:p>
             <a:pPr indent="0" algn="just">
@@ -3471,6 +4081,12 @@
               <a:buFont typeface="Arial" panose="020B0604020202020204" pitchFamily="34" charset="0"/>
               <a:buNone/>
             </a:pPr>
+            <a:r>
+              <a:rPr lang="zh-CN" altLang="en-US" sz="1200" dirty="0">
+                <a:latin typeface="Constantia" panose="02030602050306030303" pitchFamily="18" charset="0"/>
+              </a:rPr>
+              <a:t>分别是：</a:t>
+            </a:r>
             <a:endParaRPr lang="en-US" altLang="zh-CN" sz="1200" dirty="0">
               <a:latin typeface="Constantia" panose="02030602050306030303" pitchFamily="18" charset="0"/>
             </a:endParaRPr>
@@ -3484,83 +4100,44 @@
               <a:buNone/>
             </a:pPr>
             <a:r>
+              <a:rPr lang="en-US" altLang="zh-CN" sz="1200" dirty="0">
+                <a:latin typeface="Constantia" panose="02030602050306030303" pitchFamily="18" charset="0"/>
+              </a:rPr>
+              <a:t>1</a:t>
+            </a:r>
+            <a:r>
               <a:rPr lang="zh-CN" altLang="en-US" sz="1200" dirty="0">
                 <a:latin typeface="Constantia" panose="02030602050306030303" pitchFamily="18" charset="0"/>
               </a:rPr>
-              <a:t>相较于西数已有的基于真实设备（</a:t>
+              <a:t>：</a:t>
             </a:r>
             <a:r>
               <a:rPr lang="en-US" altLang="zh-CN" sz="1200" dirty="0">
                 <a:latin typeface="Constantia" panose="02030602050306030303" pitchFamily="18" charset="0"/>
               </a:rPr>
-              <a:t>ZN540</a:t>
+              <a:t> </a:t>
             </a:r>
             <a:r>
               <a:rPr lang="zh-CN" altLang="en-US" sz="1200" dirty="0">
                 <a:latin typeface="Constantia" panose="02030602050306030303" pitchFamily="18" charset="0"/>
               </a:rPr>
-              <a:t>）的工作，我们使用浪潮提供的最新</a:t>
+              <a:t>模拟</a:t>
             </a:r>
             <a:r>
               <a:rPr lang="en-US" altLang="zh-CN" sz="1200" dirty="0">
                 <a:latin typeface="Constantia" panose="02030602050306030303" pitchFamily="18" charset="0"/>
               </a:rPr>
-              <a:t>ZNS</a:t>
+              <a:t>vs</a:t>
             </a:r>
             <a:r>
               <a:rPr lang="zh-CN" altLang="en-US" sz="1200" dirty="0">
                 <a:latin typeface="Constantia" panose="02030602050306030303" pitchFamily="18" charset="0"/>
               </a:rPr>
-              <a:t>盘，一方面，其介质选用更好的</a:t>
-            </a:r>
-            <a:r>
-              <a:rPr lang="en-US" altLang="zh-CN" sz="1200" dirty="0">
-                <a:latin typeface="Constantia" panose="02030602050306030303" pitchFamily="18" charset="0"/>
-              </a:rPr>
-              <a:t>TLC</a:t>
-            </a:r>
-            <a:r>
-              <a:rPr lang="zh-CN" altLang="en-US" sz="1200" dirty="0">
-                <a:latin typeface="Constantia" panose="02030602050306030303" pitchFamily="18" charset="0"/>
-              </a:rPr>
-              <a:t>颗粒</a:t>
-            </a:r>
-            <a:r>
-              <a:rPr lang="en-US" altLang="zh-CN" sz="1200" dirty="0">
-                <a:latin typeface="Constantia" panose="02030602050306030303" pitchFamily="18" charset="0"/>
-              </a:rPr>
-              <a:t>(</a:t>
-            </a:r>
-            <a:r>
-              <a:rPr lang="zh-CN" altLang="en-US" sz="1200" dirty="0">
-                <a:latin typeface="Constantia" panose="02030602050306030303" pitchFamily="18" charset="0"/>
-              </a:rPr>
-              <a:t>西数是</a:t>
-            </a:r>
-            <a:r>
-              <a:rPr lang="en-US" altLang="zh-CN" sz="1200" dirty="0">
-                <a:latin typeface="Constantia" panose="02030602050306030303" pitchFamily="18" charset="0"/>
-              </a:rPr>
-              <a:t>QLC</a:t>
-            </a:r>
-            <a:r>
-              <a:rPr lang="zh-CN" altLang="en-US" sz="1200" dirty="0">
-                <a:latin typeface="Constantia" panose="02030602050306030303" pitchFamily="18" charset="0"/>
-              </a:rPr>
-              <a:t>颗粒）；另一方面，关键参数上有区别，例如已知的，</a:t>
-            </a:r>
-            <a:r>
-              <a:rPr lang="en-US" altLang="zh-CN" sz="1200" dirty="0">
-                <a:latin typeface="Constantia" panose="02030602050306030303" pitchFamily="18" charset="0"/>
-              </a:rPr>
-              <a:t>zone size 2GB-&gt;1.4GB</a:t>
-            </a:r>
-            <a:r>
-              <a:rPr lang="zh-CN" altLang="en-US" sz="1200" dirty="0">
-                <a:latin typeface="Constantia" panose="02030602050306030303" pitchFamily="18" charset="0"/>
-              </a:rPr>
-              <a:t>，最大带宽也更大。</a:t>
-            </a:r>
+              <a:t>真实</a:t>
+            </a:r>
+            <a:endParaRPr lang="en-US" altLang="zh-CN" sz="1200" dirty="0">
+              <a:latin typeface="Constantia" panose="02030602050306030303" pitchFamily="18" charset="0"/>
+            </a:endParaRPr>
           </a:p>
           <a:p>
             <a:pPr indent="0" algn="just">
@@ -3570,21 +4147,60 @@
               <a:buFont typeface="Arial" panose="020B0604020202020204" pitchFamily="34" charset="0"/>
               <a:buNone/>
             </a:pPr>
-            <a:endParaRPr lang="zh-CN" altLang="en-US" sz="1200" dirty="0">
+            <a:r>
+              <a:rPr lang="en-US" altLang="zh-CN" sz="1200" dirty="0">
+                <a:latin typeface="Constantia" panose="02030602050306030303" pitchFamily="18" charset="0"/>
+              </a:rPr>
+              <a:t>2</a:t>
+            </a:r>
+            <a:r>
+              <a:rPr lang="zh-CN" altLang="en-US" sz="1200" dirty="0">
+                <a:latin typeface="Constantia" panose="02030602050306030303" pitchFamily="18" charset="0"/>
+              </a:rPr>
+              <a:t>： 单</a:t>
+            </a:r>
+            <a:r>
+              <a:rPr lang="en-US" altLang="zh-CN" sz="1200" dirty="0">
+                <a:latin typeface="Constantia" panose="02030602050306030303" pitchFamily="18" charset="0"/>
+              </a:rPr>
+              <a:t>Zone</a:t>
+            </a:r>
+            <a:r>
+              <a:rPr lang="zh-CN" altLang="en-US" sz="1200" dirty="0">
+                <a:latin typeface="Constantia" panose="02030602050306030303" pitchFamily="18" charset="0"/>
+              </a:rPr>
+              <a:t>性能</a:t>
+            </a:r>
+            <a:endParaRPr lang="en-US" altLang="zh-CN" sz="1200" dirty="0">
               <a:latin typeface="Constantia" panose="02030602050306030303" pitchFamily="18" charset="0"/>
             </a:endParaRPr>
           </a:p>
-        </p:txBody>
-      </p:sp>
-      <p:sp>
-        <p:nvSpPr>
-          <p:cNvPr id="4" name="灯片编号占位符 3">
-            <a:extLst>
-              <a:ext uri="{FF2B5EF4-FFF2-40B4-BE49-F238E27FC236}">
-                <a16:creationId xmlns:a16="http://schemas.microsoft.com/office/drawing/2014/main" id="{DB1DAFFE-4908-88CA-8C3E-9E3DEFD08EB3}"/>
-              </a:ext>
-            </a:extLst>
-          </p:cNvPr>
+          <a:p>
+            <a:pPr indent="0" algn="just">
+              <a:spcAft>
+                <a:spcPts val="1200"/>
+              </a:spcAft>
+              <a:buFont typeface="Arial" panose="020B0604020202020204" pitchFamily="34" charset="0"/>
+              <a:buNone/>
+            </a:pPr>
+            <a:r>
+              <a:rPr lang="en-US" altLang="zh-CN" sz="1200" dirty="0">
+                <a:latin typeface="Constantia" panose="02030602050306030303" pitchFamily="18" charset="0"/>
+              </a:rPr>
+              <a:t>3</a:t>
+            </a:r>
+            <a:r>
+              <a:rPr lang="zh-CN" altLang="en-US" sz="1200" dirty="0">
+                <a:latin typeface="Constantia" panose="02030602050306030303" pitchFamily="18" charset="0"/>
+              </a:rPr>
+              <a:t>：</a:t>
+            </a:r>
+          </a:p>
+        </p:txBody>
+      </p:sp>
+      <p:sp>
+        <p:nvSpPr>
+          <p:cNvPr id="4" name="灯片编号占位符 3"/>
           <p:cNvSpPr>
             <a:spLocks noGrp="1"/>
           </p:cNvSpPr>
@@ -3608,7 +4224,7 @@
     </p:spTree>
     <p:extLst>
       <p:ext uri="{BB962C8B-B14F-4D97-AF65-F5344CB8AC3E}">
-        <p14:creationId xmlns:p14="http://schemas.microsoft.com/office/powerpoint/2010/main" val="2960569650"/>
+        <p14:creationId xmlns:p14="http://schemas.microsoft.com/office/powerpoint/2010/main" val="927470145"/>
       </p:ext>
     </p:extLst>
   </p:cSld>
@@ -7514,6 +8130,2773 @@
                 <a:ea typeface="+mn-lt"/>
                 <a:cs typeface="Times New Roman" panose="02020603050405020304" charset="0"/>
               </a:rPr>
+              <a:t>ZAFS</a:t>
+            </a:r>
+            <a:r>
+              <a:rPr lang="zh-CN" altLang="en-US" sz="2400" dirty="0">
+                <a:solidFill>
+                  <a:srgbClr val="4747BA"/>
+                </a:solidFill>
+                <a:ea typeface="+mn-lt"/>
+                <a:cs typeface="Times New Roman" panose="02020603050405020304" charset="0"/>
+              </a:rPr>
+              <a:t>评估</a:t>
+            </a:r>
+            <a:endParaRPr lang="en-US" altLang="zh-CN" sz="2400" dirty="0">
+              <a:solidFill>
+                <a:srgbClr val="4747BA"/>
+              </a:solidFill>
+              <a:ea typeface="+mn-lt"/>
+              <a:cs typeface="Times New Roman" panose="02020603050405020304" charset="0"/>
+            </a:endParaRPr>
+          </a:p>
+        </p:txBody>
+      </p:sp>
+      <p:sp>
+        <p:nvSpPr>
+          <p:cNvPr id="10" name="Fußzeilenplatzhalter 4">
+            <a:extLst>
+              <a:ext uri="{FF2B5EF4-FFF2-40B4-BE49-F238E27FC236}">
+                <a16:creationId xmlns:a16="http://schemas.microsoft.com/office/drawing/2014/main" id="{41291BC8-BAF3-496D-6C37-8B6EEABE8583}"/>
+              </a:ext>
+            </a:extLst>
+          </p:cNvPr>
+          <p:cNvSpPr>
+            <a:spLocks noGrp="1"/>
+          </p:cNvSpPr>
+          <p:nvPr>
+            <p:ph type="ftr" sz="quarter" idx="11"/>
+          </p:nvPr>
+        </p:nvSpPr>
+        <p:spPr>
+          <a:xfrm>
+            <a:off x="4095916" y="6553437"/>
+            <a:ext cx="4520431" cy="273844"/>
+          </a:xfrm>
+        </p:spPr>
+        <p:txBody>
+          <a:bodyPr/>
+          <a:lstStyle/>
+          <a:p>
+            <a:r>
+              <a:rPr lang="en-US" altLang="zh-CN" sz="1400" b="1" dirty="0" err="1">
+                <a:solidFill>
+                  <a:schemeClr val="bg1"/>
+                </a:solidFill>
+                <a:latin typeface="Constantia" panose="02030602050306030303" pitchFamily="18" charset="0"/>
+              </a:rPr>
+              <a:t>Ziqi</a:t>
+            </a:r>
+            <a:r>
+              <a:rPr lang="en-US" altLang="zh-CN" sz="1400" b="1" dirty="0">
+                <a:solidFill>
+                  <a:schemeClr val="bg1"/>
+                </a:solidFill>
+                <a:latin typeface="Constantia" panose="02030602050306030303" pitchFamily="18" charset="0"/>
+              </a:rPr>
+              <a:t> Liu | HUST</a:t>
+            </a:r>
+            <a:endParaRPr lang="zh-CN" altLang="en-US" sz="1400" b="1" dirty="0">
+              <a:solidFill>
+                <a:schemeClr val="bg1"/>
+              </a:solidFill>
+              <a:latin typeface="Constantia" panose="02030602050306030303" pitchFamily="18" charset="0"/>
+            </a:endParaRPr>
+          </a:p>
+        </p:txBody>
+      </p:sp>
+      <p:pic>
+        <p:nvPicPr>
+          <p:cNvPr id="16" name="图形 1">
+            <a:extLst>
+              <a:ext uri="{FF2B5EF4-FFF2-40B4-BE49-F238E27FC236}">
+                <a16:creationId xmlns:a16="http://schemas.microsoft.com/office/drawing/2014/main" id="{85C8F1B6-20F2-450A-83C0-254C48F6987A}"/>
+              </a:ext>
+            </a:extLst>
+          </p:cNvPr>
+          <p:cNvPicPr/>
+          <p:nvPr/>
+        </p:nvPicPr>
+        <p:blipFill>
+          <a:blip r:embed="rId5">
+            <a:extLst>
+              <a:ext uri="{96DAC541-7B7A-43D3-8B79-37D633B846F1}">
+                <asvg:svgBlip xmlns:asvg="http://schemas.microsoft.com/office/drawing/2016/SVG/main" r:embed="rId6"/>
+              </a:ext>
+            </a:extLst>
+          </a:blip>
+          <a:stretch>
+            <a:fillRect/>
+          </a:stretch>
+        </p:blipFill>
+        <p:spPr>
+          <a:xfrm>
+            <a:off x="920407" y="2692087"/>
+            <a:ext cx="4191000" cy="2913380"/>
+          </a:xfrm>
+          <a:prstGeom prst="rect">
+            <a:avLst/>
+          </a:prstGeom>
+        </p:spPr>
+      </p:pic>
+      <p:pic>
+        <p:nvPicPr>
+          <p:cNvPr id="19" name="图形 45">
+            <a:extLst>
+              <a:ext uri="{FF2B5EF4-FFF2-40B4-BE49-F238E27FC236}">
+                <a16:creationId xmlns:a16="http://schemas.microsoft.com/office/drawing/2014/main" id="{3A8141DC-2B35-4FEA-9F94-EB74B2B3E307}"/>
+              </a:ext>
+            </a:extLst>
+          </p:cNvPr>
+          <p:cNvPicPr/>
+          <p:nvPr/>
+        </p:nvPicPr>
+        <p:blipFill>
+          <a:blip r:embed="rId7">
+            <a:extLst>
+              <a:ext uri="{96DAC541-7B7A-43D3-8B79-37D633B846F1}">
+                <asvg:svgBlip xmlns:asvg="http://schemas.microsoft.com/office/drawing/2016/SVG/main" r:embed="rId8"/>
+              </a:ext>
+            </a:extLst>
+          </a:blip>
+          <a:stretch>
+            <a:fillRect/>
+          </a:stretch>
+        </p:blipFill>
+        <p:spPr>
+          <a:xfrm>
+            <a:off x="6834360" y="2720455"/>
+            <a:ext cx="4196715" cy="2797175"/>
+          </a:xfrm>
+          <a:prstGeom prst="rect">
+            <a:avLst/>
+          </a:prstGeom>
+        </p:spPr>
+      </p:pic>
+      <p:sp>
+        <p:nvSpPr>
+          <p:cNvPr id="21" name="文本框 20">
+            <a:extLst>
+              <a:ext uri="{FF2B5EF4-FFF2-40B4-BE49-F238E27FC236}">
+                <a16:creationId xmlns:a16="http://schemas.microsoft.com/office/drawing/2014/main" id="{53CB6ECB-9E02-4F97-A743-98E28F60E803}"/>
+              </a:ext>
+            </a:extLst>
+          </p:cNvPr>
+          <p:cNvSpPr txBox="1"/>
+          <p:nvPr/>
+        </p:nvSpPr>
+        <p:spPr>
+          <a:xfrm>
+            <a:off x="7080594" y="1990284"/>
+            <a:ext cx="3330171" cy="455253"/>
+          </a:xfrm>
+          <a:prstGeom prst="rect">
+            <a:avLst/>
+          </a:prstGeom>
+          <a:noFill/>
+        </p:spPr>
+        <p:txBody>
+          <a:bodyPr wrap="square">
+            <a:spAutoFit/>
+          </a:bodyPr>
+          <a:lstStyle/>
+          <a:p>
+            <a:pPr lvl="2" algn="just">
+              <a:lnSpc>
+                <a:spcPct val="150000"/>
+              </a:lnSpc>
+              <a:spcBef>
+                <a:spcPts val="600"/>
+              </a:spcBef>
+              <a:spcAft>
+                <a:spcPts val="600"/>
+              </a:spcAft>
+              <a:tabLst>
+                <a:tab pos="450215" algn="l"/>
+              </a:tabLst>
+            </a:pPr>
+            <a:r>
+              <a:rPr lang="en-US" altLang="zh-CN" sz="1800" kern="100" dirty="0">
+                <a:effectLst/>
+                <a:latin typeface="Times New Roman" panose="02020603050405020304" pitchFamily="18" charset="0"/>
+                <a:ea typeface="黑体" panose="02010609060101010101" pitchFamily="49" charset="-122"/>
+              </a:rPr>
+              <a:t>ZAFS </a:t>
+            </a:r>
+            <a:r>
+              <a:rPr lang="zh-CN" altLang="zh-CN" sz="1800" kern="100" dirty="0">
+                <a:effectLst/>
+                <a:latin typeface="Times New Roman" panose="02020603050405020304" pitchFamily="18" charset="0"/>
+                <a:ea typeface="黑体" panose="02010609060101010101" pitchFamily="49" charset="-122"/>
+              </a:rPr>
+              <a:t>恢复时间测试</a:t>
+            </a:r>
+          </a:p>
+        </p:txBody>
+      </p:sp>
+      <p:sp>
+        <p:nvSpPr>
+          <p:cNvPr id="22" name="文本框 21">
+            <a:extLst>
+              <a:ext uri="{FF2B5EF4-FFF2-40B4-BE49-F238E27FC236}">
+                <a16:creationId xmlns:a16="http://schemas.microsoft.com/office/drawing/2014/main" id="{141A07DB-644F-4FF7-8E4B-D6AB3482A560}"/>
+              </a:ext>
+            </a:extLst>
+          </p:cNvPr>
+          <p:cNvSpPr txBox="1"/>
+          <p:nvPr/>
+        </p:nvSpPr>
+        <p:spPr>
+          <a:xfrm>
+            <a:off x="1365770" y="1990283"/>
+            <a:ext cx="3745637" cy="455253"/>
+          </a:xfrm>
+          <a:prstGeom prst="rect">
+            <a:avLst/>
+          </a:prstGeom>
+          <a:noFill/>
+        </p:spPr>
+        <p:txBody>
+          <a:bodyPr wrap="square">
+            <a:spAutoFit/>
+          </a:bodyPr>
+          <a:lstStyle/>
+          <a:p>
+            <a:pPr lvl="2" algn="just">
+              <a:lnSpc>
+                <a:spcPct val="150000"/>
+              </a:lnSpc>
+              <a:spcBef>
+                <a:spcPts val="600"/>
+              </a:spcBef>
+              <a:spcAft>
+                <a:spcPts val="600"/>
+              </a:spcAft>
+              <a:tabLst>
+                <a:tab pos="450215" algn="l"/>
+              </a:tabLst>
+            </a:pPr>
+            <a:r>
+              <a:rPr lang="en-US" altLang="zh-CN" sz="1800" kern="100" dirty="0">
+                <a:effectLst/>
+                <a:latin typeface="Times New Roman" panose="02020603050405020304" pitchFamily="18" charset="0"/>
+                <a:ea typeface="黑体" panose="02010609060101010101" pitchFamily="49" charset="-122"/>
+              </a:rPr>
+              <a:t>ZAFS</a:t>
+            </a:r>
+            <a:r>
+              <a:rPr lang="zh-CN" altLang="zh-CN" sz="1800" kern="100" dirty="0">
+                <a:effectLst/>
+                <a:latin typeface="Times New Roman" panose="02020603050405020304" pitchFamily="18" charset="0"/>
+                <a:ea typeface="黑体" panose="02010609060101010101" pitchFamily="49" charset="-122"/>
+              </a:rPr>
+              <a:t>写入测试</a:t>
+            </a:r>
+          </a:p>
+        </p:txBody>
+      </p:sp>
+      <p:sp>
+        <p:nvSpPr>
+          <p:cNvPr id="25" name="文本框 24">
+            <a:extLst>
+              <a:ext uri="{FF2B5EF4-FFF2-40B4-BE49-F238E27FC236}">
+                <a16:creationId xmlns:a16="http://schemas.microsoft.com/office/drawing/2014/main" id="{9B8BFC0A-1446-4D70-A7AD-1DF215C88C83}"/>
+              </a:ext>
+            </a:extLst>
+          </p:cNvPr>
+          <p:cNvSpPr txBox="1"/>
+          <p:nvPr/>
+        </p:nvSpPr>
+        <p:spPr>
+          <a:xfrm>
+            <a:off x="281680" y="299000"/>
+            <a:ext cx="6798981" cy="535531"/>
+          </a:xfrm>
+          <a:prstGeom prst="rect">
+            <a:avLst/>
+          </a:prstGeom>
+          <a:noFill/>
+        </p:spPr>
+        <p:txBody>
+          <a:bodyPr wrap="square" rtlCol="0">
+            <a:spAutoFit/>
+          </a:bodyPr>
+          <a:lstStyle/>
+          <a:p>
+            <a:pPr>
+              <a:lnSpc>
+                <a:spcPct val="90000"/>
+              </a:lnSpc>
+              <a:spcBef>
+                <a:spcPts val="1000"/>
+              </a:spcBef>
+              <a:defRPr/>
+            </a:pPr>
+            <a:r>
+              <a:rPr lang="en-US" altLang="zh-CN" sz="3200" b="1" dirty="0">
+                <a:solidFill>
+                  <a:srgbClr val="4747BA"/>
+                </a:solidFill>
+                <a:latin typeface="Constantia" panose="02030602050306030303" pitchFamily="18" charset="0"/>
+                <a:ea typeface="腾讯体 W3" panose="020C04030202040F0204" pitchFamily="34" charset="-122"/>
+                <a:cs typeface="Times" panose="02020603050405020304" pitchFamily="18" charset="0"/>
+              </a:rPr>
+              <a:t> </a:t>
+            </a:r>
+            <a:r>
+              <a:rPr lang="zh-CN" altLang="en-US" sz="3200" b="1" dirty="0">
+                <a:solidFill>
+                  <a:srgbClr val="4747BA"/>
+                </a:solidFill>
+                <a:latin typeface="Constantia" panose="02030602050306030303" pitchFamily="18" charset="0"/>
+                <a:ea typeface="腾讯体 W3" panose="020C04030202040F0204" pitchFamily="34" charset="-122"/>
+                <a:cs typeface="Times" panose="02020603050405020304" pitchFamily="18" charset="0"/>
+              </a:rPr>
+              <a:t>实验评估</a:t>
+            </a:r>
+            <a:endParaRPr lang="zh-CN" altLang="en-US" sz="3600" b="1" dirty="0">
+              <a:solidFill>
+                <a:srgbClr val="4747BA"/>
+              </a:solidFill>
+              <a:latin typeface="Constantia" panose="02030602050306030303" pitchFamily="18" charset="0"/>
+              <a:ea typeface="腾讯体 W3" panose="020C04030202040F0204" pitchFamily="34" charset="-122"/>
+              <a:cs typeface="Times" panose="02020603050405020304" pitchFamily="18" charset="0"/>
+            </a:endParaRPr>
+          </a:p>
+        </p:txBody>
+      </p:sp>
+    </p:spTree>
+    <p:extLst>
+      <p:ext uri="{BB962C8B-B14F-4D97-AF65-F5344CB8AC3E}">
+        <p14:creationId xmlns:p14="http://schemas.microsoft.com/office/powerpoint/2010/main" val="2386150555"/>
+      </p:ext>
+    </p:extLst>
+  </p:cSld>
+  <p:clrMapOvr>
+    <a:masterClrMapping/>
+  </p:clrMapOvr>
+  <mc:AlternateContent xmlns:mc="http://schemas.openxmlformats.org/markup-compatibility/2006" xmlns:p14="http://schemas.microsoft.com/office/powerpoint/2010/main">
+    <mc:Choice Requires="p14">
+      <p:transition p14:dur="10" advClick="0"/>
+    </mc:Choice>
+    <mc:Fallback xmlns="">
+      <p:transition advClick="0"/>
+    </mc:Fallback>
+  </mc:AlternateContent>
+</p:sld>
+</file>
+
+<file path=ppt/slides/slide11.xml><?xml version="1.0" encoding="utf-8"?>
+<p:sld xmlns:a="http://schemas.openxmlformats.org/drawingml/2006/main" xmlns:r="http://schemas.openxmlformats.org/officeDocument/2006/relationships" xmlns:p="http://schemas.openxmlformats.org/presentationml/2006/main">
+  <p:cSld>
+    <p:spTree>
+      <p:nvGrpSpPr>
+        <p:cNvPr id="1" name=""/>
+        <p:cNvGrpSpPr/>
+        <p:nvPr/>
+      </p:nvGrpSpPr>
+      <p:grpSpPr>
+        <a:xfrm>
+          <a:off x="0" y="0"/>
+          <a:ext cx="0" cy="0"/>
+          <a:chOff x="0" y="0"/>
+          <a:chExt cx="0" cy="0"/>
+        </a:xfrm>
+      </p:grpSpPr>
+      <p:sp>
+        <p:nvSpPr>
+          <p:cNvPr id="21" name="文本框 20"/>
+          <p:cNvSpPr txBox="1"/>
+          <p:nvPr/>
+        </p:nvSpPr>
+        <p:spPr>
+          <a:xfrm>
+            <a:off x="8244849" y="4730406"/>
+            <a:ext cx="2099301" cy="1328569"/>
+          </a:xfrm>
+          <a:prstGeom prst="rect">
+            <a:avLst/>
+          </a:prstGeom>
+          <a:noFill/>
+        </p:spPr>
+        <p:txBody>
+          <a:bodyPr wrap="square" rtlCol="0">
+            <a:spAutoFit/>
+          </a:bodyPr>
+          <a:lstStyle/>
+          <a:p>
+            <a:pPr algn="ctr">
+              <a:lnSpc>
+                <a:spcPct val="90000"/>
+              </a:lnSpc>
+              <a:spcBef>
+                <a:spcPts val="1000"/>
+              </a:spcBef>
+              <a:defRPr/>
+            </a:pPr>
+            <a:r>
+              <a:rPr lang="en-US" altLang="zh-CN" sz="4000" b="1" dirty="0">
+                <a:solidFill>
+                  <a:srgbClr val="4747BA"/>
+                </a:solidFill>
+                <a:latin typeface="Constantia" panose="02030602050306030303" pitchFamily="18" charset="0"/>
+                <a:ea typeface="腾讯体 W3" panose="020C04030202040F0204" pitchFamily="34" charset="-122"/>
+                <a:cs typeface="Times" panose="02020603050405020304" pitchFamily="18" charset="0"/>
+              </a:rPr>
+              <a:t>Q&amp;A</a:t>
+            </a:r>
+          </a:p>
+          <a:p>
+            <a:pPr lvl="0" algn="ctr">
+              <a:lnSpc>
+                <a:spcPct val="90000"/>
+              </a:lnSpc>
+              <a:spcBef>
+                <a:spcPts val="1000"/>
+              </a:spcBef>
+              <a:defRPr/>
+            </a:pPr>
+            <a:r>
+              <a:rPr lang="en-US" altLang="zh-CN" sz="4000" b="1" dirty="0">
+                <a:solidFill>
+                  <a:srgbClr val="4747BA"/>
+                </a:solidFill>
+                <a:latin typeface="Constantia" panose="02030602050306030303" pitchFamily="18" charset="0"/>
+                <a:ea typeface="腾讯体 W3" panose="020C04030202040F0204" pitchFamily="34" charset="-122"/>
+                <a:cs typeface="Times" panose="02020603050405020304" pitchFamily="18" charset="0"/>
+              </a:rPr>
+              <a:t>Thanks</a:t>
+            </a:r>
+            <a:r>
+              <a:rPr lang="zh-CN" altLang="en-US" sz="4000" b="1" dirty="0">
+                <a:solidFill>
+                  <a:srgbClr val="4747BA"/>
+                </a:solidFill>
+                <a:latin typeface="Constantia" panose="02030602050306030303" pitchFamily="18" charset="0"/>
+                <a:ea typeface="腾讯体 W3" panose="020C04030202040F0204" pitchFamily="34" charset="-122"/>
+                <a:cs typeface="Times" panose="02020603050405020304" pitchFamily="18" charset="0"/>
+              </a:rPr>
+              <a:t>！</a:t>
+            </a:r>
+          </a:p>
+        </p:txBody>
+      </p:sp>
+      <p:sp>
+        <p:nvSpPr>
+          <p:cNvPr id="8" name="矩形: 圆角 7"/>
+          <p:cNvSpPr/>
+          <p:nvPr/>
+        </p:nvSpPr>
+        <p:spPr>
+          <a:xfrm rot="2755966">
+            <a:off x="4146517" y="3347706"/>
+            <a:ext cx="1613489" cy="1613489"/>
+          </a:xfrm>
+          <a:prstGeom prst="roundRect">
+            <a:avLst/>
+          </a:prstGeom>
+          <a:solidFill>
+            <a:srgbClr val="8484D1"/>
+          </a:solidFill>
+          <a:ln>
+            <a:noFill/>
+          </a:ln>
+          <a:effectLst>
+            <a:outerShdw blurRad="88900" dist="50800" dir="8100000" sx="101000" sy="101000" algn="tr" rotWithShape="0">
+              <a:prstClr val="black">
+                <a:alpha val="40000"/>
+              </a:prstClr>
+            </a:outerShdw>
+          </a:effectLst>
+        </p:spPr>
+        <p:style>
+          <a:lnRef idx="2">
+            <a:schemeClr val="accent1">
+              <a:shade val="50000"/>
+            </a:schemeClr>
+          </a:lnRef>
+          <a:fillRef idx="1">
+            <a:schemeClr val="accent1"/>
+          </a:fillRef>
+          <a:effectRef idx="0">
+            <a:schemeClr val="accent1"/>
+          </a:effectRef>
+          <a:fontRef idx="minor">
+            <a:schemeClr val="lt1"/>
+          </a:fontRef>
+        </p:style>
+        <p:txBody>
+          <a:bodyPr rtlCol="0" anchor="ctr"/>
+          <a:lstStyle/>
+          <a:p>
+            <a:pPr algn="ctr"/>
+            <a:endParaRPr lang="zh-CN" altLang="en-US"/>
+          </a:p>
+        </p:txBody>
+      </p:sp>
+      <p:sp>
+        <p:nvSpPr>
+          <p:cNvPr id="9" name="矩形: 圆角 8"/>
+          <p:cNvSpPr/>
+          <p:nvPr/>
+        </p:nvSpPr>
+        <p:spPr>
+          <a:xfrm rot="2755966">
+            <a:off x="2770276" y="966707"/>
+            <a:ext cx="1613489" cy="1613489"/>
+          </a:xfrm>
+          <a:prstGeom prst="roundRect">
+            <a:avLst/>
+          </a:prstGeom>
+          <a:solidFill>
+            <a:srgbClr val="8484D1"/>
+          </a:solidFill>
+          <a:ln>
+            <a:noFill/>
+          </a:ln>
+          <a:effectLst>
+            <a:outerShdw blurRad="88900" dist="50800" dir="8100000" sx="101000" sy="101000" algn="tr" rotWithShape="0">
+              <a:prstClr val="black">
+                <a:alpha val="40000"/>
+              </a:prstClr>
+            </a:outerShdw>
+          </a:effectLst>
+        </p:spPr>
+        <p:style>
+          <a:lnRef idx="2">
+            <a:schemeClr val="accent1">
+              <a:shade val="50000"/>
+            </a:schemeClr>
+          </a:lnRef>
+          <a:fillRef idx="1">
+            <a:schemeClr val="accent1"/>
+          </a:fillRef>
+          <a:effectRef idx="0">
+            <a:schemeClr val="accent1"/>
+          </a:effectRef>
+          <a:fontRef idx="minor">
+            <a:schemeClr val="lt1"/>
+          </a:fontRef>
+        </p:style>
+        <p:txBody>
+          <a:bodyPr rtlCol="0" anchor="ctr"/>
+          <a:lstStyle/>
+          <a:p>
+            <a:pPr algn="ctr"/>
+            <a:endParaRPr lang="zh-CN" altLang="en-US"/>
+          </a:p>
+        </p:txBody>
+      </p:sp>
+      <p:sp>
+        <p:nvSpPr>
+          <p:cNvPr id="10" name="矩形: 圆角 9"/>
+          <p:cNvSpPr/>
+          <p:nvPr/>
+        </p:nvSpPr>
+        <p:spPr>
+          <a:xfrm rot="2755966">
+            <a:off x="4586763" y="2029472"/>
+            <a:ext cx="732996" cy="732996"/>
+          </a:xfrm>
+          <a:prstGeom prst="roundRect">
+            <a:avLst/>
+          </a:prstGeom>
+          <a:solidFill>
+            <a:srgbClr val="ADADE0"/>
+          </a:solidFill>
+          <a:ln>
+            <a:noFill/>
+          </a:ln>
+          <a:effectLst>
+            <a:outerShdw blurRad="88900" dist="50800" dir="8100000" sx="101000" sy="101000" algn="tr" rotWithShape="0">
+              <a:prstClr val="black">
+                <a:alpha val="40000"/>
+              </a:prstClr>
+            </a:outerShdw>
+          </a:effectLst>
+        </p:spPr>
+        <p:style>
+          <a:lnRef idx="2">
+            <a:schemeClr val="accent1">
+              <a:shade val="50000"/>
+            </a:schemeClr>
+          </a:lnRef>
+          <a:fillRef idx="1">
+            <a:schemeClr val="accent1"/>
+          </a:fillRef>
+          <a:effectRef idx="0">
+            <a:schemeClr val="accent1"/>
+          </a:effectRef>
+          <a:fontRef idx="minor">
+            <a:schemeClr val="lt1"/>
+          </a:fontRef>
+        </p:style>
+        <p:txBody>
+          <a:bodyPr rtlCol="0" anchor="ctr"/>
+          <a:lstStyle/>
+          <a:p>
+            <a:pPr algn="ctr"/>
+            <a:endParaRPr lang="zh-CN" altLang="en-US"/>
+          </a:p>
+        </p:txBody>
+      </p:sp>
+      <p:sp>
+        <p:nvSpPr>
+          <p:cNvPr id="11" name="矩形: 圆角 10"/>
+          <p:cNvSpPr/>
+          <p:nvPr/>
+        </p:nvSpPr>
+        <p:spPr>
+          <a:xfrm rot="2755966">
+            <a:off x="1415554" y="2470682"/>
+            <a:ext cx="3134556" cy="3134556"/>
+          </a:xfrm>
+          <a:prstGeom prst="roundRect">
+            <a:avLst/>
+          </a:prstGeom>
+          <a:blipFill dpi="0" rotWithShape="0">
+            <a:blip r:embed="rId3"/>
+            <a:srcRect/>
+            <a:stretch>
+              <a:fillRect/>
+            </a:stretch>
+          </a:blipFill>
+          <a:ln>
+            <a:noFill/>
+          </a:ln>
+          <a:effectLst>
+            <a:outerShdw blurRad="114300" dist="50800" dir="7800000" sx="101000" sy="101000" algn="tr" rotWithShape="0">
+              <a:prstClr val="black">
+                <a:alpha val="64000"/>
+              </a:prstClr>
+            </a:outerShdw>
+          </a:effectLst>
+        </p:spPr>
+        <p:style>
+          <a:lnRef idx="2">
+            <a:schemeClr val="accent1">
+              <a:shade val="50000"/>
+            </a:schemeClr>
+          </a:lnRef>
+          <a:fillRef idx="1">
+            <a:schemeClr val="accent1"/>
+          </a:fillRef>
+          <a:effectRef idx="0">
+            <a:schemeClr val="accent1"/>
+          </a:effectRef>
+          <a:fontRef idx="minor">
+            <a:schemeClr val="lt1"/>
+          </a:fontRef>
+        </p:style>
+        <p:txBody>
+          <a:bodyPr rtlCol="0" anchor="ctr"/>
+          <a:lstStyle/>
+          <a:p>
+            <a:pPr algn="ctr"/>
+            <a:endParaRPr lang="zh-CN" altLang="en-US" dirty="0"/>
+          </a:p>
+        </p:txBody>
+      </p:sp>
+      <p:sp>
+        <p:nvSpPr>
+          <p:cNvPr id="12" name="矩形: 圆角 11"/>
+          <p:cNvSpPr/>
+          <p:nvPr/>
+        </p:nvSpPr>
+        <p:spPr>
+          <a:xfrm rot="2755966">
+            <a:off x="5633126" y="2433704"/>
+            <a:ext cx="1685894" cy="1685894"/>
+          </a:xfrm>
+          <a:prstGeom prst="roundRect">
+            <a:avLst/>
+          </a:prstGeom>
+          <a:solidFill>
+            <a:srgbClr val="4747BA"/>
+          </a:solidFill>
+          <a:ln>
+            <a:noFill/>
+          </a:ln>
+          <a:effectLst>
+            <a:outerShdw blurRad="88900" dist="50800" dir="8100000" sx="101000" sy="101000" algn="tr" rotWithShape="0">
+              <a:prstClr val="black">
+                <a:alpha val="40000"/>
+              </a:prstClr>
+            </a:outerShdw>
+          </a:effectLst>
+        </p:spPr>
+        <p:style>
+          <a:lnRef idx="2">
+            <a:schemeClr val="accent1">
+              <a:shade val="50000"/>
+            </a:schemeClr>
+          </a:lnRef>
+          <a:fillRef idx="1">
+            <a:schemeClr val="accent1"/>
+          </a:fillRef>
+          <a:effectRef idx="0">
+            <a:schemeClr val="accent1"/>
+          </a:effectRef>
+          <a:fontRef idx="minor">
+            <a:schemeClr val="lt1"/>
+          </a:fontRef>
+        </p:style>
+        <p:txBody>
+          <a:bodyPr rtlCol="0" anchor="ctr"/>
+          <a:lstStyle/>
+          <a:p>
+            <a:pPr algn="ctr"/>
+            <a:endParaRPr lang="zh-CN" altLang="en-US" dirty="0"/>
+          </a:p>
+        </p:txBody>
+      </p:sp>
+      <p:sp>
+        <p:nvSpPr>
+          <p:cNvPr id="15" name="矩形: 圆角 14"/>
+          <p:cNvSpPr/>
+          <p:nvPr/>
+        </p:nvSpPr>
+        <p:spPr>
+          <a:xfrm rot="2755966">
+            <a:off x="3965400" y="5546431"/>
+            <a:ext cx="732996" cy="732996"/>
+          </a:xfrm>
+          <a:prstGeom prst="roundRect">
+            <a:avLst/>
+          </a:prstGeom>
+          <a:solidFill>
+            <a:srgbClr val="ADADE0"/>
+          </a:solidFill>
+          <a:ln>
+            <a:noFill/>
+          </a:ln>
+          <a:effectLst>
+            <a:outerShdw blurRad="88900" dist="50800" dir="8100000" sx="101000" sy="101000" algn="tr" rotWithShape="0">
+              <a:prstClr val="black">
+                <a:alpha val="40000"/>
+              </a:prstClr>
+            </a:outerShdw>
+          </a:effectLst>
+        </p:spPr>
+        <p:style>
+          <a:lnRef idx="2">
+            <a:schemeClr val="accent1">
+              <a:shade val="50000"/>
+            </a:schemeClr>
+          </a:lnRef>
+          <a:fillRef idx="1">
+            <a:schemeClr val="accent1"/>
+          </a:fillRef>
+          <a:effectRef idx="0">
+            <a:schemeClr val="accent1"/>
+          </a:effectRef>
+          <a:fontRef idx="minor">
+            <a:schemeClr val="lt1"/>
+          </a:fontRef>
+        </p:style>
+        <p:txBody>
+          <a:bodyPr rtlCol="0" anchor="ctr"/>
+          <a:lstStyle/>
+          <a:p>
+            <a:pPr algn="ctr"/>
+            <a:endParaRPr lang="zh-CN" altLang="en-US"/>
+          </a:p>
+        </p:txBody>
+      </p:sp>
+      <p:sp>
+        <p:nvSpPr>
+          <p:cNvPr id="16" name="矩形: 圆角 15"/>
+          <p:cNvSpPr/>
+          <p:nvPr/>
+        </p:nvSpPr>
+        <p:spPr>
+          <a:xfrm rot="2755966">
+            <a:off x="5089423" y="716157"/>
+            <a:ext cx="1134056" cy="1134056"/>
+          </a:xfrm>
+          <a:prstGeom prst="roundRect">
+            <a:avLst/>
+          </a:prstGeom>
+          <a:solidFill>
+            <a:srgbClr val="4747BA"/>
+          </a:solidFill>
+          <a:ln>
+            <a:noFill/>
+          </a:ln>
+          <a:effectLst>
+            <a:outerShdw blurRad="88900" dist="50800" dir="8100000" sx="101000" sy="101000" algn="tr" rotWithShape="0">
+              <a:prstClr val="black">
+                <a:alpha val="40000"/>
+              </a:prstClr>
+            </a:outerShdw>
+          </a:effectLst>
+        </p:spPr>
+        <p:style>
+          <a:lnRef idx="2">
+            <a:schemeClr val="accent1">
+              <a:shade val="50000"/>
+            </a:schemeClr>
+          </a:lnRef>
+          <a:fillRef idx="1">
+            <a:schemeClr val="accent1"/>
+          </a:fillRef>
+          <a:effectRef idx="0">
+            <a:schemeClr val="accent1"/>
+          </a:effectRef>
+          <a:fontRef idx="minor">
+            <a:schemeClr val="lt1"/>
+          </a:fontRef>
+        </p:style>
+        <p:txBody>
+          <a:bodyPr rtlCol="0" anchor="ctr"/>
+          <a:lstStyle/>
+          <a:p>
+            <a:pPr algn="ctr"/>
+            <a:endParaRPr lang="zh-CN" altLang="en-US"/>
+          </a:p>
+        </p:txBody>
+      </p:sp>
+      <p:sp>
+        <p:nvSpPr>
+          <p:cNvPr id="19" name="矩形: 圆角 18"/>
+          <p:cNvSpPr/>
+          <p:nvPr/>
+        </p:nvSpPr>
+        <p:spPr>
+          <a:xfrm rot="2755966">
+            <a:off x="7189439" y="1365266"/>
+            <a:ext cx="396502" cy="396502"/>
+          </a:xfrm>
+          <a:prstGeom prst="roundRect">
+            <a:avLst/>
+          </a:prstGeom>
+          <a:solidFill>
+            <a:srgbClr val="ADADE0"/>
+          </a:solidFill>
+          <a:ln>
+            <a:noFill/>
+          </a:ln>
+          <a:effectLst>
+            <a:outerShdw blurRad="88900" dist="50800" dir="8100000" sx="101000" sy="101000" algn="tr" rotWithShape="0">
+              <a:prstClr val="black">
+                <a:alpha val="40000"/>
+              </a:prstClr>
+            </a:outerShdw>
+          </a:effectLst>
+        </p:spPr>
+        <p:style>
+          <a:lnRef idx="2">
+            <a:schemeClr val="accent1">
+              <a:shade val="50000"/>
+            </a:schemeClr>
+          </a:lnRef>
+          <a:fillRef idx="1">
+            <a:schemeClr val="accent1"/>
+          </a:fillRef>
+          <a:effectRef idx="0">
+            <a:schemeClr val="accent1"/>
+          </a:effectRef>
+          <a:fontRef idx="minor">
+            <a:schemeClr val="lt1"/>
+          </a:fontRef>
+        </p:style>
+        <p:txBody>
+          <a:bodyPr rtlCol="0" anchor="ctr"/>
+          <a:lstStyle/>
+          <a:p>
+            <a:pPr algn="ctr"/>
+            <a:endParaRPr lang="zh-CN" altLang="en-US"/>
+          </a:p>
+        </p:txBody>
+      </p:sp>
+      <p:pic>
+        <p:nvPicPr>
+          <p:cNvPr id="17" name="图片 16"/>
+          <p:cNvPicPr>
+            <a:picLocks noChangeAspect="1"/>
+          </p:cNvPicPr>
+          <p:nvPr/>
+        </p:nvPicPr>
+        <p:blipFill>
+          <a:blip r:embed="rId4" cstate="print">
+            <a:extLst>
+              <a:ext uri="{28A0092B-C50C-407E-A947-70E740481C1C}">
+                <a14:useLocalDpi xmlns:a14="http://schemas.microsoft.com/office/drawing/2010/main" val="0"/>
+              </a:ext>
+            </a:extLst>
+          </a:blip>
+          <a:stretch>
+            <a:fillRect/>
+          </a:stretch>
+        </p:blipFill>
+        <p:spPr>
+          <a:xfrm>
+            <a:off x="7804063" y="218980"/>
+            <a:ext cx="730337" cy="556270"/>
+          </a:xfrm>
+          <a:prstGeom prst="rect">
+            <a:avLst/>
+          </a:prstGeom>
+        </p:spPr>
+      </p:pic>
+      <p:pic>
+        <p:nvPicPr>
+          <p:cNvPr id="18" name="图片 17"/>
+          <p:cNvPicPr>
+            <a:picLocks noChangeAspect="1"/>
+          </p:cNvPicPr>
+          <p:nvPr/>
+        </p:nvPicPr>
+        <p:blipFill>
+          <a:blip r:embed="rId5" cstate="print">
+            <a:extLst>
+              <a:ext uri="{28A0092B-C50C-407E-A947-70E740481C1C}">
+                <a14:useLocalDpi xmlns:a14="http://schemas.microsoft.com/office/drawing/2010/main" val="0"/>
+              </a:ext>
+            </a:extLst>
+          </a:blip>
+          <a:stretch>
+            <a:fillRect/>
+          </a:stretch>
+        </p:blipFill>
+        <p:spPr>
+          <a:xfrm>
+            <a:off x="8590829" y="204228"/>
+            <a:ext cx="3323471" cy="570629"/>
+          </a:xfrm>
+          <a:prstGeom prst="rect">
+            <a:avLst/>
+          </a:prstGeom>
+        </p:spPr>
+      </p:pic>
+    </p:spTree>
+  </p:cSld>
+  <p:clrMapOvr>
+    <a:masterClrMapping/>
+  </p:clrMapOvr>
+  <mc:AlternateContent xmlns:mc="http://schemas.openxmlformats.org/markup-compatibility/2006" xmlns:p14="http://schemas.microsoft.com/office/powerpoint/2010/main">
+    <mc:Choice Requires="p14">
+      <p:transition p14:dur="0" advClick="0"/>
+    </mc:Choice>
+    <mc:Fallback xmlns="">
+      <p:transition advClick="0"/>
+    </mc:Fallback>
+  </mc:AlternateContent>
+</p:sld>
+</file>
+
+<file path=ppt/slides/slide12.xml><?xml version="1.0" encoding="utf-8"?>
+<p:sld xmlns:a="http://schemas.openxmlformats.org/drawingml/2006/main" xmlns:r="http://schemas.openxmlformats.org/officeDocument/2006/relationships" xmlns:p="http://schemas.openxmlformats.org/presentationml/2006/main">
+  <p:cSld>
+    <p:spTree>
+      <p:nvGrpSpPr>
+        <p:cNvPr id="1" name="">
+          <a:extLst>
+            <a:ext uri="{FF2B5EF4-FFF2-40B4-BE49-F238E27FC236}">
+              <a16:creationId xmlns:a16="http://schemas.microsoft.com/office/drawing/2014/main" id="{6604C42E-10F4-5ED3-3B5F-98D4CE0CFD56}"/>
+            </a:ext>
+          </a:extLst>
+        </p:cNvPr>
+        <p:cNvGrpSpPr/>
+        <p:nvPr/>
+      </p:nvGrpSpPr>
+      <p:grpSpPr>
+        <a:xfrm>
+          <a:off x="0" y="0"/>
+          <a:ext cx="0" cy="0"/>
+          <a:chOff x="0" y="0"/>
+          <a:chExt cx="0" cy="0"/>
+        </a:xfrm>
+      </p:grpSpPr>
+      <p:sp>
+        <p:nvSpPr>
+          <p:cNvPr id="17" name="矩形 16">
+            <a:extLst>
+              <a:ext uri="{FF2B5EF4-FFF2-40B4-BE49-F238E27FC236}">
+                <a16:creationId xmlns:a16="http://schemas.microsoft.com/office/drawing/2014/main" id="{D51A506B-621B-19F1-C0B5-853F3F9955B6}"/>
+              </a:ext>
+            </a:extLst>
+          </p:cNvPr>
+          <p:cNvSpPr/>
+          <p:nvPr/>
+        </p:nvSpPr>
+        <p:spPr>
+          <a:xfrm>
+            <a:off x="0" y="6522720"/>
+            <a:ext cx="4267200" cy="335280"/>
+          </a:xfrm>
+          <a:prstGeom prst="rect">
+            <a:avLst/>
+          </a:prstGeom>
+          <a:solidFill>
+            <a:srgbClr val="4747BA"/>
+          </a:solidFill>
+          <a:ln>
+            <a:noFill/>
+          </a:ln>
+        </p:spPr>
+        <p:style>
+          <a:lnRef idx="2">
+            <a:schemeClr val="accent1">
+              <a:shade val="50000"/>
+            </a:schemeClr>
+          </a:lnRef>
+          <a:fillRef idx="1">
+            <a:schemeClr val="accent1"/>
+          </a:fillRef>
+          <a:effectRef idx="0">
+            <a:schemeClr val="accent1"/>
+          </a:effectRef>
+          <a:fontRef idx="minor">
+            <a:schemeClr val="lt1"/>
+          </a:fontRef>
+        </p:style>
+        <p:txBody>
+          <a:bodyPr rtlCol="0" anchor="ctr"/>
+          <a:lstStyle/>
+          <a:p>
+            <a:pPr algn="ctr"/>
+            <a:endParaRPr lang="zh-CN" altLang="en-US"/>
+          </a:p>
+        </p:txBody>
+      </p:sp>
+      <p:sp>
+        <p:nvSpPr>
+          <p:cNvPr id="18" name="矩形 17">
+            <a:extLst>
+              <a:ext uri="{FF2B5EF4-FFF2-40B4-BE49-F238E27FC236}">
+                <a16:creationId xmlns:a16="http://schemas.microsoft.com/office/drawing/2014/main" id="{6C320792-7830-48E2-B090-5666E8D0E690}"/>
+              </a:ext>
+            </a:extLst>
+          </p:cNvPr>
+          <p:cNvSpPr/>
+          <p:nvPr/>
+        </p:nvSpPr>
+        <p:spPr>
+          <a:xfrm>
+            <a:off x="4267200" y="6522720"/>
+            <a:ext cx="4267200" cy="335280"/>
+          </a:xfrm>
+          <a:prstGeom prst="rect">
+            <a:avLst/>
+          </a:prstGeom>
+          <a:solidFill>
+            <a:srgbClr val="8484D1"/>
+          </a:solidFill>
+          <a:ln>
+            <a:noFill/>
+          </a:ln>
+        </p:spPr>
+        <p:style>
+          <a:lnRef idx="2">
+            <a:schemeClr val="accent1">
+              <a:shade val="50000"/>
+            </a:schemeClr>
+          </a:lnRef>
+          <a:fillRef idx="1">
+            <a:schemeClr val="accent1"/>
+          </a:fillRef>
+          <a:effectRef idx="0">
+            <a:schemeClr val="accent1"/>
+          </a:effectRef>
+          <a:fontRef idx="minor">
+            <a:schemeClr val="lt1"/>
+          </a:fontRef>
+        </p:style>
+        <p:txBody>
+          <a:bodyPr rtlCol="0" anchor="ctr"/>
+          <a:lstStyle/>
+          <a:p>
+            <a:pPr algn="ctr"/>
+            <a:endParaRPr lang="zh-CN" altLang="en-US"/>
+          </a:p>
+        </p:txBody>
+      </p:sp>
+      <p:sp>
+        <p:nvSpPr>
+          <p:cNvPr id="20" name="矩形 19">
+            <a:extLst>
+              <a:ext uri="{FF2B5EF4-FFF2-40B4-BE49-F238E27FC236}">
+                <a16:creationId xmlns:a16="http://schemas.microsoft.com/office/drawing/2014/main" id="{013210B2-860D-157F-97C1-BD8694B816DF}"/>
+              </a:ext>
+            </a:extLst>
+          </p:cNvPr>
+          <p:cNvSpPr/>
+          <p:nvPr/>
+        </p:nvSpPr>
+        <p:spPr>
+          <a:xfrm>
+            <a:off x="8534400" y="6538313"/>
+            <a:ext cx="3657600" cy="335280"/>
+          </a:xfrm>
+          <a:prstGeom prst="rect">
+            <a:avLst/>
+          </a:prstGeom>
+          <a:solidFill>
+            <a:srgbClr val="ADADE0"/>
+          </a:solidFill>
+          <a:ln>
+            <a:noFill/>
+          </a:ln>
+        </p:spPr>
+        <p:style>
+          <a:lnRef idx="2">
+            <a:schemeClr val="accent1">
+              <a:shade val="50000"/>
+            </a:schemeClr>
+          </a:lnRef>
+          <a:fillRef idx="1">
+            <a:schemeClr val="accent1"/>
+          </a:fillRef>
+          <a:effectRef idx="0">
+            <a:schemeClr val="accent1"/>
+          </a:effectRef>
+          <a:fontRef idx="minor">
+            <a:schemeClr val="lt1"/>
+          </a:fontRef>
+        </p:style>
+        <p:txBody>
+          <a:bodyPr rot="0" spcFirstLastPara="0" vert="horz" wrap="square" lIns="91440" tIns="45720" rIns="91440" bIns="45720" numCol="1" spcCol="0" rtlCol="0" fromWordArt="0" anchor="ctr" anchorCtr="0" forceAA="0" compatLnSpc="1">
+            <a:noAutofit/>
+          </a:bodyPr>
+          <a:lstStyle>
+            <a:defPPr>
+              <a:defRPr lang="zh-CN"/>
+            </a:defPPr>
+            <a:lvl1pPr marL="0" algn="l" defTabSz="914400" rtl="0" eaLnBrk="1" latinLnBrk="0" hangingPunct="1">
+              <a:defRPr sz="1800" kern="1200">
+                <a:solidFill>
+                  <a:schemeClr val="lt1"/>
+                </a:solidFill>
+                <a:latin typeface="+mn-lt"/>
+                <a:ea typeface="+mn-ea"/>
+                <a:cs typeface="+mn-cs"/>
+              </a:defRPr>
+            </a:lvl1pPr>
+            <a:lvl2pPr marL="457200" algn="l" defTabSz="914400" rtl="0" eaLnBrk="1" latinLnBrk="0" hangingPunct="1">
+              <a:defRPr sz="1800" kern="1200">
+                <a:solidFill>
+                  <a:schemeClr val="lt1"/>
+                </a:solidFill>
+                <a:latin typeface="+mn-lt"/>
+                <a:ea typeface="+mn-ea"/>
+                <a:cs typeface="+mn-cs"/>
+              </a:defRPr>
+            </a:lvl2pPr>
+            <a:lvl3pPr marL="914400" algn="l" defTabSz="914400" rtl="0" eaLnBrk="1" latinLnBrk="0" hangingPunct="1">
+              <a:defRPr sz="1800" kern="1200">
+                <a:solidFill>
+                  <a:schemeClr val="lt1"/>
+                </a:solidFill>
+                <a:latin typeface="+mn-lt"/>
+                <a:ea typeface="+mn-ea"/>
+                <a:cs typeface="+mn-cs"/>
+              </a:defRPr>
+            </a:lvl3pPr>
+            <a:lvl4pPr marL="1371600" algn="l" defTabSz="914400" rtl="0" eaLnBrk="1" latinLnBrk="0" hangingPunct="1">
+              <a:defRPr sz="1800" kern="1200">
+                <a:solidFill>
+                  <a:schemeClr val="lt1"/>
+                </a:solidFill>
+                <a:latin typeface="+mn-lt"/>
+                <a:ea typeface="+mn-ea"/>
+                <a:cs typeface="+mn-cs"/>
+              </a:defRPr>
+            </a:lvl4pPr>
+            <a:lvl5pPr marL="1828800" algn="l" defTabSz="914400" rtl="0" eaLnBrk="1" latinLnBrk="0" hangingPunct="1">
+              <a:defRPr sz="1800" kern="1200">
+                <a:solidFill>
+                  <a:schemeClr val="lt1"/>
+                </a:solidFill>
+                <a:latin typeface="+mn-lt"/>
+                <a:ea typeface="+mn-ea"/>
+                <a:cs typeface="+mn-cs"/>
+              </a:defRPr>
+            </a:lvl5pPr>
+            <a:lvl6pPr marL="2286000" algn="l" defTabSz="914400" rtl="0" eaLnBrk="1" latinLnBrk="0" hangingPunct="1">
+              <a:defRPr sz="1800" kern="1200">
+                <a:solidFill>
+                  <a:schemeClr val="lt1"/>
+                </a:solidFill>
+                <a:latin typeface="+mn-lt"/>
+                <a:ea typeface="+mn-ea"/>
+                <a:cs typeface="+mn-cs"/>
+              </a:defRPr>
+            </a:lvl6pPr>
+            <a:lvl7pPr marL="2743200" algn="l" defTabSz="914400" rtl="0" eaLnBrk="1" latinLnBrk="0" hangingPunct="1">
+              <a:defRPr sz="1800" kern="1200">
+                <a:solidFill>
+                  <a:schemeClr val="lt1"/>
+                </a:solidFill>
+                <a:latin typeface="+mn-lt"/>
+                <a:ea typeface="+mn-ea"/>
+                <a:cs typeface="+mn-cs"/>
+              </a:defRPr>
+            </a:lvl7pPr>
+            <a:lvl8pPr marL="3200400" algn="l" defTabSz="914400" rtl="0" eaLnBrk="1" latinLnBrk="0" hangingPunct="1">
+              <a:defRPr sz="1800" kern="1200">
+                <a:solidFill>
+                  <a:schemeClr val="lt1"/>
+                </a:solidFill>
+                <a:latin typeface="+mn-lt"/>
+                <a:ea typeface="+mn-ea"/>
+                <a:cs typeface="+mn-cs"/>
+              </a:defRPr>
+            </a:lvl8pPr>
+            <a:lvl9pPr marL="3657600" algn="l" defTabSz="914400" rtl="0" eaLnBrk="1" latinLnBrk="0" hangingPunct="1">
+              <a:defRPr sz="1800" kern="1200">
+                <a:solidFill>
+                  <a:schemeClr val="lt1"/>
+                </a:solidFill>
+                <a:latin typeface="+mn-lt"/>
+                <a:ea typeface="+mn-ea"/>
+                <a:cs typeface="+mn-cs"/>
+              </a:defRPr>
+            </a:lvl9pPr>
+          </a:lstStyle>
+          <a:p>
+            <a:pPr algn="ctr"/>
+            <a:endParaRPr lang="zh-CN" altLang="en-US" sz="1600" dirty="0">
+              <a:solidFill>
+                <a:schemeClr val="bg1"/>
+              </a:solidFill>
+              <a:latin typeface="Constantia" panose="02030602050306030303" pitchFamily="18" charset="0"/>
+            </a:endParaRPr>
+          </a:p>
+        </p:txBody>
+      </p:sp>
+      <p:sp>
+        <p:nvSpPr>
+          <p:cNvPr id="24" name="日期占位符 7">
+            <a:extLst>
+              <a:ext uri="{FF2B5EF4-FFF2-40B4-BE49-F238E27FC236}">
+                <a16:creationId xmlns:a16="http://schemas.microsoft.com/office/drawing/2014/main" id="{04FB94FE-7A75-B338-DF78-EC0146B17384}"/>
+              </a:ext>
+            </a:extLst>
+          </p:cNvPr>
+          <p:cNvSpPr>
+            <a:spLocks noGrp="1"/>
+          </p:cNvSpPr>
+          <p:nvPr>
+            <p:ph type="dt" sz="half" idx="10"/>
+          </p:nvPr>
+        </p:nvSpPr>
+        <p:spPr>
+          <a:xfrm>
+            <a:off x="1209907" y="6494974"/>
+            <a:ext cx="1847385" cy="365125"/>
+          </a:xfrm>
+        </p:spPr>
+        <p:txBody>
+          <a:bodyPr/>
+          <a:lstStyle/>
+          <a:p>
+            <a:fld id="{31CCC338-FFC3-4940-99DD-6195BEF39901}" type="datetime4">
+              <a:rPr lang="en-US" altLang="zh-CN" sz="1400" b="1">
+                <a:solidFill>
+                  <a:schemeClr val="bg1"/>
+                </a:solidFill>
+                <a:latin typeface="Constantia" panose="02030602050306030303" pitchFamily="18" charset="0"/>
+                <a:cs typeface="Times" panose="02020603050405020304" pitchFamily="18" charset="0"/>
+              </a:rPr>
+              <a:t>May 28, 2024</a:t>
+            </a:fld>
+            <a:endParaRPr lang="zh-CN" altLang="en-US" sz="1400" b="1" dirty="0">
+              <a:solidFill>
+                <a:schemeClr val="bg1"/>
+              </a:solidFill>
+              <a:latin typeface="Constantia" panose="02030602050306030303" pitchFamily="18" charset="0"/>
+              <a:cs typeface="Times" panose="02020603050405020304" pitchFamily="18" charset="0"/>
+            </a:endParaRPr>
+          </a:p>
+        </p:txBody>
+      </p:sp>
+      <p:cxnSp>
+        <p:nvCxnSpPr>
+          <p:cNvPr id="26" name="直接连接符 25">
+            <a:extLst>
+              <a:ext uri="{FF2B5EF4-FFF2-40B4-BE49-F238E27FC236}">
+                <a16:creationId xmlns:a16="http://schemas.microsoft.com/office/drawing/2014/main" id="{017194FE-5173-1130-5C32-0A2D4672BBC3}"/>
+              </a:ext>
+            </a:extLst>
+          </p:cNvPr>
+          <p:cNvCxnSpPr/>
+          <p:nvPr/>
+        </p:nvCxnSpPr>
+        <p:spPr>
+          <a:xfrm>
+            <a:off x="385590" y="859531"/>
+            <a:ext cx="11479576" cy="0"/>
+          </a:xfrm>
+          <a:prstGeom prst="line">
+            <a:avLst/>
+          </a:prstGeom>
+          <a:ln w="38100">
+            <a:solidFill>
+              <a:srgbClr val="4747BA"/>
+            </a:solidFill>
+          </a:ln>
+        </p:spPr>
+        <p:style>
+          <a:lnRef idx="1">
+            <a:schemeClr val="accent1"/>
+          </a:lnRef>
+          <a:fillRef idx="0">
+            <a:schemeClr val="accent1"/>
+          </a:fillRef>
+          <a:effectRef idx="0">
+            <a:schemeClr val="accent1"/>
+          </a:effectRef>
+          <a:fontRef idx="minor">
+            <a:schemeClr val="tx1"/>
+          </a:fontRef>
+        </p:style>
+      </p:cxnSp>
+      <p:pic>
+        <p:nvPicPr>
+          <p:cNvPr id="23" name="图片 22">
+            <a:extLst>
+              <a:ext uri="{FF2B5EF4-FFF2-40B4-BE49-F238E27FC236}">
+                <a16:creationId xmlns:a16="http://schemas.microsoft.com/office/drawing/2014/main" id="{66E33C7C-231E-4438-897B-C3ABD8160DF5}"/>
+              </a:ext>
+            </a:extLst>
+          </p:cNvPr>
+          <p:cNvPicPr>
+            <a:picLocks noChangeAspect="1"/>
+          </p:cNvPicPr>
+          <p:nvPr/>
+        </p:nvPicPr>
+        <p:blipFill>
+          <a:blip r:embed="rId3" cstate="print">
+            <a:extLst>
+              <a:ext uri="{28A0092B-C50C-407E-A947-70E740481C1C}">
+                <a14:useLocalDpi xmlns:a14="http://schemas.microsoft.com/office/drawing/2010/main" val="0"/>
+              </a:ext>
+            </a:extLst>
+          </a:blip>
+          <a:stretch>
+            <a:fillRect/>
+          </a:stretch>
+        </p:blipFill>
+        <p:spPr>
+          <a:xfrm>
+            <a:off x="7804063" y="218980"/>
+            <a:ext cx="730337" cy="556270"/>
+          </a:xfrm>
+          <a:prstGeom prst="rect">
+            <a:avLst/>
+          </a:prstGeom>
+        </p:spPr>
+      </p:pic>
+      <p:sp>
+        <p:nvSpPr>
+          <p:cNvPr id="14" name="灯片编号占位符 8">
+            <a:extLst>
+              <a:ext uri="{FF2B5EF4-FFF2-40B4-BE49-F238E27FC236}">
+                <a16:creationId xmlns:a16="http://schemas.microsoft.com/office/drawing/2014/main" id="{3CFF1627-F6E7-0DD5-39D6-62C425AED19F}"/>
+              </a:ext>
+            </a:extLst>
+          </p:cNvPr>
+          <p:cNvSpPr>
+            <a:spLocks noGrp="1"/>
+          </p:cNvSpPr>
+          <p:nvPr>
+            <p:ph type="sldNum" sz="quarter" idx="12"/>
+          </p:nvPr>
+        </p:nvSpPr>
+        <p:spPr>
+          <a:xfrm>
+            <a:off x="9847869" y="6405035"/>
+            <a:ext cx="809393" cy="545001"/>
+          </a:xfrm>
+        </p:spPr>
+        <p:txBody>
+          <a:bodyPr/>
+          <a:lstStyle/>
+          <a:p>
+            <a:pPr algn="ctr"/>
+            <a:fld id="{152851E7-9224-42D2-A4FF-119762E40804}" type="slidenum">
+              <a:rPr lang="zh-CN" altLang="en-US" sz="1400" b="1" smtClean="0">
+                <a:solidFill>
+                  <a:schemeClr val="bg1"/>
+                </a:solidFill>
+                <a:latin typeface="Constantia" panose="02030602050306030303" pitchFamily="18" charset="0"/>
+                <a:cs typeface="Times" panose="02020603050405020304" pitchFamily="18" charset="0"/>
+              </a:rPr>
+              <a:t>12</a:t>
+            </a:fld>
+            <a:endParaRPr lang="zh-CN" altLang="en-US" sz="1400" b="1" dirty="0">
+              <a:solidFill>
+                <a:schemeClr val="bg1"/>
+              </a:solidFill>
+              <a:latin typeface="Constantia" panose="02030602050306030303" pitchFamily="18" charset="0"/>
+              <a:cs typeface="Times" panose="02020603050405020304" pitchFamily="18" charset="0"/>
+            </a:endParaRPr>
+          </a:p>
+        </p:txBody>
+      </p:sp>
+      <p:pic>
+        <p:nvPicPr>
+          <p:cNvPr id="44" name="图片 43">
+            <a:extLst>
+              <a:ext uri="{FF2B5EF4-FFF2-40B4-BE49-F238E27FC236}">
+                <a16:creationId xmlns:a16="http://schemas.microsoft.com/office/drawing/2014/main" id="{8586C700-5327-41F3-1FDE-1F18A360E694}"/>
+              </a:ext>
+            </a:extLst>
+          </p:cNvPr>
+          <p:cNvPicPr>
+            <a:picLocks noChangeAspect="1"/>
+          </p:cNvPicPr>
+          <p:nvPr/>
+        </p:nvPicPr>
+        <p:blipFill>
+          <a:blip r:embed="rId4" cstate="print">
+            <a:extLst>
+              <a:ext uri="{28A0092B-C50C-407E-A947-70E740481C1C}">
+                <a14:useLocalDpi xmlns:a14="http://schemas.microsoft.com/office/drawing/2010/main" val="0"/>
+              </a:ext>
+            </a:extLst>
+          </a:blip>
+          <a:stretch>
+            <a:fillRect/>
+          </a:stretch>
+        </p:blipFill>
+        <p:spPr>
+          <a:xfrm>
+            <a:off x="8590829" y="204228"/>
+            <a:ext cx="3323471" cy="570629"/>
+          </a:xfrm>
+          <a:prstGeom prst="rect">
+            <a:avLst/>
+          </a:prstGeom>
+        </p:spPr>
+      </p:pic>
+      <p:sp>
+        <p:nvSpPr>
+          <p:cNvPr id="10" name="Fußzeilenplatzhalter 4">
+            <a:extLst>
+              <a:ext uri="{FF2B5EF4-FFF2-40B4-BE49-F238E27FC236}">
+                <a16:creationId xmlns:a16="http://schemas.microsoft.com/office/drawing/2014/main" id="{01D48FFE-4ABA-FC39-7F38-70ECC3997D2D}"/>
+              </a:ext>
+            </a:extLst>
+          </p:cNvPr>
+          <p:cNvSpPr>
+            <a:spLocks noGrp="1"/>
+          </p:cNvSpPr>
+          <p:nvPr>
+            <p:ph type="ftr" sz="quarter" idx="11"/>
+          </p:nvPr>
+        </p:nvSpPr>
+        <p:spPr>
+          <a:xfrm>
+            <a:off x="4095916" y="6553437"/>
+            <a:ext cx="4520431" cy="273844"/>
+          </a:xfrm>
+        </p:spPr>
+        <p:txBody>
+          <a:bodyPr/>
+          <a:lstStyle/>
+          <a:p>
+            <a:r>
+              <a:rPr lang="en-US" altLang="zh-CN" sz="1400" b="1" dirty="0" err="1">
+                <a:solidFill>
+                  <a:schemeClr val="bg1"/>
+                </a:solidFill>
+                <a:latin typeface="Constantia" panose="02030602050306030303" pitchFamily="18" charset="0"/>
+              </a:rPr>
+              <a:t>Ziqi</a:t>
+            </a:r>
+            <a:r>
+              <a:rPr lang="en-US" altLang="zh-CN" sz="1400" b="1" dirty="0">
+                <a:solidFill>
+                  <a:schemeClr val="bg1"/>
+                </a:solidFill>
+                <a:latin typeface="Constantia" panose="02030602050306030303" pitchFamily="18" charset="0"/>
+              </a:rPr>
+              <a:t> Liu | HUST</a:t>
+            </a:r>
+            <a:endParaRPr lang="zh-CN" altLang="en-US" sz="1400" b="1" dirty="0">
+              <a:solidFill>
+                <a:schemeClr val="bg1"/>
+              </a:solidFill>
+              <a:latin typeface="Constantia" panose="02030602050306030303" pitchFamily="18" charset="0"/>
+            </a:endParaRPr>
+          </a:p>
+        </p:txBody>
+      </p:sp>
+      <p:sp>
+        <p:nvSpPr>
+          <p:cNvPr id="3" name="Rectangle 2">
+            <a:extLst>
+              <a:ext uri="{FF2B5EF4-FFF2-40B4-BE49-F238E27FC236}">
+                <a16:creationId xmlns:a16="http://schemas.microsoft.com/office/drawing/2014/main" id="{E8BFC340-C6DF-6141-944C-D4EACBBF7C1E}"/>
+              </a:ext>
+            </a:extLst>
+          </p:cNvPr>
+          <p:cNvSpPr>
+            <a:spLocks noChangeArrowheads="1"/>
+          </p:cNvSpPr>
+          <p:nvPr/>
+        </p:nvSpPr>
+        <p:spPr bwMode="auto">
+          <a:xfrm>
+            <a:off x="382293" y="2170780"/>
+            <a:ext cx="11320635" cy="423899"/>
+          </a:xfrm>
+          <a:prstGeom prst="rect">
+            <a:avLst/>
+          </a:prstGeom>
+          <a:noFill/>
+          <a:ln>
+            <a:noFill/>
+          </a:ln>
+          <a:effectLst/>
+          <a:extLst>
+            <a:ext uri="{909E8E84-426E-40DD-AFC4-6F175D3DCCD1}">
+              <a14:hiddenFill xmlns:a14="http://schemas.microsoft.com/office/drawing/2010/main">
+                <a:solidFill>
+                  <a:schemeClr val="accent1"/>
+                </a:solidFill>
+              </a14:hiddenFill>
+            </a:ext>
+            <a:ext uri="{91240B29-F687-4F45-9708-019B960494DF}">
+              <a14:hiddenLine xmlns:a14="http://schemas.microsoft.com/office/drawing/2010/main" w="9525">
+                <a:solidFill>
+                  <a:schemeClr val="tx1"/>
+                </a:solidFill>
+                <a:miter lim="800000"/>
+                <a:headEnd/>
+                <a:tailEnd/>
+              </a14:hiddenLine>
+            </a:ext>
+            <a:ext uri="{AF507438-7753-43E0-B8FC-AC1667EBCBE1}">
+              <a14:hiddenEffects xmlns:a14="http://schemas.microsoft.com/office/drawing/2010/main">
+                <a:effectLst>
+                  <a:outerShdw dist="35921" dir="2700000" algn="ctr" rotWithShape="0">
+                    <a:schemeClr val="bg2"/>
+                  </a:outerShdw>
+                </a:effectLst>
+              </a14:hiddenEffects>
+            </a:ext>
+          </a:extLst>
+        </p:spPr>
+        <p:txBody>
+          <a:bodyPr vert="horz" wrap="square" lIns="91440" tIns="45720" rIns="91440" bIns="45720" numCol="1" anchor="t" anchorCtr="0" compatLnSpc="1">
+            <a:prstTxWarp prst="textNoShape">
+              <a:avLst/>
+            </a:prstTxWarp>
+            <a:spAutoFit/>
+          </a:bodyPr>
+          <a:lstStyle/>
+          <a:p>
+            <a:pPr marR="0" lvl="0" indent="0" fontAlgn="base">
+              <a:lnSpc>
+                <a:spcPct val="130000"/>
+              </a:lnSpc>
+              <a:spcBef>
+                <a:spcPct val="0"/>
+              </a:spcBef>
+              <a:spcAft>
+                <a:spcPct val="0"/>
+              </a:spcAft>
+              <a:buClrTx/>
+              <a:buSzTx/>
+              <a:buFontTx/>
+              <a:buNone/>
+              <a:tabLst/>
+            </a:pPr>
+            <a:r>
+              <a:rPr lang="zh-CN" altLang="en-US" dirty="0">
+                <a:solidFill>
+                  <a:srgbClr val="4747BA"/>
+                </a:solidFill>
+                <a:ea typeface="+mn-lt"/>
+                <a:cs typeface="Times New Roman" panose="02020603050405020304" charset="0"/>
+              </a:rPr>
+              <a:t>硬件</a:t>
+            </a:r>
+            <a:r>
+              <a:rPr lang="zh-CN" altLang="en-US" dirty="0">
+                <a:solidFill>
+                  <a:srgbClr val="374151"/>
+                </a:solidFill>
+                <a:latin typeface="_5b8b_4f53"/>
+              </a:rPr>
+              <a:t>方面，已有领先的</a:t>
+            </a:r>
+            <a:r>
+              <a:rPr lang="en-US" altLang="zh-CN" dirty="0">
+                <a:solidFill>
+                  <a:srgbClr val="374151"/>
+                </a:solidFill>
+                <a:latin typeface="_5b8b_4f53"/>
+              </a:rPr>
+              <a:t>SSD</a:t>
+            </a:r>
+            <a:r>
+              <a:rPr lang="zh-CN" altLang="en-US" dirty="0">
+                <a:solidFill>
+                  <a:srgbClr val="374151"/>
+                </a:solidFill>
+                <a:latin typeface="_5b8b_4f53"/>
+              </a:rPr>
+              <a:t>制造商，例如三星和西部数据，已经发布</a:t>
+            </a:r>
+            <a:r>
+              <a:rPr lang="en-US" altLang="zh-CN" dirty="0">
+                <a:solidFill>
+                  <a:srgbClr val="374151"/>
+                </a:solidFill>
+                <a:latin typeface="_5b8b_4f53"/>
+              </a:rPr>
+              <a:t>ZNS</a:t>
+            </a:r>
+            <a:r>
+              <a:rPr lang="zh-CN" altLang="en-US" dirty="0">
+                <a:solidFill>
+                  <a:srgbClr val="374151"/>
+                </a:solidFill>
+                <a:latin typeface="_5b8b_4f53"/>
+              </a:rPr>
+              <a:t>产品并展开研究，例如</a:t>
+            </a:r>
+            <a:r>
+              <a:rPr lang="en-US" altLang="zh-CN" dirty="0">
+                <a:solidFill>
+                  <a:srgbClr val="374151"/>
+                </a:solidFill>
+                <a:latin typeface="_5b8b_4f53"/>
+              </a:rPr>
+              <a:t>ZNS+</a:t>
+            </a:r>
+            <a:r>
+              <a:rPr lang="zh-CN" altLang="en-US" dirty="0">
+                <a:solidFill>
+                  <a:srgbClr val="374151"/>
+                </a:solidFill>
+                <a:latin typeface="_5b8b_4f53"/>
+              </a:rPr>
+              <a:t>、</a:t>
+            </a:r>
+            <a:r>
+              <a:rPr lang="en-US" altLang="zh-CN" dirty="0" err="1">
+                <a:solidFill>
+                  <a:srgbClr val="374151"/>
+                </a:solidFill>
+                <a:latin typeface="_5b8b_4f53"/>
+              </a:rPr>
+              <a:t>eZNS</a:t>
+            </a:r>
+            <a:r>
+              <a:rPr lang="zh-CN" altLang="en-US" dirty="0">
+                <a:solidFill>
+                  <a:srgbClr val="374151"/>
+                </a:solidFill>
+                <a:latin typeface="_5b8b_4f53"/>
+              </a:rPr>
+              <a:t>等。</a:t>
+            </a:r>
+            <a:endParaRPr lang="en-US" altLang="zh-CN" dirty="0">
+              <a:solidFill>
+                <a:srgbClr val="374151"/>
+              </a:solidFill>
+              <a:latin typeface="_5b8b_4f53"/>
+            </a:endParaRPr>
+          </a:p>
+        </p:txBody>
+      </p:sp>
+      <p:sp>
+        <p:nvSpPr>
+          <p:cNvPr id="7" name="文本框 6">
+            <a:extLst>
+              <a:ext uri="{FF2B5EF4-FFF2-40B4-BE49-F238E27FC236}">
+                <a16:creationId xmlns:a16="http://schemas.microsoft.com/office/drawing/2014/main" id="{D846D055-CA89-DE0A-CA6C-E34377174990}"/>
+              </a:ext>
+            </a:extLst>
+          </p:cNvPr>
+          <p:cNvSpPr txBox="1"/>
+          <p:nvPr/>
+        </p:nvSpPr>
+        <p:spPr>
+          <a:xfrm>
+            <a:off x="396807" y="2859011"/>
+            <a:ext cx="11553118" cy="1296445"/>
+          </a:xfrm>
+          <a:prstGeom prst="rect">
+            <a:avLst/>
+          </a:prstGeom>
+          <a:noFill/>
+        </p:spPr>
+        <p:txBody>
+          <a:bodyPr wrap="square" anchor="t">
+            <a:spAutoFit/>
+          </a:bodyPr>
+          <a:lstStyle/>
+          <a:p>
+            <a:pPr fontAlgn="base">
+              <a:lnSpc>
+                <a:spcPct val="150000"/>
+              </a:lnSpc>
+              <a:spcBef>
+                <a:spcPct val="0"/>
+              </a:spcBef>
+              <a:spcAft>
+                <a:spcPct val="0"/>
+              </a:spcAft>
+            </a:pPr>
+            <a:r>
+              <a:rPr lang="zh-CN" altLang="en-US" dirty="0">
+                <a:solidFill>
+                  <a:srgbClr val="4747BA"/>
+                </a:solidFill>
+                <a:latin typeface="_5b8b_4f53"/>
+                <a:ea typeface="+mn-lt"/>
+                <a:cs typeface="Times New Roman" panose="02020603050405020304" charset="0"/>
+              </a:rPr>
+              <a:t>软件</a:t>
+            </a:r>
+            <a:r>
+              <a:rPr lang="zh-CN" altLang="zh-CN" dirty="0">
+                <a:solidFill>
+                  <a:srgbClr val="374151"/>
+                </a:solidFill>
+                <a:latin typeface="_5b8b_4f53"/>
+              </a:rPr>
+              <a:t>方面</a:t>
+            </a:r>
+            <a:r>
+              <a:rPr lang="zh-CN" altLang="en-US" dirty="0">
+                <a:solidFill>
+                  <a:srgbClr val="374151"/>
+                </a:solidFill>
+                <a:latin typeface="_5b8b_4f53"/>
+              </a:rPr>
+              <a:t>，</a:t>
+            </a:r>
+            <a:r>
+              <a:rPr lang="zh-CN" altLang="zh-CN" dirty="0">
+                <a:solidFill>
+                  <a:srgbClr val="374151"/>
+                </a:solidFill>
+                <a:latin typeface="_5b8b_4f53"/>
+              </a:rPr>
+              <a:t>基于</a:t>
+            </a:r>
+            <a:r>
+              <a:rPr lang="en-US" altLang="zh-CN" dirty="0">
+                <a:solidFill>
+                  <a:srgbClr val="374151"/>
+                </a:solidFill>
+                <a:latin typeface="_5b8b_4f53"/>
+              </a:rPr>
+              <a:t>ZNS</a:t>
+            </a:r>
+            <a:r>
+              <a:rPr lang="zh-CN" altLang="en-US" dirty="0">
+                <a:solidFill>
+                  <a:srgbClr val="374151"/>
+                </a:solidFill>
+                <a:latin typeface="_5b8b_4f53"/>
+              </a:rPr>
+              <a:t>的研究主要集中在键值存储领域，尤其是基于</a:t>
+            </a:r>
+            <a:r>
+              <a:rPr lang="en-US" altLang="zh-CN" dirty="0">
+                <a:solidFill>
+                  <a:srgbClr val="374151"/>
+                </a:solidFill>
+                <a:latin typeface="_5b8b_4f53"/>
+              </a:rPr>
+              <a:t>LSM-tree</a:t>
+            </a:r>
+            <a:r>
+              <a:rPr lang="zh-CN" altLang="en-US" dirty="0">
+                <a:solidFill>
+                  <a:srgbClr val="374151"/>
+                </a:solidFill>
+                <a:latin typeface="_5b8b_4f53"/>
+              </a:rPr>
+              <a:t>的键值存储优化：考虑到</a:t>
+            </a:r>
+            <a:r>
+              <a:rPr lang="en-US" altLang="zh-CN" dirty="0">
+                <a:solidFill>
+                  <a:srgbClr val="374151"/>
+                </a:solidFill>
+                <a:latin typeface="_5b8b_4f53"/>
+              </a:rPr>
+              <a:t>ZNS SSD</a:t>
+            </a:r>
+            <a:r>
+              <a:rPr lang="zh-CN" altLang="en-US" dirty="0">
+                <a:solidFill>
+                  <a:srgbClr val="374151"/>
+                </a:solidFill>
+                <a:latin typeface="_5b8b_4f53"/>
+              </a:rPr>
+              <a:t>和</a:t>
+            </a:r>
+            <a:r>
+              <a:rPr lang="en-US" altLang="zh-CN" dirty="0">
+                <a:solidFill>
+                  <a:srgbClr val="374151"/>
+                </a:solidFill>
+                <a:latin typeface="_5b8b_4f53"/>
+              </a:rPr>
+              <a:t>LSM-tree</a:t>
+            </a:r>
+            <a:r>
+              <a:rPr lang="zh-CN" altLang="en-US" dirty="0">
+                <a:solidFill>
+                  <a:srgbClr val="374151"/>
+                </a:solidFill>
+                <a:latin typeface="_5b8b_4f53"/>
+              </a:rPr>
+              <a:t>都遵循严格的顺序写约束，其软硬件特征高度重合， 可以将一些应用移植到</a:t>
+            </a:r>
+            <a:r>
+              <a:rPr lang="en-US" altLang="zh-CN" dirty="0">
+                <a:solidFill>
+                  <a:srgbClr val="374151"/>
+                </a:solidFill>
+                <a:latin typeface="_5b8b_4f53"/>
+              </a:rPr>
+              <a:t>ZNS SSD</a:t>
+            </a:r>
+            <a:r>
+              <a:rPr lang="zh-CN" altLang="en-US" dirty="0">
+                <a:solidFill>
+                  <a:srgbClr val="374151"/>
+                </a:solidFill>
+                <a:latin typeface="_5b8b_4f53"/>
+              </a:rPr>
+              <a:t>上获得更好的性能。典型案例如基于</a:t>
+            </a:r>
+            <a:r>
+              <a:rPr lang="en-US" altLang="zh-CN" dirty="0" err="1">
+                <a:solidFill>
+                  <a:srgbClr val="374151"/>
+                </a:solidFill>
+                <a:latin typeface="_5b8b_4f53"/>
+              </a:rPr>
+              <a:t>ZenFS</a:t>
+            </a:r>
+            <a:r>
+              <a:rPr lang="zh-CN" altLang="en-US" dirty="0">
+                <a:solidFill>
+                  <a:srgbClr val="374151"/>
+                </a:solidFill>
+                <a:latin typeface="_5b8b_4f53"/>
+              </a:rPr>
+              <a:t>的</a:t>
+            </a:r>
+            <a:r>
+              <a:rPr lang="en-US" altLang="zh-CN" dirty="0" err="1">
+                <a:solidFill>
+                  <a:srgbClr val="374151"/>
+                </a:solidFill>
+                <a:latin typeface="_5b8b_4f53"/>
+              </a:rPr>
+              <a:t>RocksDB</a:t>
+            </a:r>
+            <a:r>
+              <a:rPr lang="zh-CN" altLang="en-US" dirty="0">
+                <a:solidFill>
+                  <a:srgbClr val="374151"/>
+                </a:solidFill>
+                <a:latin typeface="_5b8b_4f53"/>
+              </a:rPr>
+              <a:t>。其他基于</a:t>
+            </a:r>
+            <a:r>
+              <a:rPr lang="en-US" altLang="zh-CN" dirty="0">
+                <a:solidFill>
+                  <a:srgbClr val="374151"/>
+                </a:solidFill>
+                <a:latin typeface="_5b8b_4f53"/>
+              </a:rPr>
+              <a:t>LSM-tree</a:t>
+            </a:r>
+            <a:r>
+              <a:rPr lang="zh-CN" altLang="en-US" dirty="0">
+                <a:solidFill>
+                  <a:srgbClr val="374151"/>
+                </a:solidFill>
+                <a:latin typeface="_5b8b_4f53"/>
+              </a:rPr>
+              <a:t>应用的优化工作例如，</a:t>
+            </a:r>
+            <a:r>
+              <a:rPr lang="en-US" altLang="zh-CN" sz="1800" dirty="0"/>
+              <a:t>WALTZ</a:t>
+            </a:r>
+            <a:r>
+              <a:rPr lang="zh-CN" altLang="en-US" sz="1800" dirty="0"/>
+              <a:t>，</a:t>
+            </a:r>
+            <a:r>
+              <a:rPr lang="en-US" altLang="zh-CN" sz="1800" dirty="0"/>
+              <a:t>ZNSKV</a:t>
+            </a:r>
+            <a:r>
+              <a:rPr lang="zh-CN" altLang="en-US" sz="1800" dirty="0"/>
+              <a:t>。</a:t>
+            </a:r>
+            <a:endParaRPr lang="en-US" altLang="zh-CN" dirty="0">
+              <a:solidFill>
+                <a:srgbClr val="374151"/>
+              </a:solidFill>
+              <a:latin typeface="_5b8b_4f53"/>
+            </a:endParaRPr>
+          </a:p>
+        </p:txBody>
+      </p:sp>
+      <p:sp>
+        <p:nvSpPr>
+          <p:cNvPr id="15" name="文本框 14">
+            <a:extLst>
+              <a:ext uri="{FF2B5EF4-FFF2-40B4-BE49-F238E27FC236}">
+                <a16:creationId xmlns:a16="http://schemas.microsoft.com/office/drawing/2014/main" id="{8457EA20-6021-EC1D-1D9E-F90EC37CF9A2}"/>
+              </a:ext>
+            </a:extLst>
+          </p:cNvPr>
+          <p:cNvSpPr txBox="1"/>
+          <p:nvPr/>
+        </p:nvSpPr>
+        <p:spPr>
+          <a:xfrm>
+            <a:off x="358848" y="4651285"/>
+            <a:ext cx="9352009" cy="1753750"/>
+          </a:xfrm>
+          <a:prstGeom prst="rect">
+            <a:avLst/>
+          </a:prstGeom>
+          <a:noFill/>
+        </p:spPr>
+        <p:txBody>
+          <a:bodyPr wrap="square">
+            <a:spAutoFit/>
+          </a:bodyPr>
+          <a:lstStyle/>
+          <a:p>
+            <a:pPr marR="0" lvl="0" indent="0" fontAlgn="auto">
+              <a:lnSpc>
+                <a:spcPct val="70000"/>
+              </a:lnSpc>
+              <a:spcBef>
+                <a:spcPts val="0"/>
+              </a:spcBef>
+              <a:spcAft>
+                <a:spcPts val="1200"/>
+              </a:spcAft>
+              <a:buClrTx/>
+              <a:buSzTx/>
+              <a:buFont typeface="Arial" panose="020B0604020202020204" pitchFamily="34" charset="0"/>
+              <a:buNone/>
+              <a:tabLst/>
+              <a:defRPr/>
+            </a:pPr>
+            <a:r>
+              <a:rPr lang="en-US" altLang="zh-CN" sz="1600" dirty="0"/>
+              <a:t>NVMe2.0</a:t>
+            </a:r>
+            <a:r>
+              <a:rPr lang="zh-CN" altLang="en-US" sz="1600" dirty="0"/>
+              <a:t>：</a:t>
+            </a:r>
+            <a:r>
+              <a:rPr lang="en-US" altLang="zh-CN" sz="1600" dirty="0"/>
+              <a:t>https://nvmexpress.org/wp-content/uploads/NVMe-NVM-Express-2.0a-2021.07.26-Ratified.pdf</a:t>
+            </a:r>
+          </a:p>
+          <a:p>
+            <a:pPr>
+              <a:lnSpc>
+                <a:spcPct val="70000"/>
+              </a:lnSpc>
+              <a:spcAft>
+                <a:spcPts val="1200"/>
+              </a:spcAft>
+              <a:defRPr/>
+            </a:pPr>
+            <a:r>
+              <a:rPr lang="en-US" altLang="zh-CN" sz="1600" dirty="0"/>
+              <a:t>ZNS+: Advanced Zoned Namespace Interface for Supporting In-Storage Zone Compaction, OSDI’21</a:t>
+            </a:r>
+          </a:p>
+          <a:p>
+            <a:pPr>
+              <a:lnSpc>
+                <a:spcPct val="70000"/>
+              </a:lnSpc>
+              <a:spcAft>
+                <a:spcPts val="1200"/>
+              </a:spcAft>
+              <a:defRPr/>
+            </a:pPr>
+            <a:r>
+              <a:rPr lang="en-US" altLang="zh-CN" sz="1600" dirty="0" err="1"/>
+              <a:t>eZNS</a:t>
+            </a:r>
+            <a:r>
+              <a:rPr lang="en-US" altLang="zh-CN" sz="1600" dirty="0"/>
+              <a:t>: An Elastic Zoned Namespace for Commodity ZNS SSDs, OSDI’23</a:t>
+            </a:r>
+          </a:p>
+          <a:p>
+            <a:pPr>
+              <a:lnSpc>
+                <a:spcPct val="70000"/>
+              </a:lnSpc>
+              <a:spcAft>
+                <a:spcPts val="1200"/>
+              </a:spcAft>
+              <a:defRPr/>
+            </a:pPr>
+            <a:r>
+              <a:rPr lang="en-US" altLang="zh-CN" sz="1600" dirty="0" err="1"/>
+              <a:t>ZenFS</a:t>
+            </a:r>
+            <a:r>
+              <a:rPr lang="zh-CN" altLang="en-US" sz="1600" dirty="0"/>
+              <a:t>：</a:t>
+            </a:r>
+            <a:r>
+              <a:rPr lang="en-US" altLang="zh-CN" sz="1600" dirty="0">
+                <a:hlinkClick r:id="rId5"/>
+              </a:rPr>
+              <a:t>https://github.com/westerndigitalcorporation/zenfs</a:t>
+            </a:r>
+            <a:endParaRPr lang="en-US" altLang="zh-CN" sz="1600" dirty="0"/>
+          </a:p>
+          <a:p>
+            <a:pPr>
+              <a:lnSpc>
+                <a:spcPct val="70000"/>
+              </a:lnSpc>
+              <a:spcAft>
+                <a:spcPts val="1200"/>
+              </a:spcAft>
+              <a:defRPr/>
+            </a:pPr>
+            <a:r>
+              <a:rPr lang="en-US" altLang="zh-CN" sz="1600" dirty="0"/>
+              <a:t>ZNSKV: Reducing Data Migration in LSMT-Based KV Stores on ZNS SSDs</a:t>
+            </a:r>
+            <a:r>
+              <a:rPr lang="zh-CN" altLang="en-US" sz="1600" dirty="0"/>
+              <a:t>，</a:t>
+            </a:r>
+            <a:r>
+              <a:rPr lang="en-US" altLang="zh-CN" sz="1600" dirty="0"/>
+              <a:t>ICCD</a:t>
+            </a:r>
+          </a:p>
+        </p:txBody>
+      </p:sp>
+      <p:sp>
+        <p:nvSpPr>
+          <p:cNvPr id="19" name="文本框 18">
+            <a:extLst>
+              <a:ext uri="{FF2B5EF4-FFF2-40B4-BE49-F238E27FC236}">
+                <a16:creationId xmlns:a16="http://schemas.microsoft.com/office/drawing/2014/main" id="{D8DEC19F-AF51-2775-CDFC-F6F0E84AE33C}"/>
+              </a:ext>
+            </a:extLst>
+          </p:cNvPr>
+          <p:cNvSpPr txBox="1"/>
+          <p:nvPr/>
+        </p:nvSpPr>
+        <p:spPr>
+          <a:xfrm>
+            <a:off x="358848" y="1126939"/>
+            <a:ext cx="11506318" cy="779509"/>
+          </a:xfrm>
+          <a:prstGeom prst="rect">
+            <a:avLst/>
+          </a:prstGeom>
+          <a:noFill/>
+        </p:spPr>
+        <p:txBody>
+          <a:bodyPr wrap="square" anchor="t">
+            <a:spAutoFit/>
+          </a:bodyPr>
+          <a:lstStyle/>
+          <a:p>
+            <a:pPr>
+              <a:lnSpc>
+                <a:spcPct val="130000"/>
+              </a:lnSpc>
+            </a:pPr>
+            <a:r>
+              <a:rPr lang="zh-CN" altLang="en-US" dirty="0">
+                <a:solidFill>
+                  <a:srgbClr val="4747BA"/>
+                </a:solidFill>
+                <a:ea typeface="+mn-lt"/>
+                <a:cs typeface="Times New Roman" panose="02020603050405020304" charset="0"/>
+              </a:rPr>
+              <a:t>规范化：</a:t>
+            </a:r>
+            <a:r>
+              <a:rPr lang="zh-CN" altLang="zh-CN" dirty="0">
+                <a:solidFill>
+                  <a:srgbClr val="374151"/>
+                </a:solidFill>
+                <a:latin typeface="_5b8b_4f53"/>
+              </a:rPr>
+              <a:t>如今，经过</a:t>
+            </a:r>
+            <a:r>
+              <a:rPr lang="en-US" altLang="zh-CN" dirty="0">
+                <a:solidFill>
+                  <a:srgbClr val="374151"/>
+                </a:solidFill>
+                <a:latin typeface="_5b8b_4f53"/>
+              </a:rPr>
+              <a:t>SSD</a:t>
+            </a:r>
+            <a:r>
+              <a:rPr lang="zh-CN" altLang="zh-CN" dirty="0">
+                <a:solidFill>
+                  <a:srgbClr val="374151"/>
+                </a:solidFill>
+                <a:latin typeface="_5b8b_4f53"/>
+              </a:rPr>
+              <a:t>制造商、软件开发者和标准化机构之间的合作努力，</a:t>
+            </a:r>
+            <a:r>
+              <a:rPr lang="en-US" altLang="zh-CN" dirty="0">
+                <a:solidFill>
+                  <a:srgbClr val="374151"/>
+                </a:solidFill>
+                <a:latin typeface="_5b8b_4f53"/>
+              </a:rPr>
+              <a:t>ZNS SSD</a:t>
+            </a:r>
+            <a:r>
+              <a:rPr lang="zh-CN" altLang="zh-CN" dirty="0">
+                <a:solidFill>
+                  <a:srgbClr val="374151"/>
+                </a:solidFill>
+                <a:latin typeface="_5b8b_4f53"/>
+              </a:rPr>
+              <a:t>技术已有稳定的硬件标准和基础软件库。</a:t>
+            </a:r>
+            <a:r>
+              <a:rPr lang="zh-CN" altLang="en-US" dirty="0">
+                <a:solidFill>
+                  <a:srgbClr val="374151"/>
+                </a:solidFill>
+                <a:latin typeface="_5b8b_4f53"/>
+              </a:rPr>
+              <a:t>例如：</a:t>
+            </a:r>
+            <a:r>
+              <a:rPr lang="en-US" altLang="zh-CN" dirty="0" err="1">
+                <a:solidFill>
+                  <a:srgbClr val="374151"/>
+                </a:solidFill>
+                <a:latin typeface="_5b8b_4f53"/>
+              </a:rPr>
+              <a:t>NVMe</a:t>
+            </a:r>
+            <a:r>
+              <a:rPr lang="zh-CN" altLang="zh-CN" dirty="0">
+                <a:solidFill>
+                  <a:srgbClr val="374151"/>
+                </a:solidFill>
+                <a:latin typeface="_5b8b_4f53"/>
+              </a:rPr>
+              <a:t>组织已</a:t>
+            </a:r>
+            <a:r>
+              <a:rPr lang="zh-CN" altLang="en-US" dirty="0">
+                <a:solidFill>
+                  <a:srgbClr val="374151"/>
+                </a:solidFill>
+                <a:latin typeface="_5b8b_4f53"/>
+              </a:rPr>
+              <a:t>在</a:t>
+            </a:r>
+            <a:r>
+              <a:rPr lang="en-US" altLang="zh-CN" dirty="0">
+                <a:solidFill>
+                  <a:srgbClr val="374151"/>
+                </a:solidFill>
+                <a:latin typeface="_5b8b_4f53"/>
+              </a:rPr>
+              <a:t>NVMe2.0</a:t>
+            </a:r>
+            <a:r>
+              <a:rPr lang="zh-CN" altLang="en-US" dirty="0">
+                <a:solidFill>
+                  <a:srgbClr val="374151"/>
+                </a:solidFill>
+                <a:latin typeface="_5b8b_4f53"/>
+              </a:rPr>
+              <a:t>中支持</a:t>
+            </a:r>
+            <a:r>
+              <a:rPr lang="en-US" altLang="zh-CN" dirty="0">
+                <a:solidFill>
+                  <a:srgbClr val="374151"/>
+                </a:solidFill>
+                <a:latin typeface="_5b8b_4f53"/>
+              </a:rPr>
+              <a:t>Zone</a:t>
+            </a:r>
+            <a:r>
+              <a:rPr lang="zh-CN" altLang="en-US" dirty="0">
+                <a:solidFill>
+                  <a:srgbClr val="374151"/>
+                </a:solidFill>
+                <a:latin typeface="_5b8b_4f53"/>
+              </a:rPr>
+              <a:t>接口逻辑。</a:t>
+            </a:r>
+            <a:endParaRPr lang="zh-CN" altLang="zh-CN" dirty="0">
+              <a:solidFill>
+                <a:srgbClr val="374151"/>
+              </a:solidFill>
+              <a:latin typeface="_5b8b_4f53"/>
+            </a:endParaRPr>
+          </a:p>
+        </p:txBody>
+      </p:sp>
+      <p:sp>
+        <p:nvSpPr>
+          <p:cNvPr id="25" name="文本框 24">
+            <a:extLst>
+              <a:ext uri="{FF2B5EF4-FFF2-40B4-BE49-F238E27FC236}">
+                <a16:creationId xmlns:a16="http://schemas.microsoft.com/office/drawing/2014/main" id="{07DC2E9D-2952-D68D-FFCC-6C038511F9C0}"/>
+              </a:ext>
+            </a:extLst>
+          </p:cNvPr>
+          <p:cNvSpPr txBox="1"/>
+          <p:nvPr/>
+        </p:nvSpPr>
+        <p:spPr>
+          <a:xfrm>
+            <a:off x="385590" y="310242"/>
+            <a:ext cx="6798981" cy="535531"/>
+          </a:xfrm>
+          <a:prstGeom prst="rect">
+            <a:avLst/>
+          </a:prstGeom>
+          <a:noFill/>
+        </p:spPr>
+        <p:txBody>
+          <a:bodyPr wrap="square" rtlCol="0">
+            <a:spAutoFit/>
+          </a:bodyPr>
+          <a:lstStyle/>
+          <a:p>
+            <a:pPr>
+              <a:lnSpc>
+                <a:spcPct val="90000"/>
+              </a:lnSpc>
+              <a:spcBef>
+                <a:spcPts val="1000"/>
+              </a:spcBef>
+              <a:defRPr/>
+            </a:pPr>
+            <a:r>
+              <a:rPr lang="zh-CN" altLang="en-US" sz="3200" b="1" dirty="0">
+                <a:solidFill>
+                  <a:srgbClr val="4747BA"/>
+                </a:solidFill>
+                <a:latin typeface="Constantia" panose="02030602050306030303" pitchFamily="18" charset="0"/>
+                <a:ea typeface="腾讯体 W3" panose="020C04030202040F0204" pitchFamily="34" charset="-122"/>
+                <a:cs typeface="Times" panose="02020603050405020304" pitchFamily="18" charset="0"/>
+              </a:rPr>
+              <a:t>研究现状</a:t>
+            </a:r>
+          </a:p>
+        </p:txBody>
+      </p:sp>
+    </p:spTree>
+    <p:extLst>
+      <p:ext uri="{BB962C8B-B14F-4D97-AF65-F5344CB8AC3E}">
+        <p14:creationId xmlns:p14="http://schemas.microsoft.com/office/powerpoint/2010/main" val="1474926011"/>
+      </p:ext>
+    </p:extLst>
+  </p:cSld>
+  <p:clrMapOvr>
+    <a:masterClrMapping/>
+  </p:clrMapOvr>
+  <mc:AlternateContent xmlns:mc="http://schemas.openxmlformats.org/markup-compatibility/2006" xmlns:p14="http://schemas.microsoft.com/office/powerpoint/2010/main">
+    <mc:Choice Requires="p14">
+      <p:transition p14:dur="10" advClick="0"/>
+    </mc:Choice>
+    <mc:Fallback xmlns="">
+      <p:transition advClick="0"/>
+    </mc:Fallback>
+  </mc:AlternateContent>
+</p:sld>
+</file>
+
+<file path=ppt/slides/slide13.xml><?xml version="1.0" encoding="utf-8"?>
+<p:sld xmlns:a="http://schemas.openxmlformats.org/drawingml/2006/main" xmlns:r="http://schemas.openxmlformats.org/officeDocument/2006/relationships" xmlns:p="http://schemas.openxmlformats.org/presentationml/2006/main">
+  <p:cSld>
+    <p:spTree>
+      <p:nvGrpSpPr>
+        <p:cNvPr id="1" name=""/>
+        <p:cNvGrpSpPr/>
+        <p:nvPr/>
+      </p:nvGrpSpPr>
+      <p:grpSpPr>
+        <a:xfrm>
+          <a:off x="0" y="0"/>
+          <a:ext cx="0" cy="0"/>
+          <a:chOff x="0" y="0"/>
+          <a:chExt cx="0" cy="0"/>
+        </a:xfrm>
+      </p:grpSpPr>
+      <p:sp>
+        <p:nvSpPr>
+          <p:cNvPr id="17" name="矩形 16"/>
+          <p:cNvSpPr/>
+          <p:nvPr/>
+        </p:nvSpPr>
+        <p:spPr>
+          <a:xfrm>
+            <a:off x="0" y="6522720"/>
+            <a:ext cx="4267200" cy="335280"/>
+          </a:xfrm>
+          <a:prstGeom prst="rect">
+            <a:avLst/>
+          </a:prstGeom>
+          <a:solidFill>
+            <a:srgbClr val="4747BA"/>
+          </a:solidFill>
+          <a:ln>
+            <a:noFill/>
+          </a:ln>
+        </p:spPr>
+        <p:style>
+          <a:lnRef idx="2">
+            <a:schemeClr val="accent1">
+              <a:shade val="50000"/>
+            </a:schemeClr>
+          </a:lnRef>
+          <a:fillRef idx="1">
+            <a:schemeClr val="accent1"/>
+          </a:fillRef>
+          <a:effectRef idx="0">
+            <a:schemeClr val="accent1"/>
+          </a:effectRef>
+          <a:fontRef idx="minor">
+            <a:schemeClr val="lt1"/>
+          </a:fontRef>
+        </p:style>
+        <p:txBody>
+          <a:bodyPr rtlCol="0" anchor="ctr"/>
+          <a:lstStyle/>
+          <a:p>
+            <a:pPr algn="ctr"/>
+            <a:endParaRPr lang="zh-CN" altLang="en-US"/>
+          </a:p>
+        </p:txBody>
+      </p:sp>
+      <p:sp>
+        <p:nvSpPr>
+          <p:cNvPr id="18" name="矩形 17"/>
+          <p:cNvSpPr/>
+          <p:nvPr/>
+        </p:nvSpPr>
+        <p:spPr>
+          <a:xfrm>
+            <a:off x="4267200" y="6522720"/>
+            <a:ext cx="4267200" cy="335280"/>
+          </a:xfrm>
+          <a:prstGeom prst="rect">
+            <a:avLst/>
+          </a:prstGeom>
+          <a:solidFill>
+            <a:srgbClr val="8484D1"/>
+          </a:solidFill>
+          <a:ln>
+            <a:noFill/>
+          </a:ln>
+        </p:spPr>
+        <p:style>
+          <a:lnRef idx="2">
+            <a:schemeClr val="accent1">
+              <a:shade val="50000"/>
+            </a:schemeClr>
+          </a:lnRef>
+          <a:fillRef idx="1">
+            <a:schemeClr val="accent1"/>
+          </a:fillRef>
+          <a:effectRef idx="0">
+            <a:schemeClr val="accent1"/>
+          </a:effectRef>
+          <a:fontRef idx="minor">
+            <a:schemeClr val="lt1"/>
+          </a:fontRef>
+        </p:style>
+        <p:txBody>
+          <a:bodyPr rtlCol="0" anchor="ctr"/>
+          <a:lstStyle/>
+          <a:p>
+            <a:pPr algn="ctr"/>
+            <a:endParaRPr lang="zh-CN" altLang="en-US"/>
+          </a:p>
+        </p:txBody>
+      </p:sp>
+      <p:sp>
+        <p:nvSpPr>
+          <p:cNvPr id="20" name="矩形 19"/>
+          <p:cNvSpPr/>
+          <p:nvPr/>
+        </p:nvSpPr>
+        <p:spPr>
+          <a:xfrm>
+            <a:off x="8534400" y="6522720"/>
+            <a:ext cx="3657600" cy="335280"/>
+          </a:xfrm>
+          <a:prstGeom prst="rect">
+            <a:avLst/>
+          </a:prstGeom>
+          <a:solidFill>
+            <a:srgbClr val="ADADE0"/>
+          </a:solidFill>
+          <a:ln>
+            <a:noFill/>
+          </a:ln>
+        </p:spPr>
+        <p:style>
+          <a:lnRef idx="2">
+            <a:schemeClr val="accent1">
+              <a:shade val="50000"/>
+            </a:schemeClr>
+          </a:lnRef>
+          <a:fillRef idx="1">
+            <a:schemeClr val="accent1"/>
+          </a:fillRef>
+          <a:effectRef idx="0">
+            <a:schemeClr val="accent1"/>
+          </a:effectRef>
+          <a:fontRef idx="minor">
+            <a:schemeClr val="lt1"/>
+          </a:fontRef>
+        </p:style>
+        <p:txBody>
+          <a:bodyPr rot="0" spcFirstLastPara="0" vert="horz" wrap="square" lIns="91440" tIns="45720" rIns="91440" bIns="45720" numCol="1" spcCol="0" rtlCol="0" fromWordArt="0" anchor="ctr" anchorCtr="0" forceAA="0" compatLnSpc="1">
+            <a:noAutofit/>
+          </a:bodyPr>
+          <a:lstStyle>
+            <a:defPPr>
+              <a:defRPr lang="zh-CN"/>
+            </a:defPPr>
+            <a:lvl1pPr marL="0" algn="l" defTabSz="914400" rtl="0" eaLnBrk="1" latinLnBrk="0" hangingPunct="1">
+              <a:defRPr sz="1800" kern="1200">
+                <a:solidFill>
+                  <a:schemeClr val="lt1"/>
+                </a:solidFill>
+                <a:latin typeface="+mn-lt"/>
+                <a:ea typeface="+mn-ea"/>
+                <a:cs typeface="+mn-cs"/>
+              </a:defRPr>
+            </a:lvl1pPr>
+            <a:lvl2pPr marL="457200" algn="l" defTabSz="914400" rtl="0" eaLnBrk="1" latinLnBrk="0" hangingPunct="1">
+              <a:defRPr sz="1800" kern="1200">
+                <a:solidFill>
+                  <a:schemeClr val="lt1"/>
+                </a:solidFill>
+                <a:latin typeface="+mn-lt"/>
+                <a:ea typeface="+mn-ea"/>
+                <a:cs typeface="+mn-cs"/>
+              </a:defRPr>
+            </a:lvl2pPr>
+            <a:lvl3pPr marL="914400" algn="l" defTabSz="914400" rtl="0" eaLnBrk="1" latinLnBrk="0" hangingPunct="1">
+              <a:defRPr sz="1800" kern="1200">
+                <a:solidFill>
+                  <a:schemeClr val="lt1"/>
+                </a:solidFill>
+                <a:latin typeface="+mn-lt"/>
+                <a:ea typeface="+mn-ea"/>
+                <a:cs typeface="+mn-cs"/>
+              </a:defRPr>
+            </a:lvl3pPr>
+            <a:lvl4pPr marL="1371600" algn="l" defTabSz="914400" rtl="0" eaLnBrk="1" latinLnBrk="0" hangingPunct="1">
+              <a:defRPr sz="1800" kern="1200">
+                <a:solidFill>
+                  <a:schemeClr val="lt1"/>
+                </a:solidFill>
+                <a:latin typeface="+mn-lt"/>
+                <a:ea typeface="+mn-ea"/>
+                <a:cs typeface="+mn-cs"/>
+              </a:defRPr>
+            </a:lvl4pPr>
+            <a:lvl5pPr marL="1828800" algn="l" defTabSz="914400" rtl="0" eaLnBrk="1" latinLnBrk="0" hangingPunct="1">
+              <a:defRPr sz="1800" kern="1200">
+                <a:solidFill>
+                  <a:schemeClr val="lt1"/>
+                </a:solidFill>
+                <a:latin typeface="+mn-lt"/>
+                <a:ea typeface="+mn-ea"/>
+                <a:cs typeface="+mn-cs"/>
+              </a:defRPr>
+            </a:lvl5pPr>
+            <a:lvl6pPr marL="2286000" algn="l" defTabSz="914400" rtl="0" eaLnBrk="1" latinLnBrk="0" hangingPunct="1">
+              <a:defRPr sz="1800" kern="1200">
+                <a:solidFill>
+                  <a:schemeClr val="lt1"/>
+                </a:solidFill>
+                <a:latin typeface="+mn-lt"/>
+                <a:ea typeface="+mn-ea"/>
+                <a:cs typeface="+mn-cs"/>
+              </a:defRPr>
+            </a:lvl6pPr>
+            <a:lvl7pPr marL="2743200" algn="l" defTabSz="914400" rtl="0" eaLnBrk="1" latinLnBrk="0" hangingPunct="1">
+              <a:defRPr sz="1800" kern="1200">
+                <a:solidFill>
+                  <a:schemeClr val="lt1"/>
+                </a:solidFill>
+                <a:latin typeface="+mn-lt"/>
+                <a:ea typeface="+mn-ea"/>
+                <a:cs typeface="+mn-cs"/>
+              </a:defRPr>
+            </a:lvl7pPr>
+            <a:lvl8pPr marL="3200400" algn="l" defTabSz="914400" rtl="0" eaLnBrk="1" latinLnBrk="0" hangingPunct="1">
+              <a:defRPr sz="1800" kern="1200">
+                <a:solidFill>
+                  <a:schemeClr val="lt1"/>
+                </a:solidFill>
+                <a:latin typeface="+mn-lt"/>
+                <a:ea typeface="+mn-ea"/>
+                <a:cs typeface="+mn-cs"/>
+              </a:defRPr>
+            </a:lvl8pPr>
+            <a:lvl9pPr marL="3657600" algn="l" defTabSz="914400" rtl="0" eaLnBrk="1" latinLnBrk="0" hangingPunct="1">
+              <a:defRPr sz="1800" kern="1200">
+                <a:solidFill>
+                  <a:schemeClr val="lt1"/>
+                </a:solidFill>
+                <a:latin typeface="+mn-lt"/>
+                <a:ea typeface="+mn-ea"/>
+                <a:cs typeface="+mn-cs"/>
+              </a:defRPr>
+            </a:lvl9pPr>
+          </a:lstStyle>
+          <a:p>
+            <a:pPr algn="ctr"/>
+            <a:endParaRPr lang="zh-CN" altLang="en-US" sz="1600" dirty="0">
+              <a:solidFill>
+                <a:schemeClr val="bg1"/>
+              </a:solidFill>
+              <a:latin typeface="Constantia" panose="02030602050306030303" pitchFamily="18" charset="0"/>
+            </a:endParaRPr>
+          </a:p>
+        </p:txBody>
+      </p:sp>
+      <p:sp>
+        <p:nvSpPr>
+          <p:cNvPr id="24" name="日期占位符 7"/>
+          <p:cNvSpPr>
+            <a:spLocks noGrp="1"/>
+          </p:cNvSpPr>
+          <p:nvPr>
+            <p:ph type="dt" sz="half" idx="10"/>
+          </p:nvPr>
+        </p:nvSpPr>
+        <p:spPr>
+          <a:xfrm>
+            <a:off x="1209907" y="6494974"/>
+            <a:ext cx="1847385" cy="365125"/>
+          </a:xfrm>
+        </p:spPr>
+        <p:txBody>
+          <a:bodyPr/>
+          <a:lstStyle/>
+          <a:p>
+            <a:fld id="{31CCC338-FFC3-4940-99DD-6195BEF39901}" type="datetime4">
+              <a:rPr lang="en-US" altLang="zh-CN" sz="1400" b="1">
+                <a:solidFill>
+                  <a:schemeClr val="bg1"/>
+                </a:solidFill>
+                <a:latin typeface="Constantia" panose="02030602050306030303" pitchFamily="18" charset="0"/>
+                <a:cs typeface="Times" panose="02020603050405020304" pitchFamily="18" charset="0"/>
+              </a:rPr>
+              <a:t>May 28, 2024</a:t>
+            </a:fld>
+            <a:endParaRPr lang="zh-CN" altLang="en-US" sz="1400" b="1" dirty="0">
+              <a:solidFill>
+                <a:schemeClr val="bg1"/>
+              </a:solidFill>
+              <a:latin typeface="Constantia" panose="02030602050306030303" pitchFamily="18" charset="0"/>
+              <a:cs typeface="Times" panose="02020603050405020304" pitchFamily="18" charset="0"/>
+            </a:endParaRPr>
+          </a:p>
+        </p:txBody>
+      </p:sp>
+      <p:cxnSp>
+        <p:nvCxnSpPr>
+          <p:cNvPr id="26" name="直接连接符 25"/>
+          <p:cNvCxnSpPr/>
+          <p:nvPr/>
+        </p:nvCxnSpPr>
+        <p:spPr>
+          <a:xfrm>
+            <a:off x="385590" y="859531"/>
+            <a:ext cx="11479576" cy="0"/>
+          </a:xfrm>
+          <a:prstGeom prst="line">
+            <a:avLst/>
+          </a:prstGeom>
+          <a:ln w="38100">
+            <a:solidFill>
+              <a:srgbClr val="4747BA"/>
+            </a:solidFill>
+          </a:ln>
+        </p:spPr>
+        <p:style>
+          <a:lnRef idx="1">
+            <a:schemeClr val="accent1"/>
+          </a:lnRef>
+          <a:fillRef idx="0">
+            <a:schemeClr val="accent1"/>
+          </a:fillRef>
+          <a:effectRef idx="0">
+            <a:schemeClr val="accent1"/>
+          </a:effectRef>
+          <a:fontRef idx="minor">
+            <a:schemeClr val="tx1"/>
+          </a:fontRef>
+        </p:style>
+      </p:cxnSp>
+      <p:pic>
+        <p:nvPicPr>
+          <p:cNvPr id="23" name="图片 22"/>
+          <p:cNvPicPr>
+            <a:picLocks noChangeAspect="1"/>
+          </p:cNvPicPr>
+          <p:nvPr/>
+        </p:nvPicPr>
+        <p:blipFill>
+          <a:blip r:embed="rId3" cstate="print">
+            <a:extLst>
+              <a:ext uri="{28A0092B-C50C-407E-A947-70E740481C1C}">
+                <a14:useLocalDpi xmlns:a14="http://schemas.microsoft.com/office/drawing/2010/main" val="0"/>
+              </a:ext>
+            </a:extLst>
+          </a:blip>
+          <a:stretch>
+            <a:fillRect/>
+          </a:stretch>
+        </p:blipFill>
+        <p:spPr>
+          <a:xfrm>
+            <a:off x="7804063" y="218980"/>
+            <a:ext cx="730337" cy="556270"/>
+          </a:xfrm>
+          <a:prstGeom prst="rect">
+            <a:avLst/>
+          </a:prstGeom>
+        </p:spPr>
+      </p:pic>
+      <p:sp>
+        <p:nvSpPr>
+          <p:cNvPr id="14" name="灯片编号占位符 8"/>
+          <p:cNvSpPr>
+            <a:spLocks noGrp="1"/>
+          </p:cNvSpPr>
+          <p:nvPr>
+            <p:ph type="sldNum" sz="quarter" idx="12"/>
+          </p:nvPr>
+        </p:nvSpPr>
+        <p:spPr>
+          <a:xfrm>
+            <a:off x="9847869" y="6405035"/>
+            <a:ext cx="809393" cy="545001"/>
+          </a:xfrm>
+        </p:spPr>
+        <p:txBody>
+          <a:bodyPr/>
+          <a:lstStyle/>
+          <a:p>
+            <a:pPr algn="ctr"/>
+            <a:fld id="{152851E7-9224-42D2-A4FF-119762E40804}" type="slidenum">
+              <a:rPr lang="zh-CN" altLang="en-US" sz="1400" b="1" smtClean="0">
+                <a:solidFill>
+                  <a:schemeClr val="bg1"/>
+                </a:solidFill>
+                <a:latin typeface="Constantia" panose="02030602050306030303" pitchFamily="18" charset="0"/>
+                <a:cs typeface="Times" panose="02020603050405020304" pitchFamily="18" charset="0"/>
+              </a:rPr>
+              <a:t>13</a:t>
+            </a:fld>
+            <a:endParaRPr lang="zh-CN" altLang="en-US" sz="1400" b="1" dirty="0">
+              <a:solidFill>
+                <a:schemeClr val="bg1"/>
+              </a:solidFill>
+              <a:latin typeface="Constantia" panose="02030602050306030303" pitchFamily="18" charset="0"/>
+              <a:cs typeface="Times" panose="02020603050405020304" pitchFamily="18" charset="0"/>
+            </a:endParaRPr>
+          </a:p>
+        </p:txBody>
+      </p:sp>
+      <p:pic>
+        <p:nvPicPr>
+          <p:cNvPr id="44" name="图片 43"/>
+          <p:cNvPicPr>
+            <a:picLocks noChangeAspect="1"/>
+          </p:cNvPicPr>
+          <p:nvPr/>
+        </p:nvPicPr>
+        <p:blipFill>
+          <a:blip r:embed="rId4" cstate="print">
+            <a:extLst>
+              <a:ext uri="{28A0092B-C50C-407E-A947-70E740481C1C}">
+                <a14:useLocalDpi xmlns:a14="http://schemas.microsoft.com/office/drawing/2010/main" val="0"/>
+              </a:ext>
+            </a:extLst>
+          </a:blip>
+          <a:stretch>
+            <a:fillRect/>
+          </a:stretch>
+        </p:blipFill>
+        <p:spPr>
+          <a:xfrm>
+            <a:off x="8590829" y="204228"/>
+            <a:ext cx="3323471" cy="570629"/>
+          </a:xfrm>
+          <a:prstGeom prst="rect">
+            <a:avLst/>
+          </a:prstGeom>
+        </p:spPr>
+      </p:pic>
+      <p:sp>
+        <p:nvSpPr>
+          <p:cNvPr id="2" name="文本框 1"/>
+          <p:cNvSpPr txBox="1"/>
+          <p:nvPr/>
+        </p:nvSpPr>
+        <p:spPr>
+          <a:xfrm>
+            <a:off x="440055" y="1088390"/>
+            <a:ext cx="6951980" cy="460375"/>
+          </a:xfrm>
+          <a:prstGeom prst="rect">
+            <a:avLst/>
+          </a:prstGeom>
+          <a:noFill/>
+        </p:spPr>
+        <p:txBody>
+          <a:bodyPr wrap="square" rtlCol="0">
+            <a:spAutoFit/>
+          </a:bodyPr>
+          <a:lstStyle/>
+          <a:p>
+            <a:r>
+              <a:rPr lang="en-US" altLang="zh-CN" sz="2400" dirty="0">
+                <a:solidFill>
+                  <a:srgbClr val="4747BA"/>
+                </a:solidFill>
+                <a:ea typeface="+mn-lt"/>
+                <a:cs typeface="Times New Roman" panose="02020603050405020304" charset="0"/>
+              </a:rPr>
               <a:t>ZNS</a:t>
             </a:r>
             <a:r>
@@ -9451,16 +12834,6 @@
               </a:lnSpc>
             </a:pPr>
             <a:r>
-              <a:rPr lang="zh-CN" altLang="en-US" dirty="0">
-                <a:solidFill>
-                  <a:srgbClr val="4747BA"/>
-                </a:solidFill>
-                <a:ea typeface="+mn-lt"/>
-                <a:cs typeface="Times New Roman" panose="02020603050405020304" charset="0"/>
-              </a:rPr>
-              <a:t>（局限）</a:t>
-            </a:r>
-            <a:r>
               <a:rPr lang="zh-CN" altLang="zh-CN" dirty="0">
                 <a:solidFill>
                   <a:srgbClr val="374151"/>
@@ -9762,13 +13135,22 @@
               <a:t>ZNS SSD</a:t>
             </a:r>
             <a:r>
+              <a:rPr lang="zh-CN" altLang="en-US" dirty="0">
+                <a:solidFill>
+                  <a:srgbClr val="374151"/>
+                </a:solidFill>
+                <a:latin typeface="_5b8b_4f53"/>
+              </a:rPr>
+              <a:t>是一种新型</a:t>
+            </a:r>
+            <a:r>
               <a:rPr lang="zh-CN" altLang="zh-CN" dirty="0">
                 <a:solidFill>
                   <a:srgbClr val="374151"/>
                 </a:solidFill>
                 <a:latin typeface="_5b8b_4f53"/>
               </a:rPr>
-              <a:t>作为新兴的存储技术，其设计理念在于通过区域化管理数据，定义区域容量、活动区域限制和区域追加命令等新概念，并向主机暴露更多的存储器内部信息</a:t>
+              <a:t>存储技术，</a:t>
             </a:r>
             <a:r>
               <a:rPr lang="zh-CN" altLang="en-US" dirty="0">
@@ -9777,7 +13159,7 @@
                 </a:solidFill>
                 <a:latin typeface="_5b8b_4f53"/>
               </a:rPr>
-              <a:t>。这些设计直接减少写放大现象，优化了数据管理粒度，提高</a:t>
+              <a:t>引入了基于区域的存储模型，并且直接取消了</a:t>
             </a:r>
             <a:r>
               <a:rPr lang="en-US" altLang="zh-CN" dirty="0">
@@ -9786,6 +13168,42 @@
                 </a:solidFill>
                 <a:latin typeface="_5b8b_4f53"/>
               </a:rPr>
+              <a:t>FTL</a:t>
+            </a:r>
+            <a:r>
+              <a:rPr lang="zh-CN" altLang="en-US" dirty="0">
+                <a:solidFill>
+                  <a:srgbClr val="374151"/>
+                </a:solidFill>
+                <a:latin typeface="_5b8b_4f53"/>
+              </a:rPr>
+              <a:t>层的设计，放弃了随机写的支持，进而消除了盘内写放大效应，提高了写入操作的可预测性和效率。此外，</a:t>
+            </a:r>
+            <a:r>
+              <a:rPr lang="en-US" altLang="zh-CN" dirty="0">
+                <a:solidFill>
+                  <a:srgbClr val="374151"/>
+                </a:solidFill>
+                <a:latin typeface="_5b8b_4f53"/>
+              </a:rPr>
+              <a:t>ZNS SSD</a:t>
+            </a:r>
+            <a:r>
+              <a:rPr lang="zh-CN" altLang="en-US" dirty="0">
+                <a:solidFill>
+                  <a:srgbClr val="374151"/>
+                </a:solidFill>
+                <a:latin typeface="_5b8b_4f53"/>
+              </a:rPr>
+              <a:t>的区域化管理降低了垃圾回收的复杂性和频率，显著提升了</a:t>
+            </a:r>
+            <a:r>
+              <a:rPr lang="en-US" altLang="zh-CN" dirty="0">
+                <a:solidFill>
+                  <a:srgbClr val="374151"/>
+                </a:solidFill>
+                <a:latin typeface="_5b8b_4f53"/>
+              </a:rPr>
               <a:t>SSD</a:t>
             </a:r>
             <a:r>
@@ -9795,7 +13213,7 @@
                 </a:solidFill>
                 <a:latin typeface="_5b8b_4f53"/>
               </a:rPr>
-              <a:t>性能和寿命。</a:t>
+              <a:t>的整体性能和耐用性。</a:t>
             </a:r>
             <a:endParaRPr lang="en-US" altLang="zh-CN" dirty="0">
               <a:solidFill>
@@ -9803,113 +13221,6 @@
               </a:solidFill>
               <a:latin typeface="_5b8b_4f53"/>
             </a:endParaRPr>
-          </a:p>
-        </p:txBody>
-      </p:sp>
-      <p:sp>
-        <p:nvSpPr>
-          <p:cNvPr id="16" name="文本框 15">
-            <a:extLst>
-              <a:ext uri="{FF2B5EF4-FFF2-40B4-BE49-F238E27FC236}">
-                <a16:creationId xmlns:a16="http://schemas.microsoft.com/office/drawing/2014/main" id="{90B45C5F-08AB-3D40-483D-485B2D13D16F}"/>
-              </a:ext>
-            </a:extLst>
-          </p:cNvPr>
-          <p:cNvSpPr txBox="1"/>
-          <p:nvPr/>
-        </p:nvSpPr>
-        <p:spPr>
-          <a:xfrm>
-            <a:off x="385590" y="5768168"/>
-            <a:ext cx="10382942" cy="558102"/>
-          </a:xfrm>
-          <a:prstGeom prst="rect">
-            <a:avLst/>
-          </a:prstGeom>
-          <a:noFill/>
-        </p:spPr>
-        <p:txBody>
-          <a:bodyPr wrap="square" rtlCol="0" anchor="t">
-            <a:spAutoFit/>
-          </a:bodyPr>
-          <a:lstStyle/>
-          <a:p>
-            <a:pPr>
-              <a:lnSpc>
-                <a:spcPct val="70000"/>
-              </a:lnSpc>
-              <a:spcAft>
-                <a:spcPts val="1200"/>
-              </a:spcAft>
-              <a:defRPr/>
-            </a:pPr>
-            <a:r>
-              <a:rPr lang="en-US" altLang="zh-CN" sz="1400" dirty="0"/>
-              <a:t>F2FS</a:t>
-            </a:r>
-            <a:r>
-              <a:rPr lang="zh-CN" altLang="en-US" sz="1400" dirty="0"/>
-              <a:t>：</a:t>
-            </a:r>
-            <a:r>
-              <a:rPr lang="en-US" altLang="zh-CN" sz="1400" dirty="0"/>
-              <a:t>A new file system for flash storage</a:t>
-            </a:r>
-            <a:r>
-              <a:rPr lang="zh-CN" altLang="en-US" sz="1400" dirty="0"/>
-              <a:t>，</a:t>
-            </a:r>
-            <a:r>
-              <a:rPr lang="en-US" altLang="zh-CN" sz="1400" dirty="0"/>
-              <a:t>FAST ’15</a:t>
-            </a:r>
-          </a:p>
-          <a:p>
-            <a:pPr marR="0" lvl="0" indent="0" fontAlgn="auto">
-              <a:lnSpc>
-                <a:spcPct val="70000"/>
-              </a:lnSpc>
-              <a:spcBef>
-                <a:spcPts val="0"/>
-              </a:spcBef>
-              <a:spcAft>
-                <a:spcPts val="1200"/>
-              </a:spcAft>
-              <a:buClrTx/>
-              <a:buSzTx/>
-              <a:buFont typeface="Arial" panose="020B0604020202020204" pitchFamily="34" charset="0"/>
-              <a:buNone/>
-              <a:tabLst/>
-              <a:defRPr/>
-            </a:pPr>
-            <a:r>
-              <a:rPr lang="en-US" altLang="zh-CN" sz="1400" dirty="0" err="1"/>
-              <a:t>BetrFS</a:t>
-            </a:r>
-            <a:r>
-              <a:rPr lang="en-US" altLang="zh-CN" sz="1400" dirty="0"/>
-              <a:t>: a </a:t>
-            </a:r>
-            <a:r>
-              <a:rPr lang="en-US" altLang="zh-CN" sz="1400" dirty="0" err="1"/>
-              <a:t>compleat</a:t>
-            </a:r>
-            <a:r>
-              <a:rPr lang="en-US" altLang="zh-CN" sz="1400" dirty="0"/>
-              <a:t> file system for commodity SSDs</a:t>
-            </a:r>
-            <a:r>
-              <a:rPr lang="zh-CN" altLang="en-US" sz="1400" dirty="0"/>
-              <a:t>，</a:t>
-            </a:r>
-            <a:r>
-              <a:rPr lang="en-US" altLang="zh-CN" sz="1400" dirty="0" err="1"/>
-              <a:t>EuroSys</a:t>
-            </a:r>
-            <a:r>
-              <a:rPr lang="en-US" altLang="zh-CN" sz="1400" dirty="0"/>
-              <a:t> '22</a:t>
-            </a:r>
           </a:p>
         </p:txBody>
       </p:sp>
@@ -10685,8 +13996,8 @@
         </p:nvSpPr>
         <p:spPr>
           <a:xfrm>
-            <a:off x="5486400" y="2483036"/>
-            <a:ext cx="6096000" cy="1891928"/>
+            <a:off x="5486400" y="1537072"/>
+            <a:ext cx="6096000" cy="2353593"/>
           </a:xfrm>
           <a:prstGeom prst="rect">
             <a:avLst/>
@@ -10774,7 +14085,16 @@
                 </a:solidFill>
                 <a:latin typeface="_5b8b_4f53"/>
               </a:rPr>
-              <a:t>，有效降低了延迟；并且实现了一种区域友好的追加感知</a:t>
+              <a:t>，有效</a:t>
+            </a:r>
+            <a:r>
+              <a:rPr lang="zh-CN" altLang="en-US" sz="2000" dirty="0">
+                <a:solidFill>
+                  <a:srgbClr val="374151"/>
+                </a:solidFill>
+                <a:latin typeface="_5b8b_4f53"/>
+              </a:rPr>
+              <a:t>降低了</a:t>
             </a:r>
             <a:r>
               <a:rPr lang="en-US" altLang="zh-CN" sz="2000" dirty="0">
@@ -10783,6 +14103,55 @@
                 </a:solidFill>
                 <a:latin typeface="_5b8b_4f53"/>
               </a:rPr>
+              <a:t>Zone</a:t>
+            </a:r>
+            <a:r>
+              <a:rPr lang="zh-CN" altLang="en-US" sz="2000" dirty="0">
+                <a:solidFill>
+                  <a:srgbClr val="374151"/>
+                </a:solidFill>
+                <a:latin typeface="_5b8b_4f53"/>
+              </a:rPr>
+              <a:t>操作的</a:t>
+            </a:r>
+            <a:r>
+              <a:rPr lang="zh-CN" altLang="zh-CN" sz="2000" dirty="0">
+                <a:solidFill>
+                  <a:srgbClr val="374151"/>
+                </a:solidFill>
+                <a:latin typeface="_5b8b_4f53"/>
+              </a:rPr>
+              <a:t>延迟；</a:t>
+            </a:r>
+            <a:endParaRPr lang="en-US" altLang="zh-CN" sz="2000" dirty="0">
+              <a:solidFill>
+                <a:srgbClr val="374151"/>
+              </a:solidFill>
+              <a:latin typeface="_5b8b_4f53"/>
+            </a:endParaRPr>
+          </a:p>
+          <a:p>
+            <a:pPr indent="266700" algn="just">
+              <a:lnSpc>
+                <a:spcPct val="150000"/>
+              </a:lnSpc>
+            </a:pPr>
+            <a:r>
+              <a:rPr lang="zh-CN" altLang="zh-CN" sz="2000" dirty="0">
+                <a:solidFill>
+                  <a:srgbClr val="374151"/>
+                </a:solidFill>
+                <a:latin typeface="_5b8b_4f53"/>
+              </a:rPr>
+              <a:t>并且实现了一种区域友好的追加感知</a:t>
+            </a:r>
+            <a:r>
+              <a:rPr lang="en-US" altLang="zh-CN" sz="2000" dirty="0">
+                <a:solidFill>
+                  <a:srgbClr val="374151"/>
+                </a:solidFill>
+                <a:latin typeface="_5b8b_4f53"/>
+              </a:rPr>
               <a:t>WAL</a:t>
             </a:r>
             <a:r>
@@ -10828,7 +14197,16 @@
                 </a:solidFill>
                 <a:latin typeface="_5b8b_4f53"/>
               </a:rPr>
-              <a:t>盘内只能串行写入</a:t>
+              <a:t>盘</a:t>
+            </a:r>
+            <a:r>
+              <a:rPr lang="zh-CN" altLang="en-US" sz="2000" dirty="0">
+                <a:solidFill>
+                  <a:srgbClr val="374151"/>
+                </a:solidFill>
+                <a:latin typeface="_5b8b_4f53"/>
+              </a:rPr>
+              <a:t>内单个</a:t>
             </a:r>
             <a:r>
               <a:rPr lang="en-US" altLang="zh-CN" sz="2000" dirty="0">
@@ -10837,7 +14215,34 @@
                 </a:solidFill>
                 <a:latin typeface="_5b8b_4f53"/>
               </a:rPr>
+              <a:t>Zone</a:t>
+            </a:r>
+            <a:r>
+              <a:rPr lang="zh-CN" altLang="zh-CN" sz="2000" dirty="0">
+                <a:solidFill>
+                  <a:srgbClr val="374151"/>
+                </a:solidFill>
+                <a:latin typeface="_5b8b_4f53"/>
+              </a:rPr>
+              <a:t>只能串行写入</a:t>
+            </a:r>
+            <a:r>
+              <a:rPr lang="en-US" altLang="zh-CN" sz="2000" dirty="0">
+                <a:solidFill>
+                  <a:srgbClr val="374151"/>
+                </a:solidFill>
+                <a:latin typeface="_5b8b_4f53"/>
+              </a:rPr>
               <a:t>WAL</a:t>
+            </a:r>
+            <a:r>
+              <a:rPr lang="zh-CN" altLang="en-US" sz="2000" dirty="0">
+                <a:solidFill>
+                  <a:srgbClr val="374151"/>
+                </a:solidFill>
+                <a:latin typeface="_5b8b_4f53"/>
+              </a:rPr>
+              <a:t>文件而</a:t>
             </a:r>
             <a:r>
               <a:rPr lang="zh-CN" altLang="zh-CN" sz="2000" dirty="0">
@@ -11570,7 +14975,7 @@
         <p:spPr>
           <a:xfrm>
             <a:off x="208338" y="1222965"/>
-            <a:ext cx="4649412" cy="4524315"/>
+            <a:ext cx="4649412" cy="3139321"/>
           </a:xfrm>
           <a:prstGeom prst="rect">
             <a:avLst/>
@@ -11584,7 +14989,7 @@
           <a:lstStyle/>
           <a:p>
             <a:r>
-              <a:rPr lang="zh-CN" altLang="zh-CN" sz="1600" dirty="0">
+              <a:rPr lang="zh-CN" altLang="zh-CN" dirty="0">
                 <a:solidFill>
                   <a:srgbClr val="374151"/>
                 </a:solidFill>
@@ -11593,7 +14998,7 @@
               <a:t>在</a:t>
             </a:r>
             <a:r>
-              <a:rPr lang="en-US" altLang="zh-CN" sz="1600" dirty="0">
+              <a:rPr lang="en-US" altLang="zh-CN" dirty="0">
                 <a:solidFill>
                   <a:srgbClr val="374151"/>
                 </a:solidFill>
@@ -11602,7 +15007,7 @@
               <a:t>ZAFS</a:t>
             </a:r>
             <a:r>
-              <a:rPr lang="zh-CN" altLang="zh-CN" sz="1600" dirty="0">
+              <a:rPr lang="zh-CN" altLang="zh-CN" dirty="0">
                 <a:solidFill>
                   <a:srgbClr val="374151"/>
                 </a:solidFill>
@@ -11611,7 +15016,7 @@
               <a:t>中，设计实现了一种</a:t>
             </a:r>
             <a:r>
-              <a:rPr lang="zh-CN" altLang="en-US" sz="1600" dirty="0">
+              <a:rPr lang="zh-CN" altLang="en-US" dirty="0">
                 <a:solidFill>
                   <a:srgbClr val="374151"/>
                 </a:solidFill>
@@ -11620,7 +15025,7 @@
               <a:t>追加友好的新型</a:t>
             </a:r>
             <a:r>
-              <a:rPr lang="en-US" altLang="zh-CN" sz="1600" dirty="0">
+              <a:rPr lang="en-US" altLang="zh-CN" dirty="0">
                 <a:solidFill>
                   <a:srgbClr val="374151"/>
                 </a:solidFill>
@@ -11629,7 +15034,7 @@
               <a:t>WAL</a:t>
             </a:r>
             <a:r>
-              <a:rPr lang="zh-CN" altLang="en-US" sz="1600" dirty="0">
+              <a:rPr lang="zh-CN" altLang="en-US" dirty="0">
                 <a:solidFill>
                   <a:srgbClr val="374151"/>
                 </a:solidFill>
@@ -11638,7 +15043,7 @@
               <a:t>，</a:t>
             </a:r>
             <a:r>
-              <a:rPr lang="en-US" altLang="zh-CN" sz="1600" dirty="0">
+              <a:rPr lang="en-US" altLang="zh-CN" dirty="0">
                 <a:solidFill>
                   <a:srgbClr val="374151"/>
                 </a:solidFill>
@@ -11647,7 +15052,7 @@
               <a:t>A2-WAL</a:t>
             </a:r>
             <a:r>
-              <a:rPr lang="zh-CN" altLang="zh-CN" sz="1600" dirty="0">
+              <a:rPr lang="zh-CN" altLang="zh-CN" dirty="0">
                 <a:solidFill>
                   <a:srgbClr val="374151"/>
                 </a:solidFill>
@@ -11656,7 +15061,7 @@
               <a:t>（</a:t>
             </a:r>
             <a:r>
-              <a:rPr lang="en-US" altLang="zh-CN" sz="1600" dirty="0">
+              <a:rPr lang="en-US" altLang="zh-CN" dirty="0">
                 <a:solidFill>
                   <a:srgbClr val="374151"/>
                 </a:solidFill>
@@ -11665,7 +15070,7 @@
               <a:t>Append-Aware WAL</a:t>
             </a:r>
             <a:r>
-              <a:rPr lang="zh-CN" altLang="zh-CN" sz="1600" dirty="0">
+              <a:rPr lang="zh-CN" altLang="zh-CN" dirty="0">
                 <a:solidFill>
                   <a:srgbClr val="374151"/>
                 </a:solidFill>
@@ -11673,7 +15078,7 @@
               </a:rPr>
               <a:t>）</a:t>
             </a:r>
-            <a:endParaRPr lang="en-US" altLang="zh-CN" sz="1600" dirty="0">
+            <a:endParaRPr lang="en-US" altLang="zh-CN" dirty="0">
               <a:solidFill>
                 <a:srgbClr val="374151"/>
               </a:solidFill>
@@ -11681,7 +15086,7 @@
             </a:endParaRPr>
           </a:p>
           <a:p>
-            <a:endParaRPr lang="en-US" altLang="zh-CN" sz="1600" dirty="0">
+            <a:endParaRPr lang="en-US" altLang="zh-CN" dirty="0">
               <a:solidFill>
                 <a:srgbClr val="374151"/>
               </a:solidFill>
@@ -11690,7 +15095,7 @@
           </a:p>
           <a:p>
             <a:r>
-              <a:rPr lang="zh-CN" altLang="zh-CN" sz="1600" dirty="0">
+              <a:rPr lang="zh-CN" altLang="zh-CN" dirty="0">
                 <a:solidFill>
                   <a:srgbClr val="374151"/>
                 </a:solidFill>
@@ -11699,7 +15104,7 @@
               <a:t>将</a:t>
             </a:r>
             <a:r>
-              <a:rPr lang="en-US" altLang="zh-CN" sz="1600" dirty="0">
+              <a:rPr lang="en-US" altLang="zh-CN" dirty="0">
                 <a:solidFill>
                   <a:srgbClr val="374151"/>
                 </a:solidFill>
@@ -11708,7 +15113,7 @@
               <a:t>WAL</a:t>
             </a:r>
             <a:r>
-              <a:rPr lang="zh-CN" altLang="zh-CN" sz="1600" dirty="0">
+              <a:rPr lang="zh-CN" altLang="zh-CN" dirty="0">
                 <a:solidFill>
                   <a:srgbClr val="374151"/>
                 </a:solidFill>
@@ -11717,7 +15122,7 @@
               <a:t>数据和头部组合成一个</a:t>
             </a:r>
             <a:r>
-              <a:rPr lang="en-US" altLang="zh-CN" sz="1600" dirty="0">
+              <a:rPr lang="en-US" altLang="zh-CN" dirty="0">
                 <a:solidFill>
                   <a:srgbClr val="374151"/>
                 </a:solidFill>
@@ -11726,7 +15131,7 @@
               <a:t>WAL entry</a:t>
             </a:r>
             <a:r>
-              <a:rPr lang="zh-CN" altLang="zh-CN" sz="1600" dirty="0">
+              <a:rPr lang="zh-CN" altLang="zh-CN" dirty="0">
                 <a:solidFill>
                   <a:srgbClr val="374151"/>
                 </a:solidFill>
@@ -11735,7 +15140,7 @@
               <a:t>。这个报头</a:t>
             </a:r>
             <a:r>
-              <a:rPr lang="en-US" altLang="zh-CN" sz="1600" dirty="0">
+              <a:rPr lang="en-US" altLang="zh-CN" dirty="0">
                 <a:solidFill>
                   <a:srgbClr val="374151"/>
                 </a:solidFill>
@@ -11744,7 +15149,7 @@
               <a:t>(header)</a:t>
             </a:r>
             <a:r>
-              <a:rPr lang="zh-CN" altLang="zh-CN" sz="1600" dirty="0">
+              <a:rPr lang="zh-CN" altLang="zh-CN" dirty="0">
                 <a:solidFill>
                   <a:srgbClr val="374151"/>
                 </a:solidFill>
@@ -11753,7 +15158,7 @@
               <a:t>由</a:t>
             </a:r>
             <a:r>
-              <a:rPr lang="en-US" altLang="zh-CN" sz="1600" dirty="0">
+              <a:rPr lang="en-US" altLang="zh-CN" dirty="0">
                 <a:solidFill>
                   <a:srgbClr val="374151"/>
                 </a:solidFill>
@@ -11762,7 +15167,7 @@
               <a:t>64</a:t>
             </a:r>
             <a:r>
-              <a:rPr lang="zh-CN" altLang="zh-CN" sz="1600" dirty="0">
+              <a:rPr lang="zh-CN" altLang="zh-CN" dirty="0">
                 <a:solidFill>
                   <a:srgbClr val="374151"/>
                 </a:solidFill>
@@ -11771,7 +15176,7 @@
               <a:t>位序列号（</a:t>
             </a:r>
             <a:r>
-              <a:rPr lang="en-US" altLang="zh-CN" sz="1600" dirty="0" err="1">
+              <a:rPr lang="en-US" altLang="zh-CN" dirty="0" err="1">
                 <a:solidFill>
                   <a:srgbClr val="374151"/>
                 </a:solidFill>
@@ -11780,7 +15185,7 @@
               <a:t>seq_number</a:t>
             </a:r>
             <a:r>
-              <a:rPr lang="zh-CN" altLang="zh-CN" sz="1600" dirty="0">
+              <a:rPr lang="zh-CN" altLang="zh-CN" dirty="0">
                 <a:solidFill>
                   <a:srgbClr val="374151"/>
                 </a:solidFill>
@@ -11789,7 +15194,7 @@
               <a:t>）和</a:t>
             </a:r>
             <a:r>
-              <a:rPr lang="en-US" altLang="zh-CN" sz="1600" dirty="0">
+              <a:rPr lang="en-US" altLang="zh-CN" dirty="0">
                 <a:solidFill>
                   <a:srgbClr val="374151"/>
                 </a:solidFill>
@@ -11798,7 +15203,7 @@
               <a:t>WAL entry</a:t>
             </a:r>
             <a:r>
-              <a:rPr lang="zh-CN" altLang="zh-CN" sz="1600" dirty="0">
+              <a:rPr lang="zh-CN" altLang="zh-CN" dirty="0">
                 <a:solidFill>
                   <a:srgbClr val="374151"/>
                 </a:solidFill>
@@ -11807,7 +15212,7 @@
               <a:t>的大小</a:t>
             </a:r>
             <a:r>
-              <a:rPr lang="en-US" altLang="zh-CN" sz="1600" dirty="0">
+              <a:rPr lang="en-US" altLang="zh-CN" dirty="0">
                 <a:solidFill>
                   <a:srgbClr val="374151"/>
                 </a:solidFill>
@@ -11816,7 +15221,7 @@
               <a:t>(</a:t>
             </a:r>
             <a:r>
-              <a:rPr lang="en-US" altLang="zh-CN" sz="1600" dirty="0" err="1">
+              <a:rPr lang="en-US" altLang="zh-CN" dirty="0" err="1">
                 <a:solidFill>
                   <a:srgbClr val="374151"/>
                 </a:solidFill>
@@ -11825,7 +15230,7 @@
               <a:t>entry_size</a:t>
             </a:r>
             <a:r>
-              <a:rPr lang="en-US" altLang="zh-CN" sz="1600" dirty="0">
+              <a:rPr lang="en-US" altLang="zh-CN" dirty="0">
                 <a:solidFill>
                   <a:srgbClr val="374151"/>
                 </a:solidFill>
@@ -11834,7 +15239,7 @@
               <a:t>)</a:t>
             </a:r>
             <a:r>
-              <a:rPr lang="zh-CN" altLang="zh-CN" sz="1600" dirty="0">
+              <a:rPr lang="zh-CN" altLang="zh-CN" dirty="0">
                 <a:solidFill>
                   <a:srgbClr val="374151"/>
                 </a:solidFill>
@@ -11842,7 +15247,7 @@
               </a:rPr>
               <a:t>组成。</a:t>
             </a:r>
-            <a:endParaRPr lang="en-US" altLang="zh-CN" sz="1600" dirty="0">
+            <a:endParaRPr lang="en-US" altLang="zh-CN" dirty="0">
               <a:solidFill>
                 <a:srgbClr val="374151"/>
               </a:solidFill>
@@ -11850,7 +15255,7 @@
             </a:endParaRPr>
           </a:p>
           <a:p>
-            <a:endParaRPr lang="en-US" altLang="zh-CN" sz="1600" dirty="0">
+            <a:endParaRPr lang="en-US" altLang="zh-CN" dirty="0">
               <a:solidFill>
                 <a:srgbClr val="374151"/>
               </a:solidFill>
@@ -11859,7 +15264,7 @@
           </a:p>
           <a:p>
             <a:r>
-              <a:rPr lang="zh-CN" altLang="en-US" sz="1600" dirty="0">
+              <a:rPr lang="zh-CN" altLang="en-US" dirty="0">
                 <a:solidFill>
                   <a:srgbClr val="374151"/>
                 </a:solidFill>
@@ -11868,7 +15273,7 @@
               <a:t>前者</a:t>
             </a:r>
             <a:r>
-              <a:rPr lang="zh-CN" altLang="zh-CN" sz="1600" dirty="0">
+              <a:rPr lang="zh-CN" altLang="zh-CN" dirty="0">
                 <a:solidFill>
                   <a:srgbClr val="374151"/>
                 </a:solidFill>
@@ -11877,7 +15282,7 @@
               <a:t>以原子方式增加，并表示绝对</a:t>
             </a:r>
             <a:r>
-              <a:rPr lang="zh-CN" altLang="en-US" sz="1600" dirty="0">
+              <a:rPr lang="zh-CN" altLang="en-US" dirty="0">
                 <a:solidFill>
                   <a:srgbClr val="374151"/>
                 </a:solidFill>
@@ -11886,7 +15291,7 @@
               <a:t>的</a:t>
             </a:r>
             <a:r>
-              <a:rPr lang="zh-CN" altLang="zh-CN" sz="1600" dirty="0">
+              <a:rPr lang="zh-CN" altLang="zh-CN" dirty="0">
                 <a:solidFill>
                   <a:srgbClr val="374151"/>
                 </a:solidFill>
@@ -11895,7 +15300,7 @@
               <a:t>数据顺序。</a:t>
             </a:r>
             <a:r>
-              <a:rPr lang="zh-CN" altLang="en-US" sz="1600" dirty="0">
+              <a:rPr lang="zh-CN" altLang="en-US" dirty="0">
                 <a:solidFill>
                   <a:srgbClr val="374151"/>
                 </a:solidFill>
@@ -11904,7 +15309,7 @@
               <a:t>后者</a:t>
             </a:r>
             <a:r>
-              <a:rPr lang="zh-CN" altLang="zh-CN" sz="1600" dirty="0">
+              <a:rPr lang="zh-CN" altLang="zh-CN" dirty="0">
                 <a:solidFill>
                   <a:srgbClr val="374151"/>
                 </a:solidFill>
@@ -11913,7 +15318,7 @@
               <a:t>用于推断</a:t>
             </a:r>
             <a:r>
-              <a:rPr lang="zh-CN" altLang="en-US" sz="1600" dirty="0">
+              <a:rPr lang="zh-CN" altLang="en-US" dirty="0">
                 <a:solidFill>
                   <a:srgbClr val="374151"/>
                 </a:solidFill>
@@ -11922,7 +15327,7 @@
               <a:t>下一个</a:t>
             </a:r>
             <a:r>
-              <a:rPr lang="en-US" altLang="zh-CN" sz="1600" dirty="0">
+              <a:rPr lang="en-US" altLang="zh-CN" dirty="0">
                 <a:solidFill>
                   <a:srgbClr val="374151"/>
                 </a:solidFill>
@@ -11931,7 +15336,7 @@
               <a:t> WAL </a:t>
             </a:r>
             <a:r>
-              <a:rPr lang="zh-CN" altLang="zh-CN" sz="1600" dirty="0">
+              <a:rPr lang="zh-CN" altLang="zh-CN" dirty="0">
                 <a:solidFill>
                   <a:srgbClr val="374151"/>
                 </a:solidFill>
@@ -11939,7 +15344,7 @@
               </a:rPr>
               <a:t>条目的位置。</a:t>
             </a:r>
-            <a:endParaRPr lang="en-US" altLang="zh-CN" sz="1600" dirty="0">
+            <a:endParaRPr lang="en-US" altLang="zh-CN" dirty="0">
               <a:solidFill>
                 <a:srgbClr val="374151"/>
               </a:solidFill>
@@ -11947,7 +15352,7 @@
             </a:endParaRPr>
           </a:p>
           <a:p>
-            <a:endParaRPr lang="en-US" altLang="zh-CN" sz="1600" dirty="0">
+            <a:endParaRPr lang="en-US" altLang="zh-CN" dirty="0">
               <a:solidFill>
                 <a:srgbClr val="374151"/>
               </a:solidFill>
@@ -11955,62 +15360,12 @@
             </a:endParaRPr>
           </a:p>
           <a:p>
-            <a:endParaRPr lang="en-US" altLang="zh-CN" sz="1600" dirty="0">
+            <a:endParaRPr lang="en-US" altLang="zh-CN" dirty="0">
               <a:solidFill>
                 <a:srgbClr val="374151"/>
               </a:solidFill>
               <a:latin typeface="_5b8b_4f53"/>
             </a:endParaRPr>
-          </a:p>
-          <a:p>
-            <a:endParaRPr lang="en-US" altLang="zh-CN" sz="1600" dirty="0">
-              <a:solidFill>
-                <a:srgbClr val="374151"/>
-              </a:solidFill>
-              <a:latin typeface="_5b8b_4f53"/>
-            </a:endParaRPr>
-          </a:p>
-          <a:p>
-            <a:endParaRPr lang="en-US" altLang="zh-CN" sz="1600" dirty="0">
-              <a:solidFill>
-                <a:srgbClr val="374151"/>
-              </a:solidFill>
-              <a:latin typeface="_5b8b_4f53"/>
-            </a:endParaRPr>
-          </a:p>
-          <a:p>
-            <a:endParaRPr lang="en-US" altLang="zh-CN" sz="1600" dirty="0">
-              <a:solidFill>
-                <a:srgbClr val="374151"/>
-              </a:solidFill>
-              <a:latin typeface="_5b8b_4f53"/>
-            </a:endParaRPr>
-          </a:p>
-          <a:p>
-            <a:endParaRPr lang="en-US" altLang="zh-CN" sz="1600" kern="100" dirty="0">
-              <a:effectLst/>
-              <a:latin typeface="Times New Roman" panose="02020603050405020304" pitchFamily="18" charset="0"/>
-              <a:ea typeface="宋体" panose="02010600030101010101" pitchFamily="2" charset="-122"/>
-              <a:cs typeface="Times New Roman" panose="02020603050405020304" pitchFamily="18" charset="0"/>
-            </a:endParaRPr>
-          </a:p>
-          <a:p>
-            <a:endParaRPr lang="en-US" altLang="zh-CN" sz="1600" kern="100" dirty="0">
-              <a:effectLst/>
-              <a:latin typeface="Times New Roman" panose="02020603050405020304" pitchFamily="18" charset="0"/>
-              <a:ea typeface="宋体" panose="02010600030101010101" pitchFamily="2" charset="-122"/>
-              <a:cs typeface="Times New Roman" panose="02020603050405020304" pitchFamily="18" charset="0"/>
-            </a:endParaRPr>
-          </a:p>
-          <a:p>
-            <a:endParaRPr lang="en-US" altLang="zh-CN" sz="1600" kern="100" dirty="0">
-              <a:latin typeface="Times New Roman" panose="02020603050405020304" pitchFamily="18" charset="0"/>
-              <a:ea typeface="宋体" panose="02010600030101010101" pitchFamily="2" charset="-122"/>
-              <a:cs typeface="Times New Roman" panose="02020603050405020304" pitchFamily="18" charset="0"/>
-            </a:endParaRPr>
-          </a:p>
-          <a:p>
-            <a:endParaRPr lang="zh-CN" altLang="en-US" sz="1600" dirty="0"/>
           </a:p>
         </p:txBody>
       </p:sp>
@@ -12469,10 +15824,242 @@
       </p:pic>
       <p:sp>
         <p:nvSpPr>
-          <p:cNvPr id="6" name="Fußzeilenplatzhalter 4">
+          <p:cNvPr id="2" name="文本框 1"/>
+          <p:cNvSpPr txBox="1"/>
+          <p:nvPr/>
+        </p:nvSpPr>
+        <p:spPr>
+          <a:xfrm>
+            <a:off x="440055" y="1088390"/>
+            <a:ext cx="6951980" cy="460375"/>
+          </a:xfrm>
+          <a:prstGeom prst="rect">
+            <a:avLst/>
+          </a:prstGeom>
+          <a:noFill/>
+        </p:spPr>
+        <p:txBody>
+          <a:bodyPr wrap="square" rtlCol="0">
+            <a:spAutoFit/>
+          </a:bodyPr>
+          <a:lstStyle/>
+          <a:p>
+            <a:r>
+              <a:rPr lang="en-US" altLang="zh-CN" sz="2400" dirty="0">
+                <a:solidFill>
+                  <a:srgbClr val="4747BA"/>
+                </a:solidFill>
+                <a:ea typeface="+mn-lt"/>
+                <a:cs typeface="Times New Roman" panose="02020603050405020304" charset="0"/>
+              </a:rPr>
+              <a:t>ZNS</a:t>
+            </a:r>
+            <a:r>
+              <a:rPr lang="zh-CN" altLang="en-US" sz="2400" dirty="0">
+                <a:solidFill>
+                  <a:srgbClr val="4747BA"/>
+                </a:solidFill>
+                <a:ea typeface="+mn-lt"/>
+                <a:cs typeface="Times New Roman" panose="02020603050405020304" charset="0"/>
+              </a:rPr>
+              <a:t>设备</a:t>
+            </a:r>
+            <a:endParaRPr lang="en-US" altLang="zh-CN" sz="2400" dirty="0">
+              <a:solidFill>
+                <a:srgbClr val="4747BA"/>
+              </a:solidFill>
+              <a:ea typeface="+mn-lt"/>
+              <a:cs typeface="Times New Roman" panose="02020603050405020304" charset="0"/>
+            </a:endParaRPr>
+          </a:p>
+        </p:txBody>
+      </p:sp>
+      <p:sp>
+        <p:nvSpPr>
+          <p:cNvPr id="5" name="文本框 4"/>
+          <p:cNvSpPr txBox="1"/>
+          <p:nvPr/>
+        </p:nvSpPr>
+        <p:spPr>
+          <a:xfrm>
+            <a:off x="385590" y="1576511"/>
+            <a:ext cx="6696883" cy="2461508"/>
+          </a:xfrm>
+          <a:prstGeom prst="rect">
+            <a:avLst/>
+          </a:prstGeom>
+          <a:noFill/>
+        </p:spPr>
+        <p:txBody>
+          <a:bodyPr wrap="square" rtlCol="0" anchor="t">
+            <a:spAutoFit/>
+          </a:bodyPr>
+          <a:lstStyle/>
+          <a:p>
+            <a:pPr marL="342900" indent="-342900">
+              <a:lnSpc>
+                <a:spcPct val="130000"/>
+              </a:lnSpc>
+              <a:buFont typeface="Wingdings" panose="05000000000000000000" charset="0"/>
+              <a:buChar char="q"/>
+            </a:pPr>
+            <a:r>
+              <a:rPr lang="en-US" altLang="zh-CN" sz="2000" dirty="0">
+                <a:latin typeface="宋体" panose="02010600030101010101" pitchFamily="2" charset="-122"/>
+                <a:ea typeface="宋体" panose="02010600030101010101" pitchFamily="2" charset="-122"/>
+                <a:sym typeface="+mn-ea"/>
+              </a:rPr>
+              <a:t>ZNS</a:t>
+            </a:r>
+            <a:r>
+              <a:rPr lang="zh-CN" altLang="en-US" sz="2000" dirty="0">
+                <a:latin typeface="宋体" panose="02010600030101010101" pitchFamily="2" charset="-122"/>
+                <a:ea typeface="宋体" panose="02010600030101010101" pitchFamily="2" charset="-122"/>
+                <a:sym typeface="+mn-ea"/>
+              </a:rPr>
+              <a:t>采用</a:t>
+            </a:r>
+            <a:r>
+              <a:rPr lang="en-US" altLang="zh-CN" sz="2000" dirty="0">
+                <a:latin typeface="宋体" panose="02010600030101010101" pitchFamily="2" charset="-122"/>
+                <a:ea typeface="宋体" panose="02010600030101010101" pitchFamily="2" charset="-122"/>
+                <a:sym typeface="+mn-ea"/>
+              </a:rPr>
+              <a:t>U.2</a:t>
+            </a:r>
+            <a:r>
+              <a:rPr lang="zh-CN" altLang="en-US" sz="2000" dirty="0">
+                <a:latin typeface="宋体" panose="02010600030101010101" pitchFamily="2" charset="-122"/>
+                <a:ea typeface="宋体" panose="02010600030101010101" pitchFamily="2" charset="-122"/>
+                <a:sym typeface="+mn-ea"/>
+              </a:rPr>
+              <a:t>接口，如右图</a:t>
+            </a:r>
+            <a:r>
+              <a:rPr lang="en-US" altLang="zh-CN" sz="2000" dirty="0">
+                <a:latin typeface="宋体" panose="02010600030101010101" pitchFamily="2" charset="-122"/>
+                <a:ea typeface="宋体" panose="02010600030101010101" pitchFamily="2" charset="-122"/>
+                <a:sym typeface="+mn-ea"/>
+              </a:rPr>
+              <a:t> </a:t>
+            </a:r>
+          </a:p>
+          <a:p>
+            <a:pPr marL="342900" indent="-342900">
+              <a:lnSpc>
+                <a:spcPct val="130000"/>
+              </a:lnSpc>
+              <a:buFont typeface="Wingdings" panose="05000000000000000000" charset="0"/>
+              <a:buChar char="q"/>
+            </a:pPr>
+            <a:r>
+              <a:rPr lang="zh-CN" altLang="en-US" sz="2000" dirty="0">
+                <a:latin typeface="宋体" panose="02010600030101010101" pitchFamily="2" charset="-122"/>
+                <a:ea typeface="宋体" panose="02010600030101010101" pitchFamily="2" charset="-122"/>
+                <a:sym typeface="+mn-ea"/>
+              </a:rPr>
+              <a:t>另外，初步测试了</a:t>
+            </a:r>
+            <a:r>
+              <a:rPr lang="en-US" altLang="zh-CN" sz="2000" dirty="0" err="1">
+                <a:latin typeface="宋体" panose="02010600030101010101" pitchFamily="2" charset="-122"/>
+                <a:ea typeface="宋体" panose="02010600030101010101" pitchFamily="2" charset="-122"/>
+                <a:sym typeface="+mn-ea"/>
+              </a:rPr>
+              <a:t>RocksDB</a:t>
+            </a:r>
+            <a:r>
+              <a:rPr lang="en-US" altLang="zh-CN" sz="2000" dirty="0">
+                <a:latin typeface="宋体" panose="02010600030101010101" pitchFamily="2" charset="-122"/>
+                <a:ea typeface="宋体" panose="02010600030101010101" pitchFamily="2" charset="-122"/>
+                <a:sym typeface="+mn-ea"/>
+              </a:rPr>
+              <a:t> + </a:t>
+            </a:r>
+            <a:r>
+              <a:rPr lang="en-US" altLang="zh-CN" sz="2000" dirty="0" err="1">
+                <a:latin typeface="宋体" panose="02010600030101010101" pitchFamily="2" charset="-122"/>
+                <a:ea typeface="宋体" panose="02010600030101010101" pitchFamily="2" charset="-122"/>
+                <a:sym typeface="+mn-ea"/>
+              </a:rPr>
+              <a:t>ZenFS</a:t>
+            </a:r>
+            <a:r>
+              <a:rPr lang="zh-CN" altLang="en-US" sz="2000" dirty="0">
+                <a:latin typeface="宋体" panose="02010600030101010101" pitchFamily="2" charset="-122"/>
+                <a:ea typeface="宋体" panose="02010600030101010101" pitchFamily="2" charset="-122"/>
+                <a:sym typeface="+mn-ea"/>
+              </a:rPr>
+              <a:t>的表现，与之前</a:t>
+            </a:r>
+            <a:r>
+              <a:rPr lang="en-US" altLang="zh-CN" sz="2000" dirty="0" err="1">
+                <a:latin typeface="宋体" panose="02010600030101010101" pitchFamily="2" charset="-122"/>
+                <a:ea typeface="宋体" panose="02010600030101010101" pitchFamily="2" charset="-122"/>
+                <a:sym typeface="+mn-ea"/>
+              </a:rPr>
+              <a:t>NVMevirt</a:t>
+            </a:r>
+            <a:r>
+              <a:rPr lang="zh-CN" altLang="en-US" sz="2000" dirty="0">
+                <a:latin typeface="宋体" panose="02010600030101010101" pitchFamily="2" charset="-122"/>
+                <a:ea typeface="宋体" panose="02010600030101010101" pitchFamily="2" charset="-122"/>
+                <a:sym typeface="+mn-ea"/>
+              </a:rPr>
+              <a:t>模拟结果相比，模拟器的延迟过低。我认为原因在于它是内核模块实现，可能只体现了主机</a:t>
+            </a:r>
+            <a:r>
+              <a:rPr lang="en-US" altLang="zh-CN" sz="2000" dirty="0">
+                <a:latin typeface="宋体" panose="02010600030101010101" pitchFamily="2" charset="-122"/>
+                <a:ea typeface="宋体" panose="02010600030101010101" pitchFamily="2" charset="-122"/>
+                <a:sym typeface="+mn-ea"/>
+              </a:rPr>
+              <a:t>l/O</a:t>
+            </a:r>
+            <a:r>
+              <a:rPr lang="zh-CN" altLang="en-US" sz="2000" dirty="0">
+                <a:latin typeface="宋体" panose="02010600030101010101" pitchFamily="2" charset="-122"/>
+                <a:ea typeface="宋体" panose="02010600030101010101" pitchFamily="2" charset="-122"/>
+                <a:sym typeface="+mn-ea"/>
+              </a:rPr>
+              <a:t>栈的延迟。</a:t>
+            </a:r>
+            <a:endParaRPr lang="en-US" altLang="zh-CN" sz="2000" dirty="0">
+              <a:latin typeface="宋体" panose="02010600030101010101" pitchFamily="2" charset="-122"/>
+              <a:ea typeface="宋体" panose="02010600030101010101" pitchFamily="2" charset="-122"/>
+              <a:sym typeface="+mn-ea"/>
+            </a:endParaRPr>
+          </a:p>
+          <a:p>
+            <a:pPr marL="342900" indent="-342900">
+              <a:lnSpc>
+                <a:spcPct val="130000"/>
+              </a:lnSpc>
+              <a:buFont typeface="Wingdings" panose="05000000000000000000" charset="0"/>
+              <a:buChar char="q"/>
+            </a:pPr>
+            <a:r>
+              <a:rPr lang="zh-CN" altLang="en-US" sz="2000" dirty="0">
+                <a:latin typeface="宋体" panose="02010600030101010101" pitchFamily="2" charset="-122"/>
+                <a:ea typeface="宋体" panose="02010600030101010101" pitchFamily="2" charset="-122"/>
+                <a:sym typeface="+mn-ea"/>
+              </a:rPr>
+              <a:t>连接到服务器后，查看块设备，如右下图所示</a:t>
+            </a:r>
+            <a:endParaRPr lang="en-US" altLang="zh-CN" sz="2000" dirty="0">
+              <a:latin typeface="宋体" panose="02010600030101010101" pitchFamily="2" charset="-122"/>
+              <a:ea typeface="宋体" panose="02010600030101010101" pitchFamily="2" charset="-122"/>
+              <a:sym typeface="+mn-ea"/>
+            </a:endParaRPr>
+          </a:p>
+        </p:txBody>
+      </p:sp>
+      <p:sp>
+        <p:nvSpPr>
+          <p:cNvPr id="7" name="Fußzeilenplatzhalter 4">
             <a:extLst>
               <a:ext uri="{FF2B5EF4-FFF2-40B4-BE49-F238E27FC236}">
-                <a16:creationId xmlns:a16="http://schemas.microsoft.com/office/drawing/2014/main" id="{6337FC42-856A-0234-8EB6-48BB83F05028}"/>
+                <a16:creationId xmlns:a16="http://schemas.microsoft.com/office/drawing/2014/main" id="{293457A3-1637-3737-9B53-1CF17294975F}"/>
               </a:ext>
             </a:extLst>
           </p:cNvPr>
@@ -12520,12 +16107,120 @@
           </a:p>
         </p:txBody>
       </p:sp>
-      <p:sp>
-        <p:nvSpPr>
-          <p:cNvPr id="7" name="文本框 6">
+      <p:pic>
+        <p:nvPicPr>
+          <p:cNvPr id="8" name="图片 7">
             <a:extLst>
               <a:ext uri="{FF2B5EF4-FFF2-40B4-BE49-F238E27FC236}">
-                <a16:creationId xmlns:a16="http://schemas.microsoft.com/office/drawing/2014/main" id="{86E63EB8-E0A8-4F07-76F1-4E169ED7808E}"/>
+                <a16:creationId xmlns:a16="http://schemas.microsoft.com/office/drawing/2014/main" id="{E6F57F7C-C43A-4F29-54A3-9E2A41811FC0}"/>
+              </a:ext>
+            </a:extLst>
+          </p:cNvPr>
+          <p:cNvPicPr>
+            <a:picLocks noChangeAspect="1"/>
+          </p:cNvPicPr>
+          <p:nvPr/>
+        </p:nvPicPr>
+        <p:blipFill>
+          <a:blip r:embed="rId5" cstate="print">
+            <a:extLst>
+              <a:ext uri="{28A0092B-C50C-407E-A947-70E740481C1C}">
+                <a14:useLocalDpi xmlns:a14="http://schemas.microsoft.com/office/drawing/2010/main" val="0"/>
+              </a:ext>
+            </a:extLst>
+          </a:blip>
+          <a:stretch>
+            <a:fillRect/>
+          </a:stretch>
+        </p:blipFill>
+        <p:spPr>
+          <a:xfrm>
+            <a:off x="9985299" y="1248081"/>
+            <a:ext cx="1598233" cy="2243013"/>
+          </a:xfrm>
+          <a:prstGeom prst="rect">
+            <a:avLst/>
+          </a:prstGeom>
+        </p:spPr>
+      </p:pic>
+      <p:pic>
+        <p:nvPicPr>
+          <p:cNvPr id="11" name="图片 10">
+            <a:extLst>
+              <a:ext uri="{FF2B5EF4-FFF2-40B4-BE49-F238E27FC236}">
+                <a16:creationId xmlns:a16="http://schemas.microsoft.com/office/drawing/2014/main" id="{B6DE7B69-1B2D-65EE-4842-C041A2060456}"/>
+              </a:ext>
+            </a:extLst>
+          </p:cNvPr>
+          <p:cNvPicPr>
+            <a:picLocks noChangeAspect="1"/>
+          </p:cNvPicPr>
+          <p:nvPr/>
+        </p:nvPicPr>
+        <p:blipFill>
+          <a:blip r:embed="rId6" cstate="print">
+            <a:extLst>
+              <a:ext uri="{28A0092B-C50C-407E-A947-70E740481C1C}">
+                <a14:useLocalDpi xmlns:a14="http://schemas.microsoft.com/office/drawing/2010/main" val="0"/>
+              </a:ext>
+            </a:extLst>
+          </a:blip>
+          <a:stretch>
+            <a:fillRect/>
+          </a:stretch>
+        </p:blipFill>
+        <p:spPr>
+          <a:xfrm>
+            <a:off x="7743977" y="1248799"/>
+            <a:ext cx="1693704" cy="2258272"/>
+          </a:xfrm>
+          <a:prstGeom prst="rect">
+            <a:avLst/>
+          </a:prstGeom>
+        </p:spPr>
+      </p:pic>
+      <p:pic>
+        <p:nvPicPr>
+          <p:cNvPr id="27" name="图片 26">
+            <a:extLst>
+              <a:ext uri="{FF2B5EF4-FFF2-40B4-BE49-F238E27FC236}">
+                <a16:creationId xmlns:a16="http://schemas.microsoft.com/office/drawing/2014/main" id="{777837E1-82E7-66D5-866F-6FEAA4F28829}"/>
+              </a:ext>
+            </a:extLst>
+          </p:cNvPr>
+          <p:cNvPicPr>
+            <a:picLocks noChangeAspect="1"/>
+          </p:cNvPicPr>
+          <p:nvPr/>
+        </p:nvPicPr>
+        <p:blipFill>
+          <a:blip r:embed="rId7">
+            <a:extLst>
+              <a:ext uri="{28A0092B-C50C-407E-A947-70E740481C1C}">
+                <a14:useLocalDpi xmlns:a14="http://schemas.microsoft.com/office/drawing/2010/main" val="0"/>
+              </a:ext>
+            </a:extLst>
+          </a:blip>
+          <a:stretch>
+            <a:fillRect/>
+          </a:stretch>
+        </p:blipFill>
+        <p:spPr>
+          <a:xfrm>
+            <a:off x="6096000" y="4027206"/>
+            <a:ext cx="5517358" cy="2270957"/>
+          </a:xfrm>
+          <a:prstGeom prst="rect">
+            <a:avLst/>
+          </a:prstGeom>
+        </p:spPr>
+      </p:pic>
+      <p:sp>
+        <p:nvSpPr>
+          <p:cNvPr id="21" name="文本框 20">
+            <a:extLst>
+              <a:ext uri="{FF2B5EF4-FFF2-40B4-BE49-F238E27FC236}">
+                <a16:creationId xmlns:a16="http://schemas.microsoft.com/office/drawing/2014/main" id="{A6AB728D-84D2-4469-AF28-191BBA7291C6}"/>
               </a:ext>
             </a:extLst>
           </p:cNvPr>
@@ -12534,630 +16229,7 @@
         </p:nvSpPr>
         <p:spPr>
           <a:xfrm>
-            <a:off x="190500" y="5432932"/>
-            <a:ext cx="8260080" cy="928909"/>
-          </a:xfrm>
-          <a:prstGeom prst="rect">
-            <a:avLst/>
-          </a:prstGeom>
-          <a:noFill/>
-        </p:spPr>
-        <p:txBody>
-          <a:bodyPr wrap="square" rtlCol="0" anchor="t">
-            <a:spAutoFit/>
-          </a:bodyPr>
-          <a:lstStyle/>
-          <a:p>
-            <a:pPr>
-              <a:lnSpc>
-                <a:spcPct val="70000"/>
-              </a:lnSpc>
-              <a:spcAft>
-                <a:spcPts val="1200"/>
-              </a:spcAft>
-              <a:defRPr/>
-            </a:pPr>
-            <a:r>
-              <a:rPr lang="en-US" altLang="zh-CN" sz="1600" dirty="0" err="1"/>
-              <a:t>NVMeVirt</a:t>
-            </a:r>
-            <a:r>
-              <a:rPr lang="en-US" altLang="zh-CN" sz="1600" dirty="0"/>
-              <a:t>: A Versatile Software-defined Virtual </a:t>
-            </a:r>
-            <a:r>
-              <a:rPr lang="en-US" altLang="zh-CN" sz="1600" dirty="0" err="1"/>
-              <a:t>NVMe</a:t>
-            </a:r>
-            <a:r>
-              <a:rPr lang="en-US" altLang="zh-CN" sz="1600" dirty="0"/>
-              <a:t> Device</a:t>
-            </a:r>
-            <a:r>
-              <a:rPr lang="zh-CN" altLang="en-US" sz="1600" dirty="0"/>
-              <a:t>，</a:t>
-            </a:r>
-            <a:r>
-              <a:rPr lang="en-US" altLang="zh-CN" sz="1600" dirty="0"/>
-              <a:t>FAST 23</a:t>
-            </a:r>
-            <a:endParaRPr lang="en-US" altLang="zh-CN" sz="1600" dirty="0">
-              <a:hlinkClick r:id="rId5">
-                <a:extLst>
-                  <a:ext uri="{A12FA001-AC4F-418D-AE19-62706E023703}">
-                    <ahyp:hlinkClr xmlns:ahyp="http://schemas.microsoft.com/office/drawing/2018/hyperlinkcolor" val="tx"/>
-                  </a:ext>
-                </a:extLst>
-              </a:hlinkClick>
-            </a:endParaRPr>
-          </a:p>
-          <a:p>
-            <a:pPr marR="0" lvl="0" indent="0" fontAlgn="auto">
-              <a:lnSpc>
-                <a:spcPct val="70000"/>
-              </a:lnSpc>
-              <a:spcBef>
-                <a:spcPts val="0"/>
-              </a:spcBef>
-              <a:spcAft>
-                <a:spcPts val="1200"/>
-              </a:spcAft>
-              <a:buClrTx/>
-              <a:buSzTx/>
-              <a:buFont typeface="Arial" panose="020B0604020202020204" pitchFamily="34" charset="0"/>
-              <a:buNone/>
-              <a:tabLst/>
-              <a:defRPr/>
-            </a:pPr>
-            <a:r>
-              <a:rPr lang="en-US" altLang="zh-CN" sz="1600" dirty="0" err="1">
-                <a:hlinkClick r:id="rId5">
-                  <a:extLst>
-                    <a:ext uri="{A12FA001-AC4F-418D-AE19-62706E023703}">
-                      <ahyp:hlinkClr xmlns:ahyp="http://schemas.microsoft.com/office/drawing/2018/hyperlinkcolor" val="tx"/>
-                    </a:ext>
-                  </a:extLst>
-                </a:hlinkClick>
-              </a:rPr>
-              <a:t>Nvme</a:t>
-            </a:r>
-            <a:r>
-              <a:rPr lang="en-US" altLang="zh-CN" sz="1600" dirty="0">
-                <a:hlinkClick r:id="rId5">
-                  <a:extLst>
-                    <a:ext uri="{A12FA001-AC4F-418D-AE19-62706E023703}">
-                      <ahyp:hlinkClr xmlns:ahyp="http://schemas.microsoft.com/office/drawing/2018/hyperlinkcolor" val="tx"/>
-                    </a:ext>
-                  </a:extLst>
-                </a:hlinkClick>
-              </a:rPr>
-              <a:t>-cli: https://github.com/linux-nvme/nvme-cli</a:t>
-            </a:r>
-            <a:endParaRPr lang="en-US" altLang="zh-CN" sz="1600" dirty="0"/>
-          </a:p>
-          <a:p>
-            <a:pPr marR="0" lvl="0" indent="0" fontAlgn="auto">
-              <a:lnSpc>
-                <a:spcPct val="70000"/>
-              </a:lnSpc>
-              <a:spcBef>
-                <a:spcPts val="0"/>
-              </a:spcBef>
-              <a:spcAft>
-                <a:spcPts val="1200"/>
-              </a:spcAft>
-              <a:buClrTx/>
-              <a:buSzTx/>
-              <a:buFont typeface="Arial" panose="020B0604020202020204" pitchFamily="34" charset="0"/>
-              <a:buNone/>
-              <a:tabLst/>
-              <a:defRPr/>
-            </a:pPr>
-            <a:r>
-              <a:rPr lang="en-US" altLang="zh-CN" sz="1600" dirty="0" err="1"/>
-              <a:t>Libzbd</a:t>
-            </a:r>
-            <a:r>
-              <a:rPr lang="en-US" altLang="zh-CN" sz="1600" dirty="0"/>
-              <a:t>: https://zonedstorage.io/docs/tools/libzbd</a:t>
-            </a:r>
-          </a:p>
-        </p:txBody>
-      </p:sp>
-      <p:sp>
-        <p:nvSpPr>
-          <p:cNvPr id="8" name="文本框 7">
-            <a:extLst>
-              <a:ext uri="{FF2B5EF4-FFF2-40B4-BE49-F238E27FC236}">
-                <a16:creationId xmlns:a16="http://schemas.microsoft.com/office/drawing/2014/main" id="{B6DD51D5-AA31-D2A9-D660-373048C76BF5}"/>
-              </a:ext>
-            </a:extLst>
-          </p:cNvPr>
-          <p:cNvSpPr txBox="1"/>
-          <p:nvPr/>
-        </p:nvSpPr>
-        <p:spPr>
-          <a:xfrm>
-            <a:off x="385590" y="1318324"/>
-            <a:ext cx="10483318" cy="3276923"/>
-          </a:xfrm>
-          <a:prstGeom prst="rect">
-            <a:avLst/>
-          </a:prstGeom>
-          <a:noFill/>
-        </p:spPr>
-        <p:txBody>
-          <a:bodyPr wrap="square">
-            <a:spAutoFit/>
-          </a:bodyPr>
-          <a:lstStyle/>
-          <a:p>
-            <a:pPr indent="-285750">
-              <a:lnSpc>
-                <a:spcPct val="150000"/>
-              </a:lnSpc>
-              <a:buFont typeface="Arial" panose="020B0604020202020204" pitchFamily="34" charset="0"/>
-              <a:buChar char="•"/>
-            </a:pPr>
-            <a:r>
-              <a:rPr lang="en-US" altLang="zh-CN" sz="2000" b="1" dirty="0" err="1">
-                <a:solidFill>
-                  <a:srgbClr val="0D0D0D"/>
-                </a:solidFill>
-                <a:latin typeface="Söhne"/>
-              </a:rPr>
-              <a:t>NVMEvirt</a:t>
-            </a:r>
-            <a:r>
-              <a:rPr lang="en-US" altLang="zh-CN" sz="2000" b="1" dirty="0">
-                <a:solidFill>
-                  <a:srgbClr val="0D0D0D"/>
-                </a:solidFill>
-                <a:latin typeface="Söhne"/>
-              </a:rPr>
-              <a:t>: </a:t>
-            </a:r>
-            <a:r>
-              <a:rPr lang="zh-CN" altLang="en-US" sz="2000" dirty="0">
-                <a:solidFill>
-                  <a:srgbClr val="0D0D0D"/>
-                </a:solidFill>
-                <a:latin typeface="Söhne"/>
-              </a:rPr>
-              <a:t>最新的</a:t>
-            </a:r>
-            <a:r>
-              <a:rPr lang="en-US" altLang="zh-CN" sz="2000" dirty="0" err="1">
-                <a:solidFill>
-                  <a:srgbClr val="0D0D0D"/>
-                </a:solidFill>
-                <a:latin typeface="Söhne"/>
-              </a:rPr>
-              <a:t>NVMe</a:t>
-            </a:r>
-            <a:r>
-              <a:rPr lang="zh-CN" altLang="en-US" sz="2000" dirty="0">
-                <a:solidFill>
-                  <a:srgbClr val="0D0D0D"/>
-                </a:solidFill>
-                <a:latin typeface="Söhne"/>
-              </a:rPr>
-              <a:t>模拟器，支持</a:t>
-            </a:r>
-            <a:r>
-              <a:rPr lang="en-US" altLang="zh-CN" sz="2000" dirty="0">
-                <a:solidFill>
-                  <a:srgbClr val="0D0D0D"/>
-                </a:solidFill>
-                <a:latin typeface="Söhne"/>
-              </a:rPr>
-              <a:t>ZNS</a:t>
-            </a:r>
-            <a:r>
-              <a:rPr lang="zh-CN" altLang="en-US" sz="2000" dirty="0">
-                <a:solidFill>
-                  <a:srgbClr val="0D0D0D"/>
-                </a:solidFill>
-                <a:latin typeface="Söhne"/>
-              </a:rPr>
-              <a:t>，用于构建</a:t>
-            </a:r>
-            <a:r>
-              <a:rPr lang="en-US" altLang="zh-CN" sz="2000" dirty="0">
-                <a:solidFill>
-                  <a:srgbClr val="0D0D0D"/>
-                </a:solidFill>
-                <a:latin typeface="Söhne"/>
-              </a:rPr>
-              <a:t>ZNS</a:t>
-            </a:r>
-            <a:r>
-              <a:rPr lang="zh-CN" altLang="en-US" sz="2000" dirty="0">
-                <a:solidFill>
-                  <a:srgbClr val="0D0D0D"/>
-                </a:solidFill>
-                <a:latin typeface="Söhne"/>
-              </a:rPr>
-              <a:t>模拟环境，该模拟器通过内核模块模拟</a:t>
-            </a:r>
-            <a:r>
-              <a:rPr lang="en-US" altLang="zh-CN" sz="2000" dirty="0" err="1">
-                <a:solidFill>
-                  <a:srgbClr val="0D0D0D"/>
-                </a:solidFill>
-                <a:latin typeface="Söhne"/>
-              </a:rPr>
-              <a:t>NVMe</a:t>
-            </a:r>
-            <a:r>
-              <a:rPr lang="zh-CN" altLang="en-US" sz="2000" dirty="0">
-                <a:solidFill>
-                  <a:srgbClr val="0D0D0D"/>
-                </a:solidFill>
-                <a:latin typeface="Söhne"/>
-              </a:rPr>
-              <a:t>设备，提供类似真实设备的性能表现。</a:t>
-            </a:r>
-          </a:p>
-          <a:p>
-            <a:pPr indent="-285750">
-              <a:lnSpc>
-                <a:spcPct val="150000"/>
-              </a:lnSpc>
-              <a:buFont typeface="Arial" panose="020B0604020202020204" pitchFamily="34" charset="0"/>
-              <a:buChar char="•"/>
-            </a:pPr>
-            <a:r>
-              <a:rPr lang="en-US" altLang="zh-CN" sz="2000" b="1" dirty="0" err="1">
-                <a:solidFill>
-                  <a:srgbClr val="0D0D0D"/>
-                </a:solidFill>
-                <a:latin typeface="Söhne"/>
-              </a:rPr>
-              <a:t>ZenFS</a:t>
-            </a:r>
-            <a:r>
-              <a:rPr lang="en-US" altLang="zh-CN" sz="2000" b="1" dirty="0">
-                <a:solidFill>
-                  <a:srgbClr val="0D0D0D"/>
-                </a:solidFill>
-                <a:latin typeface="Söhne"/>
-              </a:rPr>
-              <a:t>: </a:t>
-            </a:r>
-            <a:r>
-              <a:rPr lang="zh-CN" altLang="en-US" sz="2000" dirty="0">
-                <a:solidFill>
-                  <a:srgbClr val="0D0D0D"/>
-                </a:solidFill>
-                <a:latin typeface="Söhne"/>
-              </a:rPr>
-              <a:t>为</a:t>
-            </a:r>
-            <a:r>
-              <a:rPr lang="en-US" altLang="zh-CN" sz="2000" dirty="0" err="1">
-                <a:solidFill>
-                  <a:srgbClr val="0D0D0D"/>
-                </a:solidFill>
-                <a:latin typeface="Söhne"/>
-              </a:rPr>
-              <a:t>RocksDB</a:t>
-            </a:r>
-            <a:r>
-              <a:rPr lang="zh-CN" altLang="en-US" sz="2000" dirty="0">
-                <a:solidFill>
-                  <a:srgbClr val="0D0D0D"/>
-                </a:solidFill>
-                <a:latin typeface="Söhne"/>
-              </a:rPr>
-              <a:t>提供的文件系统插件，支持</a:t>
-            </a:r>
-            <a:r>
-              <a:rPr lang="en-US" altLang="zh-CN" sz="2000" dirty="0">
-                <a:solidFill>
-                  <a:srgbClr val="0D0D0D"/>
-                </a:solidFill>
-                <a:latin typeface="Söhne"/>
-              </a:rPr>
-              <a:t>ZNS SSD</a:t>
-            </a:r>
-            <a:r>
-              <a:rPr lang="zh-CN" altLang="en-US" sz="2000" dirty="0">
-                <a:solidFill>
-                  <a:srgbClr val="0D0D0D"/>
-                </a:solidFill>
-                <a:latin typeface="Söhne"/>
-              </a:rPr>
-              <a:t>，显著减少系统写放大。</a:t>
-            </a:r>
-          </a:p>
-          <a:p>
-            <a:pPr indent="-285750">
-              <a:lnSpc>
-                <a:spcPct val="150000"/>
-              </a:lnSpc>
-              <a:buFont typeface="Arial" panose="020B0604020202020204" pitchFamily="34" charset="0"/>
-              <a:buChar char="•"/>
-            </a:pPr>
-            <a:r>
-              <a:rPr lang="en-US" altLang="zh-CN" sz="2000" b="1" dirty="0">
-                <a:solidFill>
-                  <a:srgbClr val="0D0D0D"/>
-                </a:solidFill>
-                <a:latin typeface="Söhne"/>
-              </a:rPr>
-              <a:t>Linux</a:t>
-            </a:r>
-            <a:r>
-              <a:rPr lang="zh-CN" altLang="en-US" sz="2000" b="1" dirty="0">
-                <a:solidFill>
-                  <a:srgbClr val="0D0D0D"/>
-                </a:solidFill>
-                <a:latin typeface="Söhne"/>
-              </a:rPr>
-              <a:t>系统工具</a:t>
-            </a:r>
-            <a:r>
-              <a:rPr lang="en-US" altLang="zh-CN" sz="2000" b="1" dirty="0">
-                <a:solidFill>
-                  <a:srgbClr val="0D0D0D"/>
-                </a:solidFill>
-                <a:latin typeface="Söhne"/>
-              </a:rPr>
-              <a:t>: </a:t>
-            </a:r>
-            <a:r>
-              <a:rPr lang="zh-CN" altLang="en-US" sz="2000" dirty="0">
-                <a:solidFill>
-                  <a:srgbClr val="0D0D0D"/>
-                </a:solidFill>
-                <a:latin typeface="Söhne"/>
-              </a:rPr>
-              <a:t>经前期测试验证已支持</a:t>
-            </a:r>
-            <a:r>
-              <a:rPr lang="en-US" altLang="zh-CN" sz="2000" dirty="0">
-                <a:solidFill>
-                  <a:srgbClr val="0D0D0D"/>
-                </a:solidFill>
-                <a:latin typeface="Söhne"/>
-              </a:rPr>
-              <a:t>ZNS</a:t>
-            </a:r>
-            <a:r>
-              <a:rPr lang="zh-CN" altLang="en-US" sz="2000" dirty="0">
-                <a:solidFill>
-                  <a:srgbClr val="0D0D0D"/>
-                </a:solidFill>
-                <a:latin typeface="Söhne"/>
-              </a:rPr>
-              <a:t>的工具：包括</a:t>
-            </a:r>
-            <a:r>
-              <a:rPr lang="en-US" altLang="zh-CN" sz="2000" dirty="0" err="1">
-                <a:solidFill>
-                  <a:srgbClr val="0D0D0D"/>
-                </a:solidFill>
-                <a:latin typeface="Söhne"/>
-              </a:rPr>
-              <a:t>fio</a:t>
-            </a:r>
-            <a:r>
-              <a:rPr lang="zh-CN" altLang="en-US" sz="2000" dirty="0">
-                <a:solidFill>
-                  <a:srgbClr val="0D0D0D"/>
-                </a:solidFill>
-                <a:latin typeface="Söhne"/>
-              </a:rPr>
-              <a:t>、</a:t>
-            </a:r>
-            <a:r>
-              <a:rPr lang="en-US" altLang="zh-CN" sz="2000" dirty="0" err="1">
-                <a:solidFill>
-                  <a:srgbClr val="0D0D0D"/>
-                </a:solidFill>
-                <a:latin typeface="Söhne"/>
-              </a:rPr>
-              <a:t>nvme</a:t>
-            </a:r>
-            <a:r>
-              <a:rPr lang="en-US" altLang="zh-CN" sz="2000" dirty="0">
-                <a:solidFill>
-                  <a:srgbClr val="0D0D0D"/>
-                </a:solidFill>
-                <a:latin typeface="Söhne"/>
-              </a:rPr>
-              <a:t>-cli</a:t>
-            </a:r>
-            <a:r>
-              <a:rPr lang="zh-CN" altLang="en-US" sz="2000" dirty="0">
-                <a:solidFill>
-                  <a:srgbClr val="0D0D0D"/>
-                </a:solidFill>
-                <a:latin typeface="Söhne"/>
-              </a:rPr>
-              <a:t>等，用于性能测试和管理</a:t>
-            </a:r>
-            <a:r>
-              <a:rPr lang="en-US" altLang="zh-CN" sz="2000" dirty="0">
-                <a:solidFill>
-                  <a:srgbClr val="0D0D0D"/>
-                </a:solidFill>
-                <a:latin typeface="Söhne"/>
-              </a:rPr>
-              <a:t>ZNS SSD</a:t>
-            </a:r>
-            <a:r>
-              <a:rPr lang="zh-CN" altLang="en-US" sz="2000" dirty="0">
-                <a:solidFill>
-                  <a:srgbClr val="0D0D0D"/>
-                </a:solidFill>
-                <a:latin typeface="Söhne"/>
-              </a:rPr>
-              <a:t>。</a:t>
-            </a:r>
-          </a:p>
-          <a:p>
-            <a:pPr indent="-285750">
-              <a:lnSpc>
-                <a:spcPct val="150000"/>
-              </a:lnSpc>
-              <a:buFont typeface="Arial" panose="020B0604020202020204" pitchFamily="34" charset="0"/>
-              <a:buChar char="•"/>
-            </a:pPr>
-            <a:r>
-              <a:rPr lang="en-US" altLang="zh-CN" sz="2000" b="1" dirty="0" err="1">
-                <a:solidFill>
-                  <a:srgbClr val="0D0D0D"/>
-                </a:solidFill>
-                <a:latin typeface="Söhne"/>
-              </a:rPr>
-              <a:t>zbd</a:t>
-            </a:r>
-            <a:r>
-              <a:rPr lang="en-US" altLang="zh-CN" sz="2000" b="1" dirty="0">
-                <a:solidFill>
-                  <a:srgbClr val="0D0D0D"/>
-                </a:solidFill>
-                <a:latin typeface="Söhne"/>
-              </a:rPr>
-              <a:t>-tools: </a:t>
-            </a:r>
-            <a:r>
-              <a:rPr lang="zh-CN" altLang="en-US" sz="2000" dirty="0">
-                <a:solidFill>
-                  <a:srgbClr val="0D0D0D"/>
-                </a:solidFill>
-                <a:latin typeface="Söhne"/>
-              </a:rPr>
-              <a:t>包括</a:t>
-            </a:r>
-            <a:r>
-              <a:rPr lang="en-US" altLang="zh-CN" sz="2000" dirty="0" err="1">
-                <a:solidFill>
-                  <a:srgbClr val="0D0D0D"/>
-                </a:solidFill>
-                <a:latin typeface="Söhne"/>
-              </a:rPr>
-              <a:t>gzbd</a:t>
-            </a:r>
-            <a:r>
-              <a:rPr lang="zh-CN" altLang="en-US" sz="2000" dirty="0">
-                <a:solidFill>
-                  <a:srgbClr val="0D0D0D"/>
-                </a:solidFill>
-                <a:latin typeface="Söhne"/>
-              </a:rPr>
-              <a:t>、</a:t>
-            </a:r>
-            <a:r>
-              <a:rPr lang="en-US" altLang="zh-CN" sz="2000" dirty="0" err="1">
-                <a:solidFill>
-                  <a:srgbClr val="0D0D0D"/>
-                </a:solidFill>
-                <a:latin typeface="Söhne"/>
-              </a:rPr>
-              <a:t>libzbd</a:t>
-            </a:r>
-            <a:r>
-              <a:rPr lang="zh-CN" altLang="en-US" sz="2000" dirty="0">
-                <a:solidFill>
-                  <a:srgbClr val="0D0D0D"/>
-                </a:solidFill>
-                <a:latin typeface="Söhne"/>
-              </a:rPr>
-              <a:t>。</a:t>
-            </a:r>
-            <a:r>
-              <a:rPr lang="en-US" altLang="zh-CN" sz="2000" dirty="0" err="1">
-                <a:solidFill>
-                  <a:srgbClr val="0D0D0D"/>
-                </a:solidFill>
-                <a:latin typeface="Söhne"/>
-              </a:rPr>
-              <a:t>Gzbd</a:t>
-            </a:r>
-            <a:r>
-              <a:rPr lang="zh-CN" altLang="en-US" sz="2000" dirty="0">
-                <a:solidFill>
-                  <a:srgbClr val="0D0D0D"/>
-                </a:solidFill>
-                <a:latin typeface="Söhne"/>
-              </a:rPr>
-              <a:t>能提供可视化，</a:t>
-            </a:r>
-            <a:r>
-              <a:rPr lang="en-US" altLang="zh-CN" sz="2000" dirty="0" err="1">
-                <a:solidFill>
-                  <a:srgbClr val="0D0D0D"/>
-                </a:solidFill>
-                <a:latin typeface="Söhne"/>
-              </a:rPr>
-              <a:t>libzbd</a:t>
-            </a:r>
-            <a:r>
-              <a:rPr lang="zh-CN" altLang="en-US" sz="2000" dirty="0">
-                <a:solidFill>
-                  <a:srgbClr val="0D0D0D"/>
-                </a:solidFill>
-                <a:latin typeface="Söhne"/>
-              </a:rPr>
-              <a:t>是最新的</a:t>
-            </a:r>
-            <a:r>
-              <a:rPr lang="en-US" altLang="zh-CN" sz="2000" dirty="0">
-                <a:solidFill>
-                  <a:srgbClr val="0D0D0D"/>
-                </a:solidFill>
-                <a:latin typeface="Söhne"/>
-              </a:rPr>
-              <a:t>zone</a:t>
-            </a:r>
-            <a:r>
-              <a:rPr lang="zh-CN" altLang="en-US" sz="2000" dirty="0">
-                <a:solidFill>
-                  <a:srgbClr val="0D0D0D"/>
-                </a:solidFill>
-                <a:latin typeface="Söhne"/>
-              </a:rPr>
-              <a:t>语义用户库，支持</a:t>
-            </a:r>
-            <a:r>
-              <a:rPr lang="en-US" altLang="zh-CN" sz="2000" dirty="0">
-                <a:solidFill>
-                  <a:srgbClr val="0D0D0D"/>
-                </a:solidFill>
-                <a:latin typeface="Söhne"/>
-              </a:rPr>
-              <a:t>Zone</a:t>
-            </a:r>
-            <a:r>
-              <a:rPr lang="zh-CN" altLang="en-US" sz="2000" dirty="0">
-                <a:solidFill>
-                  <a:srgbClr val="0D0D0D"/>
-                </a:solidFill>
-                <a:latin typeface="Söhne"/>
-              </a:rPr>
-              <a:t>逻辑设备的管理和操作。</a:t>
-            </a:r>
-          </a:p>
-        </p:txBody>
-      </p:sp>
-      <p:sp>
-        <p:nvSpPr>
-          <p:cNvPr id="2" name="文本框 1">
-            <a:extLst>
-              <a:ext uri="{FF2B5EF4-FFF2-40B4-BE49-F238E27FC236}">
-                <a16:creationId xmlns:a16="http://schemas.microsoft.com/office/drawing/2014/main" id="{719372B1-5714-D9A0-9C16-7166C8205F4C}"/>
-              </a:ext>
-            </a:extLst>
-          </p:cNvPr>
-          <p:cNvSpPr txBox="1"/>
-          <p:nvPr/>
-        </p:nvSpPr>
-        <p:spPr>
-          <a:xfrm>
-            <a:off x="385590" y="310242"/>
+            <a:off x="281680" y="299000"/>
             <a:ext cx="6798981" cy="535531"/>
           </a:xfrm>
           <a:prstGeom prst="rect">
@@ -13181,7 +16253,7 @@
               <a:defRPr/>
             </a:pPr>
             <a:r>
-              <a:rPr lang="zh-CN" altLang="en-US" sz="3200" b="1" dirty="0">
+              <a:rPr lang="en-US" altLang="zh-CN" sz="3200" b="1" dirty="0">
                 <a:solidFill>
                   <a:srgbClr val="4747BA"/>
                 </a:solidFill>
@@ -13189,15 +16261,34 @@
                 <a:ea typeface="腾讯体 W3" panose="020C04030202040F0204" pitchFamily="34" charset="-122"/>
                 <a:cs typeface="Times" panose="02020603050405020304" pitchFamily="18" charset="0"/>
               </a:rPr>
-              <a:t>实验</a:t>
-            </a:r>
+              <a:t> </a:t>
+            </a:r>
+            <a:r>
+              <a:rPr lang="zh-CN" altLang="en-US" sz="3200" b="1" dirty="0">
+                <a:solidFill>
+                  <a:srgbClr val="4747BA"/>
+                </a:solidFill>
+                <a:latin typeface="Constantia" panose="02030602050306030303" pitchFamily="18" charset="0"/>
+                <a:ea typeface="腾讯体 W3" panose="020C04030202040F0204" pitchFamily="34" charset="-122"/>
+                <a:cs typeface="Times" panose="02020603050405020304" pitchFamily="18" charset="0"/>
+              </a:rPr>
+              <a:t>实验平台</a:t>
+            </a:r>
+            <a:endParaRPr lang="zh-CN" altLang="en-US" sz="3600" b="1" dirty="0">
+              <a:solidFill>
+                <a:srgbClr val="4747BA"/>
+              </a:solidFill>
+              <a:latin typeface="Constantia" panose="02030602050306030303" pitchFamily="18" charset="0"/>
+              <a:ea typeface="腾讯体 W3" panose="020C04030202040F0204" pitchFamily="34" charset="-122"/>
+              <a:cs typeface="Times" panose="02020603050405020304" pitchFamily="18" charset="0"/>
+            </a:endParaRPr>
           </a:p>
         </p:txBody>
       </p:sp>
     </p:spTree>
     <p:extLst>
       <p:ext uri="{BB962C8B-B14F-4D97-AF65-F5344CB8AC3E}">
-        <p14:creationId xmlns:p14="http://schemas.microsoft.com/office/powerpoint/2010/main" val="3560457149"/>
+        <p14:creationId xmlns:p14="http://schemas.microsoft.com/office/powerpoint/2010/main" val="3562333484"/>
       </p:ext>
     </p:extLst>
   </p:cSld>
@@ -13546,51 +16637,6 @@
           </a:fontRef>
         </p:style>
       </p:cxnSp>
-      <p:sp>
-        <p:nvSpPr>
-          <p:cNvPr id="19" name="文本框 18"/>
-          <p:cNvSpPr txBox="1"/>
-          <p:nvPr/>
-        </p:nvSpPr>
-        <p:spPr>
-          <a:xfrm>
-            <a:off x="415183" y="166469"/>
-            <a:ext cx="6798981" cy="645160"/>
-          </a:xfrm>
-          <a:prstGeom prst="rect">
-            <a:avLst/>
-          </a:prstGeom>
-          <a:noFill/>
-        </p:spPr>
-        <p:txBody>
-          <a:bodyPr wrap="square" rtlCol="0">
-            <a:spAutoFit/>
-          </a:bodyPr>
-          <a:lstStyle/>
-          <a:p>
-            <a:pPr>
-              <a:lnSpc>
-                <a:spcPct val="90000"/>
-              </a:lnSpc>
-              <a:spcBef>
-                <a:spcPts val="1000"/>
-              </a:spcBef>
-              <a:defRPr/>
-            </a:pPr>
-            <a:r>
-              <a:rPr lang="zh-CN" altLang="en-US" sz="4000" b="1" dirty="0">
-                <a:solidFill>
-                  <a:srgbClr val="4747BA"/>
-                </a:solidFill>
-                <a:latin typeface="Constantia" panose="02030602050306030303" pitchFamily="18" charset="0"/>
-                <a:ea typeface="腾讯体 W3" panose="020C04030202040F0204" pitchFamily="34" charset="-122"/>
-                <a:cs typeface="Times" panose="02020603050405020304" pitchFamily="18" charset="0"/>
-              </a:rPr>
-              <a:t>实验平台</a:t>
-            </a:r>
-          </a:p>
-        </p:txBody>
-      </p:sp>
       <p:pic>
         <p:nvPicPr>
           <p:cNvPr id="23" name="图片 22"/>
@@ -13700,7 +16746,7 @@
         </p:nvSpPr>
         <p:spPr>
           <a:xfrm>
-            <a:off x="440055" y="1088390"/>
+            <a:off x="474408" y="1049607"/>
             <a:ext cx="6951980" cy="460375"/>
           </a:xfrm>
           <a:prstGeom prst="rect">
@@ -13715,24 +16761,34 @@
           <a:lstStyle/>
           <a:p>
             <a:r>
-              <a:rPr lang="en-US" altLang="zh-CN" sz="2400" dirty="0">
+              <a:rPr lang="zh-CN" altLang="en-US" sz="2400" dirty="0">
                 <a:solidFill>
                   <a:srgbClr val="4747BA"/>
                 </a:solidFill>
                 <a:ea typeface="+mn-lt"/>
                 <a:cs typeface="Times New Roman" panose="02020603050405020304" charset="0"/>
               </a:rPr>
-              <a:t>ZNS</a:t>
-            </a:r>
-            <a:r>
-              <a:rPr lang="zh-CN" altLang="en-US" sz="2400" dirty="0">
+              <a:t>模拟</a:t>
+            </a:r>
+            <a:r>
+              <a:rPr lang="en-US" altLang="zh-CN" sz="2400" dirty="0">
                 <a:solidFill>
                   <a:srgbClr val="4747BA"/>
                 </a:solidFill>
                 <a:ea typeface="+mn-lt"/>
                 <a:cs typeface="Times New Roman" panose="02020603050405020304" charset="0"/>
               </a:rPr>
-              <a:t>设备</a:t>
+              <a:t>vs</a:t>
+            </a:r>
+            <a:r>
+              <a:rPr lang="zh-CN" altLang="en-US" sz="2400" dirty="0">
+                <a:solidFill>
+                  <a:srgbClr val="4747BA"/>
+                </a:solidFill>
+                <a:ea typeface="+mn-lt"/>
+                <a:cs typeface="Times New Roman" panose="02020603050405020304" charset="0"/>
+              </a:rPr>
+              <a:t>物理</a:t>
             </a:r>
             <a:endParaRPr lang="en-US" altLang="zh-CN" sz="2400" dirty="0">
               <a:solidFill>
@@ -13746,156 +16802,10 @@
       </p:sp>
       <p:sp>
         <p:nvSpPr>
-          <p:cNvPr id="5" name="文本框 4"/>
-          <p:cNvSpPr txBox="1"/>
-          <p:nvPr/>
-        </p:nvSpPr>
-        <p:spPr>
-          <a:xfrm>
-            <a:off x="385590" y="1576511"/>
-            <a:ext cx="6696883" cy="2461508"/>
-          </a:xfrm>
-          <a:prstGeom prst="rect">
-            <a:avLst/>
-          </a:prstGeom>
-          <a:noFill/>
-        </p:spPr>
-        <p:txBody>
-          <a:bodyPr wrap="square" rtlCol="0" anchor="t">
-            <a:spAutoFit/>
-          </a:bodyPr>
-          <a:lstStyle/>
-          <a:p>
-            <a:pPr marL="342900" indent="-342900">
-              <a:lnSpc>
-                <a:spcPct val="130000"/>
-              </a:lnSpc>
-              <a:buFont typeface="Wingdings" panose="05000000000000000000" charset="0"/>
-              <a:buChar char="q"/>
-            </a:pPr>
-            <a:r>
-              <a:rPr lang="en-US" altLang="zh-CN" sz="2000" dirty="0">
-                <a:sym typeface="+mn-ea"/>
-              </a:rPr>
-              <a:t>ZNS</a:t>
-            </a:r>
-            <a:r>
-              <a:rPr lang="zh-CN" altLang="en-US" sz="2000" dirty="0">
-                <a:sym typeface="+mn-ea"/>
-              </a:rPr>
-              <a:t>采用</a:t>
-            </a:r>
-            <a:r>
-              <a:rPr lang="en-US" altLang="zh-CN" sz="2000" dirty="0">
-                <a:sym typeface="+mn-ea"/>
-              </a:rPr>
-              <a:t>U.2</a:t>
-            </a:r>
-            <a:r>
-              <a:rPr lang="zh-CN" altLang="en-US" sz="2000" dirty="0">
-                <a:sym typeface="+mn-ea"/>
-              </a:rPr>
-              <a:t>接口，如右图</a:t>
-            </a:r>
-            <a:r>
-              <a:rPr lang="en-US" altLang="zh-CN" sz="2000" dirty="0">
-                <a:sym typeface="+mn-ea"/>
-              </a:rPr>
-              <a:t> </a:t>
-            </a:r>
-          </a:p>
-          <a:p>
-            <a:pPr marL="342900" indent="-342900">
-              <a:lnSpc>
-                <a:spcPct val="130000"/>
-              </a:lnSpc>
-              <a:buFont typeface="Wingdings" panose="05000000000000000000" charset="0"/>
-              <a:buChar char="q"/>
-            </a:pPr>
-            <a:r>
-              <a:rPr lang="zh-CN" altLang="en-US" sz="2000" dirty="0">
-                <a:sym typeface="+mn-ea"/>
-              </a:rPr>
-              <a:t>另外，初步测试了</a:t>
-            </a:r>
-            <a:r>
-              <a:rPr lang="en-US" altLang="zh-CN" sz="2000" dirty="0" err="1">
-                <a:sym typeface="+mn-ea"/>
-              </a:rPr>
-              <a:t>RocksDB</a:t>
-            </a:r>
-            <a:r>
-              <a:rPr lang="en-US" altLang="zh-CN" sz="2000" dirty="0">
-                <a:sym typeface="+mn-ea"/>
-              </a:rPr>
-              <a:t> + </a:t>
-            </a:r>
-            <a:r>
-              <a:rPr lang="en-US" altLang="zh-CN" sz="2000" dirty="0" err="1">
-                <a:sym typeface="+mn-ea"/>
-              </a:rPr>
-              <a:t>ZenFS</a:t>
-            </a:r>
-            <a:r>
-              <a:rPr lang="zh-CN" altLang="en-US" sz="2000" dirty="0">
-                <a:sym typeface="+mn-ea"/>
-              </a:rPr>
-              <a:t>的表现，与之前</a:t>
-            </a:r>
-            <a:r>
-              <a:rPr lang="en-US" altLang="zh-CN" sz="2000" dirty="0" err="1">
-                <a:sym typeface="+mn-ea"/>
-              </a:rPr>
-              <a:t>NVMevirt</a:t>
-            </a:r>
-            <a:r>
-              <a:rPr lang="zh-CN" altLang="en-US" sz="2000" dirty="0">
-                <a:sym typeface="+mn-ea"/>
-              </a:rPr>
-              <a:t>模拟结果相比，模拟器的延迟过低。我认为原因在于它是内核模块实现，可能只体现了主机</a:t>
-            </a:r>
-            <a:r>
-              <a:rPr lang="en-US" altLang="zh-CN" sz="2000" dirty="0">
-                <a:sym typeface="+mn-ea"/>
-              </a:rPr>
-              <a:t>l/O</a:t>
-            </a:r>
-            <a:r>
-              <a:rPr lang="zh-CN" altLang="en-US" sz="2000" dirty="0">
-                <a:sym typeface="+mn-ea"/>
-              </a:rPr>
-              <a:t>栈的延迟。</a:t>
-            </a:r>
-            <a:endParaRPr lang="en-US" altLang="zh-CN" sz="2000" dirty="0">
-              <a:sym typeface="+mn-ea"/>
-            </a:endParaRPr>
-          </a:p>
-          <a:p>
-            <a:pPr marL="342900" indent="-342900">
-              <a:lnSpc>
-                <a:spcPct val="130000"/>
-              </a:lnSpc>
-              <a:buFont typeface="Wingdings" panose="05000000000000000000" charset="0"/>
-              <a:buChar char="q"/>
-            </a:pPr>
-            <a:r>
-              <a:rPr lang="zh-CN" altLang="en-US" sz="2000" dirty="0">
-                <a:sym typeface="+mn-ea"/>
-              </a:rPr>
-              <a:t>连接到服务器后，查看块设备，如右下图所示</a:t>
-            </a:r>
-            <a:endParaRPr lang="en-US" altLang="zh-CN" sz="2000" dirty="0">
-              <a:sym typeface="+mn-ea"/>
-            </a:endParaRPr>
-          </a:p>
-        </p:txBody>
-      </p:sp>
-      <p:sp>
-        <p:nvSpPr>
-          <p:cNvPr id="7" name="Fußzeilenplatzhalter 4">
+          <p:cNvPr id="10" name="Fußzeilenplatzhalter 4">
             <a:extLst>
               <a:ext uri="{FF2B5EF4-FFF2-40B4-BE49-F238E27FC236}">
-                <a16:creationId xmlns:a16="http://schemas.microsoft.com/office/drawing/2014/main" id="{293457A3-1637-3737-9B53-1CF17294975F}"/>
+                <a16:creationId xmlns:a16="http://schemas.microsoft.com/office/drawing/2014/main" id="{41291BC8-BAF3-496D-6C37-8B6EEABE8583}"/>
               </a:ext>
             </a:extLst>
           </p:cNvPr>
@@ -13943,12 +16853,102 @@
           </a:p>
         </p:txBody>
       </p:sp>
+      <p:sp>
+        <p:nvSpPr>
+          <p:cNvPr id="21" name="文本框 20">
+            <a:extLst>
+              <a:ext uri="{FF2B5EF4-FFF2-40B4-BE49-F238E27FC236}">
+                <a16:creationId xmlns:a16="http://schemas.microsoft.com/office/drawing/2014/main" id="{B73F8172-AEE1-4884-93B9-03D244E3AE0F}"/>
+              </a:ext>
+            </a:extLst>
+          </p:cNvPr>
+          <p:cNvSpPr txBox="1"/>
+          <p:nvPr/>
+        </p:nvSpPr>
+        <p:spPr>
+          <a:xfrm>
+            <a:off x="474408" y="2902591"/>
+            <a:ext cx="5012858" cy="307777"/>
+          </a:xfrm>
+          <a:prstGeom prst="rect">
+            <a:avLst/>
+          </a:prstGeom>
+          <a:noFill/>
+        </p:spPr>
+        <p:txBody>
+          <a:bodyPr wrap="square">
+            <a:spAutoFit/>
+          </a:bodyPr>
+          <a:lstStyle/>
+          <a:p>
+            <a:r>
+              <a:rPr lang="zh-CN" altLang="en-US" sz="1400" dirty="0"/>
+              <a:t>写入负载，</a:t>
+            </a:r>
+            <a:r>
+              <a:rPr lang="en-US" altLang="zh-CN" sz="1400" dirty="0" err="1"/>
+              <a:t>Blocksize</a:t>
+            </a:r>
+            <a:r>
+              <a:rPr lang="en-US" altLang="zh-CN" sz="1400" dirty="0"/>
+              <a:t> = 64k</a:t>
+            </a:r>
+            <a:r>
+              <a:rPr lang="zh-CN" altLang="en-US" sz="1400" dirty="0"/>
+              <a:t>，</a:t>
+            </a:r>
+            <a:r>
+              <a:rPr lang="en-US" altLang="zh-CN" sz="1400" dirty="0" err="1"/>
+              <a:t>Num_threads</a:t>
+            </a:r>
+            <a:r>
+              <a:rPr lang="en-US" altLang="zh-CN" sz="1400" dirty="0"/>
+              <a:t> = 16</a:t>
+            </a:r>
+            <a:endParaRPr lang="zh-CN" altLang="en-US" sz="1400" dirty="0"/>
+          </a:p>
+        </p:txBody>
+      </p:sp>
       <p:pic>
         <p:nvPicPr>
-          <p:cNvPr id="8" name="图片 7">
+          <p:cNvPr id="22" name="图形 49">
             <a:extLst>
               <a:ext uri="{FF2B5EF4-FFF2-40B4-BE49-F238E27FC236}">
-                <a16:creationId xmlns:a16="http://schemas.microsoft.com/office/drawing/2014/main" id="{E6F57F7C-C43A-4F29-54A3-9E2A41811FC0}"/>
+                <a16:creationId xmlns:a16="http://schemas.microsoft.com/office/drawing/2014/main" id="{0BF4E7E1-C905-40AF-941A-1D77A1B13FDF}"/>
+              </a:ext>
+            </a:extLst>
+          </p:cNvPr>
+          <p:cNvPicPr/>
+          <p:nvPr/>
+        </p:nvPicPr>
+        <p:blipFill>
+          <a:blip r:embed="rId5">
+            <a:extLst>
+              <a:ext uri="{96DAC541-7B7A-43D3-8B79-37D633B846F1}">
+                <asvg:svgBlip xmlns:asvg="http://schemas.microsoft.com/office/drawing/2016/SVG/main" r:embed="rId6"/>
+              </a:ext>
+            </a:extLst>
+          </a:blip>
+          <a:stretch>
+            <a:fillRect/>
+          </a:stretch>
+        </p:blipFill>
+        <p:spPr>
+          <a:xfrm>
+            <a:off x="5881256" y="1329393"/>
+            <a:ext cx="5798024" cy="3364429"/>
+          </a:xfrm>
+          <a:prstGeom prst="rect">
+            <a:avLst/>
+          </a:prstGeom>
+        </p:spPr>
+      </p:pic>
+      <p:pic>
+        <p:nvPicPr>
+          <p:cNvPr id="7" name="图片 6">
+            <a:extLst>
+              <a:ext uri="{FF2B5EF4-FFF2-40B4-BE49-F238E27FC236}">
+                <a16:creationId xmlns:a16="http://schemas.microsoft.com/office/drawing/2014/main" id="{C1F83BFF-98FD-49EC-B37C-8D7FCD2C0681}"/>
               </a:ext>
             </a:extLst>
           </p:cNvPr>
@@ -13958,103 +16958,350 @@
           <p:nvPr/>
         </p:nvPicPr>
         <p:blipFill>
-          <a:blip r:embed="rId5" cstate="print">
-            <a:extLst>
-              <a:ext uri="{28A0092B-C50C-407E-A947-70E740481C1C}">
-                <a14:useLocalDpi xmlns:a14="http://schemas.microsoft.com/office/drawing/2010/main" val="0"/>
-              </a:ext>
-            </a:extLst>
-          </a:blip>
+          <a:blip r:embed="rId7"/>
           <a:stretch>
             <a:fillRect/>
           </a:stretch>
         </p:blipFill>
         <p:spPr>
           <a:xfrm>
-            <a:off x="9985299" y="1248081"/>
-            <a:ext cx="1598233" cy="2243013"/>
+            <a:off x="373856" y="2037569"/>
+            <a:ext cx="4570873" cy="816922"/>
           </a:xfrm>
           <a:prstGeom prst="rect">
             <a:avLst/>
           </a:prstGeom>
         </p:spPr>
       </p:pic>
-      <p:pic>
-        <p:nvPicPr>
-          <p:cNvPr id="11" name="图片 10">
+      <p:sp>
+        <p:nvSpPr>
+          <p:cNvPr id="25" name="文本框 24">
             <a:extLst>
               <a:ext uri="{FF2B5EF4-FFF2-40B4-BE49-F238E27FC236}">
-                <a16:creationId xmlns:a16="http://schemas.microsoft.com/office/drawing/2014/main" id="{B6DE7B69-1B2D-65EE-4842-C041A2060456}"/>
+                <a16:creationId xmlns:a16="http://schemas.microsoft.com/office/drawing/2014/main" id="{801AC954-86E6-4105-ACEF-EC33F1A1AC57}"/>
               </a:ext>
             </a:extLst>
           </p:cNvPr>
-          <p:cNvPicPr>
-            <a:picLocks noChangeAspect="1"/>
-          </p:cNvPicPr>
+          <p:cNvSpPr txBox="1"/>
           <p:nvPr/>
-        </p:nvPicPr>
-        <p:blipFill>
-          <a:blip r:embed="rId6" cstate="print">
-            <a:extLst>
-              <a:ext uri="{28A0092B-C50C-407E-A947-70E740481C1C}">
-                <a14:useLocalDpi xmlns:a14="http://schemas.microsoft.com/office/drawing/2010/main" val="0"/>
-              </a:ext>
-            </a:extLst>
-          </a:blip>
-          <a:stretch>
-            <a:fillRect/>
-          </a:stretch>
-        </p:blipFill>
+        </p:nvSpPr>
         <p:spPr>
           <a:xfrm>
-            <a:off x="7743977" y="1248799"/>
-            <a:ext cx="1693704" cy="2258272"/>
+            <a:off x="474408" y="1630561"/>
+            <a:ext cx="6094268" cy="369332"/>
           </a:xfrm>
           <a:prstGeom prst="rect">
             <a:avLst/>
           </a:prstGeom>
-        </p:spPr>
-      </p:pic>
-      <p:pic>
-        <p:nvPicPr>
-          <p:cNvPr id="27" name="图片 26">
+          <a:noFill/>
+        </p:spPr>
+        <p:txBody>
+          <a:bodyPr wrap="square">
+            <a:spAutoFit/>
+          </a:bodyPr>
+          <a:lstStyle/>
+          <a:p>
+            <a:r>
+              <a:rPr lang="en-US" altLang="zh-CN" sz="1800" kern="100" dirty="0">
+                <a:effectLst/>
+                <a:latin typeface="Times New Roman" panose="02020603050405020304" pitchFamily="18" charset="0"/>
+                <a:ea typeface="宋体" panose="02010600030101010101" pitchFamily="2" charset="-122"/>
+                <a:cs typeface="Times New Roman" panose="02020603050405020304" pitchFamily="18" charset="0"/>
+              </a:rPr>
+              <a:t>1. </a:t>
+            </a:r>
+            <a:r>
+              <a:rPr lang="zh-CN" altLang="en-US" sz="1800" kern="100" dirty="0">
+                <a:effectLst/>
+                <a:latin typeface="Times New Roman" panose="02020603050405020304" pitchFamily="18" charset="0"/>
+                <a:ea typeface="宋体" panose="02010600030101010101" pitchFamily="2" charset="-122"/>
+                <a:cs typeface="Times New Roman" panose="02020603050405020304" pitchFamily="18" charset="0"/>
+              </a:rPr>
+              <a:t>在</a:t>
+            </a:r>
+            <a:r>
+              <a:rPr lang="en-US" altLang="zh-CN" sz="1800" kern="100" dirty="0">
+                <a:effectLst/>
+                <a:latin typeface="Times New Roman" panose="02020603050405020304" pitchFamily="18" charset="0"/>
+                <a:ea typeface="宋体" panose="02010600030101010101" pitchFamily="2" charset="-122"/>
+                <a:cs typeface="Times New Roman" panose="02020603050405020304" pitchFamily="18" charset="0"/>
+              </a:rPr>
+              <a:t>FIO</a:t>
+            </a:r>
+            <a:r>
+              <a:rPr lang="zh-CN" altLang="en-US" sz="1800" kern="100" dirty="0">
+                <a:effectLst/>
+                <a:latin typeface="Times New Roman" panose="02020603050405020304" pitchFamily="18" charset="0"/>
+                <a:ea typeface="宋体" panose="02010600030101010101" pitchFamily="2" charset="-122"/>
+                <a:cs typeface="Times New Roman" panose="02020603050405020304" pitchFamily="18" charset="0"/>
+              </a:rPr>
+              <a:t>基准测试中，</a:t>
+            </a:r>
+            <a:r>
+              <a:rPr lang="zh-CN" altLang="zh-CN" sz="1800" kern="100" dirty="0">
+                <a:effectLst/>
+                <a:latin typeface="Times New Roman" panose="02020603050405020304" pitchFamily="18" charset="0"/>
+                <a:ea typeface="宋体" panose="02010600030101010101" pitchFamily="2" charset="-122"/>
+                <a:cs typeface="Times New Roman" panose="02020603050405020304" pitchFamily="18" charset="0"/>
+              </a:rPr>
+              <a:t>模拟器的误差较大：</a:t>
+            </a:r>
+            <a:endParaRPr lang="zh-CN" altLang="en-US" dirty="0"/>
+          </a:p>
+        </p:txBody>
+      </p:sp>
+      <p:sp>
+        <p:nvSpPr>
+          <p:cNvPr id="28" name="文本框 27">
             <a:extLst>
               <a:ext uri="{FF2B5EF4-FFF2-40B4-BE49-F238E27FC236}">
-                <a16:creationId xmlns:a16="http://schemas.microsoft.com/office/drawing/2014/main" id="{777837E1-82E7-66D5-866F-6FEAA4F28829}"/>
+                <a16:creationId xmlns:a16="http://schemas.microsoft.com/office/drawing/2014/main" id="{F28D8F15-5FC8-4447-A3BB-6F79F143AAC5}"/>
               </a:ext>
             </a:extLst>
           </p:cNvPr>
-          <p:cNvPicPr>
-            <a:picLocks noChangeAspect="1"/>
-          </p:cNvPicPr>
+          <p:cNvSpPr txBox="1"/>
           <p:nvPr/>
-        </p:nvPicPr>
-        <p:blipFill>
-          <a:blip r:embed="rId7">
-            <a:extLst>
-              <a:ext uri="{28A0092B-C50C-407E-A947-70E740481C1C}">
-                <a14:useLocalDpi xmlns:a14="http://schemas.microsoft.com/office/drawing/2010/main" val="0"/>
-              </a:ext>
-            </a:extLst>
-          </a:blip>
-          <a:stretch>
-            <a:fillRect/>
-          </a:stretch>
-        </p:blipFill>
+        </p:nvSpPr>
         <p:spPr>
           <a:xfrm>
-            <a:off x="6066174" y="4065765"/>
-            <a:ext cx="5517358" cy="2270957"/>
+            <a:off x="474408" y="4693823"/>
+            <a:ext cx="10914029" cy="870751"/>
           </a:xfrm>
           <a:prstGeom prst="rect">
             <a:avLst/>
           </a:prstGeom>
-        </p:spPr>
-      </p:pic>
+          <a:noFill/>
+        </p:spPr>
+        <p:txBody>
+          <a:bodyPr wrap="square">
+            <a:spAutoFit/>
+          </a:bodyPr>
+          <a:lstStyle/>
+          <a:p>
+            <a:pPr indent="266700" algn="just">
+              <a:lnSpc>
+                <a:spcPct val="150000"/>
+              </a:lnSpc>
+            </a:pPr>
+            <a:r>
+              <a:rPr lang="zh-CN" altLang="zh-CN" kern="100" dirty="0">
+                <a:latin typeface="Times New Roman" panose="02020603050405020304" pitchFamily="18" charset="0"/>
+                <a:ea typeface="宋体" panose="02010600030101010101" pitchFamily="2" charset="-122"/>
+              </a:rPr>
+              <a:t>可以观察到，尽管二者数值上差距较大，但是</a:t>
+            </a:r>
+            <a:r>
+              <a:rPr lang="en-US" altLang="zh-CN" kern="100" dirty="0" err="1">
+                <a:latin typeface="Times New Roman" panose="02020603050405020304" pitchFamily="18" charset="0"/>
+                <a:ea typeface="宋体" panose="02010600030101010101" pitchFamily="2" charset="-122"/>
+              </a:rPr>
+              <a:t>NVMeVirt</a:t>
+            </a:r>
+            <a:r>
+              <a:rPr lang="zh-CN" altLang="zh-CN" kern="100" dirty="0">
+                <a:latin typeface="Times New Roman" panose="02020603050405020304" pitchFamily="18" charset="0"/>
+                <a:ea typeface="宋体" panose="02010600030101010101" pitchFamily="2" charset="-122"/>
+              </a:rPr>
+              <a:t>的吞吐量随时间变化的趋势与真实设备基本一致，</a:t>
+            </a:r>
+            <a:r>
+              <a:rPr lang="zh-CN" altLang="en-US" kern="100" dirty="0">
+                <a:latin typeface="Times New Roman" panose="02020603050405020304" pitchFamily="18" charset="0"/>
+                <a:ea typeface="宋体" panose="02010600030101010101" pitchFamily="2" charset="-122"/>
+              </a:rPr>
+              <a:t>使用模拟器能</a:t>
+            </a:r>
+            <a:r>
+              <a:rPr lang="zh-CN" altLang="zh-CN" kern="100" dirty="0">
+                <a:latin typeface="Times New Roman" panose="02020603050405020304" pitchFamily="18" charset="0"/>
+                <a:ea typeface="宋体" panose="02010600030101010101" pitchFamily="2" charset="-122"/>
+              </a:rPr>
+              <a:t>观察设备的性能波动情况，</a:t>
+            </a:r>
+            <a:r>
+              <a:rPr lang="zh-CN" altLang="en-US" kern="100" dirty="0">
+                <a:latin typeface="Times New Roman" panose="02020603050405020304" pitchFamily="18" charset="0"/>
+                <a:ea typeface="宋体" panose="02010600030101010101" pitchFamily="2" charset="-122"/>
+              </a:rPr>
+              <a:t>能够在一定程度上反应</a:t>
+            </a:r>
+            <a:r>
+              <a:rPr lang="zh-CN" altLang="zh-CN" kern="100" dirty="0">
+                <a:latin typeface="Times New Roman" panose="02020603050405020304" pitchFamily="18" charset="0"/>
+                <a:ea typeface="宋体" panose="02010600030101010101" pitchFamily="2" charset="-122"/>
+              </a:rPr>
+              <a:t>程序中的性能瓶颈。</a:t>
+            </a:r>
+          </a:p>
+        </p:txBody>
+      </p:sp>
+      <p:sp>
+        <p:nvSpPr>
+          <p:cNvPr id="29" name="文本框 28">
+            <a:extLst>
+              <a:ext uri="{FF2B5EF4-FFF2-40B4-BE49-F238E27FC236}">
+                <a16:creationId xmlns:a16="http://schemas.microsoft.com/office/drawing/2014/main" id="{493FB669-2C55-460D-9384-8CFF4A90B574}"/>
+              </a:ext>
+            </a:extLst>
+          </p:cNvPr>
+          <p:cNvSpPr txBox="1"/>
+          <p:nvPr/>
+        </p:nvSpPr>
+        <p:spPr>
+          <a:xfrm>
+            <a:off x="474408" y="3466735"/>
+            <a:ext cx="5115902" cy="646331"/>
+          </a:xfrm>
+          <a:prstGeom prst="rect">
+            <a:avLst/>
+          </a:prstGeom>
+          <a:noFill/>
+        </p:spPr>
+        <p:txBody>
+          <a:bodyPr wrap="square">
+            <a:spAutoFit/>
+          </a:bodyPr>
+          <a:lstStyle/>
+          <a:p>
+            <a:r>
+              <a:rPr lang="en-US" altLang="zh-CN" sz="1800" kern="100" dirty="0">
+                <a:effectLst/>
+                <a:latin typeface="宋体" panose="02010600030101010101" pitchFamily="2" charset="-122"/>
+                <a:ea typeface="宋体" panose="02010600030101010101" pitchFamily="2" charset="-122"/>
+              </a:rPr>
+              <a:t>2. </a:t>
+            </a:r>
+            <a:r>
+              <a:rPr lang="zh-CN" altLang="en-US" sz="1800" kern="100" dirty="0">
+                <a:effectLst/>
+                <a:latin typeface="宋体" panose="02010600030101010101" pitchFamily="2" charset="-122"/>
+                <a:ea typeface="宋体" panose="02010600030101010101" pitchFamily="2" charset="-122"/>
+              </a:rPr>
+              <a:t>基于</a:t>
+            </a:r>
+            <a:r>
+              <a:rPr lang="en-US" altLang="zh-CN" sz="1800" kern="100" dirty="0" err="1">
+                <a:effectLst/>
+                <a:latin typeface="Times New Roman" panose="02020603050405020304" pitchFamily="18" charset="0"/>
+                <a:ea typeface="宋体" panose="02010600030101010101" pitchFamily="2" charset="-122"/>
+                <a:cs typeface="Times New Roman" panose="02020603050405020304" pitchFamily="18" charset="0"/>
+              </a:rPr>
+              <a:t>RocksDB</a:t>
+            </a:r>
+            <a:r>
+              <a:rPr lang="en-US" altLang="zh-CN" kern="100" dirty="0" err="1">
+                <a:latin typeface="Times New Roman" panose="02020603050405020304" pitchFamily="18" charset="0"/>
+                <a:ea typeface="宋体" panose="02010600030101010101" pitchFamily="2" charset="-122"/>
+                <a:cs typeface="Times New Roman" panose="02020603050405020304" pitchFamily="18" charset="0"/>
+              </a:rPr>
+              <a:t>+ZenFS</a:t>
+            </a:r>
+            <a:r>
+              <a:rPr lang="zh-CN" altLang="zh-CN" sz="1800" kern="100" dirty="0">
+                <a:effectLst/>
+                <a:latin typeface="宋体" panose="02010600030101010101" pitchFamily="2" charset="-122"/>
+                <a:ea typeface="宋体" panose="02010600030101010101" pitchFamily="2" charset="-122"/>
+                <a:cs typeface="Times New Roman" panose="02020603050405020304" pitchFamily="18" charset="0"/>
+              </a:rPr>
+              <a:t>分别对模拟和物理环境进行测试，记录吞吐量</a:t>
+            </a:r>
+            <a:r>
+              <a:rPr lang="zh-CN" altLang="zh-CN" dirty="0">
+                <a:solidFill>
+                  <a:srgbClr val="374151"/>
+                </a:solidFill>
+                <a:latin typeface="宋体" panose="02010600030101010101" pitchFamily="2" charset="-122"/>
+                <a:ea typeface="宋体" panose="02010600030101010101" pitchFamily="2" charset="-122"/>
+              </a:rPr>
+              <a:t>随时间的变化</a:t>
+            </a:r>
+            <a:r>
+              <a:rPr lang="zh-CN" altLang="en-US" dirty="0">
+                <a:solidFill>
+                  <a:srgbClr val="374151"/>
+                </a:solidFill>
+                <a:latin typeface="宋体" panose="02010600030101010101" pitchFamily="2" charset="-122"/>
+                <a:ea typeface="宋体" panose="02010600030101010101" pitchFamily="2" charset="-122"/>
+              </a:rPr>
+              <a:t>如右图所示。</a:t>
+            </a:r>
+          </a:p>
+        </p:txBody>
+      </p:sp>
+      <p:sp>
+        <p:nvSpPr>
+          <p:cNvPr id="30" name="文本框 29">
+            <a:extLst>
+              <a:ext uri="{FF2B5EF4-FFF2-40B4-BE49-F238E27FC236}">
+                <a16:creationId xmlns:a16="http://schemas.microsoft.com/office/drawing/2014/main" id="{282D8D65-1887-4B91-97ED-5DABC4EEBA49}"/>
+              </a:ext>
+            </a:extLst>
+          </p:cNvPr>
+          <p:cNvSpPr txBox="1"/>
+          <p:nvPr/>
+        </p:nvSpPr>
+        <p:spPr>
+          <a:xfrm>
+            <a:off x="281680" y="299000"/>
+            <a:ext cx="6798981" cy="535531"/>
+          </a:xfrm>
+          <a:prstGeom prst="rect">
+            <a:avLst/>
+          </a:prstGeom>
+          <a:noFill/>
+        </p:spPr>
+        <p:txBody>
+          <a:bodyPr wrap="square" rtlCol="0">
+            <a:spAutoFit/>
+          </a:bodyPr>
+          <a:lstStyle/>
+          <a:p>
+            <a:pPr>
+              <a:lnSpc>
+                <a:spcPct val="90000"/>
+              </a:lnSpc>
+              <a:spcBef>
+                <a:spcPts val="1000"/>
+              </a:spcBef>
+              <a:defRPr/>
+            </a:pPr>
+            <a:r>
+              <a:rPr lang="en-US" altLang="zh-CN" sz="3200" b="1" dirty="0">
+                <a:solidFill>
+                  <a:srgbClr val="4747BA"/>
+                </a:solidFill>
+                <a:latin typeface="Constantia" panose="02030602050306030303" pitchFamily="18" charset="0"/>
+                <a:ea typeface="腾讯体 W3" panose="020C04030202040F0204" pitchFamily="34" charset="-122"/>
+                <a:cs typeface="Times" panose="02020603050405020304" pitchFamily="18" charset="0"/>
+              </a:rPr>
+              <a:t> </a:t>
+            </a:r>
+            <a:r>
+              <a:rPr lang="zh-CN" altLang="en-US" sz="3200" b="1" dirty="0">
+                <a:solidFill>
+                  <a:srgbClr val="4747BA"/>
+                </a:solidFill>
+                <a:latin typeface="Constantia" panose="02030602050306030303" pitchFamily="18" charset="0"/>
+                <a:ea typeface="腾讯体 W3" panose="020C04030202040F0204" pitchFamily="34" charset="-122"/>
+                <a:cs typeface="Times" panose="02020603050405020304" pitchFamily="18" charset="0"/>
+              </a:rPr>
+              <a:t>实验评估</a:t>
+            </a:r>
+            <a:endParaRPr lang="zh-CN" altLang="en-US" sz="3600" b="1" dirty="0">
+              <a:solidFill>
+                <a:srgbClr val="4747BA"/>
+              </a:solidFill>
+              <a:latin typeface="Constantia" panose="02030602050306030303" pitchFamily="18" charset="0"/>
+              <a:ea typeface="腾讯体 W3" panose="020C04030202040F0204" pitchFamily="34" charset="-122"/>
+              <a:cs typeface="Times" panose="02020603050405020304" pitchFamily="18" charset="0"/>
+            </a:endParaRPr>
+          </a:p>
+        </p:txBody>
+      </p:sp>
     </p:spTree>
     <p:extLst>
       <p:ext uri="{BB962C8B-B14F-4D97-AF65-F5344CB8AC3E}">
-        <p14:creationId xmlns:p14="http://schemas.microsoft.com/office/powerpoint/2010/main" val="3562333484"/>
+        <p14:creationId xmlns:p14="http://schemas.microsoft.com/office/powerpoint/2010/main" val="1518962869"/>
       </p:ext>
     </p:extLst>
   </p:cSld>
@@ -14091,109 +17338,24 @@
       </p:grpSpPr>
       <p:sp>
         <p:nvSpPr>
-          <p:cNvPr id="21" name="文本框 20"/>
-          <p:cNvSpPr txBox="1"/>
+          <p:cNvPr id="17" name="矩形 16"/>
+          <p:cNvSpPr/>
           <p:nvPr/>
         </p:nvSpPr>
         <p:spPr>
           <a:xfrm>
-            <a:off x="8244849" y="4730406"/>
-            <a:ext cx="2099301" cy="1328569"/>
+            <a:off x="0" y="6522720"/>
+            <a:ext cx="4267200" cy="335280"/>
           </a:xfrm>
           <a:prstGeom prst="rect">
             <a:avLst/>
           </a:prstGeom>
-          <a:noFill/>
-        </p:spPr>
-        <p:txBody>
-          <a:bodyPr wrap="square" rtlCol="0">
-            <a:spAutoFit/>
-          </a:bodyPr>
-          <a:lstStyle/>
-          <a:p>
-            <a:pPr algn="ctr">
-              <a:lnSpc>
-                <a:spcPct val="90000"/>
-              </a:lnSpc>
-              <a:spcBef>
-                <a:spcPts val="1000"/>
-              </a:spcBef>
-              <a:defRPr/>
-            </a:pPr>
-            <a:r>
-              <a:rPr lang="en-US" altLang="zh-CN" sz="4000" b="1" dirty="0">
-                <a:solidFill>
-                  <a:srgbClr val="4747BA"/>
-                </a:solidFill>
-                <a:latin typeface="Constantia" panose="02030602050306030303" pitchFamily="18" charset="0"/>
-                <a:ea typeface="腾讯体 W3" panose="020C04030202040F0204" pitchFamily="34" charset="-122"/>
-                <a:cs typeface="Times" panose="02020603050405020304" pitchFamily="18" charset="0"/>
-              </a:rPr>
-              <a:t>Q&amp;A</a:t>
-            </a:r>
-          </a:p>
-          <a:p>
-            <a:pPr lvl="0" algn="ctr">
-              <a:lnSpc>
-                <a:spcPct val="90000"/>
-              </a:lnSpc>
-              <a:spcBef>
-                <a:spcPts val="1000"/>
-              </a:spcBef>
-              <a:defRPr/>
-            </a:pPr>
-            <a:r>
-              <a:rPr lang="en-US" altLang="zh-CN" sz="4000" b="1" dirty="0">
-                <a:solidFill>
-                  <a:srgbClr val="4747BA"/>
-                </a:solidFill>
-                <a:latin typeface="Constantia" panose="02030602050306030303" pitchFamily="18" charset="0"/>
-                <a:ea typeface="腾讯体 W3" panose="020C04030202040F0204" pitchFamily="34" charset="-122"/>
-                <a:cs typeface="Times" panose="02020603050405020304" pitchFamily="18" charset="0"/>
-              </a:rPr>
-              <a:t>Thanks</a:t>
-            </a:r>
-            <a:r>
-              <a:rPr lang="zh-CN" altLang="en-US" sz="4000" b="1" dirty="0">
-                <a:solidFill>
-                  <a:srgbClr val="4747BA"/>
-                </a:solidFill>
-                <a:latin typeface="Constantia" panose="02030602050306030303" pitchFamily="18" charset="0"/>
-                <a:ea typeface="腾讯体 W3" panose="020C04030202040F0204" pitchFamily="34" charset="-122"/>
-                <a:cs typeface="Times" panose="02020603050405020304" pitchFamily="18" charset="0"/>
-              </a:rPr>
-              <a:t>！</a:t>
-            </a:r>
-          </a:p>
-        </p:txBody>
-      </p:sp>
-      <p:sp>
-        <p:nvSpPr>
-          <p:cNvPr id="8" name="矩形: 圆角 7"/>
-          <p:cNvSpPr/>
-          <p:nvPr/>
-        </p:nvSpPr>
-        <p:spPr>
-          <a:xfrm rot="2755966">
-            <a:off x="4146517" y="3347706"/>
-            <a:ext cx="1613489" cy="1613489"/>
-          </a:xfrm>
-          <a:prstGeom prst="roundRect">
-            <a:avLst/>
-          </a:prstGeom>
           <a:solidFill>
-            <a:srgbClr val="8484D1"/>
+            <a:srgbClr val="4747BA"/>
           </a:solidFill>
           <a:ln>
             <a:noFill/>
           </a:ln>
-          <a:effectLst>
-            <a:outerShdw blurRad="88900" dist="50800" dir="8100000" sx="101000" sy="101000" algn="tr" rotWithShape="0">
-              <a:prstClr val="black">
-                <a:alpha val="40000"/>
-              </a:prstClr>
-            </a:outerShdw>
-          </a:effectLst>
         </p:spPr>
         <p:style>
           <a:lnRef idx="2">
@@ -14222,16 +17384,16 @@
       </p:sp>
       <p:sp>
         <p:nvSpPr>
-          <p:cNvPr id="9" name="矩形: 圆角 8"/>
+          <p:cNvPr id="18" name="矩形 17"/>
           <p:cNvSpPr/>
           <p:nvPr/>
         </p:nvSpPr>
         <p:spPr>
-          <a:xfrm rot="2755966">
-            <a:off x="2770276" y="966707"/>
-            <a:ext cx="1613489" cy="1613489"/>
-          </a:xfrm>
-          <a:prstGeom prst="roundRect">
+          <a:xfrm>
+            <a:off x="4267200" y="6522720"/>
+            <a:ext cx="4267200" cy="335280"/>
+          </a:xfrm>
+          <a:prstGeom prst="rect">
             <a:avLst/>
           </a:prstGeom>
           <a:solidFill>
@@ -14240,13 +17402,6 @@
           <a:ln>
             <a:noFill/>
           </a:ln>
-          <a:effectLst>
-            <a:outerShdw blurRad="88900" dist="50800" dir="8100000" sx="101000" sy="101000" algn="tr" rotWithShape="0">
-              <a:prstClr val="black">
-                <a:alpha val="40000"/>
-              </a:prstClr>
-            </a:outerShdw>
-          </a:effectLst>
         </p:spPr>
         <p:style>
           <a:lnRef idx="2">
@@ -14275,16 +17430,16 @@
       </p:sp>
       <p:sp>
         <p:nvSpPr>
-          <p:cNvPr id="10" name="矩形: 圆角 9"/>
+          <p:cNvPr id="20" name="矩形 19"/>
           <p:cNvSpPr/>
           <p:nvPr/>
         </p:nvSpPr>
         <p:spPr>
-          <a:xfrm rot="2755966">
-            <a:off x="4586763" y="2029472"/>
-            <a:ext cx="732996" cy="732996"/>
-          </a:xfrm>
-          <a:prstGeom prst="roundRect">
+          <a:xfrm>
+            <a:off x="8534400" y="6522720"/>
+            <a:ext cx="3657600" cy="335280"/>
+          </a:xfrm>
+          <a:prstGeom prst="rect">
             <a:avLst/>
           </a:prstGeom>
           <a:solidFill>
@@ -14293,13 +17448,6 @@
           <a:ln>
             <a:noFill/>
           </a:ln>
-          <a:effectLst>
-            <a:outerShdw blurRad="88900" dist="50800" dir="8100000" sx="101000" sy="101000" algn="tr" rotWithShape="0">
-              <a:prstClr val="black">
-                <a:alpha val="40000"/>
-              </a:prstClr>
-            </a:outerShdw>
-          </a:effectLst>
         </p:spPr>
         <p:style>
           <a:lnRef idx="2">
@@ -14318,286 +17466,264 @@
           </a:fontRef>
         </p:style>
         <p:txBody>
-          <a:bodyPr rtlCol="0" anchor="ctr"/>
+          <a:bodyPr rot="0" spcFirstLastPara="0" vert="horz" wrap="square" lIns="91440" tIns="45720" rIns="91440" bIns="45720" numCol="1" spcCol="0" rtlCol="0" fromWordArt="0" anchor="ctr" anchorCtr="0" forceAA="0" compatLnSpc="1">
+            <a:noAutofit/>
+          </a:bodyPr>
+          <a:lstStyle>
+            <a:defPPr>
+              <a:defRPr lang="zh-CN"/>
+            </a:defPPr>
+            <a:lvl1pPr marL="0" algn="l" defTabSz="914400" rtl="0" eaLnBrk="1" latinLnBrk="0" hangingPunct="1">
+              <a:defRPr sz="1800" kern="1200">
+                <a:solidFill>
+                  <a:schemeClr val="lt1"/>
+                </a:solidFill>
+                <a:latin typeface="+mn-lt"/>
+                <a:ea typeface="+mn-ea"/>
+                <a:cs typeface="+mn-cs"/>
+              </a:defRPr>
+            </a:lvl1pPr>
+            <a:lvl2pPr marL="457200" algn="l" defTabSz="914400" rtl="0" eaLnBrk="1" latinLnBrk="0" hangingPunct="1">
+              <a:defRPr sz="1800" kern="1200">
+                <a:solidFill>
+                  <a:schemeClr val="lt1"/>
+                </a:solidFill>
+                <a:latin typeface="+mn-lt"/>
+                <a:ea typeface="+mn-ea"/>
+                <a:cs typeface="+mn-cs"/>
+              </a:defRPr>
+            </a:lvl2pPr>
+            <a:lvl3pPr marL="914400" algn="l" defTabSz="914400" rtl="0" eaLnBrk="1" latinLnBrk="0" hangingPunct="1">
+              <a:defRPr sz="1800" kern="1200">
+                <a:solidFill>
+                  <a:schemeClr val="lt1"/>
+                </a:solidFill>
+                <a:latin typeface="+mn-lt"/>
+                <a:ea typeface="+mn-ea"/>
+                <a:cs typeface="+mn-cs"/>
+              </a:defRPr>
+            </a:lvl3pPr>
+            <a:lvl4pPr marL="1371600" algn="l" defTabSz="914400" rtl="0" eaLnBrk="1" latinLnBrk="0" hangingPunct="1">
+              <a:defRPr sz="1800" kern="1200">
+                <a:solidFill>
+                  <a:schemeClr val="lt1"/>
+                </a:solidFill>
+                <a:latin typeface="+mn-lt"/>
+                <a:ea typeface="+mn-ea"/>
+                <a:cs typeface="+mn-cs"/>
+              </a:defRPr>
+            </a:lvl4pPr>
+            <a:lvl5pPr marL="1828800" algn="l" defTabSz="914400" rtl="0" eaLnBrk="1" latinLnBrk="0" hangingPunct="1">
+              <a:defRPr sz="1800" kern="1200">
+                <a:solidFill>
+                  <a:schemeClr val="lt1"/>
+                </a:solidFill>
+                <a:latin typeface="+mn-lt"/>
+                <a:ea typeface="+mn-ea"/>
+                <a:cs typeface="+mn-cs"/>
+              </a:defRPr>
+            </a:lvl5pPr>
+            <a:lvl6pPr marL="2286000" algn="l" defTabSz="914400" rtl="0" eaLnBrk="1" latinLnBrk="0" hangingPunct="1">
+              <a:defRPr sz="1800" kern="1200">
+                <a:solidFill>
+                  <a:schemeClr val="lt1"/>
+                </a:solidFill>
+                <a:latin typeface="+mn-lt"/>
+                <a:ea typeface="+mn-ea"/>
+                <a:cs typeface="+mn-cs"/>
+              </a:defRPr>
+            </a:lvl6pPr>
+            <a:lvl7pPr marL="2743200" algn="l" defTabSz="914400" rtl="0" eaLnBrk="1" latinLnBrk="0" hangingPunct="1">
+              <a:defRPr sz="1800" kern="1200">
+                <a:solidFill>
+                  <a:schemeClr val="lt1"/>
+                </a:solidFill>
+                <a:latin typeface="+mn-lt"/>
+                <a:ea typeface="+mn-ea"/>
+                <a:cs typeface="+mn-cs"/>
+              </a:defRPr>
+            </a:lvl7pPr>
+            <a:lvl8pPr marL="3200400" algn="l" defTabSz="914400" rtl="0" eaLnBrk="1" latinLnBrk="0" hangingPunct="1">
+              <a:defRPr sz="1800" kern="1200">
+                <a:solidFill>
+                  <a:schemeClr val="lt1"/>
+                </a:solidFill>
+                <a:latin typeface="+mn-lt"/>
+                <a:ea typeface="+mn-ea"/>
+                <a:cs typeface="+mn-cs"/>
+              </a:defRPr>
+            </a:lvl8pPr>
+            <a:lvl9pPr marL="3657600" algn="l" defTabSz="914400" rtl="0" eaLnBrk="1" latinLnBrk="0" hangingPunct="1">
+              <a:defRPr sz="1800" kern="1200">
+                <a:solidFill>
+                  <a:schemeClr val="lt1"/>
+                </a:solidFill>
+                <a:latin typeface="+mn-lt"/>
+                <a:ea typeface="+mn-ea"/>
+                <a:cs typeface="+mn-cs"/>
+              </a:defRPr>
+            </a:lvl9pPr>
+          </a:lstStyle>
+          <a:p>
+            <a:pPr algn="ctr"/>
+            <a:endParaRPr lang="zh-CN" altLang="en-US" sz="1600" dirty="0">
+              <a:solidFill>
+                <a:schemeClr val="bg1"/>
+              </a:solidFill>
+              <a:latin typeface="Constantia" panose="02030602050306030303" pitchFamily="18" charset="0"/>
+            </a:endParaRPr>
+          </a:p>
+        </p:txBody>
+      </p:sp>
+      <p:sp>
+        <p:nvSpPr>
+          <p:cNvPr id="24" name="日期占位符 7"/>
+          <p:cNvSpPr>
+            <a:spLocks noGrp="1"/>
+          </p:cNvSpPr>
+          <p:nvPr>
+            <p:ph type="dt" sz="half" idx="10"/>
+          </p:nvPr>
+        </p:nvSpPr>
+        <p:spPr>
+          <a:xfrm>
+            <a:off x="1209907" y="6494974"/>
+            <a:ext cx="1847385" cy="365125"/>
+          </a:xfrm>
+        </p:spPr>
+        <p:txBody>
+          <a:bodyPr/>
           <a:lstStyle/>
           <a:p>
-            <a:pPr algn="ctr"/>
-            <a:endParaRPr lang="zh-CN" altLang="en-US"/>
-          </a:p>
-        </p:txBody>
-      </p:sp>
-      <p:sp>
-        <p:nvSpPr>
-          <p:cNvPr id="11" name="矩形: 圆角 10"/>
-          <p:cNvSpPr/>
+            <a:fld id="{31CCC338-FFC3-4940-99DD-6195BEF39901}" type="datetime4">
+              <a:rPr lang="en-US" altLang="zh-CN" sz="1400" b="1">
+                <a:solidFill>
+                  <a:schemeClr val="bg1"/>
+                </a:solidFill>
+                <a:latin typeface="Constantia" panose="02030602050306030303" pitchFamily="18" charset="0"/>
+                <a:cs typeface="Times" panose="02020603050405020304" pitchFamily="18" charset="0"/>
+              </a:rPr>
+              <a:t>May 28, 2024</a:t>
+            </a:fld>
+            <a:endParaRPr lang="zh-CN" altLang="en-US" sz="1400" b="1" dirty="0">
+              <a:solidFill>
+                <a:schemeClr val="bg1"/>
+              </a:solidFill>
+              <a:latin typeface="Constantia" panose="02030602050306030303" pitchFamily="18" charset="0"/>
+              <a:cs typeface="Times" panose="02020603050405020304" pitchFamily="18" charset="0"/>
+            </a:endParaRPr>
+          </a:p>
+        </p:txBody>
+      </p:sp>
+      <p:cxnSp>
+        <p:nvCxnSpPr>
+          <p:cNvPr id="26" name="直接连接符 25"/>
+          <p:cNvCxnSpPr/>
           <p:nvPr/>
-        </p:nvSpPr>
-        <p:spPr>
-          <a:xfrm rot="2755966">
-            <a:off x="1415554" y="2470682"/>
-            <a:ext cx="3134556" cy="3134556"/>
-          </a:xfrm>
-          <a:prstGeom prst="roundRect">
+        </p:nvCxnSpPr>
+        <p:spPr>
+          <a:xfrm>
+            <a:off x="385590" y="859531"/>
+            <a:ext cx="11479576" cy="0"/>
+          </a:xfrm>
+          <a:prstGeom prst="line">
             <a:avLst/>
           </a:prstGeom>
-          <a:blipFill dpi="0" rotWithShape="0">
-            <a:blip r:embed="rId3"/>
-            <a:srcRect/>
-            <a:stretch>
-              <a:fillRect/>
-            </a:stretch>
-          </a:blipFill>
-          <a:ln>
-            <a:noFill/>
+          <a:ln w="38100">
+            <a:solidFill>
+              <a:srgbClr val="4747BA"/>
+            </a:solidFill>
           </a:ln>
-          <a:effectLst>
-            <a:outerShdw blurRad="114300" dist="50800" dir="7800000" sx="101000" sy="101000" algn="tr" rotWithShape="0">
-              <a:prstClr val="black">
-                <a:alpha val="64000"/>
-              </a:prstClr>
-            </a:outerShdw>
-          </a:effectLst>
         </p:spPr>
         <p:style>
-          <a:lnRef idx="2">
-            <a:schemeClr val="accent1">
-              <a:shade val="50000"/>
-            </a:schemeClr>
+          <a:lnRef idx="1">
+            <a:schemeClr val="accent1"/>
           </a:lnRef>
-          <a:fillRef idx="1">
+          <a:fillRef idx="0">
             <a:schemeClr val="accent1"/>
           </a:fillRef>
           <a:effectRef idx="0">
             <a:schemeClr val="accent1"/>
           </a:effectRef>
           <a:fontRef idx="minor">
-            <a:schemeClr val="lt1"/>
+            <a:schemeClr val="tx1"/>
           </a:fontRef>
         </p:style>
-        <p:txBody>
-          <a:bodyPr rtlCol="0" anchor="ctr"/>
-          <a:lstStyle/>
-          <a:p>
-            <a:pPr algn="ctr"/>
-            <a:endParaRPr lang="zh-CN" altLang="en-US" dirty="0"/>
-          </a:p>
-        </p:txBody>
-      </p:sp>
-      <p:sp>
-        <p:nvSpPr>
-          <p:cNvPr id="12" name="矩形: 圆角 11"/>
-          <p:cNvSpPr/>
+      </p:cxnSp>
+      <p:pic>
+        <p:nvPicPr>
+          <p:cNvPr id="23" name="图片 22"/>
+          <p:cNvPicPr>
+            <a:picLocks noChangeAspect="1"/>
+          </p:cNvPicPr>
           <p:nvPr/>
-        </p:nvSpPr>
-        <p:spPr>
-          <a:xfrm rot="2755966">
-            <a:off x="5633126" y="2433704"/>
-            <a:ext cx="1685894" cy="1685894"/>
-          </a:xfrm>
-          <a:prstGeom prst="roundRect">
+        </p:nvPicPr>
+        <p:blipFill>
+          <a:blip r:embed="rId3" cstate="print">
+            <a:extLst>
+              <a:ext uri="{28A0092B-C50C-407E-A947-70E740481C1C}">
+                <a14:useLocalDpi xmlns:a14="http://schemas.microsoft.com/office/drawing/2010/main" val="0"/>
+              </a:ext>
+            </a:extLst>
+          </a:blip>
+          <a:stretch>
+            <a:fillRect/>
+          </a:stretch>
+        </p:blipFill>
+        <p:spPr>
+          <a:xfrm>
+            <a:off x="7804063" y="218980"/>
+            <a:ext cx="730337" cy="556270"/>
+          </a:xfrm>
+          <a:prstGeom prst="rect">
             <a:avLst/>
           </a:prstGeom>
-          <a:solidFill>
-            <a:srgbClr val="4747BA"/>
-          </a:solidFill>
-          <a:ln>
-            <a:noFill/>
-          </a:ln>
-          <a:effectLst>
-            <a:outerShdw blurRad="88900" dist="50800" dir="8100000" sx="101000" sy="101000" algn="tr" rotWithShape="0">
-              <a:prstClr val="black">
-                <a:alpha val="40000"/>
-              </a:prstClr>
-            </a:outerShdw>
-          </a:effectLst>
-        </p:spPr>
-        <p:style>
-          <a:lnRef idx="2">
-            <a:schemeClr val="accent1">
-              <a:shade val="50000"/>
-            </a:schemeClr>
-          </a:lnRef>
-          <a:fillRef idx="1">
-            <a:schemeClr val="accent1"/>
-          </a:fillRef>
-          <a:effectRef idx="0">
-            <a:schemeClr val="accent1"/>
-          </a:effectRef>
-          <a:fontRef idx="minor">
-            <a:schemeClr val="lt1"/>
-          </a:fontRef>
-        </p:style>
-        <p:txBody>
-          <a:bodyPr rtlCol="0" anchor="ctr"/>
+        </p:spPr>
+      </p:pic>
+      <p:sp>
+        <p:nvSpPr>
+          <p:cNvPr id="14" name="灯片编号占位符 8"/>
+          <p:cNvSpPr>
+            <a:spLocks noGrp="1"/>
+          </p:cNvSpPr>
+          <p:nvPr>
+            <p:ph type="sldNum" sz="quarter" idx="12"/>
+          </p:nvPr>
+        </p:nvSpPr>
+        <p:spPr>
+          <a:xfrm>
+            <a:off x="9847869" y="6405035"/>
+            <a:ext cx="809393" cy="545001"/>
+          </a:xfrm>
+        </p:spPr>
+        <p:txBody>
+          <a:bodyPr/>
           <a:lstStyle/>
           <a:p>
             <a:pPr algn="ctr"/>
-            <a:endParaRPr lang="zh-CN" altLang="en-US" dirty="0"/>
-          </a:p>
-        </p:txBody>
-      </p:sp>
-      <p:sp>
-        <p:nvSpPr>
-          <p:cNvPr id="15" name="矩形: 圆角 14"/>
-          <p:cNvSpPr/>
-          <p:nvPr/>
-        </p:nvSpPr>
-        <p:spPr>
-          <a:xfrm rot="2755966">
-            <a:off x="3965400" y="5546431"/>
-            <a:ext cx="732996" cy="732996"/>
-          </a:xfrm>
-          <a:prstGeom prst="roundRect">
-            <a:avLst/>
-          </a:prstGeom>
-          <a:solidFill>
-            <a:srgbClr val="ADADE0"/>
-          </a:solidFill>
-          <a:ln>
-            <a:noFill/>
-          </a:ln>
-          <a:effectLst>
-            <a:outerShdw blurRad="88900" dist="50800" dir="8100000" sx="101000" sy="101000" algn="tr" rotWithShape="0">
-              <a:prstClr val="black">
-                <a:alpha val="40000"/>
-              </a:prstClr>
-            </a:outerShdw>
-          </a:effectLst>
-        </p:spPr>
-        <p:style>
-          <a:lnRef idx="2">
-            <a:schemeClr val="accent1">
-              <a:shade val="50000"/>
-            </a:schemeClr>
-          </a:lnRef>
-          <a:fillRef idx="1">
-            <a:schemeClr val="accent1"/>
-          </a:fillRef>
-          <a:effectRef idx="0">
-            <a:schemeClr val="accent1"/>
-          </a:effectRef>
-          <a:fontRef idx="minor">
-            <a:schemeClr val="lt1"/>
-          </a:fontRef>
-        </p:style>
-        <p:txBody>
-          <a:bodyPr rtlCol="0" anchor="ctr"/>
-          <a:lstStyle/>
-          <a:p>
-            <a:pPr algn="ctr"/>
-            <a:endParaRPr lang="zh-CN" altLang="en-US"/>
-          </a:p>
-        </p:txBody>
-      </p:sp>
-      <p:sp>
-        <p:nvSpPr>
-          <p:cNvPr id="16" name="矩形: 圆角 15"/>
-          <p:cNvSpPr/>
-          <p:nvPr/>
-        </p:nvSpPr>
-        <p:spPr>
-          <a:xfrm rot="2755966">
-            <a:off x="5089423" y="716157"/>
-            <a:ext cx="1134056" cy="1134056"/>
-          </a:xfrm>
-          <a:prstGeom prst="roundRect">
-            <a:avLst/>
-          </a:prstGeom>
-          <a:solidFill>
-            <a:srgbClr val="4747BA"/>
-          </a:solidFill>
-          <a:ln>
-            <a:noFill/>
-          </a:ln>
-          <a:effectLst>
-            <a:outerShdw blurRad="88900" dist="50800" dir="8100000" sx="101000" sy="101000" algn="tr" rotWithShape="0">
-              <a:prstClr val="black">
-                <a:alpha val="40000"/>
-              </a:prstClr>
-            </a:outerShdw>
-          </a:effectLst>
-        </p:spPr>
-        <p:style>
-          <a:lnRef idx="2">
-            <a:schemeClr val="accent1">
-              <a:shade val="50000"/>
-            </a:schemeClr>
-          </a:lnRef>
-          <a:fillRef idx="1">
-            <a:schemeClr val="accent1"/>
-          </a:fillRef>
-          <a:effectRef idx="0">
-            <a:schemeClr val="accent1"/>
-          </a:effectRef>
-          <a:fontRef idx="minor">
-            <a:schemeClr val="lt1"/>
-          </a:fontRef>
-        </p:style>
-        <p:txBody>
-          <a:bodyPr rtlCol="0" anchor="ctr"/>
-          <a:lstStyle/>
-          <a:p>
-            <a:pPr algn="ctr"/>
-            <a:endParaRPr lang="zh-CN" altLang="en-US"/>
-          </a:p>
-        </p:txBody>
-      </p:sp>
-      <p:sp>
-        <p:nvSpPr>
-          <p:cNvPr id="19" name="矩形: 圆角 18"/>
-          <p:cNvSpPr/>
-          <p:nvPr/>
-        </p:nvSpPr>
-        <p:spPr>
-          <a:xfrm rot="2755966">
-            <a:off x="7189439" y="1365266"/>
-            <a:ext cx="396502" cy="396502"/>
-          </a:xfrm>
-          <a:prstGeom prst="roundRect">
-            <a:avLst/>
-          </a:prstGeom>
-          <a:solidFill>
-            <a:srgbClr val="ADADE0"/>
-          </a:solidFill>
-          <a:ln>
-            <a:noFill/>
-          </a:ln>
-          <a:effectLst>
-            <a:outerShdw blurRad="88900" dist="50800" dir="8100000" sx="101000" sy="101000" algn="tr" rotWithShape="0">
-              <a:prstClr val="black">
-                <a:alpha val="40000"/>
-              </a:prstClr>
-            </a:outerShdw>
-          </a:effectLst>
-        </p:spPr>
-        <p:style>
-          <a:lnRef idx="2">
-            <a:schemeClr val="accent1">
-              <a:shade val="50000"/>
-            </a:schemeClr>
-          </a:lnRef>
-          <a:fillRef idx="1">
-            <a:schemeClr val="accent1"/>
-          </a:fillRef>
-          <a:effectRef idx="0">
-            <a:schemeClr val="accent1"/>
-          </a:effectRef>
-          <a:fontRef idx="minor">
-            <a:schemeClr val="lt1"/>
-          </a:fontRef>
-        </p:style>
-        <p:txBody>
-          <a:bodyPr rtlCol="0" anchor="ctr"/>
-          <a:lstStyle/>
-          <a:p>
-            <a:pPr algn="ctr"/>
-            <a:endParaRPr lang="zh-CN" altLang="en-US"/>
+            <a:fld id="{152851E7-9224-42D2-A4FF-119762E40804}" type="slidenum">
+              <a:rPr lang="zh-CN" altLang="en-US" sz="1400" b="1" smtClean="0">
+                <a:solidFill>
+                  <a:schemeClr val="bg1"/>
+                </a:solidFill>
+                <a:latin typeface="Constantia" panose="02030602050306030303" pitchFamily="18" charset="0"/>
+                <a:cs typeface="Times" panose="02020603050405020304" pitchFamily="18" charset="0"/>
+              </a:rPr>
+              <a:t>8</a:t>
+            </a:fld>
+            <a:endParaRPr lang="zh-CN" altLang="en-US" sz="1400" b="1" dirty="0">
+              <a:solidFill>
+                <a:schemeClr val="bg1"/>
+              </a:solidFill>
+              <a:latin typeface="Constantia" panose="02030602050306030303" pitchFamily="18" charset="0"/>
+              <a:cs typeface="Times" panose="02020603050405020304" pitchFamily="18" charset="0"/>
+            </a:endParaRPr>
           </a:p>
         </p:txBody>
       </p:sp>
       <p:pic>
         <p:nvPicPr>
-          <p:cNvPr id="17" name="图片 16"/>
+          <p:cNvPr id="44" name="图片 43"/>
           <p:cNvPicPr>
             <a:picLocks noChangeAspect="1"/>
           </p:cNvPicPr>
@@ -14617,27 +17743,146 @@
         </p:blipFill>
         <p:spPr>
           <a:xfrm>
-            <a:off x="7804063" y="218980"/>
-            <a:ext cx="730337" cy="556270"/>
+            <a:off x="8590829" y="204228"/>
+            <a:ext cx="3323471" cy="570629"/>
           </a:xfrm>
           <a:prstGeom prst="rect">
             <a:avLst/>
           </a:prstGeom>
         </p:spPr>
       </p:pic>
+      <p:sp>
+        <p:nvSpPr>
+          <p:cNvPr id="2" name="文本框 1"/>
+          <p:cNvSpPr txBox="1"/>
+          <p:nvPr/>
+        </p:nvSpPr>
+        <p:spPr>
+          <a:xfrm>
+            <a:off x="440055" y="1269949"/>
+            <a:ext cx="6951980" cy="460375"/>
+          </a:xfrm>
+          <a:prstGeom prst="rect">
+            <a:avLst/>
+          </a:prstGeom>
+          <a:noFill/>
+        </p:spPr>
+        <p:txBody>
+          <a:bodyPr wrap="square" rtlCol="0">
+            <a:spAutoFit/>
+          </a:bodyPr>
+          <a:lstStyle/>
+          <a:p>
+            <a:r>
+              <a:rPr lang="zh-CN" altLang="en-US" sz="2400" dirty="0">
+                <a:solidFill>
+                  <a:srgbClr val="4747BA"/>
+                </a:solidFill>
+                <a:ea typeface="+mn-lt"/>
+                <a:cs typeface="Times New Roman" panose="02020603050405020304" charset="0"/>
+              </a:rPr>
+              <a:t>单</a:t>
+            </a:r>
+            <a:r>
+              <a:rPr lang="en-US" altLang="zh-CN" sz="2400" dirty="0">
+                <a:solidFill>
+                  <a:srgbClr val="4747BA"/>
+                </a:solidFill>
+                <a:ea typeface="+mn-lt"/>
+                <a:cs typeface="Times New Roman" panose="02020603050405020304" charset="0"/>
+              </a:rPr>
+              <a:t>Zone</a:t>
+            </a:r>
+            <a:r>
+              <a:rPr lang="zh-CN" altLang="en-US" sz="2400" dirty="0">
+                <a:solidFill>
+                  <a:srgbClr val="4747BA"/>
+                </a:solidFill>
+                <a:ea typeface="+mn-lt"/>
+                <a:cs typeface="Times New Roman" panose="02020603050405020304" charset="0"/>
+              </a:rPr>
+              <a:t>写入测试</a:t>
+            </a:r>
+            <a:endParaRPr lang="en-US" altLang="zh-CN" sz="2400" dirty="0">
+              <a:solidFill>
+                <a:srgbClr val="4747BA"/>
+              </a:solidFill>
+              <a:ea typeface="+mn-lt"/>
+              <a:cs typeface="Times New Roman" panose="02020603050405020304" charset="0"/>
+            </a:endParaRPr>
+          </a:p>
+        </p:txBody>
+      </p:sp>
+      <p:sp>
+        <p:nvSpPr>
+          <p:cNvPr id="10" name="Fußzeilenplatzhalter 4">
+            <a:extLst>
+              <a:ext uri="{FF2B5EF4-FFF2-40B4-BE49-F238E27FC236}">
+                <a16:creationId xmlns:a16="http://schemas.microsoft.com/office/drawing/2014/main" id="{41291BC8-BAF3-496D-6C37-8B6EEABE8583}"/>
+              </a:ext>
+            </a:extLst>
+          </p:cNvPr>
+          <p:cNvSpPr>
+            <a:spLocks noGrp="1"/>
+          </p:cNvSpPr>
+          <p:nvPr>
+            <p:ph type="ftr" sz="quarter" idx="11"/>
+          </p:nvPr>
+        </p:nvSpPr>
+        <p:spPr>
+          <a:xfrm>
+            <a:off x="4095916" y="6553437"/>
+            <a:ext cx="4520431" cy="273844"/>
+          </a:xfrm>
+        </p:spPr>
+        <p:txBody>
+          <a:bodyPr/>
+          <a:lstStyle/>
+          <a:p>
+            <a:r>
+              <a:rPr lang="en-US" altLang="zh-CN" sz="1400" b="1" dirty="0" err="1">
+                <a:solidFill>
+                  <a:schemeClr val="bg1"/>
+                </a:solidFill>
+                <a:latin typeface="Constantia" panose="02030602050306030303" pitchFamily="18" charset="0"/>
+              </a:rPr>
+              <a:t>Ziqi</a:t>
+            </a:r>
+            <a:r>
+              <a:rPr lang="en-US" altLang="zh-CN" sz="1400" b="1" dirty="0">
+                <a:solidFill>
+                  <a:schemeClr val="bg1"/>
+                </a:solidFill>
+                <a:latin typeface="Constantia" panose="02030602050306030303" pitchFamily="18" charset="0"/>
+              </a:rPr>
+              <a:t> Liu | HUST</a:t>
+            </a:r>
+            <a:endParaRPr lang="zh-CN" altLang="en-US" sz="1400" b="1" dirty="0">
+              <a:solidFill>
+                <a:schemeClr val="bg1"/>
+              </a:solidFill>
+              <a:latin typeface="Constantia" panose="02030602050306030303" pitchFamily="18" charset="0"/>
+            </a:endParaRPr>
+          </a:p>
+        </p:txBody>
+      </p:sp>
       <p:pic>
         <p:nvPicPr>
-          <p:cNvPr id="18" name="图片 17"/>
-          <p:cNvPicPr>
-            <a:picLocks noChangeAspect="1"/>
-          </p:cNvPicPr>
+          <p:cNvPr id="16" name="图形 7">
+            <a:extLst>
+              <a:ext uri="{FF2B5EF4-FFF2-40B4-BE49-F238E27FC236}">
+                <a16:creationId xmlns:a16="http://schemas.microsoft.com/office/drawing/2014/main" id="{799610EE-4E5C-45A6-BD40-2877F4D9D982}"/>
+              </a:ext>
+            </a:extLst>
+          </p:cNvPr>
+          <p:cNvPicPr/>
           <p:nvPr/>
         </p:nvPicPr>
         <p:blipFill>
-          <a:blip r:embed="rId5" cstate="print">
+          <a:blip r:embed="rId5">
             <a:extLst>
-              <a:ext uri="{28A0092B-C50C-407E-A947-70E740481C1C}">
-                <a14:useLocalDpi xmlns:a14="http://schemas.microsoft.com/office/drawing/2010/main" val="0"/>
+              <a:ext uri="{96DAC541-7B7A-43D3-8B79-37D633B846F1}">
+                <asvg:svgBlip xmlns:asvg="http://schemas.microsoft.com/office/drawing/2016/SVG/main" r:embed="rId6"/>
               </a:ext>
             </a:extLst>
           </a:blip>
@@ -14647,22 +17892,283 @@
         </p:blipFill>
         <p:spPr>
           <a:xfrm>
-            <a:off x="8590829" y="204228"/>
-            <a:ext cx="3323471" cy="570629"/>
+            <a:off x="385590" y="2907407"/>
+            <a:ext cx="4993005" cy="2926080"/>
           </a:xfrm>
           <a:prstGeom prst="rect">
             <a:avLst/>
           </a:prstGeom>
         </p:spPr>
       </p:pic>
+      <p:pic>
+        <p:nvPicPr>
+          <p:cNvPr id="19" name="图形 6">
+            <a:extLst>
+              <a:ext uri="{FF2B5EF4-FFF2-40B4-BE49-F238E27FC236}">
+                <a16:creationId xmlns:a16="http://schemas.microsoft.com/office/drawing/2014/main" id="{F6BAC16D-33AB-4D16-B960-7D50A2D54EE2}"/>
+              </a:ext>
+            </a:extLst>
+          </p:cNvPr>
+          <p:cNvPicPr/>
+          <p:nvPr/>
+        </p:nvPicPr>
+        <p:blipFill>
+          <a:blip r:embed="rId7">
+            <a:extLst>
+              <a:ext uri="{96DAC541-7B7A-43D3-8B79-37D633B846F1}">
+                <asvg:svgBlip xmlns:asvg="http://schemas.microsoft.com/office/drawing/2016/SVG/main" r:embed="rId8"/>
+              </a:ext>
+            </a:extLst>
+          </a:blip>
+          <a:stretch>
+            <a:fillRect/>
+          </a:stretch>
+        </p:blipFill>
+        <p:spPr>
+          <a:xfrm>
+            <a:off x="6121528" y="2858296"/>
+            <a:ext cx="4993005" cy="2926081"/>
+          </a:xfrm>
+          <a:prstGeom prst="rect">
+            <a:avLst/>
+          </a:prstGeom>
+        </p:spPr>
+      </p:pic>
+      <p:sp>
+        <p:nvSpPr>
+          <p:cNvPr id="21" name="文本框 20">
+            <a:extLst>
+              <a:ext uri="{FF2B5EF4-FFF2-40B4-BE49-F238E27FC236}">
+                <a16:creationId xmlns:a16="http://schemas.microsoft.com/office/drawing/2014/main" id="{B73F8172-AEE1-4884-93B9-03D244E3AE0F}"/>
+              </a:ext>
+            </a:extLst>
+          </p:cNvPr>
+          <p:cNvSpPr txBox="1"/>
+          <p:nvPr/>
+        </p:nvSpPr>
+        <p:spPr>
+          <a:xfrm>
+            <a:off x="440055" y="1904249"/>
+            <a:ext cx="10543136" cy="923330"/>
+          </a:xfrm>
+          <a:prstGeom prst="rect">
+            <a:avLst/>
+          </a:prstGeom>
+          <a:noFill/>
+        </p:spPr>
+        <p:txBody>
+          <a:bodyPr wrap="square">
+            <a:spAutoFit/>
+          </a:bodyPr>
+          <a:lstStyle/>
+          <a:p>
+            <a:r>
+              <a:rPr lang="zh-CN" altLang="zh-CN" sz="1800" kern="100" dirty="0">
+                <a:effectLst/>
+                <a:latin typeface="Times New Roman" panose="02020603050405020304" pitchFamily="18" charset="0"/>
+                <a:ea typeface="宋体" panose="02010600030101010101" pitchFamily="2" charset="-122"/>
+                <a:cs typeface="Times New Roman" panose="02020603050405020304" pitchFamily="18" charset="0"/>
+              </a:rPr>
+              <a:t>在实际应用中，会出现某类型的数据仅写入单个指定</a:t>
+            </a:r>
+            <a:r>
+              <a:rPr lang="en-US" altLang="zh-CN" sz="1800" kern="100" dirty="0">
+                <a:effectLst/>
+                <a:latin typeface="Times New Roman" panose="02020603050405020304" pitchFamily="18" charset="0"/>
+                <a:ea typeface="宋体" panose="02010600030101010101" pitchFamily="2" charset="-122"/>
+              </a:rPr>
+              <a:t>Zone</a:t>
+            </a:r>
+            <a:r>
+              <a:rPr lang="zh-CN" altLang="zh-CN" sz="1800" kern="100" dirty="0">
+                <a:effectLst/>
+                <a:latin typeface="Times New Roman" panose="02020603050405020304" pitchFamily="18" charset="0"/>
+                <a:ea typeface="宋体" panose="02010600030101010101" pitchFamily="2" charset="-122"/>
+                <a:cs typeface="Times New Roman" panose="02020603050405020304" pitchFamily="18" charset="0"/>
+              </a:rPr>
+              <a:t>的情况（例如上文分析的</a:t>
+            </a:r>
+            <a:r>
+              <a:rPr lang="en-US" altLang="zh-CN" sz="1800" kern="100" dirty="0" err="1">
+                <a:effectLst/>
+                <a:latin typeface="Times New Roman" panose="02020603050405020304" pitchFamily="18" charset="0"/>
+                <a:ea typeface="宋体" panose="02010600030101010101" pitchFamily="2" charset="-122"/>
+              </a:rPr>
+              <a:t>RocksDB</a:t>
+            </a:r>
+            <a:r>
+              <a:rPr lang="zh-CN" altLang="zh-CN" sz="1800" kern="100" dirty="0">
+                <a:effectLst/>
+                <a:latin typeface="Times New Roman" panose="02020603050405020304" pitchFamily="18" charset="0"/>
+                <a:ea typeface="宋体" panose="02010600030101010101" pitchFamily="2" charset="-122"/>
+                <a:cs typeface="Times New Roman" panose="02020603050405020304" pitchFamily="18" charset="0"/>
+              </a:rPr>
+              <a:t>中的</a:t>
+            </a:r>
+            <a:r>
+              <a:rPr lang="en-US" altLang="zh-CN" sz="1800" kern="100" dirty="0">
+                <a:effectLst/>
+                <a:latin typeface="Times New Roman" panose="02020603050405020304" pitchFamily="18" charset="0"/>
+                <a:ea typeface="宋体" panose="02010600030101010101" pitchFamily="2" charset="-122"/>
+              </a:rPr>
+              <a:t>WAL</a:t>
+            </a:r>
+            <a:r>
+              <a:rPr lang="zh-CN" altLang="zh-CN" sz="1800" kern="100" dirty="0">
+                <a:effectLst/>
+                <a:latin typeface="Times New Roman" panose="02020603050405020304" pitchFamily="18" charset="0"/>
+                <a:ea typeface="宋体" panose="02010600030101010101" pitchFamily="2" charset="-122"/>
+                <a:cs typeface="Times New Roman" panose="02020603050405020304" pitchFamily="18" charset="0"/>
+              </a:rPr>
+              <a:t>文件），因此，测试不同情况下单个</a:t>
+            </a:r>
+            <a:r>
+              <a:rPr lang="en-US" altLang="zh-CN" sz="1800" kern="100" dirty="0">
+                <a:effectLst/>
+                <a:latin typeface="Times New Roman" panose="02020603050405020304" pitchFamily="18" charset="0"/>
+                <a:ea typeface="宋体" panose="02010600030101010101" pitchFamily="2" charset="-122"/>
+              </a:rPr>
+              <a:t>Zone</a:t>
+            </a:r>
+            <a:r>
+              <a:rPr lang="zh-CN" altLang="zh-CN" sz="1800" kern="100" dirty="0">
+                <a:effectLst/>
+                <a:latin typeface="Times New Roman" panose="02020603050405020304" pitchFamily="18" charset="0"/>
+                <a:ea typeface="宋体" panose="02010600030101010101" pitchFamily="2" charset="-122"/>
+                <a:cs typeface="Times New Roman" panose="02020603050405020304" pitchFamily="18" charset="0"/>
+              </a:rPr>
+              <a:t>的性能很有意义。分别使用三种</a:t>
+            </a:r>
+            <a:r>
+              <a:rPr lang="en-US" altLang="zh-CN" sz="1800" kern="100" dirty="0">
+                <a:effectLst/>
+                <a:latin typeface="Times New Roman" panose="02020603050405020304" pitchFamily="18" charset="0"/>
+                <a:ea typeface="宋体" panose="02010600030101010101" pitchFamily="2" charset="-122"/>
+              </a:rPr>
+              <a:t>I/O</a:t>
+            </a:r>
+            <a:r>
+              <a:rPr lang="zh-CN" altLang="zh-CN" sz="1800" kern="100" dirty="0">
+                <a:effectLst/>
+                <a:latin typeface="Times New Roman" panose="02020603050405020304" pitchFamily="18" charset="0"/>
+                <a:ea typeface="宋体" panose="02010600030101010101" pitchFamily="2" charset="-122"/>
+                <a:cs typeface="Times New Roman" panose="02020603050405020304" pitchFamily="18" charset="0"/>
+              </a:rPr>
+              <a:t>引擎，在不同的块大小下进行单</a:t>
+            </a:r>
+            <a:r>
+              <a:rPr lang="en-US" altLang="zh-CN" sz="1800" kern="100" dirty="0">
+                <a:effectLst/>
+                <a:latin typeface="Times New Roman" panose="02020603050405020304" pitchFamily="18" charset="0"/>
+                <a:ea typeface="宋体" panose="02010600030101010101" pitchFamily="2" charset="-122"/>
+              </a:rPr>
+              <a:t>Zone</a:t>
+            </a:r>
+            <a:r>
+              <a:rPr lang="zh-CN" altLang="zh-CN" sz="1800" kern="100" dirty="0">
+                <a:effectLst/>
+                <a:latin typeface="Times New Roman" panose="02020603050405020304" pitchFamily="18" charset="0"/>
+                <a:ea typeface="宋体" panose="02010600030101010101" pitchFamily="2" charset="-122"/>
+                <a:cs typeface="Times New Roman" panose="02020603050405020304" pitchFamily="18" charset="0"/>
+              </a:rPr>
+              <a:t>写入测试</a:t>
+            </a:r>
+            <a:r>
+              <a:rPr lang="zh-CN" altLang="en-US" sz="1800" kern="100" dirty="0">
+                <a:effectLst/>
+                <a:latin typeface="Times New Roman" panose="02020603050405020304" pitchFamily="18" charset="0"/>
+                <a:ea typeface="宋体" panose="02010600030101010101" pitchFamily="2" charset="-122"/>
+                <a:cs typeface="Times New Roman" panose="02020603050405020304" pitchFamily="18" charset="0"/>
+              </a:rPr>
+              <a:t>，结果如下。</a:t>
+            </a:r>
+            <a:endParaRPr lang="zh-CN" altLang="en-US" dirty="0"/>
+          </a:p>
+        </p:txBody>
+      </p:sp>
+      <p:sp>
+        <p:nvSpPr>
+          <p:cNvPr id="27" name="文本框 26">
+            <a:extLst>
+              <a:ext uri="{FF2B5EF4-FFF2-40B4-BE49-F238E27FC236}">
+                <a16:creationId xmlns:a16="http://schemas.microsoft.com/office/drawing/2014/main" id="{82341366-4E61-45FA-B7C4-58EA1BEF8A57}"/>
+              </a:ext>
+            </a:extLst>
+          </p:cNvPr>
+          <p:cNvSpPr txBox="1"/>
+          <p:nvPr/>
+        </p:nvSpPr>
+        <p:spPr>
+          <a:xfrm>
+            <a:off x="281680" y="299000"/>
+            <a:ext cx="6798981" cy="535531"/>
+          </a:xfrm>
+          <a:prstGeom prst="rect">
+            <a:avLst/>
+          </a:prstGeom>
+          <a:noFill/>
+        </p:spPr>
+        <p:txBody>
+          <a:bodyPr wrap="square" rtlCol="0">
+            <a:spAutoFit/>
+          </a:bodyPr>
+          <a:lstStyle/>
+          <a:p>
+            <a:pPr>
+              <a:lnSpc>
+                <a:spcPct val="90000"/>
+              </a:lnSpc>
+              <a:spcBef>
+                <a:spcPts val="1000"/>
+              </a:spcBef>
+              <a:defRPr/>
+            </a:pPr>
+            <a:r>
+              <a:rPr lang="en-US" altLang="zh-CN" sz="3200" b="1" dirty="0">
+                <a:solidFill>
+                  <a:srgbClr val="4747BA"/>
+                </a:solidFill>
+                <a:latin typeface="Constantia" panose="02030602050306030303" pitchFamily="18" charset="0"/>
+                <a:ea typeface="腾讯体 W3" panose="020C04030202040F0204" pitchFamily="34" charset="-122"/>
+                <a:cs typeface="Times" panose="02020603050405020304" pitchFamily="18" charset="0"/>
+              </a:rPr>
+              <a:t> </a:t>
+            </a:r>
+            <a:r>
+              <a:rPr lang="zh-CN" altLang="en-US" sz="3200" b="1" dirty="0">
+                <a:solidFill>
+                  <a:srgbClr val="4747BA"/>
+                </a:solidFill>
+                <a:latin typeface="Constantia" panose="02030602050306030303" pitchFamily="18" charset="0"/>
+                <a:ea typeface="腾讯体 W3" panose="020C04030202040F0204" pitchFamily="34" charset="-122"/>
+                <a:cs typeface="Times" panose="02020603050405020304" pitchFamily="18" charset="0"/>
+              </a:rPr>
+              <a:t>实验评估</a:t>
+            </a:r>
+            <a:endParaRPr lang="zh-CN" altLang="en-US" sz="3600" b="1" dirty="0">
+              <a:solidFill>
+                <a:srgbClr val="4747BA"/>
+              </a:solidFill>
+              <a:latin typeface="Constantia" panose="02030602050306030303" pitchFamily="18" charset="0"/>
+              <a:ea typeface="腾讯体 W3" panose="020C04030202040F0204" pitchFamily="34" charset="-122"/>
+              <a:cs typeface="Times" panose="02020603050405020304" pitchFamily="18" charset="0"/>
+            </a:endParaRPr>
+          </a:p>
+        </p:txBody>
+      </p:sp>
     </p:spTree>
+    <p:extLst>
+      <p:ext uri="{BB962C8B-B14F-4D97-AF65-F5344CB8AC3E}">
+        <p14:creationId xmlns:p14="http://schemas.microsoft.com/office/powerpoint/2010/main" val="3248152468"/>
+      </p:ext>
+    </p:extLst>
   </p:cSld>
   <p:clrMapOvr>
     <a:masterClrMapping/>
   </p:clrMapOvr>
   <mc:AlternateContent xmlns:mc="http://schemas.openxmlformats.org/markup-compatibility/2006" xmlns:p14="http://schemas.microsoft.com/office/powerpoint/2010/main">
     <mc:Choice Requires="p14">
-      <p:transition p14:dur="0" advClick="0"/>
+      <p:transition p14:dur="10" advClick="0"/>
     </mc:Choice>
     <mc:Fallback xmlns="">
       <p:transition advClick="0"/>
@@ -14676,13 +18182,7 @@
   <p:cSld>
     <p:spTree>
       <p:nvGrpSpPr>
-        <p:cNvPr id="1" name="">
-          <a:extLst>
-            <a:ext uri="{FF2B5EF4-FFF2-40B4-BE49-F238E27FC236}">
-              <a16:creationId xmlns:a16="http://schemas.microsoft.com/office/drawing/2014/main" id="{6604C42E-10F4-5ED3-3B5F-98D4CE0CFD56}"/>
-            </a:ext>
-          </a:extLst>
-        </p:cNvPr>
+        <p:cNvPr id="1" name=""/>
         <p:cNvGrpSpPr/>
         <p:nvPr/>
       </p:nvGrpSpPr>
@@ -14696,13 +18196,7 @@
       </p:grpSpPr>
       <p:sp>
         <p:nvSpPr>
-          <p:cNvPr id="17" name="矩形 16">
-            <a:extLst>
-              <a:ext uri="{FF2B5EF4-FFF2-40B4-BE49-F238E27FC236}">
-                <a16:creationId xmlns:a16="http://schemas.microsoft.com/office/drawing/2014/main" id="{D51A506B-621B-19F1-C0B5-853F3F9955B6}"/>
-              </a:ext>
-            </a:extLst>
-          </p:cNvPr>
+          <p:cNvPr id="17" name="矩形 16"/>
           <p:cNvSpPr/>
           <p:nvPr/>
         </p:nvSpPr>
@@ -14748,13 +18242,7 @@
       </p:sp>
       <p:sp>
         <p:nvSpPr>
-          <p:cNvPr id="18" name="矩形 17">
-            <a:extLst>
-              <a:ext uri="{FF2B5EF4-FFF2-40B4-BE49-F238E27FC236}">
-                <a16:creationId xmlns:a16="http://schemas.microsoft.com/office/drawing/2014/main" id="{6C320792-7830-48E2-B090-5666E8D0E690}"/>
-              </a:ext>
-            </a:extLst>
-          </p:cNvPr>
+          <p:cNvPr id="18" name="矩形 17"/>
           <p:cNvSpPr/>
           <p:nvPr/>
         </p:nvSpPr>
@@ -14800,19 +18288,13 @@
       </p:sp>
       <p:sp>
         <p:nvSpPr>
-          <p:cNvPr id="20" name="矩形 19">
-            <a:extLst>
-              <a:ext uri="{FF2B5EF4-FFF2-40B4-BE49-F238E27FC236}">
-                <a16:creationId xmlns:a16="http://schemas.microsoft.com/office/drawing/2014/main" id="{013210B2-860D-157F-97C1-BD8694B816DF}"/>
-              </a:ext>
-            </a:extLst>
-          </p:cNvPr>
+          <p:cNvPr id="20" name="矩形 19"/>
           <p:cNvSpPr/>
           <p:nvPr/>
         </p:nvSpPr>
         <p:spPr>
           <a:xfrm>
-            <a:off x="8534400" y="6538313"/>
+            <a:off x="8534400" y="6522720"/>
             <a:ext cx="3657600" cy="335280"/>
           </a:xfrm>
           <a:prstGeom prst="rect">
@@ -14953,13 +18435,7 @@
       </p:sp>
       <p:sp>
         <p:nvSpPr>
-          <p:cNvPr id="24" name="日期占位符 7">
-            <a:extLst>
-              <a:ext uri="{FF2B5EF4-FFF2-40B4-BE49-F238E27FC236}">
-                <a16:creationId xmlns:a16="http://schemas.microsoft.com/office/drawing/2014/main" id="{04FB94FE-7A75-B338-DF78-EC0146B17384}"/>
-              </a:ext>
-            </a:extLst>
-          </p:cNvPr>
+          <p:cNvPr id="24" name="日期占位符 7"/>
           <p:cNvSpPr>
             <a:spLocks noGrp="1"/>
           </p:cNvSpPr>
@@ -14999,13 +18475,7 @@
       </p:sp>
       <p:cxnSp>
         <p:nvCxnSpPr>
-          <p:cNvPr id="26" name="直接连接符 25">
-            <a:extLst>
-              <a:ext uri="{FF2B5EF4-FFF2-40B4-BE49-F238E27FC236}">
-                <a16:creationId xmlns:a16="http://schemas.microsoft.com/office/drawing/2014/main" id="{017194FE-5173-1130-5C32-0A2D4672BBC3}"/>
-              </a:ext>
-            </a:extLst>
-          </p:cNvPr>
+          <p:cNvPr id="26" name="直接连接符 25"/>
           <p:cNvCxnSpPr/>
           <p:nvPr/>
         </p:nvCxnSpPr>
@@ -15040,13 +18510,7 @@
       </p:cxnSp>
       <p:pic>
         <p:nvPicPr>
-          <p:cNvPr id="23" name="图片 22">
-            <a:extLst>
-              <a:ext uri="{FF2B5EF4-FFF2-40B4-BE49-F238E27FC236}">
-                <a16:creationId xmlns:a16="http://schemas.microsoft.com/office/drawing/2014/main" id="{66E33C7C-231E-4438-897B-C3ABD8160DF5}"/>
-              </a:ext>
-            </a:extLst>
-          </p:cNvPr>
+          <p:cNvPr id="23" name="图片 22"/>
           <p:cNvPicPr>
             <a:picLocks noChangeAspect="1"/>
           </p:cNvPicPr>
@@ -15076,13 +18540,7 @@
       </p:pic>
       <p:sp>
         <p:nvSpPr>
-          <p:cNvPr id="14" name="灯片编号占位符 8">
-            <a:extLst>
-              <a:ext uri="{FF2B5EF4-FFF2-40B4-BE49-F238E27FC236}">
-                <a16:creationId xmlns:a16="http://schemas.microsoft.com/office/drawing/2014/main" id="{3CFF1627-F6E7-0DD5-39D6-62C425AED19F}"/>
-              </a:ext>
-            </a:extLst>
-          </p:cNvPr>
+          <p:cNvPr id="14" name="灯片编号占位符 8"/>
           <p:cNvSpPr>
             <a:spLocks noGrp="1"/>
           </p:cNvSpPr>
@@ -15123,13 +18581,7 @@
       </p:sp>
       <p:pic>
         <p:nvPicPr>
-          <p:cNvPr id="44" name="图片 43">
-            <a:extLst>
-              <a:ext uri="{FF2B5EF4-FFF2-40B4-BE49-F238E27FC236}">
-                <a16:creationId xmlns:a16="http://schemas.microsoft.com/office/drawing/2014/main" id="{8586C700-5327-41F3-1FDE-1F18A360E694}"/>
-              </a:ext>
-            </a:extLst>
-          </p:cNvPr>
+          <p:cNvPr id="44" name="图片 43"/>
           <p:cNvPicPr>
             <a:picLocks noChangeAspect="1"/>
           </p:cNvPicPr>
@@ -15159,10 +18611,52 @@
       </p:pic>
       <p:sp>
         <p:nvSpPr>
+          <p:cNvPr id="2" name="文本框 1"/>
+          <p:cNvSpPr txBox="1"/>
+          <p:nvPr/>
+        </p:nvSpPr>
+        <p:spPr>
+          <a:xfrm>
+            <a:off x="440055" y="1144352"/>
+            <a:ext cx="6951980" cy="460375"/>
+          </a:xfrm>
+          <a:prstGeom prst="rect">
+            <a:avLst/>
+          </a:prstGeom>
+          <a:noFill/>
+        </p:spPr>
+        <p:txBody>
+          <a:bodyPr wrap="square" rtlCol="0">
+            <a:spAutoFit/>
+          </a:bodyPr>
+          <a:lstStyle/>
+          <a:p>
+            <a:r>
+              <a:rPr lang="zh-CN" altLang="en-US" sz="2400" dirty="0">
+                <a:solidFill>
+                  <a:srgbClr val="4747BA"/>
+                </a:solidFill>
+                <a:ea typeface="+mn-lt"/>
+                <a:cs typeface="Times New Roman" panose="02020603050405020304" charset="0"/>
+              </a:rPr>
+              <a:t>全盘写入测试</a:t>
+            </a:r>
+            <a:endParaRPr lang="en-US" altLang="zh-CN" sz="2400" dirty="0">
+              <a:solidFill>
+                <a:srgbClr val="4747BA"/>
+              </a:solidFill>
+              <a:ea typeface="+mn-lt"/>
+              <a:cs typeface="Times New Roman" panose="02020603050405020304" charset="0"/>
+            </a:endParaRPr>
+          </a:p>
+        </p:txBody>
+      </p:sp>
+      <p:sp>
+        <p:nvSpPr>
           <p:cNvPr id="10" name="Fußzeilenplatzhalter 4">
             <a:extLst>
               <a:ext uri="{FF2B5EF4-FFF2-40B4-BE49-F238E27FC236}">
-                <a16:creationId xmlns:a16="http://schemas.microsoft.com/office/drawing/2014/main" id="{01D48FFE-4ABA-FC39-7F38-70ECC3997D2D}"/>
+                <a16:creationId xmlns:a16="http://schemas.microsoft.com/office/drawing/2014/main" id="{41291BC8-BAF3-496D-6C37-8B6EEABE8583}"/>
               </a:ext>
             </a:extLst>
           </p:cNvPr>
@@ -15212,191 +18706,10 @@
       </p:sp>
       <p:sp>
         <p:nvSpPr>
-          <p:cNvPr id="3" name="Rectangle 2">
+          <p:cNvPr id="21" name="文本框 20">
             <a:extLst>
               <a:ext uri="{FF2B5EF4-FFF2-40B4-BE49-F238E27FC236}">
-                <a16:creationId xmlns:a16="http://schemas.microsoft.com/office/drawing/2014/main" id="{E8BFC340-C6DF-6141-944C-D4EACBBF7C1E}"/>
-              </a:ext>
-            </a:extLst>
-          </p:cNvPr>
-          <p:cNvSpPr>
-            <a:spLocks noChangeArrowheads="1"/>
-          </p:cNvSpPr>
-          <p:nvPr/>
-        </p:nvSpPr>
-        <p:spPr bwMode="auto">
-          <a:xfrm>
-            <a:off x="382293" y="2170780"/>
-            <a:ext cx="11320635" cy="423899"/>
-          </a:xfrm>
-          <a:prstGeom prst="rect">
-            <a:avLst/>
-          </a:prstGeom>
-          <a:noFill/>
-          <a:ln>
-            <a:noFill/>
-          </a:ln>
-          <a:effectLst/>
-          <a:extLst>
-            <a:ext uri="{909E8E84-426E-40DD-AFC4-6F175D3DCCD1}">
-              <a14:hiddenFill xmlns:a14="http://schemas.microsoft.com/office/drawing/2010/main">
-                <a:solidFill>
-                  <a:schemeClr val="accent1"/>
-                </a:solidFill>
-              </a14:hiddenFill>
-            </a:ext>
-            <a:ext uri="{91240B29-F687-4F45-9708-019B960494DF}">
-              <a14:hiddenLine xmlns:a14="http://schemas.microsoft.com/office/drawing/2010/main" w="9525">
-                <a:solidFill>
-                  <a:schemeClr val="tx1"/>
-                </a:solidFill>
-                <a:miter lim="800000"/>
-                <a:headEnd/>
-                <a:tailEnd/>
-              </a14:hiddenLine>
-            </a:ext>
-            <a:ext uri="{AF507438-7753-43E0-B8FC-AC1667EBCBE1}">
-              <a14:hiddenEffects xmlns:a14="http://schemas.microsoft.com/office/drawing/2010/main">
-                <a:effectLst>
-                  <a:outerShdw dist="35921" dir="2700000" algn="ctr" rotWithShape="0">
-                    <a:schemeClr val="bg2"/>
-                  </a:outerShdw>
-                </a:effectLst>
-              </a14:hiddenEffects>
-            </a:ext>
-          </a:extLst>
-        </p:spPr>
-        <p:txBody>
-          <a:bodyPr vert="horz" wrap="square" lIns="91440" tIns="45720" rIns="91440" bIns="45720" numCol="1" anchor="t" anchorCtr="0" compatLnSpc="1">
-            <a:prstTxWarp prst="textNoShape">
-              <a:avLst/>
-            </a:prstTxWarp>
-            <a:spAutoFit/>
-          </a:bodyPr>
-          <a:lstStyle/>
-          <a:p>
-            <a:pPr marR="0" lvl="0" indent="0" fontAlgn="base">
-              <a:lnSpc>
-                <a:spcPct val="130000"/>
-              </a:lnSpc>
-              <a:spcBef>
-                <a:spcPct val="0"/>
-              </a:spcBef>
-              <a:spcAft>
-                <a:spcPct val="0"/>
-              </a:spcAft>
-              <a:buClrTx/>
-              <a:buSzTx/>
-              <a:buFontTx/>
-              <a:buNone/>
-              <a:tabLst/>
-            </a:pPr>
-            <a:r>
-              <a:rPr lang="zh-CN" altLang="en-US" dirty="0">
-                <a:solidFill>
-                  <a:srgbClr val="4747BA"/>
-                </a:solidFill>
-                <a:ea typeface="+mn-lt"/>
-                <a:cs typeface="Times New Roman" panose="02020603050405020304" charset="0"/>
-              </a:rPr>
-              <a:t>硬件</a:t>
-            </a:r>
-            <a:r>
-              <a:rPr lang="zh-CN" altLang="en-US" dirty="0">
-                <a:solidFill>
-                  <a:srgbClr val="374151"/>
-                </a:solidFill>
-                <a:latin typeface="_5b8b_4f53"/>
-              </a:rPr>
-              <a:t>方面，已有领先的</a:t>
-            </a:r>
-            <a:r>
-              <a:rPr lang="en-US" altLang="zh-CN" dirty="0">
-                <a:solidFill>
-                  <a:srgbClr val="374151"/>
-                </a:solidFill>
-                <a:latin typeface="_5b8b_4f53"/>
-              </a:rPr>
-              <a:t>SSD</a:t>
-            </a:r>
-            <a:r>
-              <a:rPr lang="zh-CN" altLang="en-US" dirty="0">
-                <a:solidFill>
-                  <a:srgbClr val="374151"/>
-                </a:solidFill>
-                <a:latin typeface="_5b8b_4f53"/>
-              </a:rPr>
-              <a:t>制造商，例如三星和西部数据，已经发布</a:t>
-            </a:r>
-            <a:r>
-              <a:rPr lang="en-US" altLang="zh-CN" dirty="0">
-                <a:solidFill>
-                  <a:srgbClr val="374151"/>
-                </a:solidFill>
-                <a:latin typeface="_5b8b_4f53"/>
-              </a:rPr>
-              <a:t>ZNS</a:t>
-            </a:r>
-            <a:r>
-              <a:rPr lang="zh-CN" altLang="en-US" dirty="0">
-                <a:solidFill>
-                  <a:srgbClr val="374151"/>
-                </a:solidFill>
-                <a:latin typeface="_5b8b_4f53"/>
-              </a:rPr>
-              <a:t>产品并展开研究，例如</a:t>
-            </a:r>
-            <a:r>
-              <a:rPr lang="en-US" altLang="zh-CN" dirty="0">
-                <a:solidFill>
-                  <a:srgbClr val="374151"/>
-                </a:solidFill>
-                <a:latin typeface="_5b8b_4f53"/>
-              </a:rPr>
-              <a:t>ZNS+</a:t>
-            </a:r>
-            <a:r>
-              <a:rPr lang="zh-CN" altLang="en-US" dirty="0">
-                <a:solidFill>
-                  <a:srgbClr val="374151"/>
-                </a:solidFill>
-                <a:latin typeface="_5b8b_4f53"/>
-              </a:rPr>
-              <a:t>、</a:t>
-            </a:r>
-            <a:r>
-              <a:rPr lang="en-US" altLang="zh-CN" dirty="0" err="1">
-                <a:solidFill>
-                  <a:srgbClr val="374151"/>
-                </a:solidFill>
-                <a:latin typeface="_5b8b_4f53"/>
-              </a:rPr>
-              <a:t>eZNS</a:t>
-            </a:r>
-            <a:r>
-              <a:rPr lang="zh-CN" altLang="en-US" dirty="0">
-                <a:solidFill>
-                  <a:srgbClr val="374151"/>
-                </a:solidFill>
-                <a:latin typeface="_5b8b_4f53"/>
-              </a:rPr>
-              <a:t>等。</a:t>
-            </a:r>
-            <a:endParaRPr lang="en-US" altLang="zh-CN" dirty="0">
-              <a:solidFill>
-                <a:srgbClr val="374151"/>
-              </a:solidFill>
-              <a:latin typeface="_5b8b_4f53"/>
-            </a:endParaRPr>
-          </a:p>
-        </p:txBody>
-      </p:sp>
-      <p:sp>
-        <p:nvSpPr>
-          <p:cNvPr id="7" name="文本框 6">
-            <a:extLst>
-              <a:ext uri="{FF2B5EF4-FFF2-40B4-BE49-F238E27FC236}">
-                <a16:creationId xmlns:a16="http://schemas.microsoft.com/office/drawing/2014/main" id="{D846D055-CA89-DE0A-CA6C-E34377174990}"/>
+                <a16:creationId xmlns:a16="http://schemas.microsoft.com/office/drawing/2014/main" id="{B73F8172-AEE1-4884-93B9-03D244E3AE0F}"/>
               </a:ext>
             </a:extLst>
           </p:cNvPr>
@@ -15405,8 +18718,8 @@
         </p:nvSpPr>
         <p:spPr>
           <a:xfrm>
-            <a:off x="396807" y="2859011"/>
-            <a:ext cx="11553118" cy="1296445"/>
+            <a:off x="440055" y="1722906"/>
+            <a:ext cx="10543136" cy="923330"/>
           </a:xfrm>
           <a:prstGeom prst="rect">
             <a:avLst/>
@@ -15414,235 +18727,353 @@
           <a:noFill/>
         </p:spPr>
         <p:txBody>
-          <a:bodyPr wrap="square" anchor="t">
+          <a:bodyPr wrap="square">
             <a:spAutoFit/>
           </a:bodyPr>
           <a:lstStyle/>
           <a:p>
-            <a:pPr fontAlgn="base">
-              <a:lnSpc>
-                <a:spcPct val="150000"/>
-              </a:lnSpc>
-              <a:spcBef>
-                <a:spcPct val="0"/>
-              </a:spcBef>
-              <a:spcAft>
-                <a:spcPct val="0"/>
-              </a:spcAft>
-            </a:pPr>
-            <a:r>
-              <a:rPr lang="zh-CN" altLang="en-US" dirty="0">
-                <a:solidFill>
-                  <a:srgbClr val="4747BA"/>
-                </a:solidFill>
-                <a:latin typeface="_5b8b_4f53"/>
-                <a:ea typeface="+mn-lt"/>
-                <a:cs typeface="Times New Roman" panose="02020603050405020304" charset="0"/>
-              </a:rPr>
-              <a:t>软件</a:t>
-            </a:r>
-            <a:r>
-              <a:rPr lang="zh-CN" altLang="zh-CN" dirty="0">
-                <a:solidFill>
-                  <a:srgbClr val="374151"/>
-                </a:solidFill>
-                <a:latin typeface="_5b8b_4f53"/>
-              </a:rPr>
-              <a:t>方面</a:t>
-            </a:r>
-            <a:r>
-              <a:rPr lang="zh-CN" altLang="en-US" dirty="0">
-                <a:solidFill>
-                  <a:srgbClr val="374151"/>
-                </a:solidFill>
-                <a:latin typeface="_5b8b_4f53"/>
-              </a:rPr>
-              <a:t>，</a:t>
-            </a:r>
-            <a:r>
-              <a:rPr lang="zh-CN" altLang="zh-CN" dirty="0">
-                <a:solidFill>
-                  <a:srgbClr val="374151"/>
-                </a:solidFill>
-                <a:latin typeface="_5b8b_4f53"/>
-              </a:rPr>
-              <a:t>基于</a:t>
-            </a:r>
-            <a:r>
-              <a:rPr lang="en-US" altLang="zh-CN" dirty="0">
-                <a:solidFill>
-                  <a:srgbClr val="374151"/>
-                </a:solidFill>
-                <a:latin typeface="_5b8b_4f53"/>
-              </a:rPr>
-              <a:t>ZNS</a:t>
-            </a:r>
-            <a:r>
-              <a:rPr lang="zh-CN" altLang="en-US" dirty="0">
-                <a:solidFill>
-                  <a:srgbClr val="374151"/>
-                </a:solidFill>
-                <a:latin typeface="_5b8b_4f53"/>
-              </a:rPr>
-              <a:t>的研究主要集中在键值存储领域，尤其是基于</a:t>
-            </a:r>
-            <a:r>
-              <a:rPr lang="en-US" altLang="zh-CN" dirty="0">
-                <a:solidFill>
-                  <a:srgbClr val="374151"/>
-                </a:solidFill>
-                <a:latin typeface="_5b8b_4f53"/>
-              </a:rPr>
-              <a:t>LSM-tree</a:t>
-            </a:r>
-            <a:r>
-              <a:rPr lang="zh-CN" altLang="en-US" dirty="0">
-                <a:solidFill>
-                  <a:srgbClr val="374151"/>
-                </a:solidFill>
-                <a:latin typeface="_5b8b_4f53"/>
-              </a:rPr>
-              <a:t>的键值存储优化：考虑到</a:t>
-            </a:r>
-            <a:r>
-              <a:rPr lang="en-US" altLang="zh-CN" dirty="0">
-                <a:solidFill>
-                  <a:srgbClr val="374151"/>
-                </a:solidFill>
-                <a:latin typeface="_5b8b_4f53"/>
-              </a:rPr>
-              <a:t>ZNS SSD</a:t>
-            </a:r>
-            <a:r>
-              <a:rPr lang="zh-CN" altLang="en-US" dirty="0">
-                <a:solidFill>
-                  <a:srgbClr val="374151"/>
-                </a:solidFill>
-                <a:latin typeface="_5b8b_4f53"/>
-              </a:rPr>
-              <a:t>和</a:t>
-            </a:r>
-            <a:r>
-              <a:rPr lang="en-US" altLang="zh-CN" dirty="0">
-                <a:solidFill>
-                  <a:srgbClr val="374151"/>
-                </a:solidFill>
-                <a:latin typeface="_5b8b_4f53"/>
-              </a:rPr>
-              <a:t>LSM-tree</a:t>
-            </a:r>
-            <a:r>
-              <a:rPr lang="zh-CN" altLang="en-US" dirty="0">
-                <a:solidFill>
-                  <a:srgbClr val="374151"/>
-                </a:solidFill>
-                <a:latin typeface="_5b8b_4f53"/>
-              </a:rPr>
-              <a:t>都遵循严格的顺序写约束，其软硬件特征高度重合， 可以将一些应用移植到</a:t>
-            </a:r>
-            <a:r>
-              <a:rPr lang="en-US" altLang="zh-CN" dirty="0">
-                <a:solidFill>
-                  <a:srgbClr val="374151"/>
-                </a:solidFill>
-                <a:latin typeface="_5b8b_4f53"/>
-              </a:rPr>
-              <a:t>ZNS SSD</a:t>
-            </a:r>
-            <a:r>
-              <a:rPr lang="zh-CN" altLang="en-US" dirty="0">
-                <a:solidFill>
-                  <a:srgbClr val="374151"/>
-                </a:solidFill>
-                <a:latin typeface="_5b8b_4f53"/>
-              </a:rPr>
-              <a:t>上获得更好的性能。典型案例如基于</a:t>
-            </a:r>
-            <a:r>
-              <a:rPr lang="en-US" altLang="zh-CN" dirty="0" err="1">
-                <a:solidFill>
-                  <a:srgbClr val="374151"/>
-                </a:solidFill>
-                <a:latin typeface="_5b8b_4f53"/>
-              </a:rPr>
-              <a:t>ZenFS</a:t>
-            </a:r>
-            <a:r>
-              <a:rPr lang="zh-CN" altLang="en-US" dirty="0">
-                <a:solidFill>
-                  <a:srgbClr val="374151"/>
-                </a:solidFill>
-                <a:latin typeface="_5b8b_4f53"/>
-              </a:rPr>
-              <a:t>的</a:t>
-            </a:r>
-            <a:r>
-              <a:rPr lang="en-US" altLang="zh-CN" dirty="0" err="1">
-                <a:solidFill>
-                  <a:srgbClr val="374151"/>
-                </a:solidFill>
-                <a:latin typeface="_5b8b_4f53"/>
-              </a:rPr>
-              <a:t>RocksDB</a:t>
-            </a:r>
-            <a:r>
-              <a:rPr lang="zh-CN" altLang="en-US" dirty="0">
-                <a:solidFill>
-                  <a:srgbClr val="374151"/>
-                </a:solidFill>
-                <a:latin typeface="_5b8b_4f53"/>
-              </a:rPr>
-              <a:t>。其他基于</a:t>
-            </a:r>
-            <a:r>
-              <a:rPr lang="en-US" altLang="zh-CN" dirty="0">
-                <a:solidFill>
-                  <a:srgbClr val="374151"/>
-                </a:solidFill>
-                <a:latin typeface="_5b8b_4f53"/>
-              </a:rPr>
-              <a:t>LSM-tree</a:t>
-            </a:r>
-            <a:r>
-              <a:rPr lang="zh-CN" altLang="en-US" dirty="0">
-                <a:solidFill>
-                  <a:srgbClr val="374151"/>
-                </a:solidFill>
-                <a:latin typeface="_5b8b_4f53"/>
-              </a:rPr>
-              <a:t>应用的优化工作例如，</a:t>
-            </a:r>
-            <a:r>
-              <a:rPr lang="en-US" altLang="zh-CN" sz="1800" dirty="0"/>
-              <a:t>WALTZ</a:t>
-            </a:r>
-            <a:r>
-              <a:rPr lang="zh-CN" altLang="en-US" sz="1800" dirty="0"/>
-              <a:t>，</a:t>
-            </a:r>
-            <a:r>
-              <a:rPr lang="en-US" altLang="zh-CN" sz="1800" dirty="0"/>
-              <a:t>ZNSKV</a:t>
-            </a:r>
-            <a:r>
-              <a:rPr lang="zh-CN" altLang="en-US" sz="1800" dirty="0"/>
-              <a:t>。</a:t>
-            </a:r>
-            <a:endParaRPr lang="en-US" altLang="zh-CN" dirty="0">
-              <a:solidFill>
-                <a:srgbClr val="374151"/>
-              </a:solidFill>
-              <a:latin typeface="_5b8b_4f53"/>
-            </a:endParaRPr>
-          </a:p>
-        </p:txBody>
-      </p:sp>
-      <p:sp>
-        <p:nvSpPr>
-          <p:cNvPr id="15" name="文本框 14">
+            <a:r>
+              <a:rPr lang="zh-CN" altLang="en-US" sz="1800" kern="100" dirty="0">
+                <a:effectLst/>
+                <a:latin typeface="Times New Roman" panose="02020603050405020304" pitchFamily="18" charset="0"/>
+                <a:ea typeface="宋体" panose="02010600030101010101" pitchFamily="2" charset="-122"/>
+                <a:cs typeface="Times New Roman" panose="02020603050405020304" pitchFamily="18" charset="0"/>
+              </a:rPr>
+              <a:t>为了评估不同块大小和线程数对写入速度和</a:t>
+            </a:r>
+            <a:r>
+              <a:rPr lang="en-US" altLang="zh-CN" sz="1800" kern="100" dirty="0">
+                <a:effectLst/>
+                <a:latin typeface="Times New Roman" panose="02020603050405020304" pitchFamily="18" charset="0"/>
+                <a:ea typeface="宋体" panose="02010600030101010101" pitchFamily="2" charset="-122"/>
+                <a:cs typeface="Times New Roman" panose="02020603050405020304" pitchFamily="18" charset="0"/>
+              </a:rPr>
+              <a:t>IOPS</a:t>
+            </a:r>
+            <a:r>
+              <a:rPr lang="zh-CN" altLang="en-US" sz="1800" kern="100" dirty="0">
+                <a:effectLst/>
+                <a:latin typeface="Times New Roman" panose="02020603050405020304" pitchFamily="18" charset="0"/>
+                <a:ea typeface="宋体" panose="02010600030101010101" pitchFamily="2" charset="-122"/>
+                <a:cs typeface="Times New Roman" panose="02020603050405020304" pitchFamily="18" charset="0"/>
+              </a:rPr>
+              <a:t>的影响，我们设计并实施了一系列测试。测试配置包括使</a:t>
+            </a:r>
+            <a:r>
+              <a:rPr lang="en-US" altLang="zh-CN" sz="1800" kern="100" dirty="0" err="1">
+                <a:effectLst/>
+                <a:latin typeface="Times New Roman" panose="02020603050405020304" pitchFamily="18" charset="0"/>
+                <a:ea typeface="宋体" panose="02010600030101010101" pitchFamily="2" charset="-122"/>
+                <a:cs typeface="Times New Roman" panose="02020603050405020304" pitchFamily="18" charset="0"/>
+              </a:rPr>
+              <a:t>io_uring</a:t>
+            </a:r>
+            <a:r>
+              <a:rPr lang="zh-CN" altLang="en-US" sz="1800" kern="100" dirty="0">
+                <a:effectLst/>
+                <a:latin typeface="Times New Roman" panose="02020603050405020304" pitchFamily="18" charset="0"/>
+                <a:ea typeface="宋体" panose="02010600030101010101" pitchFamily="2" charset="-122"/>
+                <a:cs typeface="Times New Roman" panose="02020603050405020304" pitchFamily="18" charset="0"/>
+              </a:rPr>
+              <a:t>作为</a:t>
+            </a:r>
+            <a:r>
+              <a:rPr lang="en-US" altLang="zh-CN" sz="1800" kern="100" dirty="0">
+                <a:effectLst/>
+                <a:latin typeface="Times New Roman" panose="02020603050405020304" pitchFamily="18" charset="0"/>
+                <a:ea typeface="宋体" panose="02010600030101010101" pitchFamily="2" charset="-122"/>
+                <a:cs typeface="Times New Roman" panose="02020603050405020304" pitchFamily="18" charset="0"/>
+              </a:rPr>
+              <a:t>I/O</a:t>
+            </a:r>
+            <a:r>
+              <a:rPr lang="zh-CN" altLang="en-US" sz="1800" kern="100" dirty="0">
+                <a:effectLst/>
+                <a:latin typeface="Times New Roman" panose="02020603050405020304" pitchFamily="18" charset="0"/>
+                <a:ea typeface="宋体" panose="02010600030101010101" pitchFamily="2" charset="-122"/>
+                <a:cs typeface="Times New Roman" panose="02020603050405020304" pitchFamily="18" charset="0"/>
+              </a:rPr>
+              <a:t>引擎，并在五种不同的块大小（</a:t>
+            </a:r>
+            <a:r>
+              <a:rPr lang="en-US" altLang="zh-CN" sz="1800" kern="100" dirty="0">
+                <a:effectLst/>
+                <a:latin typeface="Times New Roman" panose="02020603050405020304" pitchFamily="18" charset="0"/>
+                <a:ea typeface="宋体" panose="02010600030101010101" pitchFamily="2" charset="-122"/>
+                <a:cs typeface="Times New Roman" panose="02020603050405020304" pitchFamily="18" charset="0"/>
+              </a:rPr>
+              <a:t>4k</a:t>
+            </a:r>
+            <a:r>
+              <a:rPr lang="zh-CN" altLang="en-US" sz="1800" kern="100" dirty="0">
+                <a:effectLst/>
+                <a:latin typeface="Times New Roman" panose="02020603050405020304" pitchFamily="18" charset="0"/>
+                <a:ea typeface="宋体" panose="02010600030101010101" pitchFamily="2" charset="-122"/>
+                <a:cs typeface="Times New Roman" panose="02020603050405020304" pitchFamily="18" charset="0"/>
+              </a:rPr>
+              <a:t>、</a:t>
+            </a:r>
+            <a:r>
+              <a:rPr lang="en-US" altLang="zh-CN" sz="1800" kern="100" dirty="0">
+                <a:effectLst/>
+                <a:latin typeface="Times New Roman" panose="02020603050405020304" pitchFamily="18" charset="0"/>
+                <a:ea typeface="宋体" panose="02010600030101010101" pitchFamily="2" charset="-122"/>
+                <a:cs typeface="Times New Roman" panose="02020603050405020304" pitchFamily="18" charset="0"/>
+              </a:rPr>
+              <a:t>16k</a:t>
+            </a:r>
+            <a:r>
+              <a:rPr lang="zh-CN" altLang="en-US" sz="1800" kern="100" dirty="0">
+                <a:effectLst/>
+                <a:latin typeface="Times New Roman" panose="02020603050405020304" pitchFamily="18" charset="0"/>
+                <a:ea typeface="宋体" panose="02010600030101010101" pitchFamily="2" charset="-122"/>
+                <a:cs typeface="Times New Roman" panose="02020603050405020304" pitchFamily="18" charset="0"/>
+              </a:rPr>
+              <a:t>、</a:t>
+            </a:r>
+            <a:r>
+              <a:rPr lang="en-US" altLang="zh-CN" sz="1800" kern="100" dirty="0">
+                <a:effectLst/>
+                <a:latin typeface="Times New Roman" panose="02020603050405020304" pitchFamily="18" charset="0"/>
+                <a:ea typeface="宋体" panose="02010600030101010101" pitchFamily="2" charset="-122"/>
+                <a:cs typeface="Times New Roman" panose="02020603050405020304" pitchFamily="18" charset="0"/>
+              </a:rPr>
+              <a:t>32k</a:t>
+            </a:r>
+            <a:r>
+              <a:rPr lang="zh-CN" altLang="en-US" sz="1800" kern="100" dirty="0">
+                <a:effectLst/>
+                <a:latin typeface="Times New Roman" panose="02020603050405020304" pitchFamily="18" charset="0"/>
+                <a:ea typeface="宋体" panose="02010600030101010101" pitchFamily="2" charset="-122"/>
+                <a:cs typeface="Times New Roman" panose="02020603050405020304" pitchFamily="18" charset="0"/>
+              </a:rPr>
+              <a:t>、</a:t>
+            </a:r>
+            <a:r>
+              <a:rPr lang="en-US" altLang="zh-CN" sz="1800" kern="100" dirty="0">
+                <a:effectLst/>
+                <a:latin typeface="Times New Roman" panose="02020603050405020304" pitchFamily="18" charset="0"/>
+                <a:ea typeface="宋体" panose="02010600030101010101" pitchFamily="2" charset="-122"/>
+                <a:cs typeface="Times New Roman" panose="02020603050405020304" pitchFamily="18" charset="0"/>
+              </a:rPr>
+              <a:t>64k</a:t>
+            </a:r>
+            <a:r>
+              <a:rPr lang="zh-CN" altLang="en-US" sz="1800" kern="100" dirty="0">
+                <a:effectLst/>
+                <a:latin typeface="Times New Roman" panose="02020603050405020304" pitchFamily="18" charset="0"/>
+                <a:ea typeface="宋体" panose="02010600030101010101" pitchFamily="2" charset="-122"/>
+                <a:cs typeface="Times New Roman" panose="02020603050405020304" pitchFamily="18" charset="0"/>
+              </a:rPr>
+              <a:t>、</a:t>
+            </a:r>
+            <a:r>
+              <a:rPr lang="en-US" altLang="zh-CN" sz="1800" kern="100" dirty="0">
+                <a:effectLst/>
+                <a:latin typeface="Times New Roman" panose="02020603050405020304" pitchFamily="18" charset="0"/>
+                <a:ea typeface="宋体" panose="02010600030101010101" pitchFamily="2" charset="-122"/>
+                <a:cs typeface="Times New Roman" panose="02020603050405020304" pitchFamily="18" charset="0"/>
+              </a:rPr>
+              <a:t>128k</a:t>
+            </a:r>
+            <a:r>
+              <a:rPr lang="zh-CN" altLang="en-US" sz="1800" kern="100" dirty="0">
+                <a:effectLst/>
+                <a:latin typeface="Times New Roman" panose="02020603050405020304" pitchFamily="18" charset="0"/>
+                <a:ea typeface="宋体" panose="02010600030101010101" pitchFamily="2" charset="-122"/>
+                <a:cs typeface="Times New Roman" panose="02020603050405020304" pitchFamily="18" charset="0"/>
+              </a:rPr>
+              <a:t>、</a:t>
+            </a:r>
+            <a:r>
+              <a:rPr lang="en-US" altLang="zh-CN" sz="1800" kern="100" dirty="0">
+                <a:effectLst/>
+                <a:latin typeface="Times New Roman" panose="02020603050405020304" pitchFamily="18" charset="0"/>
+                <a:ea typeface="宋体" panose="02010600030101010101" pitchFamily="2" charset="-122"/>
+                <a:cs typeface="Times New Roman" panose="02020603050405020304" pitchFamily="18" charset="0"/>
+              </a:rPr>
+              <a:t>256k</a:t>
+            </a:r>
+            <a:r>
+              <a:rPr lang="zh-CN" altLang="en-US" sz="1800" kern="100" dirty="0">
+                <a:effectLst/>
+                <a:latin typeface="Times New Roman" panose="02020603050405020304" pitchFamily="18" charset="0"/>
+                <a:ea typeface="宋体" panose="02010600030101010101" pitchFamily="2" charset="-122"/>
+                <a:cs typeface="Times New Roman" panose="02020603050405020304" pitchFamily="18" charset="0"/>
+              </a:rPr>
+              <a:t>）和五个不同的线程数（</a:t>
+            </a:r>
+            <a:r>
+              <a:rPr lang="en-US" altLang="zh-CN" sz="1800" kern="100" dirty="0">
+                <a:effectLst/>
+                <a:latin typeface="Times New Roman" panose="02020603050405020304" pitchFamily="18" charset="0"/>
+                <a:ea typeface="宋体" panose="02010600030101010101" pitchFamily="2" charset="-122"/>
+                <a:cs typeface="Times New Roman" panose="02020603050405020304" pitchFamily="18" charset="0"/>
+              </a:rPr>
+              <a:t>1</a:t>
+            </a:r>
+            <a:r>
+              <a:rPr lang="zh-CN" altLang="en-US" sz="1800" kern="100" dirty="0">
+                <a:effectLst/>
+                <a:latin typeface="Times New Roman" panose="02020603050405020304" pitchFamily="18" charset="0"/>
+                <a:ea typeface="宋体" panose="02010600030101010101" pitchFamily="2" charset="-122"/>
+                <a:cs typeface="Times New Roman" panose="02020603050405020304" pitchFamily="18" charset="0"/>
+              </a:rPr>
+              <a:t>、</a:t>
+            </a:r>
+            <a:r>
+              <a:rPr lang="en-US" altLang="zh-CN" sz="1800" kern="100" dirty="0">
+                <a:effectLst/>
+                <a:latin typeface="Times New Roman" panose="02020603050405020304" pitchFamily="18" charset="0"/>
+                <a:ea typeface="宋体" panose="02010600030101010101" pitchFamily="2" charset="-122"/>
+                <a:cs typeface="Times New Roman" panose="02020603050405020304" pitchFamily="18" charset="0"/>
+              </a:rPr>
+              <a:t>2</a:t>
+            </a:r>
+            <a:r>
+              <a:rPr lang="zh-CN" altLang="en-US" sz="1800" kern="100" dirty="0">
+                <a:effectLst/>
+                <a:latin typeface="Times New Roman" panose="02020603050405020304" pitchFamily="18" charset="0"/>
+                <a:ea typeface="宋体" panose="02010600030101010101" pitchFamily="2" charset="-122"/>
+                <a:cs typeface="Times New Roman" panose="02020603050405020304" pitchFamily="18" charset="0"/>
+              </a:rPr>
+              <a:t>、</a:t>
+            </a:r>
+            <a:r>
+              <a:rPr lang="en-US" altLang="zh-CN" sz="1800" kern="100" dirty="0">
+                <a:effectLst/>
+                <a:latin typeface="Times New Roman" panose="02020603050405020304" pitchFamily="18" charset="0"/>
+                <a:ea typeface="宋体" panose="02010600030101010101" pitchFamily="2" charset="-122"/>
+                <a:cs typeface="Times New Roman" panose="02020603050405020304" pitchFamily="18" charset="0"/>
+              </a:rPr>
+              <a:t>4</a:t>
+            </a:r>
+            <a:r>
+              <a:rPr lang="zh-CN" altLang="en-US" sz="1800" kern="100" dirty="0">
+                <a:effectLst/>
+                <a:latin typeface="Times New Roman" panose="02020603050405020304" pitchFamily="18" charset="0"/>
+                <a:ea typeface="宋体" panose="02010600030101010101" pitchFamily="2" charset="-122"/>
+                <a:cs typeface="Times New Roman" panose="02020603050405020304" pitchFamily="18" charset="0"/>
+              </a:rPr>
+              <a:t>、</a:t>
+            </a:r>
+            <a:r>
+              <a:rPr lang="en-US" altLang="zh-CN" sz="1800" kern="100" dirty="0">
+                <a:effectLst/>
+                <a:latin typeface="Times New Roman" panose="02020603050405020304" pitchFamily="18" charset="0"/>
+                <a:ea typeface="宋体" panose="02010600030101010101" pitchFamily="2" charset="-122"/>
+                <a:cs typeface="Times New Roman" panose="02020603050405020304" pitchFamily="18" charset="0"/>
+              </a:rPr>
+              <a:t>8</a:t>
+            </a:r>
+            <a:r>
+              <a:rPr lang="zh-CN" altLang="en-US" sz="1800" kern="100" dirty="0">
+                <a:effectLst/>
+                <a:latin typeface="Times New Roman" panose="02020603050405020304" pitchFamily="18" charset="0"/>
+                <a:ea typeface="宋体" panose="02010600030101010101" pitchFamily="2" charset="-122"/>
+                <a:cs typeface="Times New Roman" panose="02020603050405020304" pitchFamily="18" charset="0"/>
+              </a:rPr>
+              <a:t>、</a:t>
+            </a:r>
+            <a:r>
+              <a:rPr lang="en-US" altLang="zh-CN" sz="1800" kern="100" dirty="0">
+                <a:effectLst/>
+                <a:latin typeface="Times New Roman" panose="02020603050405020304" pitchFamily="18" charset="0"/>
+                <a:ea typeface="宋体" panose="02010600030101010101" pitchFamily="2" charset="-122"/>
+                <a:cs typeface="Times New Roman" panose="02020603050405020304" pitchFamily="18" charset="0"/>
+              </a:rPr>
+              <a:t>16</a:t>
+            </a:r>
+            <a:r>
+              <a:rPr lang="zh-CN" altLang="en-US" sz="1800" kern="100" dirty="0">
+                <a:effectLst/>
+                <a:latin typeface="Times New Roman" panose="02020603050405020304" pitchFamily="18" charset="0"/>
+                <a:ea typeface="宋体" panose="02010600030101010101" pitchFamily="2" charset="-122"/>
+                <a:cs typeface="Times New Roman" panose="02020603050405020304" pitchFamily="18" charset="0"/>
+              </a:rPr>
+              <a:t>）下进行测试。</a:t>
+            </a:r>
+            <a:endParaRPr lang="zh-CN" altLang="en-US" dirty="0"/>
+          </a:p>
+        </p:txBody>
+      </p:sp>
+      <p:pic>
+        <p:nvPicPr>
+          <p:cNvPr id="25" name="图形 11">
             <a:extLst>
               <a:ext uri="{FF2B5EF4-FFF2-40B4-BE49-F238E27FC236}">
-                <a16:creationId xmlns:a16="http://schemas.microsoft.com/office/drawing/2014/main" id="{8457EA20-6021-EC1D-1D9E-F90EC37CF9A2}"/>
+                <a16:creationId xmlns:a16="http://schemas.microsoft.com/office/drawing/2014/main" id="{F3724198-0E58-4601-9600-635831736314}"/>
+              </a:ext>
+            </a:extLst>
+          </p:cNvPr>
+          <p:cNvPicPr/>
+          <p:nvPr/>
+        </p:nvPicPr>
+        <p:blipFill>
+          <a:blip r:embed="rId5">
+            <a:extLst>
+              <a:ext uri="{96DAC541-7B7A-43D3-8B79-37D633B846F1}">
+                <asvg:svgBlip xmlns:asvg="http://schemas.microsoft.com/office/drawing/2016/SVG/main" r:embed="rId6"/>
+              </a:ext>
+            </a:extLst>
+          </a:blip>
+          <a:stretch>
+            <a:fillRect/>
+          </a:stretch>
+        </p:blipFill>
+        <p:spPr>
+          <a:xfrm>
+            <a:off x="6145748" y="2764415"/>
+            <a:ext cx="4777304" cy="3184678"/>
+          </a:xfrm>
+          <a:prstGeom prst="rect">
+            <a:avLst/>
+          </a:prstGeom>
+        </p:spPr>
+      </p:pic>
+      <p:pic>
+        <p:nvPicPr>
+          <p:cNvPr id="27" name="图形 43">
+            <a:extLst>
+              <a:ext uri="{FF2B5EF4-FFF2-40B4-BE49-F238E27FC236}">
+                <a16:creationId xmlns:a16="http://schemas.microsoft.com/office/drawing/2014/main" id="{AABCD2C3-6D30-435E-9376-7BD37CCBFAEA}"/>
+              </a:ext>
+            </a:extLst>
+          </p:cNvPr>
+          <p:cNvPicPr/>
+          <p:nvPr/>
+        </p:nvPicPr>
+        <p:blipFill>
+          <a:blip r:embed="rId7" cstate="print">
+            <a:extLst>
+              <a:ext uri="{28A0092B-C50C-407E-A947-70E740481C1C}">
+                <a14:useLocalDpi xmlns:a14="http://schemas.microsoft.com/office/drawing/2010/main" val="0"/>
+              </a:ext>
+              <a:ext uri="{96DAC541-7B7A-43D3-8B79-37D633B846F1}">
+                <asvg:svgBlip xmlns:asvg="http://schemas.microsoft.com/office/drawing/2016/SVG/main" r:embed="rId8"/>
+              </a:ext>
+            </a:extLst>
+          </a:blip>
+          <a:stretch>
+            <a:fillRect/>
+          </a:stretch>
+        </p:blipFill>
+        <p:spPr>
+          <a:xfrm>
+            <a:off x="560692" y="2764415"/>
+            <a:ext cx="4993200" cy="3184678"/>
+          </a:xfrm>
+          <a:prstGeom prst="rect">
+            <a:avLst/>
+          </a:prstGeom>
+        </p:spPr>
+      </p:pic>
+      <p:sp>
+        <p:nvSpPr>
+          <p:cNvPr id="30" name="文本框 29">
+            <a:extLst>
+              <a:ext uri="{FF2B5EF4-FFF2-40B4-BE49-F238E27FC236}">
+                <a16:creationId xmlns:a16="http://schemas.microsoft.com/office/drawing/2014/main" id="{F1042277-73A0-40B1-A307-CA4CF4858066}"/>
               </a:ext>
             </a:extLst>
           </p:cNvPr>
@@ -15651,319 +19082,7 @@
         </p:nvSpPr>
         <p:spPr>
           <a:xfrm>
-            <a:off x="358848" y="4651285"/>
-            <a:ext cx="9352009" cy="1753750"/>
-          </a:xfrm>
-          <a:prstGeom prst="rect">
-            <a:avLst/>
-          </a:prstGeom>
-          <a:noFill/>
-        </p:spPr>
-        <p:txBody>
-          <a:bodyPr wrap="square">
-            <a:spAutoFit/>
-          </a:bodyPr>
-          <a:lstStyle/>
-          <a:p>
-            <a:pPr marR="0" lvl="0" indent="0" fontAlgn="auto">
-              <a:lnSpc>
-                <a:spcPct val="70000"/>
-              </a:lnSpc>
-              <a:spcBef>
-                <a:spcPts val="0"/>
-              </a:spcBef>
-              <a:spcAft>
-                <a:spcPts val="1200"/>
-              </a:spcAft>
-              <a:buClrTx/>
-              <a:buSzTx/>
-              <a:buFont typeface="Arial" panose="020B0604020202020204" pitchFamily="34" charset="0"/>
-              <a:buNone/>
-              <a:tabLst/>
-              <a:defRPr/>
-            </a:pPr>
-            <a:r>
-              <a:rPr lang="en-US" altLang="zh-CN" sz="1600" dirty="0"/>
-              <a:t>NVMe2.0</a:t>
-            </a:r>
-            <a:r>
-              <a:rPr lang="zh-CN" altLang="en-US" sz="1600" dirty="0"/>
-              <a:t>：</a:t>
-            </a:r>
-            <a:r>
-              <a:rPr lang="en-US" altLang="zh-CN" sz="1600" dirty="0"/>
-              <a:t>https://nvmexpress.org/wp-content/uploads/NVMe-NVM-Express-2.0a-2021.07.26-Ratified.pdf</a:t>
-            </a:r>
-          </a:p>
-          <a:p>
-            <a:pPr>
-              <a:lnSpc>
-                <a:spcPct val="70000"/>
-              </a:lnSpc>
-              <a:spcAft>
-                <a:spcPts val="1200"/>
-              </a:spcAft>
-              <a:defRPr/>
-            </a:pPr>
-            <a:r>
-              <a:rPr lang="en-US" altLang="zh-CN" sz="1600" dirty="0"/>
-              <a:t>ZNS+: Advanced Zoned Namespace Interface for Supporting In-Storage Zone Compaction, OSDI’21</a:t>
-            </a:r>
-          </a:p>
-          <a:p>
-            <a:pPr>
-              <a:lnSpc>
-                <a:spcPct val="70000"/>
-              </a:lnSpc>
-              <a:spcAft>
-                <a:spcPts val="1200"/>
-              </a:spcAft>
-              <a:defRPr/>
-            </a:pPr>
-            <a:r>
-              <a:rPr lang="en-US" altLang="zh-CN" sz="1600" dirty="0" err="1"/>
-              <a:t>eZNS</a:t>
-            </a:r>
-            <a:r>
-              <a:rPr lang="en-US" altLang="zh-CN" sz="1600" dirty="0"/>
-              <a:t>: An Elastic Zoned Namespace for Commodity ZNS SSDs, OSDI’23</a:t>
-            </a:r>
-          </a:p>
-          <a:p>
-            <a:pPr>
-              <a:lnSpc>
-                <a:spcPct val="70000"/>
-              </a:lnSpc>
-              <a:spcAft>
-                <a:spcPts val="1200"/>
-              </a:spcAft>
-              <a:defRPr/>
-            </a:pPr>
-            <a:r>
-              <a:rPr lang="en-US" altLang="zh-CN" sz="1600" dirty="0" err="1"/>
-              <a:t>ZenFS</a:t>
-            </a:r>
-            <a:r>
-              <a:rPr lang="zh-CN" altLang="en-US" sz="1600" dirty="0"/>
-              <a:t>：</a:t>
-            </a:r>
-            <a:r>
-              <a:rPr lang="en-US" altLang="zh-CN" sz="1600" dirty="0">
-                <a:hlinkClick r:id="rId5"/>
-              </a:rPr>
-              <a:t>https://github.com/westerndigitalcorporation/zenfs</a:t>
-            </a:r>
-            <a:endParaRPr lang="en-US" altLang="zh-CN" sz="1600" dirty="0"/>
-          </a:p>
-          <a:p>
-            <a:pPr>
-              <a:lnSpc>
-                <a:spcPct val="70000"/>
-              </a:lnSpc>
-              <a:spcAft>
-                <a:spcPts val="1200"/>
-              </a:spcAft>
-              <a:defRPr/>
-            </a:pPr>
-            <a:r>
-              <a:rPr lang="en-US" altLang="zh-CN" sz="1600" dirty="0"/>
-              <a:t>ZNSKV: Reducing Data Migration in LSMT-Based KV Stores on ZNS SSDs</a:t>
-            </a:r>
-            <a:r>
-              <a:rPr lang="zh-CN" altLang="en-US" sz="1600" dirty="0"/>
-              <a:t>，</a:t>
-            </a:r>
-            <a:r>
-              <a:rPr lang="en-US" altLang="zh-CN" sz="1600" dirty="0"/>
-              <a:t>ICCD</a:t>
-            </a:r>
-          </a:p>
-        </p:txBody>
-      </p:sp>
-      <p:sp>
-        <p:nvSpPr>
-          <p:cNvPr id="19" name="文本框 18">
-            <a:extLst>
-              <a:ext uri="{FF2B5EF4-FFF2-40B4-BE49-F238E27FC236}">
-                <a16:creationId xmlns:a16="http://schemas.microsoft.com/office/drawing/2014/main" id="{D8DEC19F-AF51-2775-CDFC-F6F0E84AE33C}"/>
-              </a:ext>
-            </a:extLst>
-          </p:cNvPr>
-          <p:cNvSpPr txBox="1"/>
-          <p:nvPr/>
-        </p:nvSpPr>
-        <p:spPr>
-          <a:xfrm>
-            <a:off x="358848" y="1126939"/>
-            <a:ext cx="11506318" cy="779509"/>
-          </a:xfrm>
-          <a:prstGeom prst="rect">
-            <a:avLst/>
-          </a:prstGeom>
-          <a:noFill/>
-        </p:spPr>
-        <p:txBody>
-          <a:bodyPr wrap="square" anchor="t">
-            <a:spAutoFit/>
-          </a:bodyPr>
-          <a:lstStyle/>
-          <a:p>
-            <a:pPr>
-              <a:lnSpc>
-                <a:spcPct val="130000"/>
-              </a:lnSpc>
-            </a:pPr>
-            <a:r>
-              <a:rPr lang="zh-CN" altLang="en-US" dirty="0">
-                <a:solidFill>
-                  <a:srgbClr val="4747BA"/>
-                </a:solidFill>
-                <a:ea typeface="+mn-lt"/>
-                <a:cs typeface="Times New Roman" panose="02020603050405020304" charset="0"/>
-              </a:rPr>
-              <a:t>规范化：</a:t>
-            </a:r>
-            <a:r>
-              <a:rPr lang="zh-CN" altLang="zh-CN" dirty="0">
-                <a:solidFill>
-                  <a:srgbClr val="374151"/>
-                </a:solidFill>
-                <a:latin typeface="_5b8b_4f53"/>
-              </a:rPr>
-              <a:t>如今，经过</a:t>
-            </a:r>
-            <a:r>
-              <a:rPr lang="en-US" altLang="zh-CN" dirty="0">
-                <a:solidFill>
-                  <a:srgbClr val="374151"/>
-                </a:solidFill>
-                <a:latin typeface="_5b8b_4f53"/>
-              </a:rPr>
-              <a:t>SSD</a:t>
-            </a:r>
-            <a:r>
-              <a:rPr lang="zh-CN" altLang="zh-CN" dirty="0">
-                <a:solidFill>
-                  <a:srgbClr val="374151"/>
-                </a:solidFill>
-                <a:latin typeface="_5b8b_4f53"/>
-              </a:rPr>
-              <a:t>制造商、软件开发者和标准化机构之间的合作努力，</a:t>
-            </a:r>
-            <a:r>
-              <a:rPr lang="en-US" altLang="zh-CN" dirty="0">
-                <a:solidFill>
-                  <a:srgbClr val="374151"/>
-                </a:solidFill>
-                <a:latin typeface="_5b8b_4f53"/>
-              </a:rPr>
-              <a:t>ZNS SSD</a:t>
-            </a:r>
-            <a:r>
-              <a:rPr lang="zh-CN" altLang="zh-CN" dirty="0">
-                <a:solidFill>
-                  <a:srgbClr val="374151"/>
-                </a:solidFill>
-                <a:latin typeface="_5b8b_4f53"/>
-              </a:rPr>
-              <a:t>技术已有稳定的硬件标准和基础软件库。</a:t>
-            </a:r>
-            <a:r>
-              <a:rPr lang="zh-CN" altLang="en-US" dirty="0">
-                <a:solidFill>
-                  <a:srgbClr val="374151"/>
-                </a:solidFill>
-                <a:latin typeface="_5b8b_4f53"/>
-              </a:rPr>
-              <a:t>例如：</a:t>
-            </a:r>
-            <a:r>
-              <a:rPr lang="en-US" altLang="zh-CN" dirty="0" err="1">
-                <a:solidFill>
-                  <a:srgbClr val="374151"/>
-                </a:solidFill>
-                <a:latin typeface="_5b8b_4f53"/>
-              </a:rPr>
-              <a:t>NVMe</a:t>
-            </a:r>
-            <a:r>
-              <a:rPr lang="zh-CN" altLang="zh-CN" dirty="0">
-                <a:solidFill>
-                  <a:srgbClr val="374151"/>
-                </a:solidFill>
-                <a:latin typeface="_5b8b_4f53"/>
-              </a:rPr>
-              <a:t>组织已</a:t>
-            </a:r>
-            <a:r>
-              <a:rPr lang="zh-CN" altLang="en-US" dirty="0">
-                <a:solidFill>
-                  <a:srgbClr val="374151"/>
-                </a:solidFill>
-                <a:latin typeface="_5b8b_4f53"/>
-              </a:rPr>
-              <a:t>在</a:t>
-            </a:r>
-            <a:r>
-              <a:rPr lang="en-US" altLang="zh-CN" dirty="0">
-                <a:solidFill>
-                  <a:srgbClr val="374151"/>
-                </a:solidFill>
-                <a:latin typeface="_5b8b_4f53"/>
-              </a:rPr>
-              <a:t>NVMe2.0</a:t>
-            </a:r>
-            <a:r>
-              <a:rPr lang="zh-CN" altLang="en-US" dirty="0">
-                <a:solidFill>
-                  <a:srgbClr val="374151"/>
-                </a:solidFill>
-                <a:latin typeface="_5b8b_4f53"/>
-              </a:rPr>
-              <a:t>中支持</a:t>
-            </a:r>
-            <a:r>
-              <a:rPr lang="en-US" altLang="zh-CN" dirty="0">
-                <a:solidFill>
-                  <a:srgbClr val="374151"/>
-                </a:solidFill>
-                <a:latin typeface="_5b8b_4f53"/>
-              </a:rPr>
-              <a:t>Zone</a:t>
-            </a:r>
-            <a:r>
-              <a:rPr lang="zh-CN" altLang="en-US" dirty="0">
-                <a:solidFill>
-                  <a:srgbClr val="374151"/>
-                </a:solidFill>
-                <a:latin typeface="_5b8b_4f53"/>
-              </a:rPr>
-              <a:t>接口逻辑。</a:t>
-            </a:r>
-            <a:endParaRPr lang="zh-CN" altLang="zh-CN" dirty="0">
-              <a:solidFill>
-                <a:srgbClr val="374151"/>
-              </a:solidFill>
-              <a:latin typeface="_5b8b_4f53"/>
-            </a:endParaRPr>
-          </a:p>
-        </p:txBody>
-      </p:sp>
-      <p:sp>
-        <p:nvSpPr>
-          <p:cNvPr id="25" name="文本框 24">
-            <a:extLst>
-              <a:ext uri="{FF2B5EF4-FFF2-40B4-BE49-F238E27FC236}">
-                <a16:creationId xmlns:a16="http://schemas.microsoft.com/office/drawing/2014/main" id="{07DC2E9D-2952-D68D-FFCC-6C038511F9C0}"/>
-              </a:ext>
-            </a:extLst>
-          </p:cNvPr>
-          <p:cNvSpPr txBox="1"/>
-          <p:nvPr/>
-        </p:nvSpPr>
-        <p:spPr>
-          <a:xfrm>
-            <a:off x="385590" y="310242"/>
+            <a:off x="281680" y="299000"/>
             <a:ext cx="6798981" cy="535531"/>
           </a:xfrm>
           <a:prstGeom prst="rect">
@@ -15987,7 +19106,7 @@
               <a:defRPr/>
             </a:pPr>
             <a:r>
-              <a:rPr lang="zh-CN" altLang="en-US" sz="3200" b="1" dirty="0">
+              <a:rPr lang="en-US" altLang="zh-CN" sz="3200" b="1" dirty="0">
                 <a:solidFill>
                   <a:srgbClr val="4747BA"/>
                 </a:solidFill>
@@ -15995,15 +19114,34 @@
                 <a:ea typeface="腾讯体 W3" panose="020C04030202040F0204" pitchFamily="34" charset="-122"/>
                 <a:cs typeface="Times" panose="02020603050405020304" pitchFamily="18" charset="0"/>
               </a:rPr>
-              <a:t>研究现状</a:t>
-            </a:r>
+              <a:t> </a:t>
+            </a:r>
+            <a:r>
+              <a:rPr lang="zh-CN" altLang="en-US" sz="3200" b="1" dirty="0">
+                <a:solidFill>
+                  <a:srgbClr val="4747BA"/>
+                </a:solidFill>
+                <a:latin typeface="Constantia" panose="02030602050306030303" pitchFamily="18" charset="0"/>
+                <a:ea typeface="腾讯体 W3" panose="020C04030202040F0204" pitchFamily="34" charset="-122"/>
+                <a:cs typeface="Times" panose="02020603050405020304" pitchFamily="18" charset="0"/>
+              </a:rPr>
+              <a:t>实验评估</a:t>
+            </a:r>
+            <a:endParaRPr lang="zh-CN" altLang="en-US" sz="3600" b="1" dirty="0">
+              <a:solidFill>
+                <a:srgbClr val="4747BA"/>
+              </a:solidFill>
+              <a:latin typeface="Constantia" panose="02030602050306030303" pitchFamily="18" charset="0"/>
+              <a:ea typeface="腾讯体 W3" panose="020C04030202040F0204" pitchFamily="34" charset="-122"/>
+              <a:cs typeface="Times" panose="02020603050405020304" pitchFamily="18" charset="0"/>
+            </a:endParaRPr>
           </a:p>
         </p:txBody>
       </p:sp>
     </p:spTree>
     <p:extLst>
       <p:ext uri="{BB962C8B-B14F-4D97-AF65-F5344CB8AC3E}">
-        <p14:creationId xmlns:p14="http://schemas.microsoft.com/office/powerpoint/2010/main" val="1474926011"/>
+        <p14:creationId xmlns:p14="http://schemas.microsoft.com/office/powerpoint/2010/main" val="167858902"/>
       </p:ext>
     </p:extLst>
   </p:cSld>

--- a/毕设/毕设答辩.pptx
+++ b/毕设/毕设答辩.pptx
@@ -13,12 +13,12 @@
     <p:sldId id="548" r:id="rId4"/>
     <p:sldId id="551" r:id="rId5"/>
     <p:sldId id="554" r:id="rId6"/>
-    <p:sldId id="545" r:id="rId7"/>
-    <p:sldId id="558" r:id="rId8"/>
-    <p:sldId id="555" r:id="rId9"/>
-    <p:sldId id="557" r:id="rId10"/>
-    <p:sldId id="556" r:id="rId11"/>
-    <p:sldId id="261" r:id="rId12"/>
+    <p:sldId id="558" r:id="rId7"/>
+    <p:sldId id="555" r:id="rId8"/>
+    <p:sldId id="557" r:id="rId9"/>
+    <p:sldId id="556" r:id="rId10"/>
+    <p:sldId id="261" r:id="rId11"/>
+    <p:sldId id="545" r:id="rId12"/>
     <p:sldId id="552" r:id="rId13"/>
     <p:sldId id="547" r:id="rId14"/>
   </p:sldIdLst>
@@ -132,12 +132,12 @@
             <p14:sldId id="548"/>
             <p14:sldId id="551"/>
             <p14:sldId id="554"/>
-            <p14:sldId id="545"/>
             <p14:sldId id="558"/>
             <p14:sldId id="555"/>
             <p14:sldId id="557"/>
             <p14:sldId id="556"/>
             <p14:sldId id="261"/>
+            <p14:sldId id="545"/>
             <p14:sldId id="552"/>
             <p14:sldId id="547"/>
           </p14:sldIdLst>
@@ -565,7 +565,7 @@
                 <a:ea typeface="微软雅黑" panose="020B0503020204020204" charset="-122"/>
                 <a:cs typeface="Calibri" panose="020F0502020204030204" pitchFamily="34" charset="0"/>
               </a:rPr>
-              <a:t>开题报告：基于</a:t>
+              <a:t>各位老师好，我是柳子淇，我的毕设题目是：基于</a:t>
             </a:r>
             <a:r>
               <a:rPr lang="en-US" altLang="zh-CN" sz="1200" b="1" dirty="0">
@@ -690,22 +690,33 @@
           <a:bodyPr/>
           <a:lstStyle/>
           <a:p>
-            <a:pPr indent="0" algn="just">
-              <a:spcAft>
-                <a:spcPts val="1200"/>
-              </a:spcAft>
-              <a:buFont typeface="Arial" panose="020B0604020202020204" pitchFamily="34" charset="0"/>
-              <a:buNone/>
-            </a:pPr>
-            <a:endParaRPr lang="zh-CN" altLang="en-US" sz="1200" dirty="0">
-              <a:latin typeface="Constantia" panose="02030602050306030303" pitchFamily="18" charset="0"/>
-            </a:endParaRPr>
-          </a:p>
-        </p:txBody>
-      </p:sp>
-      <p:sp>
-        <p:nvSpPr>
-          <p:cNvPr id="4" name="灯片编号占位符 3"/>
+            <a:r>
+              <a:rPr kumimoji="1" lang="en-US" altLang="zh-CN" dirty="0"/>
+              <a:t>Thanks</a:t>
+            </a:r>
+            <a:r>
+              <a:rPr kumimoji="1" lang="zh-CN" altLang="en-US" dirty="0"/>
+              <a:t> </a:t>
+            </a:r>
+            <a:r>
+              <a:rPr kumimoji="1" lang="en-US" altLang="zh-CN" dirty="0"/>
+              <a:t>for</a:t>
+            </a:r>
+            <a:r>
+              <a:rPr kumimoji="1" lang="zh-CN" altLang="en-US" dirty="0"/>
+              <a:t> </a:t>
+            </a:r>
+            <a:r>
+              <a:rPr kumimoji="1" lang="en-US" altLang="zh-CN" dirty="0"/>
+              <a:t>listening!</a:t>
+            </a:r>
+            <a:endParaRPr kumimoji="1" lang="zh-CN" altLang="en-US" dirty="0"/>
+          </a:p>
+        </p:txBody>
+      </p:sp>
+      <p:sp>
+        <p:nvSpPr>
+          <p:cNvPr id="4" name="幻灯片编号占位符 3"/>
           <p:cNvSpPr>
             <a:spLocks noGrp="1"/>
           </p:cNvSpPr>
@@ -718,20 +729,15 @@
           <a:bodyPr/>
           <a:lstStyle/>
           <a:p>
-            <a:fld id="{E4FF5570-FE69-4FDF-99DA-8CDE436443CD}" type="slidenum">
-              <a:rPr lang="en-US" smtClean="0"/>
+            <a:fld id="{94B1677A-EDDD-4DA4-9464-453B9AC95701}" type="slidenum">
+              <a:rPr lang="zh-CN" altLang="en-US" smtClean="0"/>
               <a:t>10</a:t>
             </a:fld>
-            <a:endParaRPr lang="en-US" dirty="0"/>
+            <a:endParaRPr lang="zh-CN" altLang="en-US"/>
           </a:p>
         </p:txBody>
       </p:sp>
     </p:spTree>
-    <p:extLst>
-      <p:ext uri="{BB962C8B-B14F-4D97-AF65-F5344CB8AC3E}">
-        <p14:creationId xmlns:p14="http://schemas.microsoft.com/office/powerpoint/2010/main" val="483495712"/>
-      </p:ext>
-    </p:extLst>
   </p:cSld>
   <p:clrMapOvr>
     <a:masterClrMapping/>
@@ -783,33 +789,22 @@
           <a:bodyPr/>
           <a:lstStyle/>
           <a:p>
-            <a:r>
-              <a:rPr kumimoji="1" lang="en-US" altLang="zh-CN" dirty="0"/>
-              <a:t>Thanks</a:t>
-            </a:r>
-            <a:r>
-              <a:rPr kumimoji="1" lang="zh-CN" altLang="en-US" dirty="0"/>
-              <a:t> </a:t>
-            </a:r>
-            <a:r>
-              <a:rPr kumimoji="1" lang="en-US" altLang="zh-CN" dirty="0"/>
-              <a:t>for</a:t>
-            </a:r>
-            <a:r>
-              <a:rPr kumimoji="1" lang="zh-CN" altLang="en-US" dirty="0"/>
-              <a:t> </a:t>
-            </a:r>
-            <a:r>
-              <a:rPr kumimoji="1" lang="en-US" altLang="zh-CN" dirty="0"/>
-              <a:t>listening!</a:t>
-            </a:r>
-            <a:endParaRPr kumimoji="1" lang="zh-CN" altLang="en-US" dirty="0"/>
-          </a:p>
-        </p:txBody>
-      </p:sp>
-      <p:sp>
-        <p:nvSpPr>
-          <p:cNvPr id="4" name="幻灯片编号占位符 3"/>
+            <a:pPr indent="0" algn="just">
+              <a:spcAft>
+                <a:spcPts val="1200"/>
+              </a:spcAft>
+              <a:buFont typeface="Arial" panose="020B0604020202020204" pitchFamily="34" charset="0"/>
+              <a:buNone/>
+            </a:pPr>
+            <a:endParaRPr lang="zh-CN" altLang="en-US" sz="1200" dirty="0">
+              <a:latin typeface="Constantia" panose="02030602050306030303" pitchFamily="18" charset="0"/>
+            </a:endParaRPr>
+          </a:p>
+        </p:txBody>
+      </p:sp>
+      <p:sp>
+        <p:nvSpPr>
+          <p:cNvPr id="4" name="灯片编号占位符 3"/>
           <p:cNvSpPr>
             <a:spLocks noGrp="1"/>
           </p:cNvSpPr>
@@ -822,15 +817,20 @@
           <a:bodyPr/>
           <a:lstStyle/>
           <a:p>
-            <a:fld id="{94B1677A-EDDD-4DA4-9464-453B9AC95701}" type="slidenum">
-              <a:rPr lang="zh-CN" altLang="en-US" smtClean="0"/>
+            <a:fld id="{E4FF5570-FE69-4FDF-99DA-8CDE436443CD}" type="slidenum">
+              <a:rPr lang="en-US" smtClean="0"/>
               <a:t>11</a:t>
             </a:fld>
-            <a:endParaRPr lang="zh-CN" altLang="en-US"/>
+            <a:endParaRPr lang="en-US" dirty="0"/>
           </a:p>
         </p:txBody>
       </p:sp>
     </p:spTree>
+    <p:extLst>
+      <p:ext uri="{BB962C8B-B14F-4D97-AF65-F5344CB8AC3E}">
+        <p14:creationId xmlns:p14="http://schemas.microsoft.com/office/powerpoint/2010/main" val="1442627471"/>
+      </p:ext>
+    </p:extLst>
   </p:cSld>
   <p:clrMapOvr>
     <a:masterClrMapping/>
@@ -1723,6 +1723,81 @@
         <p:txBody>
           <a:bodyPr/>
           <a:lstStyle/>
+          <a:p>
+            <a:pPr indent="0" algn="just">
+              <a:spcAft>
+                <a:spcPts val="1200"/>
+              </a:spcAft>
+              <a:buFont typeface="Arial" panose="020B0604020202020204" pitchFamily="34" charset="0"/>
+              <a:buNone/>
+            </a:pPr>
+            <a:r>
+              <a:rPr lang="en-US" altLang="zh-CN" sz="2800" dirty="0">
+                <a:latin typeface="Times New Roman" panose="02020603050405020304" pitchFamily="18" charset="0"/>
+                <a:ea typeface="宋体" panose="02010600030101010101" pitchFamily="2" charset="-122"/>
+                <a:cs typeface="Times New Roman" panose="02020603050405020304" pitchFamily="18" charset="0"/>
+              </a:rPr>
+              <a:t>Write Amplification Factor</a:t>
+            </a:r>
+            <a:r>
+              <a:rPr lang="zh-CN" altLang="en-US" sz="2800" dirty="0">
+                <a:latin typeface="Times New Roman" panose="02020603050405020304" pitchFamily="18" charset="0"/>
+                <a:ea typeface="宋体" panose="02010600030101010101" pitchFamily="2" charset="-122"/>
+                <a:cs typeface="Times New Roman" panose="02020603050405020304" pitchFamily="18" charset="0"/>
+              </a:rPr>
+              <a:t>，</a:t>
+            </a:r>
+            <a:endParaRPr lang="en-US" altLang="zh-CN" sz="2800" dirty="0">
+              <a:latin typeface="Times New Roman" panose="02020603050405020304" pitchFamily="18" charset="0"/>
+              <a:ea typeface="宋体" panose="02010600030101010101" pitchFamily="2" charset="-122"/>
+              <a:cs typeface="Times New Roman" panose="02020603050405020304" pitchFamily="18" charset="0"/>
+            </a:endParaRPr>
+          </a:p>
+          <a:p>
+            <a:pPr indent="0" algn="just">
+              <a:spcAft>
+                <a:spcPts val="1200"/>
+              </a:spcAft>
+              <a:buFont typeface="Arial" panose="020B0604020202020204" pitchFamily="34" charset="0"/>
+              <a:buNone/>
+            </a:pPr>
+            <a:endParaRPr lang="en-US" altLang="zh-CN" sz="2800" kern="100" dirty="0">
+              <a:effectLst/>
+              <a:latin typeface="Times New Roman" panose="02020603050405020304" pitchFamily="18" charset="0"/>
+              <a:ea typeface="宋体" panose="02010600030101010101" pitchFamily="2" charset="-122"/>
+              <a:cs typeface="Times New Roman" panose="02020603050405020304" pitchFamily="18" charset="0"/>
+            </a:endParaRPr>
+          </a:p>
+          <a:p>
+            <a:pPr indent="0" algn="just">
+              <a:spcAft>
+                <a:spcPts val="1200"/>
+              </a:spcAft>
+              <a:buFont typeface="Arial" panose="020B0604020202020204" pitchFamily="34" charset="0"/>
+              <a:buNone/>
+            </a:pPr>
+            <a:endParaRPr lang="en-US" altLang="zh-CN" sz="1800" kern="100" dirty="0">
+              <a:effectLst/>
+              <a:latin typeface="Times New Roman" panose="02020603050405020304" pitchFamily="18" charset="0"/>
+              <a:ea typeface="宋体" panose="02010600030101010101" pitchFamily="2" charset="-122"/>
+              <a:cs typeface="Times New Roman" panose="02020603050405020304" pitchFamily="18" charset="0"/>
+            </a:endParaRPr>
+          </a:p>
+          <a:p>
+            <a:pPr indent="0" algn="just">
+              <a:spcAft>
+                <a:spcPts val="1200"/>
+              </a:spcAft>
+              <a:buFont typeface="Arial" panose="020B0604020202020204" pitchFamily="34" charset="0"/>
+              <a:buNone/>
+            </a:pPr>
+            <a:endParaRPr lang="en-US" altLang="zh-CN" sz="1800" kern="100" dirty="0">
+              <a:effectLst/>
+              <a:latin typeface="Times New Roman" panose="02020603050405020304" pitchFamily="18" charset="0"/>
+              <a:ea typeface="宋体" panose="02010600030101010101" pitchFamily="2" charset="-122"/>
+              <a:cs typeface="Times New Roman" panose="02020603050405020304" pitchFamily="18" charset="0"/>
+            </a:endParaRPr>
+          </a:p>
           <a:p>
             <a:pPr indent="0" algn="just">
               <a:spcAft>
@@ -3490,7 +3565,127 @@
               <a:buFont typeface="Arial" panose="020B0604020202020204" pitchFamily="34" charset="0"/>
               <a:buNone/>
             </a:pPr>
-            <a:endParaRPr lang="zh-CN" altLang="en-US" sz="1200" dirty="0">
+            <a:r>
+              <a:rPr lang="zh-CN" altLang="en-US" sz="1200" dirty="0">
+                <a:latin typeface="Constantia" panose="02030602050306030303" pitchFamily="18" charset="0"/>
+              </a:rPr>
+              <a:t>仅列举</a:t>
+            </a:r>
+            <a:r>
+              <a:rPr lang="en-US" altLang="zh-CN" sz="1200" dirty="0">
+                <a:latin typeface="Constantia" panose="02030602050306030303" pitchFamily="18" charset="0"/>
+              </a:rPr>
+              <a:t>3</a:t>
+            </a:r>
+            <a:r>
+              <a:rPr lang="zh-CN" altLang="en-US" sz="1200" dirty="0">
+                <a:latin typeface="Constantia" panose="02030602050306030303" pitchFamily="18" charset="0"/>
+              </a:rPr>
+              <a:t>种比较典型的测试结果。</a:t>
+            </a:r>
+            <a:endParaRPr lang="en-US" altLang="zh-CN" sz="1200" dirty="0">
+              <a:latin typeface="Constantia" panose="02030602050306030303" pitchFamily="18" charset="0"/>
+            </a:endParaRPr>
+          </a:p>
+          <a:p>
+            <a:pPr indent="0" algn="just">
+              <a:spcAft>
+                <a:spcPts val="1200"/>
+              </a:spcAft>
+              <a:buFont typeface="Arial" panose="020B0604020202020204" pitchFamily="34" charset="0"/>
+              <a:buNone/>
+            </a:pPr>
+            <a:r>
+              <a:rPr lang="zh-CN" altLang="en-US" sz="1200" dirty="0">
+                <a:latin typeface="Constantia" panose="02030602050306030303" pitchFamily="18" charset="0"/>
+              </a:rPr>
+              <a:t>分别是：</a:t>
+            </a:r>
+            <a:endParaRPr lang="en-US" altLang="zh-CN" sz="1200" dirty="0">
+              <a:latin typeface="Constantia" panose="02030602050306030303" pitchFamily="18" charset="0"/>
+            </a:endParaRPr>
+          </a:p>
+          <a:p>
+            <a:pPr indent="0" algn="just">
+              <a:spcAft>
+                <a:spcPts val="1200"/>
+              </a:spcAft>
+              <a:buFont typeface="Arial" panose="020B0604020202020204" pitchFamily="34" charset="0"/>
+              <a:buNone/>
+            </a:pPr>
+            <a:r>
+              <a:rPr lang="en-US" altLang="zh-CN" sz="1200" dirty="0">
+                <a:latin typeface="Constantia" panose="02030602050306030303" pitchFamily="18" charset="0"/>
+              </a:rPr>
+              <a:t>1</a:t>
+            </a:r>
+            <a:r>
+              <a:rPr lang="zh-CN" altLang="en-US" sz="1200" dirty="0">
+                <a:latin typeface="Constantia" panose="02030602050306030303" pitchFamily="18" charset="0"/>
+              </a:rPr>
+              <a:t>：</a:t>
+            </a:r>
+            <a:r>
+              <a:rPr lang="en-US" altLang="zh-CN" sz="1200" dirty="0">
+                <a:latin typeface="Constantia" panose="02030602050306030303" pitchFamily="18" charset="0"/>
+              </a:rPr>
+              <a:t> </a:t>
+            </a:r>
+            <a:r>
+              <a:rPr lang="zh-CN" altLang="en-US" sz="1200" dirty="0">
+                <a:latin typeface="Constantia" panose="02030602050306030303" pitchFamily="18" charset="0"/>
+              </a:rPr>
+              <a:t>模拟</a:t>
+            </a:r>
+            <a:r>
+              <a:rPr lang="en-US" altLang="zh-CN" sz="1200" dirty="0">
+                <a:latin typeface="Constantia" panose="02030602050306030303" pitchFamily="18" charset="0"/>
+              </a:rPr>
+              <a:t>vs</a:t>
+            </a:r>
+            <a:r>
+              <a:rPr lang="zh-CN" altLang="en-US" sz="1200" dirty="0">
+                <a:latin typeface="Constantia" panose="02030602050306030303" pitchFamily="18" charset="0"/>
+              </a:rPr>
+              <a:t>真实</a:t>
+            </a:r>
+            <a:endParaRPr lang="en-US" altLang="zh-CN" sz="1200" dirty="0">
+              <a:latin typeface="Constantia" panose="02030602050306030303" pitchFamily="18" charset="0"/>
+            </a:endParaRPr>
+          </a:p>
+          <a:p>
+            <a:pPr indent="0" algn="just">
+              <a:spcAft>
+                <a:spcPts val="1200"/>
+              </a:spcAft>
+              <a:buFont typeface="Arial" panose="020B0604020202020204" pitchFamily="34" charset="0"/>
+              <a:buNone/>
+            </a:pPr>
+            <a:r>
+              <a:rPr lang="en-US" altLang="zh-CN" sz="1200" dirty="0">
+                <a:latin typeface="Constantia" panose="02030602050306030303" pitchFamily="18" charset="0"/>
+              </a:rPr>
+              <a:t>2</a:t>
+            </a:r>
+            <a:r>
+              <a:rPr lang="zh-CN" altLang="en-US" sz="1200" dirty="0">
+                <a:latin typeface="Constantia" panose="02030602050306030303" pitchFamily="18" charset="0"/>
+              </a:rPr>
+              <a:t>： 单</a:t>
+            </a:r>
+            <a:r>
+              <a:rPr lang="en-US" altLang="zh-CN" sz="1200" dirty="0">
+                <a:latin typeface="Constantia" panose="02030602050306030303" pitchFamily="18" charset="0"/>
+              </a:rPr>
+              <a:t>Zone</a:t>
+            </a:r>
+            <a:r>
+              <a:rPr lang="zh-CN" altLang="en-US" sz="1200" dirty="0">
+                <a:latin typeface="Constantia" panose="02030602050306030303" pitchFamily="18" charset="0"/>
+              </a:rPr>
+              <a:t>性能</a:t>
+            </a:r>
+            <a:endParaRPr lang="en-US" altLang="zh-CN" sz="1200" dirty="0">
               <a:latin typeface="Constantia" panose="02030602050306030303" pitchFamily="18" charset="0"/>
             </a:endParaRPr>
           </a:p>
@@ -3522,7 +3717,7 @@
     </p:spTree>
     <p:extLst>
       <p:ext uri="{BB962C8B-B14F-4D97-AF65-F5344CB8AC3E}">
-        <p14:creationId xmlns:p14="http://schemas.microsoft.com/office/powerpoint/2010/main" val="1442627471"/>
+        <p14:creationId xmlns:p14="http://schemas.microsoft.com/office/powerpoint/2010/main" val="251907946"/>
       </p:ext>
     </p:extLst>
   </p:cSld>
@@ -3756,7 +3951,7 @@
     </p:spTree>
     <p:extLst>
       <p:ext uri="{BB962C8B-B14F-4D97-AF65-F5344CB8AC3E}">
-        <p14:creationId xmlns:p14="http://schemas.microsoft.com/office/powerpoint/2010/main" val="251907946"/>
+        <p14:creationId xmlns:p14="http://schemas.microsoft.com/office/powerpoint/2010/main" val="1905338372"/>
       </p:ext>
     </p:extLst>
   </p:cSld>
@@ -3990,7 +4185,7 @@
     </p:spTree>
     <p:extLst>
       <p:ext uri="{BB962C8B-B14F-4D97-AF65-F5344CB8AC3E}">
-        <p14:creationId xmlns:p14="http://schemas.microsoft.com/office/powerpoint/2010/main" val="1905338372"/>
+        <p14:creationId xmlns:p14="http://schemas.microsoft.com/office/powerpoint/2010/main" val="927470145"/>
       </p:ext>
     </p:extLst>
   </p:cSld>
@@ -4051,150 +4246,9 @@
               <a:buFont typeface="Arial" panose="020B0604020202020204" pitchFamily="34" charset="0"/>
               <a:buNone/>
             </a:pPr>
-            <a:r>
-              <a:rPr lang="zh-CN" altLang="en-US" sz="1200" dirty="0">
-                <a:latin typeface="Constantia" panose="02030602050306030303" pitchFamily="18" charset="0"/>
-              </a:rPr>
-              <a:t>仅列举</a:t>
-            </a:r>
-            <a:r>
-              <a:rPr lang="en-US" altLang="zh-CN" sz="1200" dirty="0">
-                <a:latin typeface="Constantia" panose="02030602050306030303" pitchFamily="18" charset="0"/>
-              </a:rPr>
-              <a:t>3</a:t>
-            </a:r>
-            <a:r>
-              <a:rPr lang="zh-CN" altLang="en-US" sz="1200" dirty="0">
-                <a:latin typeface="Constantia" panose="02030602050306030303" pitchFamily="18" charset="0"/>
-              </a:rPr>
-              <a:t>种比较典型的测试结果。</a:t>
-            </a:r>
-            <a:endParaRPr lang="en-US" altLang="zh-CN" sz="1200" dirty="0">
+            <a:endParaRPr lang="zh-CN" altLang="en-US" sz="1200" dirty="0">
               <a:latin typeface="Constantia" panose="02030602050306030303" pitchFamily="18" charset="0"/>
             </a:endParaRPr>
-          </a:p>
-          <a:p>
-            <a:pPr indent="0" algn="just">
-              <a:spcAft>
-                <a:spcPts val="1200"/>
-              </a:spcAft>
-              <a:buFont typeface="Arial" panose="020B0604020202020204" pitchFamily="34" charset="0"/>
-              <a:buNone/>
-            </a:pPr>
-            <a:r>
-              <a:rPr lang="zh-CN" altLang="en-US" sz="1200" dirty="0">
-                <a:latin typeface="Constantia" panose="02030602050306030303" pitchFamily="18" charset="0"/>
-              </a:rPr>
-              <a:t>分别是：</a:t>
-            </a:r>
-            <a:endParaRPr lang="en-US" altLang="zh-CN" sz="1200" dirty="0">
-              <a:latin typeface="Constantia" panose="02030602050306030303" pitchFamily="18" charset="0"/>
-            </a:endParaRPr>
-          </a:p>
-          <a:p>
-            <a:pPr indent="0" algn="just">
-              <a:spcAft>
-                <a:spcPts val="1200"/>
-              </a:spcAft>
-              <a:buFont typeface="Arial" panose="020B0604020202020204" pitchFamily="34" charset="0"/>
-              <a:buNone/>
-            </a:pPr>
-            <a:r>
-              <a:rPr lang="en-US" altLang="zh-CN" sz="1200" dirty="0">
-                <a:latin typeface="Constantia" panose="02030602050306030303" pitchFamily="18" charset="0"/>
-              </a:rPr>
-              <a:t>1</a:t>
-            </a:r>
-            <a:r>
-              <a:rPr lang="zh-CN" altLang="en-US" sz="1200" dirty="0">
-                <a:latin typeface="Constantia" panose="02030602050306030303" pitchFamily="18" charset="0"/>
-              </a:rPr>
-              <a:t>：</a:t>
-            </a:r>
-            <a:r>
-              <a:rPr lang="en-US" altLang="zh-CN" sz="1200" dirty="0">
-                <a:latin typeface="Constantia" panose="02030602050306030303" pitchFamily="18" charset="0"/>
-              </a:rPr>
-              <a:t> </a:t>
-            </a:r>
-            <a:r>
-              <a:rPr lang="zh-CN" altLang="en-US" sz="1200" dirty="0">
-                <a:latin typeface="Constantia" panose="02030602050306030303" pitchFamily="18" charset="0"/>
-              </a:rPr>
-              <a:t>模拟</a:t>
-            </a:r>
-            <a:r>
-              <a:rPr lang="en-US" altLang="zh-CN" sz="1200" dirty="0">
-                <a:latin typeface="Constantia" panose="02030602050306030303" pitchFamily="18" charset="0"/>
-              </a:rPr>
-              <a:t>vs</a:t>
-            </a:r>
-            <a:r>
-              <a:rPr lang="zh-CN" altLang="en-US" sz="1200" dirty="0">
-                <a:latin typeface="Constantia" panose="02030602050306030303" pitchFamily="18" charset="0"/>
-              </a:rPr>
-              <a:t>真实</a:t>
-            </a:r>
-            <a:endParaRPr lang="en-US" altLang="zh-CN" sz="1200" dirty="0">
-              <a:latin typeface="Constantia" panose="02030602050306030303" pitchFamily="18" charset="0"/>
-            </a:endParaRPr>
-          </a:p>
-          <a:p>
-            <a:pPr indent="0" algn="just">
-              <a:spcAft>
-                <a:spcPts val="1200"/>
-              </a:spcAft>
-              <a:buFont typeface="Arial" panose="020B0604020202020204" pitchFamily="34" charset="0"/>
-              <a:buNone/>
-            </a:pPr>
-            <a:r>
-              <a:rPr lang="en-US" altLang="zh-CN" sz="1200" dirty="0">
-                <a:latin typeface="Constantia" panose="02030602050306030303" pitchFamily="18" charset="0"/>
-              </a:rPr>
-              <a:t>2</a:t>
-            </a:r>
-            <a:r>
-              <a:rPr lang="zh-CN" altLang="en-US" sz="1200" dirty="0">
-                <a:latin typeface="Constantia" panose="02030602050306030303" pitchFamily="18" charset="0"/>
-              </a:rPr>
-              <a:t>： 单</a:t>
-            </a:r>
-            <a:r>
-              <a:rPr lang="en-US" altLang="zh-CN" sz="1200" dirty="0">
-                <a:latin typeface="Constantia" panose="02030602050306030303" pitchFamily="18" charset="0"/>
-              </a:rPr>
-              <a:t>Zone</a:t>
-            </a:r>
-            <a:r>
-              <a:rPr lang="zh-CN" altLang="en-US" sz="1200" dirty="0">
-                <a:latin typeface="Constantia" panose="02030602050306030303" pitchFamily="18" charset="0"/>
-              </a:rPr>
-              <a:t>性能</a:t>
-            </a:r>
-            <a:endParaRPr lang="en-US" altLang="zh-CN" sz="1200" dirty="0">
-              <a:latin typeface="Constantia" panose="02030602050306030303" pitchFamily="18" charset="0"/>
-            </a:endParaRPr>
-          </a:p>
-          <a:p>
-            <a:pPr indent="0" algn="just">
-              <a:spcAft>
-                <a:spcPts val="1200"/>
-              </a:spcAft>
-              <a:buFont typeface="Arial" panose="020B0604020202020204" pitchFamily="34" charset="0"/>
-              <a:buNone/>
-            </a:pPr>
-            <a:r>
-              <a:rPr lang="en-US" altLang="zh-CN" sz="1200" dirty="0">
-                <a:latin typeface="Constantia" panose="02030602050306030303" pitchFamily="18" charset="0"/>
-              </a:rPr>
-              <a:t>3</a:t>
-            </a:r>
-            <a:r>
-              <a:rPr lang="zh-CN" altLang="en-US" sz="1200" dirty="0">
-                <a:latin typeface="Constantia" panose="02030602050306030303" pitchFamily="18" charset="0"/>
-              </a:rPr>
-              <a:t>：</a:t>
-            </a:r>
           </a:p>
         </p:txBody>
       </p:sp>
@@ -4224,7 +4278,7 @@
     </p:spTree>
     <p:extLst>
       <p:ext uri="{BB962C8B-B14F-4D97-AF65-F5344CB8AC3E}">
-        <p14:creationId xmlns:p14="http://schemas.microsoft.com/office/powerpoint/2010/main" val="927470145"/>
+        <p14:creationId xmlns:p14="http://schemas.microsoft.com/office/powerpoint/2010/main" val="483495712"/>
       </p:ext>
     </p:extLst>
   </p:cSld>
@@ -7460,8 +7514,8 @@
         </p:nvSpPr>
         <p:spPr>
           <a:xfrm>
-            <a:off x="4790717" y="5150347"/>
-            <a:ext cx="2339102" cy="830997"/>
+            <a:off x="5406269" y="5150347"/>
+            <a:ext cx="1107996" cy="830997"/>
           </a:xfrm>
           <a:prstGeom prst="rect">
             <a:avLst/>
@@ -7481,7 +7535,7 @@
                 </a:solidFill>
                 <a:latin typeface="Constantia" panose="02030602050306030303" pitchFamily="18" charset="0"/>
               </a:rPr>
-              <a:t>汇报人：柳子淇</a:t>
+              <a:t>柳子淇</a:t>
             </a:r>
             <a:endParaRPr lang="en-US" altLang="zh-CN" sz="2400" b="1" dirty="0">
               <a:solidFill>
@@ -7669,6 +7723,605 @@
 </file>
 
 <file path=ppt/slides/slide10.xml><?xml version="1.0" encoding="utf-8"?>
+<p:sld xmlns:a="http://schemas.openxmlformats.org/drawingml/2006/main" xmlns:r="http://schemas.openxmlformats.org/officeDocument/2006/relationships" xmlns:p="http://schemas.openxmlformats.org/presentationml/2006/main">
+  <p:cSld>
+    <p:spTree>
+      <p:nvGrpSpPr>
+        <p:cNvPr id="1" name=""/>
+        <p:cNvGrpSpPr/>
+        <p:nvPr/>
+      </p:nvGrpSpPr>
+      <p:grpSpPr>
+        <a:xfrm>
+          <a:off x="0" y="0"/>
+          <a:ext cx="0" cy="0"/>
+          <a:chOff x="0" y="0"/>
+          <a:chExt cx="0" cy="0"/>
+        </a:xfrm>
+      </p:grpSpPr>
+      <p:sp>
+        <p:nvSpPr>
+          <p:cNvPr id="21" name="文本框 20"/>
+          <p:cNvSpPr txBox="1"/>
+          <p:nvPr/>
+        </p:nvSpPr>
+        <p:spPr>
+          <a:xfrm>
+            <a:off x="8244849" y="4730406"/>
+            <a:ext cx="2099301" cy="1328569"/>
+          </a:xfrm>
+          <a:prstGeom prst="rect">
+            <a:avLst/>
+          </a:prstGeom>
+          <a:noFill/>
+        </p:spPr>
+        <p:txBody>
+          <a:bodyPr wrap="square" rtlCol="0">
+            <a:spAutoFit/>
+          </a:bodyPr>
+          <a:lstStyle/>
+          <a:p>
+            <a:pPr algn="ctr">
+              <a:lnSpc>
+                <a:spcPct val="90000"/>
+              </a:lnSpc>
+              <a:spcBef>
+                <a:spcPts val="1000"/>
+              </a:spcBef>
+              <a:defRPr/>
+            </a:pPr>
+            <a:r>
+              <a:rPr lang="en-US" altLang="zh-CN" sz="4000" b="1" dirty="0">
+                <a:solidFill>
+                  <a:srgbClr val="4747BA"/>
+                </a:solidFill>
+                <a:latin typeface="Constantia" panose="02030602050306030303" pitchFamily="18" charset="0"/>
+                <a:ea typeface="腾讯体 W3" panose="020C04030202040F0204" pitchFamily="34" charset="-122"/>
+                <a:cs typeface="Times" panose="02020603050405020304" pitchFamily="18" charset="0"/>
+              </a:rPr>
+              <a:t>Q&amp;A</a:t>
+            </a:r>
+          </a:p>
+          <a:p>
+            <a:pPr lvl="0" algn="ctr">
+              <a:lnSpc>
+                <a:spcPct val="90000"/>
+              </a:lnSpc>
+              <a:spcBef>
+                <a:spcPts val="1000"/>
+              </a:spcBef>
+              <a:defRPr/>
+            </a:pPr>
+            <a:r>
+              <a:rPr lang="en-US" altLang="zh-CN" sz="4000" b="1" dirty="0">
+                <a:solidFill>
+                  <a:srgbClr val="4747BA"/>
+                </a:solidFill>
+                <a:latin typeface="Constantia" panose="02030602050306030303" pitchFamily="18" charset="0"/>
+                <a:ea typeface="腾讯体 W3" panose="020C04030202040F0204" pitchFamily="34" charset="-122"/>
+                <a:cs typeface="Times" panose="02020603050405020304" pitchFamily="18" charset="0"/>
+              </a:rPr>
+              <a:t>Thanks</a:t>
+            </a:r>
+            <a:r>
+              <a:rPr lang="zh-CN" altLang="en-US" sz="4000" b="1" dirty="0">
+                <a:solidFill>
+                  <a:srgbClr val="4747BA"/>
+                </a:solidFill>
+                <a:latin typeface="Constantia" panose="02030602050306030303" pitchFamily="18" charset="0"/>
+                <a:ea typeface="腾讯体 W3" panose="020C04030202040F0204" pitchFamily="34" charset="-122"/>
+                <a:cs typeface="Times" panose="02020603050405020304" pitchFamily="18" charset="0"/>
+              </a:rPr>
+              <a:t>！</a:t>
+            </a:r>
+          </a:p>
+        </p:txBody>
+      </p:sp>
+      <p:sp>
+        <p:nvSpPr>
+          <p:cNvPr id="8" name="矩形: 圆角 7"/>
+          <p:cNvSpPr/>
+          <p:nvPr/>
+        </p:nvSpPr>
+        <p:spPr>
+          <a:xfrm rot="2755966">
+            <a:off x="4146517" y="3347706"/>
+            <a:ext cx="1613489" cy="1613489"/>
+          </a:xfrm>
+          <a:prstGeom prst="roundRect">
+            <a:avLst/>
+          </a:prstGeom>
+          <a:solidFill>
+            <a:srgbClr val="8484D1"/>
+          </a:solidFill>
+          <a:ln>
+            <a:noFill/>
+          </a:ln>
+          <a:effectLst>
+            <a:outerShdw blurRad="88900" dist="50800" dir="8100000" sx="101000" sy="101000" algn="tr" rotWithShape="0">
+              <a:prstClr val="black">
+                <a:alpha val="40000"/>
+              </a:prstClr>
+            </a:outerShdw>
+          </a:effectLst>
+        </p:spPr>
+        <p:style>
+          <a:lnRef idx="2">
+            <a:schemeClr val="accent1">
+              <a:shade val="50000"/>
+            </a:schemeClr>
+          </a:lnRef>
+          <a:fillRef idx="1">
+            <a:schemeClr val="accent1"/>
+          </a:fillRef>
+          <a:effectRef idx="0">
+            <a:schemeClr val="accent1"/>
+          </a:effectRef>
+          <a:fontRef idx="minor">
+            <a:schemeClr val="lt1"/>
+          </a:fontRef>
+        </p:style>
+        <p:txBody>
+          <a:bodyPr rtlCol="0" anchor="ctr"/>
+          <a:lstStyle/>
+          <a:p>
+            <a:pPr algn="ctr"/>
+            <a:endParaRPr lang="zh-CN" altLang="en-US"/>
+          </a:p>
+        </p:txBody>
+      </p:sp>
+      <p:sp>
+        <p:nvSpPr>
+          <p:cNvPr id="9" name="矩形: 圆角 8"/>
+          <p:cNvSpPr/>
+          <p:nvPr/>
+        </p:nvSpPr>
+        <p:spPr>
+          <a:xfrm rot="2755966">
+            <a:off x="2770276" y="966707"/>
+            <a:ext cx="1613489" cy="1613489"/>
+          </a:xfrm>
+          <a:prstGeom prst="roundRect">
+            <a:avLst/>
+          </a:prstGeom>
+          <a:solidFill>
+            <a:srgbClr val="8484D1"/>
+          </a:solidFill>
+          <a:ln>
+            <a:noFill/>
+          </a:ln>
+          <a:effectLst>
+            <a:outerShdw blurRad="88900" dist="50800" dir="8100000" sx="101000" sy="101000" algn="tr" rotWithShape="0">
+              <a:prstClr val="black">
+                <a:alpha val="40000"/>
+              </a:prstClr>
+            </a:outerShdw>
+          </a:effectLst>
+        </p:spPr>
+        <p:style>
+          <a:lnRef idx="2">
+            <a:schemeClr val="accent1">
+              <a:shade val="50000"/>
+            </a:schemeClr>
+          </a:lnRef>
+          <a:fillRef idx="1">
+            <a:schemeClr val="accent1"/>
+          </a:fillRef>
+          <a:effectRef idx="0">
+            <a:schemeClr val="accent1"/>
+          </a:effectRef>
+          <a:fontRef idx="minor">
+            <a:schemeClr val="lt1"/>
+          </a:fontRef>
+        </p:style>
+        <p:txBody>
+          <a:bodyPr rtlCol="0" anchor="ctr"/>
+          <a:lstStyle/>
+          <a:p>
+            <a:pPr algn="ctr"/>
+            <a:endParaRPr lang="zh-CN" altLang="en-US"/>
+          </a:p>
+        </p:txBody>
+      </p:sp>
+      <p:sp>
+        <p:nvSpPr>
+          <p:cNvPr id="10" name="矩形: 圆角 9"/>
+          <p:cNvSpPr/>
+          <p:nvPr/>
+        </p:nvSpPr>
+        <p:spPr>
+          <a:xfrm rot="2755966">
+            <a:off x="4586763" y="2029472"/>
+            <a:ext cx="732996" cy="732996"/>
+          </a:xfrm>
+          <a:prstGeom prst="roundRect">
+            <a:avLst/>
+          </a:prstGeom>
+          <a:solidFill>
+            <a:srgbClr val="ADADE0"/>
+          </a:solidFill>
+          <a:ln>
+            <a:noFill/>
+          </a:ln>
+          <a:effectLst>
+            <a:outerShdw blurRad="88900" dist="50800" dir="8100000" sx="101000" sy="101000" algn="tr" rotWithShape="0">
+              <a:prstClr val="black">
+                <a:alpha val="40000"/>
+              </a:prstClr>
+            </a:outerShdw>
+          </a:effectLst>
+        </p:spPr>
+        <p:style>
+          <a:lnRef idx="2">
+            <a:schemeClr val="accent1">
+              <a:shade val="50000"/>
+            </a:schemeClr>
+          </a:lnRef>
+          <a:fillRef idx="1">
+            <a:schemeClr val="accent1"/>
+          </a:fillRef>
+          <a:effectRef idx="0">
+            <a:schemeClr val="accent1"/>
+          </a:effectRef>
+          <a:fontRef idx="minor">
+            <a:schemeClr val="lt1"/>
+          </a:fontRef>
+        </p:style>
+        <p:txBody>
+          <a:bodyPr rtlCol="0" anchor="ctr"/>
+          <a:lstStyle/>
+          <a:p>
+            <a:pPr algn="ctr"/>
+            <a:endParaRPr lang="zh-CN" altLang="en-US"/>
+          </a:p>
+        </p:txBody>
+      </p:sp>
+      <p:sp>
+        <p:nvSpPr>
+          <p:cNvPr id="11" name="矩形: 圆角 10"/>
+          <p:cNvSpPr/>
+          <p:nvPr/>
+        </p:nvSpPr>
+        <p:spPr>
+          <a:xfrm rot="2755966">
+            <a:off x="1415554" y="2470682"/>
+            <a:ext cx="3134556" cy="3134556"/>
+          </a:xfrm>
+          <a:prstGeom prst="roundRect">
+            <a:avLst/>
+          </a:prstGeom>
+          <a:blipFill dpi="0" rotWithShape="0">
+            <a:blip r:embed="rId3"/>
+            <a:srcRect/>
+            <a:stretch>
+              <a:fillRect/>
+            </a:stretch>
+          </a:blipFill>
+          <a:ln>
+            <a:noFill/>
+          </a:ln>
+          <a:effectLst>
+            <a:outerShdw blurRad="114300" dist="50800" dir="7800000" sx="101000" sy="101000" algn="tr" rotWithShape="0">
+              <a:prstClr val="black">
+                <a:alpha val="64000"/>
+              </a:prstClr>
+            </a:outerShdw>
+          </a:effectLst>
+        </p:spPr>
+        <p:style>
+          <a:lnRef idx="2">
+            <a:schemeClr val="accent1">
+              <a:shade val="50000"/>
+            </a:schemeClr>
+          </a:lnRef>
+          <a:fillRef idx="1">
+            <a:schemeClr val="accent1"/>
+          </a:fillRef>
+          <a:effectRef idx="0">
+            <a:schemeClr val="accent1"/>
+          </a:effectRef>
+          <a:fontRef idx="minor">
+            <a:schemeClr val="lt1"/>
+          </a:fontRef>
+        </p:style>
+        <p:txBody>
+          <a:bodyPr rtlCol="0" anchor="ctr"/>
+          <a:lstStyle/>
+          <a:p>
+            <a:pPr algn="ctr"/>
+            <a:endParaRPr lang="zh-CN" altLang="en-US" dirty="0"/>
+          </a:p>
+        </p:txBody>
+      </p:sp>
+      <p:sp>
+        <p:nvSpPr>
+          <p:cNvPr id="12" name="矩形: 圆角 11"/>
+          <p:cNvSpPr/>
+          <p:nvPr/>
+        </p:nvSpPr>
+        <p:spPr>
+          <a:xfrm rot="2755966">
+            <a:off x="5633126" y="2433704"/>
+            <a:ext cx="1685894" cy="1685894"/>
+          </a:xfrm>
+          <a:prstGeom prst="roundRect">
+            <a:avLst/>
+          </a:prstGeom>
+          <a:solidFill>
+            <a:srgbClr val="4747BA"/>
+          </a:solidFill>
+          <a:ln>
+            <a:noFill/>
+          </a:ln>
+          <a:effectLst>
+            <a:outerShdw blurRad="88900" dist="50800" dir="8100000" sx="101000" sy="101000" algn="tr" rotWithShape="0">
+              <a:prstClr val="black">
+                <a:alpha val="40000"/>
+              </a:prstClr>
+            </a:outerShdw>
+          </a:effectLst>
+        </p:spPr>
+        <p:style>
+          <a:lnRef idx="2">
+            <a:schemeClr val="accent1">
+              <a:shade val="50000"/>
+            </a:schemeClr>
+          </a:lnRef>
+          <a:fillRef idx="1">
+            <a:schemeClr val="accent1"/>
+          </a:fillRef>
+          <a:effectRef idx="0">
+            <a:schemeClr val="accent1"/>
+          </a:effectRef>
+          <a:fontRef idx="minor">
+            <a:schemeClr val="lt1"/>
+          </a:fontRef>
+        </p:style>
+        <p:txBody>
+          <a:bodyPr rtlCol="0" anchor="ctr"/>
+          <a:lstStyle/>
+          <a:p>
+            <a:pPr algn="ctr"/>
+            <a:endParaRPr lang="zh-CN" altLang="en-US" dirty="0"/>
+          </a:p>
+        </p:txBody>
+      </p:sp>
+      <p:sp>
+        <p:nvSpPr>
+          <p:cNvPr id="15" name="矩形: 圆角 14"/>
+          <p:cNvSpPr/>
+          <p:nvPr/>
+        </p:nvSpPr>
+        <p:spPr>
+          <a:xfrm rot="2755966">
+            <a:off x="3965400" y="5546431"/>
+            <a:ext cx="732996" cy="732996"/>
+          </a:xfrm>
+          <a:prstGeom prst="roundRect">
+            <a:avLst/>
+          </a:prstGeom>
+          <a:solidFill>
+            <a:srgbClr val="ADADE0"/>
+          </a:solidFill>
+          <a:ln>
+            <a:noFill/>
+          </a:ln>
+          <a:effectLst>
+            <a:outerShdw blurRad="88900" dist="50800" dir="8100000" sx="101000" sy="101000" algn="tr" rotWithShape="0">
+              <a:prstClr val="black">
+                <a:alpha val="40000"/>
+              </a:prstClr>
+            </a:outerShdw>
+          </a:effectLst>
+        </p:spPr>
+        <p:style>
+          <a:lnRef idx="2">
+            <a:schemeClr val="accent1">
+              <a:shade val="50000"/>
+            </a:schemeClr>
+          </a:lnRef>
+          <a:fillRef idx="1">
+            <a:schemeClr val="accent1"/>
+          </a:fillRef>
+          <a:effectRef idx="0">
+            <a:schemeClr val="accent1"/>
+          </a:effectRef>
+          <a:fontRef idx="minor">
+            <a:schemeClr val="lt1"/>
+          </a:fontRef>
+        </p:style>
+        <p:txBody>
+          <a:bodyPr rtlCol="0" anchor="ctr"/>
+          <a:lstStyle/>
+          <a:p>
+            <a:pPr algn="ctr"/>
+            <a:endParaRPr lang="zh-CN" altLang="en-US"/>
+          </a:p>
+        </p:txBody>
+      </p:sp>
+      <p:sp>
+        <p:nvSpPr>
+          <p:cNvPr id="16" name="矩形: 圆角 15"/>
+          <p:cNvSpPr/>
+          <p:nvPr/>
+        </p:nvSpPr>
+        <p:spPr>
+          <a:xfrm rot="2755966">
+            <a:off x="5089423" y="716157"/>
+            <a:ext cx="1134056" cy="1134056"/>
+          </a:xfrm>
+          <a:prstGeom prst="roundRect">
+            <a:avLst/>
+          </a:prstGeom>
+          <a:solidFill>
+            <a:srgbClr val="4747BA"/>
+          </a:solidFill>
+          <a:ln>
+            <a:noFill/>
+          </a:ln>
+          <a:effectLst>
+            <a:outerShdw blurRad="88900" dist="50800" dir="8100000" sx="101000" sy="101000" algn="tr" rotWithShape="0">
+              <a:prstClr val="black">
+                <a:alpha val="40000"/>
+              </a:prstClr>
+            </a:outerShdw>
+          </a:effectLst>
+        </p:spPr>
+        <p:style>
+          <a:lnRef idx="2">
+            <a:schemeClr val="accent1">
+              <a:shade val="50000"/>
+            </a:schemeClr>
+          </a:lnRef>
+          <a:fillRef idx="1">
+            <a:schemeClr val="accent1"/>
+          </a:fillRef>
+          <a:effectRef idx="0">
+            <a:schemeClr val="accent1"/>
+          </a:effectRef>
+          <a:fontRef idx="minor">
+            <a:schemeClr val="lt1"/>
+          </a:fontRef>
+        </p:style>
+        <p:txBody>
+          <a:bodyPr rtlCol="0" anchor="ctr"/>
+          <a:lstStyle/>
+          <a:p>
+            <a:pPr algn="ctr"/>
+            <a:endParaRPr lang="zh-CN" altLang="en-US"/>
+          </a:p>
+        </p:txBody>
+      </p:sp>
+      <p:sp>
+        <p:nvSpPr>
+          <p:cNvPr id="19" name="矩形: 圆角 18"/>
+          <p:cNvSpPr/>
+          <p:nvPr/>
+        </p:nvSpPr>
+        <p:spPr>
+          <a:xfrm rot="2755966">
+            <a:off x="7189439" y="1365266"/>
+            <a:ext cx="396502" cy="396502"/>
+          </a:xfrm>
+          <a:prstGeom prst="roundRect">
+            <a:avLst/>
+          </a:prstGeom>
+          <a:solidFill>
+            <a:srgbClr val="ADADE0"/>
+          </a:solidFill>
+          <a:ln>
+            <a:noFill/>
+          </a:ln>
+          <a:effectLst>
+            <a:outerShdw blurRad="88900" dist="50800" dir="8100000" sx="101000" sy="101000" algn="tr" rotWithShape="0">
+              <a:prstClr val="black">
+                <a:alpha val="40000"/>
+              </a:prstClr>
+            </a:outerShdw>
+          </a:effectLst>
+        </p:spPr>
+        <p:style>
+          <a:lnRef idx="2">
+            <a:schemeClr val="accent1">
+              <a:shade val="50000"/>
+            </a:schemeClr>
+          </a:lnRef>
+          <a:fillRef idx="1">
+            <a:schemeClr val="accent1"/>
+          </a:fillRef>
+          <a:effectRef idx="0">
+            <a:schemeClr val="accent1"/>
+          </a:effectRef>
+          <a:fontRef idx="minor">
+            <a:schemeClr val="lt1"/>
+          </a:fontRef>
+        </p:style>
+        <p:txBody>
+          <a:bodyPr rtlCol="0" anchor="ctr"/>
+          <a:lstStyle/>
+          <a:p>
+            <a:pPr algn="ctr"/>
+            <a:endParaRPr lang="zh-CN" altLang="en-US"/>
+          </a:p>
+        </p:txBody>
+      </p:sp>
+      <p:pic>
+        <p:nvPicPr>
+          <p:cNvPr id="17" name="图片 16"/>
+          <p:cNvPicPr>
+            <a:picLocks noChangeAspect="1"/>
+          </p:cNvPicPr>
+          <p:nvPr/>
+        </p:nvPicPr>
+        <p:blipFill>
+          <a:blip r:embed="rId4" cstate="print">
+            <a:extLst>
+              <a:ext uri="{28A0092B-C50C-407E-A947-70E740481C1C}">
+                <a14:useLocalDpi xmlns:a14="http://schemas.microsoft.com/office/drawing/2010/main" val="0"/>
+              </a:ext>
+            </a:extLst>
+          </a:blip>
+          <a:stretch>
+            <a:fillRect/>
+          </a:stretch>
+        </p:blipFill>
+        <p:spPr>
+          <a:xfrm>
+            <a:off x="7804063" y="218980"/>
+            <a:ext cx="730337" cy="556270"/>
+          </a:xfrm>
+          <a:prstGeom prst="rect">
+            <a:avLst/>
+          </a:prstGeom>
+        </p:spPr>
+      </p:pic>
+      <p:pic>
+        <p:nvPicPr>
+          <p:cNvPr id="18" name="图片 17"/>
+          <p:cNvPicPr>
+            <a:picLocks noChangeAspect="1"/>
+          </p:cNvPicPr>
+          <p:nvPr/>
+        </p:nvPicPr>
+        <p:blipFill>
+          <a:blip r:embed="rId5" cstate="print">
+            <a:extLst>
+              <a:ext uri="{28A0092B-C50C-407E-A947-70E740481C1C}">
+                <a14:useLocalDpi xmlns:a14="http://schemas.microsoft.com/office/drawing/2010/main" val="0"/>
+              </a:ext>
+            </a:extLst>
+          </a:blip>
+          <a:stretch>
+            <a:fillRect/>
+          </a:stretch>
+        </p:blipFill>
+        <p:spPr>
+          <a:xfrm>
+            <a:off x="8590829" y="204228"/>
+            <a:ext cx="3323471" cy="570629"/>
+          </a:xfrm>
+          <a:prstGeom prst="rect">
+            <a:avLst/>
+          </a:prstGeom>
+        </p:spPr>
+      </p:pic>
+    </p:spTree>
+  </p:cSld>
+  <p:clrMapOvr>
+    <a:masterClrMapping/>
+  </p:clrMapOvr>
+  <mc:AlternateContent xmlns:mc="http://schemas.openxmlformats.org/markup-compatibility/2006" xmlns:p14="http://schemas.microsoft.com/office/powerpoint/2010/main">
+    <mc:Choice Requires="p14">
+      <p:transition p14:dur="0" advClick="0"/>
+    </mc:Choice>
+    <mc:Fallback xmlns="">
+      <p:transition advClick="0"/>
+    </mc:Fallback>
+  </mc:AlternateContent>
+</p:sld>
+</file>
+
+<file path=ppt/slides/slide11.xml><?xml version="1.0" encoding="utf-8"?>
 <p:sld xmlns:a="http://schemas.openxmlformats.org/drawingml/2006/main" xmlns:r="http://schemas.openxmlformats.org/officeDocument/2006/relationships" xmlns:p="http://schemas.openxmlformats.org/presentationml/2006/main">
   <p:cSld>
     <p:spTree>
@@ -8058,7 +8711,7 @@
                 <a:latin typeface="Constantia" panose="02030602050306030303" pitchFamily="18" charset="0"/>
                 <a:cs typeface="Times" panose="02020603050405020304" pitchFamily="18" charset="0"/>
               </a:rPr>
-              <a:t>10</a:t>
+              <a:t>11</a:t>
             </a:fld>
             <a:endParaRPr lang="zh-CN" altLang="en-US" sz="1400" b="1" dirty="0">
               <a:solidFill>
@@ -8130,7 +8783,7 @@
                 <a:ea typeface="+mn-lt"/>
                 <a:cs typeface="Times New Roman" panose="02020603050405020304" charset="0"/>
               </a:rPr>
-              <a:t>ZAFS</a:t>
+              <a:t>ZNS</a:t>
             </a:r>
             <a:r>
               <a:rPr lang="zh-CN" altLang="en-US" sz="2400" dirty="0">
@@ -8140,7 +8793,7 @@
                 <a:ea typeface="+mn-lt"/>
                 <a:cs typeface="Times New Roman" panose="02020603050405020304" charset="0"/>
               </a:rPr>
-              <a:t>评估</a:t>
+              <a:t>设备</a:t>
             </a:r>
             <a:endParaRPr lang="en-US" altLang="zh-CN" sz="2400" dirty="0">
               <a:solidFill>
@@ -8154,10 +8807,190 @@
       </p:sp>
       <p:sp>
         <p:nvSpPr>
-          <p:cNvPr id="10" name="Fußzeilenplatzhalter 4">
+          <p:cNvPr id="5" name="文本框 4"/>
+          <p:cNvSpPr txBox="1"/>
+          <p:nvPr/>
+        </p:nvSpPr>
+        <p:spPr>
+          <a:xfrm>
+            <a:off x="385590" y="1576511"/>
+            <a:ext cx="6696883" cy="2461508"/>
+          </a:xfrm>
+          <a:prstGeom prst="rect">
+            <a:avLst/>
+          </a:prstGeom>
+          <a:noFill/>
+        </p:spPr>
+        <p:txBody>
+          <a:bodyPr wrap="square" rtlCol="0" anchor="t">
+            <a:spAutoFit/>
+          </a:bodyPr>
+          <a:lstStyle/>
+          <a:p>
+            <a:pPr marL="342900" indent="-342900">
+              <a:lnSpc>
+                <a:spcPct val="130000"/>
+              </a:lnSpc>
+              <a:buFont typeface="Wingdings" panose="05000000000000000000" charset="0"/>
+              <a:buChar char="q"/>
+            </a:pPr>
+            <a:r>
+              <a:rPr lang="en-US" altLang="zh-CN" sz="2000" dirty="0">
+                <a:latin typeface="宋体" panose="02010600030101010101" pitchFamily="2" charset="-122"/>
+                <a:ea typeface="宋体" panose="02010600030101010101" pitchFamily="2" charset="-122"/>
+                <a:sym typeface="+mn-ea"/>
+              </a:rPr>
+              <a:t>ZNS</a:t>
+            </a:r>
+            <a:r>
+              <a:rPr lang="zh-CN" altLang="en-US" sz="2000" dirty="0">
+                <a:latin typeface="宋体" panose="02010600030101010101" pitchFamily="2" charset="-122"/>
+                <a:ea typeface="宋体" panose="02010600030101010101" pitchFamily="2" charset="-122"/>
+                <a:sym typeface="+mn-ea"/>
+              </a:rPr>
+              <a:t>采用</a:t>
+            </a:r>
+            <a:r>
+              <a:rPr lang="en-US" altLang="zh-CN" sz="2000" dirty="0">
+                <a:latin typeface="宋体" panose="02010600030101010101" pitchFamily="2" charset="-122"/>
+                <a:ea typeface="宋体" panose="02010600030101010101" pitchFamily="2" charset="-122"/>
+                <a:sym typeface="+mn-ea"/>
+              </a:rPr>
+              <a:t>U.2</a:t>
+            </a:r>
+            <a:r>
+              <a:rPr lang="zh-CN" altLang="en-US" sz="2000" dirty="0">
+                <a:latin typeface="宋体" panose="02010600030101010101" pitchFamily="2" charset="-122"/>
+                <a:ea typeface="宋体" panose="02010600030101010101" pitchFamily="2" charset="-122"/>
+                <a:sym typeface="+mn-ea"/>
+              </a:rPr>
+              <a:t>接口，如右图</a:t>
+            </a:r>
+            <a:r>
+              <a:rPr lang="en-US" altLang="zh-CN" sz="2000" dirty="0">
+                <a:latin typeface="宋体" panose="02010600030101010101" pitchFamily="2" charset="-122"/>
+                <a:ea typeface="宋体" panose="02010600030101010101" pitchFamily="2" charset="-122"/>
+                <a:sym typeface="+mn-ea"/>
+              </a:rPr>
+              <a:t> </a:t>
+            </a:r>
+          </a:p>
+          <a:p>
+            <a:pPr marL="342900" indent="-342900">
+              <a:lnSpc>
+                <a:spcPct val="130000"/>
+              </a:lnSpc>
+              <a:buFont typeface="Wingdings" panose="05000000000000000000" charset="0"/>
+              <a:buChar char="q"/>
+            </a:pPr>
+            <a:r>
+              <a:rPr lang="zh-CN" altLang="en-US" sz="2000" dirty="0">
+                <a:latin typeface="宋体" panose="02010600030101010101" pitchFamily="2" charset="-122"/>
+                <a:ea typeface="宋体" panose="02010600030101010101" pitchFamily="2" charset="-122"/>
+                <a:sym typeface="+mn-ea"/>
+              </a:rPr>
+              <a:t>另外，初步测试了</a:t>
+            </a:r>
+            <a:r>
+              <a:rPr lang="en-US" altLang="zh-CN" sz="2000" dirty="0" err="1">
+                <a:latin typeface="宋体" panose="02010600030101010101" pitchFamily="2" charset="-122"/>
+                <a:ea typeface="宋体" panose="02010600030101010101" pitchFamily="2" charset="-122"/>
+                <a:sym typeface="+mn-ea"/>
+              </a:rPr>
+              <a:t>RocksDB</a:t>
+            </a:r>
+            <a:r>
+              <a:rPr lang="en-US" altLang="zh-CN" sz="2000" dirty="0">
+                <a:latin typeface="宋体" panose="02010600030101010101" pitchFamily="2" charset="-122"/>
+                <a:ea typeface="宋体" panose="02010600030101010101" pitchFamily="2" charset="-122"/>
+                <a:sym typeface="+mn-ea"/>
+              </a:rPr>
+              <a:t> + </a:t>
+            </a:r>
+            <a:r>
+              <a:rPr lang="en-US" altLang="zh-CN" sz="2000" dirty="0" err="1">
+                <a:latin typeface="宋体" panose="02010600030101010101" pitchFamily="2" charset="-122"/>
+                <a:ea typeface="宋体" panose="02010600030101010101" pitchFamily="2" charset="-122"/>
+                <a:sym typeface="+mn-ea"/>
+              </a:rPr>
+              <a:t>ZenFS</a:t>
+            </a:r>
+            <a:r>
+              <a:rPr lang="zh-CN" altLang="en-US" sz="2000" dirty="0">
+                <a:latin typeface="宋体" panose="02010600030101010101" pitchFamily="2" charset="-122"/>
+                <a:ea typeface="宋体" panose="02010600030101010101" pitchFamily="2" charset="-122"/>
+                <a:sym typeface="+mn-ea"/>
+              </a:rPr>
+              <a:t>的表现，与之前</a:t>
+            </a:r>
+            <a:r>
+              <a:rPr lang="en-US" altLang="zh-CN" sz="2000" dirty="0" err="1">
+                <a:latin typeface="宋体" panose="02010600030101010101" pitchFamily="2" charset="-122"/>
+                <a:ea typeface="宋体" panose="02010600030101010101" pitchFamily="2" charset="-122"/>
+                <a:sym typeface="+mn-ea"/>
+              </a:rPr>
+              <a:t>NVMevirt</a:t>
+            </a:r>
+            <a:r>
+              <a:rPr lang="zh-CN" altLang="en-US" sz="2000" dirty="0">
+                <a:latin typeface="宋体" panose="02010600030101010101" pitchFamily="2" charset="-122"/>
+                <a:ea typeface="宋体" panose="02010600030101010101" pitchFamily="2" charset="-122"/>
+                <a:sym typeface="+mn-ea"/>
+              </a:rPr>
+              <a:t>模拟结果相比，模拟器的延迟过低。我认为原因在于它是内核模块实现，可能只体现了主机</a:t>
+            </a:r>
+            <a:r>
+              <a:rPr lang="en-US" altLang="zh-CN" sz="2000" dirty="0">
+                <a:latin typeface="宋体" panose="02010600030101010101" pitchFamily="2" charset="-122"/>
+                <a:ea typeface="宋体" panose="02010600030101010101" pitchFamily="2" charset="-122"/>
+                <a:sym typeface="+mn-ea"/>
+              </a:rPr>
+              <a:t>l/O</a:t>
+            </a:r>
+            <a:r>
+              <a:rPr lang="zh-CN" altLang="en-US" sz="2000" dirty="0">
+                <a:latin typeface="宋体" panose="02010600030101010101" pitchFamily="2" charset="-122"/>
+                <a:ea typeface="宋体" panose="02010600030101010101" pitchFamily="2" charset="-122"/>
+                <a:sym typeface="+mn-ea"/>
+              </a:rPr>
+              <a:t>栈的延迟。</a:t>
+            </a:r>
+            <a:endParaRPr lang="en-US" altLang="zh-CN" sz="2000" dirty="0">
+              <a:latin typeface="宋体" panose="02010600030101010101" pitchFamily="2" charset="-122"/>
+              <a:ea typeface="宋体" panose="02010600030101010101" pitchFamily="2" charset="-122"/>
+              <a:sym typeface="+mn-ea"/>
+            </a:endParaRPr>
+          </a:p>
+          <a:p>
+            <a:pPr marL="342900" indent="-342900">
+              <a:lnSpc>
+                <a:spcPct val="130000"/>
+              </a:lnSpc>
+              <a:buFont typeface="Wingdings" panose="05000000000000000000" charset="0"/>
+              <a:buChar char="q"/>
+            </a:pPr>
+            <a:r>
+              <a:rPr lang="zh-CN" altLang="en-US" sz="2000" dirty="0">
+                <a:latin typeface="宋体" panose="02010600030101010101" pitchFamily="2" charset="-122"/>
+                <a:ea typeface="宋体" panose="02010600030101010101" pitchFamily="2" charset="-122"/>
+                <a:sym typeface="+mn-ea"/>
+              </a:rPr>
+              <a:t>连接到服务器后，查看块设备，如右下图所示</a:t>
+            </a:r>
+            <a:endParaRPr lang="en-US" altLang="zh-CN" sz="2000" dirty="0">
+              <a:latin typeface="宋体" panose="02010600030101010101" pitchFamily="2" charset="-122"/>
+              <a:ea typeface="宋体" panose="02010600030101010101" pitchFamily="2" charset="-122"/>
+              <a:sym typeface="+mn-ea"/>
+            </a:endParaRPr>
+          </a:p>
+        </p:txBody>
+      </p:sp>
+      <p:sp>
+        <p:nvSpPr>
+          <p:cNvPr id="7" name="Fußzeilenplatzhalter 4">
             <a:extLst>
               <a:ext uri="{FF2B5EF4-FFF2-40B4-BE49-F238E27FC236}">
-                <a16:creationId xmlns:a16="http://schemas.microsoft.com/office/drawing/2014/main" id="{41291BC8-BAF3-496D-6C37-8B6EEABE8583}"/>
+                <a16:creationId xmlns:a16="http://schemas.microsoft.com/office/drawing/2014/main" id="{293457A3-1637-3737-9B53-1CF17294975F}"/>
               </a:ext>
             </a:extLst>
           </p:cNvPr>
@@ -8207,841 +9040,13 @@
       </p:sp>
       <p:pic>
         <p:nvPicPr>
-          <p:cNvPr id="16" name="图形 1">
+          <p:cNvPr id="8" name="图片 7">
             <a:extLst>
               <a:ext uri="{FF2B5EF4-FFF2-40B4-BE49-F238E27FC236}">
-                <a16:creationId xmlns:a16="http://schemas.microsoft.com/office/drawing/2014/main" id="{85C8F1B6-20F2-450A-83C0-254C48F6987A}"/>
+                <a16:creationId xmlns:a16="http://schemas.microsoft.com/office/drawing/2014/main" id="{E6F57F7C-C43A-4F29-54A3-9E2A41811FC0}"/>
               </a:ext>
             </a:extLst>
           </p:cNvPr>
-          <p:cNvPicPr/>
-          <p:nvPr/>
-        </p:nvPicPr>
-        <p:blipFill>
-          <a:blip r:embed="rId5">
-            <a:extLst>
-              <a:ext uri="{96DAC541-7B7A-43D3-8B79-37D633B846F1}">
-                <asvg:svgBlip xmlns:asvg="http://schemas.microsoft.com/office/drawing/2016/SVG/main" r:embed="rId6"/>
-              </a:ext>
-            </a:extLst>
-          </a:blip>
-          <a:stretch>
-            <a:fillRect/>
-          </a:stretch>
-        </p:blipFill>
-        <p:spPr>
-          <a:xfrm>
-            <a:off x="920407" y="2692087"/>
-            <a:ext cx="4191000" cy="2913380"/>
-          </a:xfrm>
-          <a:prstGeom prst="rect">
-            <a:avLst/>
-          </a:prstGeom>
-        </p:spPr>
-      </p:pic>
-      <p:pic>
-        <p:nvPicPr>
-          <p:cNvPr id="19" name="图形 45">
-            <a:extLst>
-              <a:ext uri="{FF2B5EF4-FFF2-40B4-BE49-F238E27FC236}">
-                <a16:creationId xmlns:a16="http://schemas.microsoft.com/office/drawing/2014/main" id="{3A8141DC-2B35-4FEA-9F94-EB74B2B3E307}"/>
-              </a:ext>
-            </a:extLst>
-          </p:cNvPr>
-          <p:cNvPicPr/>
-          <p:nvPr/>
-        </p:nvPicPr>
-        <p:blipFill>
-          <a:blip r:embed="rId7">
-            <a:extLst>
-              <a:ext uri="{96DAC541-7B7A-43D3-8B79-37D633B846F1}">
-                <asvg:svgBlip xmlns:asvg="http://schemas.microsoft.com/office/drawing/2016/SVG/main" r:embed="rId8"/>
-              </a:ext>
-            </a:extLst>
-          </a:blip>
-          <a:stretch>
-            <a:fillRect/>
-          </a:stretch>
-        </p:blipFill>
-        <p:spPr>
-          <a:xfrm>
-            <a:off x="6834360" y="2720455"/>
-            <a:ext cx="4196715" cy="2797175"/>
-          </a:xfrm>
-          <a:prstGeom prst="rect">
-            <a:avLst/>
-          </a:prstGeom>
-        </p:spPr>
-      </p:pic>
-      <p:sp>
-        <p:nvSpPr>
-          <p:cNvPr id="21" name="文本框 20">
-            <a:extLst>
-              <a:ext uri="{FF2B5EF4-FFF2-40B4-BE49-F238E27FC236}">
-                <a16:creationId xmlns:a16="http://schemas.microsoft.com/office/drawing/2014/main" id="{53CB6ECB-9E02-4F97-A743-98E28F60E803}"/>
-              </a:ext>
-            </a:extLst>
-          </p:cNvPr>
-          <p:cNvSpPr txBox="1"/>
-          <p:nvPr/>
-        </p:nvSpPr>
-        <p:spPr>
-          <a:xfrm>
-            <a:off x="7080594" y="1990284"/>
-            <a:ext cx="3330171" cy="455253"/>
-          </a:xfrm>
-          <a:prstGeom prst="rect">
-            <a:avLst/>
-          </a:prstGeom>
-          <a:noFill/>
-        </p:spPr>
-        <p:txBody>
-          <a:bodyPr wrap="square">
-            <a:spAutoFit/>
-          </a:bodyPr>
-          <a:lstStyle/>
-          <a:p>
-            <a:pPr lvl="2" algn="just">
-              <a:lnSpc>
-                <a:spcPct val="150000"/>
-              </a:lnSpc>
-              <a:spcBef>
-                <a:spcPts val="600"/>
-              </a:spcBef>
-              <a:spcAft>
-                <a:spcPts val="600"/>
-              </a:spcAft>
-              <a:tabLst>
-                <a:tab pos="450215" algn="l"/>
-              </a:tabLst>
-            </a:pPr>
-            <a:r>
-              <a:rPr lang="en-US" altLang="zh-CN" sz="1800" kern="100" dirty="0">
-                <a:effectLst/>
-                <a:latin typeface="Times New Roman" panose="02020603050405020304" pitchFamily="18" charset="0"/>
-                <a:ea typeface="黑体" panose="02010609060101010101" pitchFamily="49" charset="-122"/>
-              </a:rPr>
-              <a:t>ZAFS </a:t>
-            </a:r>
-            <a:r>
-              <a:rPr lang="zh-CN" altLang="zh-CN" sz="1800" kern="100" dirty="0">
-                <a:effectLst/>
-                <a:latin typeface="Times New Roman" panose="02020603050405020304" pitchFamily="18" charset="0"/>
-                <a:ea typeface="黑体" panose="02010609060101010101" pitchFamily="49" charset="-122"/>
-              </a:rPr>
-              <a:t>恢复时间测试</a:t>
-            </a:r>
-          </a:p>
-        </p:txBody>
-      </p:sp>
-      <p:sp>
-        <p:nvSpPr>
-          <p:cNvPr id="22" name="文本框 21">
-            <a:extLst>
-              <a:ext uri="{FF2B5EF4-FFF2-40B4-BE49-F238E27FC236}">
-                <a16:creationId xmlns:a16="http://schemas.microsoft.com/office/drawing/2014/main" id="{141A07DB-644F-4FF7-8E4B-D6AB3482A560}"/>
-              </a:ext>
-            </a:extLst>
-          </p:cNvPr>
-          <p:cNvSpPr txBox="1"/>
-          <p:nvPr/>
-        </p:nvSpPr>
-        <p:spPr>
-          <a:xfrm>
-            <a:off x="1365770" y="1990283"/>
-            <a:ext cx="3745637" cy="455253"/>
-          </a:xfrm>
-          <a:prstGeom prst="rect">
-            <a:avLst/>
-          </a:prstGeom>
-          <a:noFill/>
-        </p:spPr>
-        <p:txBody>
-          <a:bodyPr wrap="square">
-            <a:spAutoFit/>
-          </a:bodyPr>
-          <a:lstStyle/>
-          <a:p>
-            <a:pPr lvl="2" algn="just">
-              <a:lnSpc>
-                <a:spcPct val="150000"/>
-              </a:lnSpc>
-              <a:spcBef>
-                <a:spcPts val="600"/>
-              </a:spcBef>
-              <a:spcAft>
-                <a:spcPts val="600"/>
-              </a:spcAft>
-              <a:tabLst>
-                <a:tab pos="450215" algn="l"/>
-              </a:tabLst>
-            </a:pPr>
-            <a:r>
-              <a:rPr lang="en-US" altLang="zh-CN" sz="1800" kern="100" dirty="0">
-                <a:effectLst/>
-                <a:latin typeface="Times New Roman" panose="02020603050405020304" pitchFamily="18" charset="0"/>
-                <a:ea typeface="黑体" panose="02010609060101010101" pitchFamily="49" charset="-122"/>
-              </a:rPr>
-              <a:t>ZAFS</a:t>
-            </a:r>
-            <a:r>
-              <a:rPr lang="zh-CN" altLang="zh-CN" sz="1800" kern="100" dirty="0">
-                <a:effectLst/>
-                <a:latin typeface="Times New Roman" panose="02020603050405020304" pitchFamily="18" charset="0"/>
-                <a:ea typeface="黑体" panose="02010609060101010101" pitchFamily="49" charset="-122"/>
-              </a:rPr>
-              <a:t>写入测试</a:t>
-            </a:r>
-          </a:p>
-        </p:txBody>
-      </p:sp>
-      <p:sp>
-        <p:nvSpPr>
-          <p:cNvPr id="25" name="文本框 24">
-            <a:extLst>
-              <a:ext uri="{FF2B5EF4-FFF2-40B4-BE49-F238E27FC236}">
-                <a16:creationId xmlns:a16="http://schemas.microsoft.com/office/drawing/2014/main" id="{9B8BFC0A-1446-4D70-A7AD-1DF215C88C83}"/>
-              </a:ext>
-            </a:extLst>
-          </p:cNvPr>
-          <p:cNvSpPr txBox="1"/>
-          <p:nvPr/>
-        </p:nvSpPr>
-        <p:spPr>
-          <a:xfrm>
-            <a:off x="281680" y="299000"/>
-            <a:ext cx="6798981" cy="535531"/>
-          </a:xfrm>
-          <a:prstGeom prst="rect">
-            <a:avLst/>
-          </a:prstGeom>
-          <a:noFill/>
-        </p:spPr>
-        <p:txBody>
-          <a:bodyPr wrap="square" rtlCol="0">
-            <a:spAutoFit/>
-          </a:bodyPr>
-          <a:lstStyle/>
-          <a:p>
-            <a:pPr>
-              <a:lnSpc>
-                <a:spcPct val="90000"/>
-              </a:lnSpc>
-              <a:spcBef>
-                <a:spcPts val="1000"/>
-              </a:spcBef>
-              <a:defRPr/>
-            </a:pPr>
-            <a:r>
-              <a:rPr lang="en-US" altLang="zh-CN" sz="3200" b="1" dirty="0">
-                <a:solidFill>
-                  <a:srgbClr val="4747BA"/>
-                </a:solidFill>
-                <a:latin typeface="Constantia" panose="02030602050306030303" pitchFamily="18" charset="0"/>
-                <a:ea typeface="腾讯体 W3" panose="020C04030202040F0204" pitchFamily="34" charset="-122"/>
-                <a:cs typeface="Times" panose="02020603050405020304" pitchFamily="18" charset="0"/>
-              </a:rPr>
-              <a:t> </a:t>
-            </a:r>
-            <a:r>
-              <a:rPr lang="zh-CN" altLang="en-US" sz="3200" b="1" dirty="0">
-                <a:solidFill>
-                  <a:srgbClr val="4747BA"/>
-                </a:solidFill>
-                <a:latin typeface="Constantia" panose="02030602050306030303" pitchFamily="18" charset="0"/>
-                <a:ea typeface="腾讯体 W3" panose="020C04030202040F0204" pitchFamily="34" charset="-122"/>
-                <a:cs typeface="Times" panose="02020603050405020304" pitchFamily="18" charset="0"/>
-              </a:rPr>
-              <a:t>实验评估</a:t>
-            </a:r>
-            <a:endParaRPr lang="zh-CN" altLang="en-US" sz="3600" b="1" dirty="0">
-              <a:solidFill>
-                <a:srgbClr val="4747BA"/>
-              </a:solidFill>
-              <a:latin typeface="Constantia" panose="02030602050306030303" pitchFamily="18" charset="0"/>
-              <a:ea typeface="腾讯体 W3" panose="020C04030202040F0204" pitchFamily="34" charset="-122"/>
-              <a:cs typeface="Times" panose="02020603050405020304" pitchFamily="18" charset="0"/>
-            </a:endParaRPr>
-          </a:p>
-        </p:txBody>
-      </p:sp>
-    </p:spTree>
-    <p:extLst>
-      <p:ext uri="{BB962C8B-B14F-4D97-AF65-F5344CB8AC3E}">
-        <p14:creationId xmlns:p14="http://schemas.microsoft.com/office/powerpoint/2010/main" val="2386150555"/>
-      </p:ext>
-    </p:extLst>
-  </p:cSld>
-  <p:clrMapOvr>
-    <a:masterClrMapping/>
-  </p:clrMapOvr>
-  <mc:AlternateContent xmlns:mc="http://schemas.openxmlformats.org/markup-compatibility/2006" xmlns:p14="http://schemas.microsoft.com/office/powerpoint/2010/main">
-    <mc:Choice Requires="p14">
-      <p:transition p14:dur="10" advClick="0"/>
-    </mc:Choice>
-    <mc:Fallback xmlns="">
-      <p:transition advClick="0"/>
-    </mc:Fallback>
-  </mc:AlternateContent>
-</p:sld>
-</file>
-
-<file path=ppt/slides/slide11.xml><?xml version="1.0" encoding="utf-8"?>
-<p:sld xmlns:a="http://schemas.openxmlformats.org/drawingml/2006/main" xmlns:r="http://schemas.openxmlformats.org/officeDocument/2006/relationships" xmlns:p="http://schemas.openxmlformats.org/presentationml/2006/main">
-  <p:cSld>
-    <p:spTree>
-      <p:nvGrpSpPr>
-        <p:cNvPr id="1" name=""/>
-        <p:cNvGrpSpPr/>
-        <p:nvPr/>
-      </p:nvGrpSpPr>
-      <p:grpSpPr>
-        <a:xfrm>
-          <a:off x="0" y="0"/>
-          <a:ext cx="0" cy="0"/>
-          <a:chOff x="0" y="0"/>
-          <a:chExt cx="0" cy="0"/>
-        </a:xfrm>
-      </p:grpSpPr>
-      <p:sp>
-        <p:nvSpPr>
-          <p:cNvPr id="21" name="文本框 20"/>
-          <p:cNvSpPr txBox="1"/>
-          <p:nvPr/>
-        </p:nvSpPr>
-        <p:spPr>
-          <a:xfrm>
-            <a:off x="8244849" y="4730406"/>
-            <a:ext cx="2099301" cy="1328569"/>
-          </a:xfrm>
-          <a:prstGeom prst="rect">
-            <a:avLst/>
-          </a:prstGeom>
-          <a:noFill/>
-        </p:spPr>
-        <p:txBody>
-          <a:bodyPr wrap="square" rtlCol="0">
-            <a:spAutoFit/>
-          </a:bodyPr>
-          <a:lstStyle/>
-          <a:p>
-            <a:pPr algn="ctr">
-              <a:lnSpc>
-                <a:spcPct val="90000"/>
-              </a:lnSpc>
-              <a:spcBef>
-                <a:spcPts val="1000"/>
-              </a:spcBef>
-              <a:defRPr/>
-            </a:pPr>
-            <a:r>
-              <a:rPr lang="en-US" altLang="zh-CN" sz="4000" b="1" dirty="0">
-                <a:solidFill>
-                  <a:srgbClr val="4747BA"/>
-                </a:solidFill>
-                <a:latin typeface="Constantia" panose="02030602050306030303" pitchFamily="18" charset="0"/>
-                <a:ea typeface="腾讯体 W3" panose="020C04030202040F0204" pitchFamily="34" charset="-122"/>
-                <a:cs typeface="Times" panose="02020603050405020304" pitchFamily="18" charset="0"/>
-              </a:rPr>
-              <a:t>Q&amp;A</a:t>
-            </a:r>
-          </a:p>
-          <a:p>
-            <a:pPr lvl="0" algn="ctr">
-              <a:lnSpc>
-                <a:spcPct val="90000"/>
-              </a:lnSpc>
-              <a:spcBef>
-                <a:spcPts val="1000"/>
-              </a:spcBef>
-              <a:defRPr/>
-            </a:pPr>
-            <a:r>
-              <a:rPr lang="en-US" altLang="zh-CN" sz="4000" b="1" dirty="0">
-                <a:solidFill>
-                  <a:srgbClr val="4747BA"/>
-                </a:solidFill>
-                <a:latin typeface="Constantia" panose="02030602050306030303" pitchFamily="18" charset="0"/>
-                <a:ea typeface="腾讯体 W3" panose="020C04030202040F0204" pitchFamily="34" charset="-122"/>
-                <a:cs typeface="Times" panose="02020603050405020304" pitchFamily="18" charset="0"/>
-              </a:rPr>
-              <a:t>Thanks</a:t>
-            </a:r>
-            <a:r>
-              <a:rPr lang="zh-CN" altLang="en-US" sz="4000" b="1" dirty="0">
-                <a:solidFill>
-                  <a:srgbClr val="4747BA"/>
-                </a:solidFill>
-                <a:latin typeface="Constantia" panose="02030602050306030303" pitchFamily="18" charset="0"/>
-                <a:ea typeface="腾讯体 W3" panose="020C04030202040F0204" pitchFamily="34" charset="-122"/>
-                <a:cs typeface="Times" panose="02020603050405020304" pitchFamily="18" charset="0"/>
-              </a:rPr>
-              <a:t>！</a:t>
-            </a:r>
-          </a:p>
-        </p:txBody>
-      </p:sp>
-      <p:sp>
-        <p:nvSpPr>
-          <p:cNvPr id="8" name="矩形: 圆角 7"/>
-          <p:cNvSpPr/>
-          <p:nvPr/>
-        </p:nvSpPr>
-        <p:spPr>
-          <a:xfrm rot="2755966">
-            <a:off x="4146517" y="3347706"/>
-            <a:ext cx="1613489" cy="1613489"/>
-          </a:xfrm>
-          <a:prstGeom prst="roundRect">
-            <a:avLst/>
-          </a:prstGeom>
-          <a:solidFill>
-            <a:srgbClr val="8484D1"/>
-          </a:solidFill>
-          <a:ln>
-            <a:noFill/>
-          </a:ln>
-          <a:effectLst>
-            <a:outerShdw blurRad="88900" dist="50800" dir="8100000" sx="101000" sy="101000" algn="tr" rotWithShape="0">
-              <a:prstClr val="black">
-                <a:alpha val="40000"/>
-              </a:prstClr>
-            </a:outerShdw>
-          </a:effectLst>
-        </p:spPr>
-        <p:style>
-          <a:lnRef idx="2">
-            <a:schemeClr val="accent1">
-              <a:shade val="50000"/>
-            </a:schemeClr>
-          </a:lnRef>
-          <a:fillRef idx="1">
-            <a:schemeClr val="accent1"/>
-          </a:fillRef>
-          <a:effectRef idx="0">
-            <a:schemeClr val="accent1"/>
-          </a:effectRef>
-          <a:fontRef idx="minor">
-            <a:schemeClr val="lt1"/>
-          </a:fontRef>
-        </p:style>
-        <p:txBody>
-          <a:bodyPr rtlCol="0" anchor="ctr"/>
-          <a:lstStyle/>
-          <a:p>
-            <a:pPr algn="ctr"/>
-            <a:endParaRPr lang="zh-CN" altLang="en-US"/>
-          </a:p>
-        </p:txBody>
-      </p:sp>
-      <p:sp>
-        <p:nvSpPr>
-          <p:cNvPr id="9" name="矩形: 圆角 8"/>
-          <p:cNvSpPr/>
-          <p:nvPr/>
-        </p:nvSpPr>
-        <p:spPr>
-          <a:xfrm rot="2755966">
-            <a:off x="2770276" y="966707"/>
-            <a:ext cx="1613489" cy="1613489"/>
-          </a:xfrm>
-          <a:prstGeom prst="roundRect">
-            <a:avLst/>
-          </a:prstGeom>
-          <a:solidFill>
-            <a:srgbClr val="8484D1"/>
-          </a:solidFill>
-          <a:ln>
-            <a:noFill/>
-          </a:ln>
-          <a:effectLst>
-            <a:outerShdw blurRad="88900" dist="50800" dir="8100000" sx="101000" sy="101000" algn="tr" rotWithShape="0">
-              <a:prstClr val="black">
-                <a:alpha val="40000"/>
-              </a:prstClr>
-            </a:outerShdw>
-          </a:effectLst>
-        </p:spPr>
-        <p:style>
-          <a:lnRef idx="2">
-            <a:schemeClr val="accent1">
-              <a:shade val="50000"/>
-            </a:schemeClr>
-          </a:lnRef>
-          <a:fillRef idx="1">
-            <a:schemeClr val="accent1"/>
-          </a:fillRef>
-          <a:effectRef idx="0">
-            <a:schemeClr val="accent1"/>
-          </a:effectRef>
-          <a:fontRef idx="minor">
-            <a:schemeClr val="lt1"/>
-          </a:fontRef>
-        </p:style>
-        <p:txBody>
-          <a:bodyPr rtlCol="0" anchor="ctr"/>
-          <a:lstStyle/>
-          <a:p>
-            <a:pPr algn="ctr"/>
-            <a:endParaRPr lang="zh-CN" altLang="en-US"/>
-          </a:p>
-        </p:txBody>
-      </p:sp>
-      <p:sp>
-        <p:nvSpPr>
-          <p:cNvPr id="10" name="矩形: 圆角 9"/>
-          <p:cNvSpPr/>
-          <p:nvPr/>
-        </p:nvSpPr>
-        <p:spPr>
-          <a:xfrm rot="2755966">
-            <a:off x="4586763" y="2029472"/>
-            <a:ext cx="732996" cy="732996"/>
-          </a:xfrm>
-          <a:prstGeom prst="roundRect">
-            <a:avLst/>
-          </a:prstGeom>
-          <a:solidFill>
-            <a:srgbClr val="ADADE0"/>
-          </a:solidFill>
-          <a:ln>
-            <a:noFill/>
-          </a:ln>
-          <a:effectLst>
-            <a:outerShdw blurRad="88900" dist="50800" dir="8100000" sx="101000" sy="101000" algn="tr" rotWithShape="0">
-              <a:prstClr val="black">
-                <a:alpha val="40000"/>
-              </a:prstClr>
-            </a:outerShdw>
-          </a:effectLst>
-        </p:spPr>
-        <p:style>
-          <a:lnRef idx="2">
-            <a:schemeClr val="accent1">
-              <a:shade val="50000"/>
-            </a:schemeClr>
-          </a:lnRef>
-          <a:fillRef idx="1">
-            <a:schemeClr val="accent1"/>
-          </a:fillRef>
-          <a:effectRef idx="0">
-            <a:schemeClr val="accent1"/>
-          </a:effectRef>
-          <a:fontRef idx="minor">
-            <a:schemeClr val="lt1"/>
-          </a:fontRef>
-        </p:style>
-        <p:txBody>
-          <a:bodyPr rtlCol="0" anchor="ctr"/>
-          <a:lstStyle/>
-          <a:p>
-            <a:pPr algn="ctr"/>
-            <a:endParaRPr lang="zh-CN" altLang="en-US"/>
-          </a:p>
-        </p:txBody>
-      </p:sp>
-      <p:sp>
-        <p:nvSpPr>
-          <p:cNvPr id="11" name="矩形: 圆角 10"/>
-          <p:cNvSpPr/>
-          <p:nvPr/>
-        </p:nvSpPr>
-        <p:spPr>
-          <a:xfrm rot="2755966">
-            <a:off x="1415554" y="2470682"/>
-            <a:ext cx="3134556" cy="3134556"/>
-          </a:xfrm>
-          <a:prstGeom prst="roundRect">
-            <a:avLst/>
-          </a:prstGeom>
-          <a:blipFill dpi="0" rotWithShape="0">
-            <a:blip r:embed="rId3"/>
-            <a:srcRect/>
-            <a:stretch>
-              <a:fillRect/>
-            </a:stretch>
-          </a:blipFill>
-          <a:ln>
-            <a:noFill/>
-          </a:ln>
-          <a:effectLst>
-            <a:outerShdw blurRad="114300" dist="50800" dir="7800000" sx="101000" sy="101000" algn="tr" rotWithShape="0">
-              <a:prstClr val="black">
-                <a:alpha val="64000"/>
-              </a:prstClr>
-            </a:outerShdw>
-          </a:effectLst>
-        </p:spPr>
-        <p:style>
-          <a:lnRef idx="2">
-            <a:schemeClr val="accent1">
-              <a:shade val="50000"/>
-            </a:schemeClr>
-          </a:lnRef>
-          <a:fillRef idx="1">
-            <a:schemeClr val="accent1"/>
-          </a:fillRef>
-          <a:effectRef idx="0">
-            <a:schemeClr val="accent1"/>
-          </a:effectRef>
-          <a:fontRef idx="minor">
-            <a:schemeClr val="lt1"/>
-          </a:fontRef>
-        </p:style>
-        <p:txBody>
-          <a:bodyPr rtlCol="0" anchor="ctr"/>
-          <a:lstStyle/>
-          <a:p>
-            <a:pPr algn="ctr"/>
-            <a:endParaRPr lang="zh-CN" altLang="en-US" dirty="0"/>
-          </a:p>
-        </p:txBody>
-      </p:sp>
-      <p:sp>
-        <p:nvSpPr>
-          <p:cNvPr id="12" name="矩形: 圆角 11"/>
-          <p:cNvSpPr/>
-          <p:nvPr/>
-        </p:nvSpPr>
-        <p:spPr>
-          <a:xfrm rot="2755966">
-            <a:off x="5633126" y="2433704"/>
-            <a:ext cx="1685894" cy="1685894"/>
-          </a:xfrm>
-          <a:prstGeom prst="roundRect">
-            <a:avLst/>
-          </a:prstGeom>
-          <a:solidFill>
-            <a:srgbClr val="4747BA"/>
-          </a:solidFill>
-          <a:ln>
-            <a:noFill/>
-          </a:ln>
-          <a:effectLst>
-            <a:outerShdw blurRad="88900" dist="50800" dir="8100000" sx="101000" sy="101000" algn="tr" rotWithShape="0">
-              <a:prstClr val="black">
-                <a:alpha val="40000"/>
-              </a:prstClr>
-            </a:outerShdw>
-          </a:effectLst>
-        </p:spPr>
-        <p:style>
-          <a:lnRef idx="2">
-            <a:schemeClr val="accent1">
-              <a:shade val="50000"/>
-            </a:schemeClr>
-          </a:lnRef>
-          <a:fillRef idx="1">
-            <a:schemeClr val="accent1"/>
-          </a:fillRef>
-          <a:effectRef idx="0">
-            <a:schemeClr val="accent1"/>
-          </a:effectRef>
-          <a:fontRef idx="minor">
-            <a:schemeClr val="lt1"/>
-          </a:fontRef>
-        </p:style>
-        <p:txBody>
-          <a:bodyPr rtlCol="0" anchor="ctr"/>
-          <a:lstStyle/>
-          <a:p>
-            <a:pPr algn="ctr"/>
-            <a:endParaRPr lang="zh-CN" altLang="en-US" dirty="0"/>
-          </a:p>
-        </p:txBody>
-      </p:sp>
-      <p:sp>
-        <p:nvSpPr>
-          <p:cNvPr id="15" name="矩形: 圆角 14"/>
-          <p:cNvSpPr/>
-          <p:nvPr/>
-        </p:nvSpPr>
-        <p:spPr>
-          <a:xfrm rot="2755966">
-            <a:off x="3965400" y="5546431"/>
-            <a:ext cx="732996" cy="732996"/>
-          </a:xfrm>
-          <a:prstGeom prst="roundRect">
-            <a:avLst/>
-          </a:prstGeom>
-          <a:solidFill>
-            <a:srgbClr val="ADADE0"/>
-          </a:solidFill>
-          <a:ln>
-            <a:noFill/>
-          </a:ln>
-          <a:effectLst>
-            <a:outerShdw blurRad="88900" dist="50800" dir="8100000" sx="101000" sy="101000" algn="tr" rotWithShape="0">
-              <a:prstClr val="black">
-                <a:alpha val="40000"/>
-              </a:prstClr>
-            </a:outerShdw>
-          </a:effectLst>
-        </p:spPr>
-        <p:style>
-          <a:lnRef idx="2">
-            <a:schemeClr val="accent1">
-              <a:shade val="50000"/>
-            </a:schemeClr>
-          </a:lnRef>
-          <a:fillRef idx="1">
-            <a:schemeClr val="accent1"/>
-          </a:fillRef>
-          <a:effectRef idx="0">
-            <a:schemeClr val="accent1"/>
-          </a:effectRef>
-          <a:fontRef idx="minor">
-            <a:schemeClr val="lt1"/>
-          </a:fontRef>
-        </p:style>
-        <p:txBody>
-          <a:bodyPr rtlCol="0" anchor="ctr"/>
-          <a:lstStyle/>
-          <a:p>
-            <a:pPr algn="ctr"/>
-            <a:endParaRPr lang="zh-CN" altLang="en-US"/>
-          </a:p>
-        </p:txBody>
-      </p:sp>
-      <p:sp>
-        <p:nvSpPr>
-          <p:cNvPr id="16" name="矩形: 圆角 15"/>
-          <p:cNvSpPr/>
-          <p:nvPr/>
-        </p:nvSpPr>
-        <p:spPr>
-          <a:xfrm rot="2755966">
-            <a:off x="5089423" y="716157"/>
-            <a:ext cx="1134056" cy="1134056"/>
-          </a:xfrm>
-          <a:prstGeom prst="roundRect">
-            <a:avLst/>
-          </a:prstGeom>
-          <a:solidFill>
-            <a:srgbClr val="4747BA"/>
-          </a:solidFill>
-          <a:ln>
-            <a:noFill/>
-          </a:ln>
-          <a:effectLst>
-            <a:outerShdw blurRad="88900" dist="50800" dir="8100000" sx="101000" sy="101000" algn="tr" rotWithShape="0">
-              <a:prstClr val="black">
-                <a:alpha val="40000"/>
-              </a:prstClr>
-            </a:outerShdw>
-          </a:effectLst>
-        </p:spPr>
-        <p:style>
-          <a:lnRef idx="2">
-            <a:schemeClr val="accent1">
-              <a:shade val="50000"/>
-            </a:schemeClr>
-          </a:lnRef>
-          <a:fillRef idx="1">
-            <a:schemeClr val="accent1"/>
-          </a:fillRef>
-          <a:effectRef idx="0">
-            <a:schemeClr val="accent1"/>
-          </a:effectRef>
-          <a:fontRef idx="minor">
-            <a:schemeClr val="lt1"/>
-          </a:fontRef>
-        </p:style>
-        <p:txBody>
-          <a:bodyPr rtlCol="0" anchor="ctr"/>
-          <a:lstStyle/>
-          <a:p>
-            <a:pPr algn="ctr"/>
-            <a:endParaRPr lang="zh-CN" altLang="en-US"/>
-          </a:p>
-        </p:txBody>
-      </p:sp>
-      <p:sp>
-        <p:nvSpPr>
-          <p:cNvPr id="19" name="矩形: 圆角 18"/>
-          <p:cNvSpPr/>
-          <p:nvPr/>
-        </p:nvSpPr>
-        <p:spPr>
-          <a:xfrm rot="2755966">
-            <a:off x="7189439" y="1365266"/>
-            <a:ext cx="396502" cy="396502"/>
-          </a:xfrm>
-          <a:prstGeom prst="roundRect">
-            <a:avLst/>
-          </a:prstGeom>
-          <a:solidFill>
-            <a:srgbClr val="ADADE0"/>
-          </a:solidFill>
-          <a:ln>
-            <a:noFill/>
-          </a:ln>
-          <a:effectLst>
-            <a:outerShdw blurRad="88900" dist="50800" dir="8100000" sx="101000" sy="101000" algn="tr" rotWithShape="0">
-              <a:prstClr val="black">
-                <a:alpha val="40000"/>
-              </a:prstClr>
-            </a:outerShdw>
-          </a:effectLst>
-        </p:spPr>
-        <p:style>
-          <a:lnRef idx="2">
-            <a:schemeClr val="accent1">
-              <a:shade val="50000"/>
-            </a:schemeClr>
-          </a:lnRef>
-          <a:fillRef idx="1">
-            <a:schemeClr val="accent1"/>
-          </a:fillRef>
-          <a:effectRef idx="0">
-            <a:schemeClr val="accent1"/>
-          </a:effectRef>
-          <a:fontRef idx="minor">
-            <a:schemeClr val="lt1"/>
-          </a:fontRef>
-        </p:style>
-        <p:txBody>
-          <a:bodyPr rtlCol="0" anchor="ctr"/>
-          <a:lstStyle/>
-          <a:p>
-            <a:pPr algn="ctr"/>
-            <a:endParaRPr lang="zh-CN" altLang="en-US"/>
-          </a:p>
-        </p:txBody>
-      </p:sp>
-      <p:pic>
-        <p:nvPicPr>
-          <p:cNvPr id="17" name="图片 16"/>
-          <p:cNvPicPr>
-            <a:picLocks noChangeAspect="1"/>
-          </p:cNvPicPr>
-          <p:nvPr/>
-        </p:nvPicPr>
-        <p:blipFill>
-          <a:blip r:embed="rId4" cstate="print">
-            <a:extLst>
-              <a:ext uri="{28A0092B-C50C-407E-A947-70E740481C1C}">
-                <a14:useLocalDpi xmlns:a14="http://schemas.microsoft.com/office/drawing/2010/main" val="0"/>
-              </a:ext>
-            </a:extLst>
-          </a:blip>
-          <a:stretch>
-            <a:fillRect/>
-          </a:stretch>
-        </p:blipFill>
-        <p:spPr>
-          <a:xfrm>
-            <a:off x="7804063" y="218980"/>
-            <a:ext cx="730337" cy="556270"/>
-          </a:xfrm>
-          <a:prstGeom prst="rect">
-            <a:avLst/>
-          </a:prstGeom>
-        </p:spPr>
-      </p:pic>
-      <p:pic>
-        <p:nvPicPr>
-          <p:cNvPr id="18" name="图片 17"/>
           <p:cNvPicPr>
             <a:picLocks noChangeAspect="1"/>
           </p:cNvPicPr>
@@ -9061,22 +9066,169 @@
         </p:blipFill>
         <p:spPr>
           <a:xfrm>
-            <a:off x="8590829" y="204228"/>
-            <a:ext cx="3323471" cy="570629"/>
+            <a:off x="9985299" y="1248081"/>
+            <a:ext cx="1598233" cy="2243013"/>
           </a:xfrm>
           <a:prstGeom prst="rect">
             <a:avLst/>
           </a:prstGeom>
         </p:spPr>
       </p:pic>
+      <p:pic>
+        <p:nvPicPr>
+          <p:cNvPr id="11" name="图片 10">
+            <a:extLst>
+              <a:ext uri="{FF2B5EF4-FFF2-40B4-BE49-F238E27FC236}">
+                <a16:creationId xmlns:a16="http://schemas.microsoft.com/office/drawing/2014/main" id="{B6DE7B69-1B2D-65EE-4842-C041A2060456}"/>
+              </a:ext>
+            </a:extLst>
+          </p:cNvPr>
+          <p:cNvPicPr>
+            <a:picLocks noChangeAspect="1"/>
+          </p:cNvPicPr>
+          <p:nvPr/>
+        </p:nvPicPr>
+        <p:blipFill>
+          <a:blip r:embed="rId6" cstate="print">
+            <a:extLst>
+              <a:ext uri="{28A0092B-C50C-407E-A947-70E740481C1C}">
+                <a14:useLocalDpi xmlns:a14="http://schemas.microsoft.com/office/drawing/2010/main" val="0"/>
+              </a:ext>
+            </a:extLst>
+          </a:blip>
+          <a:stretch>
+            <a:fillRect/>
+          </a:stretch>
+        </p:blipFill>
+        <p:spPr>
+          <a:xfrm>
+            <a:off x="7743977" y="1248799"/>
+            <a:ext cx="1693704" cy="2258272"/>
+          </a:xfrm>
+          <a:prstGeom prst="rect">
+            <a:avLst/>
+          </a:prstGeom>
+        </p:spPr>
+      </p:pic>
+      <p:pic>
+        <p:nvPicPr>
+          <p:cNvPr id="27" name="图片 26">
+            <a:extLst>
+              <a:ext uri="{FF2B5EF4-FFF2-40B4-BE49-F238E27FC236}">
+                <a16:creationId xmlns:a16="http://schemas.microsoft.com/office/drawing/2014/main" id="{777837E1-82E7-66D5-866F-6FEAA4F28829}"/>
+              </a:ext>
+            </a:extLst>
+          </p:cNvPr>
+          <p:cNvPicPr>
+            <a:picLocks noChangeAspect="1"/>
+          </p:cNvPicPr>
+          <p:nvPr/>
+        </p:nvPicPr>
+        <p:blipFill>
+          <a:blip r:embed="rId7">
+            <a:extLst>
+              <a:ext uri="{28A0092B-C50C-407E-A947-70E740481C1C}">
+                <a14:useLocalDpi xmlns:a14="http://schemas.microsoft.com/office/drawing/2010/main" val="0"/>
+              </a:ext>
+            </a:extLst>
+          </a:blip>
+          <a:stretch>
+            <a:fillRect/>
+          </a:stretch>
+        </p:blipFill>
+        <p:spPr>
+          <a:xfrm>
+            <a:off x="6096000" y="4027206"/>
+            <a:ext cx="5517358" cy="2270957"/>
+          </a:xfrm>
+          <a:prstGeom prst="rect">
+            <a:avLst/>
+          </a:prstGeom>
+        </p:spPr>
+      </p:pic>
+      <p:sp>
+        <p:nvSpPr>
+          <p:cNvPr id="21" name="文本框 20">
+            <a:extLst>
+              <a:ext uri="{FF2B5EF4-FFF2-40B4-BE49-F238E27FC236}">
+                <a16:creationId xmlns:a16="http://schemas.microsoft.com/office/drawing/2014/main" id="{A6AB728D-84D2-4469-AF28-191BBA7291C6}"/>
+              </a:ext>
+            </a:extLst>
+          </p:cNvPr>
+          <p:cNvSpPr txBox="1"/>
+          <p:nvPr/>
+        </p:nvSpPr>
+        <p:spPr>
+          <a:xfrm>
+            <a:off x="281680" y="299000"/>
+            <a:ext cx="6798981" cy="535531"/>
+          </a:xfrm>
+          <a:prstGeom prst="rect">
+            <a:avLst/>
+          </a:prstGeom>
+          <a:noFill/>
+        </p:spPr>
+        <p:txBody>
+          <a:bodyPr wrap="square" rtlCol="0">
+            <a:spAutoFit/>
+          </a:bodyPr>
+          <a:lstStyle/>
+          <a:p>
+            <a:pPr>
+              <a:lnSpc>
+                <a:spcPct val="90000"/>
+              </a:lnSpc>
+              <a:spcBef>
+                <a:spcPts val="1000"/>
+              </a:spcBef>
+              <a:defRPr/>
+            </a:pPr>
+            <a:r>
+              <a:rPr lang="en-US" altLang="zh-CN" sz="3200" b="1" dirty="0">
+                <a:solidFill>
+                  <a:srgbClr val="4747BA"/>
+                </a:solidFill>
+                <a:latin typeface="Constantia" panose="02030602050306030303" pitchFamily="18" charset="0"/>
+                <a:ea typeface="腾讯体 W3" panose="020C04030202040F0204" pitchFamily="34" charset="-122"/>
+                <a:cs typeface="Times" panose="02020603050405020304" pitchFamily="18" charset="0"/>
+              </a:rPr>
+              <a:t> </a:t>
+            </a:r>
+            <a:r>
+              <a:rPr lang="zh-CN" altLang="en-US" sz="3200" b="1" dirty="0">
+                <a:solidFill>
+                  <a:srgbClr val="4747BA"/>
+                </a:solidFill>
+                <a:latin typeface="Constantia" panose="02030602050306030303" pitchFamily="18" charset="0"/>
+                <a:ea typeface="腾讯体 W3" panose="020C04030202040F0204" pitchFamily="34" charset="-122"/>
+                <a:cs typeface="Times" panose="02020603050405020304" pitchFamily="18" charset="0"/>
+              </a:rPr>
+              <a:t>实验平台</a:t>
+            </a:r>
+            <a:endParaRPr lang="zh-CN" altLang="en-US" sz="3600" b="1" dirty="0">
+              <a:solidFill>
+                <a:srgbClr val="4747BA"/>
+              </a:solidFill>
+              <a:latin typeface="Constantia" panose="02030602050306030303" pitchFamily="18" charset="0"/>
+              <a:ea typeface="腾讯体 W3" panose="020C04030202040F0204" pitchFamily="34" charset="-122"/>
+              <a:cs typeface="Times" panose="02020603050405020304" pitchFamily="18" charset="0"/>
+            </a:endParaRPr>
+          </a:p>
+        </p:txBody>
+      </p:sp>
     </p:spTree>
+    <p:extLst>
+      <p:ext uri="{BB962C8B-B14F-4D97-AF65-F5344CB8AC3E}">
+        <p14:creationId xmlns:p14="http://schemas.microsoft.com/office/powerpoint/2010/main" val="3562333484"/>
+      </p:ext>
+    </p:extLst>
   </p:cSld>
   <p:clrMapOvr>
     <a:masterClrMapping/>
   </p:clrMapOvr>
   <mc:AlternateContent xmlns:mc="http://schemas.openxmlformats.org/markup-compatibility/2006" xmlns:p14="http://schemas.microsoft.com/office/powerpoint/2010/main">
     <mc:Choice Requires="p14">
-      <p:transition p14:dur="0" advClick="0"/>
+      <p:transition p14:dur="10" advClick="0"/>
     </mc:Choice>
     <mc:Fallback xmlns="">
       <p:transition advClick="0"/>
@@ -11793,8 +11945,8 @@
         </p:nvSpPr>
         <p:spPr>
           <a:xfrm>
-            <a:off x="385590" y="1500227"/>
-            <a:ext cx="11266832" cy="4061753"/>
+            <a:off x="385590" y="1485168"/>
+            <a:ext cx="11266832" cy="3650295"/>
           </a:xfrm>
           <a:prstGeom prst="rect">
             <a:avLst/>
@@ -11807,7 +11959,7 @@
           </a:bodyPr>
           <a:lstStyle/>
           <a:p>
-            <a:pPr marL="285750" indent="-285750">
+            <a:pPr indent="-285750">
               <a:lnSpc>
                 <a:spcPct val="130000"/>
               </a:lnSpc>
@@ -11815,41 +11967,45 @@
               <a:buChar char="q"/>
             </a:pPr>
             <a:r>
-              <a:rPr lang="zh-CN" altLang="en-US" sz="2000" b="0" i="0" dirty="0">
-                <a:solidFill>
-                  <a:srgbClr val="374151"/>
-                </a:solidFill>
-                <a:effectLst/>
-                <a:latin typeface="_5b8b_4f53"/>
-              </a:rPr>
-              <a:t>随着数据中心对存储性能与效率的需求日益增长，传统的固态硬盘在性能，单盘容量，寿命等方面已经无法满足其存储需求。</a:t>
-            </a:r>
-            <a:endParaRPr lang="en-US" altLang="zh-CN" sz="2000" b="0" i="0" dirty="0">
-              <a:solidFill>
-                <a:srgbClr val="374151"/>
-              </a:solidFill>
-              <a:effectLst/>
-              <a:latin typeface="_5b8b_4f53"/>
+              <a:rPr lang="zh-CN" altLang="en-US" sz="2000" dirty="0">
+                <a:latin typeface="宋体" panose="02010600030101010101" pitchFamily="2" charset="-122"/>
+                <a:ea typeface="宋体" panose="02010600030101010101" pitchFamily="2" charset="-122"/>
+              </a:rPr>
+              <a:t>数据中心对</a:t>
+            </a:r>
+            <a:r>
+              <a:rPr lang="zh-CN" altLang="en-US" sz="2000" dirty="0">
+                <a:ea typeface="宋体" panose="02010600030101010101" pitchFamily="2" charset="-122"/>
+              </a:rPr>
+              <a:t>存储性能与效率的需求日益增长，但传统的固态硬盘在性能，单盘容量，寿命等方面无法满足其需求</a:t>
+            </a:r>
+            <a:r>
+              <a:rPr lang="zh-CN" altLang="en-US" sz="2000" dirty="0">
+                <a:latin typeface="宋体" panose="02010600030101010101" pitchFamily="2" charset="-122"/>
+                <a:ea typeface="宋体" panose="02010600030101010101" pitchFamily="2" charset="-122"/>
+              </a:rPr>
+              <a:t>。</a:t>
+            </a:r>
+            <a:endParaRPr lang="en-US" altLang="zh-CN" sz="2000" dirty="0">
+              <a:latin typeface="宋体" panose="02010600030101010101" pitchFamily="2" charset="-122"/>
+              <a:ea typeface="宋体" panose="02010600030101010101" pitchFamily="2" charset="-122"/>
             </a:endParaRPr>
           </a:p>
           <a:p>
-            <a:pPr marL="285750" indent="-285750">
+            <a:pPr indent="-285750">
               <a:lnSpc>
                 <a:spcPct val="130000"/>
               </a:lnSpc>
               <a:buFont typeface="Wingdings" panose="05000000000000000000" charset="0"/>
               <a:buChar char="q"/>
             </a:pPr>
-            <a:endParaRPr lang="en-US" altLang="zh-CN" sz="2000" b="0" i="0" dirty="0">
-              <a:solidFill>
-                <a:srgbClr val="374151"/>
-              </a:solidFill>
-              <a:effectLst/>
-              <a:latin typeface="_5b8b_4f53"/>
+            <a:endParaRPr lang="en-US" altLang="zh-CN" sz="2000" dirty="0">
+              <a:latin typeface="宋体" panose="02010600030101010101" pitchFamily="2" charset="-122"/>
+              <a:ea typeface="宋体" panose="02010600030101010101" pitchFamily="2" charset="-122"/>
             </a:endParaRPr>
           </a:p>
           <a:p>
-            <a:pPr marL="285750" indent="-285750">
+            <a:pPr indent="-285750">
               <a:lnSpc>
                 <a:spcPct val="130000"/>
               </a:lnSpc>
@@ -11858,45 +12014,53 @@
             </a:pPr>
             <a:r>
               <a:rPr lang="en-US" altLang="zh-CN" sz="2000" dirty="0">
-                <a:solidFill>
-                  <a:srgbClr val="374151"/>
-                </a:solidFill>
-                <a:latin typeface="_5b8b_4f53"/>
+                <a:latin typeface="Times New Roman" panose="02020603050405020304" pitchFamily="18" charset="0"/>
+                <a:ea typeface="宋体" panose="02010600030101010101" pitchFamily="2" charset="-122"/>
+                <a:cs typeface="Times New Roman" panose="02020603050405020304" pitchFamily="18" charset="0"/>
               </a:rPr>
               <a:t>Zoned Namespace (ZNS) SSD</a:t>
             </a:r>
             <a:r>
               <a:rPr lang="zh-CN" altLang="en-US" sz="2000" dirty="0">
-                <a:solidFill>
-                  <a:srgbClr val="374151"/>
-                </a:solidFill>
-                <a:latin typeface="_5b8b_4f53"/>
-              </a:rPr>
-              <a:t>作为一种新兴的固态盘存储技术，通过区域化管理并强制要求区域（</a:t>
+                <a:latin typeface="宋体" panose="02010600030101010101" pitchFamily="2" charset="-122"/>
+                <a:ea typeface="宋体" panose="02010600030101010101" pitchFamily="2" charset="-122"/>
+              </a:rPr>
+              <a:t>作为一种新兴的固态盘存储技术，以区域</a:t>
+            </a:r>
+            <a:r>
+              <a:rPr lang="zh-CN" altLang="en-US" sz="2000" dirty="0">
+                <a:latin typeface="Times New Roman" panose="02020603050405020304" pitchFamily="18" charset="0"/>
+                <a:ea typeface="宋体" panose="02010600030101010101" pitchFamily="2" charset="-122"/>
+                <a:cs typeface="Times New Roman" panose="02020603050405020304" pitchFamily="18" charset="0"/>
+              </a:rPr>
+              <a:t>（</a:t>
             </a:r>
             <a:r>
               <a:rPr lang="en-US" altLang="zh-CN" sz="2000" dirty="0">
-                <a:solidFill>
-                  <a:srgbClr val="374151"/>
-                </a:solidFill>
-                <a:latin typeface="_5b8b_4f53"/>
+                <a:latin typeface="Times New Roman" panose="02020603050405020304" pitchFamily="18" charset="0"/>
+                <a:ea typeface="宋体" panose="02010600030101010101" pitchFamily="2" charset="-122"/>
+                <a:cs typeface="Times New Roman" panose="02020603050405020304" pitchFamily="18" charset="0"/>
               </a:rPr>
               <a:t>Zone</a:t>
             </a:r>
             <a:r>
               <a:rPr lang="zh-CN" altLang="en-US" sz="2000" dirty="0">
-                <a:solidFill>
-                  <a:srgbClr val="374151"/>
-                </a:solidFill>
-                <a:latin typeface="_5b8b_4f53"/>
-              </a:rPr>
-              <a:t>）内顺序写入，消除了硬盘内部管理机制造成的写放大效应，显著提升了存储效率，延长了固态硬盘寿命。</a:t>
+                <a:latin typeface="Times New Roman" panose="02020603050405020304" pitchFamily="18" charset="0"/>
+                <a:ea typeface="宋体" panose="02010600030101010101" pitchFamily="2" charset="-122"/>
+                <a:cs typeface="Times New Roman" panose="02020603050405020304" pitchFamily="18" charset="0"/>
+              </a:rPr>
+              <a:t>）</a:t>
+            </a:r>
+            <a:r>
+              <a:rPr lang="zh-CN" altLang="en-US" sz="2000" dirty="0">
+                <a:latin typeface="宋体" panose="02010600030101010101" pitchFamily="2" charset="-122"/>
+                <a:ea typeface="宋体" panose="02010600030101010101" pitchFamily="2" charset="-122"/>
+              </a:rPr>
+              <a:t>为管理单元并强制要求每个区域内顺序写入，消除了硬盘内部管理机制造成的写放大效应，显著提升了存储效率，延长了固态硬盘寿命。</a:t>
             </a:r>
             <a:endParaRPr lang="en-US" altLang="zh-CN" sz="2000" dirty="0">
-              <a:solidFill>
-                <a:srgbClr val="374151"/>
-              </a:solidFill>
-              <a:latin typeface="_5b8b_4f53"/>
+              <a:latin typeface="宋体" panose="02010600030101010101" pitchFamily="2" charset="-122"/>
+              <a:ea typeface="宋体" panose="02010600030101010101" pitchFamily="2" charset="-122"/>
             </a:endParaRPr>
           </a:p>
           <a:p>
@@ -11906,14 +12070,12 @@
               </a:lnSpc>
             </a:pPr>
             <a:endParaRPr lang="en-US" altLang="zh-CN" sz="2000" dirty="0">
-              <a:solidFill>
-                <a:srgbClr val="374151"/>
-              </a:solidFill>
-              <a:latin typeface="_5b8b_4f53"/>
+              <a:latin typeface="宋体" panose="02010600030101010101" pitchFamily="2" charset="-122"/>
+              <a:ea typeface="宋体" panose="02010600030101010101" pitchFamily="2" charset="-122"/>
             </a:endParaRPr>
           </a:p>
           <a:p>
-            <a:pPr marL="285750" indent="-285750">
+            <a:pPr indent="-285750">
               <a:lnSpc>
                 <a:spcPct val="130000"/>
               </a:lnSpc>
@@ -11922,72 +12084,58 @@
             </a:pPr>
             <a:r>
               <a:rPr lang="zh-CN" altLang="en-US" sz="2000" dirty="0">
-                <a:solidFill>
-                  <a:srgbClr val="374151"/>
-                </a:solidFill>
-                <a:latin typeface="_5b8b_4f53"/>
+                <a:latin typeface="宋体" panose="02010600030101010101" pitchFamily="2" charset="-122"/>
+                <a:ea typeface="宋体" panose="02010600030101010101" pitchFamily="2" charset="-122"/>
               </a:rPr>
               <a:t>本课题来源于实验室与浪潮等企业的联合项目，旨在利用</a:t>
             </a:r>
             <a:r>
               <a:rPr lang="en-US" altLang="zh-CN" sz="2000" dirty="0">
-                <a:solidFill>
-                  <a:srgbClr val="374151"/>
-                </a:solidFill>
-                <a:latin typeface="_5b8b_4f53"/>
+                <a:latin typeface="Times New Roman" panose="02020603050405020304" pitchFamily="18" charset="0"/>
+                <a:ea typeface="宋体" panose="02010600030101010101" pitchFamily="2" charset="-122"/>
+                <a:cs typeface="Times New Roman" panose="02020603050405020304" pitchFamily="18" charset="0"/>
               </a:rPr>
               <a:t>ZNS SSD</a:t>
             </a:r>
             <a:r>
               <a:rPr lang="zh-CN" altLang="en-US" sz="2000" dirty="0">
-                <a:solidFill>
-                  <a:srgbClr val="374151"/>
-                </a:solidFill>
-                <a:latin typeface="_5b8b_4f53"/>
-              </a:rPr>
-              <a:t>等新型硬件重新设计存储系统。本工作作为此项目的先行性研究，基于实际的</a:t>
+                <a:latin typeface="宋体" panose="02010600030101010101" pitchFamily="2" charset="-122"/>
+                <a:ea typeface="宋体" panose="02010600030101010101" pitchFamily="2" charset="-122"/>
+              </a:rPr>
+              <a:t>重新设计存储系统。本工作作为此项目的先行性研究，基于实际的</a:t>
             </a:r>
             <a:r>
               <a:rPr lang="en-US" altLang="zh-CN" sz="2000" dirty="0">
-                <a:solidFill>
-                  <a:srgbClr val="374151"/>
-                </a:solidFill>
-                <a:latin typeface="_5b8b_4f53"/>
+                <a:latin typeface="宋体" panose="02010600030101010101" pitchFamily="2" charset="-122"/>
+                <a:ea typeface="宋体" panose="02010600030101010101" pitchFamily="2" charset="-122"/>
               </a:rPr>
               <a:t>ZNS </a:t>
             </a:r>
             <a:r>
               <a:rPr lang="zh-CN" altLang="en-US" sz="2000" dirty="0">
-                <a:solidFill>
-                  <a:srgbClr val="374151"/>
-                </a:solidFill>
-                <a:latin typeface="_5b8b_4f53"/>
+                <a:latin typeface="宋体" panose="02010600030101010101" pitchFamily="2" charset="-122"/>
+                <a:ea typeface="宋体" panose="02010600030101010101" pitchFamily="2" charset="-122"/>
               </a:rPr>
               <a:t>盘做</a:t>
             </a:r>
             <a:r>
               <a:rPr lang="en-US" altLang="zh-CN" sz="2000" dirty="0">
-                <a:solidFill>
-                  <a:srgbClr val="374151"/>
-                </a:solidFill>
-                <a:latin typeface="_5b8b_4f53"/>
+                <a:latin typeface="Times New Roman" panose="02020603050405020304" pitchFamily="18" charset="0"/>
+                <a:ea typeface="宋体" panose="02010600030101010101" pitchFamily="2" charset="-122"/>
+                <a:cs typeface="Times New Roman" panose="02020603050405020304" pitchFamily="18" charset="0"/>
               </a:rPr>
               <a:t>ZNS SSD</a:t>
             </a:r>
             <a:r>
               <a:rPr lang="zh-CN" altLang="en-US" sz="2000" dirty="0">
-                <a:solidFill>
-                  <a:srgbClr val="374151"/>
-                </a:solidFill>
-                <a:latin typeface="_5b8b_4f53"/>
+                <a:latin typeface="宋体" panose="02010600030101010101" pitchFamily="2" charset="-122"/>
+                <a:ea typeface="宋体" panose="02010600030101010101" pitchFamily="2" charset="-122"/>
               </a:rPr>
               <a:t>的数据访问特征以及性能优化方面的研究。</a:t>
             </a:r>
             <a:endParaRPr lang="en-US" altLang="zh-CN" sz="2000" dirty="0">
-              <a:solidFill>
-                <a:srgbClr val="374151"/>
-              </a:solidFill>
-              <a:latin typeface="_5b8b_4f53"/>
+              <a:latin typeface="宋体" panose="02010600030101010101" pitchFamily="2" charset="-122"/>
+              <a:ea typeface="宋体" panose="02010600030101010101" pitchFamily="2" charset="-122"/>
             </a:endParaRPr>
           </a:p>
         </p:txBody>
@@ -12563,8 +12711,8 @@
         </p:nvSpPr>
         <p:spPr>
           <a:xfrm>
-            <a:off x="440055" y="1478194"/>
-            <a:ext cx="11425112" cy="2222916"/>
+            <a:off x="430529" y="1382337"/>
+            <a:ext cx="11425112" cy="1701748"/>
           </a:xfrm>
           <a:prstGeom prst="rect">
             <a:avLst/>
@@ -12579,447 +12727,287 @@
           <a:p>
             <a:pPr>
               <a:lnSpc>
-                <a:spcPct val="130000"/>
+                <a:spcPct val="150000"/>
               </a:lnSpc>
             </a:pPr>
             <a:r>
               <a:rPr lang="zh-CN" altLang="en-US" dirty="0">
-                <a:solidFill>
-                  <a:srgbClr val="374151"/>
-                </a:solidFill>
-                <a:latin typeface="_5b8b_4f53"/>
-              </a:rPr>
-              <a:t>写放大倍数（</a:t>
+                <a:latin typeface="Times New Roman" panose="02020603050405020304" pitchFamily="18" charset="0"/>
+                <a:ea typeface="宋体" panose="02010600030101010101" pitchFamily="2" charset="-122"/>
+                <a:cs typeface="Times New Roman" panose="02020603050405020304" pitchFamily="18" charset="0"/>
+              </a:rPr>
+              <a:t>写放大倍数</a:t>
             </a:r>
             <a:r>
               <a:rPr lang="en-US" altLang="zh-CN" dirty="0">
-                <a:solidFill>
-                  <a:srgbClr val="374151"/>
-                </a:solidFill>
-                <a:latin typeface="_5b8b_4f53"/>
-              </a:rPr>
-              <a:t>Write Amplification Factor</a:t>
+                <a:latin typeface="Times New Roman" panose="02020603050405020304" pitchFamily="18" charset="0"/>
+                <a:ea typeface="宋体" panose="02010600030101010101" pitchFamily="2" charset="-122"/>
+                <a:cs typeface="Times New Roman" panose="02020603050405020304" pitchFamily="18" charset="0"/>
+              </a:rPr>
+              <a:t>(WAF)</a:t>
+            </a:r>
+            <a:r>
+              <a:rPr lang="zh-CN" altLang="zh-CN" dirty="0">
+                <a:latin typeface="Times New Roman" panose="02020603050405020304" pitchFamily="18" charset="0"/>
+                <a:ea typeface="宋体" panose="02010600030101010101" pitchFamily="2" charset="-122"/>
+                <a:cs typeface="Times New Roman" panose="02020603050405020304" pitchFamily="18" charset="0"/>
+              </a:rPr>
+              <a:t>直接影响</a:t>
+            </a:r>
+            <a:r>
+              <a:rPr lang="en-US" altLang="zh-CN" dirty="0">
+                <a:latin typeface="Times New Roman" panose="02020603050405020304" pitchFamily="18" charset="0"/>
+                <a:ea typeface="宋体" panose="02010600030101010101" pitchFamily="2" charset="-122"/>
+                <a:cs typeface="Times New Roman" panose="02020603050405020304" pitchFamily="18" charset="0"/>
+              </a:rPr>
+              <a:t>SSD</a:t>
+            </a:r>
+            <a:r>
+              <a:rPr lang="zh-CN" altLang="zh-CN" dirty="0">
+                <a:latin typeface="Times New Roman" panose="02020603050405020304" pitchFamily="18" charset="0"/>
+                <a:ea typeface="宋体" panose="02010600030101010101" pitchFamily="2" charset="-122"/>
+                <a:cs typeface="Times New Roman" panose="02020603050405020304" pitchFamily="18" charset="0"/>
+              </a:rPr>
+              <a:t>的寿命和性能</a:t>
             </a:r>
             <a:r>
               <a:rPr lang="zh-CN" altLang="en-US" dirty="0">
-                <a:solidFill>
-                  <a:srgbClr val="374151"/>
-                </a:solidFill>
-                <a:latin typeface="_5b8b_4f53"/>
+                <a:latin typeface="Times New Roman" panose="02020603050405020304" pitchFamily="18" charset="0"/>
+                <a:ea typeface="宋体" panose="02010600030101010101" pitchFamily="2" charset="-122"/>
+                <a:cs typeface="Times New Roman" panose="02020603050405020304" pitchFamily="18" charset="0"/>
+              </a:rPr>
+              <a:t>。</a:t>
+            </a:r>
+            <a:r>
+              <a:rPr lang="zh-CN" altLang="en-US" sz="1800" dirty="0">
+                <a:latin typeface="Times New Roman" panose="02020603050405020304" pitchFamily="18" charset="0"/>
+                <a:ea typeface="宋体" panose="02010600030101010101" pitchFamily="2" charset="-122"/>
+                <a:cs typeface="Times New Roman" panose="02020603050405020304" pitchFamily="18" charset="0"/>
+              </a:rPr>
+              <a:t>在传统</a:t>
+            </a:r>
+            <a:r>
+              <a:rPr lang="en-US" altLang="zh-CN" sz="1800" dirty="0">
+                <a:latin typeface="Times New Roman" panose="02020603050405020304" pitchFamily="18" charset="0"/>
+                <a:ea typeface="宋体" panose="02010600030101010101" pitchFamily="2" charset="-122"/>
+                <a:cs typeface="Times New Roman" panose="02020603050405020304" pitchFamily="18" charset="0"/>
+              </a:rPr>
+              <a:t>SSD</a:t>
+            </a:r>
+            <a:r>
+              <a:rPr lang="zh-CN" altLang="en-US" sz="1800" dirty="0">
+                <a:latin typeface="Times New Roman" panose="02020603050405020304" pitchFamily="18" charset="0"/>
+                <a:ea typeface="宋体" panose="02010600030101010101" pitchFamily="2" charset="-122"/>
+                <a:cs typeface="Times New Roman" panose="02020603050405020304" pitchFamily="18" charset="0"/>
+              </a:rPr>
+              <a:t>盘上降低写放大的工作主要关注数据放置</a:t>
+            </a:r>
+            <a:r>
+              <a:rPr lang="zh-CN" altLang="en-US" dirty="0">
+                <a:latin typeface="Times New Roman" panose="02020603050405020304" pitchFamily="18" charset="0"/>
+                <a:ea typeface="宋体" panose="02010600030101010101" pitchFamily="2" charset="-122"/>
+                <a:cs typeface="Times New Roman" panose="02020603050405020304" pitchFamily="18" charset="0"/>
               </a:rPr>
               <a:t>，</a:t>
             </a:r>
             <a:r>
-              <a:rPr lang="en-US" altLang="zh-CN" dirty="0">
-                <a:solidFill>
-                  <a:srgbClr val="374151"/>
-                </a:solidFill>
-                <a:latin typeface="_5b8b_4f53"/>
-              </a:rPr>
-              <a:t>WAF</a:t>
-            </a:r>
-            <a:r>
-              <a:rPr lang="zh-CN" altLang="en-US" dirty="0">
-                <a:solidFill>
-                  <a:srgbClr val="374151"/>
-                </a:solidFill>
-                <a:latin typeface="_5b8b_4f53"/>
-              </a:rPr>
-              <a:t>）</a:t>
-            </a:r>
-            <a:r>
-              <a:rPr lang="zh-CN" altLang="zh-CN" dirty="0">
-                <a:solidFill>
-                  <a:srgbClr val="374151"/>
-                </a:solidFill>
-                <a:latin typeface="_5b8b_4f53"/>
-              </a:rPr>
-              <a:t>直接影响了</a:t>
-            </a:r>
-            <a:r>
-              <a:rPr lang="en-US" altLang="zh-CN" dirty="0">
-                <a:solidFill>
-                  <a:srgbClr val="374151"/>
-                </a:solidFill>
-                <a:latin typeface="_5b8b_4f53"/>
-              </a:rPr>
-              <a:t>SSD</a:t>
-            </a:r>
-            <a:r>
-              <a:rPr lang="zh-CN" altLang="zh-CN" dirty="0">
-                <a:solidFill>
-                  <a:srgbClr val="374151"/>
-                </a:solidFill>
-                <a:latin typeface="_5b8b_4f53"/>
-              </a:rPr>
-              <a:t>的寿命和性能</a:t>
-            </a:r>
-            <a:r>
-              <a:rPr lang="zh-CN" altLang="en-US" dirty="0">
-                <a:solidFill>
-                  <a:srgbClr val="374151"/>
-                </a:solidFill>
-                <a:latin typeface="_5b8b_4f53"/>
-              </a:rPr>
-              <a:t>。</a:t>
+              <a:rPr lang="zh-CN" altLang="en-US" sz="1800" dirty="0">
+                <a:latin typeface="Times New Roman" panose="02020603050405020304" pitchFamily="18" charset="0"/>
+                <a:ea typeface="宋体" panose="02010600030101010101" pitchFamily="2" charset="-122"/>
+                <a:cs typeface="Times New Roman" panose="02020603050405020304" pitchFamily="18" charset="0"/>
+              </a:rPr>
+              <a:t>冷热</a:t>
+            </a:r>
+            <a:r>
+              <a:rPr lang="zh-CN" altLang="zh-CN" sz="1800" dirty="0">
+                <a:latin typeface="Times New Roman" panose="02020603050405020304" pitchFamily="18" charset="0"/>
+                <a:ea typeface="宋体" panose="02010600030101010101" pitchFamily="2" charset="-122"/>
+                <a:cs typeface="Times New Roman" panose="02020603050405020304" pitchFamily="18" charset="0"/>
+              </a:rPr>
+              <a:t>数据</a:t>
+            </a:r>
+            <a:r>
+              <a:rPr lang="zh-CN" altLang="en-US" sz="1800" dirty="0">
+                <a:latin typeface="Times New Roman" panose="02020603050405020304" pitchFamily="18" charset="0"/>
+                <a:ea typeface="宋体" panose="02010600030101010101" pitchFamily="2" charset="-122"/>
+                <a:cs typeface="Times New Roman" panose="02020603050405020304" pitchFamily="18" charset="0"/>
+              </a:rPr>
+              <a:t>分离，</a:t>
+            </a:r>
+            <a:r>
+              <a:rPr lang="zh-CN" altLang="zh-CN" sz="1800" dirty="0">
+                <a:latin typeface="Times New Roman" panose="02020603050405020304" pitchFamily="18" charset="0"/>
+                <a:ea typeface="宋体" panose="02010600030101010101" pitchFamily="2" charset="-122"/>
+                <a:cs typeface="Times New Roman" panose="02020603050405020304" pitchFamily="18" charset="0"/>
+              </a:rPr>
+              <a:t>垃圾回收算法</a:t>
+            </a:r>
+            <a:r>
+              <a:rPr lang="zh-CN" altLang="en-US" sz="1800" dirty="0">
+                <a:latin typeface="Times New Roman" panose="02020603050405020304" pitchFamily="18" charset="0"/>
+                <a:ea typeface="宋体" panose="02010600030101010101" pitchFamily="2" charset="-122"/>
+                <a:cs typeface="Times New Roman" panose="02020603050405020304" pitchFamily="18" charset="0"/>
+              </a:rPr>
+              <a:t>等等。</a:t>
             </a:r>
             <a:endParaRPr lang="en-US" altLang="zh-CN" dirty="0">
-              <a:solidFill>
-                <a:srgbClr val="374151"/>
-              </a:solidFill>
-              <a:latin typeface="_5b8b_4f53"/>
-            </a:endParaRPr>
-          </a:p>
-          <a:p>
-            <a:pPr>
-              <a:lnSpc>
-                <a:spcPct val="130000"/>
-              </a:lnSpc>
-            </a:pPr>
-            <a:r>
-              <a:rPr lang="zh-CN" altLang="en-US" dirty="0">
-                <a:solidFill>
-                  <a:srgbClr val="374151"/>
-                </a:solidFill>
-                <a:latin typeface="_5b8b_4f53"/>
-              </a:rPr>
-              <a:t>在传统</a:t>
-            </a:r>
-            <a:r>
-              <a:rPr lang="en-US" altLang="zh-CN" dirty="0">
-                <a:solidFill>
-                  <a:srgbClr val="374151"/>
-                </a:solidFill>
-                <a:latin typeface="_5b8b_4f53"/>
-              </a:rPr>
-              <a:t>SSD</a:t>
-            </a:r>
-            <a:r>
-              <a:rPr lang="zh-CN" altLang="en-US" dirty="0">
-                <a:solidFill>
-                  <a:srgbClr val="374151"/>
-                </a:solidFill>
-                <a:latin typeface="_5b8b_4f53"/>
-              </a:rPr>
-              <a:t>盘上降低写放大的工作主要有</a:t>
-            </a:r>
-            <a:r>
-              <a:rPr lang="zh-CN" altLang="zh-CN" dirty="0">
-                <a:solidFill>
-                  <a:srgbClr val="374151"/>
-                </a:solidFill>
-                <a:latin typeface="_5b8b_4f53"/>
-              </a:rPr>
-              <a:t>文件系统优化</a:t>
-            </a:r>
-            <a:r>
-              <a:rPr lang="zh-CN" altLang="en-US" dirty="0">
-                <a:solidFill>
-                  <a:srgbClr val="374151"/>
-                </a:solidFill>
-                <a:latin typeface="_5b8b_4f53"/>
-              </a:rPr>
-              <a:t>（如</a:t>
-            </a:r>
-            <a:r>
-              <a:rPr lang="en-US" altLang="zh-CN" dirty="0">
-                <a:solidFill>
-                  <a:srgbClr val="374151"/>
-                </a:solidFill>
-                <a:latin typeface="_5b8b_4f53"/>
-              </a:rPr>
-              <a:t>F2FS</a:t>
-            </a:r>
-            <a:r>
-              <a:rPr lang="zh-CN" altLang="en-US" dirty="0">
-                <a:solidFill>
-                  <a:srgbClr val="374151"/>
-                </a:solidFill>
-                <a:latin typeface="_5b8b_4f53"/>
-              </a:rPr>
-              <a:t>、</a:t>
-            </a:r>
-            <a:r>
-              <a:rPr lang="en-US" altLang="zh-CN" dirty="0">
-                <a:solidFill>
-                  <a:srgbClr val="374151"/>
-                </a:solidFill>
-                <a:latin typeface="_5b8b_4f53"/>
-              </a:rPr>
-              <a:t> </a:t>
-            </a:r>
-            <a:r>
-              <a:rPr lang="en-US" altLang="zh-CN" dirty="0" err="1">
-                <a:solidFill>
-                  <a:srgbClr val="374151"/>
-                </a:solidFill>
-                <a:latin typeface="_5b8b_4f53"/>
-              </a:rPr>
-              <a:t>BetrFS</a:t>
-            </a:r>
-            <a:r>
-              <a:rPr lang="en-US" altLang="zh-CN" dirty="0">
-                <a:solidFill>
-                  <a:srgbClr val="374151"/>
-                </a:solidFill>
-                <a:latin typeface="_5b8b_4f53"/>
-              </a:rPr>
-              <a:t> </a:t>
-            </a:r>
-            <a:r>
-              <a:rPr lang="zh-CN" altLang="en-US" dirty="0">
-                <a:solidFill>
-                  <a:srgbClr val="374151"/>
-                </a:solidFill>
-                <a:latin typeface="_5b8b_4f53"/>
-              </a:rPr>
-              <a:t>），</a:t>
-            </a:r>
-            <a:r>
-              <a:rPr lang="en-US" altLang="zh-CN" dirty="0">
-                <a:solidFill>
-                  <a:srgbClr val="374151"/>
-                </a:solidFill>
-                <a:latin typeface="_5b8b_4f53"/>
-              </a:rPr>
-              <a:t>SSD</a:t>
-            </a:r>
-            <a:r>
-              <a:rPr lang="zh-CN" altLang="zh-CN" dirty="0">
-                <a:solidFill>
-                  <a:srgbClr val="374151"/>
-                </a:solidFill>
-                <a:latin typeface="_5b8b_4f53"/>
-              </a:rPr>
-              <a:t>的数据放置策略优化</a:t>
-            </a:r>
-            <a:r>
-              <a:rPr lang="zh-CN" altLang="en-US" dirty="0">
-                <a:solidFill>
-                  <a:srgbClr val="374151"/>
-                </a:solidFill>
-                <a:latin typeface="_5b8b_4f53"/>
-              </a:rPr>
-              <a:t>，以及</a:t>
-            </a:r>
-            <a:r>
-              <a:rPr lang="zh-CN" altLang="zh-CN" dirty="0">
-                <a:solidFill>
-                  <a:srgbClr val="374151"/>
-                </a:solidFill>
-                <a:latin typeface="_5b8b_4f53"/>
-              </a:rPr>
-              <a:t>垃圾回收算法优化</a:t>
-            </a:r>
-            <a:r>
-              <a:rPr lang="zh-CN" altLang="en-US" dirty="0">
-                <a:solidFill>
-                  <a:srgbClr val="374151"/>
-                </a:solidFill>
-                <a:latin typeface="_5b8b_4f53"/>
-              </a:rPr>
-              <a:t>等等。</a:t>
-            </a:r>
-            <a:endParaRPr lang="en-US" altLang="zh-CN" dirty="0">
-              <a:solidFill>
-                <a:srgbClr val="374151"/>
-              </a:solidFill>
-              <a:latin typeface="_5b8b_4f53"/>
-            </a:endParaRPr>
-          </a:p>
-          <a:p>
-            <a:pPr>
-              <a:lnSpc>
-                <a:spcPct val="130000"/>
-              </a:lnSpc>
-            </a:pPr>
-            <a:r>
-              <a:rPr lang="zh-CN" altLang="zh-CN" dirty="0">
-                <a:solidFill>
-                  <a:srgbClr val="374151"/>
-                </a:solidFill>
-                <a:latin typeface="_5b8b_4f53"/>
-              </a:rPr>
-              <a:t>然而，上述工作只能在应用级</a:t>
-            </a:r>
-            <a:r>
-              <a:rPr lang="zh-CN" altLang="en-US" dirty="0">
-                <a:solidFill>
-                  <a:srgbClr val="374151"/>
-                </a:solidFill>
-                <a:latin typeface="_5b8b_4f53"/>
-              </a:rPr>
-              <a:t>或文件系统级</a:t>
-            </a:r>
-            <a:r>
-              <a:rPr lang="zh-CN" altLang="zh-CN" dirty="0">
-                <a:solidFill>
-                  <a:srgbClr val="374151"/>
-                </a:solidFill>
-                <a:latin typeface="_5b8b_4f53"/>
-              </a:rPr>
-              <a:t>别一定程度地缓解</a:t>
-            </a:r>
-            <a:r>
-              <a:rPr lang="zh-CN" altLang="zh-CN" dirty="0">
-                <a:solidFill>
-                  <a:srgbClr val="4747BA"/>
-                </a:solidFill>
-                <a:ea typeface="+mn-lt"/>
-                <a:cs typeface="Times New Roman" panose="02020603050405020304" charset="0"/>
-              </a:rPr>
-              <a:t>主机侧</a:t>
-            </a:r>
-            <a:r>
-              <a:rPr lang="zh-CN" altLang="zh-CN" dirty="0">
-                <a:solidFill>
-                  <a:srgbClr val="374151"/>
-                </a:solidFill>
-                <a:latin typeface="_5b8b_4f53"/>
-              </a:rPr>
-              <a:t>的工作负载导致的写放大。但在</a:t>
-            </a:r>
-            <a:r>
-              <a:rPr lang="zh-CN" altLang="en-US" dirty="0">
-                <a:solidFill>
-                  <a:srgbClr val="4747BA"/>
-                </a:solidFill>
-                <a:latin typeface="_5b8b_4f53"/>
-                <a:ea typeface="+mn-lt"/>
-                <a:cs typeface="Times New Roman" panose="02020603050405020304" charset="0"/>
-              </a:rPr>
-              <a:t>设备</a:t>
-            </a:r>
-            <a:r>
-              <a:rPr lang="zh-CN" altLang="en-US" dirty="0">
-                <a:solidFill>
-                  <a:srgbClr val="4747BA"/>
-                </a:solidFill>
-                <a:ea typeface="+mn-lt"/>
-                <a:cs typeface="Times New Roman" panose="02020603050405020304" charset="0"/>
-              </a:rPr>
-              <a:t>侧</a:t>
-            </a:r>
-            <a:r>
-              <a:rPr lang="zh-CN" altLang="zh-CN" dirty="0">
-                <a:solidFill>
-                  <a:srgbClr val="374151"/>
-                </a:solidFill>
-                <a:latin typeface="_5b8b_4f53"/>
-              </a:rPr>
-              <a:t>仍存在写放大现象，这一方面是由于闪存转换层（</a:t>
-            </a:r>
-            <a:r>
-              <a:rPr lang="en-US" altLang="zh-CN" dirty="0">
-                <a:solidFill>
-                  <a:srgbClr val="374151"/>
-                </a:solidFill>
-                <a:latin typeface="_5b8b_4f53"/>
-              </a:rPr>
-              <a:t>Flash Translation Layer, FTL</a:t>
-            </a:r>
-            <a:r>
-              <a:rPr lang="zh-CN" altLang="zh-CN" dirty="0">
-                <a:solidFill>
-                  <a:srgbClr val="374151"/>
-                </a:solidFill>
-                <a:latin typeface="_5b8b_4f53"/>
-              </a:rPr>
-              <a:t>）的管理策略，另一方面是固态硬盘中</a:t>
-            </a:r>
-            <a:r>
-              <a:rPr lang="en-US" altLang="zh-CN" dirty="0">
-                <a:solidFill>
-                  <a:srgbClr val="374151"/>
-                </a:solidFill>
-                <a:latin typeface="_5b8b_4f53"/>
-              </a:rPr>
-              <a:t>NAND</a:t>
-            </a:r>
-            <a:r>
-              <a:rPr lang="zh-CN" altLang="zh-CN" dirty="0">
-                <a:solidFill>
-                  <a:srgbClr val="374151"/>
-                </a:solidFill>
-                <a:latin typeface="_5b8b_4f53"/>
-              </a:rPr>
-              <a:t>闪存颗粒的擦写粒度不一致的特性导致的。</a:t>
-            </a:r>
-            <a:endParaRPr lang="en-US" altLang="zh-CN" sz="1600" kern="100" dirty="0">
-              <a:solidFill>
-                <a:srgbClr val="4747BA"/>
-              </a:solidFill>
               <a:latin typeface="Times New Roman" panose="02020603050405020304" pitchFamily="18" charset="0"/>
               <a:ea typeface="宋体" panose="02010600030101010101" pitchFamily="2" charset="-122"/>
               <a:cs typeface="Times New Roman" panose="02020603050405020304" pitchFamily="18" charset="0"/>
             </a:endParaRPr>
           </a:p>
-        </p:txBody>
-      </p:sp>
-      <p:sp>
-        <p:nvSpPr>
-          <p:cNvPr id="9" name="文本框 8">
-            <a:extLst>
-              <a:ext uri="{FF2B5EF4-FFF2-40B4-BE49-F238E27FC236}">
-                <a16:creationId xmlns:a16="http://schemas.microsoft.com/office/drawing/2014/main" id="{5A364727-F676-A371-B1D9-DE6CFE5451C8}"/>
-              </a:ext>
-            </a:extLst>
-          </p:cNvPr>
-          <p:cNvSpPr txBox="1"/>
-          <p:nvPr/>
-        </p:nvSpPr>
-        <p:spPr>
-          <a:xfrm>
-            <a:off x="440054" y="3964615"/>
-            <a:ext cx="2931797" cy="369332"/>
-          </a:xfrm>
-          <a:prstGeom prst="rect">
-            <a:avLst/>
-          </a:prstGeom>
-          <a:noFill/>
-        </p:spPr>
-        <p:txBody>
-          <a:bodyPr wrap="square">
-            <a:spAutoFit/>
-          </a:bodyPr>
-          <a:lstStyle/>
-          <a:p>
-            <a:r>
-              <a:rPr lang="en-US" altLang="zh-CN" sz="1800" b="1" dirty="0">
+          <a:p>
+            <a:pPr>
+              <a:lnSpc>
+                <a:spcPct val="150000"/>
+              </a:lnSpc>
+            </a:pPr>
+            <a:r>
+              <a:rPr lang="zh-CN" altLang="zh-CN" dirty="0">
+                <a:latin typeface="Times New Roman" panose="02020603050405020304" pitchFamily="18" charset="0"/>
+                <a:ea typeface="宋体" panose="02010600030101010101" pitchFamily="2" charset="-122"/>
+                <a:cs typeface="Times New Roman" panose="02020603050405020304" pitchFamily="18" charset="0"/>
+              </a:rPr>
+              <a:t>然而，</a:t>
+            </a:r>
+            <a:r>
+              <a:rPr lang="zh-CN" altLang="en-US" dirty="0">
+                <a:latin typeface="Times New Roman" panose="02020603050405020304" pitchFamily="18" charset="0"/>
+                <a:ea typeface="宋体" panose="02010600030101010101" pitchFamily="2" charset="-122"/>
+                <a:cs typeface="Times New Roman" panose="02020603050405020304" pitchFamily="18" charset="0"/>
+              </a:rPr>
+              <a:t>这些</a:t>
+            </a:r>
+            <a:r>
+              <a:rPr lang="zh-CN" altLang="zh-CN" dirty="0">
+                <a:latin typeface="Times New Roman" panose="02020603050405020304" pitchFamily="18" charset="0"/>
+                <a:ea typeface="宋体" panose="02010600030101010101" pitchFamily="2" charset="-122"/>
+                <a:cs typeface="Times New Roman" panose="02020603050405020304" pitchFamily="18" charset="0"/>
+              </a:rPr>
+              <a:t>工作只能在应用级</a:t>
+            </a:r>
+            <a:r>
+              <a:rPr lang="zh-CN" altLang="en-US" dirty="0">
+                <a:latin typeface="Times New Roman" panose="02020603050405020304" pitchFamily="18" charset="0"/>
+                <a:ea typeface="宋体" panose="02010600030101010101" pitchFamily="2" charset="-122"/>
+                <a:cs typeface="Times New Roman" panose="02020603050405020304" pitchFamily="18" charset="0"/>
+              </a:rPr>
+              <a:t>或文件系统级</a:t>
+            </a:r>
+            <a:r>
+              <a:rPr lang="zh-CN" altLang="zh-CN" dirty="0">
+                <a:latin typeface="Times New Roman" panose="02020603050405020304" pitchFamily="18" charset="0"/>
+                <a:ea typeface="宋体" panose="02010600030101010101" pitchFamily="2" charset="-122"/>
+                <a:cs typeface="Times New Roman" panose="02020603050405020304" pitchFamily="18" charset="0"/>
+              </a:rPr>
+              <a:t>别一定程度地缓解</a:t>
+            </a:r>
+            <a:r>
+              <a:rPr lang="zh-CN" altLang="zh-CN" dirty="0">
                 <a:solidFill>
                   <a:srgbClr val="4747BA"/>
                 </a:solidFill>
-                <a:ea typeface="+mn-lt"/>
-                <a:cs typeface="Times New Roman" panose="02020603050405020304" charset="0"/>
-              </a:rPr>
-              <a:t>ZNS</a:t>
-            </a:r>
-            <a:r>
-              <a:rPr lang="en-US" altLang="zh-CN" b="1" dirty="0">
+                <a:latin typeface="Times New Roman" panose="02020603050405020304" pitchFamily="18" charset="0"/>
+                <a:ea typeface="宋体" panose="02010600030101010101" pitchFamily="2" charset="-122"/>
+                <a:cs typeface="Times New Roman" panose="02020603050405020304" pitchFamily="18" charset="0"/>
+              </a:rPr>
+              <a:t>主机侧</a:t>
+            </a:r>
+            <a:r>
+              <a:rPr lang="zh-CN" altLang="zh-CN" dirty="0">
+                <a:latin typeface="Times New Roman" panose="02020603050405020304" pitchFamily="18" charset="0"/>
+                <a:ea typeface="宋体" panose="02010600030101010101" pitchFamily="2" charset="-122"/>
+                <a:cs typeface="Times New Roman" panose="02020603050405020304" pitchFamily="18" charset="0"/>
+              </a:rPr>
+              <a:t>的工作负载导致的写放大。但在</a:t>
+            </a:r>
+            <a:r>
+              <a:rPr lang="zh-CN" altLang="en-US" dirty="0">
                 <a:solidFill>
                   <a:srgbClr val="4747BA"/>
                 </a:solidFill>
-                <a:ea typeface="+mn-lt"/>
-                <a:cs typeface="Times New Roman" panose="02020603050405020304" charset="0"/>
-              </a:rPr>
-              <a:t> SSD</a:t>
-            </a:r>
-            <a:r>
-              <a:rPr lang="zh-CN" altLang="en-US" sz="1800" b="1" dirty="0">
-                <a:solidFill>
-                  <a:srgbClr val="4747BA"/>
-                </a:solidFill>
-                <a:ea typeface="+mn-lt"/>
-                <a:cs typeface="Times New Roman" panose="02020603050405020304" charset="0"/>
-              </a:rPr>
-              <a:t>技术：</a:t>
-            </a:r>
-            <a:endParaRPr lang="en-US" altLang="zh-CN" sz="1800" b="1" dirty="0">
-              <a:solidFill>
-                <a:srgbClr val="4747BA"/>
-              </a:solidFill>
-              <a:ea typeface="+mn-lt"/>
-              <a:cs typeface="Times New Roman" panose="02020603050405020304" charset="0"/>
+                <a:latin typeface="Times New Roman" panose="02020603050405020304" pitchFamily="18" charset="0"/>
+                <a:ea typeface="宋体" panose="02010600030101010101" pitchFamily="2" charset="-122"/>
+                <a:cs typeface="Times New Roman" panose="02020603050405020304" pitchFamily="18" charset="0"/>
+              </a:rPr>
+              <a:t>设备侧</a:t>
+            </a:r>
+            <a:r>
+              <a:rPr lang="zh-CN" altLang="zh-CN" dirty="0">
+                <a:latin typeface="Times New Roman" panose="02020603050405020304" pitchFamily="18" charset="0"/>
+                <a:ea typeface="宋体" panose="02010600030101010101" pitchFamily="2" charset="-122"/>
+                <a:cs typeface="Times New Roman" panose="02020603050405020304" pitchFamily="18" charset="0"/>
+              </a:rPr>
+              <a:t>仍存在写放大现象，这</a:t>
+            </a:r>
+            <a:r>
+              <a:rPr lang="zh-CN" altLang="en-US" dirty="0">
+                <a:latin typeface="Times New Roman" panose="02020603050405020304" pitchFamily="18" charset="0"/>
+                <a:ea typeface="宋体" panose="02010600030101010101" pitchFamily="2" charset="-122"/>
+                <a:cs typeface="Times New Roman" panose="02020603050405020304" pitchFamily="18" charset="0"/>
+              </a:rPr>
+              <a:t>主要</a:t>
+            </a:r>
+            <a:r>
+              <a:rPr lang="zh-CN" altLang="zh-CN" dirty="0">
+                <a:latin typeface="Times New Roman" panose="02020603050405020304" pitchFamily="18" charset="0"/>
+                <a:ea typeface="宋体" panose="02010600030101010101" pitchFamily="2" charset="-122"/>
+                <a:cs typeface="Times New Roman" panose="02020603050405020304" pitchFamily="18" charset="0"/>
+              </a:rPr>
+              <a:t>是由于</a:t>
+            </a:r>
+            <a:r>
+              <a:rPr lang="zh-CN" altLang="en-US" dirty="0">
+                <a:latin typeface="Times New Roman" panose="02020603050405020304" pitchFamily="18" charset="0"/>
+                <a:ea typeface="宋体" panose="02010600030101010101" pitchFamily="2" charset="-122"/>
+                <a:cs typeface="Times New Roman" panose="02020603050405020304" pitchFamily="18" charset="0"/>
+              </a:rPr>
+              <a:t>块接口</a:t>
+            </a:r>
+            <a:r>
+              <a:rPr lang="zh-CN" altLang="zh-CN" dirty="0">
+                <a:latin typeface="Times New Roman" panose="02020603050405020304" pitchFamily="18" charset="0"/>
+                <a:ea typeface="宋体" panose="02010600030101010101" pitchFamily="2" charset="-122"/>
+                <a:cs typeface="Times New Roman" panose="02020603050405020304" pitchFamily="18" charset="0"/>
+              </a:rPr>
+              <a:t>闪存转换层</a:t>
+            </a:r>
+            <a:r>
+              <a:rPr lang="en-US" altLang="zh-CN" dirty="0">
+                <a:latin typeface="Times New Roman" panose="02020603050405020304" pitchFamily="18" charset="0"/>
+                <a:ea typeface="宋体" panose="02010600030101010101" pitchFamily="2" charset="-122"/>
+                <a:cs typeface="Times New Roman" panose="02020603050405020304" pitchFamily="18" charset="0"/>
+              </a:rPr>
+              <a:t>(FTL)</a:t>
+            </a:r>
+            <a:r>
+              <a:rPr lang="zh-CN" altLang="en-US" dirty="0">
+                <a:latin typeface="Times New Roman" panose="02020603050405020304" pitchFamily="18" charset="0"/>
+                <a:ea typeface="宋体" panose="02010600030101010101" pitchFamily="2" charset="-122"/>
+                <a:cs typeface="Times New Roman" panose="02020603050405020304" pitchFamily="18" charset="0"/>
+              </a:rPr>
+              <a:t>的存在和</a:t>
+            </a:r>
+            <a:r>
+              <a:rPr lang="en-US" altLang="zh-CN" dirty="0">
+                <a:latin typeface="Times New Roman" panose="02020603050405020304" pitchFamily="18" charset="0"/>
+                <a:ea typeface="宋体" panose="02010600030101010101" pitchFamily="2" charset="-122"/>
+                <a:cs typeface="Times New Roman" panose="02020603050405020304" pitchFamily="18" charset="0"/>
+              </a:rPr>
+              <a:t>NAND</a:t>
+            </a:r>
+            <a:r>
+              <a:rPr lang="zh-CN" altLang="zh-CN" dirty="0">
+                <a:latin typeface="Times New Roman" panose="02020603050405020304" pitchFamily="18" charset="0"/>
+                <a:ea typeface="宋体" panose="02010600030101010101" pitchFamily="2" charset="-122"/>
+                <a:cs typeface="Times New Roman" panose="02020603050405020304" pitchFamily="18" charset="0"/>
+              </a:rPr>
+              <a:t>闪存颗粒的擦写粒度不一致的特性导致的。</a:t>
+            </a:r>
+            <a:endParaRPr lang="en-US" altLang="zh-CN" sz="1600" kern="100" dirty="0">
+              <a:latin typeface="Times New Roman" panose="02020603050405020304" pitchFamily="18" charset="0"/>
+              <a:ea typeface="宋体" panose="02010600030101010101" pitchFamily="2" charset="-122"/>
+              <a:cs typeface="Times New Roman" panose="02020603050405020304" pitchFamily="18" charset="0"/>
             </a:endParaRPr>
           </a:p>
         </p:txBody>
@@ -13080,7 +13068,7 @@
                 <a:ea typeface="+mn-lt"/>
                 <a:cs typeface="Times New Roman" panose="02020603050405020304" charset="0"/>
               </a:rPr>
-              <a:t>的写放大问题：</a:t>
+              <a:t>的写放大问题</a:t>
             </a:r>
             <a:endParaRPr lang="en-US" altLang="zh-CN" sz="2000" b="1" dirty="0">
               <a:solidFill>
@@ -13088,138 +13076,6 @@
               </a:solidFill>
               <a:ea typeface="+mn-lt"/>
               <a:cs typeface="Times New Roman" panose="02020603050405020304" charset="0"/>
-            </a:endParaRPr>
-          </a:p>
-        </p:txBody>
-      </p:sp>
-      <p:sp>
-        <p:nvSpPr>
-          <p:cNvPr id="11" name="文本框 10">
-            <a:extLst>
-              <a:ext uri="{FF2B5EF4-FFF2-40B4-BE49-F238E27FC236}">
-                <a16:creationId xmlns:a16="http://schemas.microsoft.com/office/drawing/2014/main" id="{EE77C4F7-936E-CBC4-D6AC-980A1C5A66F9}"/>
-              </a:ext>
-            </a:extLst>
-          </p:cNvPr>
-          <p:cNvSpPr txBox="1"/>
-          <p:nvPr/>
-        </p:nvSpPr>
-        <p:spPr>
-          <a:xfrm>
-            <a:off x="440054" y="4367392"/>
-            <a:ext cx="11425112" cy="1144096"/>
-          </a:xfrm>
-          <a:prstGeom prst="rect">
-            <a:avLst/>
-          </a:prstGeom>
-          <a:noFill/>
-        </p:spPr>
-        <p:txBody>
-          <a:bodyPr wrap="square">
-            <a:spAutoFit/>
-          </a:bodyPr>
-          <a:lstStyle/>
-          <a:p>
-            <a:pPr>
-              <a:lnSpc>
-                <a:spcPct val="130000"/>
-              </a:lnSpc>
-            </a:pPr>
-            <a:r>
-              <a:rPr lang="en-US" altLang="zh-CN" dirty="0">
-                <a:solidFill>
-                  <a:srgbClr val="374151"/>
-                </a:solidFill>
-                <a:latin typeface="_5b8b_4f53"/>
-              </a:rPr>
-              <a:t>ZNS SSD</a:t>
-            </a:r>
-            <a:r>
-              <a:rPr lang="zh-CN" altLang="en-US" dirty="0">
-                <a:solidFill>
-                  <a:srgbClr val="374151"/>
-                </a:solidFill>
-                <a:latin typeface="_5b8b_4f53"/>
-              </a:rPr>
-              <a:t>是一种新型</a:t>
-            </a:r>
-            <a:r>
-              <a:rPr lang="zh-CN" altLang="zh-CN" dirty="0">
-                <a:solidFill>
-                  <a:srgbClr val="374151"/>
-                </a:solidFill>
-                <a:latin typeface="_5b8b_4f53"/>
-              </a:rPr>
-              <a:t>存储技术，</a:t>
-            </a:r>
-            <a:r>
-              <a:rPr lang="zh-CN" altLang="en-US" dirty="0">
-                <a:solidFill>
-                  <a:srgbClr val="374151"/>
-                </a:solidFill>
-                <a:latin typeface="_5b8b_4f53"/>
-              </a:rPr>
-              <a:t>引入了基于区域的存储模型，并且直接取消了</a:t>
-            </a:r>
-            <a:r>
-              <a:rPr lang="en-US" altLang="zh-CN" dirty="0">
-                <a:solidFill>
-                  <a:srgbClr val="374151"/>
-                </a:solidFill>
-                <a:latin typeface="_5b8b_4f53"/>
-              </a:rPr>
-              <a:t>FTL</a:t>
-            </a:r>
-            <a:r>
-              <a:rPr lang="zh-CN" altLang="en-US" dirty="0">
-                <a:solidFill>
-                  <a:srgbClr val="374151"/>
-                </a:solidFill>
-                <a:latin typeface="_5b8b_4f53"/>
-              </a:rPr>
-              <a:t>层的设计，放弃了随机写的支持，进而消除了盘内写放大效应，提高了写入操作的可预测性和效率。此外，</a:t>
-            </a:r>
-            <a:r>
-              <a:rPr lang="en-US" altLang="zh-CN" dirty="0">
-                <a:solidFill>
-                  <a:srgbClr val="374151"/>
-                </a:solidFill>
-                <a:latin typeface="_5b8b_4f53"/>
-              </a:rPr>
-              <a:t>ZNS SSD</a:t>
-            </a:r>
-            <a:r>
-              <a:rPr lang="zh-CN" altLang="en-US" dirty="0">
-                <a:solidFill>
-                  <a:srgbClr val="374151"/>
-                </a:solidFill>
-                <a:latin typeface="_5b8b_4f53"/>
-              </a:rPr>
-              <a:t>的区域化管理降低了垃圾回收的复杂性和频率，显著提升了</a:t>
-            </a:r>
-            <a:r>
-              <a:rPr lang="en-US" altLang="zh-CN" dirty="0">
-                <a:solidFill>
-                  <a:srgbClr val="374151"/>
-                </a:solidFill>
-                <a:latin typeface="_5b8b_4f53"/>
-              </a:rPr>
-              <a:t>SSD</a:t>
-            </a:r>
-            <a:r>
-              <a:rPr lang="zh-CN" altLang="en-US" dirty="0">
-                <a:solidFill>
-                  <a:srgbClr val="374151"/>
-                </a:solidFill>
-                <a:latin typeface="_5b8b_4f53"/>
-              </a:rPr>
-              <a:t>的整体性能和耐用性。</a:t>
-            </a:r>
-            <a:endParaRPr lang="en-US" altLang="zh-CN" dirty="0">
-              <a:solidFill>
-                <a:srgbClr val="374151"/>
-              </a:solidFill>
-              <a:latin typeface="_5b8b_4f53"/>
             </a:endParaRPr>
           </a:p>
         </p:txBody>
@@ -13272,6 +13128,326 @@
               </a:rPr>
               <a:t>研究现状</a:t>
             </a:r>
+          </a:p>
+        </p:txBody>
+      </p:sp>
+      <p:sp>
+        <p:nvSpPr>
+          <p:cNvPr id="30" name="文本框 29">
+            <a:extLst>
+              <a:ext uri="{FF2B5EF4-FFF2-40B4-BE49-F238E27FC236}">
+                <a16:creationId xmlns:a16="http://schemas.microsoft.com/office/drawing/2014/main" id="{5B2BD9DB-4FE6-489C-AF75-75A2A2B1DF2E}"/>
+              </a:ext>
+            </a:extLst>
+          </p:cNvPr>
+          <p:cNvSpPr txBox="1"/>
+          <p:nvPr/>
+        </p:nvSpPr>
+        <p:spPr>
+          <a:xfrm>
+            <a:off x="430529" y="3244334"/>
+            <a:ext cx="2931797" cy="369332"/>
+          </a:xfrm>
+          <a:prstGeom prst="rect">
+            <a:avLst/>
+          </a:prstGeom>
+          <a:noFill/>
+        </p:spPr>
+        <p:txBody>
+          <a:bodyPr wrap="square">
+            <a:spAutoFit/>
+          </a:bodyPr>
+          <a:lstStyle/>
+          <a:p>
+            <a:r>
+              <a:rPr lang="en-US" altLang="zh-CN" sz="1800" b="1" dirty="0">
+                <a:solidFill>
+                  <a:srgbClr val="4747BA"/>
+                </a:solidFill>
+                <a:ea typeface="+mn-lt"/>
+                <a:cs typeface="Times New Roman" panose="02020603050405020304" charset="0"/>
+              </a:rPr>
+              <a:t>ZNS</a:t>
+            </a:r>
+            <a:r>
+              <a:rPr lang="en-US" altLang="zh-CN" b="1" dirty="0">
+                <a:solidFill>
+                  <a:srgbClr val="4747BA"/>
+                </a:solidFill>
+                <a:ea typeface="+mn-lt"/>
+                <a:cs typeface="Times New Roman" panose="02020603050405020304" charset="0"/>
+              </a:rPr>
+              <a:t> SSD</a:t>
+            </a:r>
+            <a:r>
+              <a:rPr lang="zh-CN" altLang="en-US" sz="1800" b="1" dirty="0">
+                <a:solidFill>
+                  <a:srgbClr val="4747BA"/>
+                </a:solidFill>
+                <a:ea typeface="+mn-lt"/>
+                <a:cs typeface="Times New Roman" panose="02020603050405020304" charset="0"/>
+              </a:rPr>
+              <a:t>技术</a:t>
+            </a:r>
+            <a:endParaRPr lang="en-US" altLang="zh-CN" sz="1800" b="1" dirty="0">
+              <a:solidFill>
+                <a:srgbClr val="4747BA"/>
+              </a:solidFill>
+              <a:ea typeface="+mn-lt"/>
+              <a:cs typeface="Times New Roman" panose="02020603050405020304" charset="0"/>
+            </a:endParaRPr>
+          </a:p>
+        </p:txBody>
+      </p:sp>
+      <p:sp>
+        <p:nvSpPr>
+          <p:cNvPr id="31" name="文本框 30">
+            <a:extLst>
+              <a:ext uri="{FF2B5EF4-FFF2-40B4-BE49-F238E27FC236}">
+                <a16:creationId xmlns:a16="http://schemas.microsoft.com/office/drawing/2014/main" id="{0D465B86-F20C-4EFF-8393-1230A60967EF}"/>
+              </a:ext>
+            </a:extLst>
+          </p:cNvPr>
+          <p:cNvSpPr txBox="1"/>
+          <p:nvPr/>
+        </p:nvSpPr>
+        <p:spPr>
+          <a:xfrm>
+            <a:off x="430529" y="3537030"/>
+            <a:ext cx="11280655" cy="2532745"/>
+          </a:xfrm>
+          <a:prstGeom prst="rect">
+            <a:avLst/>
+          </a:prstGeom>
+          <a:noFill/>
+        </p:spPr>
+        <p:txBody>
+          <a:bodyPr wrap="square">
+            <a:spAutoFit/>
+          </a:bodyPr>
+          <a:lstStyle/>
+          <a:p>
+            <a:pPr>
+              <a:lnSpc>
+                <a:spcPct val="150000"/>
+              </a:lnSpc>
+            </a:pPr>
+            <a:r>
+              <a:rPr lang="en-US" altLang="zh-CN" dirty="0">
+                <a:latin typeface="宋体" panose="02010600030101010101" pitchFamily="2" charset="-122"/>
+                <a:ea typeface="宋体" panose="02010600030101010101" pitchFamily="2" charset="-122"/>
+              </a:rPr>
+              <a:t>ZNS SSD</a:t>
+            </a:r>
+            <a:r>
+              <a:rPr lang="zh-CN" altLang="en-US" dirty="0">
+                <a:latin typeface="宋体" panose="02010600030101010101" pitchFamily="2" charset="-122"/>
+                <a:ea typeface="宋体" panose="02010600030101010101" pitchFamily="2" charset="-122"/>
+              </a:rPr>
+              <a:t>引入了基于区域的存储模型，取消了</a:t>
+            </a:r>
+            <a:r>
+              <a:rPr lang="en-US" altLang="zh-CN" dirty="0">
+                <a:latin typeface="宋体" panose="02010600030101010101" pitchFamily="2" charset="-122"/>
+                <a:ea typeface="宋体" panose="02010600030101010101" pitchFamily="2" charset="-122"/>
+              </a:rPr>
+              <a:t>FTL</a:t>
+            </a:r>
+            <a:r>
+              <a:rPr lang="zh-CN" altLang="en-US" dirty="0">
+                <a:latin typeface="宋体" panose="02010600030101010101" pitchFamily="2" charset="-122"/>
+                <a:ea typeface="宋体" panose="02010600030101010101" pitchFamily="2" charset="-122"/>
+              </a:rPr>
+              <a:t>层的设计，放弃了随机写的支持，进而消除了盘内写放大效应，提高了写入操作的可预测性和效率。此外，</a:t>
+            </a:r>
+            <a:r>
+              <a:rPr lang="en-US" altLang="zh-CN" dirty="0">
+                <a:latin typeface="宋体" panose="02010600030101010101" pitchFamily="2" charset="-122"/>
+                <a:ea typeface="宋体" panose="02010600030101010101" pitchFamily="2" charset="-122"/>
+              </a:rPr>
+              <a:t>ZNS SSD</a:t>
+            </a:r>
+            <a:r>
+              <a:rPr lang="zh-CN" altLang="en-US" dirty="0">
+                <a:latin typeface="宋体" panose="02010600030101010101" pitchFamily="2" charset="-122"/>
+                <a:ea typeface="宋体" panose="02010600030101010101" pitchFamily="2" charset="-122"/>
+              </a:rPr>
+              <a:t>的粗粒度管理降低了垃圾回收的复杂性和频率，显著提升了</a:t>
+            </a:r>
+            <a:r>
+              <a:rPr lang="en-US" altLang="zh-CN" dirty="0">
+                <a:latin typeface="宋体" panose="02010600030101010101" pitchFamily="2" charset="-122"/>
+                <a:ea typeface="宋体" panose="02010600030101010101" pitchFamily="2" charset="-122"/>
+              </a:rPr>
+              <a:t>SSD</a:t>
+            </a:r>
+            <a:r>
+              <a:rPr lang="zh-CN" altLang="en-US" dirty="0">
+                <a:latin typeface="宋体" panose="02010600030101010101" pitchFamily="2" charset="-122"/>
+                <a:ea typeface="宋体" panose="02010600030101010101" pitchFamily="2" charset="-122"/>
+              </a:rPr>
+              <a:t>的整体性能和耐用性。</a:t>
+            </a:r>
+            <a:endParaRPr lang="en-US" altLang="zh-CN" dirty="0">
+              <a:latin typeface="宋体" panose="02010600030101010101" pitchFamily="2" charset="-122"/>
+              <a:ea typeface="宋体" panose="02010600030101010101" pitchFamily="2" charset="-122"/>
+            </a:endParaRPr>
+          </a:p>
+          <a:p>
+            <a:pPr>
+              <a:lnSpc>
+                <a:spcPct val="150000"/>
+              </a:lnSpc>
+            </a:pPr>
+            <a:r>
+              <a:rPr lang="zh-CN" altLang="en-US" dirty="0">
+                <a:latin typeface="宋体" panose="02010600030101010101" pitchFamily="2" charset="-122"/>
+                <a:ea typeface="宋体" panose="02010600030101010101" pitchFamily="2" charset="-122"/>
+              </a:rPr>
+              <a:t>目前，</a:t>
+            </a:r>
+            <a:r>
+              <a:rPr lang="en-US" altLang="zh-CN" dirty="0">
+                <a:latin typeface="宋体" panose="02010600030101010101" pitchFamily="2" charset="-122"/>
+                <a:ea typeface="宋体" panose="02010600030101010101" pitchFamily="2" charset="-122"/>
+              </a:rPr>
+              <a:t>ZNS</a:t>
+            </a:r>
+            <a:r>
+              <a:rPr lang="zh-CN" altLang="en-US" dirty="0">
+                <a:latin typeface="宋体" panose="02010600030101010101" pitchFamily="2" charset="-122"/>
+                <a:ea typeface="宋体" panose="02010600030101010101" pitchFamily="2" charset="-122"/>
+              </a:rPr>
+              <a:t>的研究主要有硬件优化；文件系统适配；端到端应用几个方面。</a:t>
+            </a:r>
+            <a:endParaRPr lang="en-US" altLang="zh-CN" dirty="0">
+              <a:latin typeface="宋体" panose="02010600030101010101" pitchFamily="2" charset="-122"/>
+              <a:ea typeface="宋体" panose="02010600030101010101" pitchFamily="2" charset="-122"/>
+            </a:endParaRPr>
+          </a:p>
+          <a:p>
+            <a:pPr>
+              <a:lnSpc>
+                <a:spcPct val="150000"/>
+              </a:lnSpc>
+            </a:pPr>
+            <a:r>
+              <a:rPr lang="zh-CN" altLang="en-US" dirty="0">
+                <a:latin typeface="宋体" panose="02010600030101010101" pitchFamily="2" charset="-122"/>
+                <a:ea typeface="宋体" panose="02010600030101010101" pitchFamily="2" charset="-122"/>
+              </a:rPr>
+              <a:t>通用文件系统：已适配</a:t>
+            </a:r>
+            <a:r>
+              <a:rPr lang="en-US" altLang="zh-CN" dirty="0">
+                <a:latin typeface="宋体" panose="02010600030101010101" pitchFamily="2" charset="-122"/>
+                <a:ea typeface="宋体" panose="02010600030101010101" pitchFamily="2" charset="-122"/>
+              </a:rPr>
+              <a:t>ZNS</a:t>
+            </a:r>
+            <a:r>
+              <a:rPr lang="zh-CN" altLang="en-US" dirty="0">
+                <a:latin typeface="宋体" panose="02010600030101010101" pitchFamily="2" charset="-122"/>
+                <a:ea typeface="宋体" panose="02010600030101010101" pitchFamily="2" charset="-122"/>
+              </a:rPr>
+              <a:t>的文件系统如</a:t>
+            </a:r>
+            <a:r>
+              <a:rPr lang="en-US" altLang="zh-CN" dirty="0">
+                <a:latin typeface="宋体" panose="02010600030101010101" pitchFamily="2" charset="-122"/>
+                <a:ea typeface="宋体" panose="02010600030101010101" pitchFamily="2" charset="-122"/>
+              </a:rPr>
+              <a:t>F2FS</a:t>
+            </a:r>
+            <a:r>
+              <a:rPr lang="zh-CN" altLang="en-US" dirty="0">
+                <a:latin typeface="宋体" panose="02010600030101010101" pitchFamily="2" charset="-122"/>
+                <a:ea typeface="宋体" panose="02010600030101010101" pitchFamily="2" charset="-122"/>
+              </a:rPr>
+              <a:t>，</a:t>
+            </a:r>
+            <a:r>
+              <a:rPr lang="en-US" altLang="zh-CN" dirty="0" err="1">
+                <a:latin typeface="宋体" panose="02010600030101010101" pitchFamily="2" charset="-122"/>
+                <a:ea typeface="宋体" panose="02010600030101010101" pitchFamily="2" charset="-122"/>
+              </a:rPr>
+              <a:t>ZoneFS</a:t>
+            </a:r>
+            <a:r>
+              <a:rPr lang="zh-CN" altLang="en-US" dirty="0">
+                <a:latin typeface="宋体" panose="02010600030101010101" pitchFamily="2" charset="-122"/>
+                <a:ea typeface="宋体" panose="02010600030101010101" pitchFamily="2" charset="-122"/>
+              </a:rPr>
+              <a:t>等。</a:t>
+            </a:r>
+            <a:endParaRPr lang="en-US" altLang="zh-CN" dirty="0">
+              <a:latin typeface="宋体" panose="02010600030101010101" pitchFamily="2" charset="-122"/>
+              <a:ea typeface="宋体" panose="02010600030101010101" pitchFamily="2" charset="-122"/>
+            </a:endParaRPr>
+          </a:p>
+          <a:p>
+            <a:pPr>
+              <a:lnSpc>
+                <a:spcPct val="150000"/>
+              </a:lnSpc>
+            </a:pPr>
+            <a:r>
+              <a:rPr lang="zh-CN" altLang="en-US" sz="1800" kern="100" dirty="0">
+                <a:effectLst/>
+                <a:latin typeface="Times New Roman" panose="02020603050405020304" pitchFamily="18" charset="0"/>
+                <a:ea typeface="宋体" panose="02010600030101010101" pitchFamily="2" charset="-122"/>
+                <a:cs typeface="Times New Roman" panose="02020603050405020304" pitchFamily="18" charset="0"/>
+              </a:rPr>
+              <a:t>端到端应用：</a:t>
+            </a:r>
+            <a:r>
+              <a:rPr lang="zh-CN" altLang="zh-CN" sz="1800" kern="100" dirty="0">
+                <a:effectLst/>
+                <a:latin typeface="Times New Roman" panose="02020603050405020304" pitchFamily="18" charset="0"/>
+                <a:ea typeface="宋体" panose="02010600030101010101" pitchFamily="2" charset="-122"/>
+                <a:cs typeface="Times New Roman" panose="02020603050405020304" pitchFamily="18" charset="0"/>
+              </a:rPr>
+              <a:t>键值存储领域，尤其是基于</a:t>
+            </a:r>
+            <a:r>
+              <a:rPr lang="en-US" altLang="zh-CN" sz="1800" kern="100" dirty="0">
+                <a:effectLst/>
+                <a:latin typeface="Times New Roman" panose="02020603050405020304" pitchFamily="18" charset="0"/>
+                <a:ea typeface="宋体" panose="02010600030101010101" pitchFamily="2" charset="-122"/>
+              </a:rPr>
+              <a:t>LSM-tree</a:t>
+            </a:r>
+            <a:r>
+              <a:rPr lang="zh-CN" altLang="zh-CN" sz="1800" kern="100" dirty="0">
+                <a:effectLst/>
+                <a:latin typeface="Times New Roman" panose="02020603050405020304" pitchFamily="18" charset="0"/>
+                <a:ea typeface="宋体" panose="02010600030101010101" pitchFamily="2" charset="-122"/>
+                <a:cs typeface="Times New Roman" panose="02020603050405020304" pitchFamily="18" charset="0"/>
+              </a:rPr>
+              <a:t>的</a:t>
+            </a:r>
+            <a:r>
+              <a:rPr lang="zh-CN" altLang="en-US" sz="1800" kern="100" dirty="0">
+                <a:effectLst/>
+                <a:latin typeface="Times New Roman" panose="02020603050405020304" pitchFamily="18" charset="0"/>
+                <a:ea typeface="宋体" panose="02010600030101010101" pitchFamily="2" charset="-122"/>
+                <a:cs typeface="Times New Roman" panose="02020603050405020304" pitchFamily="18" charset="0"/>
+              </a:rPr>
+              <a:t>存储引擎，如</a:t>
+            </a:r>
+            <a:r>
+              <a:rPr lang="en-US" altLang="zh-CN" sz="1800" kern="100" dirty="0" err="1">
+                <a:effectLst/>
+                <a:latin typeface="Times New Roman" panose="02020603050405020304" pitchFamily="18" charset="0"/>
+                <a:ea typeface="宋体" panose="02010600030101010101" pitchFamily="2" charset="-122"/>
+                <a:cs typeface="Times New Roman" panose="02020603050405020304" pitchFamily="18" charset="0"/>
+              </a:rPr>
+              <a:t>RocksDB</a:t>
+            </a:r>
+            <a:endParaRPr lang="en-US" altLang="zh-CN" dirty="0">
+              <a:latin typeface="宋体" panose="02010600030101010101" pitchFamily="2" charset="-122"/>
+              <a:ea typeface="宋体" panose="02010600030101010101" pitchFamily="2" charset="-122"/>
+            </a:endParaRPr>
           </a:p>
         </p:txBody>
       </p:sp>
@@ -13974,8 +14150,8 @@
         </p:blipFill>
         <p:spPr>
           <a:xfrm>
-            <a:off x="385590" y="1035208"/>
-            <a:ext cx="4472160" cy="5214007"/>
+            <a:off x="706085" y="1209676"/>
+            <a:ext cx="3946705" cy="4601389"/>
           </a:xfrm>
           <a:prstGeom prst="rect">
             <a:avLst/>
@@ -13996,8 +14172,8 @@
         </p:nvSpPr>
         <p:spPr>
           <a:xfrm>
-            <a:off x="5486400" y="1537072"/>
-            <a:ext cx="6096000" cy="2353593"/>
+            <a:off x="5486400" y="1845918"/>
+            <a:ext cx="6096000" cy="3363741"/>
           </a:xfrm>
           <a:prstGeom prst="rect">
             <a:avLst/>
@@ -14010,248 +14186,336 @@
           </a:bodyPr>
           <a:lstStyle/>
           <a:p>
-            <a:pPr indent="266700" algn="just">
+            <a:pPr indent="266700">
               <a:lnSpc>
                 <a:spcPct val="150000"/>
               </a:lnSpc>
             </a:pPr>
             <a:r>
-              <a:rPr lang="en-US" altLang="zh-CN" sz="2000" dirty="0">
-                <a:solidFill>
-                  <a:srgbClr val="374151"/>
-                </a:solidFill>
-                <a:latin typeface="_5b8b_4f53"/>
-              </a:rPr>
-              <a:t>ZAFS</a:t>
-            </a:r>
-            <a:r>
-              <a:rPr lang="zh-CN" altLang="zh-CN" sz="2000" dirty="0">
-                <a:solidFill>
-                  <a:srgbClr val="374151"/>
-                </a:solidFill>
-                <a:latin typeface="_5b8b_4f53"/>
-              </a:rPr>
-              <a:t>引入</a:t>
-            </a:r>
-            <a:r>
-              <a:rPr lang="en-US" altLang="zh-CN" sz="2000" dirty="0">
-                <a:solidFill>
-                  <a:srgbClr val="374151"/>
-                </a:solidFill>
-                <a:latin typeface="_5b8b_4f53"/>
+              <a:rPr lang="zh-CN" altLang="en-US" sz="1800" kern="100" dirty="0">
+                <a:effectLst/>
+                <a:latin typeface="Times New Roman" panose="02020603050405020304" pitchFamily="18" charset="0"/>
+                <a:ea typeface="宋体" panose="02010600030101010101" pitchFamily="2" charset="-122"/>
+                <a:cs typeface="Times New Roman" panose="02020603050405020304" pitchFamily="18" charset="0"/>
+              </a:rPr>
+              <a:t>基于</a:t>
+            </a:r>
+            <a:r>
+              <a:rPr lang="en-US" altLang="zh-CN" sz="1800" kern="100" dirty="0">
+                <a:effectLst/>
+                <a:latin typeface="Times New Roman" panose="02020603050405020304" pitchFamily="18" charset="0"/>
+                <a:ea typeface="宋体" panose="02010600030101010101" pitchFamily="2" charset="-122"/>
               </a:rPr>
               <a:t>SPDK</a:t>
             </a:r>
             <a:r>
-              <a:rPr lang="zh-CN" altLang="zh-CN" sz="2000" dirty="0">
-                <a:solidFill>
-                  <a:srgbClr val="374151"/>
-                </a:solidFill>
-                <a:latin typeface="_5b8b_4f53"/>
-              </a:rPr>
-              <a:t>绕过</a:t>
-            </a:r>
-            <a:r>
-              <a:rPr lang="en-US" altLang="zh-CN" sz="2000" dirty="0">
-                <a:solidFill>
-                  <a:srgbClr val="374151"/>
-                </a:solidFill>
-                <a:latin typeface="_5b8b_4f53"/>
-              </a:rPr>
-              <a:t>Linux kernel</a:t>
-            </a:r>
-            <a:r>
-              <a:rPr lang="zh-CN" altLang="zh-CN" sz="2000" dirty="0">
-                <a:solidFill>
-                  <a:srgbClr val="374151"/>
-                </a:solidFill>
-                <a:latin typeface="_5b8b_4f53"/>
-              </a:rPr>
-              <a:t>以直接管理</a:t>
-            </a:r>
-            <a:r>
-              <a:rPr lang="en-US" altLang="zh-CN" sz="2000" dirty="0">
-                <a:solidFill>
-                  <a:srgbClr val="374151"/>
-                </a:solidFill>
-                <a:latin typeface="_5b8b_4f53"/>
-              </a:rPr>
-              <a:t>ZNS SSD</a:t>
-            </a:r>
-            <a:r>
-              <a:rPr lang="zh-CN" altLang="zh-CN" sz="2000" dirty="0">
-                <a:solidFill>
-                  <a:srgbClr val="374151"/>
-                </a:solidFill>
-                <a:latin typeface="_5b8b_4f53"/>
-              </a:rPr>
-              <a:t>，有效</a:t>
-            </a:r>
-            <a:r>
-              <a:rPr lang="zh-CN" altLang="en-US" sz="2000" dirty="0">
-                <a:solidFill>
-                  <a:srgbClr val="374151"/>
-                </a:solidFill>
-                <a:latin typeface="_5b8b_4f53"/>
-              </a:rPr>
-              <a:t>降低了</a:t>
-            </a:r>
-            <a:r>
-              <a:rPr lang="en-US" altLang="zh-CN" sz="2000" dirty="0">
-                <a:solidFill>
-                  <a:srgbClr val="374151"/>
-                </a:solidFill>
-                <a:latin typeface="_5b8b_4f53"/>
-              </a:rPr>
-              <a:t>Zone</a:t>
-            </a:r>
-            <a:r>
-              <a:rPr lang="zh-CN" altLang="en-US" sz="2000" dirty="0">
-                <a:solidFill>
-                  <a:srgbClr val="374151"/>
-                </a:solidFill>
-                <a:latin typeface="_5b8b_4f53"/>
-              </a:rPr>
-              <a:t>操作的</a:t>
-            </a:r>
-            <a:r>
-              <a:rPr lang="zh-CN" altLang="zh-CN" sz="2000" dirty="0">
-                <a:solidFill>
-                  <a:srgbClr val="374151"/>
-                </a:solidFill>
-                <a:latin typeface="_5b8b_4f53"/>
-              </a:rPr>
-              <a:t>延迟；</a:t>
-            </a:r>
-            <a:endParaRPr lang="en-US" altLang="zh-CN" sz="2000" dirty="0">
-              <a:solidFill>
-                <a:srgbClr val="374151"/>
-              </a:solidFill>
-              <a:latin typeface="_5b8b_4f53"/>
+              <a:rPr lang="zh-CN" altLang="zh-CN" sz="1800" kern="100" dirty="0">
+                <a:effectLst/>
+                <a:latin typeface="Times New Roman" panose="02020603050405020304" pitchFamily="18" charset="0"/>
+                <a:ea typeface="宋体" panose="02010600030101010101" pitchFamily="2" charset="-122"/>
+                <a:cs typeface="Times New Roman" panose="02020603050405020304" pitchFamily="18" charset="0"/>
+              </a:rPr>
+              <a:t>实现了</a:t>
+            </a:r>
+            <a:r>
+              <a:rPr lang="en-US" altLang="zh-CN" sz="1800" kern="100" dirty="0">
+                <a:effectLst/>
+                <a:latin typeface="Times New Roman" panose="02020603050405020304" pitchFamily="18" charset="0"/>
+                <a:ea typeface="宋体" panose="02010600030101010101" pitchFamily="2" charset="-122"/>
+              </a:rPr>
+              <a:t>ZNS</a:t>
+            </a:r>
+            <a:r>
+              <a:rPr lang="zh-CN" altLang="zh-CN" sz="1800" kern="100" dirty="0">
+                <a:effectLst/>
+                <a:latin typeface="Times New Roman" panose="02020603050405020304" pitchFamily="18" charset="0"/>
+                <a:ea typeface="宋体" panose="02010600030101010101" pitchFamily="2" charset="-122"/>
+                <a:cs typeface="Times New Roman" panose="02020603050405020304" pitchFamily="18" charset="0"/>
+              </a:rPr>
+              <a:t>专用文件系统</a:t>
+            </a:r>
+            <a:r>
+              <a:rPr lang="en-US" altLang="zh-CN" sz="1800" kern="100" dirty="0">
+                <a:effectLst/>
+                <a:latin typeface="Times New Roman" panose="02020603050405020304" pitchFamily="18" charset="0"/>
+                <a:ea typeface="宋体" panose="02010600030101010101" pitchFamily="2" charset="-122"/>
+              </a:rPr>
+              <a:t>——ZAFS</a:t>
+            </a:r>
+            <a:r>
+              <a:rPr lang="zh-CN" altLang="zh-CN" sz="1800" kern="100" dirty="0">
+                <a:effectLst/>
+                <a:latin typeface="Times New Roman" panose="02020603050405020304" pitchFamily="18" charset="0"/>
+                <a:ea typeface="宋体" panose="02010600030101010101" pitchFamily="2" charset="-122"/>
+                <a:cs typeface="Times New Roman" panose="02020603050405020304" pitchFamily="18" charset="0"/>
+              </a:rPr>
+              <a:t>（</a:t>
+            </a:r>
+            <a:r>
+              <a:rPr lang="en-US" altLang="zh-CN" sz="1800" kern="100" dirty="0">
+                <a:effectLst/>
+                <a:latin typeface="Times New Roman" panose="02020603050405020304" pitchFamily="18" charset="0"/>
+                <a:ea typeface="宋体" panose="02010600030101010101" pitchFamily="2" charset="-122"/>
+              </a:rPr>
+              <a:t>Zone Append File System</a:t>
+            </a:r>
+            <a:r>
+              <a:rPr lang="zh-CN" altLang="zh-CN" sz="1800" kern="100" dirty="0">
+                <a:effectLst/>
+                <a:latin typeface="Times New Roman" panose="02020603050405020304" pitchFamily="18" charset="0"/>
+                <a:ea typeface="宋体" panose="02010600030101010101" pitchFamily="2" charset="-122"/>
+                <a:cs typeface="Times New Roman" panose="02020603050405020304" pitchFamily="18" charset="0"/>
+              </a:rPr>
+              <a:t>）</a:t>
+            </a:r>
+            <a:endParaRPr lang="en-US" altLang="zh-CN" sz="1800" kern="100" dirty="0">
+              <a:effectLst/>
+              <a:latin typeface="Times New Roman" panose="02020603050405020304" pitchFamily="18" charset="0"/>
+              <a:ea typeface="宋体" panose="02010600030101010101" pitchFamily="2" charset="-122"/>
+              <a:cs typeface="Times New Roman" panose="02020603050405020304" pitchFamily="18" charset="0"/>
             </a:endParaRPr>
           </a:p>
           <a:p>
-            <a:pPr indent="266700" algn="just">
+            <a:pPr indent="266700">
               <a:lnSpc>
                 <a:spcPct val="150000"/>
               </a:lnSpc>
             </a:pPr>
-            <a:r>
-              <a:rPr lang="zh-CN" altLang="zh-CN" sz="2000" dirty="0">
-                <a:solidFill>
-                  <a:srgbClr val="374151"/>
-                </a:solidFill>
-                <a:latin typeface="_5b8b_4f53"/>
-              </a:rPr>
-              <a:t>并且实现了一种区域友好的追加感知</a:t>
-            </a:r>
-            <a:r>
-              <a:rPr lang="en-US" altLang="zh-CN" sz="2000" dirty="0">
-                <a:solidFill>
-                  <a:srgbClr val="374151"/>
-                </a:solidFill>
-                <a:latin typeface="_5b8b_4f53"/>
+            <a:endParaRPr lang="en-US" altLang="zh-CN" kern="100" dirty="0">
+              <a:latin typeface="Times New Roman" panose="02020603050405020304" pitchFamily="18" charset="0"/>
+              <a:ea typeface="宋体" panose="02010600030101010101" pitchFamily="2" charset="-122"/>
+              <a:cs typeface="Times New Roman" panose="02020603050405020304" pitchFamily="18" charset="0"/>
+            </a:endParaRPr>
+          </a:p>
+          <a:p>
+            <a:pPr indent="266700">
+              <a:lnSpc>
+                <a:spcPct val="150000"/>
+              </a:lnSpc>
+            </a:pPr>
+            <a:r>
+              <a:rPr lang="en-US" altLang="zh-CN" dirty="0">
+                <a:latin typeface="Times New Roman" panose="02020603050405020304" pitchFamily="18" charset="0"/>
+                <a:ea typeface="宋体" panose="02010600030101010101" pitchFamily="2" charset="-122"/>
+                <a:cs typeface="Times New Roman" panose="02020603050405020304" pitchFamily="18" charset="0"/>
+              </a:rPr>
+              <a:t>ZAFS</a:t>
+            </a:r>
+            <a:r>
+              <a:rPr lang="zh-CN" altLang="zh-CN" dirty="0">
+                <a:latin typeface="Times New Roman" panose="02020603050405020304" pitchFamily="18" charset="0"/>
+                <a:ea typeface="宋体" panose="02010600030101010101" pitchFamily="2" charset="-122"/>
+                <a:cs typeface="Times New Roman" panose="02020603050405020304" pitchFamily="18" charset="0"/>
+              </a:rPr>
+              <a:t>引入</a:t>
+            </a:r>
+            <a:r>
+              <a:rPr lang="en-US" altLang="zh-CN" dirty="0">
+                <a:latin typeface="Times New Roman" panose="02020603050405020304" pitchFamily="18" charset="0"/>
+                <a:ea typeface="宋体" panose="02010600030101010101" pitchFamily="2" charset="-122"/>
+                <a:cs typeface="Times New Roman" panose="02020603050405020304" pitchFamily="18" charset="0"/>
+              </a:rPr>
+              <a:t>SPDK</a:t>
+            </a:r>
+            <a:r>
+              <a:rPr lang="zh-CN" altLang="zh-CN" dirty="0">
+                <a:latin typeface="Times New Roman" panose="02020603050405020304" pitchFamily="18" charset="0"/>
+                <a:ea typeface="宋体" panose="02010600030101010101" pitchFamily="2" charset="-122"/>
+                <a:cs typeface="Times New Roman" panose="02020603050405020304" pitchFamily="18" charset="0"/>
+              </a:rPr>
+              <a:t>绕过</a:t>
+            </a:r>
+            <a:r>
+              <a:rPr lang="en-US" altLang="zh-CN" dirty="0">
+                <a:latin typeface="Times New Roman" panose="02020603050405020304" pitchFamily="18" charset="0"/>
+                <a:ea typeface="宋体" panose="02010600030101010101" pitchFamily="2" charset="-122"/>
+                <a:cs typeface="Times New Roman" panose="02020603050405020304" pitchFamily="18" charset="0"/>
+              </a:rPr>
+              <a:t>Linux kernel</a:t>
+            </a:r>
+            <a:r>
+              <a:rPr lang="zh-CN" altLang="zh-CN" dirty="0">
+                <a:latin typeface="Times New Roman" panose="02020603050405020304" pitchFamily="18" charset="0"/>
+                <a:ea typeface="宋体" panose="02010600030101010101" pitchFamily="2" charset="-122"/>
+                <a:cs typeface="Times New Roman" panose="02020603050405020304" pitchFamily="18" charset="0"/>
+              </a:rPr>
+              <a:t>以直接管理</a:t>
+            </a:r>
+            <a:r>
+              <a:rPr lang="en-US" altLang="zh-CN" dirty="0">
+                <a:latin typeface="Times New Roman" panose="02020603050405020304" pitchFamily="18" charset="0"/>
+                <a:ea typeface="宋体" panose="02010600030101010101" pitchFamily="2" charset="-122"/>
+                <a:cs typeface="Times New Roman" panose="02020603050405020304" pitchFamily="18" charset="0"/>
+              </a:rPr>
+              <a:t>ZNS SSD</a:t>
+            </a:r>
+            <a:r>
+              <a:rPr lang="zh-CN" altLang="zh-CN" dirty="0">
+                <a:latin typeface="Times New Roman" panose="02020603050405020304" pitchFamily="18" charset="0"/>
+                <a:ea typeface="宋体" panose="02010600030101010101" pitchFamily="2" charset="-122"/>
+                <a:cs typeface="Times New Roman" panose="02020603050405020304" pitchFamily="18" charset="0"/>
+              </a:rPr>
+              <a:t>，有效</a:t>
+            </a:r>
+            <a:r>
+              <a:rPr lang="zh-CN" altLang="en-US" dirty="0">
+                <a:latin typeface="Times New Roman" panose="02020603050405020304" pitchFamily="18" charset="0"/>
+                <a:ea typeface="宋体" panose="02010600030101010101" pitchFamily="2" charset="-122"/>
+                <a:cs typeface="Times New Roman" panose="02020603050405020304" pitchFamily="18" charset="0"/>
+              </a:rPr>
+              <a:t>降低了</a:t>
+            </a:r>
+            <a:r>
+              <a:rPr lang="en-US" altLang="zh-CN" dirty="0">
+                <a:latin typeface="Times New Roman" panose="02020603050405020304" pitchFamily="18" charset="0"/>
+                <a:ea typeface="宋体" panose="02010600030101010101" pitchFamily="2" charset="-122"/>
+                <a:cs typeface="Times New Roman" panose="02020603050405020304" pitchFamily="18" charset="0"/>
+              </a:rPr>
+              <a:t>Zone</a:t>
+            </a:r>
+            <a:r>
+              <a:rPr lang="zh-CN" altLang="en-US" dirty="0">
+                <a:latin typeface="Times New Roman" panose="02020603050405020304" pitchFamily="18" charset="0"/>
+                <a:ea typeface="宋体" panose="02010600030101010101" pitchFamily="2" charset="-122"/>
+                <a:cs typeface="Times New Roman" panose="02020603050405020304" pitchFamily="18" charset="0"/>
+              </a:rPr>
+              <a:t>操作的</a:t>
+            </a:r>
+            <a:r>
+              <a:rPr lang="zh-CN" altLang="zh-CN" dirty="0">
+                <a:latin typeface="Times New Roman" panose="02020603050405020304" pitchFamily="18" charset="0"/>
+                <a:ea typeface="宋体" panose="02010600030101010101" pitchFamily="2" charset="-122"/>
+                <a:cs typeface="Times New Roman" panose="02020603050405020304" pitchFamily="18" charset="0"/>
+              </a:rPr>
+              <a:t>延迟；并且实现了一种区域友好的追加感知</a:t>
+            </a:r>
+            <a:r>
+              <a:rPr lang="en-US" altLang="zh-CN" dirty="0">
+                <a:latin typeface="Times New Roman" panose="02020603050405020304" pitchFamily="18" charset="0"/>
+                <a:ea typeface="宋体" panose="02010600030101010101" pitchFamily="2" charset="-122"/>
+                <a:cs typeface="Times New Roman" panose="02020603050405020304" pitchFamily="18" charset="0"/>
               </a:rPr>
               <a:t>WAL</a:t>
             </a:r>
             <a:r>
-              <a:rPr lang="zh-CN" altLang="zh-CN" sz="2000" dirty="0">
-                <a:solidFill>
-                  <a:srgbClr val="374151"/>
-                </a:solidFill>
-                <a:latin typeface="_5b8b_4f53"/>
+              <a:rPr lang="zh-CN" altLang="zh-CN" dirty="0">
+                <a:latin typeface="Times New Roman" panose="02020603050405020304" pitchFamily="18" charset="0"/>
+                <a:ea typeface="宋体" panose="02010600030101010101" pitchFamily="2" charset="-122"/>
+                <a:cs typeface="Times New Roman" panose="02020603050405020304" pitchFamily="18" charset="0"/>
               </a:rPr>
               <a:t>解决方案</a:t>
             </a:r>
             <a:r>
-              <a:rPr lang="en-US" altLang="zh-CN" sz="2000" dirty="0">
-                <a:solidFill>
-                  <a:srgbClr val="374151"/>
-                </a:solidFill>
-                <a:latin typeface="_5b8b_4f53"/>
+              <a:rPr lang="en-US" altLang="zh-CN" dirty="0">
+                <a:latin typeface="Times New Roman" panose="02020603050405020304" pitchFamily="18" charset="0"/>
+                <a:ea typeface="宋体" panose="02010600030101010101" pitchFamily="2" charset="-122"/>
+                <a:cs typeface="Times New Roman" panose="02020603050405020304" pitchFamily="18" charset="0"/>
               </a:rPr>
               <a:t>——A2-WAL</a:t>
             </a:r>
             <a:r>
-              <a:rPr lang="zh-CN" altLang="zh-CN" sz="2000" dirty="0">
-                <a:solidFill>
-                  <a:srgbClr val="374151"/>
-                </a:solidFill>
-                <a:latin typeface="_5b8b_4f53"/>
-              </a:rPr>
-              <a:t>，解决了</a:t>
-            </a:r>
-            <a:r>
-              <a:rPr lang="en-US" altLang="zh-CN" sz="2000" dirty="0">
-                <a:solidFill>
-                  <a:srgbClr val="374151"/>
-                </a:solidFill>
-                <a:latin typeface="_5b8b_4f53"/>
+              <a:rPr lang="zh-CN" altLang="zh-CN" dirty="0">
+                <a:latin typeface="Times New Roman" panose="02020603050405020304" pitchFamily="18" charset="0"/>
+                <a:ea typeface="宋体" panose="02010600030101010101" pitchFamily="2" charset="-122"/>
+                <a:cs typeface="Times New Roman" panose="02020603050405020304" pitchFamily="18" charset="0"/>
+              </a:rPr>
+              <a:t>，</a:t>
+            </a:r>
+            <a:r>
+              <a:rPr lang="zh-CN" altLang="en-US" dirty="0">
+                <a:latin typeface="Times New Roman" panose="02020603050405020304" pitchFamily="18" charset="0"/>
+                <a:ea typeface="宋体" panose="02010600030101010101" pitchFamily="2" charset="-122"/>
+                <a:cs typeface="Times New Roman" panose="02020603050405020304" pitchFamily="18" charset="0"/>
+              </a:rPr>
+              <a:t>充分利用</a:t>
+            </a:r>
+            <a:r>
+              <a:rPr lang="en-US" altLang="zh-CN" dirty="0">
+                <a:latin typeface="Times New Roman" panose="02020603050405020304" pitchFamily="18" charset="0"/>
+                <a:ea typeface="宋体" panose="02010600030101010101" pitchFamily="2" charset="-122"/>
+                <a:cs typeface="Times New Roman" panose="02020603050405020304" pitchFamily="18" charset="0"/>
+              </a:rPr>
+              <a:t>Zone Append</a:t>
+            </a:r>
+            <a:r>
+              <a:rPr lang="zh-CN" altLang="en-US" dirty="0">
+                <a:latin typeface="Times New Roman" panose="02020603050405020304" pitchFamily="18" charset="0"/>
+                <a:ea typeface="宋体" panose="02010600030101010101" pitchFamily="2" charset="-122"/>
+                <a:cs typeface="Times New Roman" panose="02020603050405020304" pitchFamily="18" charset="0"/>
+              </a:rPr>
+              <a:t>命令的优势</a:t>
+            </a:r>
+            <a:r>
+              <a:rPr lang="zh-CN" altLang="zh-CN" dirty="0">
+                <a:latin typeface="Times New Roman" panose="02020603050405020304" pitchFamily="18" charset="0"/>
+                <a:ea typeface="宋体" panose="02010600030101010101" pitchFamily="2" charset="-122"/>
+                <a:cs typeface="Times New Roman" panose="02020603050405020304" pitchFamily="18" charset="0"/>
+              </a:rPr>
+              <a:t>解决了</a:t>
+            </a:r>
+            <a:r>
+              <a:rPr lang="en-US" altLang="zh-CN" dirty="0">
+                <a:latin typeface="Times New Roman" panose="02020603050405020304" pitchFamily="18" charset="0"/>
+                <a:ea typeface="宋体" panose="02010600030101010101" pitchFamily="2" charset="-122"/>
+                <a:cs typeface="Times New Roman" panose="02020603050405020304" pitchFamily="18" charset="0"/>
               </a:rPr>
               <a:t>ZNS</a:t>
             </a:r>
             <a:r>
-              <a:rPr lang="zh-CN" altLang="zh-CN" sz="2000" dirty="0">
-                <a:solidFill>
-                  <a:srgbClr val="374151"/>
-                </a:solidFill>
-                <a:latin typeface="_5b8b_4f53"/>
+              <a:rPr lang="zh-CN" altLang="zh-CN" dirty="0">
+                <a:latin typeface="Times New Roman" panose="02020603050405020304" pitchFamily="18" charset="0"/>
+                <a:ea typeface="宋体" panose="02010600030101010101" pitchFamily="2" charset="-122"/>
+                <a:cs typeface="Times New Roman" panose="02020603050405020304" pitchFamily="18" charset="0"/>
               </a:rPr>
               <a:t>盘</a:t>
             </a:r>
             <a:r>
-              <a:rPr lang="zh-CN" altLang="en-US" sz="2000" dirty="0">
-                <a:solidFill>
-                  <a:srgbClr val="374151"/>
-                </a:solidFill>
-                <a:latin typeface="_5b8b_4f53"/>
-              </a:rPr>
-              <a:t>内单个</a:t>
-            </a:r>
-            <a:r>
-              <a:rPr lang="en-US" altLang="zh-CN" sz="2000" dirty="0">
-                <a:solidFill>
-                  <a:srgbClr val="374151"/>
-                </a:solidFill>
-                <a:latin typeface="_5b8b_4f53"/>
+              <a:rPr lang="zh-CN" altLang="en-US" dirty="0">
+                <a:latin typeface="Times New Roman" panose="02020603050405020304" pitchFamily="18" charset="0"/>
+                <a:ea typeface="宋体" panose="02010600030101010101" pitchFamily="2" charset="-122"/>
+                <a:cs typeface="Times New Roman" panose="02020603050405020304" pitchFamily="18" charset="0"/>
+              </a:rPr>
+              <a:t>中，由于单个</a:t>
+            </a:r>
+            <a:r>
+              <a:rPr lang="en-US" altLang="zh-CN" dirty="0">
+                <a:latin typeface="Times New Roman" panose="02020603050405020304" pitchFamily="18" charset="0"/>
+                <a:ea typeface="宋体" panose="02010600030101010101" pitchFamily="2" charset="-122"/>
+                <a:cs typeface="Times New Roman" panose="02020603050405020304" pitchFamily="18" charset="0"/>
               </a:rPr>
               <a:t>Zone</a:t>
             </a:r>
             <a:r>
-              <a:rPr lang="zh-CN" altLang="zh-CN" sz="2000" dirty="0">
-                <a:solidFill>
-                  <a:srgbClr val="374151"/>
-                </a:solidFill>
-                <a:latin typeface="_5b8b_4f53"/>
+              <a:rPr lang="zh-CN" altLang="zh-CN" dirty="0">
+                <a:latin typeface="Times New Roman" panose="02020603050405020304" pitchFamily="18" charset="0"/>
+                <a:ea typeface="宋体" panose="02010600030101010101" pitchFamily="2" charset="-122"/>
+                <a:cs typeface="Times New Roman" panose="02020603050405020304" pitchFamily="18" charset="0"/>
               </a:rPr>
               <a:t>只能串行写入</a:t>
             </a:r>
             <a:r>
-              <a:rPr lang="en-US" altLang="zh-CN" sz="2000" dirty="0">
-                <a:solidFill>
-                  <a:srgbClr val="374151"/>
-                </a:solidFill>
-                <a:latin typeface="_5b8b_4f53"/>
+              <a:rPr lang="en-US" altLang="zh-CN" dirty="0">
+                <a:latin typeface="Times New Roman" panose="02020603050405020304" pitchFamily="18" charset="0"/>
+                <a:ea typeface="宋体" panose="02010600030101010101" pitchFamily="2" charset="-122"/>
+                <a:cs typeface="Times New Roman" panose="02020603050405020304" pitchFamily="18" charset="0"/>
               </a:rPr>
               <a:t>WAL</a:t>
             </a:r>
             <a:r>
-              <a:rPr lang="zh-CN" altLang="en-US" sz="2000" dirty="0">
-                <a:solidFill>
-                  <a:srgbClr val="374151"/>
-                </a:solidFill>
-                <a:latin typeface="_5b8b_4f53"/>
+              <a:rPr lang="zh-CN" altLang="en-US" dirty="0">
+                <a:latin typeface="Times New Roman" panose="02020603050405020304" pitchFamily="18" charset="0"/>
+                <a:ea typeface="宋体" panose="02010600030101010101" pitchFamily="2" charset="-122"/>
+                <a:cs typeface="Times New Roman" panose="02020603050405020304" pitchFamily="18" charset="0"/>
               </a:rPr>
               <a:t>文件而</a:t>
             </a:r>
             <a:r>
-              <a:rPr lang="zh-CN" altLang="zh-CN" sz="2000" dirty="0">
-                <a:solidFill>
-                  <a:srgbClr val="374151"/>
-                </a:solidFill>
-                <a:latin typeface="_5b8b_4f53"/>
-              </a:rPr>
-              <a:t>造成的写入瓶颈问题。</a:t>
+              <a:rPr lang="zh-CN" altLang="zh-CN" dirty="0">
+                <a:latin typeface="Times New Roman" panose="02020603050405020304" pitchFamily="18" charset="0"/>
+                <a:ea typeface="宋体" panose="02010600030101010101" pitchFamily="2" charset="-122"/>
+                <a:cs typeface="Times New Roman" panose="02020603050405020304" pitchFamily="18" charset="0"/>
+              </a:rPr>
+              <a:t>造成的写入瓶颈问题</a:t>
             </a:r>
           </a:p>
         </p:txBody>
@@ -14329,8 +14593,8 @@
         </p:blipFill>
         <p:spPr>
           <a:xfrm>
-            <a:off x="4654741" y="929752"/>
-            <a:ext cx="7210425" cy="5398840"/>
+            <a:off x="4859356" y="950472"/>
+            <a:ext cx="7005810" cy="5355490"/>
           </a:xfrm>
           <a:prstGeom prst="rect">
             <a:avLst/>
@@ -14974,8 +15238,8 @@
         </p:nvSpPr>
         <p:spPr>
           <a:xfrm>
-            <a:off x="208338" y="1222965"/>
-            <a:ext cx="4649412" cy="3139321"/>
+            <a:off x="385590" y="1316200"/>
+            <a:ext cx="4649412" cy="5050613"/>
           </a:xfrm>
           <a:prstGeom prst="rect">
             <a:avLst/>
@@ -14988,375 +15252,371 @@
           </a:bodyPr>
           <a:lstStyle/>
           <a:p>
+            <a:pPr>
+              <a:lnSpc>
+                <a:spcPct val="130000"/>
+              </a:lnSpc>
+            </a:pPr>
             <a:r>
               <a:rPr lang="zh-CN" altLang="zh-CN" dirty="0">
-                <a:solidFill>
-                  <a:srgbClr val="374151"/>
-                </a:solidFill>
-                <a:latin typeface="_5b8b_4f53"/>
+                <a:latin typeface="宋体" panose="02010600030101010101" pitchFamily="2" charset="-122"/>
+                <a:ea typeface="宋体" panose="02010600030101010101" pitchFamily="2" charset="-122"/>
               </a:rPr>
               <a:t>在</a:t>
             </a:r>
             <a:r>
               <a:rPr lang="en-US" altLang="zh-CN" dirty="0">
-                <a:solidFill>
-                  <a:srgbClr val="374151"/>
-                </a:solidFill>
-                <a:latin typeface="_5b8b_4f53"/>
+                <a:latin typeface="宋体" panose="02010600030101010101" pitchFamily="2" charset="-122"/>
+                <a:ea typeface="宋体" panose="02010600030101010101" pitchFamily="2" charset="-122"/>
               </a:rPr>
               <a:t>ZAFS</a:t>
             </a:r>
             <a:r>
               <a:rPr lang="zh-CN" altLang="zh-CN" dirty="0">
-                <a:solidFill>
-                  <a:srgbClr val="374151"/>
-                </a:solidFill>
-                <a:latin typeface="_5b8b_4f53"/>
+                <a:latin typeface="宋体" panose="02010600030101010101" pitchFamily="2" charset="-122"/>
+                <a:ea typeface="宋体" panose="02010600030101010101" pitchFamily="2" charset="-122"/>
               </a:rPr>
               <a:t>中，设计实现了一种</a:t>
             </a:r>
             <a:r>
               <a:rPr lang="zh-CN" altLang="en-US" dirty="0">
-                <a:solidFill>
-                  <a:srgbClr val="374151"/>
-                </a:solidFill>
-                <a:latin typeface="_5b8b_4f53"/>
+                <a:latin typeface="宋体" panose="02010600030101010101" pitchFamily="2" charset="-122"/>
+                <a:ea typeface="宋体" panose="02010600030101010101" pitchFamily="2" charset="-122"/>
               </a:rPr>
               <a:t>追加友好的新型</a:t>
             </a:r>
             <a:r>
               <a:rPr lang="en-US" altLang="zh-CN" dirty="0">
-                <a:solidFill>
-                  <a:srgbClr val="374151"/>
-                </a:solidFill>
-                <a:latin typeface="_5b8b_4f53"/>
+                <a:latin typeface="宋体" panose="02010600030101010101" pitchFamily="2" charset="-122"/>
+                <a:ea typeface="宋体" panose="02010600030101010101" pitchFamily="2" charset="-122"/>
               </a:rPr>
               <a:t>WAL</a:t>
             </a:r>
             <a:r>
               <a:rPr lang="zh-CN" altLang="en-US" dirty="0">
-                <a:solidFill>
-                  <a:srgbClr val="374151"/>
-                </a:solidFill>
-                <a:latin typeface="_5b8b_4f53"/>
+                <a:latin typeface="宋体" panose="02010600030101010101" pitchFamily="2" charset="-122"/>
+                <a:ea typeface="宋体" panose="02010600030101010101" pitchFamily="2" charset="-122"/>
               </a:rPr>
               <a:t>，</a:t>
             </a:r>
             <a:r>
               <a:rPr lang="en-US" altLang="zh-CN" dirty="0">
-                <a:solidFill>
-                  <a:srgbClr val="374151"/>
-                </a:solidFill>
-                <a:latin typeface="_5b8b_4f53"/>
+                <a:latin typeface="宋体" panose="02010600030101010101" pitchFamily="2" charset="-122"/>
+                <a:ea typeface="宋体" panose="02010600030101010101" pitchFamily="2" charset="-122"/>
               </a:rPr>
               <a:t>A2-WAL</a:t>
             </a:r>
             <a:r>
               <a:rPr lang="zh-CN" altLang="zh-CN" dirty="0">
-                <a:solidFill>
-                  <a:srgbClr val="374151"/>
-                </a:solidFill>
-                <a:latin typeface="_5b8b_4f53"/>
+                <a:latin typeface="宋体" panose="02010600030101010101" pitchFamily="2" charset="-122"/>
+                <a:ea typeface="宋体" panose="02010600030101010101" pitchFamily="2" charset="-122"/>
               </a:rPr>
               <a:t>（</a:t>
             </a:r>
             <a:r>
               <a:rPr lang="en-US" altLang="zh-CN" dirty="0">
-                <a:solidFill>
-                  <a:srgbClr val="374151"/>
-                </a:solidFill>
-                <a:latin typeface="_5b8b_4f53"/>
+                <a:latin typeface="宋体" panose="02010600030101010101" pitchFamily="2" charset="-122"/>
+                <a:ea typeface="宋体" panose="02010600030101010101" pitchFamily="2" charset="-122"/>
               </a:rPr>
               <a:t>Append-Aware WAL</a:t>
             </a:r>
             <a:r>
               <a:rPr lang="zh-CN" altLang="zh-CN" dirty="0">
-                <a:solidFill>
-                  <a:srgbClr val="374151"/>
-                </a:solidFill>
-                <a:latin typeface="_5b8b_4f53"/>
+                <a:latin typeface="宋体" panose="02010600030101010101" pitchFamily="2" charset="-122"/>
+                <a:ea typeface="宋体" panose="02010600030101010101" pitchFamily="2" charset="-122"/>
               </a:rPr>
               <a:t>）</a:t>
             </a:r>
             <a:endParaRPr lang="en-US" altLang="zh-CN" dirty="0">
-              <a:solidFill>
-                <a:srgbClr val="374151"/>
-              </a:solidFill>
-              <a:latin typeface="_5b8b_4f53"/>
+              <a:latin typeface="宋体" panose="02010600030101010101" pitchFamily="2" charset="-122"/>
+              <a:ea typeface="宋体" panose="02010600030101010101" pitchFamily="2" charset="-122"/>
             </a:endParaRPr>
           </a:p>
           <a:p>
+            <a:pPr>
+              <a:lnSpc>
+                <a:spcPct val="130000"/>
+              </a:lnSpc>
+            </a:pPr>
             <a:endParaRPr lang="en-US" altLang="zh-CN" dirty="0">
-              <a:solidFill>
-                <a:srgbClr val="374151"/>
-              </a:solidFill>
-              <a:latin typeface="_5b8b_4f53"/>
+              <a:latin typeface="宋体" panose="02010600030101010101" pitchFamily="2" charset="-122"/>
+              <a:ea typeface="宋体" panose="02010600030101010101" pitchFamily="2" charset="-122"/>
             </a:endParaRPr>
           </a:p>
           <a:p>
+            <a:pPr>
+              <a:lnSpc>
+                <a:spcPct val="130000"/>
+              </a:lnSpc>
+            </a:pPr>
             <a:r>
               <a:rPr lang="zh-CN" altLang="zh-CN" dirty="0">
-                <a:solidFill>
-                  <a:srgbClr val="374151"/>
-                </a:solidFill>
-                <a:latin typeface="_5b8b_4f53"/>
+                <a:latin typeface="宋体" panose="02010600030101010101" pitchFamily="2" charset="-122"/>
+                <a:ea typeface="宋体" panose="02010600030101010101" pitchFamily="2" charset="-122"/>
               </a:rPr>
               <a:t>将</a:t>
             </a:r>
             <a:r>
               <a:rPr lang="en-US" altLang="zh-CN" dirty="0">
-                <a:solidFill>
-                  <a:srgbClr val="374151"/>
-                </a:solidFill>
-                <a:latin typeface="_5b8b_4f53"/>
+                <a:latin typeface="宋体" panose="02010600030101010101" pitchFamily="2" charset="-122"/>
+                <a:ea typeface="宋体" panose="02010600030101010101" pitchFamily="2" charset="-122"/>
               </a:rPr>
               <a:t>WAL</a:t>
             </a:r>
             <a:r>
               <a:rPr lang="zh-CN" altLang="zh-CN" dirty="0">
-                <a:solidFill>
-                  <a:srgbClr val="374151"/>
-                </a:solidFill>
-                <a:latin typeface="_5b8b_4f53"/>
-              </a:rPr>
-              <a:t>数据和头部组合成一个</a:t>
+                <a:latin typeface="宋体" panose="02010600030101010101" pitchFamily="2" charset="-122"/>
+                <a:ea typeface="宋体" panose="02010600030101010101" pitchFamily="2" charset="-122"/>
+              </a:rPr>
+              <a:t>数据和头部</a:t>
             </a:r>
             <a:r>
               <a:rPr lang="en-US" altLang="zh-CN" dirty="0">
-                <a:solidFill>
-                  <a:srgbClr val="374151"/>
-                </a:solidFill>
-                <a:latin typeface="_5b8b_4f53"/>
+                <a:latin typeface="宋体" panose="02010600030101010101" pitchFamily="2" charset="-122"/>
+                <a:ea typeface="宋体" panose="02010600030101010101" pitchFamily="2" charset="-122"/>
+              </a:rPr>
+              <a:t>(header)</a:t>
+            </a:r>
+            <a:r>
+              <a:rPr lang="zh-CN" altLang="zh-CN" dirty="0">
+                <a:latin typeface="宋体" panose="02010600030101010101" pitchFamily="2" charset="-122"/>
+                <a:ea typeface="宋体" panose="02010600030101010101" pitchFamily="2" charset="-122"/>
+              </a:rPr>
+              <a:t>组合成一个</a:t>
+            </a:r>
+            <a:r>
+              <a:rPr lang="en-US" altLang="zh-CN" dirty="0">
+                <a:latin typeface="宋体" panose="02010600030101010101" pitchFamily="2" charset="-122"/>
+                <a:ea typeface="宋体" panose="02010600030101010101" pitchFamily="2" charset="-122"/>
               </a:rPr>
               <a:t>WAL entry</a:t>
             </a:r>
             <a:r>
+              <a:rPr lang="zh-CN" altLang="en-US" dirty="0">
+                <a:latin typeface="宋体" panose="02010600030101010101" pitchFamily="2" charset="-122"/>
+                <a:ea typeface="宋体" panose="02010600030101010101" pitchFamily="2" charset="-122"/>
+              </a:rPr>
+              <a:t>，保存了</a:t>
+            </a:r>
+            <a:r>
               <a:rPr lang="zh-CN" altLang="zh-CN" dirty="0">
-                <a:solidFill>
-                  <a:srgbClr val="374151"/>
-                </a:solidFill>
-                <a:latin typeface="_5b8b_4f53"/>
-              </a:rPr>
-              <a:t>。这个报头</a:t>
+                <a:latin typeface="宋体" panose="02010600030101010101" pitchFamily="2" charset="-122"/>
+                <a:ea typeface="宋体" panose="02010600030101010101" pitchFamily="2" charset="-122"/>
+              </a:rPr>
+              <a:t>序列号（</a:t>
+            </a:r>
+            <a:r>
+              <a:rPr lang="en-US" altLang="zh-CN" dirty="0" err="1">
+                <a:latin typeface="宋体" panose="02010600030101010101" pitchFamily="2" charset="-122"/>
+                <a:ea typeface="宋体" panose="02010600030101010101" pitchFamily="2" charset="-122"/>
+              </a:rPr>
+              <a:t>seq_number</a:t>
+            </a:r>
+            <a:r>
+              <a:rPr lang="zh-CN" altLang="zh-CN" dirty="0">
+                <a:latin typeface="宋体" panose="02010600030101010101" pitchFamily="2" charset="-122"/>
+                <a:ea typeface="宋体" panose="02010600030101010101" pitchFamily="2" charset="-122"/>
+              </a:rPr>
+              <a:t>）和</a:t>
             </a:r>
             <a:r>
               <a:rPr lang="en-US" altLang="zh-CN" dirty="0">
-                <a:solidFill>
-                  <a:srgbClr val="374151"/>
-                </a:solidFill>
-                <a:latin typeface="_5b8b_4f53"/>
-              </a:rPr>
-              <a:t>(header)</a:t>
+                <a:latin typeface="宋体" panose="02010600030101010101" pitchFamily="2" charset="-122"/>
+                <a:ea typeface="宋体" panose="02010600030101010101" pitchFamily="2" charset="-122"/>
+              </a:rPr>
+              <a:t>WAL entry</a:t>
             </a:r>
             <a:r>
               <a:rPr lang="zh-CN" altLang="zh-CN" dirty="0">
-                <a:solidFill>
-                  <a:srgbClr val="374151"/>
-                </a:solidFill>
-                <a:latin typeface="_5b8b_4f53"/>
-              </a:rPr>
-              <a:t>由</a:t>
+                <a:latin typeface="宋体" panose="02010600030101010101" pitchFamily="2" charset="-122"/>
+                <a:ea typeface="宋体" panose="02010600030101010101" pitchFamily="2" charset="-122"/>
+              </a:rPr>
+              <a:t>的大小</a:t>
             </a:r>
             <a:r>
               <a:rPr lang="en-US" altLang="zh-CN" dirty="0">
-                <a:solidFill>
-                  <a:srgbClr val="374151"/>
-                </a:solidFill>
-                <a:latin typeface="_5b8b_4f53"/>
-              </a:rPr>
-              <a:t>64</a:t>
+                <a:latin typeface="宋体" panose="02010600030101010101" pitchFamily="2" charset="-122"/>
+                <a:ea typeface="宋体" panose="02010600030101010101" pitchFamily="2" charset="-122"/>
+              </a:rPr>
+              <a:t>(</a:t>
+            </a:r>
+            <a:r>
+              <a:rPr lang="en-US" altLang="zh-CN" dirty="0" err="1">
+                <a:latin typeface="宋体" panose="02010600030101010101" pitchFamily="2" charset="-122"/>
+                <a:ea typeface="宋体" panose="02010600030101010101" pitchFamily="2" charset="-122"/>
+              </a:rPr>
+              <a:t>entry_size</a:t>
+            </a:r>
+            <a:r>
+              <a:rPr lang="en-US" altLang="zh-CN" dirty="0">
+                <a:latin typeface="宋体" panose="02010600030101010101" pitchFamily="2" charset="-122"/>
+                <a:ea typeface="宋体" panose="02010600030101010101" pitchFamily="2" charset="-122"/>
+              </a:rPr>
+              <a:t>)</a:t>
             </a:r>
             <a:r>
               <a:rPr lang="zh-CN" altLang="zh-CN" dirty="0">
-                <a:solidFill>
-                  <a:srgbClr val="374151"/>
-                </a:solidFill>
-                <a:latin typeface="_5b8b_4f53"/>
-              </a:rPr>
-              <a:t>位序列号（</a:t>
-            </a:r>
-            <a:r>
-              <a:rPr lang="en-US" altLang="zh-CN" dirty="0" err="1">
-                <a:solidFill>
-                  <a:srgbClr val="374151"/>
-                </a:solidFill>
-                <a:latin typeface="_5b8b_4f53"/>
-              </a:rPr>
-              <a:t>seq_number</a:t>
+                <a:latin typeface="宋体" panose="02010600030101010101" pitchFamily="2" charset="-122"/>
+                <a:ea typeface="宋体" panose="02010600030101010101" pitchFamily="2" charset="-122"/>
+              </a:rPr>
+              <a:t>。</a:t>
+            </a:r>
+            <a:endParaRPr lang="en-US" altLang="zh-CN" dirty="0">
+              <a:latin typeface="宋体" panose="02010600030101010101" pitchFamily="2" charset="-122"/>
+              <a:ea typeface="宋体" panose="02010600030101010101" pitchFamily="2" charset="-122"/>
+            </a:endParaRPr>
+          </a:p>
+          <a:p>
+            <a:pPr>
+              <a:lnSpc>
+                <a:spcPct val="130000"/>
+              </a:lnSpc>
+            </a:pPr>
+            <a:endParaRPr lang="en-US" altLang="zh-CN" dirty="0">
+              <a:latin typeface="宋体" panose="02010600030101010101" pitchFamily="2" charset="-122"/>
+              <a:ea typeface="宋体" panose="02010600030101010101" pitchFamily="2" charset="-122"/>
+            </a:endParaRPr>
+          </a:p>
+          <a:p>
+            <a:pPr>
+              <a:lnSpc>
+                <a:spcPct val="130000"/>
+              </a:lnSpc>
+            </a:pPr>
+            <a:r>
+              <a:rPr lang="zh-CN" altLang="en-US" dirty="0">
+                <a:latin typeface="宋体" panose="02010600030101010101" pitchFamily="2" charset="-122"/>
+                <a:ea typeface="宋体" panose="02010600030101010101" pitchFamily="2" charset="-122"/>
+              </a:rPr>
+              <a:t>前者</a:t>
             </a:r>
             <a:r>
               <a:rPr lang="zh-CN" altLang="zh-CN" dirty="0">
-                <a:solidFill>
-                  <a:srgbClr val="374151"/>
-                </a:solidFill>
-                <a:latin typeface="_5b8b_4f53"/>
-              </a:rPr>
-              <a:t>）和</a:t>
+                <a:latin typeface="宋体" panose="02010600030101010101" pitchFamily="2" charset="-122"/>
+                <a:ea typeface="宋体" panose="02010600030101010101" pitchFamily="2" charset="-122"/>
+              </a:rPr>
+              <a:t>原子</a:t>
+            </a:r>
+            <a:r>
+              <a:rPr lang="zh-CN" altLang="en-US" dirty="0">
+                <a:latin typeface="宋体" panose="02010600030101010101" pitchFamily="2" charset="-122"/>
+                <a:ea typeface="宋体" panose="02010600030101010101" pitchFamily="2" charset="-122"/>
+              </a:rPr>
+              <a:t>自增</a:t>
+            </a:r>
+            <a:r>
+              <a:rPr lang="zh-CN" altLang="zh-CN" dirty="0">
+                <a:latin typeface="宋体" panose="02010600030101010101" pitchFamily="2" charset="-122"/>
+                <a:ea typeface="宋体" panose="02010600030101010101" pitchFamily="2" charset="-122"/>
+              </a:rPr>
+              <a:t>，</a:t>
+            </a:r>
+            <a:r>
+              <a:rPr lang="zh-CN" altLang="en-US" dirty="0">
+                <a:latin typeface="宋体" panose="02010600030101010101" pitchFamily="2" charset="-122"/>
+                <a:ea typeface="宋体" panose="02010600030101010101" pitchFamily="2" charset="-122"/>
+              </a:rPr>
+              <a:t>维护条目之间的</a:t>
+            </a:r>
+            <a:r>
+              <a:rPr lang="zh-CN" altLang="zh-CN" dirty="0">
+                <a:latin typeface="宋体" panose="02010600030101010101" pitchFamily="2" charset="-122"/>
+                <a:ea typeface="宋体" panose="02010600030101010101" pitchFamily="2" charset="-122"/>
+              </a:rPr>
+              <a:t>顺序。</a:t>
+            </a:r>
+            <a:endParaRPr lang="en-US" altLang="zh-CN" dirty="0">
+              <a:latin typeface="宋体" panose="02010600030101010101" pitchFamily="2" charset="-122"/>
+              <a:ea typeface="宋体" panose="02010600030101010101" pitchFamily="2" charset="-122"/>
+            </a:endParaRPr>
+          </a:p>
+          <a:p>
+            <a:pPr>
+              <a:lnSpc>
+                <a:spcPct val="130000"/>
+              </a:lnSpc>
+            </a:pPr>
+            <a:r>
+              <a:rPr lang="zh-CN" altLang="en-US" dirty="0">
+                <a:latin typeface="宋体" panose="02010600030101010101" pitchFamily="2" charset="-122"/>
+                <a:ea typeface="宋体" panose="02010600030101010101" pitchFamily="2" charset="-122"/>
+              </a:rPr>
+              <a:t>后者</a:t>
+            </a:r>
+            <a:r>
+              <a:rPr lang="zh-CN" altLang="zh-CN" dirty="0">
+                <a:latin typeface="宋体" panose="02010600030101010101" pitchFamily="2" charset="-122"/>
+                <a:ea typeface="宋体" panose="02010600030101010101" pitchFamily="2" charset="-122"/>
+              </a:rPr>
+              <a:t>用于推断</a:t>
+            </a:r>
+            <a:r>
+              <a:rPr lang="zh-CN" altLang="en-US" dirty="0">
+                <a:latin typeface="宋体" panose="02010600030101010101" pitchFamily="2" charset="-122"/>
+                <a:ea typeface="宋体" panose="02010600030101010101" pitchFamily="2" charset="-122"/>
+              </a:rPr>
+              <a:t>下一个</a:t>
             </a:r>
             <a:r>
               <a:rPr lang="en-US" altLang="zh-CN" dirty="0">
-                <a:solidFill>
-                  <a:srgbClr val="374151"/>
-                </a:solidFill>
-                <a:latin typeface="_5b8b_4f53"/>
-              </a:rPr>
-              <a:t>WAL entry</a:t>
+                <a:latin typeface="宋体" panose="02010600030101010101" pitchFamily="2" charset="-122"/>
+                <a:ea typeface="宋体" panose="02010600030101010101" pitchFamily="2" charset="-122"/>
+              </a:rPr>
+              <a:t> WAL </a:t>
             </a:r>
             <a:r>
               <a:rPr lang="zh-CN" altLang="zh-CN" dirty="0">
-                <a:solidFill>
-                  <a:srgbClr val="374151"/>
-                </a:solidFill>
-                <a:latin typeface="_5b8b_4f53"/>
-              </a:rPr>
-              <a:t>的大小</a:t>
+                <a:latin typeface="宋体" panose="02010600030101010101" pitchFamily="2" charset="-122"/>
+                <a:ea typeface="宋体" panose="02010600030101010101" pitchFamily="2" charset="-122"/>
+              </a:rPr>
+              <a:t>条目的位置。</a:t>
+            </a:r>
+            <a:endParaRPr lang="en-US" altLang="zh-CN" dirty="0">
+              <a:latin typeface="宋体" panose="02010600030101010101" pitchFamily="2" charset="-122"/>
+              <a:ea typeface="宋体" panose="02010600030101010101" pitchFamily="2" charset="-122"/>
+            </a:endParaRPr>
+          </a:p>
+          <a:p>
+            <a:pPr>
+              <a:lnSpc>
+                <a:spcPct val="130000"/>
+              </a:lnSpc>
+            </a:pPr>
+            <a:endParaRPr lang="en-US" altLang="zh-CN" dirty="0">
+              <a:latin typeface="宋体" panose="02010600030101010101" pitchFamily="2" charset="-122"/>
+              <a:ea typeface="宋体" panose="02010600030101010101" pitchFamily="2" charset="-122"/>
+            </a:endParaRPr>
+          </a:p>
+          <a:p>
+            <a:pPr>
+              <a:lnSpc>
+                <a:spcPct val="130000"/>
+              </a:lnSpc>
+            </a:pPr>
+            <a:r>
+              <a:rPr lang="zh-CN" altLang="en-US" dirty="0">
+                <a:latin typeface="宋体" panose="02010600030101010101" pitchFamily="2" charset="-122"/>
+                <a:ea typeface="宋体" panose="02010600030101010101" pitchFamily="2" charset="-122"/>
+              </a:rPr>
+              <a:t>利用</a:t>
             </a:r>
             <a:r>
               <a:rPr lang="en-US" altLang="zh-CN" dirty="0">
-                <a:solidFill>
-                  <a:srgbClr val="374151"/>
-                </a:solidFill>
-                <a:latin typeface="_5b8b_4f53"/>
-              </a:rPr>
-              <a:t>(</a:t>
-            </a:r>
-            <a:r>
-              <a:rPr lang="en-US" altLang="zh-CN" dirty="0" err="1">
-                <a:solidFill>
-                  <a:srgbClr val="374151"/>
-                </a:solidFill>
-                <a:latin typeface="_5b8b_4f53"/>
-              </a:rPr>
-              <a:t>entry_size</a:t>
-            </a:r>
-            <a:r>
-              <a:rPr lang="en-US" altLang="zh-CN" dirty="0">
-                <a:solidFill>
-                  <a:srgbClr val="374151"/>
-                </a:solidFill>
-                <a:latin typeface="_5b8b_4f53"/>
-              </a:rPr>
-              <a:t>)</a:t>
-            </a:r>
-            <a:r>
-              <a:rPr lang="zh-CN" altLang="zh-CN" dirty="0">
-                <a:solidFill>
-                  <a:srgbClr val="374151"/>
-                </a:solidFill>
-                <a:latin typeface="_5b8b_4f53"/>
-              </a:rPr>
-              <a:t>组成。</a:t>
+                <a:latin typeface="宋体" panose="02010600030101010101" pitchFamily="2" charset="-122"/>
+                <a:ea typeface="宋体" panose="02010600030101010101" pitchFamily="2" charset="-122"/>
+              </a:rPr>
+              <a:t>Append</a:t>
+            </a:r>
+            <a:r>
+              <a:rPr lang="zh-CN" altLang="en-US" dirty="0">
+                <a:latin typeface="宋体" panose="02010600030101010101" pitchFamily="2" charset="-122"/>
+                <a:ea typeface="宋体" panose="02010600030101010101" pitchFamily="2" charset="-122"/>
+              </a:rPr>
+              <a:t>并发写入，增加吞吐量。但是导致了数据乱序，在恢复时，利用新增的两个变量重排序。</a:t>
             </a:r>
             <a:endParaRPr lang="en-US" altLang="zh-CN" dirty="0">
-              <a:solidFill>
-                <a:srgbClr val="374151"/>
-              </a:solidFill>
-              <a:latin typeface="_5b8b_4f53"/>
-            </a:endParaRPr>
-          </a:p>
-          <a:p>
-            <a:endParaRPr lang="en-US" altLang="zh-CN" dirty="0">
-              <a:solidFill>
-                <a:srgbClr val="374151"/>
-              </a:solidFill>
-              <a:latin typeface="_5b8b_4f53"/>
-            </a:endParaRPr>
-          </a:p>
-          <a:p>
-            <a:r>
-              <a:rPr lang="zh-CN" altLang="en-US" dirty="0">
-                <a:solidFill>
-                  <a:srgbClr val="374151"/>
-                </a:solidFill>
-                <a:latin typeface="_5b8b_4f53"/>
-              </a:rPr>
-              <a:t>前者</a:t>
-            </a:r>
-            <a:r>
-              <a:rPr lang="zh-CN" altLang="zh-CN" dirty="0">
-                <a:solidFill>
-                  <a:srgbClr val="374151"/>
-                </a:solidFill>
-                <a:latin typeface="_5b8b_4f53"/>
-              </a:rPr>
-              <a:t>以原子方式增加，并表示绝对</a:t>
-            </a:r>
-            <a:r>
-              <a:rPr lang="zh-CN" altLang="en-US" dirty="0">
-                <a:solidFill>
-                  <a:srgbClr val="374151"/>
-                </a:solidFill>
-                <a:latin typeface="_5b8b_4f53"/>
-              </a:rPr>
-              <a:t>的</a:t>
-            </a:r>
-            <a:r>
-              <a:rPr lang="zh-CN" altLang="zh-CN" dirty="0">
-                <a:solidFill>
-                  <a:srgbClr val="374151"/>
-                </a:solidFill>
-                <a:latin typeface="_5b8b_4f53"/>
-              </a:rPr>
-              <a:t>数据顺序。</a:t>
-            </a:r>
-            <a:r>
-              <a:rPr lang="zh-CN" altLang="en-US" dirty="0">
-                <a:solidFill>
-                  <a:srgbClr val="374151"/>
-                </a:solidFill>
-                <a:latin typeface="_5b8b_4f53"/>
-              </a:rPr>
-              <a:t>后者</a:t>
-            </a:r>
-            <a:r>
-              <a:rPr lang="zh-CN" altLang="zh-CN" dirty="0">
-                <a:solidFill>
-                  <a:srgbClr val="374151"/>
-                </a:solidFill>
-                <a:latin typeface="_5b8b_4f53"/>
-              </a:rPr>
-              <a:t>用于推断</a:t>
-            </a:r>
-            <a:r>
-              <a:rPr lang="zh-CN" altLang="en-US" dirty="0">
-                <a:solidFill>
-                  <a:srgbClr val="374151"/>
-                </a:solidFill>
-                <a:latin typeface="_5b8b_4f53"/>
-              </a:rPr>
-              <a:t>下一个</a:t>
-            </a:r>
-            <a:r>
-              <a:rPr lang="en-US" altLang="zh-CN" dirty="0">
-                <a:solidFill>
-                  <a:srgbClr val="374151"/>
-                </a:solidFill>
-                <a:latin typeface="_5b8b_4f53"/>
-              </a:rPr>
-              <a:t> WAL </a:t>
-            </a:r>
-            <a:r>
-              <a:rPr lang="zh-CN" altLang="zh-CN" dirty="0">
-                <a:solidFill>
-                  <a:srgbClr val="374151"/>
-                </a:solidFill>
-                <a:latin typeface="_5b8b_4f53"/>
-              </a:rPr>
-              <a:t>条目的位置。</a:t>
-            </a:r>
-            <a:endParaRPr lang="en-US" altLang="zh-CN" dirty="0">
-              <a:solidFill>
-                <a:srgbClr val="374151"/>
-              </a:solidFill>
-              <a:latin typeface="_5b8b_4f53"/>
-            </a:endParaRPr>
-          </a:p>
-          <a:p>
-            <a:endParaRPr lang="en-US" altLang="zh-CN" dirty="0">
-              <a:solidFill>
-                <a:srgbClr val="374151"/>
-              </a:solidFill>
-              <a:latin typeface="_5b8b_4f53"/>
+              <a:latin typeface="宋体" panose="02010600030101010101" pitchFamily="2" charset="-122"/>
+              <a:ea typeface="宋体" panose="02010600030101010101" pitchFamily="2" charset="-122"/>
             </a:endParaRPr>
           </a:p>
           <a:p>
@@ -15830,7 +16090,7 @@
         </p:nvSpPr>
         <p:spPr>
           <a:xfrm>
-            <a:off x="440055" y="1088390"/>
+            <a:off x="474408" y="1049607"/>
             <a:ext cx="6951980" cy="460375"/>
           </a:xfrm>
           <a:prstGeom prst="rect">
@@ -15845,24 +16105,34 @@
           <a:lstStyle/>
           <a:p>
             <a:r>
-              <a:rPr lang="en-US" altLang="zh-CN" sz="2400" dirty="0">
+              <a:rPr lang="zh-CN" altLang="en-US" sz="2400" dirty="0">
                 <a:solidFill>
                   <a:srgbClr val="4747BA"/>
                 </a:solidFill>
                 <a:ea typeface="+mn-lt"/>
                 <a:cs typeface="Times New Roman" panose="02020603050405020304" charset="0"/>
               </a:rPr>
-              <a:t>ZNS</a:t>
-            </a:r>
-            <a:r>
-              <a:rPr lang="zh-CN" altLang="en-US" sz="2400" dirty="0">
+              <a:t>模拟</a:t>
+            </a:r>
+            <a:r>
+              <a:rPr lang="en-US" altLang="zh-CN" sz="2400" dirty="0">
                 <a:solidFill>
                   <a:srgbClr val="4747BA"/>
                 </a:solidFill>
                 <a:ea typeface="+mn-lt"/>
                 <a:cs typeface="Times New Roman" panose="02020603050405020304" charset="0"/>
               </a:rPr>
-              <a:t>设备</a:t>
+              <a:t>vs</a:t>
+            </a:r>
+            <a:r>
+              <a:rPr lang="zh-CN" altLang="en-US" sz="2400" dirty="0">
+                <a:solidFill>
+                  <a:srgbClr val="4747BA"/>
+                </a:solidFill>
+                <a:ea typeface="+mn-lt"/>
+                <a:cs typeface="Times New Roman" panose="02020603050405020304" charset="0"/>
+              </a:rPr>
+              <a:t>物理</a:t>
             </a:r>
             <a:endParaRPr lang="en-US" altLang="zh-CN" sz="2400" dirty="0">
               <a:solidFill>
@@ -15876,190 +16146,10 @@
       </p:sp>
       <p:sp>
         <p:nvSpPr>
-          <p:cNvPr id="5" name="文本框 4"/>
-          <p:cNvSpPr txBox="1"/>
-          <p:nvPr/>
-        </p:nvSpPr>
-        <p:spPr>
-          <a:xfrm>
-            <a:off x="385590" y="1576511"/>
-            <a:ext cx="6696883" cy="2461508"/>
-          </a:xfrm>
-          <a:prstGeom prst="rect">
-            <a:avLst/>
-          </a:prstGeom>
-          <a:noFill/>
-        </p:spPr>
-        <p:txBody>
-          <a:bodyPr wrap="square" rtlCol="0" anchor="t">
-            <a:spAutoFit/>
-          </a:bodyPr>
-          <a:lstStyle/>
-          <a:p>
-            <a:pPr marL="342900" indent="-342900">
-              <a:lnSpc>
-                <a:spcPct val="130000"/>
-              </a:lnSpc>
-              <a:buFont typeface="Wingdings" panose="05000000000000000000" charset="0"/>
-              <a:buChar char="q"/>
-            </a:pPr>
-            <a:r>
-              <a:rPr lang="en-US" altLang="zh-CN" sz="2000" dirty="0">
-                <a:latin typeface="宋体" panose="02010600030101010101" pitchFamily="2" charset="-122"/>
-                <a:ea typeface="宋体" panose="02010600030101010101" pitchFamily="2" charset="-122"/>
-                <a:sym typeface="+mn-ea"/>
-              </a:rPr>
-              <a:t>ZNS</a:t>
-            </a:r>
-            <a:r>
-              <a:rPr lang="zh-CN" altLang="en-US" sz="2000" dirty="0">
-                <a:latin typeface="宋体" panose="02010600030101010101" pitchFamily="2" charset="-122"/>
-                <a:ea typeface="宋体" panose="02010600030101010101" pitchFamily="2" charset="-122"/>
-                <a:sym typeface="+mn-ea"/>
-              </a:rPr>
-              <a:t>采用</a:t>
-            </a:r>
-            <a:r>
-              <a:rPr lang="en-US" altLang="zh-CN" sz="2000" dirty="0">
-                <a:latin typeface="宋体" panose="02010600030101010101" pitchFamily="2" charset="-122"/>
-                <a:ea typeface="宋体" panose="02010600030101010101" pitchFamily="2" charset="-122"/>
-                <a:sym typeface="+mn-ea"/>
-              </a:rPr>
-              <a:t>U.2</a:t>
-            </a:r>
-            <a:r>
-              <a:rPr lang="zh-CN" altLang="en-US" sz="2000" dirty="0">
-                <a:latin typeface="宋体" panose="02010600030101010101" pitchFamily="2" charset="-122"/>
-                <a:ea typeface="宋体" panose="02010600030101010101" pitchFamily="2" charset="-122"/>
-                <a:sym typeface="+mn-ea"/>
-              </a:rPr>
-              <a:t>接口，如右图</a:t>
-            </a:r>
-            <a:r>
-              <a:rPr lang="en-US" altLang="zh-CN" sz="2000" dirty="0">
-                <a:latin typeface="宋体" panose="02010600030101010101" pitchFamily="2" charset="-122"/>
-                <a:ea typeface="宋体" panose="02010600030101010101" pitchFamily="2" charset="-122"/>
-                <a:sym typeface="+mn-ea"/>
-              </a:rPr>
-              <a:t> </a:t>
-            </a:r>
-          </a:p>
-          <a:p>
-            <a:pPr marL="342900" indent="-342900">
-              <a:lnSpc>
-                <a:spcPct val="130000"/>
-              </a:lnSpc>
-              <a:buFont typeface="Wingdings" panose="05000000000000000000" charset="0"/>
-              <a:buChar char="q"/>
-            </a:pPr>
-            <a:r>
-              <a:rPr lang="zh-CN" altLang="en-US" sz="2000" dirty="0">
-                <a:latin typeface="宋体" panose="02010600030101010101" pitchFamily="2" charset="-122"/>
-                <a:ea typeface="宋体" panose="02010600030101010101" pitchFamily="2" charset="-122"/>
-                <a:sym typeface="+mn-ea"/>
-              </a:rPr>
-              <a:t>另外，初步测试了</a:t>
-            </a:r>
-            <a:r>
-              <a:rPr lang="en-US" altLang="zh-CN" sz="2000" dirty="0" err="1">
-                <a:latin typeface="宋体" panose="02010600030101010101" pitchFamily="2" charset="-122"/>
-                <a:ea typeface="宋体" panose="02010600030101010101" pitchFamily="2" charset="-122"/>
-                <a:sym typeface="+mn-ea"/>
-              </a:rPr>
-              <a:t>RocksDB</a:t>
-            </a:r>
-            <a:r>
-              <a:rPr lang="en-US" altLang="zh-CN" sz="2000" dirty="0">
-                <a:latin typeface="宋体" panose="02010600030101010101" pitchFamily="2" charset="-122"/>
-                <a:ea typeface="宋体" panose="02010600030101010101" pitchFamily="2" charset="-122"/>
-                <a:sym typeface="+mn-ea"/>
-              </a:rPr>
-              <a:t> + </a:t>
-            </a:r>
-            <a:r>
-              <a:rPr lang="en-US" altLang="zh-CN" sz="2000" dirty="0" err="1">
-                <a:latin typeface="宋体" panose="02010600030101010101" pitchFamily="2" charset="-122"/>
-                <a:ea typeface="宋体" panose="02010600030101010101" pitchFamily="2" charset="-122"/>
-                <a:sym typeface="+mn-ea"/>
-              </a:rPr>
-              <a:t>ZenFS</a:t>
-            </a:r>
-            <a:r>
-              <a:rPr lang="zh-CN" altLang="en-US" sz="2000" dirty="0">
-                <a:latin typeface="宋体" panose="02010600030101010101" pitchFamily="2" charset="-122"/>
-                <a:ea typeface="宋体" panose="02010600030101010101" pitchFamily="2" charset="-122"/>
-                <a:sym typeface="+mn-ea"/>
-              </a:rPr>
-              <a:t>的表现，与之前</a:t>
-            </a:r>
-            <a:r>
-              <a:rPr lang="en-US" altLang="zh-CN" sz="2000" dirty="0" err="1">
-                <a:latin typeface="宋体" panose="02010600030101010101" pitchFamily="2" charset="-122"/>
-                <a:ea typeface="宋体" panose="02010600030101010101" pitchFamily="2" charset="-122"/>
-                <a:sym typeface="+mn-ea"/>
-              </a:rPr>
-              <a:t>NVMevirt</a:t>
-            </a:r>
-            <a:r>
-              <a:rPr lang="zh-CN" altLang="en-US" sz="2000" dirty="0">
-                <a:latin typeface="宋体" panose="02010600030101010101" pitchFamily="2" charset="-122"/>
-                <a:ea typeface="宋体" panose="02010600030101010101" pitchFamily="2" charset="-122"/>
-                <a:sym typeface="+mn-ea"/>
-              </a:rPr>
-              <a:t>模拟结果相比，模拟器的延迟过低。我认为原因在于它是内核模块实现，可能只体现了主机</a:t>
-            </a:r>
-            <a:r>
-              <a:rPr lang="en-US" altLang="zh-CN" sz="2000" dirty="0">
-                <a:latin typeface="宋体" panose="02010600030101010101" pitchFamily="2" charset="-122"/>
-                <a:ea typeface="宋体" panose="02010600030101010101" pitchFamily="2" charset="-122"/>
-                <a:sym typeface="+mn-ea"/>
-              </a:rPr>
-              <a:t>l/O</a:t>
-            </a:r>
-            <a:r>
-              <a:rPr lang="zh-CN" altLang="en-US" sz="2000" dirty="0">
-                <a:latin typeface="宋体" panose="02010600030101010101" pitchFamily="2" charset="-122"/>
-                <a:ea typeface="宋体" panose="02010600030101010101" pitchFamily="2" charset="-122"/>
-                <a:sym typeface="+mn-ea"/>
-              </a:rPr>
-              <a:t>栈的延迟。</a:t>
-            </a:r>
-            <a:endParaRPr lang="en-US" altLang="zh-CN" sz="2000" dirty="0">
-              <a:latin typeface="宋体" panose="02010600030101010101" pitchFamily="2" charset="-122"/>
-              <a:ea typeface="宋体" panose="02010600030101010101" pitchFamily="2" charset="-122"/>
-              <a:sym typeface="+mn-ea"/>
-            </a:endParaRPr>
-          </a:p>
-          <a:p>
-            <a:pPr marL="342900" indent="-342900">
-              <a:lnSpc>
-                <a:spcPct val="130000"/>
-              </a:lnSpc>
-              <a:buFont typeface="Wingdings" panose="05000000000000000000" charset="0"/>
-              <a:buChar char="q"/>
-            </a:pPr>
-            <a:r>
-              <a:rPr lang="zh-CN" altLang="en-US" sz="2000" dirty="0">
-                <a:latin typeface="宋体" panose="02010600030101010101" pitchFamily="2" charset="-122"/>
-                <a:ea typeface="宋体" panose="02010600030101010101" pitchFamily="2" charset="-122"/>
-                <a:sym typeface="+mn-ea"/>
-              </a:rPr>
-              <a:t>连接到服务器后，查看块设备，如右下图所示</a:t>
-            </a:r>
-            <a:endParaRPr lang="en-US" altLang="zh-CN" sz="2000" dirty="0">
-              <a:latin typeface="宋体" panose="02010600030101010101" pitchFamily="2" charset="-122"/>
-              <a:ea typeface="宋体" panose="02010600030101010101" pitchFamily="2" charset="-122"/>
-              <a:sym typeface="+mn-ea"/>
-            </a:endParaRPr>
-          </a:p>
-        </p:txBody>
-      </p:sp>
-      <p:sp>
-        <p:nvSpPr>
-          <p:cNvPr id="7" name="Fußzeilenplatzhalter 4">
+          <p:cNvPr id="10" name="Fußzeilenplatzhalter 4">
             <a:extLst>
               <a:ext uri="{FF2B5EF4-FFF2-40B4-BE49-F238E27FC236}">
-                <a16:creationId xmlns:a16="http://schemas.microsoft.com/office/drawing/2014/main" id="{293457A3-1637-3737-9B53-1CF17294975F}"/>
+                <a16:creationId xmlns:a16="http://schemas.microsoft.com/office/drawing/2014/main" id="{41291BC8-BAF3-496D-6C37-8B6EEABE8583}"/>
               </a:ext>
             </a:extLst>
           </p:cNvPr>
@@ -16107,12 +16197,423 @@
           </a:p>
         </p:txBody>
       </p:sp>
+      <p:sp>
+        <p:nvSpPr>
+          <p:cNvPr id="21" name="文本框 20">
+            <a:extLst>
+              <a:ext uri="{FF2B5EF4-FFF2-40B4-BE49-F238E27FC236}">
+                <a16:creationId xmlns:a16="http://schemas.microsoft.com/office/drawing/2014/main" id="{B73F8172-AEE1-4884-93B9-03D244E3AE0F}"/>
+              </a:ext>
+            </a:extLst>
+          </p:cNvPr>
+          <p:cNvSpPr txBox="1"/>
+          <p:nvPr/>
+        </p:nvSpPr>
+        <p:spPr>
+          <a:xfrm>
+            <a:off x="512720" y="3163584"/>
+            <a:ext cx="3950423" cy="307777"/>
+          </a:xfrm>
+          <a:prstGeom prst="rect">
+            <a:avLst/>
+          </a:prstGeom>
+          <a:noFill/>
+        </p:spPr>
+        <p:txBody>
+          <a:bodyPr wrap="square">
+            <a:spAutoFit/>
+          </a:bodyPr>
+          <a:lstStyle/>
+          <a:p>
+            <a:r>
+              <a:rPr lang="zh-CN" altLang="en-US" sz="1400" dirty="0"/>
+              <a:t>写入负载，</a:t>
+            </a:r>
+            <a:r>
+              <a:rPr lang="en-US" altLang="zh-CN" sz="1400" dirty="0" err="1"/>
+              <a:t>Blocksize</a:t>
+            </a:r>
+            <a:r>
+              <a:rPr lang="en-US" altLang="zh-CN" sz="1400" dirty="0"/>
+              <a:t> = 64k</a:t>
+            </a:r>
+            <a:r>
+              <a:rPr lang="zh-CN" altLang="en-US" sz="1400" dirty="0"/>
+              <a:t>，</a:t>
+            </a:r>
+            <a:r>
+              <a:rPr lang="en-US" altLang="zh-CN" sz="1400" dirty="0" err="1"/>
+              <a:t>Num_threads</a:t>
+            </a:r>
+            <a:r>
+              <a:rPr lang="en-US" altLang="zh-CN" sz="1400" dirty="0"/>
+              <a:t> = 16</a:t>
+            </a:r>
+            <a:endParaRPr lang="zh-CN" altLang="en-US" sz="1400" dirty="0"/>
+          </a:p>
+        </p:txBody>
+      </p:sp>
       <p:pic>
         <p:nvPicPr>
-          <p:cNvPr id="8" name="图片 7">
+          <p:cNvPr id="22" name="图形 49">
             <a:extLst>
               <a:ext uri="{FF2B5EF4-FFF2-40B4-BE49-F238E27FC236}">
-                <a16:creationId xmlns:a16="http://schemas.microsoft.com/office/drawing/2014/main" id="{E6F57F7C-C43A-4F29-54A3-9E2A41811FC0}"/>
+                <a16:creationId xmlns:a16="http://schemas.microsoft.com/office/drawing/2014/main" id="{0BF4E7E1-C905-40AF-941A-1D77A1B13FDF}"/>
+              </a:ext>
+            </a:extLst>
+          </p:cNvPr>
+          <p:cNvPicPr/>
+          <p:nvPr/>
+        </p:nvPicPr>
+        <p:blipFill>
+          <a:blip r:embed="rId5">
+            <a:extLst>
+              <a:ext uri="{96DAC541-7B7A-43D3-8B79-37D633B846F1}">
+                <asvg:svgBlip xmlns:asvg="http://schemas.microsoft.com/office/drawing/2016/SVG/main" r:embed="rId6"/>
+              </a:ext>
+            </a:extLst>
+          </a:blip>
+          <a:stretch>
+            <a:fillRect/>
+          </a:stretch>
+        </p:blipFill>
+        <p:spPr>
+          <a:xfrm>
+            <a:off x="5881256" y="1329393"/>
+            <a:ext cx="5798024" cy="3364429"/>
+          </a:xfrm>
+          <a:prstGeom prst="rect">
+            <a:avLst/>
+          </a:prstGeom>
+        </p:spPr>
+      </p:pic>
+      <p:sp>
+        <p:nvSpPr>
+          <p:cNvPr id="25" name="文本框 24">
+            <a:extLst>
+              <a:ext uri="{FF2B5EF4-FFF2-40B4-BE49-F238E27FC236}">
+                <a16:creationId xmlns:a16="http://schemas.microsoft.com/office/drawing/2014/main" id="{801AC954-86E6-4105-ACEF-EC33F1A1AC57}"/>
+              </a:ext>
+            </a:extLst>
+          </p:cNvPr>
+          <p:cNvSpPr txBox="1"/>
+          <p:nvPr/>
+        </p:nvSpPr>
+        <p:spPr>
+          <a:xfrm>
+            <a:off x="474408" y="1630561"/>
+            <a:ext cx="3878304" cy="338554"/>
+          </a:xfrm>
+          <a:prstGeom prst="rect">
+            <a:avLst/>
+          </a:prstGeom>
+          <a:noFill/>
+        </p:spPr>
+        <p:txBody>
+          <a:bodyPr wrap="square">
+            <a:spAutoFit/>
+          </a:bodyPr>
+          <a:lstStyle/>
+          <a:p>
+            <a:r>
+              <a:rPr lang="en-US" altLang="zh-CN" sz="1600" kern="100" dirty="0">
+                <a:effectLst/>
+                <a:latin typeface="Times New Roman" panose="02020603050405020304" pitchFamily="18" charset="0"/>
+                <a:ea typeface="宋体" panose="02010600030101010101" pitchFamily="2" charset="-122"/>
+                <a:cs typeface="Times New Roman" panose="02020603050405020304" pitchFamily="18" charset="0"/>
+              </a:rPr>
+              <a:t>1.   </a:t>
+            </a:r>
+            <a:r>
+              <a:rPr lang="zh-CN" altLang="en-US" sz="1600" kern="100" dirty="0">
+                <a:effectLst/>
+                <a:latin typeface="Times New Roman" panose="02020603050405020304" pitchFamily="18" charset="0"/>
+                <a:ea typeface="宋体" panose="02010600030101010101" pitchFamily="2" charset="-122"/>
+                <a:cs typeface="Times New Roman" panose="02020603050405020304" pitchFamily="18" charset="0"/>
+              </a:rPr>
+              <a:t>在</a:t>
+            </a:r>
+            <a:r>
+              <a:rPr lang="en-US" altLang="zh-CN" sz="1600" kern="100" dirty="0">
+                <a:effectLst/>
+                <a:latin typeface="Times New Roman" panose="02020603050405020304" pitchFamily="18" charset="0"/>
+                <a:ea typeface="宋体" panose="02010600030101010101" pitchFamily="2" charset="-122"/>
+                <a:cs typeface="Times New Roman" panose="02020603050405020304" pitchFamily="18" charset="0"/>
+              </a:rPr>
+              <a:t>FIO</a:t>
+            </a:r>
+            <a:r>
+              <a:rPr lang="zh-CN" altLang="en-US" sz="1600" kern="100" dirty="0">
+                <a:effectLst/>
+                <a:latin typeface="Times New Roman" panose="02020603050405020304" pitchFamily="18" charset="0"/>
+                <a:ea typeface="宋体" panose="02010600030101010101" pitchFamily="2" charset="-122"/>
+                <a:cs typeface="Times New Roman" panose="02020603050405020304" pitchFamily="18" charset="0"/>
+              </a:rPr>
+              <a:t>基准测试中，</a:t>
+            </a:r>
+            <a:r>
+              <a:rPr lang="zh-CN" altLang="zh-CN" sz="1600" kern="100" dirty="0">
+                <a:effectLst/>
+                <a:latin typeface="Times New Roman" panose="02020603050405020304" pitchFamily="18" charset="0"/>
+                <a:ea typeface="宋体" panose="02010600030101010101" pitchFamily="2" charset="-122"/>
+                <a:cs typeface="Times New Roman" panose="02020603050405020304" pitchFamily="18" charset="0"/>
+              </a:rPr>
+              <a:t>模拟器的误差较大：</a:t>
+            </a:r>
+            <a:endParaRPr lang="zh-CN" altLang="en-US" sz="1600" dirty="0"/>
+          </a:p>
+        </p:txBody>
+      </p:sp>
+      <p:sp>
+        <p:nvSpPr>
+          <p:cNvPr id="28" name="文本框 27">
+            <a:extLst>
+              <a:ext uri="{FF2B5EF4-FFF2-40B4-BE49-F238E27FC236}">
+                <a16:creationId xmlns:a16="http://schemas.microsoft.com/office/drawing/2014/main" id="{F28D8F15-5FC8-4447-A3BB-6F79F143AAC5}"/>
+              </a:ext>
+            </a:extLst>
+          </p:cNvPr>
+          <p:cNvSpPr txBox="1"/>
+          <p:nvPr/>
+        </p:nvSpPr>
+        <p:spPr>
+          <a:xfrm>
+            <a:off x="385590" y="4888886"/>
+            <a:ext cx="11172673" cy="870751"/>
+          </a:xfrm>
+          <a:prstGeom prst="rect">
+            <a:avLst/>
+          </a:prstGeom>
+          <a:noFill/>
+        </p:spPr>
+        <p:txBody>
+          <a:bodyPr wrap="square">
+            <a:spAutoFit/>
+          </a:bodyPr>
+          <a:lstStyle/>
+          <a:p>
+            <a:pPr indent="266700" algn="just">
+              <a:lnSpc>
+                <a:spcPct val="150000"/>
+              </a:lnSpc>
+            </a:pPr>
+            <a:r>
+              <a:rPr lang="zh-CN" altLang="zh-CN" kern="100" dirty="0">
+                <a:latin typeface="Times New Roman" panose="02020603050405020304" pitchFamily="18" charset="0"/>
+                <a:ea typeface="宋体" panose="02010600030101010101" pitchFamily="2" charset="-122"/>
+              </a:rPr>
+              <a:t>可以观察到，尽管二者数值上差距较大，但是</a:t>
+            </a:r>
+            <a:r>
+              <a:rPr lang="en-US" altLang="zh-CN" kern="100" dirty="0" err="1">
+                <a:latin typeface="Times New Roman" panose="02020603050405020304" pitchFamily="18" charset="0"/>
+                <a:ea typeface="宋体" panose="02010600030101010101" pitchFamily="2" charset="-122"/>
+              </a:rPr>
+              <a:t>NVMeVirt</a:t>
+            </a:r>
+            <a:r>
+              <a:rPr lang="zh-CN" altLang="zh-CN" kern="100" dirty="0">
+                <a:latin typeface="Times New Roman" panose="02020603050405020304" pitchFamily="18" charset="0"/>
+                <a:ea typeface="宋体" panose="02010600030101010101" pitchFamily="2" charset="-122"/>
+              </a:rPr>
+              <a:t>的吞吐量随时间变化的趋势与真实设备基本一致，</a:t>
+            </a:r>
+            <a:r>
+              <a:rPr lang="zh-CN" altLang="en-US" kern="100" dirty="0">
+                <a:latin typeface="Times New Roman" panose="02020603050405020304" pitchFamily="18" charset="0"/>
+                <a:ea typeface="宋体" panose="02010600030101010101" pitchFamily="2" charset="-122"/>
+              </a:rPr>
+              <a:t>使用模拟器能</a:t>
+            </a:r>
+            <a:r>
+              <a:rPr lang="zh-CN" altLang="zh-CN" kern="100" dirty="0">
+                <a:latin typeface="Times New Roman" panose="02020603050405020304" pitchFamily="18" charset="0"/>
+                <a:ea typeface="宋体" panose="02010600030101010101" pitchFamily="2" charset="-122"/>
+              </a:rPr>
+              <a:t>观察设备的性能波动情况，</a:t>
+            </a:r>
+            <a:r>
+              <a:rPr lang="zh-CN" altLang="en-US" kern="100" dirty="0">
+                <a:latin typeface="Times New Roman" panose="02020603050405020304" pitchFamily="18" charset="0"/>
+                <a:ea typeface="宋体" panose="02010600030101010101" pitchFamily="2" charset="-122"/>
+              </a:rPr>
+              <a:t>能够在一定程度上反应</a:t>
+            </a:r>
+            <a:r>
+              <a:rPr lang="zh-CN" altLang="zh-CN" kern="100" dirty="0">
+                <a:latin typeface="Times New Roman" panose="02020603050405020304" pitchFamily="18" charset="0"/>
+                <a:ea typeface="宋体" panose="02010600030101010101" pitchFamily="2" charset="-122"/>
+              </a:rPr>
+              <a:t>程序中的性能瓶颈。</a:t>
+            </a:r>
+          </a:p>
+        </p:txBody>
+      </p:sp>
+      <p:sp>
+        <p:nvSpPr>
+          <p:cNvPr id="29" name="文本框 28">
+            <a:extLst>
+              <a:ext uri="{FF2B5EF4-FFF2-40B4-BE49-F238E27FC236}">
+                <a16:creationId xmlns:a16="http://schemas.microsoft.com/office/drawing/2014/main" id="{493FB669-2C55-460D-9384-8CFF4A90B574}"/>
+              </a:ext>
+            </a:extLst>
+          </p:cNvPr>
+          <p:cNvSpPr txBox="1"/>
+          <p:nvPr/>
+        </p:nvSpPr>
+        <p:spPr>
+          <a:xfrm>
+            <a:off x="512720" y="3710472"/>
+            <a:ext cx="4654366" cy="584775"/>
+          </a:xfrm>
+          <a:prstGeom prst="rect">
+            <a:avLst/>
+          </a:prstGeom>
+          <a:noFill/>
+        </p:spPr>
+        <p:txBody>
+          <a:bodyPr wrap="square">
+            <a:spAutoFit/>
+          </a:bodyPr>
+          <a:lstStyle/>
+          <a:p>
+            <a:r>
+              <a:rPr lang="en-US" altLang="zh-CN" sz="1600" kern="100" dirty="0">
+                <a:effectLst/>
+                <a:latin typeface="宋体" panose="02010600030101010101" pitchFamily="2" charset="-122"/>
+                <a:ea typeface="宋体" panose="02010600030101010101" pitchFamily="2" charset="-122"/>
+              </a:rPr>
+              <a:t>2. </a:t>
+            </a:r>
+            <a:r>
+              <a:rPr lang="zh-CN" altLang="en-US" sz="1600" kern="100" dirty="0">
+                <a:effectLst/>
+                <a:latin typeface="宋体" panose="02010600030101010101" pitchFamily="2" charset="-122"/>
+                <a:ea typeface="宋体" panose="02010600030101010101" pitchFamily="2" charset="-122"/>
+              </a:rPr>
+              <a:t>基于</a:t>
+            </a:r>
+            <a:r>
+              <a:rPr lang="en-US" altLang="zh-CN" sz="1600" kern="100" dirty="0" err="1">
+                <a:effectLst/>
+                <a:latin typeface="Times New Roman" panose="02020603050405020304" pitchFamily="18" charset="0"/>
+                <a:ea typeface="宋体" panose="02010600030101010101" pitchFamily="2" charset="-122"/>
+                <a:cs typeface="Times New Roman" panose="02020603050405020304" pitchFamily="18" charset="0"/>
+              </a:rPr>
+              <a:t>RocksDB</a:t>
+            </a:r>
+            <a:r>
+              <a:rPr lang="en-US" altLang="zh-CN" sz="1600" kern="100" dirty="0" err="1">
+                <a:latin typeface="Times New Roman" panose="02020603050405020304" pitchFamily="18" charset="0"/>
+                <a:ea typeface="宋体" panose="02010600030101010101" pitchFamily="2" charset="-122"/>
+                <a:cs typeface="Times New Roman" panose="02020603050405020304" pitchFamily="18" charset="0"/>
+              </a:rPr>
+              <a:t>+ZenFS</a:t>
+            </a:r>
+            <a:r>
+              <a:rPr lang="zh-CN" altLang="zh-CN" sz="1600" kern="100" dirty="0">
+                <a:effectLst/>
+                <a:latin typeface="宋体" panose="02010600030101010101" pitchFamily="2" charset="-122"/>
+                <a:ea typeface="宋体" panose="02010600030101010101" pitchFamily="2" charset="-122"/>
+                <a:cs typeface="Times New Roman" panose="02020603050405020304" pitchFamily="18" charset="0"/>
+              </a:rPr>
+              <a:t>分别对模拟和物理环境进行测试，记录</a:t>
+            </a:r>
+            <a:r>
+              <a:rPr lang="zh-CN" altLang="zh-CN" sz="1600" kern="100" dirty="0">
+                <a:latin typeface="宋体" panose="02010600030101010101" pitchFamily="2" charset="-122"/>
+                <a:ea typeface="宋体" panose="02010600030101010101" pitchFamily="2" charset="-122"/>
+                <a:cs typeface="Times New Roman" panose="02020603050405020304" pitchFamily="18" charset="0"/>
+              </a:rPr>
+              <a:t>吞吐量随时间的变化</a:t>
+            </a:r>
+            <a:r>
+              <a:rPr lang="zh-CN" altLang="en-US" sz="1600" kern="100" dirty="0">
+                <a:latin typeface="宋体" panose="02010600030101010101" pitchFamily="2" charset="-122"/>
+                <a:ea typeface="宋体" panose="02010600030101010101" pitchFamily="2" charset="-122"/>
+                <a:cs typeface="Times New Roman" panose="02020603050405020304" pitchFamily="18" charset="0"/>
+              </a:rPr>
+              <a:t>如右图所示。</a:t>
+            </a:r>
+          </a:p>
+        </p:txBody>
+      </p:sp>
+      <p:sp>
+        <p:nvSpPr>
+          <p:cNvPr id="30" name="文本框 29">
+            <a:extLst>
+              <a:ext uri="{FF2B5EF4-FFF2-40B4-BE49-F238E27FC236}">
+                <a16:creationId xmlns:a16="http://schemas.microsoft.com/office/drawing/2014/main" id="{282D8D65-1887-4B91-97ED-5DABC4EEBA49}"/>
+              </a:ext>
+            </a:extLst>
+          </p:cNvPr>
+          <p:cNvSpPr txBox="1"/>
+          <p:nvPr/>
+        </p:nvSpPr>
+        <p:spPr>
+          <a:xfrm>
+            <a:off x="281680" y="299000"/>
+            <a:ext cx="6798981" cy="535531"/>
+          </a:xfrm>
+          <a:prstGeom prst="rect">
+            <a:avLst/>
+          </a:prstGeom>
+          <a:noFill/>
+        </p:spPr>
+        <p:txBody>
+          <a:bodyPr wrap="square" rtlCol="0">
+            <a:spAutoFit/>
+          </a:bodyPr>
+          <a:lstStyle/>
+          <a:p>
+            <a:pPr>
+              <a:lnSpc>
+                <a:spcPct val="90000"/>
+              </a:lnSpc>
+              <a:spcBef>
+                <a:spcPts val="1000"/>
+              </a:spcBef>
+              <a:defRPr/>
+            </a:pPr>
+            <a:r>
+              <a:rPr lang="en-US" altLang="zh-CN" sz="3200" b="1" dirty="0">
+                <a:solidFill>
+                  <a:srgbClr val="4747BA"/>
+                </a:solidFill>
+                <a:latin typeface="Constantia" panose="02030602050306030303" pitchFamily="18" charset="0"/>
+                <a:ea typeface="腾讯体 W3" panose="020C04030202040F0204" pitchFamily="34" charset="-122"/>
+                <a:cs typeface="Times" panose="02020603050405020304" pitchFamily="18" charset="0"/>
+              </a:rPr>
+              <a:t> </a:t>
+            </a:r>
+            <a:r>
+              <a:rPr lang="zh-CN" altLang="en-US" sz="3200" b="1" dirty="0">
+                <a:solidFill>
+                  <a:srgbClr val="4747BA"/>
+                </a:solidFill>
+                <a:latin typeface="Constantia" panose="02030602050306030303" pitchFamily="18" charset="0"/>
+                <a:ea typeface="腾讯体 W3" panose="020C04030202040F0204" pitchFamily="34" charset="-122"/>
+                <a:cs typeface="Times" panose="02020603050405020304" pitchFamily="18" charset="0"/>
+              </a:rPr>
+              <a:t>实验评估</a:t>
+            </a:r>
+            <a:endParaRPr lang="zh-CN" altLang="en-US" sz="3600" b="1" dirty="0">
+              <a:solidFill>
+                <a:srgbClr val="4747BA"/>
+              </a:solidFill>
+              <a:latin typeface="Constantia" panose="02030602050306030303" pitchFamily="18" charset="0"/>
+              <a:ea typeface="腾讯体 W3" panose="020C04030202040F0204" pitchFamily="34" charset="-122"/>
+              <a:cs typeface="Times" panose="02020603050405020304" pitchFamily="18" charset="0"/>
+            </a:endParaRPr>
+          </a:p>
+        </p:txBody>
+      </p:sp>
+      <p:pic>
+        <p:nvPicPr>
+          <p:cNvPr id="4" name="图片 3">
+            <a:extLst>
+              <a:ext uri="{FF2B5EF4-FFF2-40B4-BE49-F238E27FC236}">
+                <a16:creationId xmlns:a16="http://schemas.microsoft.com/office/drawing/2014/main" id="{3E238B64-0684-43EC-A999-BC612397F3E5}"/>
               </a:ext>
             </a:extLst>
           </p:cNvPr>
@@ -16122,173 +16623,25 @@
           <p:nvPr/>
         </p:nvPicPr>
         <p:blipFill>
-          <a:blip r:embed="rId5" cstate="print">
-            <a:extLst>
-              <a:ext uri="{28A0092B-C50C-407E-A947-70E740481C1C}">
-                <a14:useLocalDpi xmlns:a14="http://schemas.microsoft.com/office/drawing/2010/main" val="0"/>
-              </a:ext>
-            </a:extLst>
-          </a:blip>
+          <a:blip r:embed="rId7"/>
           <a:stretch>
             <a:fillRect/>
           </a:stretch>
         </p:blipFill>
         <p:spPr>
           <a:xfrm>
-            <a:off x="9985299" y="1248081"/>
-            <a:ext cx="1598233" cy="2243013"/>
+            <a:off x="512720" y="1966116"/>
+            <a:ext cx="4062100" cy="1124504"/>
           </a:xfrm>
           <a:prstGeom prst="rect">
             <a:avLst/>
           </a:prstGeom>
         </p:spPr>
       </p:pic>
-      <p:pic>
-        <p:nvPicPr>
-          <p:cNvPr id="11" name="图片 10">
-            <a:extLst>
-              <a:ext uri="{FF2B5EF4-FFF2-40B4-BE49-F238E27FC236}">
-                <a16:creationId xmlns:a16="http://schemas.microsoft.com/office/drawing/2014/main" id="{B6DE7B69-1B2D-65EE-4842-C041A2060456}"/>
-              </a:ext>
-            </a:extLst>
-          </p:cNvPr>
-          <p:cNvPicPr>
-            <a:picLocks noChangeAspect="1"/>
-          </p:cNvPicPr>
-          <p:nvPr/>
-        </p:nvPicPr>
-        <p:blipFill>
-          <a:blip r:embed="rId6" cstate="print">
-            <a:extLst>
-              <a:ext uri="{28A0092B-C50C-407E-A947-70E740481C1C}">
-                <a14:useLocalDpi xmlns:a14="http://schemas.microsoft.com/office/drawing/2010/main" val="0"/>
-              </a:ext>
-            </a:extLst>
-          </a:blip>
-          <a:stretch>
-            <a:fillRect/>
-          </a:stretch>
-        </p:blipFill>
-        <p:spPr>
-          <a:xfrm>
-            <a:off x="7743977" y="1248799"/>
-            <a:ext cx="1693704" cy="2258272"/>
-          </a:xfrm>
-          <a:prstGeom prst="rect">
-            <a:avLst/>
-          </a:prstGeom>
-        </p:spPr>
-      </p:pic>
-      <p:pic>
-        <p:nvPicPr>
-          <p:cNvPr id="27" name="图片 26">
-            <a:extLst>
-              <a:ext uri="{FF2B5EF4-FFF2-40B4-BE49-F238E27FC236}">
-                <a16:creationId xmlns:a16="http://schemas.microsoft.com/office/drawing/2014/main" id="{777837E1-82E7-66D5-866F-6FEAA4F28829}"/>
-              </a:ext>
-            </a:extLst>
-          </p:cNvPr>
-          <p:cNvPicPr>
-            <a:picLocks noChangeAspect="1"/>
-          </p:cNvPicPr>
-          <p:nvPr/>
-        </p:nvPicPr>
-        <p:blipFill>
-          <a:blip r:embed="rId7">
-            <a:extLst>
-              <a:ext uri="{28A0092B-C50C-407E-A947-70E740481C1C}">
-                <a14:useLocalDpi xmlns:a14="http://schemas.microsoft.com/office/drawing/2010/main" val="0"/>
-              </a:ext>
-            </a:extLst>
-          </a:blip>
-          <a:stretch>
-            <a:fillRect/>
-          </a:stretch>
-        </p:blipFill>
-        <p:spPr>
-          <a:xfrm>
-            <a:off x="6096000" y="4027206"/>
-            <a:ext cx="5517358" cy="2270957"/>
-          </a:xfrm>
-          <a:prstGeom prst="rect">
-            <a:avLst/>
-          </a:prstGeom>
-        </p:spPr>
-      </p:pic>
-      <p:sp>
-        <p:nvSpPr>
-          <p:cNvPr id="21" name="文本框 20">
-            <a:extLst>
-              <a:ext uri="{FF2B5EF4-FFF2-40B4-BE49-F238E27FC236}">
-                <a16:creationId xmlns:a16="http://schemas.microsoft.com/office/drawing/2014/main" id="{A6AB728D-84D2-4469-AF28-191BBA7291C6}"/>
-              </a:ext>
-            </a:extLst>
-          </p:cNvPr>
-          <p:cNvSpPr txBox="1"/>
-          <p:nvPr/>
-        </p:nvSpPr>
-        <p:spPr>
-          <a:xfrm>
-            <a:off x="281680" y="299000"/>
-            <a:ext cx="6798981" cy="535531"/>
-          </a:xfrm>
-          <a:prstGeom prst="rect">
-            <a:avLst/>
-          </a:prstGeom>
-          <a:noFill/>
-        </p:spPr>
-        <p:txBody>
-          <a:bodyPr wrap="square" rtlCol="0">
-            <a:spAutoFit/>
-          </a:bodyPr>
-          <a:lstStyle/>
-          <a:p>
-            <a:pPr>
-              <a:lnSpc>
-                <a:spcPct val="90000"/>
-              </a:lnSpc>
-              <a:spcBef>
-                <a:spcPts val="1000"/>
-              </a:spcBef>
-              <a:defRPr/>
-            </a:pPr>
-            <a:r>
-              <a:rPr lang="en-US" altLang="zh-CN" sz="3200" b="1" dirty="0">
-                <a:solidFill>
-                  <a:srgbClr val="4747BA"/>
-                </a:solidFill>
-                <a:latin typeface="Constantia" panose="02030602050306030303" pitchFamily="18" charset="0"/>
-                <a:ea typeface="腾讯体 W3" panose="020C04030202040F0204" pitchFamily="34" charset="-122"/>
-                <a:cs typeface="Times" panose="02020603050405020304" pitchFamily="18" charset="0"/>
-              </a:rPr>
-              <a:t> </a:t>
-            </a:r>
-            <a:r>
-              <a:rPr lang="zh-CN" altLang="en-US" sz="3200" b="1" dirty="0">
-                <a:solidFill>
-                  <a:srgbClr val="4747BA"/>
-                </a:solidFill>
-                <a:latin typeface="Constantia" panose="02030602050306030303" pitchFamily="18" charset="0"/>
-                <a:ea typeface="腾讯体 W3" panose="020C04030202040F0204" pitchFamily="34" charset="-122"/>
-                <a:cs typeface="Times" panose="02020603050405020304" pitchFamily="18" charset="0"/>
-              </a:rPr>
-              <a:t>实验平台</a:t>
-            </a:r>
-            <a:endParaRPr lang="zh-CN" altLang="en-US" sz="3600" b="1" dirty="0">
-              <a:solidFill>
-                <a:srgbClr val="4747BA"/>
-              </a:solidFill>
-              <a:latin typeface="Constantia" panose="02030602050306030303" pitchFamily="18" charset="0"/>
-              <a:ea typeface="腾讯体 W3" panose="020C04030202040F0204" pitchFamily="34" charset="-122"/>
-              <a:cs typeface="Times" panose="02020603050405020304" pitchFamily="18" charset="0"/>
-            </a:endParaRPr>
-          </a:p>
-        </p:txBody>
-      </p:sp>
     </p:spTree>
     <p:extLst>
       <p:ext uri="{BB962C8B-B14F-4D97-AF65-F5344CB8AC3E}">
-        <p14:creationId xmlns:p14="http://schemas.microsoft.com/office/powerpoint/2010/main" val="3562333484"/>
+        <p14:creationId xmlns:p14="http://schemas.microsoft.com/office/powerpoint/2010/main" val="1518962869"/>
       </p:ext>
     </p:extLst>
   </p:cSld>
@@ -16746,7 +17099,7 @@
         </p:nvSpPr>
         <p:spPr>
           <a:xfrm>
-            <a:off x="474408" y="1049607"/>
+            <a:off x="440055" y="1269949"/>
             <a:ext cx="6951980" cy="460375"/>
           </a:xfrm>
           <a:prstGeom prst="rect">
@@ -16768,7 +17121,7 @@
                 <a:ea typeface="+mn-lt"/>
                 <a:cs typeface="Times New Roman" panose="02020603050405020304" charset="0"/>
               </a:rPr>
-              <a:t>模拟</a:t>
+              <a:t>单</a:t>
             </a:r>
             <a:r>
               <a:rPr lang="en-US" altLang="zh-CN" sz="2400" dirty="0">
@@ -16778,7 +17131,7 @@
                 <a:ea typeface="+mn-lt"/>
                 <a:cs typeface="Times New Roman" panose="02020603050405020304" charset="0"/>
               </a:rPr>
-              <a:t>vs</a:t>
+              <a:t>Zone</a:t>
             </a:r>
             <a:r>
               <a:rPr lang="zh-CN" altLang="en-US" sz="2400" dirty="0">
@@ -16788,7 +17141,7 @@
                 <a:ea typeface="+mn-lt"/>
                 <a:cs typeface="Times New Roman" panose="02020603050405020304" charset="0"/>
               </a:rPr>
-              <a:t>物理</a:t>
+              <a:t>写入测试</a:t>
             </a:r>
             <a:endParaRPr lang="en-US" altLang="zh-CN" sz="2400" dirty="0">
               <a:solidFill>
@@ -16853,68 +17206,12 @@
           </a:p>
         </p:txBody>
       </p:sp>
-      <p:sp>
-        <p:nvSpPr>
-          <p:cNvPr id="21" name="文本框 20">
+      <p:pic>
+        <p:nvPicPr>
+          <p:cNvPr id="16" name="图形 7">
             <a:extLst>
               <a:ext uri="{FF2B5EF4-FFF2-40B4-BE49-F238E27FC236}">
-                <a16:creationId xmlns:a16="http://schemas.microsoft.com/office/drawing/2014/main" id="{B73F8172-AEE1-4884-93B9-03D244E3AE0F}"/>
-              </a:ext>
-            </a:extLst>
-          </p:cNvPr>
-          <p:cNvSpPr txBox="1"/>
-          <p:nvPr/>
-        </p:nvSpPr>
-        <p:spPr>
-          <a:xfrm>
-            <a:off x="474408" y="2902591"/>
-            <a:ext cx="5012858" cy="307777"/>
-          </a:xfrm>
-          <a:prstGeom prst="rect">
-            <a:avLst/>
-          </a:prstGeom>
-          <a:noFill/>
-        </p:spPr>
-        <p:txBody>
-          <a:bodyPr wrap="square">
-            <a:spAutoFit/>
-          </a:bodyPr>
-          <a:lstStyle/>
-          <a:p>
-            <a:r>
-              <a:rPr lang="zh-CN" altLang="en-US" sz="1400" dirty="0"/>
-              <a:t>写入负载，</a:t>
-            </a:r>
-            <a:r>
-              <a:rPr lang="en-US" altLang="zh-CN" sz="1400" dirty="0" err="1"/>
-              <a:t>Blocksize</a:t>
-            </a:r>
-            <a:r>
-              <a:rPr lang="en-US" altLang="zh-CN" sz="1400" dirty="0"/>
-              <a:t> = 64k</a:t>
-            </a:r>
-            <a:r>
-              <a:rPr lang="zh-CN" altLang="en-US" sz="1400" dirty="0"/>
-              <a:t>，</a:t>
-            </a:r>
-            <a:r>
-              <a:rPr lang="en-US" altLang="zh-CN" sz="1400" dirty="0" err="1"/>
-              <a:t>Num_threads</a:t>
-            </a:r>
-            <a:r>
-              <a:rPr lang="en-US" altLang="zh-CN" sz="1400" dirty="0"/>
-              <a:t> = 16</a:t>
-            </a:r>
-            <a:endParaRPr lang="zh-CN" altLang="en-US" sz="1400" dirty="0"/>
-          </a:p>
-        </p:txBody>
-      </p:sp>
-      <p:pic>
-        <p:nvPicPr>
-          <p:cNvPr id="22" name="图形 49">
-            <a:extLst>
-              <a:ext uri="{FF2B5EF4-FFF2-40B4-BE49-F238E27FC236}">
-                <a16:creationId xmlns:a16="http://schemas.microsoft.com/office/drawing/2014/main" id="{0BF4E7E1-C905-40AF-941A-1D77A1B13FDF}"/>
+                <a16:creationId xmlns:a16="http://schemas.microsoft.com/office/drawing/2014/main" id="{799610EE-4E5C-45A6-BD40-2877F4D9D982}"/>
               </a:ext>
             </a:extLst>
           </p:cNvPr>
@@ -16935,8 +17232,8 @@
         </p:blipFill>
         <p:spPr>
           <a:xfrm>
-            <a:off x="5881256" y="1329393"/>
-            <a:ext cx="5798024" cy="3364429"/>
+            <a:off x="385590" y="2907407"/>
+            <a:ext cx="4993005" cy="2926080"/>
           </a:xfrm>
           <a:prstGeom prst="rect">
             <a:avLst/>
@@ -16945,28 +17242,32 @@
       </p:pic>
       <p:pic>
         <p:nvPicPr>
-          <p:cNvPr id="7" name="图片 6">
+          <p:cNvPr id="19" name="图形 6">
             <a:extLst>
               <a:ext uri="{FF2B5EF4-FFF2-40B4-BE49-F238E27FC236}">
-                <a16:creationId xmlns:a16="http://schemas.microsoft.com/office/drawing/2014/main" id="{C1F83BFF-98FD-49EC-B37C-8D7FCD2C0681}"/>
+                <a16:creationId xmlns:a16="http://schemas.microsoft.com/office/drawing/2014/main" id="{F6BAC16D-33AB-4D16-B960-7D50A2D54EE2}"/>
               </a:ext>
             </a:extLst>
           </p:cNvPr>
-          <p:cNvPicPr>
-            <a:picLocks noChangeAspect="1"/>
-          </p:cNvPicPr>
+          <p:cNvPicPr/>
           <p:nvPr/>
         </p:nvPicPr>
         <p:blipFill>
-          <a:blip r:embed="rId7"/>
+          <a:blip r:embed="rId7">
+            <a:extLst>
+              <a:ext uri="{96DAC541-7B7A-43D3-8B79-37D633B846F1}">
+                <asvg:svgBlip xmlns:asvg="http://schemas.microsoft.com/office/drawing/2016/SVG/main" r:embed="rId8"/>
+              </a:ext>
+            </a:extLst>
+          </a:blip>
           <a:stretch>
             <a:fillRect/>
           </a:stretch>
         </p:blipFill>
         <p:spPr>
           <a:xfrm>
-            <a:off x="373856" y="2037569"/>
-            <a:ext cx="4570873" cy="816922"/>
+            <a:off x="6121528" y="2858296"/>
+            <a:ext cx="4993005" cy="2926081"/>
           </a:xfrm>
           <a:prstGeom prst="rect">
             <a:avLst/>
@@ -16975,10 +17276,10 @@
       </p:pic>
       <p:sp>
         <p:nvSpPr>
-          <p:cNvPr id="25" name="文本框 24">
+          <p:cNvPr id="21" name="文本框 20">
             <a:extLst>
               <a:ext uri="{FF2B5EF4-FFF2-40B4-BE49-F238E27FC236}">
-                <a16:creationId xmlns:a16="http://schemas.microsoft.com/office/drawing/2014/main" id="{801AC954-86E6-4105-ACEF-EC33F1A1AC57}"/>
+                <a16:creationId xmlns:a16="http://schemas.microsoft.com/office/drawing/2014/main" id="{B73F8172-AEE1-4884-93B9-03D244E3AE0F}"/>
               </a:ext>
             </a:extLst>
           </p:cNvPr>
@@ -16987,8 +17288,8 @@
         </p:nvSpPr>
         <p:spPr>
           <a:xfrm>
-            <a:off x="474408" y="1630561"/>
-            <a:ext cx="6094268" cy="369332"/>
+            <a:off x="440055" y="1753190"/>
+            <a:ext cx="10543136" cy="1225335"/>
           </a:xfrm>
           <a:prstGeom prst="rect">
             <a:avLst/>
@@ -17001,239 +17302,141 @@
           </a:bodyPr>
           <a:lstStyle/>
           <a:p>
-            <a:r>
-              <a:rPr lang="en-US" altLang="zh-CN" sz="1800" kern="100" dirty="0">
-                <a:effectLst/>
-                <a:latin typeface="Times New Roman" panose="02020603050405020304" pitchFamily="18" charset="0"/>
-                <a:ea typeface="宋体" panose="02010600030101010101" pitchFamily="2" charset="-122"/>
-                <a:cs typeface="Times New Roman" panose="02020603050405020304" pitchFamily="18" charset="0"/>
-              </a:rPr>
-              <a:t>1. </a:t>
-            </a:r>
-            <a:r>
-              <a:rPr lang="zh-CN" altLang="en-US" sz="1800" kern="100" dirty="0">
-                <a:effectLst/>
-                <a:latin typeface="Times New Roman" panose="02020603050405020304" pitchFamily="18" charset="0"/>
-                <a:ea typeface="宋体" panose="02010600030101010101" pitchFamily="2" charset="-122"/>
-                <a:cs typeface="Times New Roman" panose="02020603050405020304" pitchFamily="18" charset="0"/>
-              </a:rPr>
-              <a:t>在</a:t>
-            </a:r>
-            <a:r>
-              <a:rPr lang="en-US" altLang="zh-CN" sz="1800" kern="100" dirty="0">
-                <a:effectLst/>
-                <a:latin typeface="Times New Roman" panose="02020603050405020304" pitchFamily="18" charset="0"/>
-                <a:ea typeface="宋体" panose="02010600030101010101" pitchFamily="2" charset="-122"/>
-                <a:cs typeface="Times New Roman" panose="02020603050405020304" pitchFamily="18" charset="0"/>
-              </a:rPr>
-              <a:t>FIO</a:t>
-            </a:r>
-            <a:r>
-              <a:rPr lang="zh-CN" altLang="en-US" sz="1800" kern="100" dirty="0">
-                <a:effectLst/>
-                <a:latin typeface="Times New Roman" panose="02020603050405020304" pitchFamily="18" charset="0"/>
-                <a:ea typeface="宋体" panose="02010600030101010101" pitchFamily="2" charset="-122"/>
-                <a:cs typeface="Times New Roman" panose="02020603050405020304" pitchFamily="18" charset="0"/>
-              </a:rPr>
-              <a:t>基准测试中，</a:t>
-            </a:r>
-            <a:r>
-              <a:rPr lang="zh-CN" altLang="zh-CN" sz="1800" kern="100" dirty="0">
-                <a:effectLst/>
-                <a:latin typeface="Times New Roman" panose="02020603050405020304" pitchFamily="18" charset="0"/>
-                <a:ea typeface="宋体" panose="02010600030101010101" pitchFamily="2" charset="-122"/>
-                <a:cs typeface="Times New Roman" panose="02020603050405020304" pitchFamily="18" charset="0"/>
-              </a:rPr>
-              <a:t>模拟器的误差较大：</a:t>
-            </a:r>
-            <a:endParaRPr lang="zh-CN" altLang="en-US" dirty="0"/>
-          </a:p>
-        </p:txBody>
-      </p:sp>
-      <p:sp>
-        <p:nvSpPr>
-          <p:cNvPr id="28" name="文本框 27">
-            <a:extLst>
-              <a:ext uri="{FF2B5EF4-FFF2-40B4-BE49-F238E27FC236}">
-                <a16:creationId xmlns:a16="http://schemas.microsoft.com/office/drawing/2014/main" id="{F28D8F15-5FC8-4447-A3BB-6F79F143AAC5}"/>
-              </a:ext>
-            </a:extLst>
-          </p:cNvPr>
-          <p:cNvSpPr txBox="1"/>
-          <p:nvPr/>
-        </p:nvSpPr>
-        <p:spPr>
-          <a:xfrm>
-            <a:off x="474408" y="4693823"/>
-            <a:ext cx="10914029" cy="870751"/>
-          </a:xfrm>
-          <a:prstGeom prst="rect">
-            <a:avLst/>
-          </a:prstGeom>
-          <a:noFill/>
-        </p:spPr>
-        <p:txBody>
-          <a:bodyPr wrap="square">
-            <a:spAutoFit/>
-          </a:bodyPr>
-          <a:lstStyle/>
-          <a:p>
-            <a:pPr indent="266700" algn="just">
+            <a:pPr>
               <a:lnSpc>
                 <a:spcPct val="150000"/>
               </a:lnSpc>
             </a:pPr>
             <a:r>
-              <a:rPr lang="zh-CN" altLang="zh-CN" kern="100" dirty="0">
-                <a:latin typeface="Times New Roman" panose="02020603050405020304" pitchFamily="18" charset="0"/>
-                <a:ea typeface="宋体" panose="02010600030101010101" pitchFamily="2" charset="-122"/>
-              </a:rPr>
-              <a:t>可以观察到，尽管二者数值上差距较大，但是</a:t>
-            </a:r>
-            <a:r>
-              <a:rPr lang="en-US" altLang="zh-CN" kern="100" dirty="0" err="1">
-                <a:latin typeface="Times New Roman" panose="02020603050405020304" pitchFamily="18" charset="0"/>
-                <a:ea typeface="宋体" panose="02010600030101010101" pitchFamily="2" charset="-122"/>
-              </a:rPr>
-              <a:t>NVMeVirt</a:t>
-            </a:r>
-            <a:r>
-              <a:rPr lang="zh-CN" altLang="zh-CN" kern="100" dirty="0">
-                <a:latin typeface="Times New Roman" panose="02020603050405020304" pitchFamily="18" charset="0"/>
-                <a:ea typeface="宋体" panose="02010600030101010101" pitchFamily="2" charset="-122"/>
-              </a:rPr>
-              <a:t>的吞吐量随时间变化的趋势与真实设备基本一致，</a:t>
-            </a:r>
-            <a:r>
-              <a:rPr lang="zh-CN" altLang="en-US" kern="100" dirty="0">
-                <a:latin typeface="Times New Roman" panose="02020603050405020304" pitchFamily="18" charset="0"/>
-                <a:ea typeface="宋体" panose="02010600030101010101" pitchFamily="2" charset="-122"/>
-              </a:rPr>
-              <a:t>使用模拟器能</a:t>
-            </a:r>
-            <a:r>
-              <a:rPr lang="zh-CN" altLang="zh-CN" kern="100" dirty="0">
-                <a:latin typeface="Times New Roman" panose="02020603050405020304" pitchFamily="18" charset="0"/>
-                <a:ea typeface="宋体" panose="02010600030101010101" pitchFamily="2" charset="-122"/>
-              </a:rPr>
-              <a:t>观察设备的性能波动情况，</a:t>
-            </a:r>
-            <a:r>
-              <a:rPr lang="zh-CN" altLang="en-US" kern="100" dirty="0">
-                <a:latin typeface="Times New Roman" panose="02020603050405020304" pitchFamily="18" charset="0"/>
-                <a:ea typeface="宋体" panose="02010600030101010101" pitchFamily="2" charset="-122"/>
-              </a:rPr>
-              <a:t>能够在一定程度上反应</a:t>
-            </a:r>
-            <a:r>
-              <a:rPr lang="zh-CN" altLang="zh-CN" kern="100" dirty="0">
-                <a:latin typeface="Times New Roman" panose="02020603050405020304" pitchFamily="18" charset="0"/>
-                <a:ea typeface="宋体" panose="02010600030101010101" pitchFamily="2" charset="-122"/>
-              </a:rPr>
-              <a:t>程序中的性能瓶颈。</a:t>
-            </a:r>
-          </a:p>
-        </p:txBody>
-      </p:sp>
-      <p:sp>
-        <p:nvSpPr>
-          <p:cNvPr id="29" name="文本框 28">
+              <a:rPr lang="zh-CN" altLang="zh-CN" sz="1700" kern="100" dirty="0">
+                <a:effectLst/>
+                <a:latin typeface="Times New Roman" panose="02020603050405020304" pitchFamily="18" charset="0"/>
+                <a:ea typeface="宋体" panose="02010600030101010101" pitchFamily="2" charset="-122"/>
+                <a:cs typeface="Times New Roman" panose="02020603050405020304" pitchFamily="18" charset="0"/>
+              </a:rPr>
+              <a:t>在实际应用中，会出现某类型的数据仅写入单个指定</a:t>
+            </a:r>
+            <a:r>
+              <a:rPr lang="en-US" altLang="zh-CN" sz="1700" kern="100" dirty="0">
+                <a:effectLst/>
+                <a:latin typeface="Times New Roman" panose="02020603050405020304" pitchFamily="18" charset="0"/>
+                <a:ea typeface="宋体" panose="02010600030101010101" pitchFamily="2" charset="-122"/>
+              </a:rPr>
+              <a:t>Zone</a:t>
+            </a:r>
+            <a:r>
+              <a:rPr lang="zh-CN" altLang="zh-CN" sz="1700" kern="100" dirty="0">
+                <a:effectLst/>
+                <a:latin typeface="Times New Roman" panose="02020603050405020304" pitchFamily="18" charset="0"/>
+                <a:ea typeface="宋体" panose="02010600030101010101" pitchFamily="2" charset="-122"/>
+                <a:cs typeface="Times New Roman" panose="02020603050405020304" pitchFamily="18" charset="0"/>
+              </a:rPr>
+              <a:t>的情况（例如上文分析的</a:t>
+            </a:r>
+            <a:r>
+              <a:rPr lang="en-US" altLang="zh-CN" sz="1700" kern="100" dirty="0" err="1">
+                <a:effectLst/>
+                <a:latin typeface="Times New Roman" panose="02020603050405020304" pitchFamily="18" charset="0"/>
+                <a:ea typeface="宋体" panose="02010600030101010101" pitchFamily="2" charset="-122"/>
+              </a:rPr>
+              <a:t>RocksDB</a:t>
+            </a:r>
+            <a:r>
+              <a:rPr lang="zh-CN" altLang="zh-CN" sz="1700" kern="100" dirty="0">
+                <a:effectLst/>
+                <a:latin typeface="Times New Roman" panose="02020603050405020304" pitchFamily="18" charset="0"/>
+                <a:ea typeface="宋体" panose="02010600030101010101" pitchFamily="2" charset="-122"/>
+                <a:cs typeface="Times New Roman" panose="02020603050405020304" pitchFamily="18" charset="0"/>
+              </a:rPr>
+              <a:t>中的</a:t>
+            </a:r>
+            <a:r>
+              <a:rPr lang="en-US" altLang="zh-CN" sz="1700" kern="100" dirty="0">
+                <a:effectLst/>
+                <a:latin typeface="Times New Roman" panose="02020603050405020304" pitchFamily="18" charset="0"/>
+                <a:ea typeface="宋体" panose="02010600030101010101" pitchFamily="2" charset="-122"/>
+              </a:rPr>
+              <a:t>WAL</a:t>
+            </a:r>
+            <a:r>
+              <a:rPr lang="zh-CN" altLang="zh-CN" sz="1700" kern="100" dirty="0">
+                <a:effectLst/>
+                <a:latin typeface="Times New Roman" panose="02020603050405020304" pitchFamily="18" charset="0"/>
+                <a:ea typeface="宋体" panose="02010600030101010101" pitchFamily="2" charset="-122"/>
+                <a:cs typeface="Times New Roman" panose="02020603050405020304" pitchFamily="18" charset="0"/>
+              </a:rPr>
+              <a:t>文件），因此，测试不同情况下单个</a:t>
+            </a:r>
+            <a:r>
+              <a:rPr lang="en-US" altLang="zh-CN" sz="1700" kern="100" dirty="0">
+                <a:effectLst/>
+                <a:latin typeface="Times New Roman" panose="02020603050405020304" pitchFamily="18" charset="0"/>
+                <a:ea typeface="宋体" panose="02010600030101010101" pitchFamily="2" charset="-122"/>
+              </a:rPr>
+              <a:t>Zone</a:t>
+            </a:r>
+            <a:r>
+              <a:rPr lang="zh-CN" altLang="zh-CN" sz="1700" kern="100" dirty="0">
+                <a:effectLst/>
+                <a:latin typeface="Times New Roman" panose="02020603050405020304" pitchFamily="18" charset="0"/>
+                <a:ea typeface="宋体" panose="02010600030101010101" pitchFamily="2" charset="-122"/>
+                <a:cs typeface="Times New Roman" panose="02020603050405020304" pitchFamily="18" charset="0"/>
+              </a:rPr>
+              <a:t>的性能很有意义。分别使用三种</a:t>
+            </a:r>
+            <a:r>
+              <a:rPr lang="en-US" altLang="zh-CN" sz="1700" kern="100" dirty="0">
+                <a:effectLst/>
+                <a:latin typeface="Times New Roman" panose="02020603050405020304" pitchFamily="18" charset="0"/>
+                <a:ea typeface="宋体" panose="02010600030101010101" pitchFamily="2" charset="-122"/>
+              </a:rPr>
+              <a:t>I/O</a:t>
+            </a:r>
+            <a:r>
+              <a:rPr lang="zh-CN" altLang="zh-CN" sz="1700" kern="100" dirty="0">
+                <a:effectLst/>
+                <a:latin typeface="Times New Roman" panose="02020603050405020304" pitchFamily="18" charset="0"/>
+                <a:ea typeface="宋体" panose="02010600030101010101" pitchFamily="2" charset="-122"/>
+                <a:cs typeface="Times New Roman" panose="02020603050405020304" pitchFamily="18" charset="0"/>
+              </a:rPr>
+              <a:t>引擎，在不同的块大小下进行单</a:t>
+            </a:r>
+            <a:r>
+              <a:rPr lang="en-US" altLang="zh-CN" sz="1700" kern="100" dirty="0">
+                <a:effectLst/>
+                <a:latin typeface="Times New Roman" panose="02020603050405020304" pitchFamily="18" charset="0"/>
+                <a:ea typeface="宋体" panose="02010600030101010101" pitchFamily="2" charset="-122"/>
+              </a:rPr>
+              <a:t>Zone</a:t>
+            </a:r>
+            <a:r>
+              <a:rPr lang="zh-CN" altLang="zh-CN" sz="1700" kern="100" dirty="0">
+                <a:effectLst/>
+                <a:latin typeface="Times New Roman" panose="02020603050405020304" pitchFamily="18" charset="0"/>
+                <a:ea typeface="宋体" panose="02010600030101010101" pitchFamily="2" charset="-122"/>
+                <a:cs typeface="Times New Roman" panose="02020603050405020304" pitchFamily="18" charset="0"/>
+              </a:rPr>
+              <a:t>写入测试</a:t>
+            </a:r>
+            <a:r>
+              <a:rPr lang="zh-CN" altLang="en-US" sz="1700" kern="100" dirty="0">
+                <a:effectLst/>
+                <a:latin typeface="Times New Roman" panose="02020603050405020304" pitchFamily="18" charset="0"/>
+                <a:ea typeface="宋体" panose="02010600030101010101" pitchFamily="2" charset="-122"/>
+                <a:cs typeface="Times New Roman" panose="02020603050405020304" pitchFamily="18" charset="0"/>
+              </a:rPr>
+              <a:t>，结果如下。</a:t>
+            </a:r>
+            <a:endParaRPr lang="zh-CN" altLang="en-US" sz="1700" dirty="0"/>
+          </a:p>
+        </p:txBody>
+      </p:sp>
+      <p:sp>
+        <p:nvSpPr>
+          <p:cNvPr id="27" name="文本框 26">
             <a:extLst>
               <a:ext uri="{FF2B5EF4-FFF2-40B4-BE49-F238E27FC236}">
-                <a16:creationId xmlns:a16="http://schemas.microsoft.com/office/drawing/2014/main" id="{493FB669-2C55-460D-9384-8CFF4A90B574}"/>
-              </a:ext>
-            </a:extLst>
-          </p:cNvPr>
-          <p:cNvSpPr txBox="1"/>
-          <p:nvPr/>
-        </p:nvSpPr>
-        <p:spPr>
-          <a:xfrm>
-            <a:off x="474408" y="3466735"/>
-            <a:ext cx="5115902" cy="646331"/>
-          </a:xfrm>
-          <a:prstGeom prst="rect">
-            <a:avLst/>
-          </a:prstGeom>
-          <a:noFill/>
-        </p:spPr>
-        <p:txBody>
-          <a:bodyPr wrap="square">
-            <a:spAutoFit/>
-          </a:bodyPr>
-          <a:lstStyle/>
-          <a:p>
-            <a:r>
-              <a:rPr lang="en-US" altLang="zh-CN" sz="1800" kern="100" dirty="0">
-                <a:effectLst/>
-                <a:latin typeface="宋体" panose="02010600030101010101" pitchFamily="2" charset="-122"/>
-                <a:ea typeface="宋体" panose="02010600030101010101" pitchFamily="2" charset="-122"/>
-              </a:rPr>
-              <a:t>2. </a:t>
-            </a:r>
-            <a:r>
-              <a:rPr lang="zh-CN" altLang="en-US" sz="1800" kern="100" dirty="0">
-                <a:effectLst/>
-                <a:latin typeface="宋体" panose="02010600030101010101" pitchFamily="2" charset="-122"/>
-                <a:ea typeface="宋体" panose="02010600030101010101" pitchFamily="2" charset="-122"/>
-              </a:rPr>
-              <a:t>基于</a:t>
-            </a:r>
-            <a:r>
-              <a:rPr lang="en-US" altLang="zh-CN" sz="1800" kern="100" dirty="0" err="1">
-                <a:effectLst/>
-                <a:latin typeface="Times New Roman" panose="02020603050405020304" pitchFamily="18" charset="0"/>
-                <a:ea typeface="宋体" panose="02010600030101010101" pitchFamily="2" charset="-122"/>
-                <a:cs typeface="Times New Roman" panose="02020603050405020304" pitchFamily="18" charset="0"/>
-              </a:rPr>
-              <a:t>RocksDB</a:t>
-            </a:r>
-            <a:r>
-              <a:rPr lang="en-US" altLang="zh-CN" kern="100" dirty="0" err="1">
-                <a:latin typeface="Times New Roman" panose="02020603050405020304" pitchFamily="18" charset="0"/>
-                <a:ea typeface="宋体" panose="02010600030101010101" pitchFamily="2" charset="-122"/>
-                <a:cs typeface="Times New Roman" panose="02020603050405020304" pitchFamily="18" charset="0"/>
-              </a:rPr>
-              <a:t>+ZenFS</a:t>
-            </a:r>
-            <a:r>
-              <a:rPr lang="zh-CN" altLang="zh-CN" sz="1800" kern="100" dirty="0">
-                <a:effectLst/>
-                <a:latin typeface="宋体" panose="02010600030101010101" pitchFamily="2" charset="-122"/>
-                <a:ea typeface="宋体" panose="02010600030101010101" pitchFamily="2" charset="-122"/>
-                <a:cs typeface="Times New Roman" panose="02020603050405020304" pitchFamily="18" charset="0"/>
-              </a:rPr>
-              <a:t>分别对模拟和物理环境进行测试，记录吞吐量</a:t>
-            </a:r>
-            <a:r>
-              <a:rPr lang="zh-CN" altLang="zh-CN" dirty="0">
-                <a:solidFill>
-                  <a:srgbClr val="374151"/>
-                </a:solidFill>
-                <a:latin typeface="宋体" panose="02010600030101010101" pitchFamily="2" charset="-122"/>
-                <a:ea typeface="宋体" panose="02010600030101010101" pitchFamily="2" charset="-122"/>
-              </a:rPr>
-              <a:t>随时间的变化</a:t>
-            </a:r>
-            <a:r>
-              <a:rPr lang="zh-CN" altLang="en-US" dirty="0">
-                <a:solidFill>
-                  <a:srgbClr val="374151"/>
-                </a:solidFill>
-                <a:latin typeface="宋体" panose="02010600030101010101" pitchFamily="2" charset="-122"/>
-                <a:ea typeface="宋体" panose="02010600030101010101" pitchFamily="2" charset="-122"/>
-              </a:rPr>
-              <a:t>如右图所示。</a:t>
-            </a:r>
-          </a:p>
-        </p:txBody>
-      </p:sp>
-      <p:sp>
-        <p:nvSpPr>
-          <p:cNvPr id="30" name="文本框 29">
-            <a:extLst>
-              <a:ext uri="{FF2B5EF4-FFF2-40B4-BE49-F238E27FC236}">
-                <a16:creationId xmlns:a16="http://schemas.microsoft.com/office/drawing/2014/main" id="{282D8D65-1887-4B91-97ED-5DABC4EEBA49}"/>
+                <a16:creationId xmlns:a16="http://schemas.microsoft.com/office/drawing/2014/main" id="{82341366-4E61-45FA-B7C4-58EA1BEF8A57}"/>
               </a:ext>
             </a:extLst>
           </p:cNvPr>
@@ -17301,7 +17504,7 @@
     </p:spTree>
     <p:extLst>
       <p:ext uri="{BB962C8B-B14F-4D97-AF65-F5344CB8AC3E}">
-        <p14:creationId xmlns:p14="http://schemas.microsoft.com/office/powerpoint/2010/main" val="1518962869"/>
+        <p14:creationId xmlns:p14="http://schemas.microsoft.com/office/powerpoint/2010/main" val="3248152468"/>
       </p:ext>
     </p:extLst>
   </p:cSld>
@@ -17759,7 +17962,7 @@
         </p:nvSpPr>
         <p:spPr>
           <a:xfrm>
-            <a:off x="440055" y="1269949"/>
+            <a:off x="440055" y="1144352"/>
             <a:ext cx="6951980" cy="460375"/>
           </a:xfrm>
           <a:prstGeom prst="rect">
@@ -17781,27 +17984,7 @@
                 <a:ea typeface="+mn-lt"/>
                 <a:cs typeface="Times New Roman" panose="02020603050405020304" charset="0"/>
               </a:rPr>
-              <a:t>单</a:t>
-            </a:r>
-            <a:r>
-              <a:rPr lang="en-US" altLang="zh-CN" sz="2400" dirty="0">
-                <a:solidFill>
-                  <a:srgbClr val="4747BA"/>
-                </a:solidFill>
-                <a:ea typeface="+mn-lt"/>
-                <a:cs typeface="Times New Roman" panose="02020603050405020304" charset="0"/>
-              </a:rPr>
-              <a:t>Zone</a:t>
-            </a:r>
-            <a:r>
-              <a:rPr lang="zh-CN" altLang="en-US" sz="2400" dirty="0">
-                <a:solidFill>
-                  <a:srgbClr val="4747BA"/>
-                </a:solidFill>
-                <a:ea typeface="+mn-lt"/>
-                <a:cs typeface="Times New Roman" panose="02020603050405020304" charset="0"/>
-              </a:rPr>
-              <a:t>写入测试</a:t>
+              <a:t>全盘写入测试</a:t>
             </a:r>
             <a:endParaRPr lang="en-US" altLang="zh-CN" sz="2400" dirty="0">
               <a:solidFill>
@@ -17866,12 +18049,280 @@
           </a:p>
         </p:txBody>
       </p:sp>
+      <p:sp>
+        <p:nvSpPr>
+          <p:cNvPr id="21" name="文本框 20">
+            <a:extLst>
+              <a:ext uri="{FF2B5EF4-FFF2-40B4-BE49-F238E27FC236}">
+                <a16:creationId xmlns:a16="http://schemas.microsoft.com/office/drawing/2014/main" id="{B73F8172-AEE1-4884-93B9-03D244E3AE0F}"/>
+              </a:ext>
+            </a:extLst>
+          </p:cNvPr>
+          <p:cNvSpPr txBox="1"/>
+          <p:nvPr/>
+        </p:nvSpPr>
+        <p:spPr>
+          <a:xfrm>
+            <a:off x="440055" y="1722906"/>
+            <a:ext cx="10543136" cy="1219886"/>
+          </a:xfrm>
+          <a:prstGeom prst="rect">
+            <a:avLst/>
+          </a:prstGeom>
+          <a:noFill/>
+        </p:spPr>
+        <p:txBody>
+          <a:bodyPr wrap="square">
+            <a:spAutoFit/>
+          </a:bodyPr>
+          <a:lstStyle/>
+          <a:p>
+            <a:pPr>
+              <a:lnSpc>
+                <a:spcPct val="150000"/>
+              </a:lnSpc>
+            </a:pPr>
+            <a:r>
+              <a:rPr lang="zh-CN" altLang="en-US" sz="1700" kern="100" dirty="0">
+                <a:latin typeface="Times New Roman" panose="02020603050405020304" pitchFamily="18" charset="0"/>
+                <a:ea typeface="宋体" panose="02010600030101010101" pitchFamily="2" charset="-122"/>
+                <a:cs typeface="Times New Roman" panose="02020603050405020304" pitchFamily="18" charset="0"/>
+              </a:rPr>
+              <a:t>为了评估不同块大小和线程数对写入速度和</a:t>
+            </a:r>
+            <a:r>
+              <a:rPr lang="en-US" altLang="zh-CN" sz="1700" kern="100" dirty="0">
+                <a:latin typeface="Times New Roman" panose="02020603050405020304" pitchFamily="18" charset="0"/>
+                <a:ea typeface="宋体" panose="02010600030101010101" pitchFamily="2" charset="-122"/>
+                <a:cs typeface="Times New Roman" panose="02020603050405020304" pitchFamily="18" charset="0"/>
+              </a:rPr>
+              <a:t>IOPS</a:t>
+            </a:r>
+            <a:r>
+              <a:rPr lang="zh-CN" altLang="en-US" sz="1700" kern="100" dirty="0">
+                <a:latin typeface="Times New Roman" panose="02020603050405020304" pitchFamily="18" charset="0"/>
+                <a:ea typeface="宋体" panose="02010600030101010101" pitchFamily="2" charset="-122"/>
+                <a:cs typeface="Times New Roman" panose="02020603050405020304" pitchFamily="18" charset="0"/>
+              </a:rPr>
+              <a:t>的影响，我们设计并实施了一系列测试。测试配置包括使</a:t>
+            </a:r>
+            <a:r>
+              <a:rPr lang="en-US" altLang="zh-CN" sz="1700" kern="100" dirty="0" err="1">
+                <a:latin typeface="Times New Roman" panose="02020603050405020304" pitchFamily="18" charset="0"/>
+                <a:ea typeface="宋体" panose="02010600030101010101" pitchFamily="2" charset="-122"/>
+                <a:cs typeface="Times New Roman" panose="02020603050405020304" pitchFamily="18" charset="0"/>
+              </a:rPr>
+              <a:t>io_uring</a:t>
+            </a:r>
+            <a:r>
+              <a:rPr lang="zh-CN" altLang="en-US" sz="1700" kern="100" dirty="0">
+                <a:latin typeface="Times New Roman" panose="02020603050405020304" pitchFamily="18" charset="0"/>
+                <a:ea typeface="宋体" panose="02010600030101010101" pitchFamily="2" charset="-122"/>
+                <a:cs typeface="Times New Roman" panose="02020603050405020304" pitchFamily="18" charset="0"/>
+              </a:rPr>
+              <a:t>作为</a:t>
+            </a:r>
+            <a:r>
+              <a:rPr lang="en-US" altLang="zh-CN" sz="1700" kern="100" dirty="0">
+                <a:latin typeface="Times New Roman" panose="02020603050405020304" pitchFamily="18" charset="0"/>
+                <a:ea typeface="宋体" panose="02010600030101010101" pitchFamily="2" charset="-122"/>
+                <a:cs typeface="Times New Roman" panose="02020603050405020304" pitchFamily="18" charset="0"/>
+              </a:rPr>
+              <a:t>I/O</a:t>
+            </a:r>
+            <a:r>
+              <a:rPr lang="zh-CN" altLang="en-US" sz="1700" kern="100" dirty="0">
+                <a:latin typeface="Times New Roman" panose="02020603050405020304" pitchFamily="18" charset="0"/>
+                <a:ea typeface="宋体" panose="02010600030101010101" pitchFamily="2" charset="-122"/>
+                <a:cs typeface="Times New Roman" panose="02020603050405020304" pitchFamily="18" charset="0"/>
+              </a:rPr>
+              <a:t>引擎，并在五种不同的块大小（</a:t>
+            </a:r>
+            <a:r>
+              <a:rPr lang="en-US" altLang="zh-CN" sz="1700" kern="100" dirty="0">
+                <a:latin typeface="Times New Roman" panose="02020603050405020304" pitchFamily="18" charset="0"/>
+                <a:ea typeface="宋体" panose="02010600030101010101" pitchFamily="2" charset="-122"/>
+                <a:cs typeface="Times New Roman" panose="02020603050405020304" pitchFamily="18" charset="0"/>
+              </a:rPr>
+              <a:t>4k</a:t>
+            </a:r>
+            <a:r>
+              <a:rPr lang="zh-CN" altLang="en-US" sz="1700" kern="100" dirty="0">
+                <a:latin typeface="Times New Roman" panose="02020603050405020304" pitchFamily="18" charset="0"/>
+                <a:ea typeface="宋体" panose="02010600030101010101" pitchFamily="2" charset="-122"/>
+                <a:cs typeface="Times New Roman" panose="02020603050405020304" pitchFamily="18" charset="0"/>
+              </a:rPr>
+              <a:t>、</a:t>
+            </a:r>
+            <a:r>
+              <a:rPr lang="en-US" altLang="zh-CN" sz="1700" kern="100" dirty="0">
+                <a:latin typeface="Times New Roman" panose="02020603050405020304" pitchFamily="18" charset="0"/>
+                <a:ea typeface="宋体" panose="02010600030101010101" pitchFamily="2" charset="-122"/>
+                <a:cs typeface="Times New Roman" panose="02020603050405020304" pitchFamily="18" charset="0"/>
+              </a:rPr>
+              <a:t>16k</a:t>
+            </a:r>
+            <a:r>
+              <a:rPr lang="zh-CN" altLang="en-US" sz="1700" kern="100" dirty="0">
+                <a:latin typeface="Times New Roman" panose="02020603050405020304" pitchFamily="18" charset="0"/>
+                <a:ea typeface="宋体" panose="02010600030101010101" pitchFamily="2" charset="-122"/>
+                <a:cs typeface="Times New Roman" panose="02020603050405020304" pitchFamily="18" charset="0"/>
+              </a:rPr>
+              <a:t>、</a:t>
+            </a:r>
+            <a:r>
+              <a:rPr lang="en-US" altLang="zh-CN" sz="1700" kern="100" dirty="0">
+                <a:latin typeface="Times New Roman" panose="02020603050405020304" pitchFamily="18" charset="0"/>
+                <a:ea typeface="宋体" panose="02010600030101010101" pitchFamily="2" charset="-122"/>
+                <a:cs typeface="Times New Roman" panose="02020603050405020304" pitchFamily="18" charset="0"/>
+              </a:rPr>
+              <a:t>32k</a:t>
+            </a:r>
+            <a:r>
+              <a:rPr lang="zh-CN" altLang="en-US" sz="1700" kern="100" dirty="0">
+                <a:latin typeface="Times New Roman" panose="02020603050405020304" pitchFamily="18" charset="0"/>
+                <a:ea typeface="宋体" panose="02010600030101010101" pitchFamily="2" charset="-122"/>
+                <a:cs typeface="Times New Roman" panose="02020603050405020304" pitchFamily="18" charset="0"/>
+              </a:rPr>
+              <a:t>、</a:t>
+            </a:r>
+            <a:r>
+              <a:rPr lang="en-US" altLang="zh-CN" sz="1700" kern="100" dirty="0">
+                <a:latin typeface="Times New Roman" panose="02020603050405020304" pitchFamily="18" charset="0"/>
+                <a:ea typeface="宋体" panose="02010600030101010101" pitchFamily="2" charset="-122"/>
+                <a:cs typeface="Times New Roman" panose="02020603050405020304" pitchFamily="18" charset="0"/>
+              </a:rPr>
+              <a:t>64k</a:t>
+            </a:r>
+            <a:r>
+              <a:rPr lang="zh-CN" altLang="en-US" sz="1700" kern="100" dirty="0">
+                <a:latin typeface="Times New Roman" panose="02020603050405020304" pitchFamily="18" charset="0"/>
+                <a:ea typeface="宋体" panose="02010600030101010101" pitchFamily="2" charset="-122"/>
+                <a:cs typeface="Times New Roman" panose="02020603050405020304" pitchFamily="18" charset="0"/>
+              </a:rPr>
+              <a:t>、</a:t>
+            </a:r>
+            <a:r>
+              <a:rPr lang="en-US" altLang="zh-CN" sz="1700" kern="100" dirty="0">
+                <a:latin typeface="Times New Roman" panose="02020603050405020304" pitchFamily="18" charset="0"/>
+                <a:ea typeface="宋体" panose="02010600030101010101" pitchFamily="2" charset="-122"/>
+                <a:cs typeface="Times New Roman" panose="02020603050405020304" pitchFamily="18" charset="0"/>
+              </a:rPr>
+              <a:t>128k</a:t>
+            </a:r>
+            <a:r>
+              <a:rPr lang="zh-CN" altLang="en-US" sz="1700" kern="100" dirty="0">
+                <a:latin typeface="Times New Roman" panose="02020603050405020304" pitchFamily="18" charset="0"/>
+                <a:ea typeface="宋体" panose="02010600030101010101" pitchFamily="2" charset="-122"/>
+                <a:cs typeface="Times New Roman" panose="02020603050405020304" pitchFamily="18" charset="0"/>
+              </a:rPr>
+              <a:t>、</a:t>
+            </a:r>
+            <a:r>
+              <a:rPr lang="en-US" altLang="zh-CN" sz="1700" kern="100" dirty="0">
+                <a:latin typeface="Times New Roman" panose="02020603050405020304" pitchFamily="18" charset="0"/>
+                <a:ea typeface="宋体" panose="02010600030101010101" pitchFamily="2" charset="-122"/>
+                <a:cs typeface="Times New Roman" panose="02020603050405020304" pitchFamily="18" charset="0"/>
+              </a:rPr>
+              <a:t>256k</a:t>
+            </a:r>
+            <a:r>
+              <a:rPr lang="zh-CN" altLang="en-US" sz="1700" kern="100" dirty="0">
+                <a:latin typeface="Times New Roman" panose="02020603050405020304" pitchFamily="18" charset="0"/>
+                <a:ea typeface="宋体" panose="02010600030101010101" pitchFamily="2" charset="-122"/>
+                <a:cs typeface="Times New Roman" panose="02020603050405020304" pitchFamily="18" charset="0"/>
+              </a:rPr>
+              <a:t>）和五个不同的线程数（</a:t>
+            </a:r>
+            <a:r>
+              <a:rPr lang="en-US" altLang="zh-CN" sz="1700" kern="100" dirty="0">
+                <a:latin typeface="Times New Roman" panose="02020603050405020304" pitchFamily="18" charset="0"/>
+                <a:ea typeface="宋体" panose="02010600030101010101" pitchFamily="2" charset="-122"/>
+                <a:cs typeface="Times New Roman" panose="02020603050405020304" pitchFamily="18" charset="0"/>
+              </a:rPr>
+              <a:t>1</a:t>
+            </a:r>
+            <a:r>
+              <a:rPr lang="zh-CN" altLang="en-US" sz="1700" kern="100" dirty="0">
+                <a:latin typeface="Times New Roman" panose="02020603050405020304" pitchFamily="18" charset="0"/>
+                <a:ea typeface="宋体" panose="02010600030101010101" pitchFamily="2" charset="-122"/>
+                <a:cs typeface="Times New Roman" panose="02020603050405020304" pitchFamily="18" charset="0"/>
+              </a:rPr>
+              <a:t>、</a:t>
+            </a:r>
+            <a:r>
+              <a:rPr lang="en-US" altLang="zh-CN" sz="1700" kern="100" dirty="0">
+                <a:latin typeface="Times New Roman" panose="02020603050405020304" pitchFamily="18" charset="0"/>
+                <a:ea typeface="宋体" panose="02010600030101010101" pitchFamily="2" charset="-122"/>
+                <a:cs typeface="Times New Roman" panose="02020603050405020304" pitchFamily="18" charset="0"/>
+              </a:rPr>
+              <a:t>2</a:t>
+            </a:r>
+            <a:r>
+              <a:rPr lang="zh-CN" altLang="en-US" sz="1700" kern="100" dirty="0">
+                <a:latin typeface="Times New Roman" panose="02020603050405020304" pitchFamily="18" charset="0"/>
+                <a:ea typeface="宋体" panose="02010600030101010101" pitchFamily="2" charset="-122"/>
+                <a:cs typeface="Times New Roman" panose="02020603050405020304" pitchFamily="18" charset="0"/>
+              </a:rPr>
+              <a:t>、</a:t>
+            </a:r>
+            <a:r>
+              <a:rPr lang="en-US" altLang="zh-CN" sz="1700" kern="100" dirty="0">
+                <a:latin typeface="Times New Roman" panose="02020603050405020304" pitchFamily="18" charset="0"/>
+                <a:ea typeface="宋体" panose="02010600030101010101" pitchFamily="2" charset="-122"/>
+                <a:cs typeface="Times New Roman" panose="02020603050405020304" pitchFamily="18" charset="0"/>
+              </a:rPr>
+              <a:t>4</a:t>
+            </a:r>
+            <a:r>
+              <a:rPr lang="zh-CN" altLang="en-US" sz="1700" kern="100" dirty="0">
+                <a:latin typeface="Times New Roman" panose="02020603050405020304" pitchFamily="18" charset="0"/>
+                <a:ea typeface="宋体" panose="02010600030101010101" pitchFamily="2" charset="-122"/>
+                <a:cs typeface="Times New Roman" panose="02020603050405020304" pitchFamily="18" charset="0"/>
+              </a:rPr>
+              <a:t>、</a:t>
+            </a:r>
+            <a:r>
+              <a:rPr lang="en-US" altLang="zh-CN" sz="1700" kern="100" dirty="0">
+                <a:latin typeface="Times New Roman" panose="02020603050405020304" pitchFamily="18" charset="0"/>
+                <a:ea typeface="宋体" panose="02010600030101010101" pitchFamily="2" charset="-122"/>
+                <a:cs typeface="Times New Roman" panose="02020603050405020304" pitchFamily="18" charset="0"/>
+              </a:rPr>
+              <a:t>8</a:t>
+            </a:r>
+            <a:r>
+              <a:rPr lang="zh-CN" altLang="en-US" sz="1700" kern="100" dirty="0">
+                <a:latin typeface="Times New Roman" panose="02020603050405020304" pitchFamily="18" charset="0"/>
+                <a:ea typeface="宋体" panose="02010600030101010101" pitchFamily="2" charset="-122"/>
+                <a:cs typeface="Times New Roman" panose="02020603050405020304" pitchFamily="18" charset="0"/>
+              </a:rPr>
+              <a:t>、</a:t>
+            </a:r>
+            <a:r>
+              <a:rPr lang="en-US" altLang="zh-CN" sz="1700" kern="100" dirty="0">
+                <a:latin typeface="Times New Roman" panose="02020603050405020304" pitchFamily="18" charset="0"/>
+                <a:ea typeface="宋体" panose="02010600030101010101" pitchFamily="2" charset="-122"/>
+                <a:cs typeface="Times New Roman" panose="02020603050405020304" pitchFamily="18" charset="0"/>
+              </a:rPr>
+              <a:t>16</a:t>
+            </a:r>
+            <a:r>
+              <a:rPr lang="zh-CN" altLang="en-US" sz="1700" kern="100" dirty="0">
+                <a:latin typeface="Times New Roman" panose="02020603050405020304" pitchFamily="18" charset="0"/>
+                <a:ea typeface="宋体" panose="02010600030101010101" pitchFamily="2" charset="-122"/>
+                <a:cs typeface="Times New Roman" panose="02020603050405020304" pitchFamily="18" charset="0"/>
+              </a:rPr>
+              <a:t>）下进行测试。</a:t>
+            </a:r>
+          </a:p>
+        </p:txBody>
+      </p:sp>
       <p:pic>
         <p:nvPicPr>
-          <p:cNvPr id="16" name="图形 7">
+          <p:cNvPr id="25" name="图形 11">
             <a:extLst>
               <a:ext uri="{FF2B5EF4-FFF2-40B4-BE49-F238E27FC236}">
-                <a16:creationId xmlns:a16="http://schemas.microsoft.com/office/drawing/2014/main" id="{799610EE-4E5C-45A6-BD40-2877F4D9D982}"/>
+                <a16:creationId xmlns:a16="http://schemas.microsoft.com/office/drawing/2014/main" id="{F3724198-0E58-4601-9600-635831736314}"/>
               </a:ext>
             </a:extLst>
           </p:cNvPr>
@@ -17892,8 +18343,8 @@
         </p:blipFill>
         <p:spPr>
           <a:xfrm>
-            <a:off x="385590" y="2907407"/>
-            <a:ext cx="4993005" cy="2926080"/>
+            <a:off x="6202177" y="2763921"/>
+            <a:ext cx="4777304" cy="3184678"/>
           </a:xfrm>
           <a:prstGeom prst="rect">
             <a:avLst/>
@@ -17902,10 +18353,10 @@
       </p:pic>
       <p:pic>
         <p:nvPicPr>
-          <p:cNvPr id="19" name="图形 6">
+          <p:cNvPr id="27" name="图形 43">
             <a:extLst>
               <a:ext uri="{FF2B5EF4-FFF2-40B4-BE49-F238E27FC236}">
-                <a16:creationId xmlns:a16="http://schemas.microsoft.com/office/drawing/2014/main" id="{F6BAC16D-33AB-4D16-B960-7D50A2D54EE2}"/>
+                <a16:creationId xmlns:a16="http://schemas.microsoft.com/office/drawing/2014/main" id="{AABCD2C3-6D30-435E-9376-7BD37CCBFAEA}"/>
               </a:ext>
             </a:extLst>
           </p:cNvPr>
@@ -17913,8 +18364,11 @@
           <p:nvPr/>
         </p:nvPicPr>
         <p:blipFill>
-          <a:blip r:embed="rId7">
+          <a:blip r:embed="rId7" cstate="print">
             <a:extLst>
+              <a:ext uri="{28A0092B-C50C-407E-A947-70E740481C1C}">
+                <a14:useLocalDpi xmlns:a14="http://schemas.microsoft.com/office/drawing/2010/main" val="0"/>
+              </a:ext>
               <a:ext uri="{96DAC541-7B7A-43D3-8B79-37D633B846F1}">
                 <asvg:svgBlip xmlns:asvg="http://schemas.microsoft.com/office/drawing/2016/SVG/main" r:embed="rId8"/>
               </a:ext>
@@ -17926,8 +18380,8 @@
         </p:blipFill>
         <p:spPr>
           <a:xfrm>
-            <a:off x="6121528" y="2858296"/>
-            <a:ext cx="4993005" cy="2926081"/>
+            <a:off x="560692" y="2764415"/>
+            <a:ext cx="4993200" cy="3184678"/>
           </a:xfrm>
           <a:prstGeom prst="rect">
             <a:avLst/>
@@ -17936,162 +18390,10 @@
       </p:pic>
       <p:sp>
         <p:nvSpPr>
-          <p:cNvPr id="21" name="文本框 20">
+          <p:cNvPr id="30" name="文本框 29">
             <a:extLst>
               <a:ext uri="{FF2B5EF4-FFF2-40B4-BE49-F238E27FC236}">
-                <a16:creationId xmlns:a16="http://schemas.microsoft.com/office/drawing/2014/main" id="{B73F8172-AEE1-4884-93B9-03D244E3AE0F}"/>
-              </a:ext>
-            </a:extLst>
-          </p:cNvPr>
-          <p:cNvSpPr txBox="1"/>
-          <p:nvPr/>
-        </p:nvSpPr>
-        <p:spPr>
-          <a:xfrm>
-            <a:off x="440055" y="1904249"/>
-            <a:ext cx="10543136" cy="923330"/>
-          </a:xfrm>
-          <a:prstGeom prst="rect">
-            <a:avLst/>
-          </a:prstGeom>
-          <a:noFill/>
-        </p:spPr>
-        <p:txBody>
-          <a:bodyPr wrap="square">
-            <a:spAutoFit/>
-          </a:bodyPr>
-          <a:lstStyle/>
-          <a:p>
-            <a:r>
-              <a:rPr lang="zh-CN" altLang="zh-CN" sz="1800" kern="100" dirty="0">
-                <a:effectLst/>
-                <a:latin typeface="Times New Roman" panose="02020603050405020304" pitchFamily="18" charset="0"/>
-                <a:ea typeface="宋体" panose="02010600030101010101" pitchFamily="2" charset="-122"/>
-                <a:cs typeface="Times New Roman" panose="02020603050405020304" pitchFamily="18" charset="0"/>
-              </a:rPr>
-              <a:t>在实际应用中，会出现某类型的数据仅写入单个指定</a:t>
-            </a:r>
-            <a:r>
-              <a:rPr lang="en-US" altLang="zh-CN" sz="1800" kern="100" dirty="0">
-                <a:effectLst/>
-                <a:latin typeface="Times New Roman" panose="02020603050405020304" pitchFamily="18" charset="0"/>
-                <a:ea typeface="宋体" panose="02010600030101010101" pitchFamily="2" charset="-122"/>
-              </a:rPr>
-              <a:t>Zone</a:t>
-            </a:r>
-            <a:r>
-              <a:rPr lang="zh-CN" altLang="zh-CN" sz="1800" kern="100" dirty="0">
-                <a:effectLst/>
-                <a:latin typeface="Times New Roman" panose="02020603050405020304" pitchFamily="18" charset="0"/>
-                <a:ea typeface="宋体" panose="02010600030101010101" pitchFamily="2" charset="-122"/>
-                <a:cs typeface="Times New Roman" panose="02020603050405020304" pitchFamily="18" charset="0"/>
-              </a:rPr>
-              <a:t>的情况（例如上文分析的</a:t>
-            </a:r>
-            <a:r>
-              <a:rPr lang="en-US" altLang="zh-CN" sz="1800" kern="100" dirty="0" err="1">
-                <a:effectLst/>
-                <a:latin typeface="Times New Roman" panose="02020603050405020304" pitchFamily="18" charset="0"/>
-                <a:ea typeface="宋体" panose="02010600030101010101" pitchFamily="2" charset="-122"/>
-              </a:rPr>
-              <a:t>RocksDB</a:t>
-            </a:r>
-            <a:r>
-              <a:rPr lang="zh-CN" altLang="zh-CN" sz="1800" kern="100" dirty="0">
-                <a:effectLst/>
-                <a:latin typeface="Times New Roman" panose="02020603050405020304" pitchFamily="18" charset="0"/>
-                <a:ea typeface="宋体" panose="02010600030101010101" pitchFamily="2" charset="-122"/>
-                <a:cs typeface="Times New Roman" panose="02020603050405020304" pitchFamily="18" charset="0"/>
-              </a:rPr>
-              <a:t>中的</a:t>
-            </a:r>
-            <a:r>
-              <a:rPr lang="en-US" altLang="zh-CN" sz="1800" kern="100" dirty="0">
-                <a:effectLst/>
-                <a:latin typeface="Times New Roman" panose="02020603050405020304" pitchFamily="18" charset="0"/>
-                <a:ea typeface="宋体" panose="02010600030101010101" pitchFamily="2" charset="-122"/>
-              </a:rPr>
-              <a:t>WAL</a:t>
-            </a:r>
-            <a:r>
-              <a:rPr lang="zh-CN" altLang="zh-CN" sz="1800" kern="100" dirty="0">
-                <a:effectLst/>
-                <a:latin typeface="Times New Roman" panose="02020603050405020304" pitchFamily="18" charset="0"/>
-                <a:ea typeface="宋体" panose="02010600030101010101" pitchFamily="2" charset="-122"/>
-                <a:cs typeface="Times New Roman" panose="02020603050405020304" pitchFamily="18" charset="0"/>
-              </a:rPr>
-              <a:t>文件），因此，测试不同情况下单个</a:t>
-            </a:r>
-            <a:r>
-              <a:rPr lang="en-US" altLang="zh-CN" sz="1800" kern="100" dirty="0">
-                <a:effectLst/>
-                <a:latin typeface="Times New Roman" panose="02020603050405020304" pitchFamily="18" charset="0"/>
-                <a:ea typeface="宋体" panose="02010600030101010101" pitchFamily="2" charset="-122"/>
-              </a:rPr>
-              <a:t>Zone</a:t>
-            </a:r>
-            <a:r>
-              <a:rPr lang="zh-CN" altLang="zh-CN" sz="1800" kern="100" dirty="0">
-                <a:effectLst/>
-                <a:latin typeface="Times New Roman" panose="02020603050405020304" pitchFamily="18" charset="0"/>
-                <a:ea typeface="宋体" panose="02010600030101010101" pitchFamily="2" charset="-122"/>
-                <a:cs typeface="Times New Roman" panose="02020603050405020304" pitchFamily="18" charset="0"/>
-              </a:rPr>
-              <a:t>的性能很有意义。分别使用三种</a:t>
-            </a:r>
-            <a:r>
-              <a:rPr lang="en-US" altLang="zh-CN" sz="1800" kern="100" dirty="0">
-                <a:effectLst/>
-                <a:latin typeface="Times New Roman" panose="02020603050405020304" pitchFamily="18" charset="0"/>
-                <a:ea typeface="宋体" panose="02010600030101010101" pitchFamily="2" charset="-122"/>
-              </a:rPr>
-              <a:t>I/O</a:t>
-            </a:r>
-            <a:r>
-              <a:rPr lang="zh-CN" altLang="zh-CN" sz="1800" kern="100" dirty="0">
-                <a:effectLst/>
-                <a:latin typeface="Times New Roman" panose="02020603050405020304" pitchFamily="18" charset="0"/>
-                <a:ea typeface="宋体" panose="02010600030101010101" pitchFamily="2" charset="-122"/>
-                <a:cs typeface="Times New Roman" panose="02020603050405020304" pitchFamily="18" charset="0"/>
-              </a:rPr>
-              <a:t>引擎，在不同的块大小下进行单</a:t>
-            </a:r>
-            <a:r>
-              <a:rPr lang="en-US" altLang="zh-CN" sz="1800" kern="100" dirty="0">
-                <a:effectLst/>
-                <a:latin typeface="Times New Roman" panose="02020603050405020304" pitchFamily="18" charset="0"/>
-                <a:ea typeface="宋体" panose="02010600030101010101" pitchFamily="2" charset="-122"/>
-              </a:rPr>
-              <a:t>Zone</a:t>
-            </a:r>
-            <a:r>
-              <a:rPr lang="zh-CN" altLang="zh-CN" sz="1800" kern="100" dirty="0">
-                <a:effectLst/>
-                <a:latin typeface="Times New Roman" panose="02020603050405020304" pitchFamily="18" charset="0"/>
-                <a:ea typeface="宋体" panose="02010600030101010101" pitchFamily="2" charset="-122"/>
-                <a:cs typeface="Times New Roman" panose="02020603050405020304" pitchFamily="18" charset="0"/>
-              </a:rPr>
-              <a:t>写入测试</a:t>
-            </a:r>
-            <a:r>
-              <a:rPr lang="zh-CN" altLang="en-US" sz="1800" kern="100" dirty="0">
-                <a:effectLst/>
-                <a:latin typeface="Times New Roman" panose="02020603050405020304" pitchFamily="18" charset="0"/>
-                <a:ea typeface="宋体" panose="02010600030101010101" pitchFamily="2" charset="-122"/>
-                <a:cs typeface="Times New Roman" panose="02020603050405020304" pitchFamily="18" charset="0"/>
-              </a:rPr>
-              <a:t>，结果如下。</a:t>
-            </a:r>
-            <a:endParaRPr lang="zh-CN" altLang="en-US" dirty="0"/>
-          </a:p>
-        </p:txBody>
-      </p:sp>
-      <p:sp>
-        <p:nvSpPr>
-          <p:cNvPr id="27" name="文本框 26">
-            <a:extLst>
-              <a:ext uri="{FF2B5EF4-FFF2-40B4-BE49-F238E27FC236}">
-                <a16:creationId xmlns:a16="http://schemas.microsoft.com/office/drawing/2014/main" id="{82341366-4E61-45FA-B7C4-58EA1BEF8A57}"/>
+                <a16:creationId xmlns:a16="http://schemas.microsoft.com/office/drawing/2014/main" id="{F1042277-73A0-40B1-A307-CA4CF4858066}"/>
               </a:ext>
             </a:extLst>
           </p:cNvPr>
@@ -18159,7 +18461,7 @@
     </p:spTree>
     <p:extLst>
       <p:ext uri="{BB962C8B-B14F-4D97-AF65-F5344CB8AC3E}">
-        <p14:creationId xmlns:p14="http://schemas.microsoft.com/office/powerpoint/2010/main" val="3248152468"/>
+        <p14:creationId xmlns:p14="http://schemas.microsoft.com/office/powerpoint/2010/main" val="167858902"/>
       </p:ext>
     </p:extLst>
   </p:cSld>
@@ -18617,7 +18919,7 @@
         </p:nvSpPr>
         <p:spPr>
           <a:xfrm>
-            <a:off x="440055" y="1144352"/>
+            <a:off x="440055" y="1088390"/>
             <a:ext cx="6951980" cy="460375"/>
           </a:xfrm>
           <a:prstGeom prst="rect">
@@ -18632,14 +18934,24 @@
           <a:lstStyle/>
           <a:p>
             <a:r>
-              <a:rPr lang="zh-CN" altLang="en-US" sz="2400" dirty="0">
+              <a:rPr lang="en-US" altLang="zh-CN" sz="2400" dirty="0">
                 <a:solidFill>
                   <a:srgbClr val="4747BA"/>
                 </a:solidFill>
                 <a:ea typeface="+mn-lt"/>
                 <a:cs typeface="Times New Roman" panose="02020603050405020304" charset="0"/>
               </a:rPr>
-              <a:t>全盘写入测试</a:t>
+              <a:t>ZAFS</a:t>
+            </a:r>
+            <a:r>
+              <a:rPr lang="zh-CN" altLang="en-US" sz="2400" dirty="0">
+                <a:solidFill>
+                  <a:srgbClr val="4747BA"/>
+                </a:solidFill>
+                <a:ea typeface="+mn-lt"/>
+                <a:cs typeface="Times New Roman" panose="02020603050405020304" charset="0"/>
+              </a:rPr>
+              <a:t>评估</a:t>
             </a:r>
             <a:endParaRPr lang="en-US" altLang="zh-CN" sz="2400" dirty="0">
               <a:solidFill>
@@ -18704,305 +19016,12 @@
           </a:p>
         </p:txBody>
       </p:sp>
-      <p:sp>
-        <p:nvSpPr>
-          <p:cNvPr id="21" name="文本框 20">
+      <p:pic>
+        <p:nvPicPr>
+          <p:cNvPr id="16" name="图形 1">
             <a:extLst>
               <a:ext uri="{FF2B5EF4-FFF2-40B4-BE49-F238E27FC236}">
-                <a16:creationId xmlns:a16="http://schemas.microsoft.com/office/drawing/2014/main" id="{B73F8172-AEE1-4884-93B9-03D244E3AE0F}"/>
-              </a:ext>
-            </a:extLst>
-          </p:cNvPr>
-          <p:cNvSpPr txBox="1"/>
-          <p:nvPr/>
-        </p:nvSpPr>
-        <p:spPr>
-          <a:xfrm>
-            <a:off x="440055" y="1722906"/>
-            <a:ext cx="10543136" cy="923330"/>
-          </a:xfrm>
-          <a:prstGeom prst="rect">
-            <a:avLst/>
-          </a:prstGeom>
-          <a:noFill/>
-        </p:spPr>
-        <p:txBody>
-          <a:bodyPr wrap="square">
-            <a:spAutoFit/>
-          </a:bodyPr>
-          <a:lstStyle/>
-          <a:p>
-            <a:r>
-              <a:rPr lang="zh-CN" altLang="en-US" sz="1800" kern="100" dirty="0">
-                <a:effectLst/>
-                <a:latin typeface="Times New Roman" panose="02020603050405020304" pitchFamily="18" charset="0"/>
-                <a:ea typeface="宋体" panose="02010600030101010101" pitchFamily="2" charset="-122"/>
-                <a:cs typeface="Times New Roman" panose="02020603050405020304" pitchFamily="18" charset="0"/>
-              </a:rPr>
-              <a:t>为了评估不同块大小和线程数对写入速度和</a:t>
-            </a:r>
-            <a:r>
-              <a:rPr lang="en-US" altLang="zh-CN" sz="1800" kern="100" dirty="0">
-                <a:effectLst/>
-                <a:latin typeface="Times New Roman" panose="02020603050405020304" pitchFamily="18" charset="0"/>
-                <a:ea typeface="宋体" panose="02010600030101010101" pitchFamily="2" charset="-122"/>
-                <a:cs typeface="Times New Roman" panose="02020603050405020304" pitchFamily="18" charset="0"/>
-              </a:rPr>
-              <a:t>IOPS</a:t>
-            </a:r>
-            <a:r>
-              <a:rPr lang="zh-CN" altLang="en-US" sz="1800" kern="100" dirty="0">
-                <a:effectLst/>
-                <a:latin typeface="Times New Roman" panose="02020603050405020304" pitchFamily="18" charset="0"/>
-                <a:ea typeface="宋体" panose="02010600030101010101" pitchFamily="2" charset="-122"/>
-                <a:cs typeface="Times New Roman" panose="02020603050405020304" pitchFamily="18" charset="0"/>
-              </a:rPr>
-              <a:t>的影响，我们设计并实施了一系列测试。测试配置包括使</a:t>
-            </a:r>
-            <a:r>
-              <a:rPr lang="en-US" altLang="zh-CN" sz="1800" kern="100" dirty="0" err="1">
-                <a:effectLst/>
-                <a:latin typeface="Times New Roman" panose="02020603050405020304" pitchFamily="18" charset="0"/>
-                <a:ea typeface="宋体" panose="02010600030101010101" pitchFamily="2" charset="-122"/>
-                <a:cs typeface="Times New Roman" panose="02020603050405020304" pitchFamily="18" charset="0"/>
-              </a:rPr>
-              <a:t>io_uring</a:t>
-            </a:r>
-            <a:r>
-              <a:rPr lang="zh-CN" altLang="en-US" sz="1800" kern="100" dirty="0">
-                <a:effectLst/>
-                <a:latin typeface="Times New Roman" panose="02020603050405020304" pitchFamily="18" charset="0"/>
-                <a:ea typeface="宋体" panose="02010600030101010101" pitchFamily="2" charset="-122"/>
-                <a:cs typeface="Times New Roman" panose="02020603050405020304" pitchFamily="18" charset="0"/>
-              </a:rPr>
-              <a:t>作为</a:t>
-            </a:r>
-            <a:r>
-              <a:rPr lang="en-US" altLang="zh-CN" sz="1800" kern="100" dirty="0">
-                <a:effectLst/>
-                <a:latin typeface="Times New Roman" panose="02020603050405020304" pitchFamily="18" charset="0"/>
-                <a:ea typeface="宋体" panose="02010600030101010101" pitchFamily="2" charset="-122"/>
-                <a:cs typeface="Times New Roman" panose="02020603050405020304" pitchFamily="18" charset="0"/>
-              </a:rPr>
-              <a:t>I/O</a:t>
-            </a:r>
-            <a:r>
-              <a:rPr lang="zh-CN" altLang="en-US" sz="1800" kern="100" dirty="0">
-                <a:effectLst/>
-                <a:latin typeface="Times New Roman" panose="02020603050405020304" pitchFamily="18" charset="0"/>
-                <a:ea typeface="宋体" panose="02010600030101010101" pitchFamily="2" charset="-122"/>
-                <a:cs typeface="Times New Roman" panose="02020603050405020304" pitchFamily="18" charset="0"/>
-              </a:rPr>
-              <a:t>引擎，并在五种不同的块大小（</a:t>
-            </a:r>
-            <a:r>
-              <a:rPr lang="en-US" altLang="zh-CN" sz="1800" kern="100" dirty="0">
-                <a:effectLst/>
-                <a:latin typeface="Times New Roman" panose="02020603050405020304" pitchFamily="18" charset="0"/>
-                <a:ea typeface="宋体" panose="02010600030101010101" pitchFamily="2" charset="-122"/>
-                <a:cs typeface="Times New Roman" panose="02020603050405020304" pitchFamily="18" charset="0"/>
-              </a:rPr>
-              <a:t>4k</a:t>
-            </a:r>
-            <a:r>
-              <a:rPr lang="zh-CN" altLang="en-US" sz="1800" kern="100" dirty="0">
-                <a:effectLst/>
-                <a:latin typeface="Times New Roman" panose="02020603050405020304" pitchFamily="18" charset="0"/>
-                <a:ea typeface="宋体" panose="02010600030101010101" pitchFamily="2" charset="-122"/>
-                <a:cs typeface="Times New Roman" panose="02020603050405020304" pitchFamily="18" charset="0"/>
-              </a:rPr>
-              <a:t>、</a:t>
-            </a:r>
-            <a:r>
-              <a:rPr lang="en-US" altLang="zh-CN" sz="1800" kern="100" dirty="0">
-                <a:effectLst/>
-                <a:latin typeface="Times New Roman" panose="02020603050405020304" pitchFamily="18" charset="0"/>
-                <a:ea typeface="宋体" panose="02010600030101010101" pitchFamily="2" charset="-122"/>
-                <a:cs typeface="Times New Roman" panose="02020603050405020304" pitchFamily="18" charset="0"/>
-              </a:rPr>
-              <a:t>16k</a:t>
-            </a:r>
-            <a:r>
-              <a:rPr lang="zh-CN" altLang="en-US" sz="1800" kern="100" dirty="0">
-                <a:effectLst/>
-                <a:latin typeface="Times New Roman" panose="02020603050405020304" pitchFamily="18" charset="0"/>
-                <a:ea typeface="宋体" panose="02010600030101010101" pitchFamily="2" charset="-122"/>
-                <a:cs typeface="Times New Roman" panose="02020603050405020304" pitchFamily="18" charset="0"/>
-              </a:rPr>
-              <a:t>、</a:t>
-            </a:r>
-            <a:r>
-              <a:rPr lang="en-US" altLang="zh-CN" sz="1800" kern="100" dirty="0">
-                <a:effectLst/>
-                <a:latin typeface="Times New Roman" panose="02020603050405020304" pitchFamily="18" charset="0"/>
-                <a:ea typeface="宋体" panose="02010600030101010101" pitchFamily="2" charset="-122"/>
-                <a:cs typeface="Times New Roman" panose="02020603050405020304" pitchFamily="18" charset="0"/>
-              </a:rPr>
-              <a:t>32k</a:t>
-            </a:r>
-            <a:r>
-              <a:rPr lang="zh-CN" altLang="en-US" sz="1800" kern="100" dirty="0">
-                <a:effectLst/>
-                <a:latin typeface="Times New Roman" panose="02020603050405020304" pitchFamily="18" charset="0"/>
-                <a:ea typeface="宋体" panose="02010600030101010101" pitchFamily="2" charset="-122"/>
-                <a:cs typeface="Times New Roman" panose="02020603050405020304" pitchFamily="18" charset="0"/>
-              </a:rPr>
-              <a:t>、</a:t>
-            </a:r>
-            <a:r>
-              <a:rPr lang="en-US" altLang="zh-CN" sz="1800" kern="100" dirty="0">
-                <a:effectLst/>
-                <a:latin typeface="Times New Roman" panose="02020603050405020304" pitchFamily="18" charset="0"/>
-                <a:ea typeface="宋体" panose="02010600030101010101" pitchFamily="2" charset="-122"/>
-                <a:cs typeface="Times New Roman" panose="02020603050405020304" pitchFamily="18" charset="0"/>
-              </a:rPr>
-              <a:t>64k</a:t>
-            </a:r>
-            <a:r>
-              <a:rPr lang="zh-CN" altLang="en-US" sz="1800" kern="100" dirty="0">
-                <a:effectLst/>
-                <a:latin typeface="Times New Roman" panose="02020603050405020304" pitchFamily="18" charset="0"/>
-                <a:ea typeface="宋体" panose="02010600030101010101" pitchFamily="2" charset="-122"/>
-                <a:cs typeface="Times New Roman" panose="02020603050405020304" pitchFamily="18" charset="0"/>
-              </a:rPr>
-              <a:t>、</a:t>
-            </a:r>
-            <a:r>
-              <a:rPr lang="en-US" altLang="zh-CN" sz="1800" kern="100" dirty="0">
-                <a:effectLst/>
-                <a:latin typeface="Times New Roman" panose="02020603050405020304" pitchFamily="18" charset="0"/>
-                <a:ea typeface="宋体" panose="02010600030101010101" pitchFamily="2" charset="-122"/>
-                <a:cs typeface="Times New Roman" panose="02020603050405020304" pitchFamily="18" charset="0"/>
-              </a:rPr>
-              <a:t>128k</a:t>
-            </a:r>
-            <a:r>
-              <a:rPr lang="zh-CN" altLang="en-US" sz="1800" kern="100" dirty="0">
-                <a:effectLst/>
-                <a:latin typeface="Times New Roman" panose="02020603050405020304" pitchFamily="18" charset="0"/>
-                <a:ea typeface="宋体" panose="02010600030101010101" pitchFamily="2" charset="-122"/>
-                <a:cs typeface="Times New Roman" panose="02020603050405020304" pitchFamily="18" charset="0"/>
-              </a:rPr>
-              <a:t>、</a:t>
-            </a:r>
-            <a:r>
-              <a:rPr lang="en-US" altLang="zh-CN" sz="1800" kern="100" dirty="0">
-                <a:effectLst/>
-                <a:latin typeface="Times New Roman" panose="02020603050405020304" pitchFamily="18" charset="0"/>
-                <a:ea typeface="宋体" panose="02010600030101010101" pitchFamily="2" charset="-122"/>
-                <a:cs typeface="Times New Roman" panose="02020603050405020304" pitchFamily="18" charset="0"/>
-              </a:rPr>
-              <a:t>256k</a:t>
-            </a:r>
-            <a:r>
-              <a:rPr lang="zh-CN" altLang="en-US" sz="1800" kern="100" dirty="0">
-                <a:effectLst/>
-                <a:latin typeface="Times New Roman" panose="02020603050405020304" pitchFamily="18" charset="0"/>
-                <a:ea typeface="宋体" panose="02010600030101010101" pitchFamily="2" charset="-122"/>
-                <a:cs typeface="Times New Roman" panose="02020603050405020304" pitchFamily="18" charset="0"/>
-              </a:rPr>
-              <a:t>）和五个不同的线程数（</a:t>
-            </a:r>
-            <a:r>
-              <a:rPr lang="en-US" altLang="zh-CN" sz="1800" kern="100" dirty="0">
-                <a:effectLst/>
-                <a:latin typeface="Times New Roman" panose="02020603050405020304" pitchFamily="18" charset="0"/>
-                <a:ea typeface="宋体" panose="02010600030101010101" pitchFamily="2" charset="-122"/>
-                <a:cs typeface="Times New Roman" panose="02020603050405020304" pitchFamily="18" charset="0"/>
-              </a:rPr>
-              <a:t>1</a:t>
-            </a:r>
-            <a:r>
-              <a:rPr lang="zh-CN" altLang="en-US" sz="1800" kern="100" dirty="0">
-                <a:effectLst/>
-                <a:latin typeface="Times New Roman" panose="02020603050405020304" pitchFamily="18" charset="0"/>
-                <a:ea typeface="宋体" panose="02010600030101010101" pitchFamily="2" charset="-122"/>
-                <a:cs typeface="Times New Roman" panose="02020603050405020304" pitchFamily="18" charset="0"/>
-              </a:rPr>
-              <a:t>、</a:t>
-            </a:r>
-            <a:r>
-              <a:rPr lang="en-US" altLang="zh-CN" sz="1800" kern="100" dirty="0">
-                <a:effectLst/>
-                <a:latin typeface="Times New Roman" panose="02020603050405020304" pitchFamily="18" charset="0"/>
-                <a:ea typeface="宋体" panose="02010600030101010101" pitchFamily="2" charset="-122"/>
-                <a:cs typeface="Times New Roman" panose="02020603050405020304" pitchFamily="18" charset="0"/>
-              </a:rPr>
-              <a:t>2</a:t>
-            </a:r>
-            <a:r>
-              <a:rPr lang="zh-CN" altLang="en-US" sz="1800" kern="100" dirty="0">
-                <a:effectLst/>
-                <a:latin typeface="Times New Roman" panose="02020603050405020304" pitchFamily="18" charset="0"/>
-                <a:ea typeface="宋体" panose="02010600030101010101" pitchFamily="2" charset="-122"/>
-                <a:cs typeface="Times New Roman" panose="02020603050405020304" pitchFamily="18" charset="0"/>
-              </a:rPr>
-              <a:t>、</a:t>
-            </a:r>
-            <a:r>
-              <a:rPr lang="en-US" altLang="zh-CN" sz="1800" kern="100" dirty="0">
-                <a:effectLst/>
-                <a:latin typeface="Times New Roman" panose="02020603050405020304" pitchFamily="18" charset="0"/>
-                <a:ea typeface="宋体" panose="02010600030101010101" pitchFamily="2" charset="-122"/>
-                <a:cs typeface="Times New Roman" panose="02020603050405020304" pitchFamily="18" charset="0"/>
-              </a:rPr>
-              <a:t>4</a:t>
-            </a:r>
-            <a:r>
-              <a:rPr lang="zh-CN" altLang="en-US" sz="1800" kern="100" dirty="0">
-                <a:effectLst/>
-                <a:latin typeface="Times New Roman" panose="02020603050405020304" pitchFamily="18" charset="0"/>
-                <a:ea typeface="宋体" panose="02010600030101010101" pitchFamily="2" charset="-122"/>
-                <a:cs typeface="Times New Roman" panose="02020603050405020304" pitchFamily="18" charset="0"/>
-              </a:rPr>
-              <a:t>、</a:t>
-            </a:r>
-            <a:r>
-              <a:rPr lang="en-US" altLang="zh-CN" sz="1800" kern="100" dirty="0">
-                <a:effectLst/>
-                <a:latin typeface="Times New Roman" panose="02020603050405020304" pitchFamily="18" charset="0"/>
-                <a:ea typeface="宋体" panose="02010600030101010101" pitchFamily="2" charset="-122"/>
-                <a:cs typeface="Times New Roman" panose="02020603050405020304" pitchFamily="18" charset="0"/>
-              </a:rPr>
-              <a:t>8</a:t>
-            </a:r>
-            <a:r>
-              <a:rPr lang="zh-CN" altLang="en-US" sz="1800" kern="100" dirty="0">
-                <a:effectLst/>
-                <a:latin typeface="Times New Roman" panose="02020603050405020304" pitchFamily="18" charset="0"/>
-                <a:ea typeface="宋体" panose="02010600030101010101" pitchFamily="2" charset="-122"/>
-                <a:cs typeface="Times New Roman" panose="02020603050405020304" pitchFamily="18" charset="0"/>
-              </a:rPr>
-              <a:t>、</a:t>
-            </a:r>
-            <a:r>
-              <a:rPr lang="en-US" altLang="zh-CN" sz="1800" kern="100" dirty="0">
-                <a:effectLst/>
-                <a:latin typeface="Times New Roman" panose="02020603050405020304" pitchFamily="18" charset="0"/>
-                <a:ea typeface="宋体" panose="02010600030101010101" pitchFamily="2" charset="-122"/>
-                <a:cs typeface="Times New Roman" panose="02020603050405020304" pitchFamily="18" charset="0"/>
-              </a:rPr>
-              <a:t>16</a:t>
-            </a:r>
-            <a:r>
-              <a:rPr lang="zh-CN" altLang="en-US" sz="1800" kern="100" dirty="0">
-                <a:effectLst/>
-                <a:latin typeface="Times New Roman" panose="02020603050405020304" pitchFamily="18" charset="0"/>
-                <a:ea typeface="宋体" panose="02010600030101010101" pitchFamily="2" charset="-122"/>
-                <a:cs typeface="Times New Roman" panose="02020603050405020304" pitchFamily="18" charset="0"/>
-              </a:rPr>
-              <a:t>）下进行测试。</a:t>
-            </a:r>
-            <a:endParaRPr lang="zh-CN" altLang="en-US" dirty="0"/>
-          </a:p>
-        </p:txBody>
-      </p:sp>
-      <p:pic>
-        <p:nvPicPr>
-          <p:cNvPr id="25" name="图形 11">
-            <a:extLst>
-              <a:ext uri="{FF2B5EF4-FFF2-40B4-BE49-F238E27FC236}">
-                <a16:creationId xmlns:a16="http://schemas.microsoft.com/office/drawing/2014/main" id="{F3724198-0E58-4601-9600-635831736314}"/>
+                <a16:creationId xmlns:a16="http://schemas.microsoft.com/office/drawing/2014/main" id="{85C8F1B6-20F2-450A-83C0-254C48F6987A}"/>
               </a:ext>
             </a:extLst>
           </p:cNvPr>
@@ -19023,8 +19042,8 @@
         </p:blipFill>
         <p:spPr>
           <a:xfrm>
-            <a:off x="6145748" y="2764415"/>
-            <a:ext cx="4777304" cy="3184678"/>
+            <a:off x="281680" y="2678876"/>
+            <a:ext cx="4191000" cy="2913380"/>
           </a:xfrm>
           <a:prstGeom prst="rect">
             <a:avLst/>
@@ -19033,10 +19052,10 @@
       </p:pic>
       <p:pic>
         <p:nvPicPr>
-          <p:cNvPr id="27" name="图形 43">
+          <p:cNvPr id="19" name="图形 45">
             <a:extLst>
               <a:ext uri="{FF2B5EF4-FFF2-40B4-BE49-F238E27FC236}">
-                <a16:creationId xmlns:a16="http://schemas.microsoft.com/office/drawing/2014/main" id="{AABCD2C3-6D30-435E-9376-7BD37CCBFAEA}"/>
+                <a16:creationId xmlns:a16="http://schemas.microsoft.com/office/drawing/2014/main" id="{3A8141DC-2B35-4FEA-9F94-EB74B2B3E307}"/>
               </a:ext>
             </a:extLst>
           </p:cNvPr>
@@ -19044,11 +19063,8 @@
           <p:nvPr/>
         </p:nvPicPr>
         <p:blipFill>
-          <a:blip r:embed="rId7" cstate="print">
+          <a:blip r:embed="rId7">
             <a:extLst>
-              <a:ext uri="{28A0092B-C50C-407E-A947-70E740481C1C}">
-                <a14:useLocalDpi xmlns:a14="http://schemas.microsoft.com/office/drawing/2010/main" val="0"/>
-              </a:ext>
               <a:ext uri="{96DAC541-7B7A-43D3-8B79-37D633B846F1}">
                 <asvg:svgBlip xmlns:asvg="http://schemas.microsoft.com/office/drawing/2016/SVG/main" r:embed="rId8"/>
               </a:ext>
@@ -19060,8 +19076,8 @@
         </p:blipFill>
         <p:spPr>
           <a:xfrm>
-            <a:off x="560692" y="2764415"/>
-            <a:ext cx="4993200" cy="3184678"/>
+            <a:off x="6595114" y="2662352"/>
+            <a:ext cx="4267200" cy="2946429"/>
           </a:xfrm>
           <a:prstGeom prst="rect">
             <a:avLst/>
@@ -19070,10 +19086,10 @@
       </p:pic>
       <p:sp>
         <p:nvSpPr>
-          <p:cNvPr id="30" name="文本框 29">
+          <p:cNvPr id="25" name="文本框 24">
             <a:extLst>
               <a:ext uri="{FF2B5EF4-FFF2-40B4-BE49-F238E27FC236}">
-                <a16:creationId xmlns:a16="http://schemas.microsoft.com/office/drawing/2014/main" id="{F1042277-73A0-40B1-A307-CA4CF4858066}"/>
+                <a16:creationId xmlns:a16="http://schemas.microsoft.com/office/drawing/2014/main" id="{9B8BFC0A-1446-4D70-A7AD-1DF215C88C83}"/>
               </a:ext>
             </a:extLst>
           </p:cNvPr>
@@ -19138,10 +19154,194 @@
           </a:p>
         </p:txBody>
       </p:sp>
+      <p:sp>
+        <p:nvSpPr>
+          <p:cNvPr id="31" name="文本框 30">
+            <a:extLst>
+              <a:ext uri="{FF2B5EF4-FFF2-40B4-BE49-F238E27FC236}">
+                <a16:creationId xmlns:a16="http://schemas.microsoft.com/office/drawing/2014/main" id="{1229ABD9-9E1D-43F9-BDFB-CFD6625EA974}"/>
+              </a:ext>
+            </a:extLst>
+          </p:cNvPr>
+          <p:cNvSpPr txBox="1"/>
+          <p:nvPr/>
+        </p:nvSpPr>
+        <p:spPr>
+          <a:xfrm>
+            <a:off x="506614" y="1691823"/>
+            <a:ext cx="3330171" cy="827471"/>
+          </a:xfrm>
+          <a:prstGeom prst="rect">
+            <a:avLst/>
+          </a:prstGeom>
+          <a:noFill/>
+        </p:spPr>
+        <p:txBody>
+          <a:bodyPr wrap="square">
+            <a:spAutoFit/>
+          </a:bodyPr>
+          <a:lstStyle/>
+          <a:p>
+            <a:pPr>
+              <a:lnSpc>
+                <a:spcPct val="150000"/>
+              </a:lnSpc>
+            </a:pPr>
+            <a:r>
+              <a:rPr lang="en-US" altLang="zh-CN" sz="1700" kern="100" dirty="0">
+                <a:latin typeface="Times New Roman" panose="02020603050405020304" pitchFamily="18" charset="0"/>
+                <a:ea typeface="宋体" panose="02010600030101010101" pitchFamily="2" charset="-122"/>
+                <a:cs typeface="Times New Roman" panose="02020603050405020304" pitchFamily="18" charset="0"/>
+              </a:rPr>
+              <a:t>(1)</a:t>
+            </a:r>
+            <a:r>
+              <a:rPr lang="zh-CN" altLang="en-US" sz="1700" kern="100" dirty="0">
+                <a:latin typeface="Times New Roman" panose="02020603050405020304" pitchFamily="18" charset="0"/>
+                <a:ea typeface="宋体" panose="02010600030101010101" pitchFamily="2" charset="-122"/>
+                <a:cs typeface="Times New Roman" panose="02020603050405020304" pitchFamily="18" charset="0"/>
+              </a:rPr>
+              <a:t>利用</a:t>
+            </a:r>
+            <a:r>
+              <a:rPr lang="en-US" altLang="zh-CN" sz="1700" kern="100" dirty="0" err="1">
+                <a:latin typeface="Times New Roman" panose="02020603050405020304" pitchFamily="18" charset="0"/>
+                <a:ea typeface="宋体" panose="02010600030101010101" pitchFamily="2" charset="-122"/>
+                <a:cs typeface="Times New Roman" panose="02020603050405020304" pitchFamily="18" charset="0"/>
+              </a:rPr>
+              <a:t>RocksDB</a:t>
+            </a:r>
+            <a:r>
+              <a:rPr lang="zh-CN" altLang="en-US" sz="1700" kern="100" dirty="0">
+                <a:latin typeface="Times New Roman" panose="02020603050405020304" pitchFamily="18" charset="0"/>
+                <a:ea typeface="宋体" panose="02010600030101010101" pitchFamily="2" charset="-122"/>
+                <a:cs typeface="Times New Roman" panose="02020603050405020304" pitchFamily="18" charset="0"/>
+              </a:rPr>
+              <a:t>的</a:t>
+            </a:r>
+            <a:r>
+              <a:rPr lang="en-US" altLang="zh-CN" sz="1700" kern="100" dirty="0">
+                <a:latin typeface="Times New Roman" panose="02020603050405020304" pitchFamily="18" charset="0"/>
+                <a:ea typeface="宋体" panose="02010600030101010101" pitchFamily="2" charset="-122"/>
+                <a:cs typeface="Times New Roman" panose="02020603050405020304" pitchFamily="18" charset="0"/>
+              </a:rPr>
+              <a:t>benchmark</a:t>
+            </a:r>
+            <a:r>
+              <a:rPr lang="zh-CN" altLang="en-US" sz="1700" kern="100" dirty="0">
+                <a:latin typeface="Times New Roman" panose="02020603050405020304" pitchFamily="18" charset="0"/>
+                <a:ea typeface="宋体" panose="02010600030101010101" pitchFamily="2" charset="-122"/>
+                <a:cs typeface="Times New Roman" panose="02020603050405020304" pitchFamily="18" charset="0"/>
+              </a:rPr>
+              <a:t>工具，进行</a:t>
+            </a:r>
+            <a:r>
+              <a:rPr lang="en-US" altLang="zh-CN" sz="1700" kern="100" dirty="0">
+                <a:latin typeface="Times New Roman" panose="02020603050405020304" pitchFamily="18" charset="0"/>
+                <a:ea typeface="宋体" panose="02010600030101010101" pitchFamily="2" charset="-122"/>
+                <a:cs typeface="Times New Roman" panose="02020603050405020304" pitchFamily="18" charset="0"/>
+              </a:rPr>
+              <a:t>4KiB</a:t>
+            </a:r>
+            <a:r>
+              <a:rPr lang="zh-CN" altLang="en-US" sz="1700" kern="100" dirty="0">
+                <a:latin typeface="Times New Roman" panose="02020603050405020304" pitchFamily="18" charset="0"/>
+                <a:ea typeface="宋体" panose="02010600030101010101" pitchFamily="2" charset="-122"/>
+                <a:cs typeface="Times New Roman" panose="02020603050405020304" pitchFamily="18" charset="0"/>
+              </a:rPr>
+              <a:t>的</a:t>
+            </a:r>
+            <a:r>
+              <a:rPr lang="en-US" altLang="zh-CN" sz="1700" kern="100" dirty="0" err="1">
+                <a:latin typeface="Times New Roman" panose="02020603050405020304" pitchFamily="18" charset="0"/>
+                <a:ea typeface="宋体" panose="02010600030101010101" pitchFamily="2" charset="-122"/>
+                <a:cs typeface="Times New Roman" panose="02020603050405020304" pitchFamily="18" charset="0"/>
+              </a:rPr>
+              <a:t>fillrandom</a:t>
+            </a:r>
+            <a:r>
+              <a:rPr lang="zh-CN" altLang="en-US" sz="1700" kern="100" dirty="0">
+                <a:latin typeface="Times New Roman" panose="02020603050405020304" pitchFamily="18" charset="0"/>
+                <a:ea typeface="宋体" panose="02010600030101010101" pitchFamily="2" charset="-122"/>
+                <a:cs typeface="Times New Roman" panose="02020603050405020304" pitchFamily="18" charset="0"/>
+              </a:rPr>
+              <a:t>测试。</a:t>
+            </a:r>
+          </a:p>
+        </p:txBody>
+      </p:sp>
+      <p:sp>
+        <p:nvSpPr>
+          <p:cNvPr id="33" name="文本框 32">
+            <a:extLst>
+              <a:ext uri="{FF2B5EF4-FFF2-40B4-BE49-F238E27FC236}">
+                <a16:creationId xmlns:a16="http://schemas.microsoft.com/office/drawing/2014/main" id="{6CE3F262-7945-459F-9B02-3BAE12E266AB}"/>
+              </a:ext>
+            </a:extLst>
+          </p:cNvPr>
+          <p:cNvSpPr txBox="1"/>
+          <p:nvPr/>
+        </p:nvSpPr>
+        <p:spPr>
+          <a:xfrm>
+            <a:off x="6882622" y="1688796"/>
+            <a:ext cx="3303555" cy="435056"/>
+          </a:xfrm>
+          <a:prstGeom prst="rect">
+            <a:avLst/>
+          </a:prstGeom>
+          <a:noFill/>
+        </p:spPr>
+        <p:txBody>
+          <a:bodyPr wrap="square">
+            <a:spAutoFit/>
+          </a:bodyPr>
+          <a:lstStyle/>
+          <a:p>
+            <a:pPr>
+              <a:lnSpc>
+                <a:spcPct val="150000"/>
+              </a:lnSpc>
+            </a:pPr>
+            <a:r>
+              <a:rPr lang="en-US" altLang="zh-CN" sz="1700" kern="100" dirty="0">
+                <a:latin typeface="Times New Roman" panose="02020603050405020304" pitchFamily="18" charset="0"/>
+                <a:ea typeface="宋体" panose="02010600030101010101" pitchFamily="2" charset="-122"/>
+                <a:cs typeface="Times New Roman" panose="02020603050405020304" pitchFamily="18" charset="0"/>
+              </a:rPr>
+              <a:t>(2)ZAFS</a:t>
+            </a:r>
+            <a:r>
+              <a:rPr lang="zh-CN" altLang="en-US" sz="1700" kern="100" dirty="0">
+                <a:latin typeface="Times New Roman" panose="02020603050405020304" pitchFamily="18" charset="0"/>
+                <a:ea typeface="宋体" panose="02010600030101010101" pitchFamily="2" charset="-122"/>
+                <a:cs typeface="Times New Roman" panose="02020603050405020304" pitchFamily="18" charset="0"/>
+              </a:rPr>
+              <a:t>与</a:t>
+            </a:r>
+            <a:r>
+              <a:rPr lang="en-US" altLang="zh-CN" sz="1700" kern="100" dirty="0" err="1">
+                <a:latin typeface="Times New Roman" panose="02020603050405020304" pitchFamily="18" charset="0"/>
+                <a:ea typeface="宋体" panose="02010600030101010101" pitchFamily="2" charset="-122"/>
+                <a:cs typeface="Times New Roman" panose="02020603050405020304" pitchFamily="18" charset="0"/>
+              </a:rPr>
+              <a:t>ZenFS</a:t>
+            </a:r>
+            <a:r>
+              <a:rPr lang="zh-CN" altLang="en-US" sz="1700" kern="100" dirty="0">
+                <a:latin typeface="Times New Roman" panose="02020603050405020304" pitchFamily="18" charset="0"/>
+                <a:ea typeface="宋体" panose="02010600030101010101" pitchFamily="2" charset="-122"/>
+                <a:cs typeface="Times New Roman" panose="02020603050405020304" pitchFamily="18" charset="0"/>
+              </a:rPr>
+              <a:t>的恢复时间对比</a:t>
+            </a:r>
+          </a:p>
+        </p:txBody>
+      </p:sp>
     </p:spTree>
     <p:extLst>
       <p:ext uri="{BB962C8B-B14F-4D97-AF65-F5344CB8AC3E}">
-        <p14:creationId xmlns:p14="http://schemas.microsoft.com/office/powerpoint/2010/main" val="167858902"/>
+        <p14:creationId xmlns:p14="http://schemas.microsoft.com/office/powerpoint/2010/main" val="2386150555"/>
       </p:ext>
     </p:extLst>
   </p:cSld>
